--- a/NCT-Slide-Template-Corp-Demo.pptx
+++ b/NCT-Slide-Template-Corp-Demo.pptx
@@ -24,6 +24,7 @@
     <p:sldId id="272" r:id="rId18"/>
     <p:sldId id="273" r:id="rId19"/>
     <p:sldId id="274" r:id="rId20"/>
+    <p:sldId id="275" r:id="rId21"/>
   </p:sldIdLst>
   <p:sldSz cx="12192000" cy="6858000"/>
   <p:notesSz cx="6858000" cy="9144000"/>
@@ -485,7 +486,7 @@
             <a:avLst/>
           </a:prstGeom>
           <a:solidFill>
-            <a:srgbClr val="1E5473">
+            <a:srgbClr val="006666">
               <a:alpha val="10000"/>
             </a:srgbClr>
           </a:solidFill>
@@ -516,7 +517,7 @@
             <a:avLst/>
           </a:prstGeom>
           <a:solidFill>
-            <a:srgbClr val="1E5473">
+            <a:srgbClr val="006666">
               <a:alpha val="33000"/>
             </a:srgbClr>
           </a:solidFill>
@@ -547,7 +548,7 @@
             <a:avLst/>
           </a:prstGeom>
           <a:solidFill>
-            <a:srgbClr val="1E5473">
+            <a:srgbClr val="006666">
               <a:alpha val="75000"/>
             </a:srgbClr>
           </a:solidFill>
@@ -578,7 +579,7 @@
             <a:avLst/>
           </a:prstGeom>
           <a:solidFill>
-            <a:srgbClr val="1E5473">
+            <a:srgbClr val="006666">
               <a:alpha val="15000"/>
             </a:srgbClr>
           </a:solidFill>
@@ -609,7 +610,7 @@
             <a:avLst/>
           </a:prstGeom>
           <a:solidFill>
-            <a:srgbClr val="1E5473">
+            <a:srgbClr val="006666">
               <a:alpha val="5000"/>
             </a:srgbClr>
           </a:solidFill>
@@ -640,7 +641,7 @@
             <a:avLst/>
           </a:prstGeom>
           <a:solidFill>
-            <a:srgbClr val="1E5473">
+            <a:srgbClr val="006666">
               <a:alpha val="5000"/>
             </a:srgbClr>
           </a:solidFill>
@@ -671,7 +672,7 @@
             <a:avLst/>
           </a:prstGeom>
           <a:solidFill>
-            <a:srgbClr val="1E5473">
+            <a:srgbClr val="006666">
               <a:alpha val="60000"/>
             </a:srgbClr>
           </a:solidFill>
@@ -702,7 +703,7 @@
             <a:avLst/>
           </a:prstGeom>
           <a:solidFill>
-            <a:srgbClr val="1E5473">
+            <a:srgbClr val="006666">
               <a:alpha val="50000"/>
             </a:srgbClr>
           </a:solidFill>
@@ -733,7 +734,7 @@
             <a:avLst/>
           </a:prstGeom>
           <a:solidFill>
-            <a:srgbClr val="1E5473">
+            <a:srgbClr val="006666">
               <a:alpha val="60000"/>
             </a:srgbClr>
           </a:solidFill>
@@ -764,7 +765,7 @@
             <a:avLst/>
           </a:prstGeom>
           <a:solidFill>
-            <a:srgbClr val="1E5473">
+            <a:srgbClr val="006666">
               <a:alpha val="5000"/>
             </a:srgbClr>
           </a:solidFill>
@@ -795,7 +796,7 @@
             <a:avLst/>
           </a:prstGeom>
           <a:solidFill>
-            <a:srgbClr val="1E5473">
+            <a:srgbClr val="006666">
               <a:alpha val="5000"/>
             </a:srgbClr>
           </a:solidFill>
@@ -826,7 +827,7 @@
             <a:avLst/>
           </a:prstGeom>
           <a:solidFill>
-            <a:srgbClr val="1E5473">
+            <a:srgbClr val="006666">
               <a:alpha val="20000"/>
             </a:srgbClr>
           </a:solidFill>
@@ -857,7 +858,7 @@
             <a:avLst/>
           </a:prstGeom>
           <a:solidFill>
-            <a:srgbClr val="1E5473">
+            <a:srgbClr val="006666">
               <a:alpha val="10000"/>
             </a:srgbClr>
           </a:solidFill>
@@ -888,7 +889,7 @@
             <a:avLst/>
           </a:prstGeom>
           <a:solidFill>
-            <a:srgbClr val="1E5473">
+            <a:srgbClr val="006666">
               <a:alpha val="50000"/>
             </a:srgbClr>
           </a:solidFill>
@@ -919,7 +920,7 @@
             <a:avLst/>
           </a:prstGeom>
           <a:solidFill>
-            <a:srgbClr val="1E5473">
+            <a:srgbClr val="006666">
               <a:alpha val="5000"/>
             </a:srgbClr>
           </a:solidFill>
@@ -950,7 +951,7 @@
             <a:avLst/>
           </a:prstGeom>
           <a:solidFill>
-            <a:srgbClr val="1E5473">
+            <a:srgbClr val="006666">
               <a:alpha val="20000"/>
             </a:srgbClr>
           </a:solidFill>
@@ -981,7 +982,7 @@
             <a:avLst/>
           </a:prstGeom>
           <a:solidFill>
-            <a:srgbClr val="1E5473">
+            <a:srgbClr val="006666">
               <a:alpha val="50000"/>
             </a:srgbClr>
           </a:solidFill>
@@ -1012,7 +1013,7 @@
             <a:avLst/>
           </a:prstGeom>
           <a:solidFill>
-            <a:srgbClr val="1E5473">
+            <a:srgbClr val="006666">
               <a:alpha val="5000"/>
             </a:srgbClr>
           </a:solidFill>
@@ -1043,7 +1044,7 @@
             <a:avLst/>
           </a:prstGeom>
           <a:solidFill>
-            <a:srgbClr val="1E5473">
+            <a:srgbClr val="006666">
               <a:alpha val="40000"/>
             </a:srgbClr>
           </a:solidFill>
@@ -1074,7 +1075,7 @@
             <a:avLst/>
           </a:prstGeom>
           <a:solidFill>
-            <a:srgbClr val="1E5473">
+            <a:srgbClr val="006666">
               <a:alpha val="5000"/>
             </a:srgbClr>
           </a:solidFill>
@@ -1105,7 +1106,7 @@
             <a:avLst/>
           </a:prstGeom>
           <a:solidFill>
-            <a:srgbClr val="1E5473">
+            <a:srgbClr val="006666">
               <a:alpha val="5000"/>
             </a:srgbClr>
           </a:solidFill>
@@ -1136,7 +1137,7 @@
             <a:avLst/>
           </a:prstGeom>
           <a:solidFill>
-            <a:srgbClr val="1E5473">
+            <a:srgbClr val="006666">
               <a:alpha val="10000"/>
             </a:srgbClr>
           </a:solidFill>
@@ -1167,7 +1168,7 @@
             <a:avLst/>
           </a:prstGeom>
           <a:solidFill>
-            <a:srgbClr val="1E5473">
+            <a:srgbClr val="006666">
               <a:alpha val="50000"/>
             </a:srgbClr>
           </a:solidFill>
@@ -1198,7 +1199,7 @@
             <a:avLst/>
           </a:prstGeom>
           <a:solidFill>
-            <a:srgbClr val="1E5473">
+            <a:srgbClr val="006666">
               <a:alpha val="40000"/>
             </a:srgbClr>
           </a:solidFill>
@@ -1229,7 +1230,7 @@
             <a:avLst/>
           </a:prstGeom>
           <a:solidFill>
-            <a:srgbClr val="1E5473">
+            <a:srgbClr val="006666">
               <a:alpha val="20000"/>
             </a:srgbClr>
           </a:solidFill>
@@ -1260,7 +1261,7 @@
             <a:avLst/>
           </a:prstGeom>
           <a:solidFill>
-            <a:srgbClr val="1E5473">
+            <a:srgbClr val="006666">
               <a:alpha val="60000"/>
             </a:srgbClr>
           </a:solidFill>
@@ -1291,7 +1292,7 @@
             <a:avLst/>
           </a:prstGeom>
           <a:solidFill>
-            <a:srgbClr val="1E5473">
+            <a:srgbClr val="006666">
               <a:alpha val="20000"/>
             </a:srgbClr>
           </a:solidFill>
@@ -1322,7 +1323,7 @@
             <a:avLst/>
           </a:prstGeom>
           <a:solidFill>
-            <a:srgbClr val="1E5473">
+            <a:srgbClr val="006666">
               <a:alpha val="75000"/>
             </a:srgbClr>
           </a:solidFill>
@@ -12196,6 +12197,529 @@
 </p:sldLayout>
 </file>
 
+<file path=ppt/slideLayouts/slideLayout20.xml><?xml version="1.0" encoding="utf-8"?>
+<p:sldLayout xmlns:a="http://schemas.openxmlformats.org/drawingml/2006/main" xmlns:r="http://schemas.openxmlformats.org/officeDocument/2006/relationships" xmlns:p="http://schemas.openxmlformats.org/presentationml/2006/main" type="title" showMasterSp="0" preserve="1">
+  <p:cSld name="20 Title Slide Gradient">
+    <p:bg>
+      <p:bgPr>
+        <a:gradFill rotWithShape="1">
+          <a:gsLst>
+            <a:gs pos="0">
+              <a:srgbClr val="23436D"/>
+            </a:gs>
+            <a:gs pos="55000">
+              <a:srgbClr val="1E5473"/>
+            </a:gs>
+            <a:gs pos="100000">
+              <a:srgbClr val="1A8D92"/>
+            </a:gs>
+          </a:gsLst>
+          <a:lin ang="2700000" scaled="0"/>
+        </a:gradFill>
+        <a:effectLst/>
+      </p:bgPr>
+    </p:bg>
+    <p:spTree>
+      <p:nvGrpSpPr>
+        <p:cNvPr id="1" name=""/>
+        <p:cNvGrpSpPr/>
+        <p:nvPr/>
+      </p:nvGrpSpPr>
+      <p:grpSpPr>
+        <a:xfrm>
+          <a:off x="0" y="0"/>
+          <a:ext cx="0" cy="0"/>
+          <a:chOff x="0" y="0"/>
+          <a:chExt cx="0" cy="0"/>
+        </a:xfrm>
+      </p:grpSpPr>
+      <p:sp>
+        <p:nvSpPr>
+          <p:cNvPr id="10" name="Decor Diamond"/>
+          <p:cNvSpPr/>
+          <p:nvPr/>
+        </p:nvSpPr>
+        <p:spPr>
+          <a:xfrm>
+            <a:off x="8534400" y="-914400"/>
+            <a:ext cx="4572000" cy="4572000"/>
+          </a:xfrm>
+          <a:prstGeom prst="diamond">
+            <a:avLst/>
+          </a:prstGeom>
+          <a:noFill/>
+          <a:ln w="19050">
+            <a:solidFill>
+              <a:srgbClr val="FFFFFF">
+                <a:alpha val="9000"/>
+              </a:srgbClr>
+            </a:solidFill>
+          </a:ln>
+        </p:spPr>
+        <p:txBody>
+          <a:bodyPr/>
+          <a:lstStyle/>
+          <a:p>
+            <a:endParaRPr lang="th-TH"/>
+          </a:p>
+        </p:txBody>
+      </p:sp>
+      <p:sp>
+        <p:nvSpPr>
+          <p:cNvPr id="11" name="Decor Diamond"/>
+          <p:cNvSpPr/>
+          <p:nvPr/>
+        </p:nvSpPr>
+        <p:spPr>
+          <a:xfrm>
+            <a:off x="9906000" y="2743200"/>
+            <a:ext cx="2743200" cy="2743200"/>
+          </a:xfrm>
+          <a:prstGeom prst="diamond">
+            <a:avLst/>
+          </a:prstGeom>
+          <a:noFill/>
+          <a:ln w="19050">
+            <a:solidFill>
+              <a:srgbClr val="FFFFFF">
+                <a:alpha val="7000"/>
+              </a:srgbClr>
+            </a:solidFill>
+          </a:ln>
+        </p:spPr>
+        <p:txBody>
+          <a:bodyPr/>
+          <a:lstStyle/>
+          <a:p>
+            <a:endParaRPr lang="th-TH"/>
+          </a:p>
+        </p:txBody>
+      </p:sp>
+      <p:pic>
+        <p:nvPicPr>
+          <p:cNvPr id="12" name="NCT Logo"/>
+          <p:cNvPicPr>
+            <a:picLocks noChangeAspect="1"/>
+          </p:cNvPicPr>
+          <p:nvPr/>
+        </p:nvPicPr>
+        <p:blipFill>
+          <a:blip r:embed="rId2"/>
+          <a:stretch>
+            <a:fillRect/>
+          </a:stretch>
+        </p:blipFill>
+        <p:spPr>
+          <a:xfrm>
+            <a:off x="914400" y="868680"/>
+            <a:ext cx="2560320" cy="1302864"/>
+          </a:xfrm>
+          <a:prstGeom prst="rect">
+            <a:avLst/>
+          </a:prstGeom>
+        </p:spPr>
+      </p:pic>
+      <p:sp>
+        <p:nvSpPr>
+          <p:cNvPr id="13" name="Title Placeholder"/>
+          <p:cNvSpPr>
+            <a:spLocks noGrp="1"/>
+          </p:cNvSpPr>
+          <p:nvPr>
+            <p:ph type="ctrTitle"/>
+          </p:nvPr>
+        </p:nvSpPr>
+        <p:spPr>
+          <a:xfrm>
+            <a:off x="914400" y="2560320"/>
+            <a:ext cx="8229600" cy="1463040"/>
+          </a:xfrm>
+          <a:prstGeom prst="rect">
+            <a:avLst/>
+          </a:prstGeom>
+        </p:spPr>
+        <p:txBody>
+          <a:bodyPr wrap="square" anchor="b" lIns="0" tIns="0" rIns="0" bIns="0" rtlCol="0"/>
+          <a:lstStyle>
+            <a:lvl1pPr algn="l" marL="0" indent="0">
+              <a:lnSpc>
+                <a:spcPct val="106000"/>
+              </a:lnSpc>
+              <a:buNone/>
+              <a:defRPr lang="th-TH" sz="4400" b="1" dirty="0">
+                <a:solidFill>
+                  <a:srgbClr val="FFFFFF"/>
+                </a:solidFill>
+                <a:latin typeface="+mj-lt"/>
+                <a:ea typeface="+mj-ea"/>
+                <a:cs typeface="+mj-cs"/>
+              </a:defRPr>
+            </a:lvl1pPr>
+          </a:lstStyle>
+          <a:p>
+            <a:pPr algn="l" marL="0" indent="0">
+              <a:lnSpc>
+                <a:spcPct val="106000"/>
+              </a:lnSpc>
+              <a:buNone/>
+            </a:pPr>
+            <a:r>
+              <a:rPr lang="th-TH" sz="4400" b="1" dirty="0">
+                <a:solidFill>
+                  <a:srgbClr val="FFFFFF"/>
+                </a:solidFill>
+                <a:latin typeface="+mj-lt"/>
+                <a:ea typeface="+mj-ea"/>
+                <a:cs typeface="+mj-cs"/>
+              </a:rPr>
+              <a:t>ชื่อเรื่องงานนำเสนอ</a:t>
+            </a:r>
+          </a:p>
+        </p:txBody>
+      </p:sp>
+      <p:sp>
+        <p:nvSpPr>
+          <p:cNvPr id="14" name="Accent Rule"/>
+          <p:cNvSpPr/>
+          <p:nvPr/>
+        </p:nvSpPr>
+        <p:spPr>
+          <a:xfrm>
+            <a:off x="914400" y="4206240"/>
+            <a:ext cx="548640" cy="45720"/>
+          </a:xfrm>
+          <a:prstGeom prst="rect">
+            <a:avLst/>
+          </a:prstGeom>
+          <a:solidFill>
+            <a:srgbClr val="FFFFFF">
+              <a:alpha val="72000"/>
+            </a:srgbClr>
+          </a:solidFill>
+          <a:ln>
+            <a:noFill/>
+          </a:ln>
+        </p:spPr>
+        <p:txBody>
+          <a:bodyPr/>
+          <a:lstStyle/>
+          <a:p>
+            <a:endParaRPr lang="th-TH"/>
+          </a:p>
+        </p:txBody>
+      </p:sp>
+      <p:sp>
+        <p:nvSpPr>
+          <p:cNvPr id="15" name="Subtitle"/>
+          <p:cNvSpPr>
+            <a:spLocks noGrp="1"/>
+          </p:cNvSpPr>
+          <p:nvPr>
+            <p:ph type="subTitle" idx="1"/>
+          </p:nvPr>
+        </p:nvSpPr>
+        <p:spPr>
+          <a:xfrm>
+            <a:off x="914400" y="4480560"/>
+            <a:ext cx="7315200" cy="731520"/>
+          </a:xfrm>
+          <a:prstGeom prst="rect">
+            <a:avLst/>
+          </a:prstGeom>
+        </p:spPr>
+        <p:txBody>
+          <a:bodyPr wrap="square" anchor="t" lIns="0" tIns="0" rIns="0" bIns="0" rtlCol="0"/>
+          <a:lstStyle>
+            <a:lvl1pPr algn="l" marL="0" indent="0">
+              <a:lnSpc>
+                <a:spcPct val="130000"/>
+              </a:lnSpc>
+              <a:buNone/>
+              <a:defRPr lang="th-TH" sz="2000" dirty="0">
+                <a:solidFill>
+                  <a:srgbClr val="FFFFFF">
+                    <a:alpha val="80000"/>
+                  </a:srgbClr>
+                </a:solidFill>
+                <a:latin typeface="+mn-lt"/>
+                <a:ea typeface="+mn-ea"/>
+                <a:cs typeface="+mn-cs"/>
+              </a:defRPr>
+            </a:lvl1pPr>
+          </a:lstStyle>
+          <a:p>
+            <a:pPr algn="l" marL="0" indent="0">
+              <a:lnSpc>
+                <a:spcPct val="130000"/>
+              </a:lnSpc>
+              <a:buNone/>
+            </a:pPr>
+            <a:r>
+              <a:rPr lang="th-TH" sz="2000" dirty="0">
+                <a:solidFill>
+                  <a:srgbClr val="FFFFFF">
+                    <a:alpha val="80000"/>
+                  </a:srgbClr>
+                </a:solidFill>
+                <a:latin typeface="+mn-lt"/>
+                <a:ea typeface="+mn-ea"/>
+                <a:cs typeface="+mn-cs"/>
+              </a:rPr>
+              <a:t>คำโปรย / ชื่อลูกค้า / วันที่</a:t>
+            </a:r>
+          </a:p>
+        </p:txBody>
+      </p:sp>
+      <p:sp>
+        <p:nvSpPr>
+          <p:cNvPr id="16" name="Footer Scrim"/>
+          <p:cNvSpPr/>
+          <p:nvPr/>
+        </p:nvSpPr>
+        <p:spPr>
+          <a:xfrm>
+            <a:off x="0" y="5394960"/>
+            <a:ext cx="12192000" cy="1463040"/>
+          </a:xfrm>
+          <a:prstGeom prst="rect">
+            <a:avLst/>
+          </a:prstGeom>
+          <a:gradFill rotWithShape="1">
+            <a:gsLst>
+              <a:gs pos="0">
+                <a:srgbClr val="16324F">
+                  <a:alpha val="0"/>
+                </a:srgbClr>
+              </a:gs>
+              <a:gs pos="55000">
+                <a:srgbClr val="16324F">
+                  <a:alpha val="60000"/>
+                </a:srgbClr>
+              </a:gs>
+              <a:gs pos="100000">
+                <a:srgbClr val="16324F">
+                  <a:alpha val="90000"/>
+                </a:srgbClr>
+              </a:gs>
+            </a:gsLst>
+            <a:lin ang="5400000" scaled="0"/>
+          </a:gradFill>
+          <a:ln>
+            <a:noFill/>
+          </a:ln>
+        </p:spPr>
+        <p:txBody>
+          <a:bodyPr/>
+          <a:lstStyle/>
+          <a:p>
+            <a:endParaRPr lang="th-TH"/>
+          </a:p>
+        </p:txBody>
+      </p:sp>
+      <p:sp>
+        <p:nvSpPr>
+          <p:cNvPr id="90" name="Foot Bar 1"/>
+          <p:cNvSpPr/>
+          <p:nvPr/>
+        </p:nvSpPr>
+        <p:spPr>
+          <a:xfrm>
+            <a:off x="0" y="6675120"/>
+            <a:ext cx="822960" cy="137160"/>
+          </a:xfrm>
+          <a:prstGeom prst="rect">
+            <a:avLst/>
+          </a:prstGeom>
+          <a:solidFill>
+            <a:srgbClr val="006666"/>
+          </a:solidFill>
+          <a:ln>
+            <a:noFill/>
+          </a:ln>
+        </p:spPr>
+        <p:txBody>
+          <a:bodyPr/>
+          <a:lstStyle/>
+          <a:p>
+            <a:endParaRPr lang="th-TH"/>
+          </a:p>
+        </p:txBody>
+      </p:sp>
+      <p:sp>
+        <p:nvSpPr>
+          <p:cNvPr id="91" name="Foot Bar 2"/>
+          <p:cNvSpPr/>
+          <p:nvPr/>
+        </p:nvSpPr>
+        <p:spPr>
+          <a:xfrm>
+            <a:off x="822960" y="6675120"/>
+            <a:ext cx="822960" cy="137160"/>
+          </a:xfrm>
+          <a:prstGeom prst="rect">
+            <a:avLst/>
+          </a:prstGeom>
+          <a:solidFill>
+            <a:srgbClr val="A9C2C2"/>
+          </a:solidFill>
+          <a:ln>
+            <a:noFill/>
+          </a:ln>
+        </p:spPr>
+        <p:txBody>
+          <a:bodyPr/>
+          <a:lstStyle/>
+          <a:p>
+            <a:endParaRPr lang="th-TH"/>
+          </a:p>
+        </p:txBody>
+      </p:sp>
+      <p:sp>
+        <p:nvSpPr>
+          <p:cNvPr id="92" name="Foot Bar 3"/>
+          <p:cNvSpPr/>
+          <p:nvPr/>
+        </p:nvSpPr>
+        <p:spPr>
+          <a:xfrm>
+            <a:off x="1645920" y="6675120"/>
+            <a:ext cx="822960" cy="137160"/>
+          </a:xfrm>
+          <a:prstGeom prst="rect">
+            <a:avLst/>
+          </a:prstGeom>
+          <a:solidFill>
+            <a:srgbClr val="E1E1E1"/>
+          </a:solidFill>
+          <a:ln>
+            <a:noFill/>
+          </a:ln>
+        </p:spPr>
+        <p:txBody>
+          <a:bodyPr/>
+          <a:lstStyle/>
+          <a:p>
+            <a:endParaRPr lang="th-TH"/>
+          </a:p>
+        </p:txBody>
+      </p:sp>
+      <p:sp>
+        <p:nvSpPr>
+          <p:cNvPr id="93" name="Footer Placeholder"/>
+          <p:cNvSpPr>
+            <a:spLocks noGrp="1"/>
+          </p:cNvSpPr>
+          <p:nvPr>
+            <p:ph type="ftr" idx="11"/>
+          </p:nvPr>
+        </p:nvSpPr>
+        <p:spPr>
+          <a:xfrm>
+            <a:off x="2697480" y="6400800"/>
+            <a:ext cx="4572000" cy="274320"/>
+          </a:xfrm>
+          <a:prstGeom prst="rect">
+            <a:avLst/>
+          </a:prstGeom>
+        </p:spPr>
+        <p:txBody>
+          <a:bodyPr wrap="square" anchor="ctr" lIns="0" tIns="0" rIns="0" bIns="0" rtlCol="0"/>
+          <a:lstStyle>
+            <a:lvl1pPr algn="l" marL="0" indent="0">
+              <a:lnSpc>
+                <a:spcPct val="100000"/>
+              </a:lnSpc>
+              <a:buNone/>
+              <a:defRPr lang="th-TH" sz="1000" dirty="0">
+                <a:solidFill>
+                  <a:srgbClr val="FFFFFF">
+                    <a:alpha val="72000"/>
+                  </a:srgbClr>
+                </a:solidFill>
+                <a:latin typeface="+mn-lt"/>
+                <a:ea typeface="+mn-ea"/>
+                <a:cs typeface="+mn-cs"/>
+              </a:defRPr>
+            </a:lvl1pPr>
+          </a:lstStyle>
+          <a:p>
+            <a:pPr algn="l" marL="0" indent="0">
+              <a:lnSpc>
+                <a:spcPct val="100000"/>
+              </a:lnSpc>
+              <a:buNone/>
+            </a:pPr>
+            <a:endParaRPr lang="th-TH" sz="1000"/>
+          </a:p>
+        </p:txBody>
+      </p:sp>
+      <p:sp>
+        <p:nvSpPr>
+          <p:cNvPr id="94" name="Slide Number Placeholder"/>
+          <p:cNvSpPr>
+            <a:spLocks noGrp="1"/>
+          </p:cNvSpPr>
+          <p:nvPr>
+            <p:ph type="sldNum" sz="quarter" idx="12"/>
+          </p:nvPr>
+        </p:nvSpPr>
+        <p:spPr>
+          <a:xfrm>
+            <a:off x="10591800" y="6400800"/>
+            <a:ext cx="1371600" cy="274320"/>
+          </a:xfrm>
+          <a:prstGeom prst="rect">
+            <a:avLst/>
+          </a:prstGeom>
+        </p:spPr>
+        <p:txBody>
+          <a:bodyPr anchor="ctr"/>
+          <a:lstStyle>
+            <a:lvl1pPr algn="r" marL="0" indent="0">
+              <a:lnSpc>
+                <a:spcPct val="100000"/>
+              </a:lnSpc>
+              <a:buNone/>
+              <a:defRPr lang="th-TH" sz="1000" dirty="0">
+                <a:solidFill>
+                  <a:srgbClr val="FFFFFF">
+                    <a:alpha val="72000"/>
+                  </a:srgbClr>
+                </a:solidFill>
+                <a:latin typeface="+mn-lt"/>
+                <a:ea typeface="+mn-ea"/>
+                <a:cs typeface="+mn-cs"/>
+              </a:defRPr>
+            </a:lvl1pPr>
+          </a:lstStyle>
+          <a:p>
+            <a:pPr algn="r" marL="0" indent="0">
+              <a:buNone/>
+            </a:pPr>
+            <a:fld id="{B7E3A1C2-4F5D-4A88-9C1E-6D2F0A93B451}" type="slidenum">
+              <a:rPr lang="th-TH" sz="1000">
+                <a:solidFill>
+                  <a:srgbClr val="FFFFFF">
+                    <a:alpha val="72000"/>
+                  </a:srgbClr>
+                </a:solidFill>
+                <a:latin typeface="+mn-lt"/>
+                <a:cs typeface="+mn-cs"/>
+              </a:rPr>
+              <a:t>2</a:t>
+            </a:fld>
+            <a:endParaRPr lang="th-TH" sz="1000"/>
+          </a:p>
+        </p:txBody>
+      </p:sp>
+    </p:spTree>
+  </p:cSld>
+  <p:clrMapOvr>
+    <a:masterClrMapping/>
+  </p:clrMapOvr>
+</p:sldLayout>
+</file>
+
 <file path=ppt/slideLayouts/slideLayout3.xml><?xml version="1.0" encoding="utf-8"?>
 <p:sldLayout xmlns:a="http://schemas.openxmlformats.org/drawingml/2006/main" xmlns:r="http://schemas.openxmlformats.org/officeDocument/2006/relationships" xmlns:p="http://schemas.openxmlformats.org/presentationml/2006/main" type="obj" showMasterSp="0" preserve="1">
   <p:cSld name="03 Title and Content">
@@ -15708,7 +16232,7 @@
     <p:bg>
       <p:bgPr>
         <a:solidFill>
-          <a:srgbClr val="16324F"/>
+          <a:srgbClr val="193B36"/>
         </a:solidFill>
         <a:effectLst/>
       </p:bgPr>
@@ -15792,17 +16316,17 @@
           <a:gradFill rotWithShape="1">
             <a:gsLst>
               <a:gs pos="0">
-                <a:srgbClr val="16324F">
+                <a:srgbClr val="193B36">
                   <a:alpha val="0"/>
                 </a:srgbClr>
               </a:gs>
               <a:gs pos="55000">
-                <a:srgbClr val="16324F">
+                <a:srgbClr val="193B36">
                   <a:alpha val="60000"/>
                 </a:srgbClr>
               </a:gs>
               <a:gs pos="100000">
-                <a:srgbClr val="16324F">
+                <a:srgbClr val="193B36">
                   <a:alpha val="90000"/>
                 </a:srgbClr>
               </a:gs>
@@ -17281,7 +17805,7 @@
           <p:nvPr/>
         </p:nvPicPr>
         <p:blipFill>
-          <a:blip r:embed="rId21"/>
+          <a:blip r:embed="rId22"/>
           <a:stretch>
             <a:fillRect/>
           </a:stretch>
@@ -17319,6 +17843,7 @@
     <p:sldLayoutId id="2147483665" r:id="rId17"/>
     <p:sldLayoutId id="2147483666" r:id="rId18"/>
     <p:sldLayoutId id="2147483667" r:id="rId19"/>
+    <p:sldLayoutId id="2147483668" r:id="rId20"/>
   </p:sldLayoutIdLst>
   <p:txStyles>
     <p:titleStyle>
@@ -17575,7 +18100,7 @@
             <a:pPr/>
             <a:r>
               <a:rPr lang="th-TH" dirty="0"/>
-              <a:t>ภาพรวมสถาปัตยกรรมระบบ</a:t>
+              <a:t>กระบวนการที่เสนอ</a:t>
             </a:r>
           </a:p>
         </p:txBody>
@@ -17598,19 +18123,19 @@
             <a:pPr/>
             <a:r>
               <a:rPr lang="th-TH" dirty="0"/>
-              <a:t>ใช้ชุดชิ้นส่วนมาตรฐาน — กล่องมุมตรง เส้นหักมุมฉาก ไม่มีเงา</a:t>
-            </a:r>
-          </a:p>
-        </p:txBody>
-      </p:sp>
-      <p:sp>
-        <p:nvSpPr>
-          <p:cNvPr id="4" name="Leg"/>
-          <p:cNvSpPr>
-            <a:spLocks noGrp="1"/>
-          </p:cNvSpPr>
-          <p:nvPr>
-            <p:ph type="body" idx="2"/>
+              <a:t>ห้าขั้นตอน ทำงานต่อเนื่องโดยไม่ต้องคีย์ซ้ำ</a:t>
+            </a:r>
+          </a:p>
+        </p:txBody>
+      </p:sp>
+      <p:sp>
+        <p:nvSpPr>
+          <p:cNvPr id="4" name="C0"/>
+          <p:cNvSpPr>
+            <a:spLocks noGrp="1"/>
+          </p:cNvSpPr>
+          <p:nvPr>
+            <p:ph type="body" idx="20"/>
           </p:nvPr>
         </p:nvSpPr>
         <p:spPr/>
@@ -17621,19 +18146,19 @@
             <a:pPr/>
             <a:r>
               <a:rPr lang="th-TH" dirty="0"/>
-              <a:t>กล่องทึบ = ระบบที่มีอยู่  ·  กล่องมีสีหมวด = ส่วนที่เพิ่ม  ·  เส้นทึบ = ข้อมูลไหลอัตโนมัติ</a:t>
-            </a:r>
-          </a:p>
-        </p:txBody>
-      </p:sp>
-      <p:sp>
-        <p:nvSpPr>
-          <p:cNvPr id="5" name="TL"/>
-          <p:cNvSpPr>
-            <a:spLocks noGrp="1"/>
-          </p:cNvSpPr>
-          <p:nvPr>
-            <p:ph type="body" idx="3"/>
+              <a:t>1</a:t>
+            </a:r>
+          </a:p>
+        </p:txBody>
+      </p:sp>
+      <p:sp>
+        <p:nvSpPr>
+          <p:cNvPr id="5" name="H0"/>
+          <p:cNvSpPr>
+            <a:spLocks noGrp="1"/>
+          </p:cNvSpPr>
+          <p:nvPr>
+            <p:ph type="body" idx="21"/>
           </p:nvPr>
         </p:nvSpPr>
         <p:spPr/>
@@ -17644,19 +18169,19 @@
             <a:pPr/>
             <a:r>
               <a:rPr lang="th-TH" dirty="0"/>
-              <a:t>สรุป</a:t>
-            </a:r>
-          </a:p>
-        </p:txBody>
-      </p:sp>
-      <p:sp>
-        <p:nvSpPr>
-          <p:cNvPr id="6" name="TC"/>
-          <p:cNvSpPr>
-            <a:spLocks noGrp="1"/>
-          </p:cNvSpPr>
-          <p:nvPr>
-            <p:ph type="body" idx="4"/>
+              <a:t>รับเอกสาร</a:t>
+            </a:r>
+          </a:p>
+        </p:txBody>
+      </p:sp>
+      <p:sp>
+        <p:nvSpPr>
+          <p:cNvPr id="6" name="B0"/>
+          <p:cNvSpPr>
+            <a:spLocks noGrp="1"/>
+          </p:cNvSpPr>
+          <p:nvPr>
+            <p:ph type="body" idx="22"/>
           </p:nvPr>
         </p:nvSpPr>
         <p:spPr/>
@@ -17667,457 +18192,329 @@
             <a:pPr/>
             <a:r>
               <a:rPr lang="th-TH" dirty="0"/>
-              <a:t>ระบบเดิมไม่ถูกแก้ ของใหม่แทรกเป็นคิวและตัวตรวจกฎคั่นกลางเท่านั้น</a:t>
-            </a:r>
-          </a:p>
-        </p:txBody>
-      </p:sp>
-      <p:sp>
-        <p:nvSpPr>
-          <p:cNvPr id="10" name="Group Zone"/>
-          <p:cNvSpPr/>
-          <p:nvPr/>
-        </p:nvSpPr>
-        <p:spPr>
-          <a:xfrm>
-            <a:off x="3566160" y="2766060"/>
-            <a:ext cx="5257800" cy="1645920"/>
-          </a:xfrm>
-          <a:prstGeom prst="rect">
-            <a:avLst/>
-          </a:prstGeom>
-          <a:solidFill>
-            <a:srgbClr val="E8F6F5"/>
-          </a:solidFill>
-          <a:ln>
-            <a:noFill/>
-          </a:ln>
-        </p:spPr>
-        <p:txBody>
-          <a:bodyPr/>
-          <a:lstStyle/>
-          <a:p>
-            <a:endParaRPr lang="th-TH"/>
-          </a:p>
-        </p:txBody>
-      </p:sp>
-      <p:sp>
-        <p:nvSpPr>
-          <p:cNvPr id="11" name="Group Label"/>
-          <p:cNvSpPr/>
-          <p:nvPr/>
-        </p:nvSpPr>
-        <p:spPr>
-          <a:xfrm>
-            <a:off x="3840480" y="2926080"/>
-            <a:ext cx="3200400" cy="228600"/>
-          </a:xfrm>
-          <a:prstGeom prst="rect">
-            <a:avLst/>
-          </a:prstGeom>
-          <a:noFill/>
-          <a:ln>
-            <a:noFill/>
-          </a:ln>
-        </p:spPr>
-        <p:txBody>
-          <a:bodyPr wrap="square" anchor="ctr" lIns="0" tIns="0" rIns="0" bIns="0" rtlCol="0"/>
-          <a:lstStyle/>
-          <a:p>
-            <a:pPr algn="l" marL="0" indent="0">
-              <a:lnSpc>
-                <a:spcPct val="100000"/>
-              </a:lnSpc>
-              <a:buNone/>
-            </a:pPr>
-            <a:r>
-              <a:rPr lang="th-TH" sz="1200" b="1" spc="120" dirty="0">
-                <a:solidFill>
-                  <a:srgbClr val="216B7F"/>
-                </a:solidFill>
-                <a:latin typeface="+mn-lt"/>
-                <a:ea typeface="+mn-ea"/>
-                <a:cs typeface="+mn-cs"/>
-              </a:rPr>
-              <a:t>ส่วนที่เพิ่มใหม่</a:t>
-            </a:r>
-          </a:p>
-        </p:txBody>
-      </p:sp>
-      <p:sp>
-        <p:nvSpPr>
-          <p:cNvPr id="12" name="Box 1"/>
-          <p:cNvSpPr/>
-          <p:nvPr/>
-        </p:nvSpPr>
-        <p:spPr>
-          <a:xfrm>
-            <a:off x="1143000" y="3223260"/>
-            <a:ext cx="2011680" cy="731520"/>
-          </a:xfrm>
-          <a:prstGeom prst="rect">
-            <a:avLst/>
-          </a:prstGeom>
-          <a:solidFill>
-            <a:srgbClr val="193B36"/>
-          </a:solidFill>
-          <a:ln>
-            <a:noFill/>
-          </a:ln>
-        </p:spPr>
-        <p:txBody>
-          <a:bodyPr wrap="square" anchor="ctr" lIns="0" tIns="0" rIns="0" bIns="0" rtlCol="0"/>
-          <a:lstStyle/>
-          <a:p>
-            <a:pPr algn="ctr" marL="0" indent="0">
-              <a:lnSpc>
-                <a:spcPct val="110000"/>
-              </a:lnSpc>
-              <a:buNone/>
-            </a:pPr>
-            <a:r>
-              <a:rPr lang="th-TH" sz="1200" dirty="0">
-                <a:solidFill>
-                  <a:srgbClr val="FFFFFF"/>
-                </a:solidFill>
-                <a:latin typeface="+mn-lt"/>
-                <a:ea typeface="+mn-ea"/>
-                <a:cs typeface="+mn-cs"/>
-              </a:rPr>
-              <a:t>ระบบ ERP ปัจจุบัน</a:t>
-            </a:r>
-          </a:p>
-        </p:txBody>
-      </p:sp>
-      <p:sp>
-        <p:nvSpPr>
-          <p:cNvPr id="13" name="Box 2"/>
-          <p:cNvSpPr/>
-          <p:nvPr/>
-        </p:nvSpPr>
-        <p:spPr>
-          <a:xfrm>
-            <a:off x="3840480" y="3223260"/>
-            <a:ext cx="2011680" cy="731520"/>
-          </a:xfrm>
-          <a:prstGeom prst="rect">
-            <a:avLst/>
-          </a:prstGeom>
-          <a:solidFill>
-            <a:srgbClr val="FFFFFF"/>
-          </a:solidFill>
-          <a:ln w="12700">
-            <a:solidFill>
-              <a:srgbClr val="2A5EA0"/>
-            </a:solidFill>
-          </a:ln>
-        </p:spPr>
-        <p:txBody>
-          <a:bodyPr wrap="square" anchor="ctr" lIns="0" tIns="0" rIns="0" bIns="0" rtlCol="0"/>
-          <a:lstStyle/>
-          <a:p>
-            <a:pPr algn="ctr" marL="0" indent="0">
-              <a:lnSpc>
-                <a:spcPct val="110000"/>
-              </a:lnSpc>
-              <a:buNone/>
-            </a:pPr>
-            <a:r>
-              <a:rPr lang="th-TH" sz="1200" dirty="0">
-                <a:solidFill>
-                  <a:srgbClr val="333333"/>
-                </a:solidFill>
-                <a:latin typeface="+mn-lt"/>
-                <a:ea typeface="+mn-ea"/>
-                <a:cs typeface="+mn-cs"/>
-              </a:rPr>
-              <a:t>คิวเอกสารกลาง</a:t>
-            </a:r>
-          </a:p>
-        </p:txBody>
-      </p:sp>
-      <p:sp>
-        <p:nvSpPr>
-          <p:cNvPr id="113" name="Box 2 Tab"/>
-          <p:cNvSpPr/>
-          <p:nvPr/>
-        </p:nvSpPr>
-        <p:spPr>
-          <a:xfrm>
-            <a:off x="3954780" y="3337560"/>
-            <a:ext cx="205740" cy="45720"/>
-          </a:xfrm>
-          <a:prstGeom prst="rect">
-            <a:avLst/>
-          </a:prstGeom>
-          <a:solidFill>
-            <a:srgbClr val="2A5EA0"/>
-          </a:solidFill>
-          <a:ln>
-            <a:noFill/>
-          </a:ln>
-        </p:spPr>
-        <p:txBody>
-          <a:bodyPr/>
-          <a:lstStyle/>
-          <a:p>
-            <a:endParaRPr lang="th-TH"/>
-          </a:p>
-        </p:txBody>
-      </p:sp>
-      <p:sp>
-        <p:nvSpPr>
-          <p:cNvPr id="14" name="Box 3"/>
-          <p:cNvSpPr/>
-          <p:nvPr/>
-        </p:nvSpPr>
-        <p:spPr>
-          <a:xfrm>
-            <a:off x="6537960" y="3223260"/>
-            <a:ext cx="2011680" cy="731520"/>
-          </a:xfrm>
-          <a:prstGeom prst="rect">
-            <a:avLst/>
-          </a:prstGeom>
-          <a:solidFill>
-            <a:srgbClr val="FFFFFF"/>
-          </a:solidFill>
-          <a:ln w="12700">
-            <a:solidFill>
-              <a:srgbClr val="BB731B"/>
-            </a:solidFill>
-          </a:ln>
-        </p:spPr>
-        <p:txBody>
-          <a:bodyPr wrap="square" anchor="ctr" lIns="0" tIns="0" rIns="0" bIns="0" rtlCol="0"/>
-          <a:lstStyle/>
-          <a:p>
-            <a:pPr algn="ctr" marL="0" indent="0">
-              <a:lnSpc>
-                <a:spcPct val="110000"/>
-              </a:lnSpc>
-              <a:buNone/>
-            </a:pPr>
-            <a:r>
-              <a:rPr lang="th-TH" sz="1200" dirty="0">
-                <a:solidFill>
-                  <a:srgbClr val="333333"/>
-                </a:solidFill>
-                <a:latin typeface="+mn-lt"/>
-                <a:ea typeface="+mn-ea"/>
-                <a:cs typeface="+mn-cs"/>
-              </a:rPr>
-              <a:t>ตัวตรวจกฎธุรกิจ</a:t>
-            </a:r>
-          </a:p>
-        </p:txBody>
-      </p:sp>
-      <p:sp>
-        <p:nvSpPr>
-          <p:cNvPr id="114" name="Box 3 Tab"/>
-          <p:cNvSpPr/>
-          <p:nvPr/>
-        </p:nvSpPr>
-        <p:spPr>
-          <a:xfrm>
-            <a:off x="6652260" y="3337560"/>
-            <a:ext cx="205740" cy="45720"/>
-          </a:xfrm>
-          <a:prstGeom prst="rect">
-            <a:avLst/>
-          </a:prstGeom>
-          <a:solidFill>
-            <a:srgbClr val="BB731B"/>
-          </a:solidFill>
-          <a:ln>
-            <a:noFill/>
-          </a:ln>
-        </p:spPr>
-        <p:txBody>
-          <a:bodyPr/>
-          <a:lstStyle/>
-          <a:p>
-            <a:endParaRPr lang="th-TH"/>
-          </a:p>
-        </p:txBody>
-      </p:sp>
-      <p:sp>
-        <p:nvSpPr>
-          <p:cNvPr id="15" name="Box 4"/>
-          <p:cNvSpPr/>
-          <p:nvPr/>
-        </p:nvSpPr>
-        <p:spPr>
-          <a:xfrm>
-            <a:off x="9235440" y="3223260"/>
-            <a:ext cx="2011680" cy="731520"/>
-          </a:xfrm>
-          <a:prstGeom prst="rect">
-            <a:avLst/>
-          </a:prstGeom>
-          <a:solidFill>
-            <a:srgbClr val="193B36"/>
-          </a:solidFill>
-          <a:ln>
-            <a:noFill/>
-          </a:ln>
-        </p:spPr>
-        <p:txBody>
-          <a:bodyPr wrap="square" anchor="ctr" lIns="0" tIns="0" rIns="0" bIns="0" rtlCol="0"/>
-          <a:lstStyle/>
-          <a:p>
-            <a:pPr algn="ctr" marL="0" indent="0">
-              <a:lnSpc>
-                <a:spcPct val="110000"/>
-              </a:lnSpc>
-              <a:buNone/>
-            </a:pPr>
-            <a:r>
-              <a:rPr lang="th-TH" sz="1200" dirty="0">
-                <a:solidFill>
-                  <a:srgbClr val="FFFFFF"/>
-                </a:solidFill>
-                <a:latin typeface="+mn-lt"/>
-                <a:ea typeface="+mn-ea"/>
-                <a:cs typeface="+mn-cs"/>
-              </a:rPr>
-              <a:t>ระบบบัญชี</a:t>
-            </a:r>
-          </a:p>
-        </p:txBody>
-      </p:sp>
-      <p:sp>
-        <p:nvSpPr>
-          <p:cNvPr id="16" name="Link 1"/>
-          <p:cNvSpPr/>
-          <p:nvPr/>
-        </p:nvSpPr>
-        <p:spPr>
-          <a:xfrm>
-            <a:off x="3268980" y="3589020"/>
-            <a:ext cx="457200" cy="0"/>
-          </a:xfrm>
-          <a:prstGeom prst="line">
-            <a:avLst/>
-          </a:prstGeom>
-          <a:noFill/>
-          <a:ln w="15875" cap="flat">
-            <a:solidFill>
-              <a:srgbClr val="216B7F"/>
-            </a:solidFill>
-            <a:prstDash val="solid"/>
-            <a:tailEnd type="triangle" w="med" len="med"/>
-          </a:ln>
-        </p:spPr>
-        <p:txBody>
-          <a:bodyPr/>
-          <a:lstStyle/>
-          <a:p>
-            <a:endParaRPr lang="th-TH"/>
-          </a:p>
-        </p:txBody>
-      </p:sp>
-      <p:sp>
-        <p:nvSpPr>
-          <p:cNvPr id="17" name="Link 2"/>
-          <p:cNvSpPr/>
-          <p:nvPr/>
-        </p:nvSpPr>
-        <p:spPr>
-          <a:xfrm>
-            <a:off x="5966460" y="3589020"/>
-            <a:ext cx="457200" cy="0"/>
-          </a:xfrm>
-          <a:prstGeom prst="line">
-            <a:avLst/>
-          </a:prstGeom>
-          <a:noFill/>
-          <a:ln w="15875" cap="flat">
-            <a:solidFill>
-              <a:srgbClr val="216B7F"/>
-            </a:solidFill>
-            <a:prstDash val="solid"/>
-            <a:tailEnd type="triangle" w="med" len="med"/>
-          </a:ln>
-        </p:spPr>
-        <p:txBody>
-          <a:bodyPr/>
-          <a:lstStyle/>
-          <a:p>
-            <a:endParaRPr lang="th-TH"/>
-          </a:p>
-        </p:txBody>
-      </p:sp>
-      <p:sp>
-        <p:nvSpPr>
-          <p:cNvPr id="18" name="Link 3"/>
-          <p:cNvSpPr/>
-          <p:nvPr/>
-        </p:nvSpPr>
-        <p:spPr>
-          <a:xfrm>
-            <a:off x="8663940" y="3589020"/>
-            <a:ext cx="457200" cy="0"/>
-          </a:xfrm>
-          <a:prstGeom prst="line">
-            <a:avLst/>
-          </a:prstGeom>
-          <a:noFill/>
-          <a:ln w="15875" cap="flat">
-            <a:solidFill>
-              <a:srgbClr val="216B7F"/>
-            </a:solidFill>
-            <a:prstDash val="solid"/>
-            <a:tailEnd type="triangle" w="med" len="med"/>
-          </a:ln>
-        </p:spPr>
-        <p:txBody>
-          <a:bodyPr/>
-          <a:lstStyle/>
-          <a:p>
-            <a:endParaRPr lang="th-TH"/>
-          </a:p>
-        </p:txBody>
-      </p:sp>
-      <p:sp>
-        <p:nvSpPr>
-          <p:cNvPr id="19" name="Edge Label"/>
-          <p:cNvSpPr/>
-          <p:nvPr/>
-        </p:nvSpPr>
-        <p:spPr>
-          <a:xfrm>
-            <a:off x="5806440" y="3268980"/>
-            <a:ext cx="822960" cy="228600"/>
-          </a:xfrm>
-          <a:prstGeom prst="rect">
-            <a:avLst/>
-          </a:prstGeom>
-          <a:noFill/>
-          <a:ln>
-            <a:noFill/>
-          </a:ln>
-        </p:spPr>
-        <p:txBody>
-          <a:bodyPr wrap="square" anchor="ctr" lIns="0" tIns="0" rIns="0" bIns="0" rtlCol="0"/>
-          <a:lstStyle/>
-          <a:p>
-            <a:pPr algn="ctr" marL="0" indent="0">
-              <a:lnSpc>
-                <a:spcPct val="100000"/>
-              </a:lnSpc>
-              <a:buNone/>
-            </a:pPr>
-            <a:r>
-              <a:rPr lang="th-TH" sz="1000" dirty="0">
-                <a:solidFill>
-                  <a:srgbClr val="5F5F5F"/>
-                </a:solidFill>
-                <a:latin typeface="+mn-lt"/>
-                <a:ea typeface="+mn-ea"/>
-                <a:cs typeface="+mn-cs"/>
-              </a:rPr>
-              <a:t>ผ่านกฎ</a:t>
+              <a:t>สแกนหรือรับไฟล์เข้าคิวกลาง</a:t>
+            </a:r>
+          </a:p>
+        </p:txBody>
+      </p:sp>
+      <p:sp>
+        <p:nvSpPr>
+          <p:cNvPr id="7" name="C1"/>
+          <p:cNvSpPr>
+            <a:spLocks noGrp="1"/>
+          </p:cNvSpPr>
+          <p:nvPr>
+            <p:ph type="body" idx="23"/>
+          </p:nvPr>
+        </p:nvSpPr>
+        <p:spPr/>
+        <p:txBody>
+          <a:bodyPr/>
+          <a:lstStyle/>
+          <a:p>
+            <a:pPr/>
+            <a:r>
+              <a:rPr lang="th-TH" dirty="0"/>
+              <a:t>2</a:t>
+            </a:r>
+          </a:p>
+        </p:txBody>
+      </p:sp>
+      <p:sp>
+        <p:nvSpPr>
+          <p:cNvPr id="8" name="H1"/>
+          <p:cNvSpPr>
+            <a:spLocks noGrp="1"/>
+          </p:cNvSpPr>
+          <p:nvPr>
+            <p:ph type="body" idx="24"/>
+          </p:nvPr>
+        </p:nvSpPr>
+        <p:spPr/>
+        <p:txBody>
+          <a:bodyPr/>
+          <a:lstStyle/>
+          <a:p>
+            <a:pPr/>
+            <a:r>
+              <a:rPr lang="th-TH" dirty="0"/>
+              <a:t>อ่านข้อมูล</a:t>
+            </a:r>
+          </a:p>
+        </p:txBody>
+      </p:sp>
+      <p:sp>
+        <p:nvSpPr>
+          <p:cNvPr id="9" name="B1"/>
+          <p:cNvSpPr>
+            <a:spLocks noGrp="1"/>
+          </p:cNvSpPr>
+          <p:nvPr>
+            <p:ph type="body" idx="25"/>
+          </p:nvPr>
+        </p:nvSpPr>
+        <p:spPr/>
+        <p:txBody>
+          <a:bodyPr/>
+          <a:lstStyle/>
+          <a:p>
+            <a:pPr/>
+            <a:r>
+              <a:rPr lang="th-TH" dirty="0"/>
+              <a:t>ดึงฟิลด์สำคัญ ตรวจกับต้นทาง</a:t>
+            </a:r>
+          </a:p>
+        </p:txBody>
+      </p:sp>
+      <p:sp>
+        <p:nvSpPr>
+          <p:cNvPr id="10" name="C2"/>
+          <p:cNvSpPr>
+            <a:spLocks noGrp="1"/>
+          </p:cNvSpPr>
+          <p:nvPr>
+            <p:ph type="body" idx="26"/>
+          </p:nvPr>
+        </p:nvSpPr>
+        <p:spPr/>
+        <p:txBody>
+          <a:bodyPr/>
+          <a:lstStyle/>
+          <a:p>
+            <a:pPr/>
+            <a:r>
+              <a:rPr lang="th-TH" dirty="0"/>
+              <a:t>3</a:t>
+            </a:r>
+          </a:p>
+        </p:txBody>
+      </p:sp>
+      <p:sp>
+        <p:nvSpPr>
+          <p:cNvPr id="11" name="H2"/>
+          <p:cNvSpPr>
+            <a:spLocks noGrp="1"/>
+          </p:cNvSpPr>
+          <p:nvPr>
+            <p:ph type="body" idx="27"/>
+          </p:nvPr>
+        </p:nvSpPr>
+        <p:spPr/>
+        <p:txBody>
+          <a:bodyPr/>
+          <a:lstStyle/>
+          <a:p>
+            <a:pPr/>
+            <a:r>
+              <a:rPr lang="th-TH" dirty="0"/>
+              <a:t>ตรวจสอบ</a:t>
+            </a:r>
+          </a:p>
+        </p:txBody>
+      </p:sp>
+      <p:sp>
+        <p:nvSpPr>
+          <p:cNvPr id="12" name="B2"/>
+          <p:cNvSpPr>
+            <a:spLocks noGrp="1"/>
+          </p:cNvSpPr>
+          <p:nvPr>
+            <p:ph type="body" idx="28"/>
+          </p:nvPr>
+        </p:nvSpPr>
+        <p:spPr/>
+        <p:txBody>
+          <a:bodyPr/>
+          <a:lstStyle/>
+          <a:p>
+            <a:pPr/>
+            <a:r>
+              <a:rPr lang="th-TH" dirty="0"/>
+              <a:t>กฎธุรกิจและวงเงินอนุมัติ</a:t>
+            </a:r>
+          </a:p>
+        </p:txBody>
+      </p:sp>
+      <p:sp>
+        <p:nvSpPr>
+          <p:cNvPr id="13" name="C3"/>
+          <p:cNvSpPr>
+            <a:spLocks noGrp="1"/>
+          </p:cNvSpPr>
+          <p:nvPr>
+            <p:ph type="body" idx="29"/>
+          </p:nvPr>
+        </p:nvSpPr>
+        <p:spPr/>
+        <p:txBody>
+          <a:bodyPr/>
+          <a:lstStyle/>
+          <a:p>
+            <a:pPr/>
+            <a:r>
+              <a:rPr lang="th-TH" dirty="0"/>
+              <a:t>4</a:t>
+            </a:r>
+          </a:p>
+        </p:txBody>
+      </p:sp>
+      <p:sp>
+        <p:nvSpPr>
+          <p:cNvPr id="14" name="H3"/>
+          <p:cNvSpPr>
+            <a:spLocks noGrp="1"/>
+          </p:cNvSpPr>
+          <p:nvPr>
+            <p:ph type="body" idx="30"/>
+          </p:nvPr>
+        </p:nvSpPr>
+        <p:spPr/>
+        <p:txBody>
+          <a:bodyPr/>
+          <a:lstStyle/>
+          <a:p>
+            <a:pPr/>
+            <a:r>
+              <a:rPr lang="th-TH" dirty="0"/>
+              <a:t>บันทึก</a:t>
+            </a:r>
+          </a:p>
+        </p:txBody>
+      </p:sp>
+      <p:sp>
+        <p:nvSpPr>
+          <p:cNvPr id="15" name="B3"/>
+          <p:cNvSpPr>
+            <a:spLocks noGrp="1"/>
+          </p:cNvSpPr>
+          <p:nvPr>
+            <p:ph type="body" idx="31"/>
+          </p:nvPr>
+        </p:nvSpPr>
+        <p:spPr/>
+        <p:txBody>
+          <a:bodyPr/>
+          <a:lstStyle/>
+          <a:p>
+            <a:pPr/>
+            <a:r>
+              <a:rPr lang="th-TH" dirty="0"/>
+              <a:t>ลงระบบบัญชีพร้อม audit trail</a:t>
+            </a:r>
+          </a:p>
+        </p:txBody>
+      </p:sp>
+      <p:sp>
+        <p:nvSpPr>
+          <p:cNvPr id="16" name="C4"/>
+          <p:cNvSpPr>
+            <a:spLocks noGrp="1"/>
+          </p:cNvSpPr>
+          <p:nvPr>
+            <p:ph type="body" idx="32"/>
+          </p:nvPr>
+        </p:nvSpPr>
+        <p:spPr/>
+        <p:txBody>
+          <a:bodyPr/>
+          <a:lstStyle/>
+          <a:p>
+            <a:pPr/>
+            <a:r>
+              <a:rPr lang="th-TH" dirty="0"/>
+              <a:t>5</a:t>
+            </a:r>
+          </a:p>
+        </p:txBody>
+      </p:sp>
+      <p:sp>
+        <p:nvSpPr>
+          <p:cNvPr id="17" name="H4"/>
+          <p:cNvSpPr>
+            <a:spLocks noGrp="1"/>
+          </p:cNvSpPr>
+          <p:nvPr>
+            <p:ph type="body" idx="33"/>
+          </p:nvPr>
+        </p:nvSpPr>
+        <p:spPr/>
+        <p:txBody>
+          <a:bodyPr/>
+          <a:lstStyle/>
+          <a:p>
+            <a:pPr/>
+            <a:r>
+              <a:rPr lang="th-TH" dirty="0"/>
+              <a:t>กระทบยอด</a:t>
+            </a:r>
+          </a:p>
+        </p:txBody>
+      </p:sp>
+      <p:sp>
+        <p:nvSpPr>
+          <p:cNvPr id="18" name="B4"/>
+          <p:cNvSpPr>
+            <a:spLocks noGrp="1"/>
+          </p:cNvSpPr>
+          <p:nvPr>
+            <p:ph type="body" idx="34"/>
+          </p:nvPr>
+        </p:nvSpPr>
+        <p:spPr/>
+        <p:txBody>
+          <a:bodyPr/>
+          <a:lstStyle/>
+          <a:p>
+            <a:pPr/>
+            <a:r>
+              <a:rPr lang="th-TH" dirty="0"/>
+              <a:t>จับคู่อัตโนมัติ ส่งรายงาน</a:t>
+            </a:r>
+          </a:p>
+        </p:txBody>
+      </p:sp>
+      <p:sp>
+        <p:nvSpPr>
+          <p:cNvPr id="19" name="RL"/>
+          <p:cNvSpPr>
+            <a:spLocks noGrp="1"/>
+          </p:cNvSpPr>
+          <p:nvPr>
+            <p:ph type="body" idx="35"/>
+          </p:nvPr>
+        </p:nvSpPr>
+        <p:spPr/>
+        <p:txBody>
+          <a:bodyPr/>
+          <a:lstStyle/>
+          <a:p>
+            <a:pPr/>
+            <a:r>
+              <a:rPr lang="th-TH" dirty="0"/>
+              <a:t>ผลลัพธ์</a:t>
+            </a:r>
+          </a:p>
+        </p:txBody>
+      </p:sp>
+      <p:sp>
+        <p:nvSpPr>
+          <p:cNvPr id="20" name="RC"/>
+          <p:cNvSpPr>
+            <a:spLocks noGrp="1"/>
+          </p:cNvSpPr>
+          <p:nvPr>
+            <p:ph type="body" idx="36"/>
+          </p:nvPr>
+        </p:nvSpPr>
+        <p:spPr/>
+        <p:txBody>
+          <a:bodyPr/>
+          <a:lstStyle/>
+          <a:p>
+            <a:pPr/>
+            <a:r>
+              <a:rPr lang="th-TH" dirty="0"/>
+              <a:t>เอกสารหนึ่งใบผ่านครบห้าขั้นโดยไม่มีการคีย์ซ้ำเลย</a:t>
             </a:r>
           </a:p>
         </p:txBody>
@@ -18131,6 +18528,596 @@
 </file>
 
 <file path=ppt/slides/slide11.xml><?xml version="1.0" encoding="utf-8"?>
+<p:sld xmlns:a="http://schemas.openxmlformats.org/drawingml/2006/main" xmlns:r="http://schemas.openxmlformats.org/officeDocument/2006/relationships" xmlns:p="http://schemas.openxmlformats.org/presentationml/2006/main">
+  <p:cSld name="">
+    <p:spTree>
+      <p:nvGrpSpPr>
+        <p:cNvPr id="1" name=""/>
+        <p:cNvGrpSpPr/>
+        <p:nvPr/>
+      </p:nvGrpSpPr>
+      <p:grpSpPr>
+        <a:xfrm>
+          <a:off x="0" y="0"/>
+          <a:ext cx="0" cy="0"/>
+          <a:chOff x="0" y="0"/>
+          <a:chExt cx="0" cy="0"/>
+        </a:xfrm>
+      </p:grpSpPr>
+      <p:sp>
+        <p:nvSpPr>
+          <p:cNvPr id="2" name="Title"/>
+          <p:cNvSpPr>
+            <a:spLocks noGrp="1"/>
+          </p:cNvSpPr>
+          <p:nvPr>
+            <p:ph type="title"/>
+          </p:nvPr>
+        </p:nvSpPr>
+        <p:spPr/>
+        <p:txBody>
+          <a:bodyPr/>
+          <a:lstStyle/>
+          <a:p>
+            <a:pPr/>
+            <a:r>
+              <a:rPr lang="th-TH" dirty="0"/>
+              <a:t>ภาพรวมสถาปัตยกรรมระบบ</a:t>
+            </a:r>
+          </a:p>
+        </p:txBody>
+      </p:sp>
+      <p:sp>
+        <p:nvSpPr>
+          <p:cNvPr id="3" name="Sub"/>
+          <p:cNvSpPr>
+            <a:spLocks noGrp="1"/>
+          </p:cNvSpPr>
+          <p:nvPr>
+            <p:ph type="body" idx="1"/>
+          </p:nvPr>
+        </p:nvSpPr>
+        <p:spPr/>
+        <p:txBody>
+          <a:bodyPr/>
+          <a:lstStyle/>
+          <a:p>
+            <a:pPr/>
+            <a:r>
+              <a:rPr lang="th-TH" dirty="0"/>
+              <a:t>ใช้ชุดชิ้นส่วนมาตรฐาน — กล่องมุมตรง เส้นหักมุมฉาก ไม่มีเงา</a:t>
+            </a:r>
+          </a:p>
+        </p:txBody>
+      </p:sp>
+      <p:sp>
+        <p:nvSpPr>
+          <p:cNvPr id="4" name="Leg"/>
+          <p:cNvSpPr>
+            <a:spLocks noGrp="1"/>
+          </p:cNvSpPr>
+          <p:nvPr>
+            <p:ph type="body" idx="2"/>
+          </p:nvPr>
+        </p:nvSpPr>
+        <p:spPr/>
+        <p:txBody>
+          <a:bodyPr/>
+          <a:lstStyle/>
+          <a:p>
+            <a:pPr/>
+            <a:r>
+              <a:rPr lang="th-TH" dirty="0"/>
+              <a:t>กล่องทึบ = ระบบที่มีอยู่  ·  กล่องมีสีหมวด = ส่วนที่เพิ่ม  ·  เส้นทึบ = ข้อมูลไหลอัตโนมัติ</a:t>
+            </a:r>
+          </a:p>
+        </p:txBody>
+      </p:sp>
+      <p:sp>
+        <p:nvSpPr>
+          <p:cNvPr id="5" name="TL"/>
+          <p:cNvSpPr>
+            <a:spLocks noGrp="1"/>
+          </p:cNvSpPr>
+          <p:nvPr>
+            <p:ph type="body" idx="3"/>
+          </p:nvPr>
+        </p:nvSpPr>
+        <p:spPr/>
+        <p:txBody>
+          <a:bodyPr/>
+          <a:lstStyle/>
+          <a:p>
+            <a:pPr/>
+            <a:r>
+              <a:rPr lang="th-TH" dirty="0"/>
+              <a:t>สรุป</a:t>
+            </a:r>
+          </a:p>
+        </p:txBody>
+      </p:sp>
+      <p:sp>
+        <p:nvSpPr>
+          <p:cNvPr id="6" name="TC"/>
+          <p:cNvSpPr>
+            <a:spLocks noGrp="1"/>
+          </p:cNvSpPr>
+          <p:nvPr>
+            <p:ph type="body" idx="4"/>
+          </p:nvPr>
+        </p:nvSpPr>
+        <p:spPr/>
+        <p:txBody>
+          <a:bodyPr/>
+          <a:lstStyle/>
+          <a:p>
+            <a:pPr/>
+            <a:r>
+              <a:rPr lang="th-TH" dirty="0"/>
+              <a:t>ระบบเดิมไม่ถูกแก้ ของใหม่แทรกเป็นคิวและตัวตรวจกฎคั่นกลางเท่านั้น</a:t>
+            </a:r>
+          </a:p>
+        </p:txBody>
+      </p:sp>
+      <p:sp>
+        <p:nvSpPr>
+          <p:cNvPr id="10" name="Group Zone"/>
+          <p:cNvSpPr/>
+          <p:nvPr/>
+        </p:nvSpPr>
+        <p:spPr>
+          <a:xfrm>
+            <a:off x="3566160" y="2766060"/>
+            <a:ext cx="5257800" cy="1645920"/>
+          </a:xfrm>
+          <a:prstGeom prst="rect">
+            <a:avLst/>
+          </a:prstGeom>
+          <a:solidFill>
+            <a:srgbClr val="E8F6F5"/>
+          </a:solidFill>
+          <a:ln>
+            <a:noFill/>
+          </a:ln>
+        </p:spPr>
+        <p:txBody>
+          <a:bodyPr/>
+          <a:lstStyle/>
+          <a:p>
+            <a:endParaRPr lang="th-TH"/>
+          </a:p>
+        </p:txBody>
+      </p:sp>
+      <p:sp>
+        <p:nvSpPr>
+          <p:cNvPr id="11" name="Group Label"/>
+          <p:cNvSpPr/>
+          <p:nvPr/>
+        </p:nvSpPr>
+        <p:spPr>
+          <a:xfrm>
+            <a:off x="3840480" y="2926080"/>
+            <a:ext cx="3200400" cy="228600"/>
+          </a:xfrm>
+          <a:prstGeom prst="rect">
+            <a:avLst/>
+          </a:prstGeom>
+          <a:noFill/>
+          <a:ln>
+            <a:noFill/>
+          </a:ln>
+        </p:spPr>
+        <p:txBody>
+          <a:bodyPr wrap="square" anchor="ctr" lIns="0" tIns="0" rIns="0" bIns="0" rtlCol="0"/>
+          <a:lstStyle/>
+          <a:p>
+            <a:pPr algn="l" marL="0" indent="0">
+              <a:lnSpc>
+                <a:spcPct val="100000"/>
+              </a:lnSpc>
+              <a:buNone/>
+            </a:pPr>
+            <a:r>
+              <a:rPr lang="th-TH" sz="1200" b="1" spc="120" dirty="0">
+                <a:solidFill>
+                  <a:srgbClr val="216B7F"/>
+                </a:solidFill>
+                <a:latin typeface="+mn-lt"/>
+                <a:ea typeface="+mn-ea"/>
+                <a:cs typeface="+mn-cs"/>
+              </a:rPr>
+              <a:t>ส่วนที่เพิ่มใหม่</a:t>
+            </a:r>
+          </a:p>
+        </p:txBody>
+      </p:sp>
+      <p:sp>
+        <p:nvSpPr>
+          <p:cNvPr id="12" name="Box 1"/>
+          <p:cNvSpPr/>
+          <p:nvPr/>
+        </p:nvSpPr>
+        <p:spPr>
+          <a:xfrm>
+            <a:off x="1143000" y="3223260"/>
+            <a:ext cx="2011680" cy="731520"/>
+          </a:xfrm>
+          <a:prstGeom prst="rect">
+            <a:avLst/>
+          </a:prstGeom>
+          <a:solidFill>
+            <a:srgbClr val="193B36"/>
+          </a:solidFill>
+          <a:ln>
+            <a:noFill/>
+          </a:ln>
+        </p:spPr>
+        <p:txBody>
+          <a:bodyPr wrap="square" anchor="ctr" lIns="0" tIns="0" rIns="0" bIns="0" rtlCol="0"/>
+          <a:lstStyle/>
+          <a:p>
+            <a:pPr algn="ctr" marL="0" indent="0">
+              <a:lnSpc>
+                <a:spcPct val="110000"/>
+              </a:lnSpc>
+              <a:buNone/>
+            </a:pPr>
+            <a:r>
+              <a:rPr lang="th-TH" sz="1200" dirty="0">
+                <a:solidFill>
+                  <a:srgbClr val="FFFFFF"/>
+                </a:solidFill>
+                <a:latin typeface="+mn-lt"/>
+                <a:ea typeface="+mn-ea"/>
+                <a:cs typeface="+mn-cs"/>
+              </a:rPr>
+              <a:t>ระบบ ERP ปัจจุบัน</a:t>
+            </a:r>
+          </a:p>
+        </p:txBody>
+      </p:sp>
+      <p:sp>
+        <p:nvSpPr>
+          <p:cNvPr id="13" name="Box 2"/>
+          <p:cNvSpPr/>
+          <p:nvPr/>
+        </p:nvSpPr>
+        <p:spPr>
+          <a:xfrm>
+            <a:off x="3840480" y="3223260"/>
+            <a:ext cx="2011680" cy="731520"/>
+          </a:xfrm>
+          <a:prstGeom prst="rect">
+            <a:avLst/>
+          </a:prstGeom>
+          <a:solidFill>
+            <a:srgbClr val="FFFFFF"/>
+          </a:solidFill>
+          <a:ln w="12700">
+            <a:solidFill>
+              <a:srgbClr val="2A5EA0"/>
+            </a:solidFill>
+          </a:ln>
+        </p:spPr>
+        <p:txBody>
+          <a:bodyPr wrap="square" anchor="ctr" lIns="0" tIns="0" rIns="0" bIns="0" rtlCol="0"/>
+          <a:lstStyle/>
+          <a:p>
+            <a:pPr algn="ctr" marL="0" indent="0">
+              <a:lnSpc>
+                <a:spcPct val="110000"/>
+              </a:lnSpc>
+              <a:buNone/>
+            </a:pPr>
+            <a:r>
+              <a:rPr lang="th-TH" sz="1200" dirty="0">
+                <a:solidFill>
+                  <a:srgbClr val="333333"/>
+                </a:solidFill>
+                <a:latin typeface="+mn-lt"/>
+                <a:ea typeface="+mn-ea"/>
+                <a:cs typeface="+mn-cs"/>
+              </a:rPr>
+              <a:t>คิวเอกสารกลาง</a:t>
+            </a:r>
+          </a:p>
+        </p:txBody>
+      </p:sp>
+      <p:sp>
+        <p:nvSpPr>
+          <p:cNvPr id="113" name="Box 2 Tab"/>
+          <p:cNvSpPr/>
+          <p:nvPr/>
+        </p:nvSpPr>
+        <p:spPr>
+          <a:xfrm>
+            <a:off x="3954780" y="3337560"/>
+            <a:ext cx="205740" cy="45720"/>
+          </a:xfrm>
+          <a:prstGeom prst="rect">
+            <a:avLst/>
+          </a:prstGeom>
+          <a:solidFill>
+            <a:srgbClr val="2A5EA0"/>
+          </a:solidFill>
+          <a:ln>
+            <a:noFill/>
+          </a:ln>
+        </p:spPr>
+        <p:txBody>
+          <a:bodyPr/>
+          <a:lstStyle/>
+          <a:p>
+            <a:endParaRPr lang="th-TH"/>
+          </a:p>
+        </p:txBody>
+      </p:sp>
+      <p:sp>
+        <p:nvSpPr>
+          <p:cNvPr id="14" name="Box 3"/>
+          <p:cNvSpPr/>
+          <p:nvPr/>
+        </p:nvSpPr>
+        <p:spPr>
+          <a:xfrm>
+            <a:off x="6537960" y="3223260"/>
+            <a:ext cx="2011680" cy="731520"/>
+          </a:xfrm>
+          <a:prstGeom prst="rect">
+            <a:avLst/>
+          </a:prstGeom>
+          <a:solidFill>
+            <a:srgbClr val="FFFFFF"/>
+          </a:solidFill>
+          <a:ln w="12700">
+            <a:solidFill>
+              <a:srgbClr val="BB731B"/>
+            </a:solidFill>
+          </a:ln>
+        </p:spPr>
+        <p:txBody>
+          <a:bodyPr wrap="square" anchor="ctr" lIns="0" tIns="0" rIns="0" bIns="0" rtlCol="0"/>
+          <a:lstStyle/>
+          <a:p>
+            <a:pPr algn="ctr" marL="0" indent="0">
+              <a:lnSpc>
+                <a:spcPct val="110000"/>
+              </a:lnSpc>
+              <a:buNone/>
+            </a:pPr>
+            <a:r>
+              <a:rPr lang="th-TH" sz="1200" dirty="0">
+                <a:solidFill>
+                  <a:srgbClr val="333333"/>
+                </a:solidFill>
+                <a:latin typeface="+mn-lt"/>
+                <a:ea typeface="+mn-ea"/>
+                <a:cs typeface="+mn-cs"/>
+              </a:rPr>
+              <a:t>ตัวตรวจกฎธุรกิจ</a:t>
+            </a:r>
+          </a:p>
+        </p:txBody>
+      </p:sp>
+      <p:sp>
+        <p:nvSpPr>
+          <p:cNvPr id="114" name="Box 3 Tab"/>
+          <p:cNvSpPr/>
+          <p:nvPr/>
+        </p:nvSpPr>
+        <p:spPr>
+          <a:xfrm>
+            <a:off x="6652260" y="3337560"/>
+            <a:ext cx="205740" cy="45720"/>
+          </a:xfrm>
+          <a:prstGeom prst="rect">
+            <a:avLst/>
+          </a:prstGeom>
+          <a:solidFill>
+            <a:srgbClr val="BB731B"/>
+          </a:solidFill>
+          <a:ln>
+            <a:noFill/>
+          </a:ln>
+        </p:spPr>
+        <p:txBody>
+          <a:bodyPr/>
+          <a:lstStyle/>
+          <a:p>
+            <a:endParaRPr lang="th-TH"/>
+          </a:p>
+        </p:txBody>
+      </p:sp>
+      <p:sp>
+        <p:nvSpPr>
+          <p:cNvPr id="15" name="Box 4"/>
+          <p:cNvSpPr/>
+          <p:nvPr/>
+        </p:nvSpPr>
+        <p:spPr>
+          <a:xfrm>
+            <a:off x="9235440" y="3223260"/>
+            <a:ext cx="2011680" cy="731520"/>
+          </a:xfrm>
+          <a:prstGeom prst="rect">
+            <a:avLst/>
+          </a:prstGeom>
+          <a:solidFill>
+            <a:srgbClr val="193B36"/>
+          </a:solidFill>
+          <a:ln>
+            <a:noFill/>
+          </a:ln>
+        </p:spPr>
+        <p:txBody>
+          <a:bodyPr wrap="square" anchor="ctr" lIns="0" tIns="0" rIns="0" bIns="0" rtlCol="0"/>
+          <a:lstStyle/>
+          <a:p>
+            <a:pPr algn="ctr" marL="0" indent="0">
+              <a:lnSpc>
+                <a:spcPct val="110000"/>
+              </a:lnSpc>
+              <a:buNone/>
+            </a:pPr>
+            <a:r>
+              <a:rPr lang="th-TH" sz="1200" dirty="0">
+                <a:solidFill>
+                  <a:srgbClr val="FFFFFF"/>
+                </a:solidFill>
+                <a:latin typeface="+mn-lt"/>
+                <a:ea typeface="+mn-ea"/>
+                <a:cs typeface="+mn-cs"/>
+              </a:rPr>
+              <a:t>ระบบบัญชี</a:t>
+            </a:r>
+          </a:p>
+        </p:txBody>
+      </p:sp>
+      <p:sp>
+        <p:nvSpPr>
+          <p:cNvPr id="16" name="Link 1"/>
+          <p:cNvSpPr/>
+          <p:nvPr/>
+        </p:nvSpPr>
+        <p:spPr>
+          <a:xfrm>
+            <a:off x="3268980" y="3589020"/>
+            <a:ext cx="457200" cy="0"/>
+          </a:xfrm>
+          <a:prstGeom prst="line">
+            <a:avLst/>
+          </a:prstGeom>
+          <a:noFill/>
+          <a:ln w="15875" cap="flat">
+            <a:solidFill>
+              <a:srgbClr val="216B7F"/>
+            </a:solidFill>
+            <a:prstDash val="solid"/>
+            <a:tailEnd type="triangle" w="med" len="med"/>
+          </a:ln>
+        </p:spPr>
+        <p:txBody>
+          <a:bodyPr/>
+          <a:lstStyle/>
+          <a:p>
+            <a:endParaRPr lang="th-TH"/>
+          </a:p>
+        </p:txBody>
+      </p:sp>
+      <p:sp>
+        <p:nvSpPr>
+          <p:cNvPr id="17" name="Link 2"/>
+          <p:cNvSpPr/>
+          <p:nvPr/>
+        </p:nvSpPr>
+        <p:spPr>
+          <a:xfrm>
+            <a:off x="5966460" y="3589020"/>
+            <a:ext cx="457200" cy="0"/>
+          </a:xfrm>
+          <a:prstGeom prst="line">
+            <a:avLst/>
+          </a:prstGeom>
+          <a:noFill/>
+          <a:ln w="15875" cap="flat">
+            <a:solidFill>
+              <a:srgbClr val="216B7F"/>
+            </a:solidFill>
+            <a:prstDash val="solid"/>
+            <a:tailEnd type="triangle" w="med" len="med"/>
+          </a:ln>
+        </p:spPr>
+        <p:txBody>
+          <a:bodyPr/>
+          <a:lstStyle/>
+          <a:p>
+            <a:endParaRPr lang="th-TH"/>
+          </a:p>
+        </p:txBody>
+      </p:sp>
+      <p:sp>
+        <p:nvSpPr>
+          <p:cNvPr id="18" name="Link 3"/>
+          <p:cNvSpPr/>
+          <p:nvPr/>
+        </p:nvSpPr>
+        <p:spPr>
+          <a:xfrm>
+            <a:off x="8663940" y="3589020"/>
+            <a:ext cx="457200" cy="0"/>
+          </a:xfrm>
+          <a:prstGeom prst="line">
+            <a:avLst/>
+          </a:prstGeom>
+          <a:noFill/>
+          <a:ln w="15875" cap="flat">
+            <a:solidFill>
+              <a:srgbClr val="216B7F"/>
+            </a:solidFill>
+            <a:prstDash val="solid"/>
+            <a:tailEnd type="triangle" w="med" len="med"/>
+          </a:ln>
+        </p:spPr>
+        <p:txBody>
+          <a:bodyPr/>
+          <a:lstStyle/>
+          <a:p>
+            <a:endParaRPr lang="th-TH"/>
+          </a:p>
+        </p:txBody>
+      </p:sp>
+      <p:sp>
+        <p:nvSpPr>
+          <p:cNvPr id="19" name="Edge Label"/>
+          <p:cNvSpPr/>
+          <p:nvPr/>
+        </p:nvSpPr>
+        <p:spPr>
+          <a:xfrm>
+            <a:off x="5806440" y="3268980"/>
+            <a:ext cx="822960" cy="228600"/>
+          </a:xfrm>
+          <a:prstGeom prst="rect">
+            <a:avLst/>
+          </a:prstGeom>
+          <a:noFill/>
+          <a:ln>
+            <a:noFill/>
+          </a:ln>
+        </p:spPr>
+        <p:txBody>
+          <a:bodyPr wrap="square" anchor="ctr" lIns="0" tIns="0" rIns="0" bIns="0" rtlCol="0"/>
+          <a:lstStyle/>
+          <a:p>
+            <a:pPr algn="ctr" marL="0" indent="0">
+              <a:lnSpc>
+                <a:spcPct val="100000"/>
+              </a:lnSpc>
+              <a:buNone/>
+            </a:pPr>
+            <a:r>
+              <a:rPr lang="th-TH" sz="1000" dirty="0">
+                <a:solidFill>
+                  <a:srgbClr val="5F5F5F"/>
+                </a:solidFill>
+                <a:latin typeface="+mn-lt"/>
+                <a:ea typeface="+mn-ea"/>
+                <a:cs typeface="+mn-cs"/>
+              </a:rPr>
+              <a:t>ผ่านกฎ</a:t>
+            </a:r>
+          </a:p>
+        </p:txBody>
+      </p:sp>
+    </p:spTree>
+  </p:cSld>
+  <p:clrMapOvr>
+    <a:masterClrMapping/>
+  </p:clrMapOvr>
+</p:sld>
+</file>
+
+<file path=ppt/slides/slide12.xml><?xml version="1.0" encoding="utf-8"?>
 <p:sld xmlns:a="http://schemas.openxmlformats.org/drawingml/2006/main" xmlns:r="http://schemas.openxmlformats.org/officeDocument/2006/relationships" xmlns:p="http://schemas.openxmlformats.org/presentationml/2006/main">
   <p:cSld name="">
     <p:spTree>
@@ -19667,105 +20654,6 @@
 </p:sld>
 </file>
 
-<file path=ppt/slides/slide12.xml><?xml version="1.0" encoding="utf-8"?>
-<p:sld xmlns:a="http://schemas.openxmlformats.org/drawingml/2006/main" xmlns:r="http://schemas.openxmlformats.org/officeDocument/2006/relationships" xmlns:p="http://schemas.openxmlformats.org/presentationml/2006/main">
-  <p:cSld name="">
-    <p:spTree>
-      <p:nvGrpSpPr>
-        <p:cNvPr id="1" name=""/>
-        <p:cNvGrpSpPr/>
-        <p:nvPr/>
-      </p:nvGrpSpPr>
-      <p:grpSpPr>
-        <a:xfrm>
-          <a:off x="0" y="0"/>
-          <a:ext cx="0" cy="0"/>
-          <a:chOff x="0" y="0"/>
-          <a:chExt cx="0" cy="0"/>
-        </a:xfrm>
-      </p:grpSpPr>
-      <p:sp>
-        <p:nvSpPr>
-          <p:cNvPr id="2" name="Title"/>
-          <p:cNvSpPr>
-            <a:spLocks noGrp="1"/>
-          </p:cNvSpPr>
-          <p:nvPr>
-            <p:ph type="title"/>
-          </p:nvPr>
-        </p:nvSpPr>
-        <p:spPr/>
-        <p:txBody>
-          <a:bodyPr/>
-          <a:lstStyle/>
-          <a:p>
-            <a:pPr/>
-            <a:r>
-              <a:rPr lang="th-TH" dirty="0"/>
-              <a:t>ขอบเขตบริการของ NCT</a:t>
-            </a:r>
-          </a:p>
-        </p:txBody>
-      </p:sp>
-      <p:sp>
-        <p:nvSpPr>
-          <p:cNvPr id="3" name="Body"/>
-          <p:cNvSpPr>
-            <a:spLocks noGrp="1"/>
-          </p:cNvSpPr>
-          <p:nvPr>
-            <p:ph type="body" idx="1"/>
-          </p:nvPr>
-        </p:nvSpPr>
-        <p:spPr/>
-        <p:txBody>
-          <a:bodyPr/>
-          <a:lstStyle/>
-          <a:p>
-            <a:pPr/>
-            <a:r>
-              <a:rPr lang="th-TH" dirty="0"/>
-              <a:t>วางระบบโครงสร้างพื้นฐานไอทีสำหรับองค์กร</a:t>
-            </a:r>
-          </a:p>
-          <a:p>
-            <a:pPr lvl="1"/>
-            <a:r>
-              <a:rPr lang="th-TH" dirty="0"/>
-              <a:t>ออกแบบเครือข่าย ระบบสำรองข้อมูล และความปลอดภัย</a:t>
-            </a:r>
-          </a:p>
-          <a:p>
-            <a:pPr/>
-            <a:r>
-              <a:rPr lang="th-TH" dirty="0"/>
-              <a:t>ดูแลระบบต่อเนื่องแบบ Managed Service</a:t>
-            </a:r>
-          </a:p>
-          <a:p>
-            <a:pPr lvl="1"/>
-            <a:r>
-              <a:rPr lang="th-TH" dirty="0"/>
-              <a:t>มีทีมซัพพอร์ตตอบกลับภายใน SLA ที่ตกลงกัน</a:t>
-            </a:r>
-          </a:p>
-          <a:p>
-            <a:pPr/>
-            <a:r>
-              <a:rPr lang="th-TH" dirty="0"/>
-              <a:t>ให้คำปรึกษาการย้ายระบบขึ้นคลาวด์</a:t>
-            </a:r>
-          </a:p>
-        </p:txBody>
-      </p:sp>
-    </p:spTree>
-  </p:cSld>
-  <p:clrMapOvr>
-    <a:masterClrMapping/>
-  </p:clrMapOvr>
-</p:sld>
-</file>
-
 <file path=ppt/slides/slide13.xml><?xml version="1.0" encoding="utf-8"?>
 <p:sld xmlns:a="http://schemas.openxmlformats.org/drawingml/2006/main" xmlns:r="http://schemas.openxmlformats.org/officeDocument/2006/relationships" xmlns:p="http://schemas.openxmlformats.org/presentationml/2006/main">
   <p:cSld name="">
@@ -19801,14 +20689,14 @@
             <a:pPr/>
             <a:r>
               <a:rPr lang="th-TH" dirty="0"/>
-              <a:t>สามเสาหลักของบริการ</a:t>
-            </a:r>
-          </a:p>
-        </p:txBody>
-      </p:sp>
-      <p:sp>
-        <p:nvSpPr>
-          <p:cNvPr id="3" name="C1H"/>
+              <a:t>ขอบเขตบริการของ NCT</a:t>
+            </a:r>
+          </a:p>
+        </p:txBody>
+      </p:sp>
+      <p:sp>
+        <p:nvSpPr>
+          <p:cNvPr id="3" name="Body"/>
           <p:cNvSpPr>
             <a:spLocks noGrp="1"/>
           </p:cNvSpPr>
@@ -19824,122 +20712,35 @@
             <a:pPr/>
             <a:r>
               <a:rPr lang="th-TH" dirty="0"/>
-              <a:t>Infrastructure</a:t>
-            </a:r>
-          </a:p>
-        </p:txBody>
-      </p:sp>
-      <p:sp>
-        <p:nvSpPr>
-          <p:cNvPr id="4" name="C1B"/>
-          <p:cNvSpPr>
-            <a:spLocks noGrp="1"/>
-          </p:cNvSpPr>
-          <p:nvPr>
-            <p:ph type="body" idx="2"/>
-          </p:nvPr>
-        </p:nvSpPr>
-        <p:spPr/>
-        <p:txBody>
-          <a:bodyPr/>
-          <a:lstStyle/>
+              <a:t>วางระบบโครงสร้างพื้นฐานไอทีสำหรับองค์กร</a:t>
+            </a:r>
+          </a:p>
+          <a:p>
+            <a:pPr lvl="1"/>
+            <a:r>
+              <a:rPr lang="th-TH" dirty="0"/>
+              <a:t>ออกแบบเครือข่าย ระบบสำรองข้อมูล และความปลอดภัย</a:t>
+            </a:r>
+          </a:p>
           <a:p>
             <a:pPr/>
             <a:r>
               <a:rPr lang="th-TH" dirty="0"/>
-              <a:t>ออกแบบและติดตั้งเครือข่าย เซิร์ฟเวอร์ และระบบสำรองข้อมูล</a:t>
-            </a:r>
-          </a:p>
-        </p:txBody>
-      </p:sp>
-      <p:sp>
-        <p:nvSpPr>
-          <p:cNvPr id="5" name="C2H"/>
-          <p:cNvSpPr>
-            <a:spLocks noGrp="1"/>
-          </p:cNvSpPr>
-          <p:nvPr>
-            <p:ph type="body" idx="3"/>
-          </p:nvPr>
-        </p:nvSpPr>
-        <p:spPr/>
-        <p:txBody>
-          <a:bodyPr/>
-          <a:lstStyle/>
+              <a:t>ดูแลระบบต่อเนื่องแบบ Managed Service</a:t>
+            </a:r>
+          </a:p>
+          <a:p>
+            <a:pPr lvl="1"/>
+            <a:r>
+              <a:rPr lang="th-TH" dirty="0"/>
+              <a:t>มีทีมซัพพอร์ตตอบกลับภายใน SLA ที่ตกลงกัน</a:t>
+            </a:r>
+          </a:p>
           <a:p>
             <a:pPr/>
             <a:r>
               <a:rPr lang="th-TH" dirty="0"/>
-              <a:t>Managed Service</a:t>
-            </a:r>
-          </a:p>
-        </p:txBody>
-      </p:sp>
-      <p:sp>
-        <p:nvSpPr>
-          <p:cNvPr id="6" name="C2B"/>
-          <p:cNvSpPr>
-            <a:spLocks noGrp="1"/>
-          </p:cNvSpPr>
-          <p:nvPr>
-            <p:ph type="body" idx="4"/>
-          </p:nvPr>
-        </p:nvSpPr>
-        <p:spPr/>
-        <p:txBody>
-          <a:bodyPr/>
-          <a:lstStyle/>
-          <a:p>
-            <a:pPr/>
-            <a:r>
-              <a:rPr lang="th-TH" dirty="0"/>
-              <a:t>ดูแลระบบรายเดือน พร้อมทีมซัพพอร์ตและรายงานสุขภาพระบบ</a:t>
-            </a:r>
-          </a:p>
-        </p:txBody>
-      </p:sp>
-      <p:sp>
-        <p:nvSpPr>
-          <p:cNvPr id="7" name="C3H"/>
-          <p:cNvSpPr>
-            <a:spLocks noGrp="1"/>
-          </p:cNvSpPr>
-          <p:nvPr>
-            <p:ph type="body" idx="5"/>
-          </p:nvPr>
-        </p:nvSpPr>
-        <p:spPr/>
-        <p:txBody>
-          <a:bodyPr/>
-          <a:lstStyle/>
-          <a:p>
-            <a:pPr/>
-            <a:r>
-              <a:rPr lang="th-TH" dirty="0"/>
-              <a:t>Cloud &amp; Security</a:t>
-            </a:r>
-          </a:p>
-        </p:txBody>
-      </p:sp>
-      <p:sp>
-        <p:nvSpPr>
-          <p:cNvPr id="8" name="C3B"/>
-          <p:cNvSpPr>
-            <a:spLocks noGrp="1"/>
-          </p:cNvSpPr>
-          <p:nvPr>
-            <p:ph type="body" idx="6"/>
-          </p:nvPr>
-        </p:nvSpPr>
-        <p:spPr/>
-        <p:txBody>
-          <a:bodyPr/>
-          <a:lstStyle/>
-          <a:p>
-            <a:pPr/>
-            <a:r>
-              <a:rPr lang="th-TH" dirty="0"/>
-              <a:t>ย้ายระบบขึ้นคลาวด์ และวางมาตรการความปลอดภัยตามมาตรฐาน</a:t>
+              <a:t>ให้คำปรึกษาการย้ายระบบขึ้นคลาวด์</a:t>
             </a:r>
           </a:p>
         </p:txBody>
@@ -19987,14 +20788,14 @@
             <a:pPr/>
             <a:r>
               <a:rPr lang="th-TH" dirty="0"/>
-              <a:t>ตัวเลขที่บอกเรื่องเรา</a:t>
-            </a:r>
-          </a:p>
-        </p:txBody>
-      </p:sp>
-      <p:sp>
-        <p:nvSpPr>
-          <p:cNvPr id="3" name="F1"/>
+              <a:t>สามเสาหลักของบริการ</a:t>
+            </a:r>
+          </a:p>
+        </p:txBody>
+      </p:sp>
+      <p:sp>
+        <p:nvSpPr>
+          <p:cNvPr id="3" name="C1H"/>
           <p:cNvSpPr>
             <a:spLocks noGrp="1"/>
           </p:cNvSpPr>
@@ -20010,14 +20811,14 @@
             <a:pPr/>
             <a:r>
               <a:rPr lang="th-TH" dirty="0"/>
-              <a:t>12</a:t>
-            </a:r>
-          </a:p>
-        </p:txBody>
-      </p:sp>
-      <p:sp>
-        <p:nvSpPr>
-          <p:cNvPr id="4" name="F1L"/>
+              <a:t>Infrastructure</a:t>
+            </a:r>
+          </a:p>
+        </p:txBody>
+      </p:sp>
+      <p:sp>
+        <p:nvSpPr>
+          <p:cNvPr id="4" name="C1B"/>
           <p:cNvSpPr>
             <a:spLocks noGrp="1"/>
           </p:cNvSpPr>
@@ -20033,14 +20834,14 @@
             <a:pPr/>
             <a:r>
               <a:rPr lang="th-TH" dirty="0"/>
-              <a:t>ปีที่ให้บริการองค์กรไทย</a:t>
-            </a:r>
-          </a:p>
-        </p:txBody>
-      </p:sp>
-      <p:sp>
-        <p:nvSpPr>
-          <p:cNvPr id="5" name="F2"/>
+              <a:t>ออกแบบและติดตั้งเครือข่าย เซิร์ฟเวอร์ และระบบสำรองข้อมูล</a:t>
+            </a:r>
+          </a:p>
+        </p:txBody>
+      </p:sp>
+      <p:sp>
+        <p:nvSpPr>
+          <p:cNvPr id="5" name="C2H"/>
           <p:cNvSpPr>
             <a:spLocks noGrp="1"/>
           </p:cNvSpPr>
@@ -20056,14 +20857,14 @@
             <a:pPr/>
             <a:r>
               <a:rPr lang="th-TH" dirty="0"/>
-              <a:t>99.9%</a:t>
-            </a:r>
-          </a:p>
-        </p:txBody>
-      </p:sp>
-      <p:sp>
-        <p:nvSpPr>
-          <p:cNvPr id="6" name="F2L"/>
+              <a:t>Managed Service</a:t>
+            </a:r>
+          </a:p>
+        </p:txBody>
+      </p:sp>
+      <p:sp>
+        <p:nvSpPr>
+          <p:cNvPr id="6" name="C2B"/>
           <p:cNvSpPr>
             <a:spLocks noGrp="1"/>
           </p:cNvSpPr>
@@ -20079,14 +20880,14 @@
             <a:pPr/>
             <a:r>
               <a:rPr lang="th-TH" dirty="0"/>
-              <a:t>Uptime เฉลี่ยของระบบที่ดูแล</a:t>
-            </a:r>
-          </a:p>
-        </p:txBody>
-      </p:sp>
-      <p:sp>
-        <p:nvSpPr>
-          <p:cNvPr id="7" name="F3"/>
+              <a:t>ดูแลระบบรายเดือน พร้อมทีมซัพพอร์ตและรายงานสุขภาพระบบ</a:t>
+            </a:r>
+          </a:p>
+        </p:txBody>
+      </p:sp>
+      <p:sp>
+        <p:nvSpPr>
+          <p:cNvPr id="7" name="C3H"/>
           <p:cNvSpPr>
             <a:spLocks noGrp="1"/>
           </p:cNvSpPr>
@@ -20102,14 +20903,14 @@
             <a:pPr/>
             <a:r>
               <a:rPr lang="th-TH" dirty="0"/>
-              <a:t>24/7</a:t>
-            </a:r>
-          </a:p>
-        </p:txBody>
-      </p:sp>
-      <p:sp>
-        <p:nvSpPr>
-          <p:cNvPr id="8" name="F3L"/>
+              <a:t>Cloud &amp; Security</a:t>
+            </a:r>
+          </a:p>
+        </p:txBody>
+      </p:sp>
+      <p:sp>
+        <p:nvSpPr>
+          <p:cNvPr id="8" name="C3B"/>
           <p:cNvSpPr>
             <a:spLocks noGrp="1"/>
           </p:cNvSpPr>
@@ -20125,30 +20926,7 @@
             <a:pPr/>
             <a:r>
               <a:rPr lang="th-TH" dirty="0"/>
-              <a:t>ทีมเฝ้าระวังและตอบกลับ</a:t>
-            </a:r>
-          </a:p>
-        </p:txBody>
-      </p:sp>
-      <p:sp>
-        <p:nvSpPr>
-          <p:cNvPr id="9" name="FN"/>
-          <p:cNvSpPr>
-            <a:spLocks noGrp="1"/>
-          </p:cNvSpPr>
-          <p:nvPr>
-            <p:ph type="body" idx="7"/>
-          </p:nvPr>
-        </p:nvSpPr>
-        <p:spPr/>
-        <p:txBody>
-          <a:bodyPr/>
-          <a:lstStyle/>
-          <a:p>
-            <a:pPr/>
-            <a:r>
-              <a:rPr lang="th-TH" dirty="0"/>
-              <a:t>ข้อมูล ณ ไตรมาส 1 ปี 2569</a:t>
+              <a:t>ย้ายระบบขึ้นคลาวด์ และวางมาตรการความปลอดภัยตามมาตรฐาน</a:t>
             </a:r>
           </a:p>
         </p:txBody>
@@ -20180,7 +20958,30 @@
       </p:grpSpPr>
       <p:sp>
         <p:nvSpPr>
-          <p:cNvPr id="2" name="Q"/>
+          <p:cNvPr id="2" name="Title"/>
+          <p:cNvSpPr>
+            <a:spLocks noGrp="1"/>
+          </p:cNvSpPr>
+          <p:nvPr>
+            <p:ph type="title"/>
+          </p:nvPr>
+        </p:nvSpPr>
+        <p:spPr/>
+        <p:txBody>
+          <a:bodyPr/>
+          <a:lstStyle/>
+          <a:p>
+            <a:pPr/>
+            <a:r>
+              <a:rPr lang="th-TH" dirty="0"/>
+              <a:t>ตัวเลขที่บอกเรื่องเรา</a:t>
+            </a:r>
+          </a:p>
+        </p:txBody>
+      </p:sp>
+      <p:sp>
+        <p:nvSpPr>
+          <p:cNvPr id="3" name="F1"/>
           <p:cNvSpPr>
             <a:spLocks noGrp="1"/>
           </p:cNvSpPr>
@@ -20196,14 +20997,14 @@
             <a:pPr/>
             <a:r>
               <a:rPr lang="th-TH" dirty="0"/>
-              <a:t>ระบบไม่ล่มอีกเลยตั้งแต่เปลี่ยนมาใช้ทีมนี้ดูแล และเราวางแผนงบประมาณได้ล่วงหน้าจริง ๆ</a:t>
-            </a:r>
-          </a:p>
-        </p:txBody>
-      </p:sp>
-      <p:sp>
-        <p:nvSpPr>
-          <p:cNvPr id="3" name="A"/>
+              <a:t>12</a:t>
+            </a:r>
+          </a:p>
+        </p:txBody>
+      </p:sp>
+      <p:sp>
+        <p:nvSpPr>
+          <p:cNvPr id="4" name="F1L"/>
           <p:cNvSpPr>
             <a:spLocks noGrp="1"/>
           </p:cNvSpPr>
@@ -20219,7 +21020,122 @@
             <a:pPr/>
             <a:r>
               <a:rPr lang="th-TH" dirty="0"/>
-              <a:t>คุณสมชาย ป. — ผู้จัดการฝ่ายไอที, บริษัทตัวอย่าง จำกัด</a:t>
+              <a:t>ปีที่ให้บริการองค์กรไทย</a:t>
+            </a:r>
+          </a:p>
+        </p:txBody>
+      </p:sp>
+      <p:sp>
+        <p:nvSpPr>
+          <p:cNvPr id="5" name="F2"/>
+          <p:cNvSpPr>
+            <a:spLocks noGrp="1"/>
+          </p:cNvSpPr>
+          <p:nvPr>
+            <p:ph type="body" idx="3"/>
+          </p:nvPr>
+        </p:nvSpPr>
+        <p:spPr/>
+        <p:txBody>
+          <a:bodyPr/>
+          <a:lstStyle/>
+          <a:p>
+            <a:pPr/>
+            <a:r>
+              <a:rPr lang="th-TH" dirty="0"/>
+              <a:t>99.9%</a:t>
+            </a:r>
+          </a:p>
+        </p:txBody>
+      </p:sp>
+      <p:sp>
+        <p:nvSpPr>
+          <p:cNvPr id="6" name="F2L"/>
+          <p:cNvSpPr>
+            <a:spLocks noGrp="1"/>
+          </p:cNvSpPr>
+          <p:nvPr>
+            <p:ph type="body" idx="4"/>
+          </p:nvPr>
+        </p:nvSpPr>
+        <p:spPr/>
+        <p:txBody>
+          <a:bodyPr/>
+          <a:lstStyle/>
+          <a:p>
+            <a:pPr/>
+            <a:r>
+              <a:rPr lang="th-TH" dirty="0"/>
+              <a:t>Uptime เฉลี่ยของระบบที่ดูแล</a:t>
+            </a:r>
+          </a:p>
+        </p:txBody>
+      </p:sp>
+      <p:sp>
+        <p:nvSpPr>
+          <p:cNvPr id="7" name="F3"/>
+          <p:cNvSpPr>
+            <a:spLocks noGrp="1"/>
+          </p:cNvSpPr>
+          <p:nvPr>
+            <p:ph type="body" idx="5"/>
+          </p:nvPr>
+        </p:nvSpPr>
+        <p:spPr/>
+        <p:txBody>
+          <a:bodyPr/>
+          <a:lstStyle/>
+          <a:p>
+            <a:pPr/>
+            <a:r>
+              <a:rPr lang="th-TH" dirty="0"/>
+              <a:t>24/7</a:t>
+            </a:r>
+          </a:p>
+        </p:txBody>
+      </p:sp>
+      <p:sp>
+        <p:nvSpPr>
+          <p:cNvPr id="8" name="F3L"/>
+          <p:cNvSpPr>
+            <a:spLocks noGrp="1"/>
+          </p:cNvSpPr>
+          <p:nvPr>
+            <p:ph type="body" idx="6"/>
+          </p:nvPr>
+        </p:nvSpPr>
+        <p:spPr/>
+        <p:txBody>
+          <a:bodyPr/>
+          <a:lstStyle/>
+          <a:p>
+            <a:pPr/>
+            <a:r>
+              <a:rPr lang="th-TH" dirty="0"/>
+              <a:t>ทีมเฝ้าระวังและตอบกลับ</a:t>
+            </a:r>
+          </a:p>
+        </p:txBody>
+      </p:sp>
+      <p:sp>
+        <p:nvSpPr>
+          <p:cNvPr id="9" name="FN"/>
+          <p:cNvSpPr>
+            <a:spLocks noGrp="1"/>
+          </p:cNvSpPr>
+          <p:nvPr>
+            <p:ph type="body" idx="7"/>
+          </p:nvPr>
+        </p:nvSpPr>
+        <p:spPr/>
+        <p:txBody>
+          <a:bodyPr/>
+          <a:lstStyle/>
+          <a:p>
+            <a:pPr/>
+            <a:r>
+              <a:rPr lang="th-TH" dirty="0"/>
+              <a:t>ข้อมูล ณ ไตรมาส 1 ปี 2569</a:t>
             </a:r>
           </a:p>
         </p:txBody>
@@ -20233,6 +21149,77 @@
 </file>
 
 <file path=ppt/slides/slide16.xml><?xml version="1.0" encoding="utf-8"?>
+<p:sld xmlns:a="http://schemas.openxmlformats.org/drawingml/2006/main" xmlns:r="http://schemas.openxmlformats.org/officeDocument/2006/relationships" xmlns:p="http://schemas.openxmlformats.org/presentationml/2006/main">
+  <p:cSld name="">
+    <p:spTree>
+      <p:nvGrpSpPr>
+        <p:cNvPr id="1" name=""/>
+        <p:cNvGrpSpPr/>
+        <p:nvPr/>
+      </p:nvGrpSpPr>
+      <p:grpSpPr>
+        <a:xfrm>
+          <a:off x="0" y="0"/>
+          <a:ext cx="0" cy="0"/>
+          <a:chOff x="0" y="0"/>
+          <a:chExt cx="0" cy="0"/>
+        </a:xfrm>
+      </p:grpSpPr>
+      <p:sp>
+        <p:nvSpPr>
+          <p:cNvPr id="2" name="Q"/>
+          <p:cNvSpPr>
+            <a:spLocks noGrp="1"/>
+          </p:cNvSpPr>
+          <p:nvPr>
+            <p:ph type="body" idx="1"/>
+          </p:nvPr>
+        </p:nvSpPr>
+        <p:spPr/>
+        <p:txBody>
+          <a:bodyPr/>
+          <a:lstStyle/>
+          <a:p>
+            <a:pPr/>
+            <a:r>
+              <a:rPr lang="th-TH" dirty="0"/>
+              <a:t>ระบบไม่ล่มอีกเลยตั้งแต่เปลี่ยนมาใช้ทีมนี้ดูแล และเราวางแผนงบประมาณได้ล่วงหน้าจริง ๆ</a:t>
+            </a:r>
+          </a:p>
+        </p:txBody>
+      </p:sp>
+      <p:sp>
+        <p:nvSpPr>
+          <p:cNvPr id="3" name="A"/>
+          <p:cNvSpPr>
+            <a:spLocks noGrp="1"/>
+          </p:cNvSpPr>
+          <p:nvPr>
+            <p:ph type="body" idx="2"/>
+          </p:nvPr>
+        </p:nvSpPr>
+        <p:spPr/>
+        <p:txBody>
+          <a:bodyPr/>
+          <a:lstStyle/>
+          <a:p>
+            <a:pPr/>
+            <a:r>
+              <a:rPr lang="th-TH" dirty="0"/>
+              <a:t>คุณสมชาย ป. — ผู้จัดการฝ่ายไอที, บริษัทตัวอย่าง จำกัด</a:t>
+            </a:r>
+          </a:p>
+        </p:txBody>
+      </p:sp>
+    </p:spTree>
+  </p:cSld>
+  <p:clrMapOvr>
+    <a:masterClrMapping/>
+  </p:clrMapOvr>
+</p:sld>
+</file>
+
+<file path=ppt/slides/slide17.xml><?xml version="1.0" encoding="utf-8"?>
 <p:sld xmlns:a="http://schemas.openxmlformats.org/drawingml/2006/main" xmlns:r="http://schemas.openxmlformats.org/officeDocument/2006/relationships" xmlns:p="http://schemas.openxmlformats.org/presentationml/2006/main">
   <p:cSld name="">
     <p:spTree>
@@ -20963,7 +21950,7 @@
 </p:sld>
 </file>
 
-<file path=ppt/slides/slide17.xml><?xml version="1.0" encoding="utf-8"?>
+<file path=ppt/slides/slide18.xml><?xml version="1.0" encoding="utf-8"?>
 <p:sld xmlns:a="http://schemas.openxmlformats.org/drawingml/2006/main" xmlns:r="http://schemas.openxmlformats.org/officeDocument/2006/relationships" xmlns:p="http://schemas.openxmlformats.org/presentationml/2006/main">
   <p:cSld name="">
     <p:spTree>
@@ -21216,7 +22203,7 @@
 </p:sld>
 </file>
 
-<file path=ppt/slides/slide18.xml><?xml version="1.0" encoding="utf-8"?>
+<file path=ppt/slides/slide19.xml><?xml version="1.0" encoding="utf-8"?>
 <p:sld xmlns:a="http://schemas.openxmlformats.org/drawingml/2006/main" xmlns:r="http://schemas.openxmlformats.org/officeDocument/2006/relationships" xmlns:p="http://schemas.openxmlformats.org/presentationml/2006/main">
   <p:cSld name="">
     <p:spTree>
@@ -21702,174 +22689,6 @@
 </p:sld>
 </file>
 
-<file path=ppt/slides/slide19.xml><?xml version="1.0" encoding="utf-8"?>
-<p:sld xmlns:a="http://schemas.openxmlformats.org/drawingml/2006/main" xmlns:r="http://schemas.openxmlformats.org/officeDocument/2006/relationships" xmlns:p="http://schemas.openxmlformats.org/presentationml/2006/main">
-  <p:cSld name="">
-    <p:spTree>
-      <p:nvGrpSpPr>
-        <p:cNvPr id="1" name=""/>
-        <p:cNvGrpSpPr/>
-        <p:nvPr/>
-      </p:nvGrpSpPr>
-      <p:grpSpPr>
-        <a:xfrm>
-          <a:off x="0" y="0"/>
-          <a:ext cx="0" cy="0"/>
-          <a:chOff x="0" y="0"/>
-          <a:chExt cx="0" cy="0"/>
-        </a:xfrm>
-      </p:grpSpPr>
-      <p:sp>
-        <p:nvSpPr>
-          <p:cNvPr id="2" name="Title"/>
-          <p:cNvSpPr>
-            <a:spLocks noGrp="1"/>
-          </p:cNvSpPr>
-          <p:nvPr>
-            <p:ph type="title"/>
-          </p:nvPr>
-        </p:nvSpPr>
-        <p:spPr/>
-        <p:txBody>
-          <a:bodyPr/>
-          <a:lstStyle/>
-          <a:p>
-            <a:pPr/>
-            <a:r>
-              <a:rPr lang="th-TH" dirty="0"/>
-              <a:t>ขอบคุณครับ</a:t>
-            </a:r>
-          </a:p>
-        </p:txBody>
-      </p:sp>
-      <p:sp>
-        <p:nvSpPr>
-          <p:cNvPr id="3" name="NSL"/>
-          <p:cNvSpPr>
-            <a:spLocks noGrp="1"/>
-          </p:cNvSpPr>
-          <p:nvPr>
-            <p:ph type="body" idx="1"/>
-          </p:nvPr>
-        </p:nvSpPr>
-        <p:spPr/>
-        <p:txBody>
-          <a:bodyPr/>
-          <a:lstStyle/>
-          <a:p>
-            <a:pPr/>
-            <a:r>
-              <a:rPr lang="th-TH" dirty="0"/>
-              <a:t>ขั้นตอนถัดไป</a:t>
-            </a:r>
-          </a:p>
-        </p:txBody>
-      </p:sp>
-      <p:sp>
-        <p:nvSpPr>
-          <p:cNvPr id="4" name="NS"/>
-          <p:cNvSpPr>
-            <a:spLocks noGrp="1"/>
-          </p:cNvSpPr>
-          <p:nvPr>
-            <p:ph type="body" idx="2"/>
-          </p:nvPr>
-        </p:nvSpPr>
-        <p:spPr/>
-        <p:txBody>
-          <a:bodyPr/>
-          <a:lstStyle/>
-          <a:p>
-            <a:pPr/>
-            <a:r>
-              <a:rPr lang="th-TH" dirty="0"/>
-              <a:t>ยืนยันแพ็กเกจและขอบเขตงานรายกระบวนการ</a:t>
-            </a:r>
-          </a:p>
-          <a:p>
-            <a:pPr/>
-            <a:r>
-              <a:rPr lang="th-TH" dirty="0"/>
-              <a:t>เปิดสิทธิ์เข้าระบบให้ทีมสำรวจ 2 รายการที่ยังติดข้อจำกัด</a:t>
-            </a:r>
-          </a:p>
-          <a:p>
-            <a:pPr/>
-            <a:r>
-              <a:rPr lang="th-TH" dirty="0"/>
-              <a:t>ลงนามสัญญาและเริ่มรอบที่ 1 ภายใน 30 วัน</a:t>
-            </a:r>
-          </a:p>
-        </p:txBody>
-      </p:sp>
-      <p:sp>
-        <p:nvSpPr>
-          <p:cNvPr id="5" name="DB"/>
-          <p:cNvSpPr>
-            <a:spLocks noGrp="1"/>
-          </p:cNvSpPr>
-          <p:nvPr>
-            <p:ph type="body" idx="3"/>
-          </p:nvPr>
-        </p:nvSpPr>
-        <p:spPr/>
-        <p:txBody>
-          <a:bodyPr/>
-          <a:lstStyle/>
-          <a:p>
-            <a:pPr/>
-            <a:r>
-              <a:rPr lang="th-TH" dirty="0"/>
-              <a:t>ต้องการคำตอบภายใน 30 กันยายน 2569 เพื่อเริ่มรอบแรกในไตรมาสนี้</a:t>
-            </a:r>
-          </a:p>
-        </p:txBody>
-      </p:sp>
-      <p:sp>
-        <p:nvSpPr>
-          <p:cNvPr id="6" name="Contact"/>
-          <p:cNvSpPr>
-            <a:spLocks noGrp="1"/>
-          </p:cNvSpPr>
-          <p:nvPr>
-            <p:ph type="body" idx="4"/>
-          </p:nvPr>
-        </p:nvSpPr>
-        <p:spPr/>
-        <p:txBody>
-          <a:bodyPr/>
-          <a:lstStyle/>
-          <a:p>
-            <a:pPr/>
-            <a:r>
-              <a:rPr lang="th-TH" dirty="0"/>
-              <a:t>โทร · 02-XXX-XXXX</a:t>
-            </a:r>
-          </a:p>
-          <a:p>
-            <a:pPr/>
-            <a:r>
-              <a:rPr lang="th-TH" dirty="0"/>
-              <a:t>อีเมล · contact@nctthai.com</a:t>
-            </a:r>
-          </a:p>
-          <a:p>
-            <a:pPr/>
-            <a:r>
-              <a:rPr lang="th-TH" dirty="0"/>
-              <a:t>เว็บไซต์ · nctthai.com</a:t>
-            </a:r>
-          </a:p>
-        </p:txBody>
-      </p:sp>
-    </p:spTree>
-  </p:cSld>
-  <p:clrMapOvr>
-    <a:masterClrMapping/>
-  </p:clrMapOvr>
-</p:sld>
-</file>
-
 <file path=ppt/slides/slide2.xml><?xml version="1.0" encoding="utf-8"?>
 <p:sld xmlns:a="http://schemas.openxmlformats.org/drawingml/2006/main" xmlns:r="http://schemas.openxmlformats.org/officeDocument/2006/relationships" xmlns:p="http://schemas.openxmlformats.org/presentationml/2006/main">
   <p:cSld name="">
@@ -21889,7 +22708,101 @@
       </p:grpSpPr>
       <p:sp>
         <p:nvSpPr>
-          <p:cNvPr id="2" name="Num"/>
+          <p:cNvPr id="2" name="Title"/>
+          <p:cNvSpPr>
+            <a:spLocks noGrp="1"/>
+          </p:cNvSpPr>
+          <p:nvPr>
+            <p:ph type="ctrTitle"/>
+          </p:nvPr>
+        </p:nvSpPr>
+        <p:spPr/>
+        <p:txBody>
+          <a:bodyPr/>
+          <a:lstStyle/>
+          <a:p>
+            <a:pPr/>
+            <a:r>
+              <a:rPr lang="th-TH" dirty="0"/>
+              <a:t>ข้อเสนอโครงการวางระบบบัญชีอัตโนมัติ</a:t>
+            </a:r>
+          </a:p>
+        </p:txBody>
+      </p:sp>
+      <p:sp>
+        <p:nvSpPr>
+          <p:cNvPr id="3" name="Subtitle"/>
+          <p:cNvSpPr>
+            <a:spLocks noGrp="1"/>
+          </p:cNvSpPr>
+          <p:nvPr>
+            <p:ph type="subTitle" idx="1"/>
+          </p:nvPr>
+        </p:nvSpPr>
+        <p:spPr/>
+        <p:txBody>
+          <a:bodyPr/>
+          <a:lstStyle/>
+          <a:p>
+            <a:pPr/>
+            <a:r>
+              <a:rPr lang="th-TH" dirty="0"/>
+              <a:t>New Computer Technology Consulting Co., Ltd. · 2569</a:t>
+            </a:r>
+          </a:p>
+        </p:txBody>
+      </p:sp>
+    </p:spTree>
+  </p:cSld>
+  <p:clrMapOvr>
+    <a:masterClrMapping/>
+  </p:clrMapOvr>
+</p:sld>
+</file>
+
+<file path=ppt/slides/slide20.xml><?xml version="1.0" encoding="utf-8"?>
+<p:sld xmlns:a="http://schemas.openxmlformats.org/drawingml/2006/main" xmlns:r="http://schemas.openxmlformats.org/officeDocument/2006/relationships" xmlns:p="http://schemas.openxmlformats.org/presentationml/2006/main">
+  <p:cSld name="">
+    <p:spTree>
+      <p:nvGrpSpPr>
+        <p:cNvPr id="1" name=""/>
+        <p:cNvGrpSpPr/>
+        <p:nvPr/>
+      </p:nvGrpSpPr>
+      <p:grpSpPr>
+        <a:xfrm>
+          <a:off x="0" y="0"/>
+          <a:ext cx="0" cy="0"/>
+          <a:chOff x="0" y="0"/>
+          <a:chExt cx="0" cy="0"/>
+        </a:xfrm>
+      </p:grpSpPr>
+      <p:sp>
+        <p:nvSpPr>
+          <p:cNvPr id="2" name="Title"/>
+          <p:cNvSpPr>
+            <a:spLocks noGrp="1"/>
+          </p:cNvSpPr>
+          <p:nvPr>
+            <p:ph type="title"/>
+          </p:nvPr>
+        </p:nvSpPr>
+        <p:spPr/>
+        <p:txBody>
+          <a:bodyPr/>
+          <a:lstStyle/>
+          <a:p>
+            <a:pPr/>
+            <a:r>
+              <a:rPr lang="th-TH" dirty="0"/>
+              <a:t>ขอบคุณครับ</a:t>
+            </a:r>
+          </a:p>
+        </p:txBody>
+      </p:sp>
+      <p:sp>
+        <p:nvSpPr>
+          <p:cNvPr id="3" name="NSL"/>
           <p:cNvSpPr>
             <a:spLocks noGrp="1"/>
           </p:cNvSpPr>
@@ -21905,19 +22818,19 @@
             <a:pPr/>
             <a:r>
               <a:rPr lang="th-TH" dirty="0"/>
-              <a:t>00</a:t>
-            </a:r>
-          </a:p>
-        </p:txBody>
-      </p:sp>
-      <p:sp>
-        <p:nvSpPr>
-          <p:cNvPr id="3" name="Title"/>
-          <p:cNvSpPr>
-            <a:spLocks noGrp="1"/>
-          </p:cNvSpPr>
-          <p:nvPr>
-            <p:ph type="title"/>
+              <a:t>ขั้นตอนถัดไป</a:t>
+            </a:r>
+          </a:p>
+        </p:txBody>
+      </p:sp>
+      <p:sp>
+        <p:nvSpPr>
+          <p:cNvPr id="4" name="NS"/>
+          <p:cNvSpPr>
+            <a:spLocks noGrp="1"/>
+          </p:cNvSpPr>
+          <p:nvPr>
+            <p:ph type="body" idx="2"/>
           </p:nvPr>
         </p:nvSpPr>
         <p:spPr/>
@@ -21928,19 +22841,33 @@
             <a:pPr/>
             <a:r>
               <a:rPr lang="th-TH" dirty="0"/>
-              <a:t>หัวข้อนำเสนอ</a:t>
-            </a:r>
-          </a:p>
-        </p:txBody>
-      </p:sp>
-      <p:sp>
-        <p:nvSpPr>
-          <p:cNvPr id="4" name="List"/>
-          <p:cNvSpPr>
-            <a:spLocks noGrp="1"/>
-          </p:cNvSpPr>
-          <p:nvPr>
-            <p:ph type="body" idx="2"/>
+              <a:t>ยืนยันแพ็กเกจและขอบเขตงานรายกระบวนการ</a:t>
+            </a:r>
+          </a:p>
+          <a:p>
+            <a:pPr/>
+            <a:r>
+              <a:rPr lang="th-TH" dirty="0"/>
+              <a:t>เปิดสิทธิ์เข้าระบบให้ทีมสำรวจ 2 รายการที่ยังติดข้อจำกัด</a:t>
+            </a:r>
+          </a:p>
+          <a:p>
+            <a:pPr/>
+            <a:r>
+              <a:rPr lang="th-TH" dirty="0"/>
+              <a:t>ลงนามสัญญาและเริ่มรอบที่ 1 ภายใน 30 วัน</a:t>
+            </a:r>
+          </a:p>
+        </p:txBody>
+      </p:sp>
+      <p:sp>
+        <p:nvSpPr>
+          <p:cNvPr id="5" name="DB"/>
+          <p:cNvSpPr>
+            <a:spLocks noGrp="1"/>
+          </p:cNvSpPr>
+          <p:nvPr>
+            <p:ph type="body" idx="3"/>
           </p:nvPr>
         </p:nvSpPr>
         <p:spPr/>
@@ -21951,42 +22878,44 @@
             <a:pPr/>
             <a:r>
               <a:rPr lang="th-TH" dirty="0"/>
-              <a:t>บริบทและปัญหาที่พบ</a:t>
-            </a:r>
-          </a:p>
+              <a:t>ต้องการคำตอบภายใน 30 กันยายน 2569 เพื่อเริ่มรอบแรกในไตรมาสนี้</a:t>
+            </a:r>
+          </a:p>
+        </p:txBody>
+      </p:sp>
+      <p:sp>
+        <p:nvSpPr>
+          <p:cNvPr id="6" name="Contact"/>
+          <p:cNvSpPr>
+            <a:spLocks noGrp="1"/>
+          </p:cNvSpPr>
+          <p:nvPr>
+            <p:ph type="body" idx="4"/>
+          </p:nvPr>
+        </p:nvSpPr>
+        <p:spPr/>
+        <p:txBody>
+          <a:bodyPr/>
+          <a:lstStyle/>
           <a:p>
             <a:pPr/>
             <a:r>
               <a:rPr lang="th-TH" dirty="0"/>
-              <a:t>ผลลัพธ์ที่ข้อเสนอนี้ให้</a:t>
+              <a:t>โทร · 02-XXX-XXXX</a:t>
             </a:r>
           </a:p>
           <a:p>
             <a:pPr/>
             <a:r>
               <a:rPr lang="th-TH" dirty="0"/>
-              <a:t>วิธีการทำงานและสถาปัตยกรรม</a:t>
+              <a:t>อีเมล · contact@nctthai.com</a:t>
             </a:r>
           </a:p>
           <a:p>
             <a:pPr/>
             <a:r>
               <a:rPr lang="th-TH" dirty="0"/>
-              <a:t>ขอบเขตงานรายกระบวนการ</a:t>
-            </a:r>
-          </a:p>
-          <a:p>
-            <a:pPr/>
-            <a:r>
-              <a:rPr lang="th-TH" dirty="0"/>
-              <a:t>ทีมงานและประสบการณ์</a:t>
-            </a:r>
-          </a:p>
-          <a:p>
-            <a:pPr/>
-            <a:r>
-              <a:rPr lang="th-TH" dirty="0"/>
-              <a:t>แพ็กเกจและงบประมาณ</a:t>
+              <a:t>เว็บไซต์ · nctthai.com</a:t>
             </a:r>
           </a:p>
         </p:txBody>
@@ -22018,7 +22947,7 @@
       </p:grpSpPr>
       <p:sp>
         <p:nvSpPr>
-          <p:cNvPr id="2" name="Number"/>
+          <p:cNvPr id="2" name="Num"/>
           <p:cNvSpPr>
             <a:spLocks noGrp="1"/>
           </p:cNvSpPr>
@@ -22034,7 +22963,7 @@
             <a:pPr/>
             <a:r>
               <a:rPr lang="th-TH" dirty="0"/>
-              <a:t>01</a:t>
+              <a:t>00</a:t>
             </a:r>
           </a:p>
         </p:txBody>
@@ -22057,14 +22986,14 @@
             <a:pPr/>
             <a:r>
               <a:rPr lang="th-TH" dirty="0"/>
-              <a:t>บริบทและปัญหา</a:t>
-            </a:r>
-          </a:p>
-        </p:txBody>
-      </p:sp>
-      <p:sp>
-        <p:nvSpPr>
-          <p:cNvPr id="4" name="Desc"/>
+              <a:t>หัวข้อนำเสนอ</a:t>
+            </a:r>
+          </a:p>
+        </p:txBody>
+      </p:sp>
+      <p:sp>
+        <p:nvSpPr>
+          <p:cNvPr id="4" name="List"/>
           <p:cNvSpPr>
             <a:spLocks noGrp="1"/>
           </p:cNvSpPr>
@@ -22080,7 +23009,42 @@
             <a:pPr/>
             <a:r>
               <a:rPr lang="th-TH" dirty="0"/>
-              <a:t>สิ่งที่เราพบจากการสำรวจงานบัญชีของท่านสองสัปดาห์</a:t>
+              <a:t>บริบทและปัญหาที่พบ</a:t>
+            </a:r>
+          </a:p>
+          <a:p>
+            <a:pPr/>
+            <a:r>
+              <a:rPr lang="th-TH" dirty="0"/>
+              <a:t>ผลลัพธ์ที่ข้อเสนอนี้ให้</a:t>
+            </a:r>
+          </a:p>
+          <a:p>
+            <a:pPr/>
+            <a:r>
+              <a:rPr lang="th-TH" dirty="0"/>
+              <a:t>วิธีการทำงานและสถาปัตยกรรม</a:t>
+            </a:r>
+          </a:p>
+          <a:p>
+            <a:pPr/>
+            <a:r>
+              <a:rPr lang="th-TH" dirty="0"/>
+              <a:t>ขอบเขตงานรายกระบวนการ</a:t>
+            </a:r>
+          </a:p>
+          <a:p>
+            <a:pPr/>
+            <a:r>
+              <a:rPr lang="th-TH" dirty="0"/>
+              <a:t>ทีมงานและประสบการณ์</a:t>
+            </a:r>
+          </a:p>
+          <a:p>
+            <a:pPr/>
+            <a:r>
+              <a:rPr lang="th-TH" dirty="0"/>
+              <a:t>แพ็กเกจและงบประมาณ</a:t>
             </a:r>
           </a:p>
         </p:txBody>
@@ -22112,7 +23076,30 @@
       </p:grpSpPr>
       <p:sp>
         <p:nvSpPr>
-          <p:cNvPr id="2" name="Title"/>
+          <p:cNvPr id="2" name="Number"/>
+          <p:cNvSpPr>
+            <a:spLocks noGrp="1"/>
+          </p:cNvSpPr>
+          <p:nvPr>
+            <p:ph type="body" idx="1"/>
+          </p:nvPr>
+        </p:nvSpPr>
+        <p:spPr/>
+        <p:txBody>
+          <a:bodyPr/>
+          <a:lstStyle/>
+          <a:p>
+            <a:pPr/>
+            <a:r>
+              <a:rPr lang="th-TH" dirty="0"/>
+              <a:t>01</a:t>
+            </a:r>
+          </a:p>
+        </p:txBody>
+      </p:sp>
+      <p:sp>
+        <p:nvSpPr>
+          <p:cNvPr id="3" name="Title"/>
           <p:cNvSpPr>
             <a:spLocks noGrp="1"/>
           </p:cNvSpPr>
@@ -22128,19 +23115,19 @@
             <a:pPr/>
             <a:r>
               <a:rPr lang="th-TH" dirty="0"/>
-              <a:t>สภาพระบบบัญชีปัจจุบัน</a:t>
-            </a:r>
-          </a:p>
-        </p:txBody>
-      </p:sp>
-      <p:sp>
-        <p:nvSpPr>
-          <p:cNvPr id="3" name="CtxK"/>
-          <p:cNvSpPr>
-            <a:spLocks noGrp="1"/>
-          </p:cNvSpPr>
-          <p:nvPr>
-            <p:ph type="body" idx="1"/>
+              <a:t>บริบทและปัญหา</a:t>
+            </a:r>
+          </a:p>
+        </p:txBody>
+      </p:sp>
+      <p:sp>
+        <p:nvSpPr>
+          <p:cNvPr id="4" name="Desc"/>
+          <p:cNvSpPr>
+            <a:spLocks noGrp="1"/>
+          </p:cNvSpPr>
+          <p:nvPr>
+            <p:ph type="body" idx="2"/>
           </p:nvPr>
         </p:nvSpPr>
         <p:spPr/>
@@ -22151,164 +23138,7 @@
             <a:pPr/>
             <a:r>
               <a:rPr lang="th-TH" dirty="0"/>
-              <a:t>สภาพปัจจุบัน</a:t>
-            </a:r>
-          </a:p>
-        </p:txBody>
-      </p:sp>
-      <p:sp>
-        <p:nvSpPr>
-          <p:cNvPr id="4" name="CtxB"/>
-          <p:cNvSpPr>
-            <a:spLocks noGrp="1"/>
-          </p:cNvSpPr>
-          <p:nvPr>
-            <p:ph type="body" idx="2"/>
-          </p:nvPr>
-        </p:nvSpPr>
-        <p:spPr/>
-        <p:txBody>
-          <a:bodyPr/>
-          <a:lstStyle/>
-          <a:p>
-            <a:pPr/>
-            <a:r>
-              <a:rPr lang="th-TH" dirty="0"/>
-              <a:t>คีย์เอกสารซ้ำสามระบบ ไม่มีจุดตรวจกลาง</a:t>
-            </a:r>
-          </a:p>
-          <a:p>
-            <a:pPr lvl="1"/>
-            <a:r>
-              <a:rPr lang="th-TH" dirty="0"/>
-              <a:t>เอกสารเข้าเฉลี่ย 1,200 ใบต่อเดือน</a:t>
-            </a:r>
-          </a:p>
-          <a:p>
-            <a:pPr/>
-            <a:r>
-              <a:rPr lang="th-TH" dirty="0"/>
-              <a:t>ปิดงบล่าช้าเฉลี่ย 6 วันทำการ</a:t>
-            </a:r>
-          </a:p>
-          <a:p>
-            <a:pPr/>
-            <a:r>
-              <a:rPr lang="th-TH" dirty="0"/>
-              <a:t>ไม่มี audit trail ของการแก้ไขรายการ</a:t>
-            </a:r>
-          </a:p>
-        </p:txBody>
-      </p:sp>
-      <p:sp>
-        <p:nvSpPr>
-          <p:cNvPr id="5" name="OutK"/>
-          <p:cNvSpPr>
-            <a:spLocks noGrp="1"/>
-          </p:cNvSpPr>
-          <p:nvPr>
-            <p:ph type="body" idx="3"/>
-          </p:nvPr>
-        </p:nvSpPr>
-        <p:spPr/>
-        <p:txBody>
-          <a:bodyPr/>
-          <a:lstStyle/>
-          <a:p>
-            <a:pPr/>
-            <a:r>
-              <a:rPr lang="th-TH" dirty="0"/>
-              <a:t>สิ่งที่จะเกิดขึ้น</a:t>
-            </a:r>
-          </a:p>
-        </p:txBody>
-      </p:sp>
-      <p:sp>
-        <p:nvSpPr>
-          <p:cNvPr id="6" name="OutB"/>
-          <p:cNvSpPr>
-            <a:spLocks noGrp="1"/>
-          </p:cNvSpPr>
-          <p:nvPr>
-            <p:ph type="body" idx="4"/>
-          </p:nvPr>
-        </p:nvSpPr>
-        <p:spPr/>
-        <p:txBody>
-          <a:bodyPr/>
-          <a:lstStyle/>
-          <a:p>
-            <a:pPr/>
-            <a:r>
-              <a:rPr lang="th-TH" dirty="0"/>
-              <a:t>คีย์จุดเดียว ระบบกระจายต่อให้อัตโนมัติ</a:t>
-            </a:r>
-          </a:p>
-          <a:p>
-            <a:pPr lvl="1"/>
-            <a:r>
-              <a:rPr lang="th-TH" dirty="0"/>
-              <a:t>ลดเวลาคีย์ต่อใบจาก 4 นาที เหลือ 40 วินาที</a:t>
-            </a:r>
-          </a:p>
-          <a:p>
-            <a:pPr/>
-            <a:r>
-              <a:rPr lang="th-TH" dirty="0"/>
-              <a:t>ปิดงบภายใน 2 วันทำการ</a:t>
-            </a:r>
-          </a:p>
-          <a:p>
-            <a:pPr/>
-            <a:r>
-              <a:rPr lang="th-TH" dirty="0"/>
-              <a:t>บันทึกทุกการแก้ไขพร้อมผู้ทำและเวลา</a:t>
-            </a:r>
-          </a:p>
-        </p:txBody>
-      </p:sp>
-      <p:sp>
-        <p:nvSpPr>
-          <p:cNvPr id="7" name="TkL"/>
-          <p:cNvSpPr>
-            <a:spLocks noGrp="1"/>
-          </p:cNvSpPr>
-          <p:nvPr>
-            <p:ph type="body" idx="5"/>
-          </p:nvPr>
-        </p:nvSpPr>
-        <p:spPr/>
-        <p:txBody>
-          <a:bodyPr/>
-          <a:lstStyle/>
-          <a:p>
-            <a:pPr/>
-            <a:r>
-              <a:rPr lang="th-TH" dirty="0"/>
-              <a:t>สรุป</a:t>
-            </a:r>
-          </a:p>
-        </p:txBody>
-      </p:sp>
-      <p:sp>
-        <p:nvSpPr>
-          <p:cNvPr id="8" name="TkC"/>
-          <p:cNvSpPr>
-            <a:spLocks noGrp="1"/>
-          </p:cNvSpPr>
-          <p:nvPr>
-            <p:ph type="body" idx="6"/>
-          </p:nvPr>
-        </p:nvSpPr>
-        <p:spPr/>
-        <p:txBody>
-          <a:bodyPr/>
-          <a:lstStyle/>
-          <a:p>
-            <a:pPr/>
-            <a:r>
-              <a:rPr lang="th-TH" dirty="0"/>
-              <a:t>ปัญหาหลักคือการคีย์ซ้ำ ไม่ใช่จำนวนเอกสาร</a:t>
+              <a:t>สิ่งที่เราพบจากการสำรวจงานบัญชีของท่านสองสัปดาห์</a:t>
             </a:r>
           </a:p>
         </p:txBody>
@@ -22356,34 +23186,37 @@
             <a:pPr/>
             <a:r>
               <a:rPr lang="th-TH" dirty="0"/>
-              <a:t>ปิดงบ พ.ค. ใช้ 9 วัน นานสุดในรอบครึ่งปี</a:t>
-            </a:r>
-          </a:p>
-        </p:txBody>
-      </p:sp>
-      <p:graphicFrame>
-        <p:nvGraphicFramePr>
-          <p:cNvPr id="3" name="Close Days"/>
-          <p:cNvGraphicFramePr>
-            <a:graphicFrameLocks noGrp="1"/>
-          </p:cNvGraphicFramePr>
-          <p:nvPr>
-            <p:ph type="chart" idx="1"/>
-          </p:nvPr>
-        </p:nvGraphicFramePr>
-        <p:xfrm>
-          <a:off x="914400" y="1691640"/>
-          <a:ext cx="6847840" cy="3474720"/>
-        </p:xfrm>
-        <a:graphic>
-          <a:graphicData uri="http://schemas.openxmlformats.org/drawingml/2006/chart">
-            <c:chart xmlns:c="http://schemas.openxmlformats.org/drawingml/2006/chart" r:id="rId2"/>
-          </a:graphicData>
-        </a:graphic>
-      </p:graphicFrame>
-      <p:sp>
-        <p:nvSpPr>
-          <p:cNvPr id="4" name="Fig"/>
+              <a:t>สภาพระบบบัญชีปัจจุบัน</a:t>
+            </a:r>
+          </a:p>
+        </p:txBody>
+      </p:sp>
+      <p:sp>
+        <p:nvSpPr>
+          <p:cNvPr id="3" name="CtxK"/>
+          <p:cNvSpPr>
+            <a:spLocks noGrp="1"/>
+          </p:cNvSpPr>
+          <p:nvPr>
+            <p:ph type="body" idx="1"/>
+          </p:nvPr>
+        </p:nvSpPr>
+        <p:spPr/>
+        <p:txBody>
+          <a:bodyPr/>
+          <a:lstStyle/>
+          <a:p>
+            <a:pPr/>
+            <a:r>
+              <a:rPr lang="th-TH" dirty="0"/>
+              <a:t>สภาพปัจจุบัน</a:t>
+            </a:r>
+          </a:p>
+        </p:txBody>
+      </p:sp>
+      <p:sp>
+        <p:nvSpPr>
+          <p:cNvPr id="4" name="CtxB"/>
           <p:cNvSpPr>
             <a:spLocks noGrp="1"/>
           </p:cNvSpPr>
@@ -22399,14 +23232,35 @@
             <a:pPr/>
             <a:r>
               <a:rPr lang="th-TH" dirty="0"/>
-              <a:t>9 วัน</a:t>
-            </a:r>
-          </a:p>
-        </p:txBody>
-      </p:sp>
-      <p:sp>
-        <p:nvSpPr>
-          <p:cNvPr id="5" name="FigL"/>
+              <a:t>คีย์เอกสารซ้ำสามระบบ ไม่มีจุดตรวจกลาง</a:t>
+            </a:r>
+          </a:p>
+          <a:p>
+            <a:pPr lvl="1"/>
+            <a:r>
+              <a:rPr lang="th-TH" dirty="0"/>
+              <a:t>เอกสารเข้าเฉลี่ย 1,200 ใบต่อเดือน</a:t>
+            </a:r>
+          </a:p>
+          <a:p>
+            <a:pPr/>
+            <a:r>
+              <a:rPr lang="th-TH" dirty="0"/>
+              <a:t>ปิดงบล่าช้าเฉลี่ย 6 วันทำการ</a:t>
+            </a:r>
+          </a:p>
+          <a:p>
+            <a:pPr/>
+            <a:r>
+              <a:rPr lang="th-TH" dirty="0"/>
+              <a:t>ไม่มี audit trail ของการแก้ไขรายการ</a:t>
+            </a:r>
+          </a:p>
+        </p:txBody>
+      </p:sp>
+      <p:sp>
+        <p:nvSpPr>
+          <p:cNvPr id="5" name="OutK"/>
           <p:cNvSpPr>
             <a:spLocks noGrp="1"/>
           </p:cNvSpPr>
@@ -22422,14 +23276,14 @@
             <a:pPr/>
             <a:r>
               <a:rPr lang="th-TH" dirty="0"/>
-              <a:t>เวลาปิดงบ พ.ค. 2569 · เป้าหมาย 2 วัน</a:t>
-            </a:r>
-          </a:p>
-        </p:txBody>
-      </p:sp>
-      <p:sp>
-        <p:nvSpPr>
-          <p:cNvPr id="6" name="Ins"/>
+              <a:t>สิ่งที่จะเกิดขึ้น</a:t>
+            </a:r>
+          </a:p>
+        </p:txBody>
+      </p:sp>
+      <p:sp>
+        <p:nvSpPr>
+          <p:cNvPr id="6" name="OutB"/>
           <p:cNvSpPr>
             <a:spLocks noGrp="1"/>
           </p:cNvSpPr>
@@ -22445,56 +23299,40 @@
             <a:pPr/>
             <a:r>
               <a:rPr lang="th-TH" dirty="0"/>
-              <a:t>เดือนที่เอกสารเข้ามากสุด คือเดือนที่ปิดงบนานสุด</a:t>
+              <a:t>คีย์จุดเดียว ระบบกระจายต่อให้อัตโนมัติ</a:t>
+            </a:r>
+          </a:p>
+          <a:p>
+            <a:pPr lvl="1"/>
+            <a:r>
+              <a:rPr lang="th-TH" dirty="0"/>
+              <a:t>ลดเวลาคีย์ต่อใบจาก 4 นาที เหลือ 40 วินาที</a:t>
             </a:r>
           </a:p>
           <a:p>
             <a:pPr/>
             <a:r>
               <a:rPr lang="th-TH" dirty="0"/>
-              <a:t>ทุกเดือนเกินเป้าอย่างน้อยสามเท่า</a:t>
+              <a:t>ปิดงบภายใน 2 วันทำการ</a:t>
             </a:r>
           </a:p>
           <a:p>
             <a:pPr/>
             <a:r>
               <a:rPr lang="th-TH" dirty="0"/>
-              <a:t>ความล่าช้าเกิดที่ขั้นกระทบยอด ไม่ใช่ขั้นคีย์</a:t>
-            </a:r>
-          </a:p>
-        </p:txBody>
-      </p:sp>
-      <p:sp>
-        <p:nvSpPr>
-          <p:cNvPr id="7" name="Src"/>
+              <a:t>บันทึกทุกการแก้ไขพร้อมผู้ทำและเวลา</a:t>
+            </a:r>
+          </a:p>
+        </p:txBody>
+      </p:sp>
+      <p:sp>
+        <p:nvSpPr>
+          <p:cNvPr id="7" name="TkL"/>
           <p:cNvSpPr>
             <a:spLocks noGrp="1"/>
           </p:cNvSpPr>
           <p:nvPr>
             <p:ph type="body" idx="5"/>
-          </p:nvPr>
-        </p:nvSpPr>
-        <p:spPr/>
-        <p:txBody>
-          <a:bodyPr/>
-          <a:lstStyle/>
-          <a:p>
-            <a:pPr/>
-            <a:r>
-              <a:rPr lang="th-TH" dirty="0"/>
-              <a:t>ระบบบัญชีของลูกค้า · ม.ค.–มิ.ย. 2569 · หน่วย: วันทำการ</a:t>
-            </a:r>
-          </a:p>
-        </p:txBody>
-      </p:sp>
-      <p:sp>
-        <p:nvSpPr>
-          <p:cNvPr id="8" name="TkL"/>
-          <p:cNvSpPr>
-            <a:spLocks noGrp="1"/>
-          </p:cNvSpPr>
-          <p:nvPr>
-            <p:ph type="body" idx="6"/>
           </p:nvPr>
         </p:nvSpPr>
         <p:spPr/>
@@ -22512,12 +23350,12 @@
       </p:sp>
       <p:sp>
         <p:nvSpPr>
-          <p:cNvPr id="9" name="TkC"/>
-          <p:cNvSpPr>
-            <a:spLocks noGrp="1"/>
-          </p:cNvSpPr>
-          <p:nvPr>
-            <p:ph type="body" idx="7"/>
+          <p:cNvPr id="8" name="TkC"/>
+          <p:cNvSpPr>
+            <a:spLocks noGrp="1"/>
+          </p:cNvSpPr>
+          <p:nvPr>
+            <p:ph type="body" idx="6"/>
           </p:nvPr>
         </p:nvSpPr>
         <p:spPr/>
@@ -22528,7 +23366,7 @@
             <a:pPr/>
             <a:r>
               <a:rPr lang="th-TH" dirty="0"/>
-              <a:t>เวลาปิดงบแปรตามปริมาณเอกสาร การลดงานคีย์ซ้ำจึงลดเวลาปิดงบได้จริง</a:t>
+              <a:t>ปัญหาหลักคือการคีย์ซ้ำ ไม่ใช่จำนวนเอกสาร</a:t>
             </a:r>
           </a:p>
         </p:txBody>
@@ -22576,19 +23414,39 @@
             <a:pPr/>
             <a:r>
               <a:rPr lang="th-TH" dirty="0"/>
-              <a:t>ก่อนและหลังใช้บริการ</a:t>
-            </a:r>
-          </a:p>
-        </p:txBody>
-      </p:sp>
-      <p:sp>
-        <p:nvSpPr>
-          <p:cNvPr id="3" name="L"/>
-          <p:cNvSpPr>
-            <a:spLocks noGrp="1"/>
-          </p:cNvSpPr>
-          <p:nvPr>
-            <p:ph type="body" idx="1"/>
+              <a:t>ปิดงบ พ.ค. ใช้ 9 วัน นานสุดในรอบครึ่งปี</a:t>
+            </a:r>
+          </a:p>
+        </p:txBody>
+      </p:sp>
+      <p:graphicFrame>
+        <p:nvGraphicFramePr>
+          <p:cNvPr id="3" name="Close Days"/>
+          <p:cNvGraphicFramePr>
+            <a:graphicFrameLocks noGrp="1"/>
+          </p:cNvGraphicFramePr>
+          <p:nvPr>
+            <p:ph type="chart" idx="1"/>
+          </p:nvPr>
+        </p:nvGraphicFramePr>
+        <p:xfrm>
+          <a:off x="914400" y="1691640"/>
+          <a:ext cx="6847840" cy="3474720"/>
+        </p:xfrm>
+        <a:graphic>
+          <a:graphicData uri="http://schemas.openxmlformats.org/drawingml/2006/chart">
+            <c:chart xmlns:c="http://schemas.openxmlformats.org/drawingml/2006/chart" r:id="rId2"/>
+          </a:graphicData>
+        </a:graphic>
+      </p:graphicFrame>
+      <p:sp>
+        <p:nvSpPr>
+          <p:cNvPr id="4" name="Fig"/>
+          <p:cNvSpPr>
+            <a:spLocks noGrp="1"/>
+          </p:cNvSpPr>
+          <p:nvPr>
+            <p:ph type="body" idx="2"/>
           </p:nvPr>
         </p:nvSpPr>
         <p:spPr/>
@@ -22599,33 +23457,79 @@
             <a:pPr/>
             <a:r>
               <a:rPr lang="th-TH" dirty="0"/>
-              <a:t>ก่อน</a:t>
-            </a:r>
-          </a:p>
-          <a:p>
-            <a:pPr lvl="1"/>
+              <a:t>9 วัน</a:t>
+            </a:r>
+          </a:p>
+        </p:txBody>
+      </p:sp>
+      <p:sp>
+        <p:nvSpPr>
+          <p:cNvPr id="5" name="FigL"/>
+          <p:cNvSpPr>
+            <a:spLocks noGrp="1"/>
+          </p:cNvSpPr>
+          <p:nvPr>
+            <p:ph type="body" idx="3"/>
+          </p:nvPr>
+        </p:nvSpPr>
+        <p:spPr/>
+        <p:txBody>
+          <a:bodyPr/>
+          <a:lstStyle/>
+          <a:p>
+            <a:pPr/>
             <a:r>
               <a:rPr lang="th-TH" dirty="0"/>
-              <a:t>ระบบล่มบ่อย ไม่มีคนดูแลประจำ</a:t>
-            </a:r>
-          </a:p>
-          <a:p>
-            <a:pPr lvl="1"/>
+              <a:t>เวลาปิดงบ พ.ค. 2569 · เป้าหมาย 2 วัน</a:t>
+            </a:r>
+          </a:p>
+        </p:txBody>
+      </p:sp>
+      <p:sp>
+        <p:nvSpPr>
+          <p:cNvPr id="6" name="Ins"/>
+          <p:cNvSpPr>
+            <a:spLocks noGrp="1"/>
+          </p:cNvSpPr>
+          <p:nvPr>
+            <p:ph type="body" idx="4"/>
+          </p:nvPr>
+        </p:nvSpPr>
+        <p:spPr/>
+        <p:txBody>
+          <a:bodyPr/>
+          <a:lstStyle/>
+          <a:p>
+            <a:pPr/>
             <a:r>
               <a:rPr lang="th-TH" dirty="0"/>
-              <a:t>ค่าใช้จ่ายไม่แน่นอน</a:t>
-            </a:r>
-          </a:p>
-        </p:txBody>
-      </p:sp>
-      <p:sp>
-        <p:nvSpPr>
-          <p:cNvPr id="4" name="R"/>
-          <p:cNvSpPr>
-            <a:spLocks noGrp="1"/>
-          </p:cNvSpPr>
-          <p:nvPr>
-            <p:ph type="body" idx="2"/>
+              <a:t>เดือนที่เอกสารเข้ามากสุด คือเดือนที่ปิดงบนานสุด</a:t>
+            </a:r>
+          </a:p>
+          <a:p>
+            <a:pPr/>
+            <a:r>
+              <a:rPr lang="th-TH" dirty="0"/>
+              <a:t>ทุกเดือนเกินเป้าอย่างน้อยสามเท่า</a:t>
+            </a:r>
+          </a:p>
+          <a:p>
+            <a:pPr/>
+            <a:r>
+              <a:rPr lang="th-TH" dirty="0"/>
+              <a:t>ความล่าช้าเกิดที่ขั้นกระทบยอด ไม่ใช่ขั้นคีย์</a:t>
+            </a:r>
+          </a:p>
+        </p:txBody>
+      </p:sp>
+      <p:sp>
+        <p:nvSpPr>
+          <p:cNvPr id="7" name="Src"/>
+          <p:cNvSpPr>
+            <a:spLocks noGrp="1"/>
+          </p:cNvSpPr>
+          <p:nvPr>
+            <p:ph type="body" idx="5"/>
           </p:nvPr>
         </p:nvSpPr>
         <p:spPr/>
@@ -22636,21 +23540,53 @@
             <a:pPr/>
             <a:r>
               <a:rPr lang="th-TH" dirty="0"/>
-              <a:t>หลัง</a:t>
-            </a:r>
-          </a:p>
-          <a:p>
-            <a:pPr lvl="1"/>
+              <a:t>ระบบบัญชีของลูกค้า · ม.ค.–มิ.ย. 2569 · หน่วย: วันทำการ</a:t>
+            </a:r>
+          </a:p>
+        </p:txBody>
+      </p:sp>
+      <p:sp>
+        <p:nvSpPr>
+          <p:cNvPr id="8" name="TkL"/>
+          <p:cNvSpPr>
+            <a:spLocks noGrp="1"/>
+          </p:cNvSpPr>
+          <p:nvPr>
+            <p:ph type="body" idx="6"/>
+          </p:nvPr>
+        </p:nvSpPr>
+        <p:spPr/>
+        <p:txBody>
+          <a:bodyPr/>
+          <a:lstStyle/>
+          <a:p>
+            <a:pPr/>
             <a:r>
               <a:rPr lang="th-TH" dirty="0"/>
-              <a:t>มอนิเตอร์ 24 ชั่วโมง แจ้งเตือนอัตโนมัติ</a:t>
-            </a:r>
-          </a:p>
-          <a:p>
-            <a:pPr lvl="1"/>
+              <a:t>สรุป</a:t>
+            </a:r>
+          </a:p>
+        </p:txBody>
+      </p:sp>
+      <p:sp>
+        <p:nvSpPr>
+          <p:cNvPr id="9" name="TkC"/>
+          <p:cNvSpPr>
+            <a:spLocks noGrp="1"/>
+          </p:cNvSpPr>
+          <p:nvPr>
+            <p:ph type="body" idx="7"/>
+          </p:nvPr>
+        </p:nvSpPr>
+        <p:spPr/>
+        <p:txBody>
+          <a:bodyPr/>
+          <a:lstStyle/>
+          <a:p>
+            <a:pPr/>
             <a:r>
               <a:rPr lang="th-TH" dirty="0"/>
-              <a:t>ค่าใช้จ่ายคงที่ต่อเดือน</a:t>
+              <a:t>เวลาปิดงบแปรตามปริมาณเอกสาร การลดงานคีย์ซ้ำจึงลดเวลาปิดงบได้จริง</a:t>
             </a:r>
           </a:p>
         </p:txBody>
@@ -22698,19 +23634,19 @@
             <a:pPr/>
             <a:r>
               <a:rPr lang="th-TH" dirty="0"/>
-              <a:t>สี่ผลลัพธ์ที่ข้อเสนอนี้ให้</a:t>
-            </a:r>
-          </a:p>
-        </p:txBody>
-      </p:sp>
-      <p:sp>
-        <p:nvSpPr>
-          <p:cNvPr id="3" name="N0"/>
-          <p:cNvSpPr>
-            <a:spLocks noGrp="1"/>
-          </p:cNvSpPr>
-          <p:nvPr>
-            <p:ph type="body" idx="20"/>
+              <a:t>ก่อนและหลังใช้บริการ</a:t>
+            </a:r>
+          </a:p>
+        </p:txBody>
+      </p:sp>
+      <p:sp>
+        <p:nvSpPr>
+          <p:cNvPr id="3" name="L"/>
+          <p:cNvSpPr>
+            <a:spLocks noGrp="1"/>
+          </p:cNvSpPr>
+          <p:nvPr>
+            <p:ph type="body" idx="1"/>
           </p:nvPr>
         </p:nvSpPr>
         <p:spPr/>
@@ -22721,19 +23657,33 @@
             <a:pPr/>
             <a:r>
               <a:rPr lang="th-TH" dirty="0"/>
-              <a:t>01</a:t>
-            </a:r>
-          </a:p>
-        </p:txBody>
-      </p:sp>
-      <p:sp>
-        <p:nvSpPr>
-          <p:cNvPr id="4" name="H0"/>
-          <p:cNvSpPr>
-            <a:spLocks noGrp="1"/>
-          </p:cNvSpPr>
-          <p:nvPr>
-            <p:ph type="body" idx="21"/>
+              <a:t>ก่อน</a:t>
+            </a:r>
+          </a:p>
+          <a:p>
+            <a:pPr lvl="1"/>
+            <a:r>
+              <a:rPr lang="th-TH" dirty="0"/>
+              <a:t>ระบบล่มบ่อย ไม่มีคนดูแลประจำ</a:t>
+            </a:r>
+          </a:p>
+          <a:p>
+            <a:pPr lvl="1"/>
+            <a:r>
+              <a:rPr lang="th-TH" dirty="0"/>
+              <a:t>ค่าใช้จ่ายไม่แน่นอน</a:t>
+            </a:r>
+          </a:p>
+        </p:txBody>
+      </p:sp>
+      <p:sp>
+        <p:nvSpPr>
+          <p:cNvPr id="4" name="R"/>
+          <p:cNvSpPr>
+            <a:spLocks noGrp="1"/>
+          </p:cNvSpPr>
+          <p:nvPr>
+            <p:ph type="body" idx="2"/>
           </p:nvPr>
         </p:nvSpPr>
         <p:spPr/>
@@ -22744,283 +23694,21 @@
             <a:pPr/>
             <a:r>
               <a:rPr lang="th-TH" dirty="0"/>
-              <a:t>ลดงานคีย์ซ้ำ</a:t>
-            </a:r>
-          </a:p>
-        </p:txBody>
-      </p:sp>
-      <p:sp>
-        <p:nvSpPr>
-          <p:cNvPr id="5" name="B0"/>
-          <p:cNvSpPr>
-            <a:spLocks noGrp="1"/>
-          </p:cNvSpPr>
-          <p:nvPr>
-            <p:ph type="body" idx="22"/>
-          </p:nvPr>
-        </p:nvSpPr>
-        <p:spPr/>
-        <p:txBody>
-          <a:bodyPr/>
-          <a:lstStyle/>
-          <a:p>
-            <a:pPr/>
+              <a:t>หลัง</a:t>
+            </a:r>
+          </a:p>
+          <a:p>
+            <a:pPr lvl="1"/>
             <a:r>
               <a:rPr lang="th-TH" dirty="0"/>
-              <a:t>รับเอกสารเข้าระบบเดียว แล้วกระจายต่อให้ทุกปลายทางอัตโนมัติ</a:t>
-            </a:r>
-          </a:p>
-        </p:txBody>
-      </p:sp>
-      <p:sp>
-        <p:nvSpPr>
-          <p:cNvPr id="6" name="N1"/>
-          <p:cNvSpPr>
-            <a:spLocks noGrp="1"/>
-          </p:cNvSpPr>
-          <p:nvPr>
-            <p:ph type="body" idx="23"/>
-          </p:nvPr>
-        </p:nvSpPr>
-        <p:spPr/>
-        <p:txBody>
-          <a:bodyPr/>
-          <a:lstStyle/>
-          <a:p>
-            <a:pPr/>
+              <a:t>มอนิเตอร์ 24 ชั่วโมง แจ้งเตือนอัตโนมัติ</a:t>
+            </a:r>
+          </a:p>
+          <a:p>
+            <a:pPr lvl="1"/>
             <a:r>
               <a:rPr lang="th-TH" dirty="0"/>
-              <a:t>02</a:t>
-            </a:r>
-          </a:p>
-        </p:txBody>
-      </p:sp>
-      <p:sp>
-        <p:nvSpPr>
-          <p:cNvPr id="7" name="H1"/>
-          <p:cNvSpPr>
-            <a:spLocks noGrp="1"/>
-          </p:cNvSpPr>
-          <p:nvPr>
-            <p:ph type="body" idx="24"/>
-          </p:nvPr>
-        </p:nvSpPr>
-        <p:spPr/>
-        <p:txBody>
-          <a:bodyPr/>
-          <a:lstStyle/>
-          <a:p>
-            <a:pPr/>
-            <a:r>
-              <a:rPr lang="th-TH" dirty="0"/>
-              <a:t>ตรวจสอบได้</a:t>
-            </a:r>
-          </a:p>
-        </p:txBody>
-      </p:sp>
-      <p:sp>
-        <p:nvSpPr>
-          <p:cNvPr id="8" name="B1"/>
-          <p:cNvSpPr>
-            <a:spLocks noGrp="1"/>
-          </p:cNvSpPr>
-          <p:nvPr>
-            <p:ph type="body" idx="25"/>
-          </p:nvPr>
-        </p:nvSpPr>
-        <p:spPr/>
-        <p:txBody>
-          <a:bodyPr/>
-          <a:lstStyle/>
-          <a:p>
-            <a:pPr/>
-            <a:r>
-              <a:rPr lang="th-TH" dirty="0"/>
-              <a:t>ทุกรายการมี audit trail ผู้ทำ เวลา และค่าก่อนหลัง</a:t>
-            </a:r>
-          </a:p>
-        </p:txBody>
-      </p:sp>
-      <p:sp>
-        <p:nvSpPr>
-          <p:cNvPr id="9" name="N2"/>
-          <p:cNvSpPr>
-            <a:spLocks noGrp="1"/>
-          </p:cNvSpPr>
-          <p:nvPr>
-            <p:ph type="body" idx="26"/>
-          </p:nvPr>
-        </p:nvSpPr>
-        <p:spPr/>
-        <p:txBody>
-          <a:bodyPr/>
-          <a:lstStyle/>
-          <a:p>
-            <a:pPr/>
-            <a:r>
-              <a:rPr lang="th-TH" dirty="0"/>
-              <a:t>03</a:t>
-            </a:r>
-          </a:p>
-        </p:txBody>
-      </p:sp>
-      <p:sp>
-        <p:nvSpPr>
-          <p:cNvPr id="10" name="H2"/>
-          <p:cNvSpPr>
-            <a:spLocks noGrp="1"/>
-          </p:cNvSpPr>
-          <p:nvPr>
-            <p:ph type="body" idx="27"/>
-          </p:nvPr>
-        </p:nvSpPr>
-        <p:spPr/>
-        <p:txBody>
-          <a:bodyPr/>
-          <a:lstStyle/>
-          <a:p>
-            <a:pPr/>
-            <a:r>
-              <a:rPr lang="th-TH" dirty="0"/>
-              <a:t>ปิดงบเร็วขึ้น</a:t>
-            </a:r>
-          </a:p>
-        </p:txBody>
-      </p:sp>
-      <p:sp>
-        <p:nvSpPr>
-          <p:cNvPr id="11" name="B2"/>
-          <p:cNvSpPr>
-            <a:spLocks noGrp="1"/>
-          </p:cNvSpPr>
-          <p:nvPr>
-            <p:ph type="body" idx="28"/>
-          </p:nvPr>
-        </p:nvSpPr>
-        <p:spPr/>
-        <p:txBody>
-          <a:bodyPr/>
-          <a:lstStyle/>
-          <a:p>
-            <a:pPr/>
-            <a:r>
-              <a:rPr lang="th-TH" dirty="0"/>
-              <a:t>กระทบยอดอัตโนมัติรายวัน ไม่ต้องรอสิ้นเดือน</a:t>
-            </a:r>
-          </a:p>
-        </p:txBody>
-      </p:sp>
-      <p:sp>
-        <p:nvSpPr>
-          <p:cNvPr id="12" name="N3"/>
-          <p:cNvSpPr>
-            <a:spLocks noGrp="1"/>
-          </p:cNvSpPr>
-          <p:nvPr>
-            <p:ph type="body" idx="29"/>
-          </p:nvPr>
-        </p:nvSpPr>
-        <p:spPr/>
-        <p:txBody>
-          <a:bodyPr/>
-          <a:lstStyle/>
-          <a:p>
-            <a:pPr/>
-            <a:r>
-              <a:rPr lang="th-TH" dirty="0"/>
-              <a:t>04</a:t>
-            </a:r>
-          </a:p>
-        </p:txBody>
-      </p:sp>
-      <p:sp>
-        <p:nvSpPr>
-          <p:cNvPr id="13" name="H3"/>
-          <p:cNvSpPr>
-            <a:spLocks noGrp="1"/>
-          </p:cNvSpPr>
-          <p:nvPr>
-            <p:ph type="body" idx="30"/>
-          </p:nvPr>
-        </p:nvSpPr>
-        <p:spPr/>
-        <p:txBody>
-          <a:bodyPr/>
-          <a:lstStyle/>
-          <a:p>
-            <a:pPr/>
-            <a:r>
-              <a:rPr lang="th-TH" dirty="0"/>
-              <a:t>ขยายต่อได้</a:t>
-            </a:r>
-          </a:p>
-        </p:txBody>
-      </p:sp>
-      <p:sp>
-        <p:nvSpPr>
-          <p:cNvPr id="14" name="B3"/>
-          <p:cNvSpPr>
-            <a:spLocks noGrp="1"/>
-          </p:cNvSpPr>
-          <p:nvPr>
-            <p:ph type="body" idx="31"/>
-          </p:nvPr>
-        </p:nvSpPr>
-        <p:spPr/>
-        <p:txBody>
-          <a:bodyPr/>
-          <a:lstStyle/>
-          <a:p>
-            <a:pPr/>
-            <a:r>
-              <a:rPr lang="th-TH" dirty="0"/>
-              <a:t>เพิ่มกระบวนการใหม่โดยไม่แก้ของเดิม</a:t>
-            </a:r>
-          </a:p>
-        </p:txBody>
-      </p:sp>
-      <p:sp>
-        <p:nvSpPr>
-          <p:cNvPr id="15" name="BL"/>
-          <p:cNvSpPr>
-            <a:spLocks noGrp="1"/>
-          </p:cNvSpPr>
-          <p:nvPr>
-            <p:ph type="body" idx="32"/>
-          </p:nvPr>
-        </p:nvSpPr>
-        <p:spPr/>
-        <p:txBody>
-          <a:bodyPr/>
-          <a:lstStyle/>
-          <a:p>
-            <a:pPr/>
-            <a:r>
-              <a:rPr lang="th-TH" dirty="0"/>
-              <a:t>สรุป</a:t>
-            </a:r>
-          </a:p>
-        </p:txBody>
-      </p:sp>
-      <p:sp>
-        <p:nvSpPr>
-          <p:cNvPr id="16" name="BC"/>
-          <p:cNvSpPr>
-            <a:spLocks noGrp="1"/>
-          </p:cNvSpPr>
-          <p:nvPr>
-            <p:ph type="body" idx="33"/>
-          </p:nvPr>
-        </p:nvSpPr>
-        <p:spPr/>
-        <p:txBody>
-          <a:bodyPr/>
-          <a:lstStyle/>
-          <a:p>
-            <a:pPr/>
-            <a:r>
-              <a:rPr lang="th-TH" dirty="0"/>
-              <a:t>ทั้งสี่ข้อมาจากการแก้จุดเดียวกัน คือรวมจุดรับเอกสาร</a:t>
+              <a:t>ค่าใช้จ่ายคงที่ต่อเดือน</a:t>
             </a:r>
           </a:p>
         </p:txBody>
@@ -23068,19 +23756,19 @@
             <a:pPr/>
             <a:r>
               <a:rPr lang="th-TH" dirty="0"/>
-              <a:t>วิธีการทำงาน</a:t>
-            </a:r>
-          </a:p>
-        </p:txBody>
-      </p:sp>
-      <p:sp>
-        <p:nvSpPr>
-          <p:cNvPr id="3" name="Cap"/>
-          <p:cNvSpPr>
-            <a:spLocks noGrp="1"/>
-          </p:cNvSpPr>
-          <p:nvPr>
-            <p:ph type="body" idx="2"/>
+              <a:t>สี่ผลลัพธ์ที่ข้อเสนอนี้ให้</a:t>
+            </a:r>
+          </a:p>
+        </p:txBody>
+      </p:sp>
+      <p:sp>
+        <p:nvSpPr>
+          <p:cNvPr id="3" name="N0"/>
+          <p:cNvSpPr>
+            <a:spLocks noGrp="1"/>
+          </p:cNvSpPr>
+          <p:nvPr>
+            <p:ph type="body" idx="20"/>
           </p:nvPr>
         </p:nvSpPr>
         <p:spPr/>
@@ -23091,7 +23779,306 @@
             <a:pPr/>
             <a:r>
               <a:rPr lang="th-TH" dirty="0"/>
-              <a:t>กระบวนการ สถาปัตยกรรม และขอบเขตที่ตกลงกัน</a:t>
+              <a:t>01</a:t>
+            </a:r>
+          </a:p>
+        </p:txBody>
+      </p:sp>
+      <p:sp>
+        <p:nvSpPr>
+          <p:cNvPr id="4" name="H0"/>
+          <p:cNvSpPr>
+            <a:spLocks noGrp="1"/>
+          </p:cNvSpPr>
+          <p:nvPr>
+            <p:ph type="body" idx="21"/>
+          </p:nvPr>
+        </p:nvSpPr>
+        <p:spPr/>
+        <p:txBody>
+          <a:bodyPr/>
+          <a:lstStyle/>
+          <a:p>
+            <a:pPr/>
+            <a:r>
+              <a:rPr lang="th-TH" dirty="0"/>
+              <a:t>ลดงานคีย์ซ้ำ</a:t>
+            </a:r>
+          </a:p>
+        </p:txBody>
+      </p:sp>
+      <p:sp>
+        <p:nvSpPr>
+          <p:cNvPr id="5" name="B0"/>
+          <p:cNvSpPr>
+            <a:spLocks noGrp="1"/>
+          </p:cNvSpPr>
+          <p:nvPr>
+            <p:ph type="body" idx="22"/>
+          </p:nvPr>
+        </p:nvSpPr>
+        <p:spPr/>
+        <p:txBody>
+          <a:bodyPr/>
+          <a:lstStyle/>
+          <a:p>
+            <a:pPr/>
+            <a:r>
+              <a:rPr lang="th-TH" dirty="0"/>
+              <a:t>รับเอกสารเข้าระบบเดียว แล้วกระจายต่อให้ทุกปลายทางอัตโนมัติ</a:t>
+            </a:r>
+          </a:p>
+        </p:txBody>
+      </p:sp>
+      <p:sp>
+        <p:nvSpPr>
+          <p:cNvPr id="6" name="N1"/>
+          <p:cNvSpPr>
+            <a:spLocks noGrp="1"/>
+          </p:cNvSpPr>
+          <p:nvPr>
+            <p:ph type="body" idx="23"/>
+          </p:nvPr>
+        </p:nvSpPr>
+        <p:spPr/>
+        <p:txBody>
+          <a:bodyPr/>
+          <a:lstStyle/>
+          <a:p>
+            <a:pPr/>
+            <a:r>
+              <a:rPr lang="th-TH" dirty="0"/>
+              <a:t>02</a:t>
+            </a:r>
+          </a:p>
+        </p:txBody>
+      </p:sp>
+      <p:sp>
+        <p:nvSpPr>
+          <p:cNvPr id="7" name="H1"/>
+          <p:cNvSpPr>
+            <a:spLocks noGrp="1"/>
+          </p:cNvSpPr>
+          <p:nvPr>
+            <p:ph type="body" idx="24"/>
+          </p:nvPr>
+        </p:nvSpPr>
+        <p:spPr/>
+        <p:txBody>
+          <a:bodyPr/>
+          <a:lstStyle/>
+          <a:p>
+            <a:pPr/>
+            <a:r>
+              <a:rPr lang="th-TH" dirty="0"/>
+              <a:t>ตรวจสอบได้</a:t>
+            </a:r>
+          </a:p>
+        </p:txBody>
+      </p:sp>
+      <p:sp>
+        <p:nvSpPr>
+          <p:cNvPr id="8" name="B1"/>
+          <p:cNvSpPr>
+            <a:spLocks noGrp="1"/>
+          </p:cNvSpPr>
+          <p:nvPr>
+            <p:ph type="body" idx="25"/>
+          </p:nvPr>
+        </p:nvSpPr>
+        <p:spPr/>
+        <p:txBody>
+          <a:bodyPr/>
+          <a:lstStyle/>
+          <a:p>
+            <a:pPr/>
+            <a:r>
+              <a:rPr lang="th-TH" dirty="0"/>
+              <a:t>ทุกรายการมี audit trail ผู้ทำ เวลา และค่าก่อนหลัง</a:t>
+            </a:r>
+          </a:p>
+        </p:txBody>
+      </p:sp>
+      <p:sp>
+        <p:nvSpPr>
+          <p:cNvPr id="9" name="N2"/>
+          <p:cNvSpPr>
+            <a:spLocks noGrp="1"/>
+          </p:cNvSpPr>
+          <p:nvPr>
+            <p:ph type="body" idx="26"/>
+          </p:nvPr>
+        </p:nvSpPr>
+        <p:spPr/>
+        <p:txBody>
+          <a:bodyPr/>
+          <a:lstStyle/>
+          <a:p>
+            <a:pPr/>
+            <a:r>
+              <a:rPr lang="th-TH" dirty="0"/>
+              <a:t>03</a:t>
+            </a:r>
+          </a:p>
+        </p:txBody>
+      </p:sp>
+      <p:sp>
+        <p:nvSpPr>
+          <p:cNvPr id="10" name="H2"/>
+          <p:cNvSpPr>
+            <a:spLocks noGrp="1"/>
+          </p:cNvSpPr>
+          <p:nvPr>
+            <p:ph type="body" idx="27"/>
+          </p:nvPr>
+        </p:nvSpPr>
+        <p:spPr/>
+        <p:txBody>
+          <a:bodyPr/>
+          <a:lstStyle/>
+          <a:p>
+            <a:pPr/>
+            <a:r>
+              <a:rPr lang="th-TH" dirty="0"/>
+              <a:t>ปิดงบเร็วขึ้น</a:t>
+            </a:r>
+          </a:p>
+        </p:txBody>
+      </p:sp>
+      <p:sp>
+        <p:nvSpPr>
+          <p:cNvPr id="11" name="B2"/>
+          <p:cNvSpPr>
+            <a:spLocks noGrp="1"/>
+          </p:cNvSpPr>
+          <p:nvPr>
+            <p:ph type="body" idx="28"/>
+          </p:nvPr>
+        </p:nvSpPr>
+        <p:spPr/>
+        <p:txBody>
+          <a:bodyPr/>
+          <a:lstStyle/>
+          <a:p>
+            <a:pPr/>
+            <a:r>
+              <a:rPr lang="th-TH" dirty="0"/>
+              <a:t>กระทบยอดอัตโนมัติรายวัน ไม่ต้องรอสิ้นเดือน</a:t>
+            </a:r>
+          </a:p>
+        </p:txBody>
+      </p:sp>
+      <p:sp>
+        <p:nvSpPr>
+          <p:cNvPr id="12" name="N3"/>
+          <p:cNvSpPr>
+            <a:spLocks noGrp="1"/>
+          </p:cNvSpPr>
+          <p:nvPr>
+            <p:ph type="body" idx="29"/>
+          </p:nvPr>
+        </p:nvSpPr>
+        <p:spPr/>
+        <p:txBody>
+          <a:bodyPr/>
+          <a:lstStyle/>
+          <a:p>
+            <a:pPr/>
+            <a:r>
+              <a:rPr lang="th-TH" dirty="0"/>
+              <a:t>04</a:t>
+            </a:r>
+          </a:p>
+        </p:txBody>
+      </p:sp>
+      <p:sp>
+        <p:nvSpPr>
+          <p:cNvPr id="13" name="H3"/>
+          <p:cNvSpPr>
+            <a:spLocks noGrp="1"/>
+          </p:cNvSpPr>
+          <p:nvPr>
+            <p:ph type="body" idx="30"/>
+          </p:nvPr>
+        </p:nvSpPr>
+        <p:spPr/>
+        <p:txBody>
+          <a:bodyPr/>
+          <a:lstStyle/>
+          <a:p>
+            <a:pPr/>
+            <a:r>
+              <a:rPr lang="th-TH" dirty="0"/>
+              <a:t>ขยายต่อได้</a:t>
+            </a:r>
+          </a:p>
+        </p:txBody>
+      </p:sp>
+      <p:sp>
+        <p:nvSpPr>
+          <p:cNvPr id="14" name="B3"/>
+          <p:cNvSpPr>
+            <a:spLocks noGrp="1"/>
+          </p:cNvSpPr>
+          <p:nvPr>
+            <p:ph type="body" idx="31"/>
+          </p:nvPr>
+        </p:nvSpPr>
+        <p:spPr/>
+        <p:txBody>
+          <a:bodyPr/>
+          <a:lstStyle/>
+          <a:p>
+            <a:pPr/>
+            <a:r>
+              <a:rPr lang="th-TH" dirty="0"/>
+              <a:t>เพิ่มกระบวนการใหม่โดยไม่แก้ของเดิม</a:t>
+            </a:r>
+          </a:p>
+        </p:txBody>
+      </p:sp>
+      <p:sp>
+        <p:nvSpPr>
+          <p:cNvPr id="15" name="BL"/>
+          <p:cNvSpPr>
+            <a:spLocks noGrp="1"/>
+          </p:cNvSpPr>
+          <p:nvPr>
+            <p:ph type="body" idx="32"/>
+          </p:nvPr>
+        </p:nvSpPr>
+        <p:spPr/>
+        <p:txBody>
+          <a:bodyPr/>
+          <a:lstStyle/>
+          <a:p>
+            <a:pPr/>
+            <a:r>
+              <a:rPr lang="th-TH" dirty="0"/>
+              <a:t>สรุป</a:t>
+            </a:r>
+          </a:p>
+        </p:txBody>
+      </p:sp>
+      <p:sp>
+        <p:nvSpPr>
+          <p:cNvPr id="16" name="BC"/>
+          <p:cNvSpPr>
+            <a:spLocks noGrp="1"/>
+          </p:cNvSpPr>
+          <p:nvPr>
+            <p:ph type="body" idx="33"/>
+          </p:nvPr>
+        </p:nvSpPr>
+        <p:spPr/>
+        <p:txBody>
+          <a:bodyPr/>
+          <a:lstStyle/>
+          <a:p>
+            <a:pPr/>
+            <a:r>
+              <a:rPr lang="th-TH" dirty="0"/>
+              <a:t>ทั้งสี่ข้อมาจากการแก้จุดเดียวกัน คือรวมจุดรับเอกสาร</a:t>
             </a:r>
           </a:p>
         </p:txBody>
@@ -23139,19 +24126,19 @@
             <a:pPr/>
             <a:r>
               <a:rPr lang="th-TH" dirty="0"/>
-              <a:t>กระบวนการที่เสนอ</a:t>
-            </a:r>
-          </a:p>
-        </p:txBody>
-      </p:sp>
-      <p:sp>
-        <p:nvSpPr>
-          <p:cNvPr id="3" name="Sub"/>
-          <p:cNvSpPr>
-            <a:spLocks noGrp="1"/>
-          </p:cNvSpPr>
-          <p:nvPr>
-            <p:ph type="body" idx="1"/>
+              <a:t>วิธีการทำงาน</a:t>
+            </a:r>
+          </a:p>
+        </p:txBody>
+      </p:sp>
+      <p:sp>
+        <p:nvSpPr>
+          <p:cNvPr id="3" name="Cap"/>
+          <p:cNvSpPr>
+            <a:spLocks noGrp="1"/>
+          </p:cNvSpPr>
+          <p:nvPr>
+            <p:ph type="body" idx="2"/>
           </p:nvPr>
         </p:nvSpPr>
         <p:spPr/>
@@ -23162,398 +24149,7 @@
             <a:pPr/>
             <a:r>
               <a:rPr lang="th-TH" dirty="0"/>
-              <a:t>ห้าขั้นตอน ทำงานต่อเนื่องโดยไม่ต้องคีย์ซ้ำ</a:t>
-            </a:r>
-          </a:p>
-        </p:txBody>
-      </p:sp>
-      <p:sp>
-        <p:nvSpPr>
-          <p:cNvPr id="4" name="C0"/>
-          <p:cNvSpPr>
-            <a:spLocks noGrp="1"/>
-          </p:cNvSpPr>
-          <p:nvPr>
-            <p:ph type="body" idx="20"/>
-          </p:nvPr>
-        </p:nvSpPr>
-        <p:spPr/>
-        <p:txBody>
-          <a:bodyPr/>
-          <a:lstStyle/>
-          <a:p>
-            <a:pPr/>
-            <a:r>
-              <a:rPr lang="th-TH" dirty="0"/>
-              <a:t>1</a:t>
-            </a:r>
-          </a:p>
-        </p:txBody>
-      </p:sp>
-      <p:sp>
-        <p:nvSpPr>
-          <p:cNvPr id="5" name="H0"/>
-          <p:cNvSpPr>
-            <a:spLocks noGrp="1"/>
-          </p:cNvSpPr>
-          <p:nvPr>
-            <p:ph type="body" idx="21"/>
-          </p:nvPr>
-        </p:nvSpPr>
-        <p:spPr/>
-        <p:txBody>
-          <a:bodyPr/>
-          <a:lstStyle/>
-          <a:p>
-            <a:pPr/>
-            <a:r>
-              <a:rPr lang="th-TH" dirty="0"/>
-              <a:t>รับเอกสาร</a:t>
-            </a:r>
-          </a:p>
-        </p:txBody>
-      </p:sp>
-      <p:sp>
-        <p:nvSpPr>
-          <p:cNvPr id="6" name="B0"/>
-          <p:cNvSpPr>
-            <a:spLocks noGrp="1"/>
-          </p:cNvSpPr>
-          <p:nvPr>
-            <p:ph type="body" idx="22"/>
-          </p:nvPr>
-        </p:nvSpPr>
-        <p:spPr/>
-        <p:txBody>
-          <a:bodyPr/>
-          <a:lstStyle/>
-          <a:p>
-            <a:pPr/>
-            <a:r>
-              <a:rPr lang="th-TH" dirty="0"/>
-              <a:t>สแกนหรือรับไฟล์เข้าคิวกลาง</a:t>
-            </a:r>
-          </a:p>
-        </p:txBody>
-      </p:sp>
-      <p:sp>
-        <p:nvSpPr>
-          <p:cNvPr id="7" name="C1"/>
-          <p:cNvSpPr>
-            <a:spLocks noGrp="1"/>
-          </p:cNvSpPr>
-          <p:nvPr>
-            <p:ph type="body" idx="23"/>
-          </p:nvPr>
-        </p:nvSpPr>
-        <p:spPr/>
-        <p:txBody>
-          <a:bodyPr/>
-          <a:lstStyle/>
-          <a:p>
-            <a:pPr/>
-            <a:r>
-              <a:rPr lang="th-TH" dirty="0"/>
-              <a:t>2</a:t>
-            </a:r>
-          </a:p>
-        </p:txBody>
-      </p:sp>
-      <p:sp>
-        <p:nvSpPr>
-          <p:cNvPr id="8" name="H1"/>
-          <p:cNvSpPr>
-            <a:spLocks noGrp="1"/>
-          </p:cNvSpPr>
-          <p:nvPr>
-            <p:ph type="body" idx="24"/>
-          </p:nvPr>
-        </p:nvSpPr>
-        <p:spPr/>
-        <p:txBody>
-          <a:bodyPr/>
-          <a:lstStyle/>
-          <a:p>
-            <a:pPr/>
-            <a:r>
-              <a:rPr lang="th-TH" dirty="0"/>
-              <a:t>อ่านข้อมูล</a:t>
-            </a:r>
-          </a:p>
-        </p:txBody>
-      </p:sp>
-      <p:sp>
-        <p:nvSpPr>
-          <p:cNvPr id="9" name="B1"/>
-          <p:cNvSpPr>
-            <a:spLocks noGrp="1"/>
-          </p:cNvSpPr>
-          <p:nvPr>
-            <p:ph type="body" idx="25"/>
-          </p:nvPr>
-        </p:nvSpPr>
-        <p:spPr/>
-        <p:txBody>
-          <a:bodyPr/>
-          <a:lstStyle/>
-          <a:p>
-            <a:pPr/>
-            <a:r>
-              <a:rPr lang="th-TH" dirty="0"/>
-              <a:t>ดึงฟิลด์สำคัญ ตรวจกับต้นทาง</a:t>
-            </a:r>
-          </a:p>
-        </p:txBody>
-      </p:sp>
-      <p:sp>
-        <p:nvSpPr>
-          <p:cNvPr id="10" name="C2"/>
-          <p:cNvSpPr>
-            <a:spLocks noGrp="1"/>
-          </p:cNvSpPr>
-          <p:nvPr>
-            <p:ph type="body" idx="26"/>
-          </p:nvPr>
-        </p:nvSpPr>
-        <p:spPr/>
-        <p:txBody>
-          <a:bodyPr/>
-          <a:lstStyle/>
-          <a:p>
-            <a:pPr/>
-            <a:r>
-              <a:rPr lang="th-TH" dirty="0"/>
-              <a:t>3</a:t>
-            </a:r>
-          </a:p>
-        </p:txBody>
-      </p:sp>
-      <p:sp>
-        <p:nvSpPr>
-          <p:cNvPr id="11" name="H2"/>
-          <p:cNvSpPr>
-            <a:spLocks noGrp="1"/>
-          </p:cNvSpPr>
-          <p:nvPr>
-            <p:ph type="body" idx="27"/>
-          </p:nvPr>
-        </p:nvSpPr>
-        <p:spPr/>
-        <p:txBody>
-          <a:bodyPr/>
-          <a:lstStyle/>
-          <a:p>
-            <a:pPr/>
-            <a:r>
-              <a:rPr lang="th-TH" dirty="0"/>
-              <a:t>ตรวจสอบ</a:t>
-            </a:r>
-          </a:p>
-        </p:txBody>
-      </p:sp>
-      <p:sp>
-        <p:nvSpPr>
-          <p:cNvPr id="12" name="B2"/>
-          <p:cNvSpPr>
-            <a:spLocks noGrp="1"/>
-          </p:cNvSpPr>
-          <p:nvPr>
-            <p:ph type="body" idx="28"/>
-          </p:nvPr>
-        </p:nvSpPr>
-        <p:spPr/>
-        <p:txBody>
-          <a:bodyPr/>
-          <a:lstStyle/>
-          <a:p>
-            <a:pPr/>
-            <a:r>
-              <a:rPr lang="th-TH" dirty="0"/>
-              <a:t>กฎธุรกิจและวงเงินอนุมัติ</a:t>
-            </a:r>
-          </a:p>
-        </p:txBody>
-      </p:sp>
-      <p:sp>
-        <p:nvSpPr>
-          <p:cNvPr id="13" name="C3"/>
-          <p:cNvSpPr>
-            <a:spLocks noGrp="1"/>
-          </p:cNvSpPr>
-          <p:nvPr>
-            <p:ph type="body" idx="29"/>
-          </p:nvPr>
-        </p:nvSpPr>
-        <p:spPr/>
-        <p:txBody>
-          <a:bodyPr/>
-          <a:lstStyle/>
-          <a:p>
-            <a:pPr/>
-            <a:r>
-              <a:rPr lang="th-TH" dirty="0"/>
-              <a:t>4</a:t>
-            </a:r>
-          </a:p>
-        </p:txBody>
-      </p:sp>
-      <p:sp>
-        <p:nvSpPr>
-          <p:cNvPr id="14" name="H3"/>
-          <p:cNvSpPr>
-            <a:spLocks noGrp="1"/>
-          </p:cNvSpPr>
-          <p:nvPr>
-            <p:ph type="body" idx="30"/>
-          </p:nvPr>
-        </p:nvSpPr>
-        <p:spPr/>
-        <p:txBody>
-          <a:bodyPr/>
-          <a:lstStyle/>
-          <a:p>
-            <a:pPr/>
-            <a:r>
-              <a:rPr lang="th-TH" dirty="0"/>
-              <a:t>บันทึก</a:t>
-            </a:r>
-          </a:p>
-        </p:txBody>
-      </p:sp>
-      <p:sp>
-        <p:nvSpPr>
-          <p:cNvPr id="15" name="B3"/>
-          <p:cNvSpPr>
-            <a:spLocks noGrp="1"/>
-          </p:cNvSpPr>
-          <p:nvPr>
-            <p:ph type="body" idx="31"/>
-          </p:nvPr>
-        </p:nvSpPr>
-        <p:spPr/>
-        <p:txBody>
-          <a:bodyPr/>
-          <a:lstStyle/>
-          <a:p>
-            <a:pPr/>
-            <a:r>
-              <a:rPr lang="th-TH" dirty="0"/>
-              <a:t>ลงระบบบัญชีพร้อม audit trail</a:t>
-            </a:r>
-          </a:p>
-        </p:txBody>
-      </p:sp>
-      <p:sp>
-        <p:nvSpPr>
-          <p:cNvPr id="16" name="C4"/>
-          <p:cNvSpPr>
-            <a:spLocks noGrp="1"/>
-          </p:cNvSpPr>
-          <p:nvPr>
-            <p:ph type="body" idx="32"/>
-          </p:nvPr>
-        </p:nvSpPr>
-        <p:spPr/>
-        <p:txBody>
-          <a:bodyPr/>
-          <a:lstStyle/>
-          <a:p>
-            <a:pPr/>
-            <a:r>
-              <a:rPr lang="th-TH" dirty="0"/>
-              <a:t>5</a:t>
-            </a:r>
-          </a:p>
-        </p:txBody>
-      </p:sp>
-      <p:sp>
-        <p:nvSpPr>
-          <p:cNvPr id="17" name="H4"/>
-          <p:cNvSpPr>
-            <a:spLocks noGrp="1"/>
-          </p:cNvSpPr>
-          <p:nvPr>
-            <p:ph type="body" idx="33"/>
-          </p:nvPr>
-        </p:nvSpPr>
-        <p:spPr/>
-        <p:txBody>
-          <a:bodyPr/>
-          <a:lstStyle/>
-          <a:p>
-            <a:pPr/>
-            <a:r>
-              <a:rPr lang="th-TH" dirty="0"/>
-              <a:t>กระทบยอด</a:t>
-            </a:r>
-          </a:p>
-        </p:txBody>
-      </p:sp>
-      <p:sp>
-        <p:nvSpPr>
-          <p:cNvPr id="18" name="B4"/>
-          <p:cNvSpPr>
-            <a:spLocks noGrp="1"/>
-          </p:cNvSpPr>
-          <p:nvPr>
-            <p:ph type="body" idx="34"/>
-          </p:nvPr>
-        </p:nvSpPr>
-        <p:spPr/>
-        <p:txBody>
-          <a:bodyPr/>
-          <a:lstStyle/>
-          <a:p>
-            <a:pPr/>
-            <a:r>
-              <a:rPr lang="th-TH" dirty="0"/>
-              <a:t>จับคู่อัตโนมัติ ส่งรายงาน</a:t>
-            </a:r>
-          </a:p>
-        </p:txBody>
-      </p:sp>
-      <p:sp>
-        <p:nvSpPr>
-          <p:cNvPr id="19" name="RL"/>
-          <p:cNvSpPr>
-            <a:spLocks noGrp="1"/>
-          </p:cNvSpPr>
-          <p:nvPr>
-            <p:ph type="body" idx="35"/>
-          </p:nvPr>
-        </p:nvSpPr>
-        <p:spPr/>
-        <p:txBody>
-          <a:bodyPr/>
-          <a:lstStyle/>
-          <a:p>
-            <a:pPr/>
-            <a:r>
-              <a:rPr lang="th-TH" dirty="0"/>
-              <a:t>ผลลัพธ์</a:t>
-            </a:r>
-          </a:p>
-        </p:txBody>
-      </p:sp>
-      <p:sp>
-        <p:nvSpPr>
-          <p:cNvPr id="20" name="RC"/>
-          <p:cNvSpPr>
-            <a:spLocks noGrp="1"/>
-          </p:cNvSpPr>
-          <p:nvPr>
-            <p:ph type="body" idx="36"/>
-          </p:nvPr>
-        </p:nvSpPr>
-        <p:spPr/>
-        <p:txBody>
-          <a:bodyPr/>
-          <a:lstStyle/>
-          <a:p>
-            <a:pPr/>
-            <a:r>
-              <a:rPr lang="th-TH" dirty="0"/>
-              <a:t>เอกสารหนึ่งใบผ่านครบห้าขั้นโดยไม่มีการคีย์ซ้ำเลย</a:t>
+              <a:t>กระบวนการ สถาปัตยกรรม และขอบเขตที่ตกลงกัน</a:t>
             </a:r>
           </a:p>
         </p:txBody>

--- a/NCT-Slide-Template-Corp-Demo.pptx
+++ b/NCT-Slide-Template-Corp-Demo.pptx
@@ -22724,7 +22724,7 @@
             <a:pPr/>
             <a:r>
               <a:rPr lang="th-TH" dirty="0"/>
-              <a:t>ข้อเสนอโครงการวางระบบบัญชีอัตโนมัติ</a:t>
+              <a:t>เปลี่ยนงานบัญชีให้ระบบทำแทน</a:t>
             </a:r>
           </a:p>
         </p:txBody>
@@ -22747,7 +22747,7 @@
             <a:pPr/>
             <a:r>
               <a:rPr lang="th-TH" dirty="0"/>
-              <a:t>New Computer Technology Consulting Co., Ltd. · 2569</a:t>
+              <a:t>NCT · สัมมนาลูกค้า 2569</a:t>
             </a:r>
           </a:p>
         </p:txBody>

--- a/NCT-Slide-Template-Corp-Demo.pptx
+++ b/NCT-Slide-Template-Corp-Demo.pptx
@@ -486,7 +486,7 @@
             <a:avLst/>
           </a:prstGeom>
           <a:solidFill>
-            <a:srgbClr val="006666">
+            <a:srgbClr val="216B7F">
               <a:alpha val="10000"/>
             </a:srgbClr>
           </a:solidFill>
@@ -517,7 +517,7 @@
             <a:avLst/>
           </a:prstGeom>
           <a:solidFill>
-            <a:srgbClr val="006666">
+            <a:srgbClr val="216B7F">
               <a:alpha val="33000"/>
             </a:srgbClr>
           </a:solidFill>
@@ -548,7 +548,7 @@
             <a:avLst/>
           </a:prstGeom>
           <a:solidFill>
-            <a:srgbClr val="006666">
+            <a:srgbClr val="216B7F">
               <a:alpha val="75000"/>
             </a:srgbClr>
           </a:solidFill>
@@ -579,7 +579,7 @@
             <a:avLst/>
           </a:prstGeom>
           <a:solidFill>
-            <a:srgbClr val="006666">
+            <a:srgbClr val="216B7F">
               <a:alpha val="15000"/>
             </a:srgbClr>
           </a:solidFill>
@@ -610,7 +610,7 @@
             <a:avLst/>
           </a:prstGeom>
           <a:solidFill>
-            <a:srgbClr val="006666">
+            <a:srgbClr val="216B7F">
               <a:alpha val="5000"/>
             </a:srgbClr>
           </a:solidFill>
@@ -641,7 +641,7 @@
             <a:avLst/>
           </a:prstGeom>
           <a:solidFill>
-            <a:srgbClr val="006666">
+            <a:srgbClr val="216B7F">
               <a:alpha val="5000"/>
             </a:srgbClr>
           </a:solidFill>
@@ -672,7 +672,7 @@
             <a:avLst/>
           </a:prstGeom>
           <a:solidFill>
-            <a:srgbClr val="006666">
+            <a:srgbClr val="216B7F">
               <a:alpha val="60000"/>
             </a:srgbClr>
           </a:solidFill>
@@ -703,7 +703,7 @@
             <a:avLst/>
           </a:prstGeom>
           <a:solidFill>
-            <a:srgbClr val="006666">
+            <a:srgbClr val="216B7F">
               <a:alpha val="50000"/>
             </a:srgbClr>
           </a:solidFill>
@@ -734,7 +734,7 @@
             <a:avLst/>
           </a:prstGeom>
           <a:solidFill>
-            <a:srgbClr val="006666">
+            <a:srgbClr val="216B7F">
               <a:alpha val="60000"/>
             </a:srgbClr>
           </a:solidFill>
@@ -765,7 +765,7 @@
             <a:avLst/>
           </a:prstGeom>
           <a:solidFill>
-            <a:srgbClr val="006666">
+            <a:srgbClr val="216B7F">
               <a:alpha val="5000"/>
             </a:srgbClr>
           </a:solidFill>
@@ -796,7 +796,7 @@
             <a:avLst/>
           </a:prstGeom>
           <a:solidFill>
-            <a:srgbClr val="006666">
+            <a:srgbClr val="216B7F">
               <a:alpha val="5000"/>
             </a:srgbClr>
           </a:solidFill>
@@ -827,7 +827,7 @@
             <a:avLst/>
           </a:prstGeom>
           <a:solidFill>
-            <a:srgbClr val="006666">
+            <a:srgbClr val="216B7F">
               <a:alpha val="20000"/>
             </a:srgbClr>
           </a:solidFill>
@@ -858,7 +858,7 @@
             <a:avLst/>
           </a:prstGeom>
           <a:solidFill>
-            <a:srgbClr val="006666">
+            <a:srgbClr val="216B7F">
               <a:alpha val="10000"/>
             </a:srgbClr>
           </a:solidFill>
@@ -889,7 +889,7 @@
             <a:avLst/>
           </a:prstGeom>
           <a:solidFill>
-            <a:srgbClr val="006666">
+            <a:srgbClr val="216B7F">
               <a:alpha val="50000"/>
             </a:srgbClr>
           </a:solidFill>
@@ -920,7 +920,7 @@
             <a:avLst/>
           </a:prstGeom>
           <a:solidFill>
-            <a:srgbClr val="006666">
+            <a:srgbClr val="216B7F">
               <a:alpha val="5000"/>
             </a:srgbClr>
           </a:solidFill>
@@ -951,7 +951,7 @@
             <a:avLst/>
           </a:prstGeom>
           <a:solidFill>
-            <a:srgbClr val="006666">
+            <a:srgbClr val="216B7F">
               <a:alpha val="20000"/>
             </a:srgbClr>
           </a:solidFill>
@@ -982,7 +982,7 @@
             <a:avLst/>
           </a:prstGeom>
           <a:solidFill>
-            <a:srgbClr val="006666">
+            <a:srgbClr val="216B7F">
               <a:alpha val="50000"/>
             </a:srgbClr>
           </a:solidFill>
@@ -1013,7 +1013,7 @@
             <a:avLst/>
           </a:prstGeom>
           <a:solidFill>
-            <a:srgbClr val="006666">
+            <a:srgbClr val="216B7F">
               <a:alpha val="5000"/>
             </a:srgbClr>
           </a:solidFill>
@@ -1044,7 +1044,7 @@
             <a:avLst/>
           </a:prstGeom>
           <a:solidFill>
-            <a:srgbClr val="006666">
+            <a:srgbClr val="216B7F">
               <a:alpha val="40000"/>
             </a:srgbClr>
           </a:solidFill>
@@ -1075,7 +1075,7 @@
             <a:avLst/>
           </a:prstGeom>
           <a:solidFill>
-            <a:srgbClr val="006666">
+            <a:srgbClr val="216B7F">
               <a:alpha val="5000"/>
             </a:srgbClr>
           </a:solidFill>
@@ -1106,7 +1106,7 @@
             <a:avLst/>
           </a:prstGeom>
           <a:solidFill>
-            <a:srgbClr val="006666">
+            <a:srgbClr val="216B7F">
               <a:alpha val="5000"/>
             </a:srgbClr>
           </a:solidFill>
@@ -1137,7 +1137,7 @@
             <a:avLst/>
           </a:prstGeom>
           <a:solidFill>
-            <a:srgbClr val="006666">
+            <a:srgbClr val="216B7F">
               <a:alpha val="10000"/>
             </a:srgbClr>
           </a:solidFill>
@@ -1168,7 +1168,7 @@
             <a:avLst/>
           </a:prstGeom>
           <a:solidFill>
-            <a:srgbClr val="006666">
+            <a:srgbClr val="216B7F">
               <a:alpha val="50000"/>
             </a:srgbClr>
           </a:solidFill>
@@ -1199,7 +1199,7 @@
             <a:avLst/>
           </a:prstGeom>
           <a:solidFill>
-            <a:srgbClr val="006666">
+            <a:srgbClr val="216B7F">
               <a:alpha val="40000"/>
             </a:srgbClr>
           </a:solidFill>
@@ -1230,7 +1230,7 @@
             <a:avLst/>
           </a:prstGeom>
           <a:solidFill>
-            <a:srgbClr val="006666">
+            <a:srgbClr val="216B7F">
               <a:alpha val="20000"/>
             </a:srgbClr>
           </a:solidFill>
@@ -1261,7 +1261,7 @@
             <a:avLst/>
           </a:prstGeom>
           <a:solidFill>
-            <a:srgbClr val="006666">
+            <a:srgbClr val="216B7F">
               <a:alpha val="60000"/>
             </a:srgbClr>
           </a:solidFill>
@@ -1292,7 +1292,7 @@
             <a:avLst/>
           </a:prstGeom>
           <a:solidFill>
-            <a:srgbClr val="006666">
+            <a:srgbClr val="216B7F">
               <a:alpha val="20000"/>
             </a:srgbClr>
           </a:solidFill>
@@ -1323,7 +1323,7 @@
             <a:avLst/>
           </a:prstGeom>
           <a:solidFill>
-            <a:srgbClr val="006666">
+            <a:srgbClr val="216B7F">
               <a:alpha val="75000"/>
             </a:srgbClr>
           </a:solidFill>
@@ -1378,7 +1378,7 @@
             <a:avLst/>
           </a:prstGeom>
           <a:solidFill>
-            <a:srgbClr val="006666"/>
+            <a:srgbClr val="216B7F"/>
           </a:solidFill>
           <a:ln>
             <a:noFill/>
@@ -2248,7 +2248,7 @@
             <a:avLst/>
           </a:prstGeom>
           <a:solidFill>
-            <a:srgbClr val="006666"/>
+            <a:srgbClr val="216B7F"/>
           </a:solidFill>
           <a:ln>
             <a:noFill/>
@@ -2277,7 +2277,7 @@
             <a:avLst/>
           </a:prstGeom>
           <a:solidFill>
-            <a:srgbClr val="A9C2C2"/>
+            <a:srgbClr val="B1C4C9"/>
           </a:solidFill>
           <a:ln>
             <a:noFill/>
@@ -2491,7 +2491,7 @@
               <a:buNone/>
               <a:defRPr lang="th-TH" sz="3200" b="1" dirty="0">
                 <a:solidFill>
-                  <a:srgbClr val="333333"/>
+                  <a:srgbClr val="23436D"/>
                 </a:solidFill>
                 <a:latin typeface="+mj-lt"/>
                 <a:ea typeface="+mj-ea"/>
@@ -2509,7 +2509,7 @@
             <a:r>
               <a:rPr lang="th-TH" sz="3200" b="1" dirty="0">
                 <a:solidFill>
-                  <a:srgbClr val="333333"/>
+                  <a:srgbClr val="23436D"/>
                 </a:solidFill>
                 <a:latin typeface="+mj-lt"/>
                 <a:ea typeface="+mj-ea"/>
@@ -2535,7 +2535,7 @@
             <a:avLst/>
           </a:prstGeom>
           <a:solidFill>
-            <a:srgbClr val="006666"/>
+            <a:srgbClr val="216B7F"/>
           </a:solidFill>
           <a:ln>
             <a:noFill/>
@@ -2564,7 +2564,7 @@
             <a:avLst/>
           </a:prstGeom>
           <a:solidFill>
-            <a:srgbClr val="193B36"/>
+            <a:srgbClr val="23436D"/>
           </a:solidFill>
           <a:ln>
             <a:noFill/>
@@ -2666,7 +2666,7 @@
                 <a:spcPts val="500"/>
               </a:spcBef>
               <a:buClr>
-                <a:srgbClr val="8CC2C2"/>
+                <a:srgbClr val="8FBACE"/>
               </a:buClr>
               <a:buSzPct val="90000"/>
               <a:buFont typeface="Arial"/>
@@ -2690,7 +2690,7 @@
                 <a:spcPts val="350"/>
               </a:spcBef>
               <a:buClr>
-                <a:srgbClr val="8CC2C2"/>
+                <a:srgbClr val="8FBACE"/>
               </a:buClr>
               <a:buSzPct val="90000"/>
               <a:buFont typeface="Arial"/>
@@ -2716,7 +2716,7 @@
                 <a:spcPts val="500"/>
               </a:spcBef>
               <a:buClr>
-                <a:srgbClr val="8CC2C2"/>
+                <a:srgbClr val="8FBACE"/>
               </a:buClr>
               <a:buSzPct val="90000"/>
               <a:buFont typeface="Arial"/>
@@ -2745,7 +2745,7 @@
                 <a:spcPts val="350"/>
               </a:spcBef>
               <a:buClr>
-                <a:srgbClr val="8CC2C2"/>
+                <a:srgbClr val="8FBACE"/>
               </a:buClr>
               <a:buSzPct val="90000"/>
               <a:buFont typeface="Arial"/>
@@ -2825,7 +2825,7 @@
               <a:buNone/>
               <a:defRPr lang="th-TH" sz="2000" b="1" dirty="0">
                 <a:solidFill>
-                  <a:srgbClr val="333333"/>
+                  <a:srgbClr val="23436D"/>
                 </a:solidFill>
                 <a:latin typeface="+mj-lt"/>
                 <a:ea typeface="+mj-ea"/>
@@ -2843,7 +2843,7 @@
             <a:r>
               <a:rPr lang="th-TH" sz="2000" b="1" dirty="0">
                 <a:solidFill>
-                  <a:srgbClr val="333333"/>
+                  <a:srgbClr val="23436D"/>
                 </a:solidFill>
                 <a:latin typeface="+mj-lt"/>
                 <a:ea typeface="+mj-ea"/>
@@ -2884,7 +2884,7 @@
                 <a:spcPts val="500"/>
               </a:spcBef>
               <a:buClr>
-                <a:srgbClr val="006666"/>
+                <a:srgbClr val="216B7F"/>
               </a:buClr>
               <a:buSzPct val="90000"/>
               <a:buFont typeface="Arial"/>
@@ -2930,7 +2930,7 @@
                 <a:spcPts val="500"/>
               </a:spcBef>
               <a:buClr>
-                <a:srgbClr val="006666"/>
+                <a:srgbClr val="216B7F"/>
               </a:buClr>
               <a:buSzPct val="90000"/>
               <a:buFont typeface="Arial"/>
@@ -3035,7 +3035,7 @@
               <a:buNone/>
               <a:defRPr lang="th-TH" sz="1200" b="1" spc="120" dirty="0">
                 <a:solidFill>
-                  <a:srgbClr val="006666"/>
+                  <a:srgbClr val="216B7F"/>
                 </a:solidFill>
                 <a:latin typeface="+mn-lt"/>
                 <a:ea typeface="+mn-ea"/>
@@ -3053,7 +3053,7 @@
             <a:r>
               <a:rPr lang="th-TH" sz="1200" b="1" spc="120" dirty="0">
                 <a:solidFill>
-                  <a:srgbClr val="006666"/>
+                  <a:srgbClr val="216B7F"/>
                 </a:solidFill>
                 <a:latin typeface="+mn-lt"/>
                 <a:ea typeface="+mn-ea"/>
@@ -3137,7 +3137,7 @@
             <a:avLst/>
           </a:prstGeom>
           <a:solidFill>
-            <a:srgbClr val="006666"/>
+            <a:srgbClr val="216B7F"/>
           </a:solidFill>
           <a:ln>
             <a:noFill/>
@@ -3166,7 +3166,7 @@
             <a:avLst/>
           </a:prstGeom>
           <a:solidFill>
-            <a:srgbClr val="A9C2C2"/>
+            <a:srgbClr val="B1C4C9"/>
           </a:solidFill>
           <a:ln>
             <a:noFill/>
@@ -3334,7 +3334,7 @@
           </a:solidFill>
           <a:ln w="12700">
             <a:solidFill>
-              <a:srgbClr val="006666"/>
+              <a:srgbClr val="216B7F"/>
             </a:solidFill>
           </a:ln>
         </p:spPr>
@@ -3432,7 +3432,7 @@
               <a:buNone/>
               <a:defRPr lang="th-TH" sz="3200" b="1" dirty="0">
                 <a:solidFill>
-                  <a:srgbClr val="333333"/>
+                  <a:srgbClr val="23436D"/>
                 </a:solidFill>
                 <a:latin typeface="+mj-lt"/>
                 <a:ea typeface="+mj-ea"/>
@@ -3450,7 +3450,7 @@
             <a:r>
               <a:rPr lang="th-TH" sz="3200" b="1" dirty="0">
                 <a:solidFill>
-                  <a:srgbClr val="333333"/>
+                  <a:srgbClr val="23436D"/>
                 </a:solidFill>
                 <a:latin typeface="+mj-lt"/>
                 <a:ea typeface="+mj-ea"/>
@@ -3476,7 +3476,7 @@
             <a:avLst/>
           </a:prstGeom>
           <a:solidFill>
-            <a:srgbClr val="006666"/>
+            <a:srgbClr val="216B7F"/>
           </a:solidFill>
           <a:ln>
             <a:noFill/>
@@ -3635,7 +3635,7 @@
               <a:buNone/>
               <a:defRPr lang="th-TH" sz="1600" b="1" dirty="0">
                 <a:solidFill>
-                  <a:srgbClr val="333333"/>
+                  <a:srgbClr val="23436D"/>
                 </a:solidFill>
                 <a:latin typeface="+mj-lt"/>
                 <a:ea typeface="+mj-ea"/>
@@ -3653,7 +3653,7 @@
             <a:r>
               <a:rPr lang="th-TH" sz="1600" b="1" dirty="0">
                 <a:solidFill>
-                  <a:srgbClr val="333333"/>
+                  <a:srgbClr val="23436D"/>
                 </a:solidFill>
                 <a:latin typeface="+mj-lt"/>
                 <a:ea typeface="+mj-ea"/>
@@ -3873,7 +3873,7 @@
               <a:buNone/>
               <a:defRPr lang="th-TH" sz="1600" b="1" dirty="0">
                 <a:solidFill>
-                  <a:srgbClr val="333333"/>
+                  <a:srgbClr val="23436D"/>
                 </a:solidFill>
                 <a:latin typeface="+mj-lt"/>
                 <a:ea typeface="+mj-ea"/>
@@ -3891,7 +3891,7 @@
             <a:r>
               <a:rPr lang="th-TH" sz="1600" b="1" dirty="0">
                 <a:solidFill>
-                  <a:srgbClr val="333333"/>
+                  <a:srgbClr val="23436D"/>
                 </a:solidFill>
                 <a:latin typeface="+mj-lt"/>
                 <a:ea typeface="+mj-ea"/>
@@ -4111,7 +4111,7 @@
               <a:buNone/>
               <a:defRPr lang="th-TH" sz="1600" b="1" dirty="0">
                 <a:solidFill>
-                  <a:srgbClr val="333333"/>
+                  <a:srgbClr val="23436D"/>
                 </a:solidFill>
                 <a:latin typeface="+mj-lt"/>
                 <a:ea typeface="+mj-ea"/>
@@ -4129,7 +4129,7 @@
             <a:r>
               <a:rPr lang="th-TH" sz="1600" b="1" dirty="0">
                 <a:solidFill>
-                  <a:srgbClr val="333333"/>
+                  <a:srgbClr val="23436D"/>
                 </a:solidFill>
                 <a:latin typeface="+mj-lt"/>
                 <a:ea typeface="+mj-ea"/>
@@ -4349,7 +4349,7 @@
               <a:buNone/>
               <a:defRPr lang="th-TH" sz="1600" b="1" dirty="0">
                 <a:solidFill>
-                  <a:srgbClr val="333333"/>
+                  <a:srgbClr val="23436D"/>
                 </a:solidFill>
                 <a:latin typeface="+mj-lt"/>
                 <a:ea typeface="+mj-ea"/>
@@ -4367,7 +4367,7 @@
             <a:r>
               <a:rPr lang="th-TH" sz="1600" b="1" dirty="0">
                 <a:solidFill>
-                  <a:srgbClr val="333333"/>
+                  <a:srgbClr val="23436D"/>
                 </a:solidFill>
                 <a:latin typeface="+mj-lt"/>
                 <a:ea typeface="+mj-ea"/>
@@ -4457,7 +4457,7 @@
             <a:avLst/>
           </a:prstGeom>
           <a:solidFill>
-            <a:srgbClr val="193B36"/>
+            <a:srgbClr val="23436D"/>
           </a:solidFill>
           <a:ln>
             <a:noFill/>
@@ -4500,7 +4500,7 @@
               <a:buNone/>
               <a:defRPr lang="th-TH" sz="1200" b="1" spc="120" dirty="0">
                 <a:solidFill>
-                  <a:srgbClr val="8CC2C2"/>
+                  <a:srgbClr val="8FBACE"/>
                 </a:solidFill>
                 <a:latin typeface="+mn-lt"/>
                 <a:ea typeface="+mn-ea"/>
@@ -4518,7 +4518,7 @@
             <a:r>
               <a:rPr lang="th-TH" sz="1200" b="1" spc="120" dirty="0">
                 <a:solidFill>
-                  <a:srgbClr val="8CC2C2"/>
+                  <a:srgbClr val="8FBACE"/>
                 </a:solidFill>
                 <a:latin typeface="+mn-lt"/>
                 <a:ea typeface="+mn-ea"/>
@@ -4602,7 +4602,7 @@
             <a:avLst/>
           </a:prstGeom>
           <a:solidFill>
-            <a:srgbClr val="006666"/>
+            <a:srgbClr val="216B7F"/>
           </a:solidFill>
           <a:ln>
             <a:noFill/>
@@ -4631,7 +4631,7 @@
             <a:avLst/>
           </a:prstGeom>
           <a:solidFill>
-            <a:srgbClr val="A9C2C2"/>
+            <a:srgbClr val="B1C4C9"/>
           </a:solidFill>
           <a:ln>
             <a:noFill/>
@@ -4799,7 +4799,7 @@
           </a:solidFill>
           <a:ln w="12700">
             <a:solidFill>
-              <a:srgbClr val="006666"/>
+              <a:srgbClr val="216B7F"/>
             </a:solidFill>
           </a:ln>
         </p:spPr>
@@ -4897,7 +4897,7 @@
               <a:buNone/>
               <a:defRPr lang="th-TH" sz="3200" b="1" dirty="0">
                 <a:solidFill>
-                  <a:srgbClr val="333333"/>
+                  <a:srgbClr val="23436D"/>
                 </a:solidFill>
                 <a:latin typeface="+mj-lt"/>
                 <a:ea typeface="+mj-ea"/>
@@ -4915,7 +4915,7 @@
             <a:r>
               <a:rPr lang="th-TH" sz="3200" b="1" dirty="0">
                 <a:solidFill>
-                  <a:srgbClr val="333333"/>
+                  <a:srgbClr val="23436D"/>
                 </a:solidFill>
                 <a:latin typeface="+mj-lt"/>
                 <a:ea typeface="+mj-ea"/>
@@ -4941,7 +4941,7 @@
             <a:avLst/>
           </a:prstGeom>
           <a:solidFill>
-            <a:srgbClr val="006666"/>
+            <a:srgbClr val="216B7F"/>
           </a:solidFill>
           <a:ln>
             <a:noFill/>
@@ -5057,7 +5057,7 @@
             <a:avLst/>
           </a:prstGeom>
           <a:solidFill>
-            <a:srgbClr val="006666"/>
+            <a:srgbClr val="216B7F"/>
           </a:solidFill>
           <a:ln>
             <a:noFill/>
@@ -5158,7 +5158,7 @@
               <a:buNone/>
               <a:defRPr lang="th-TH" sz="1600" b="1" dirty="0">
                 <a:solidFill>
-                  <a:srgbClr val="333333"/>
+                  <a:srgbClr val="23436D"/>
                 </a:solidFill>
                 <a:latin typeface="+mj-lt"/>
                 <a:ea typeface="+mj-ea"/>
@@ -5176,7 +5176,7 @@
             <a:r>
               <a:rPr lang="th-TH" sz="1600" b="1" dirty="0">
                 <a:solidFill>
-                  <a:srgbClr val="333333"/>
+                  <a:srgbClr val="23436D"/>
                 </a:solidFill>
                 <a:latin typeface="+mj-lt"/>
                 <a:ea typeface="+mj-ea"/>
@@ -5260,7 +5260,7 @@
             <a:avLst/>
           </a:prstGeom>
           <a:solidFill>
-            <a:srgbClr val="006666"/>
+            <a:srgbClr val="216B7F"/>
           </a:solidFill>
           <a:ln>
             <a:noFill/>
@@ -5318,7 +5318,7 @@
             <a:avLst/>
           </a:prstGeom>
           <a:solidFill>
-            <a:srgbClr val="006666"/>
+            <a:srgbClr val="216B7F"/>
           </a:solidFill>
           <a:ln>
             <a:noFill/>
@@ -5419,7 +5419,7 @@
               <a:buNone/>
               <a:defRPr lang="th-TH" sz="1600" b="1" dirty="0">
                 <a:solidFill>
-                  <a:srgbClr val="333333"/>
+                  <a:srgbClr val="23436D"/>
                 </a:solidFill>
                 <a:latin typeface="+mj-lt"/>
                 <a:ea typeface="+mj-ea"/>
@@ -5437,7 +5437,7 @@
             <a:r>
               <a:rPr lang="th-TH" sz="1600" b="1" dirty="0">
                 <a:solidFill>
-                  <a:srgbClr val="333333"/>
+                  <a:srgbClr val="23436D"/>
                 </a:solidFill>
                 <a:latin typeface="+mj-lt"/>
                 <a:ea typeface="+mj-ea"/>
@@ -5521,7 +5521,7 @@
             <a:avLst/>
           </a:prstGeom>
           <a:solidFill>
-            <a:srgbClr val="006666"/>
+            <a:srgbClr val="216B7F"/>
           </a:solidFill>
           <a:ln>
             <a:noFill/>
@@ -5579,7 +5579,7 @@
             <a:avLst/>
           </a:prstGeom>
           <a:solidFill>
-            <a:srgbClr val="006666"/>
+            <a:srgbClr val="216B7F"/>
           </a:solidFill>
           <a:ln>
             <a:noFill/>
@@ -5680,7 +5680,7 @@
               <a:buNone/>
               <a:defRPr lang="th-TH" sz="1600" b="1" dirty="0">
                 <a:solidFill>
-                  <a:srgbClr val="333333"/>
+                  <a:srgbClr val="23436D"/>
                 </a:solidFill>
                 <a:latin typeface="+mj-lt"/>
                 <a:ea typeface="+mj-ea"/>
@@ -5698,7 +5698,7 @@
             <a:r>
               <a:rPr lang="th-TH" sz="1600" b="1" dirty="0">
                 <a:solidFill>
-                  <a:srgbClr val="333333"/>
+                  <a:srgbClr val="23436D"/>
                 </a:solidFill>
                 <a:latin typeface="+mj-lt"/>
                 <a:ea typeface="+mj-ea"/>
@@ -5782,7 +5782,7 @@
             <a:avLst/>
           </a:prstGeom>
           <a:solidFill>
-            <a:srgbClr val="006666"/>
+            <a:srgbClr val="216B7F"/>
           </a:solidFill>
           <a:ln>
             <a:noFill/>
@@ -5840,7 +5840,7 @@
             <a:avLst/>
           </a:prstGeom>
           <a:solidFill>
-            <a:srgbClr val="006666"/>
+            <a:srgbClr val="216B7F"/>
           </a:solidFill>
           <a:ln>
             <a:noFill/>
@@ -5941,7 +5941,7 @@
               <a:buNone/>
               <a:defRPr lang="th-TH" sz="1600" b="1" dirty="0">
                 <a:solidFill>
-                  <a:srgbClr val="333333"/>
+                  <a:srgbClr val="23436D"/>
                 </a:solidFill>
                 <a:latin typeface="+mj-lt"/>
                 <a:ea typeface="+mj-ea"/>
@@ -5959,7 +5959,7 @@
             <a:r>
               <a:rPr lang="th-TH" sz="1600" b="1" dirty="0">
                 <a:solidFill>
-                  <a:srgbClr val="333333"/>
+                  <a:srgbClr val="23436D"/>
                 </a:solidFill>
                 <a:latin typeface="+mj-lt"/>
                 <a:ea typeface="+mj-ea"/>
@@ -6043,7 +6043,7 @@
             <a:avLst/>
           </a:prstGeom>
           <a:solidFill>
-            <a:srgbClr val="006666"/>
+            <a:srgbClr val="216B7F"/>
           </a:solidFill>
           <a:ln>
             <a:noFill/>
@@ -6101,7 +6101,7 @@
             <a:avLst/>
           </a:prstGeom>
           <a:solidFill>
-            <a:srgbClr val="006666"/>
+            <a:srgbClr val="216B7F"/>
           </a:solidFill>
           <a:ln>
             <a:noFill/>
@@ -6202,7 +6202,7 @@
               <a:buNone/>
               <a:defRPr lang="th-TH" sz="1600" b="1" dirty="0">
                 <a:solidFill>
-                  <a:srgbClr val="333333"/>
+                  <a:srgbClr val="23436D"/>
                 </a:solidFill>
                 <a:latin typeface="+mj-lt"/>
                 <a:ea typeface="+mj-ea"/>
@@ -6220,7 +6220,7 @@
             <a:r>
               <a:rPr lang="th-TH" sz="1600" b="1" dirty="0">
                 <a:solidFill>
-                  <a:srgbClr val="333333"/>
+                  <a:srgbClr val="23436D"/>
                 </a:solidFill>
                 <a:latin typeface="+mj-lt"/>
                 <a:ea typeface="+mj-ea"/>
@@ -6347,7 +6347,7 @@
               <a:buNone/>
               <a:defRPr lang="th-TH" sz="1200" b="1" spc="120" dirty="0">
                 <a:solidFill>
-                  <a:srgbClr val="006666"/>
+                  <a:srgbClr val="216B7F"/>
                 </a:solidFill>
                 <a:latin typeface="+mn-lt"/>
                 <a:ea typeface="+mn-ea"/>
@@ -6365,7 +6365,7 @@
             <a:r>
               <a:rPr lang="th-TH" sz="1200" b="1" spc="120" dirty="0">
                 <a:solidFill>
-                  <a:srgbClr val="006666"/>
+                  <a:srgbClr val="216B7F"/>
                 </a:solidFill>
                 <a:latin typeface="+mn-lt"/>
                 <a:ea typeface="+mn-ea"/>
@@ -6449,7 +6449,7 @@
             <a:avLst/>
           </a:prstGeom>
           <a:solidFill>
-            <a:srgbClr val="006666"/>
+            <a:srgbClr val="216B7F"/>
           </a:solidFill>
           <a:ln>
             <a:noFill/>
@@ -6478,7 +6478,7 @@
             <a:avLst/>
           </a:prstGeom>
           <a:solidFill>
-            <a:srgbClr val="A9C2C2"/>
+            <a:srgbClr val="B1C4C9"/>
           </a:solidFill>
           <a:ln>
             <a:noFill/>
@@ -6646,7 +6646,7 @@
           </a:solidFill>
           <a:ln w="12700">
             <a:solidFill>
-              <a:srgbClr val="006666"/>
+              <a:srgbClr val="216B7F"/>
             </a:solidFill>
           </a:ln>
         </p:spPr>
@@ -6744,7 +6744,7 @@
               <a:buNone/>
               <a:defRPr lang="th-TH" sz="3200" b="1" dirty="0">
                 <a:solidFill>
-                  <a:srgbClr val="333333"/>
+                  <a:srgbClr val="23436D"/>
                 </a:solidFill>
                 <a:latin typeface="+mj-lt"/>
                 <a:ea typeface="+mj-ea"/>
@@ -6762,7 +6762,7 @@
             <a:r>
               <a:rPr lang="th-TH" sz="3200" b="1" dirty="0">
                 <a:solidFill>
-                  <a:srgbClr val="333333"/>
+                  <a:srgbClr val="23436D"/>
                 </a:solidFill>
                 <a:latin typeface="+mj-lt"/>
                 <a:ea typeface="+mj-ea"/>
@@ -6788,7 +6788,7 @@
             <a:avLst/>
           </a:prstGeom>
           <a:solidFill>
-            <a:srgbClr val="006666"/>
+            <a:srgbClr val="216B7F"/>
           </a:solidFill>
           <a:ln>
             <a:noFill/>
@@ -6976,7 +6976,7 @@
               <a:buNone/>
               <a:defRPr lang="th-TH" sz="1200" b="1" spc="120" dirty="0">
                 <a:solidFill>
-                  <a:srgbClr val="006666"/>
+                  <a:srgbClr val="216B7F"/>
                 </a:solidFill>
                 <a:latin typeface="+mn-lt"/>
                 <a:ea typeface="+mn-ea"/>
@@ -6994,7 +6994,7 @@
             <a:r>
               <a:rPr lang="th-TH" sz="1200" b="1" spc="120" dirty="0">
                 <a:solidFill>
-                  <a:srgbClr val="006666"/>
+                  <a:srgbClr val="216B7F"/>
                 </a:solidFill>
                 <a:latin typeface="+mn-lt"/>
                 <a:ea typeface="+mn-ea"/>
@@ -7078,7 +7078,7 @@
             <a:avLst/>
           </a:prstGeom>
           <a:solidFill>
-            <a:srgbClr val="006666"/>
+            <a:srgbClr val="216B7F"/>
           </a:solidFill>
           <a:ln>
             <a:noFill/>
@@ -7107,7 +7107,7 @@
             <a:avLst/>
           </a:prstGeom>
           <a:solidFill>
-            <a:srgbClr val="A9C2C2"/>
+            <a:srgbClr val="B1C4C9"/>
           </a:solidFill>
           <a:ln>
             <a:noFill/>
@@ -7275,7 +7275,7 @@
           </a:solidFill>
           <a:ln w="12700">
             <a:solidFill>
-              <a:srgbClr val="006666"/>
+              <a:srgbClr val="216B7F"/>
             </a:solidFill>
           </a:ln>
         </p:spPr>
@@ -7325,7 +7325,7 @@
     <p:bg>
       <p:bgPr>
         <a:solidFill>
-          <a:srgbClr val="193B36"/>
+          <a:srgbClr val="23436D"/>
         </a:solidFill>
         <a:effectLst/>
       </p:bgPr>
@@ -7385,22 +7385,22 @@
           <a:gradFill rotWithShape="1">
             <a:gsLst>
               <a:gs pos="0">
-                <a:srgbClr val="193B36">
+                <a:srgbClr val="23436D">
                   <a:alpha val="100000"/>
                 </a:srgbClr>
               </a:gs>
               <a:gs pos="26000">
-                <a:srgbClr val="193B36">
+                <a:srgbClr val="23436D">
                   <a:alpha val="84000"/>
                 </a:srgbClr>
               </a:gs>
               <a:gs pos="62000">
-                <a:srgbClr val="193B36">
+                <a:srgbClr val="23436D">
                   <a:alpha val="30000"/>
                 </a:srgbClr>
               </a:gs>
               <a:gs pos="100000">
-                <a:srgbClr val="193B36">
+                <a:srgbClr val="23436D">
                   <a:alpha val="12000"/>
                 </a:srgbClr>
               </a:gs>
@@ -7436,17 +7436,17 @@
           <a:gradFill rotWithShape="1">
             <a:gsLst>
               <a:gs pos="0">
-                <a:srgbClr val="193B36">
+                <a:srgbClr val="23436D">
                   <a:alpha val="0"/>
                 </a:srgbClr>
               </a:gs>
               <a:gs pos="55000">
-                <a:srgbClr val="193B36">
+                <a:srgbClr val="23436D">
                   <a:alpha val="60000"/>
                 </a:srgbClr>
               </a:gs>
               <a:gs pos="100000">
-                <a:srgbClr val="193B36">
+                <a:srgbClr val="23436D">
                   <a:alpha val="90000"/>
                 </a:srgbClr>
               </a:gs>
@@ -7494,7 +7494,7 @@
               <a:buNone/>
               <a:defRPr lang="th-TH" sz="6000" b="1" dirty="0">
                 <a:solidFill>
-                  <a:srgbClr val="8CC2C2"/>
+                  <a:srgbClr val="8FBACE"/>
                 </a:solidFill>
                 <a:latin typeface="+mj-lt"/>
                 <a:ea typeface="+mj-ea"/>
@@ -7512,7 +7512,7 @@
             <a:r>
               <a:rPr lang="th-TH" sz="6000" b="1" dirty="0">
                 <a:solidFill>
-                  <a:srgbClr val="8CC2C2"/>
+                  <a:srgbClr val="8FBACE"/>
                 </a:solidFill>
                 <a:latin typeface="+mj-lt"/>
                 <a:ea typeface="+mj-ea"/>
@@ -7538,7 +7538,7 @@
             <a:avLst/>
           </a:prstGeom>
           <a:solidFill>
-            <a:srgbClr val="8CC2C2"/>
+            <a:srgbClr val="8FBACE"/>
           </a:solidFill>
           <a:ln>
             <a:noFill/>
@@ -7640,7 +7640,7 @@
                 <a:spcPts val="300"/>
               </a:spcBef>
               <a:buClr>
-                <a:srgbClr val="8CC2C2"/>
+                <a:srgbClr val="8FBACE"/>
               </a:buClr>
               <a:buSzPct val="90000"/>
               <a:buFont typeface="Arial"/>
@@ -7664,7 +7664,7 @@
                 <a:spcPts val="300"/>
               </a:spcBef>
               <a:buClr>
-                <a:srgbClr val="8CC2C2"/>
+                <a:srgbClr val="8FBACE"/>
               </a:buClr>
               <a:buSzPct val="90000"/>
               <a:buFont typeface="Arial"/>
@@ -7688,7 +7688,7 @@
                 <a:spcPts val="300"/>
               </a:spcBef>
               <a:buClr>
-                <a:srgbClr val="8CC2C2"/>
+                <a:srgbClr val="8FBACE"/>
               </a:buClr>
               <a:buSzPct val="90000"/>
               <a:buFont typeface="Arial"/>
@@ -7714,7 +7714,7 @@
                 <a:spcPts val="300"/>
               </a:spcBef>
               <a:buClr>
-                <a:srgbClr val="8CC2C2"/>
+                <a:srgbClr val="8FBACE"/>
               </a:buClr>
               <a:buSzPct val="90000"/>
               <a:buFont typeface="Arial"/>
@@ -7743,7 +7743,7 @@
                 <a:spcPts val="300"/>
               </a:spcBef>
               <a:buClr>
-                <a:srgbClr val="8CC2C2"/>
+                <a:srgbClr val="8FBACE"/>
               </a:buClr>
               <a:buSzPct val="90000"/>
               <a:buFont typeface="Arial"/>
@@ -7772,7 +7772,7 @@
                 <a:spcPts val="300"/>
               </a:spcBef>
               <a:buClr>
-                <a:srgbClr val="8CC2C2"/>
+                <a:srgbClr val="8FBACE"/>
               </a:buClr>
               <a:buSzPct val="90000"/>
               <a:buFont typeface="Arial"/>
@@ -7809,7 +7809,7 @@
             <a:avLst/>
           </a:prstGeom>
           <a:solidFill>
-            <a:srgbClr val="006666"/>
+            <a:srgbClr val="216B7F"/>
           </a:solidFill>
           <a:ln>
             <a:noFill/>
@@ -7838,7 +7838,7 @@
             <a:avLst/>
           </a:prstGeom>
           <a:solidFill>
-            <a:srgbClr val="A9C2C2"/>
+            <a:srgbClr val="B1C4C9"/>
           </a:solidFill>
           <a:ln>
             <a:noFill/>
@@ -8052,7 +8052,7 @@
               <a:buNone/>
               <a:defRPr lang="th-TH" sz="3200" b="1" dirty="0">
                 <a:solidFill>
-                  <a:srgbClr val="333333"/>
+                  <a:srgbClr val="23436D"/>
                 </a:solidFill>
                 <a:latin typeface="+mj-lt"/>
                 <a:ea typeface="+mj-ea"/>
@@ -8070,7 +8070,7 @@
             <a:r>
               <a:rPr lang="th-TH" sz="3200" b="1" dirty="0">
                 <a:solidFill>
-                  <a:srgbClr val="333333"/>
+                  <a:srgbClr val="23436D"/>
                 </a:solidFill>
                 <a:latin typeface="+mj-lt"/>
                 <a:ea typeface="+mj-ea"/>
@@ -8096,7 +8096,7 @@
             <a:avLst/>
           </a:prstGeom>
           <a:solidFill>
-            <a:srgbClr val="006666"/>
+            <a:srgbClr val="216B7F"/>
           </a:solidFill>
           <a:ln>
             <a:noFill/>
@@ -8445,7 +8445,7 @@
               <a:buNone/>
               <a:defRPr lang="th-TH" sz="1200" b="1" spc="120" dirty="0">
                 <a:solidFill>
-                  <a:srgbClr val="006666"/>
+                  <a:srgbClr val="216B7F"/>
                 </a:solidFill>
                 <a:latin typeface="+mn-lt"/>
                 <a:ea typeface="+mn-ea"/>
@@ -8463,7 +8463,7 @@
             <a:r>
               <a:rPr lang="th-TH" sz="1200" b="1" spc="120" dirty="0">
                 <a:solidFill>
-                  <a:srgbClr val="006666"/>
+                  <a:srgbClr val="216B7F"/>
                 </a:solidFill>
                 <a:latin typeface="+mn-lt"/>
                 <a:ea typeface="+mn-ea"/>
@@ -8547,7 +8547,7 @@
             <a:avLst/>
           </a:prstGeom>
           <a:solidFill>
-            <a:srgbClr val="006666"/>
+            <a:srgbClr val="216B7F"/>
           </a:solidFill>
           <a:ln>
             <a:noFill/>
@@ -8576,7 +8576,7 @@
             <a:avLst/>
           </a:prstGeom>
           <a:solidFill>
-            <a:srgbClr val="A9C2C2"/>
+            <a:srgbClr val="B1C4C9"/>
           </a:solidFill>
           <a:ln>
             <a:noFill/>
@@ -8744,7 +8744,7 @@
           </a:solidFill>
           <a:ln w="12700">
             <a:solidFill>
-              <a:srgbClr val="006666"/>
+              <a:srgbClr val="216B7F"/>
             </a:solidFill>
           </a:ln>
         </p:spPr>
@@ -8842,7 +8842,7 @@
               <a:buNone/>
               <a:defRPr lang="th-TH" sz="3200" b="1" dirty="0">
                 <a:solidFill>
-                  <a:srgbClr val="333333"/>
+                  <a:srgbClr val="23436D"/>
                 </a:solidFill>
                 <a:latin typeface="+mj-lt"/>
                 <a:ea typeface="+mj-ea"/>
@@ -8860,7 +8860,7 @@
             <a:r>
               <a:rPr lang="th-TH" sz="3200" b="1" dirty="0">
                 <a:solidFill>
-                  <a:srgbClr val="333333"/>
+                  <a:srgbClr val="23436D"/>
                 </a:solidFill>
                 <a:latin typeface="+mj-lt"/>
                 <a:ea typeface="+mj-ea"/>
@@ -8886,7 +8886,7 @@
             <a:avLst/>
           </a:prstGeom>
           <a:solidFill>
-            <a:srgbClr val="006666"/>
+            <a:srgbClr val="216B7F"/>
           </a:solidFill>
           <a:ln>
             <a:noFill/>
@@ -9149,7 +9149,7 @@
           <a:noFill/>
           <a:ln w="12700">
             <a:solidFill>
-              <a:srgbClr val="006666"/>
+              <a:srgbClr val="216B7F"/>
             </a:solidFill>
           </a:ln>
         </p:spPr>
@@ -9178,7 +9178,7 @@
             </a:avLst>
           </a:prstGeom>
           <a:solidFill>
-            <a:srgbClr val="006666"/>
+            <a:srgbClr val="216B7F"/>
           </a:solidFill>
           <a:ln>
             <a:noFill/>
@@ -9427,7 +9427,7 @@
                 <a:spcPts val="500"/>
               </a:spcBef>
               <a:buClr>
-                <a:srgbClr val="006666"/>
+                <a:srgbClr val="216B7F"/>
               </a:buClr>
               <a:buSzPct val="90000"/>
               <a:buFont typeface="Arial"/>
@@ -9449,7 +9449,7 @@
                 <a:spcPts val="350"/>
               </a:spcBef>
               <a:buClr>
-                <a:srgbClr val="006666"/>
+                <a:srgbClr val="216B7F"/>
               </a:buClr>
               <a:buSzPct val="90000"/>
               <a:buFont typeface="Arial"/>
@@ -9473,7 +9473,7 @@
                 <a:spcPts val="500"/>
               </a:spcBef>
               <a:buClr>
-                <a:srgbClr val="006666"/>
+                <a:srgbClr val="216B7F"/>
               </a:buClr>
               <a:buSzPct val="90000"/>
               <a:buFont typeface="Arial"/>
@@ -9500,7 +9500,7 @@
                 <a:spcPts val="350"/>
               </a:spcBef>
               <a:buClr>
-                <a:srgbClr val="006666"/>
+                <a:srgbClr val="216B7F"/>
               </a:buClr>
               <a:buSzPct val="90000"/>
               <a:buFont typeface="Arial"/>
@@ -9535,7 +9535,7 @@
             <a:avLst/>
           </a:prstGeom>
           <a:solidFill>
-            <a:srgbClr val="006666"/>
+            <a:srgbClr val="216B7F"/>
           </a:solidFill>
           <a:ln>
             <a:noFill/>
@@ -9564,7 +9564,7 @@
             <a:avLst/>
           </a:prstGeom>
           <a:solidFill>
-            <a:srgbClr val="A9C2C2"/>
+            <a:srgbClr val="B1C4C9"/>
           </a:solidFill>
           <a:ln>
             <a:noFill/>
@@ -9732,7 +9732,7 @@
           </a:solidFill>
           <a:ln w="12700">
             <a:solidFill>
-              <a:srgbClr val="006666"/>
+              <a:srgbClr val="216B7F"/>
             </a:solidFill>
           </a:ln>
         </p:spPr>
@@ -9830,7 +9830,7 @@
               <a:buNone/>
               <a:defRPr lang="th-TH" sz="3200" b="1" dirty="0">
                 <a:solidFill>
-                  <a:srgbClr val="333333"/>
+                  <a:srgbClr val="23436D"/>
                 </a:solidFill>
                 <a:latin typeface="+mj-lt"/>
                 <a:ea typeface="+mj-ea"/>
@@ -9848,7 +9848,7 @@
             <a:r>
               <a:rPr lang="th-TH" sz="3200" b="1" dirty="0">
                 <a:solidFill>
-                  <a:srgbClr val="333333"/>
+                  <a:srgbClr val="23436D"/>
                 </a:solidFill>
                 <a:latin typeface="+mj-lt"/>
                 <a:ea typeface="+mj-ea"/>
@@ -9874,7 +9874,7 @@
             <a:avLst/>
           </a:prstGeom>
           <a:solidFill>
-            <a:srgbClr val="006666"/>
+            <a:srgbClr val="216B7F"/>
           </a:solidFill>
           <a:ln>
             <a:noFill/>
@@ -9905,7 +9905,7 @@
             </a:avLst>
           </a:prstGeom>
           <a:solidFill>
-            <a:srgbClr val="006666"/>
+            <a:srgbClr val="216B7F"/>
           </a:solidFill>
           <a:ln>
             <a:noFill/>
@@ -10040,7 +10040,7 @@
             <a:avLst/>
           </a:prstGeom>
           <a:solidFill>
-            <a:srgbClr val="193B36"/>
+            <a:srgbClr val="23436D"/>
           </a:solidFill>
           <a:ln>
             <a:noFill/>
@@ -10083,7 +10083,7 @@
               <a:buNone/>
               <a:defRPr lang="th-TH" sz="1200" b="1" spc="120" dirty="0">
                 <a:solidFill>
-                  <a:srgbClr val="8CC2C2"/>
+                  <a:srgbClr val="8FBACE"/>
                 </a:solidFill>
                 <a:latin typeface="+mn-lt"/>
                 <a:ea typeface="+mn-ea"/>
@@ -10101,7 +10101,7 @@
             <a:r>
               <a:rPr lang="th-TH" sz="1200" b="1" spc="120" dirty="0">
                 <a:solidFill>
-                  <a:srgbClr val="8CC2C2"/>
+                  <a:srgbClr val="8FBACE"/>
                 </a:solidFill>
                 <a:latin typeface="+mn-lt"/>
                 <a:ea typeface="+mn-ea"/>
@@ -10590,7 +10590,7 @@
             <a:avLst/>
           </a:prstGeom>
           <a:solidFill>
-            <a:srgbClr val="006666"/>
+            <a:srgbClr val="216B7F"/>
           </a:solidFill>
           <a:ln>
             <a:noFill/>
@@ -10619,7 +10619,7 @@
             <a:avLst/>
           </a:prstGeom>
           <a:solidFill>
-            <a:srgbClr val="A9C2C2"/>
+            <a:srgbClr val="B1C4C9"/>
           </a:solidFill>
           <a:ln>
             <a:noFill/>
@@ -10787,7 +10787,7 @@
           </a:solidFill>
           <a:ln w="12700">
             <a:solidFill>
-              <a:srgbClr val="006666"/>
+              <a:srgbClr val="216B7F"/>
             </a:solidFill>
           </a:ln>
         </p:spPr>
@@ -10885,7 +10885,7 @@
               <a:buNone/>
               <a:defRPr lang="th-TH" sz="3200" b="1" dirty="0">
                 <a:solidFill>
-                  <a:srgbClr val="333333"/>
+                  <a:srgbClr val="23436D"/>
                 </a:solidFill>
                 <a:latin typeface="+mj-lt"/>
                 <a:ea typeface="+mj-ea"/>
@@ -10903,7 +10903,7 @@
             <a:r>
               <a:rPr lang="th-TH" sz="3200" b="1" dirty="0">
                 <a:solidFill>
-                  <a:srgbClr val="333333"/>
+                  <a:srgbClr val="23436D"/>
                 </a:solidFill>
                 <a:latin typeface="+mj-lt"/>
                 <a:ea typeface="+mj-ea"/>
@@ -10929,7 +10929,7 @@
             <a:avLst/>
           </a:prstGeom>
           <a:solidFill>
-            <a:srgbClr val="006666"/>
+            <a:srgbClr val="216B7F"/>
           </a:solidFill>
           <a:ln>
             <a:noFill/>
@@ -11020,7 +11020,7 @@
               <a:buNone/>
               <a:defRPr lang="th-TH" sz="7200" b="1" dirty="0">
                 <a:solidFill>
-                  <a:srgbClr val="333333"/>
+                  <a:srgbClr val="23436D"/>
                 </a:solidFill>
                 <a:latin typeface="+mj-lt"/>
                 <a:ea typeface="+mj-ea"/>
@@ -11038,7 +11038,7 @@
             <a:r>
               <a:rPr lang="th-TH" sz="7200" b="1" dirty="0">
                 <a:solidFill>
-                  <a:srgbClr val="333333"/>
+                  <a:srgbClr val="23436D"/>
                 </a:solidFill>
                 <a:latin typeface="+mj-lt"/>
                 <a:ea typeface="+mj-ea"/>
@@ -11137,7 +11137,7 @@
                 <a:spcPts val="600"/>
               </a:spcBef>
               <a:buClr>
-                <a:srgbClr val="006666"/>
+                <a:srgbClr val="216B7F"/>
               </a:buClr>
               <a:buSzPct val="90000"/>
               <a:buFont typeface="Arial"/>
@@ -11161,7 +11161,7 @@
                 <a:spcPts val="600"/>
               </a:spcBef>
               <a:buClr>
-                <a:srgbClr val="006666"/>
+                <a:srgbClr val="216B7F"/>
               </a:buClr>
               <a:buSzPct val="90000"/>
               <a:buFont typeface="Arial"/>
@@ -11297,7 +11297,7 @@
               <a:buNone/>
               <a:defRPr lang="th-TH" sz="1200" b="1" spc="120" dirty="0">
                 <a:solidFill>
-                  <a:srgbClr val="006666"/>
+                  <a:srgbClr val="216B7F"/>
                 </a:solidFill>
                 <a:latin typeface="+mn-lt"/>
                 <a:ea typeface="+mn-ea"/>
@@ -11315,7 +11315,7 @@
             <a:r>
               <a:rPr lang="th-TH" sz="1200" b="1" spc="120" dirty="0">
                 <a:solidFill>
-                  <a:srgbClr val="006666"/>
+                  <a:srgbClr val="216B7F"/>
                 </a:solidFill>
                 <a:latin typeface="+mn-lt"/>
                 <a:ea typeface="+mn-ea"/>
@@ -11399,7 +11399,7 @@
             <a:avLst/>
           </a:prstGeom>
           <a:solidFill>
-            <a:srgbClr val="006666"/>
+            <a:srgbClr val="216B7F"/>
           </a:solidFill>
           <a:ln>
             <a:noFill/>
@@ -11428,7 +11428,7 @@
             <a:avLst/>
           </a:prstGeom>
           <a:solidFill>
-            <a:srgbClr val="A9C2C2"/>
+            <a:srgbClr val="B1C4C9"/>
           </a:solidFill>
           <a:ln>
             <a:noFill/>
@@ -11596,7 +11596,7 @@
           </a:solidFill>
           <a:ln w="12700">
             <a:solidFill>
-              <a:srgbClr val="006666"/>
+              <a:srgbClr val="216B7F"/>
             </a:solidFill>
           </a:ln>
         </p:spPr>
@@ -11646,7 +11646,7 @@
     <p:bg>
       <p:bgPr>
         <a:solidFill>
-          <a:srgbClr val="193B36"/>
+          <a:srgbClr val="23436D"/>
         </a:solidFill>
         <a:effectLst/>
       </p:bgPr>
@@ -11706,22 +11706,22 @@
           <a:gradFill rotWithShape="1">
             <a:gsLst>
               <a:gs pos="0">
-                <a:srgbClr val="193B36">
+                <a:srgbClr val="23436D">
                   <a:alpha val="100000"/>
                 </a:srgbClr>
               </a:gs>
               <a:gs pos="26000">
-                <a:srgbClr val="193B36">
+                <a:srgbClr val="23436D">
                   <a:alpha val="84000"/>
                 </a:srgbClr>
               </a:gs>
               <a:gs pos="62000">
-                <a:srgbClr val="193B36">
+                <a:srgbClr val="23436D">
                   <a:alpha val="30000"/>
                 </a:srgbClr>
               </a:gs>
               <a:gs pos="100000">
-                <a:srgbClr val="193B36">
+                <a:srgbClr val="23436D">
                   <a:alpha val="12000"/>
                 </a:srgbClr>
               </a:gs>
@@ -11757,17 +11757,17 @@
           <a:gradFill rotWithShape="1">
             <a:gsLst>
               <a:gs pos="0">
-                <a:srgbClr val="193B36">
+                <a:srgbClr val="23436D">
                   <a:alpha val="0"/>
                 </a:srgbClr>
               </a:gs>
               <a:gs pos="55000">
-                <a:srgbClr val="193B36">
+                <a:srgbClr val="23436D">
                   <a:alpha val="60000"/>
                 </a:srgbClr>
               </a:gs>
               <a:gs pos="100000">
-                <a:srgbClr val="193B36">
+                <a:srgbClr val="23436D">
                   <a:alpha val="90000"/>
                 </a:srgbClr>
               </a:gs>
@@ -11815,7 +11815,7 @@
               <a:buNone/>
               <a:defRPr lang="th-TH" sz="6000" b="1" dirty="0">
                 <a:solidFill>
-                  <a:srgbClr val="8CC2C2"/>
+                  <a:srgbClr val="8FBACE"/>
                 </a:solidFill>
                 <a:latin typeface="+mj-lt"/>
                 <a:ea typeface="+mj-ea"/>
@@ -11833,7 +11833,7 @@
             <a:r>
               <a:rPr lang="th-TH" sz="6000" b="1" dirty="0">
                 <a:solidFill>
-                  <a:srgbClr val="8CC2C2"/>
+                  <a:srgbClr val="8FBACE"/>
                 </a:solidFill>
                 <a:latin typeface="+mj-lt"/>
                 <a:ea typeface="+mj-ea"/>
@@ -11859,7 +11859,7 @@
             <a:avLst/>
           </a:prstGeom>
           <a:solidFill>
-            <a:srgbClr val="8CC2C2"/>
+            <a:srgbClr val="8FBACE"/>
           </a:solidFill>
           <a:ln>
             <a:noFill/>
@@ -12008,7 +12008,7 @@
             <a:avLst/>
           </a:prstGeom>
           <a:solidFill>
-            <a:srgbClr val="006666"/>
+            <a:srgbClr val="216B7F"/>
           </a:solidFill>
           <a:ln>
             <a:noFill/>
@@ -12037,7 +12037,7 @@
             <a:avLst/>
           </a:prstGeom>
           <a:solidFill>
-            <a:srgbClr val="A9C2C2"/>
+            <a:srgbClr val="B1C4C9"/>
           </a:solidFill>
           <a:ln>
             <a:noFill/>
@@ -12531,7 +12531,7 @@
             <a:avLst/>
           </a:prstGeom>
           <a:solidFill>
-            <a:srgbClr val="006666"/>
+            <a:srgbClr val="216B7F"/>
           </a:solidFill>
           <a:ln>
             <a:noFill/>
@@ -12560,7 +12560,7 @@
             <a:avLst/>
           </a:prstGeom>
           <a:solidFill>
-            <a:srgbClr val="A9C2C2"/>
+            <a:srgbClr val="B1C4C9"/>
           </a:solidFill>
           <a:ln>
             <a:noFill/>
@@ -12774,7 +12774,7 @@
               <a:buNone/>
               <a:defRPr lang="th-TH" sz="3200" b="1" dirty="0">
                 <a:solidFill>
-                  <a:srgbClr val="333333"/>
+                  <a:srgbClr val="23436D"/>
                 </a:solidFill>
                 <a:latin typeface="+mj-lt"/>
                 <a:ea typeface="+mj-ea"/>
@@ -12792,7 +12792,7 @@
             <a:r>
               <a:rPr lang="th-TH" sz="3200" b="1" dirty="0">
                 <a:solidFill>
-                  <a:srgbClr val="333333"/>
+                  <a:srgbClr val="23436D"/>
                 </a:solidFill>
                 <a:latin typeface="+mj-lt"/>
                 <a:ea typeface="+mj-ea"/>
@@ -12818,7 +12818,7 @@
             <a:avLst/>
           </a:prstGeom>
           <a:solidFill>
-            <a:srgbClr val="006666"/>
+            <a:srgbClr val="216B7F"/>
           </a:solidFill>
           <a:ln>
             <a:noFill/>
@@ -12862,7 +12862,7 @@
                 <a:spcPts val="1000"/>
               </a:spcBef>
               <a:buClr>
-                <a:srgbClr val="006666"/>
+                <a:srgbClr val="216B7F"/>
               </a:buClr>
               <a:buSzPct val="90000"/>
               <a:buFont typeface="Arial"/>
@@ -12930,7 +12930,7 @@
                 <a:spcPts val="1000"/>
               </a:spcBef>
               <a:buClr>
-                <a:srgbClr val="006666"/>
+                <a:srgbClr val="216B7F"/>
               </a:buClr>
               <a:buSzPct val="90000"/>
               <a:buFont typeface="Arial"/>
@@ -13019,7 +13019,7 @@
             <a:avLst/>
           </a:prstGeom>
           <a:solidFill>
-            <a:srgbClr val="006666"/>
+            <a:srgbClr val="216B7F"/>
           </a:solidFill>
           <a:ln>
             <a:noFill/>
@@ -13048,7 +13048,7 @@
             <a:avLst/>
           </a:prstGeom>
           <a:solidFill>
-            <a:srgbClr val="A9C2C2"/>
+            <a:srgbClr val="B1C4C9"/>
           </a:solidFill>
           <a:ln>
             <a:noFill/>
@@ -13216,7 +13216,7 @@
           </a:solidFill>
           <a:ln w="12700">
             <a:solidFill>
-              <a:srgbClr val="006666"/>
+              <a:srgbClr val="216B7F"/>
             </a:solidFill>
           </a:ln>
         </p:spPr>
@@ -13314,7 +13314,7 @@
               <a:buNone/>
               <a:defRPr lang="th-TH" sz="3200" b="1" dirty="0">
                 <a:solidFill>
-                  <a:srgbClr val="333333"/>
+                  <a:srgbClr val="23436D"/>
                 </a:solidFill>
                 <a:latin typeface="+mj-lt"/>
                 <a:ea typeface="+mj-ea"/>
@@ -13332,7 +13332,7 @@
             <a:r>
               <a:rPr lang="th-TH" sz="3200" b="1" dirty="0">
                 <a:solidFill>
-                  <a:srgbClr val="333333"/>
+                  <a:srgbClr val="23436D"/>
                 </a:solidFill>
                 <a:latin typeface="+mj-lt"/>
                 <a:ea typeface="+mj-ea"/>
@@ -13358,7 +13358,7 @@
             <a:avLst/>
           </a:prstGeom>
           <a:solidFill>
-            <a:srgbClr val="006666"/>
+            <a:srgbClr val="216B7F"/>
           </a:solidFill>
           <a:ln>
             <a:noFill/>
@@ -13402,7 +13402,7 @@
                 <a:spcPts val="1000"/>
               </a:spcBef>
               <a:buClr>
-                <a:srgbClr val="006666"/>
+                <a:srgbClr val="216B7F"/>
               </a:buClr>
               <a:buSzPct val="90000"/>
               <a:buFont typeface="Arial"/>
@@ -13470,7 +13470,7 @@
                 <a:spcPts val="1000"/>
               </a:spcBef>
               <a:buClr>
-                <a:srgbClr val="006666"/>
+                <a:srgbClr val="216B7F"/>
               </a:buClr>
               <a:buSzPct val="90000"/>
               <a:buFont typeface="Arial"/>
@@ -13574,7 +13574,7 @@
                 <a:spcPts val="1000"/>
               </a:spcBef>
               <a:buClr>
-                <a:srgbClr val="006666"/>
+                <a:srgbClr val="216B7F"/>
               </a:buClr>
               <a:buSzPct val="90000"/>
               <a:buFont typeface="Arial"/>
@@ -13642,7 +13642,7 @@
                 <a:spcPts val="1000"/>
               </a:spcBef>
               <a:buClr>
-                <a:srgbClr val="006666"/>
+                <a:srgbClr val="216B7F"/>
               </a:buClr>
               <a:buSzPct val="90000"/>
               <a:buFont typeface="Arial"/>
@@ -13731,7 +13731,7 @@
             <a:avLst/>
           </a:prstGeom>
           <a:solidFill>
-            <a:srgbClr val="006666"/>
+            <a:srgbClr val="216B7F"/>
           </a:solidFill>
           <a:ln>
             <a:noFill/>
@@ -13760,7 +13760,7 @@
             <a:avLst/>
           </a:prstGeom>
           <a:solidFill>
-            <a:srgbClr val="A9C2C2"/>
+            <a:srgbClr val="B1C4C9"/>
           </a:solidFill>
           <a:ln>
             <a:noFill/>
@@ -13928,7 +13928,7 @@
           </a:solidFill>
           <a:ln w="12700">
             <a:solidFill>
-              <a:srgbClr val="006666"/>
+              <a:srgbClr val="216B7F"/>
             </a:solidFill>
           </a:ln>
         </p:spPr>
@@ -14026,7 +14026,7 @@
               <a:buNone/>
               <a:defRPr lang="th-TH" sz="3200" b="1" dirty="0">
                 <a:solidFill>
-                  <a:srgbClr val="333333"/>
+                  <a:srgbClr val="23436D"/>
                 </a:solidFill>
                 <a:latin typeface="+mj-lt"/>
                 <a:ea typeface="+mj-ea"/>
@@ -14044,7 +14044,7 @@
             <a:r>
               <a:rPr lang="th-TH" sz="3200" b="1" dirty="0">
                 <a:solidFill>
-                  <a:srgbClr val="333333"/>
+                  <a:srgbClr val="23436D"/>
                 </a:solidFill>
                 <a:latin typeface="+mj-lt"/>
                 <a:ea typeface="+mj-ea"/>
@@ -14070,7 +14070,7 @@
             <a:avLst/>
           </a:prstGeom>
           <a:solidFill>
-            <a:srgbClr val="006666"/>
+            <a:srgbClr val="216B7F"/>
           </a:solidFill>
           <a:ln>
             <a:noFill/>
@@ -14130,7 +14130,7 @@
             <a:avLst/>
           </a:prstGeom>
           <a:solidFill>
-            <a:srgbClr val="006666"/>
+            <a:srgbClr val="216B7F"/>
           </a:solidFill>
           <a:ln>
             <a:noFill/>
@@ -14173,7 +14173,7 @@
               <a:buNone/>
               <a:defRPr lang="th-TH" sz="2000" b="1" dirty="0">
                 <a:solidFill>
-                  <a:srgbClr val="333333"/>
+                  <a:srgbClr val="23436D"/>
                 </a:solidFill>
                 <a:latin typeface="+mj-lt"/>
                 <a:ea typeface="+mj-ea"/>
@@ -14191,7 +14191,7 @@
             <a:r>
               <a:rPr lang="th-TH" sz="2000" b="1" dirty="0">
                 <a:solidFill>
-                  <a:srgbClr val="333333"/>
+                  <a:srgbClr val="23436D"/>
                 </a:solidFill>
                 <a:latin typeface="+mj-lt"/>
                 <a:ea typeface="+mj-ea"/>
@@ -14312,7 +14312,7 @@
             <a:avLst/>
           </a:prstGeom>
           <a:solidFill>
-            <a:srgbClr val="006666"/>
+            <a:srgbClr val="216B7F"/>
           </a:solidFill>
           <a:ln>
             <a:noFill/>
@@ -14355,7 +14355,7 @@
               <a:buNone/>
               <a:defRPr lang="th-TH" sz="2000" b="1" dirty="0">
                 <a:solidFill>
-                  <a:srgbClr val="333333"/>
+                  <a:srgbClr val="23436D"/>
                 </a:solidFill>
                 <a:latin typeface="+mj-lt"/>
                 <a:ea typeface="+mj-ea"/>
@@ -14373,7 +14373,7 @@
             <a:r>
               <a:rPr lang="th-TH" sz="2000" b="1" dirty="0">
                 <a:solidFill>
-                  <a:srgbClr val="333333"/>
+                  <a:srgbClr val="23436D"/>
                 </a:solidFill>
                 <a:latin typeface="+mj-lt"/>
                 <a:ea typeface="+mj-ea"/>
@@ -14494,7 +14494,7 @@
             <a:avLst/>
           </a:prstGeom>
           <a:solidFill>
-            <a:srgbClr val="006666"/>
+            <a:srgbClr val="216B7F"/>
           </a:solidFill>
           <a:ln>
             <a:noFill/>
@@ -14537,7 +14537,7 @@
               <a:buNone/>
               <a:defRPr lang="th-TH" sz="2000" b="1" dirty="0">
                 <a:solidFill>
-                  <a:srgbClr val="333333"/>
+                  <a:srgbClr val="23436D"/>
                 </a:solidFill>
                 <a:latin typeface="+mj-lt"/>
                 <a:ea typeface="+mj-ea"/>
@@ -14555,7 +14555,7 @@
             <a:r>
               <a:rPr lang="th-TH" sz="2000" b="1" dirty="0">
                 <a:solidFill>
-                  <a:srgbClr val="333333"/>
+                  <a:srgbClr val="23436D"/>
                 </a:solidFill>
                 <a:latin typeface="+mj-lt"/>
                 <a:ea typeface="+mj-ea"/>
@@ -14645,7 +14645,7 @@
             <a:avLst/>
           </a:prstGeom>
           <a:solidFill>
-            <a:srgbClr val="006666"/>
+            <a:srgbClr val="216B7F"/>
           </a:solidFill>
           <a:ln>
             <a:noFill/>
@@ -14674,7 +14674,7 @@
             <a:avLst/>
           </a:prstGeom>
           <a:solidFill>
-            <a:srgbClr val="A9C2C2"/>
+            <a:srgbClr val="B1C4C9"/>
           </a:solidFill>
           <a:ln>
             <a:noFill/>
@@ -14842,7 +14842,7 @@
           </a:solidFill>
           <a:ln w="12700">
             <a:solidFill>
-              <a:srgbClr val="006666"/>
+              <a:srgbClr val="216B7F"/>
             </a:solidFill>
           </a:ln>
         </p:spPr>
@@ -14940,7 +14940,7 @@
               <a:buNone/>
               <a:defRPr lang="th-TH" sz="3200" b="1" dirty="0">
                 <a:solidFill>
-                  <a:srgbClr val="333333"/>
+                  <a:srgbClr val="23436D"/>
                 </a:solidFill>
                 <a:latin typeface="+mj-lt"/>
                 <a:ea typeface="+mj-ea"/>
@@ -14958,7 +14958,7 @@
             <a:r>
               <a:rPr lang="th-TH" sz="3200" b="1" dirty="0">
                 <a:solidFill>
-                  <a:srgbClr val="333333"/>
+                  <a:srgbClr val="23436D"/>
                 </a:solidFill>
                 <a:latin typeface="+mj-lt"/>
                 <a:ea typeface="+mj-ea"/>
@@ -14984,7 +14984,7 @@
             <a:avLst/>
           </a:prstGeom>
           <a:solidFill>
-            <a:srgbClr val="006666"/>
+            <a:srgbClr val="216B7F"/>
           </a:solidFill>
           <a:ln>
             <a:noFill/>
@@ -15027,7 +15027,7 @@
               <a:buNone/>
               <a:defRPr lang="th-TH" sz="7200" b="1" dirty="0">
                 <a:solidFill>
-                  <a:srgbClr val="333333"/>
+                  <a:srgbClr val="23436D"/>
                 </a:solidFill>
                 <a:latin typeface="+mj-lt"/>
                 <a:ea typeface="+mj-ea"/>
@@ -15045,7 +15045,7 @@
             <a:r>
               <a:rPr lang="th-TH" sz="7200" b="1" dirty="0">
                 <a:solidFill>
-                  <a:srgbClr val="333333"/>
+                  <a:srgbClr val="23436D"/>
                 </a:solidFill>
                 <a:latin typeface="+mj-lt"/>
                 <a:ea typeface="+mj-ea"/>
@@ -15172,7 +15172,7 @@
               <a:buNone/>
               <a:defRPr lang="th-TH" sz="7200" b="1" dirty="0">
                 <a:solidFill>
-                  <a:srgbClr val="333333"/>
+                  <a:srgbClr val="23436D"/>
                 </a:solidFill>
                 <a:latin typeface="+mj-lt"/>
                 <a:ea typeface="+mj-ea"/>
@@ -15190,7 +15190,7 @@
             <a:r>
               <a:rPr lang="th-TH" sz="7200" b="1" dirty="0">
                 <a:solidFill>
-                  <a:srgbClr val="333333"/>
+                  <a:srgbClr val="23436D"/>
                 </a:solidFill>
                 <a:latin typeface="+mj-lt"/>
                 <a:ea typeface="+mj-ea"/>
@@ -15317,7 +15317,7 @@
               <a:buNone/>
               <a:defRPr lang="th-TH" sz="7200" b="1" dirty="0">
                 <a:solidFill>
-                  <a:srgbClr val="333333"/>
+                  <a:srgbClr val="23436D"/>
                 </a:solidFill>
                 <a:latin typeface="+mj-lt"/>
                 <a:ea typeface="+mj-ea"/>
@@ -15335,7 +15335,7 @@
             <a:r>
               <a:rPr lang="th-TH" sz="7200" b="1" dirty="0">
                 <a:solidFill>
-                  <a:srgbClr val="333333"/>
+                  <a:srgbClr val="23436D"/>
                 </a:solidFill>
                 <a:latin typeface="+mj-lt"/>
                 <a:ea typeface="+mj-ea"/>
@@ -15477,7 +15477,7 @@
             <a:avLst/>
           </a:prstGeom>
           <a:solidFill>
-            <a:srgbClr val="006666"/>
+            <a:srgbClr val="216B7F"/>
           </a:solidFill>
           <a:ln>
             <a:noFill/>
@@ -15506,7 +15506,7 @@
             <a:avLst/>
           </a:prstGeom>
           <a:solidFill>
-            <a:srgbClr val="A9C2C2"/>
+            <a:srgbClr val="B1C4C9"/>
           </a:solidFill>
           <a:ln>
             <a:noFill/>
@@ -15674,7 +15674,7 @@
           </a:solidFill>
           <a:ln w="12700">
             <a:solidFill>
-              <a:srgbClr val="006666"/>
+              <a:srgbClr val="216B7F"/>
             </a:solidFill>
           </a:ln>
         </p:spPr>
@@ -15760,10 +15760,10 @@
           <a:gradFill rotWithShape="1">
             <a:gsLst>
               <a:gs pos="0">
-                <a:srgbClr val="193B36"/>
+                <a:srgbClr val="23436D"/>
               </a:gs>
               <a:gs pos="100000">
-                <a:srgbClr val="006666"/>
+                <a:srgbClr val="216B7F"/>
               </a:gs>
             </a:gsLst>
             <a:lin ang="5400000" scaled="0"/>
@@ -15812,7 +15812,7 @@
             <a:r>
               <a:rPr lang="th-TH" sz="12000" b="1" dirty="0">
                 <a:solidFill>
-                  <a:srgbClr val="006666">
+                  <a:srgbClr val="216B7F">
                     <a:alpha val="25000"/>
                   </a:srgbClr>
                 </a:solidFill>
@@ -15854,7 +15854,7 @@
               <a:buNone/>
               <a:defRPr lang="th-TH" sz="2800" dirty="0">
                 <a:solidFill>
-                  <a:srgbClr val="333333"/>
+                  <a:srgbClr val="23436D"/>
                 </a:solidFill>
                 <a:latin typeface="+mj-lt"/>
                 <a:ea typeface="+mj-ea"/>
@@ -15872,7 +15872,7 @@
             <a:r>
               <a:rPr lang="th-TH" sz="2800" dirty="0">
                 <a:solidFill>
-                  <a:srgbClr val="333333"/>
+                  <a:srgbClr val="23436D"/>
                 </a:solidFill>
                 <a:latin typeface="+mj-lt"/>
                 <a:ea typeface="+mj-ea"/>
@@ -15898,7 +15898,7 @@
             <a:avLst/>
           </a:prstGeom>
           <a:solidFill>
-            <a:srgbClr val="006666"/>
+            <a:srgbClr val="216B7F"/>
           </a:solidFill>
           <a:ln>
             <a:noFill/>
@@ -15985,7 +15985,7 @@
             <a:avLst/>
           </a:prstGeom>
           <a:solidFill>
-            <a:srgbClr val="006666"/>
+            <a:srgbClr val="216B7F"/>
           </a:solidFill>
           <a:ln>
             <a:noFill/>
@@ -16014,7 +16014,7 @@
             <a:avLst/>
           </a:prstGeom>
           <a:solidFill>
-            <a:srgbClr val="A9C2C2"/>
+            <a:srgbClr val="B1C4C9"/>
           </a:solidFill>
           <a:ln>
             <a:noFill/>
@@ -16182,7 +16182,7 @@
           </a:solidFill>
           <a:ln w="12700">
             <a:solidFill>
-              <a:srgbClr val="006666"/>
+              <a:srgbClr val="216B7F"/>
             </a:solidFill>
           </a:ln>
         </p:spPr>
@@ -16232,7 +16232,7 @@
     <p:bg>
       <p:bgPr>
         <a:solidFill>
-          <a:srgbClr val="193B36"/>
+          <a:srgbClr val="16324F"/>
         </a:solidFill>
         <a:effectLst/>
       </p:bgPr>
@@ -16316,17 +16316,17 @@
           <a:gradFill rotWithShape="1">
             <a:gsLst>
               <a:gs pos="0">
-                <a:srgbClr val="193B36">
+                <a:srgbClr val="16324F">
                   <a:alpha val="0"/>
                 </a:srgbClr>
               </a:gs>
               <a:gs pos="55000">
-                <a:srgbClr val="193B36">
+                <a:srgbClr val="16324F">
                   <a:alpha val="60000"/>
                 </a:srgbClr>
               </a:gs>
               <a:gs pos="100000">
-                <a:srgbClr val="193B36">
+                <a:srgbClr val="16324F">
                   <a:alpha val="90000"/>
                 </a:srgbClr>
               </a:gs>
@@ -16480,7 +16480,7 @@
             <a:avLst/>
           </a:prstGeom>
           <a:solidFill>
-            <a:srgbClr val="006666"/>
+            <a:srgbClr val="216B7F"/>
           </a:solidFill>
           <a:ln>
             <a:noFill/>
@@ -16509,7 +16509,7 @@
             <a:avLst/>
           </a:prstGeom>
           <a:solidFill>
-            <a:srgbClr val="A9C2C2"/>
+            <a:srgbClr val="B1C4C9"/>
           </a:solidFill>
           <a:ln>
             <a:noFill/>
@@ -16723,7 +16723,7 @@
               <a:buNone/>
               <a:defRPr lang="th-TH" sz="3200" b="1" dirty="0">
                 <a:solidFill>
-                  <a:srgbClr val="333333"/>
+                  <a:srgbClr val="23436D"/>
                 </a:solidFill>
                 <a:latin typeface="+mj-lt"/>
                 <a:ea typeface="+mj-ea"/>
@@ -16741,7 +16741,7 @@
             <a:r>
               <a:rPr lang="th-TH" sz="3200" b="1" dirty="0">
                 <a:solidFill>
-                  <a:srgbClr val="333333"/>
+                  <a:srgbClr val="23436D"/>
                 </a:solidFill>
                 <a:latin typeface="+mj-lt"/>
                 <a:ea typeface="+mj-ea"/>
@@ -16767,7 +16767,7 @@
             <a:avLst/>
           </a:prstGeom>
           <a:solidFill>
-            <a:srgbClr val="006666"/>
+            <a:srgbClr val="216B7F"/>
           </a:solidFill>
           <a:ln>
             <a:noFill/>
@@ -16945,7 +16945,7 @@
               <a:buNone/>
               <a:defRPr lang="th-TH" sz="1200" b="1" spc="120" dirty="0">
                 <a:solidFill>
-                  <a:srgbClr val="006666"/>
+                  <a:srgbClr val="216B7F"/>
                 </a:solidFill>
                 <a:latin typeface="+mn-lt"/>
                 <a:ea typeface="+mn-ea"/>
@@ -16963,7 +16963,7 @@
             <a:r>
               <a:rPr lang="th-TH" sz="1200" b="1" spc="120" dirty="0">
                 <a:solidFill>
-                  <a:srgbClr val="006666"/>
+                  <a:srgbClr val="216B7F"/>
                 </a:solidFill>
                 <a:latin typeface="+mn-lt"/>
                 <a:ea typeface="+mn-ea"/>
@@ -17047,7 +17047,7 @@
             <a:avLst/>
           </a:prstGeom>
           <a:solidFill>
-            <a:srgbClr val="006666"/>
+            <a:srgbClr val="216B7F"/>
           </a:solidFill>
           <a:ln>
             <a:noFill/>
@@ -17076,7 +17076,7 @@
             <a:avLst/>
           </a:prstGeom>
           <a:solidFill>
-            <a:srgbClr val="A9C2C2"/>
+            <a:srgbClr val="B1C4C9"/>
           </a:solidFill>
           <a:ln>
             <a:noFill/>
@@ -17244,7 +17244,7 @@
           </a:solidFill>
           <a:ln w="12700">
             <a:solidFill>
-              <a:srgbClr val="006666"/>
+              <a:srgbClr val="216B7F"/>
             </a:solidFill>
           </a:ln>
         </p:spPr>
@@ -17342,7 +17342,7 @@
               <a:buNone/>
               <a:defRPr lang="th-TH" sz="3200" b="1" dirty="0">
                 <a:solidFill>
-                  <a:srgbClr val="333333"/>
+                  <a:srgbClr val="23436D"/>
                 </a:solidFill>
                 <a:latin typeface="+mj-lt"/>
                 <a:ea typeface="+mj-ea"/>
@@ -17360,7 +17360,7 @@
             <a:r>
               <a:rPr lang="th-TH" sz="3200" b="1" dirty="0">
                 <a:solidFill>
-                  <a:srgbClr val="333333"/>
+                  <a:srgbClr val="23436D"/>
                 </a:solidFill>
                 <a:latin typeface="+mj-lt"/>
                 <a:ea typeface="+mj-ea"/>
@@ -17386,7 +17386,7 @@
             <a:avLst/>
           </a:prstGeom>
           <a:solidFill>
-            <a:srgbClr val="006666"/>
+            <a:srgbClr val="216B7F"/>
           </a:solidFill>
           <a:ln>
             <a:noFill/>
@@ -17430,7 +17430,7 @@
                 <a:spcPts val="1000"/>
               </a:spcBef>
               <a:buClr>
-                <a:srgbClr val="006666"/>
+                <a:srgbClr val="216B7F"/>
               </a:buClr>
               <a:buSzPct val="90000"/>
               <a:buFont typeface="Arial"/>
@@ -17498,7 +17498,7 @@
                 <a:spcPts val="1000"/>
               </a:spcBef>
               <a:buClr>
-                <a:srgbClr val="006666"/>
+                <a:srgbClr val="216B7F"/>
               </a:buClr>
               <a:buSzPct val="90000"/>
               <a:buFont typeface="Arial"/>
@@ -17587,7 +17587,7 @@
             <a:avLst/>
           </a:prstGeom>
           <a:solidFill>
-            <a:srgbClr val="006666"/>
+            <a:srgbClr val="216B7F"/>
           </a:solidFill>
           <a:ln>
             <a:noFill/>
@@ -17616,7 +17616,7 @@
             <a:avLst/>
           </a:prstGeom>
           <a:solidFill>
-            <a:srgbClr val="A9C2C2"/>
+            <a:srgbClr val="B1C4C9"/>
           </a:solidFill>
           <a:ln>
             <a:noFill/>
@@ -17784,7 +17784,7 @@
           </a:solidFill>
           <a:ln w="12700">
             <a:solidFill>
-              <a:srgbClr val="006666"/>
+              <a:srgbClr val="216B7F"/>
             </a:solidFill>
           </a:ln>
         </p:spPr>
@@ -17854,7 +17854,7 @@
         <a:buNone/>
         <a:defRPr lang="th-TH" sz="3200" b="1" dirty="0">
           <a:solidFill>
-            <a:srgbClr val="333333"/>
+            <a:srgbClr val="23436D"/>
           </a:solidFill>
           <a:latin typeface="+mj-lt"/>
           <a:ea typeface="+mj-ea"/>
@@ -17871,7 +17871,7 @@
           <a:spcPts val="1000"/>
         </a:spcBef>
         <a:buClr>
-          <a:srgbClr val="006666"/>
+          <a:srgbClr val="216B7F"/>
         </a:buClr>
         <a:buSzPct val="90000"/>
         <a:buFont typeface="Arial"/>
@@ -18746,7 +18746,7 @@
             <a:avLst/>
           </a:prstGeom>
           <a:solidFill>
-            <a:srgbClr val="193B36"/>
+            <a:srgbClr val="23436D"/>
           </a:solidFill>
           <a:ln>
             <a:noFill/>
@@ -18943,7 +18943,7 @@
             <a:avLst/>
           </a:prstGeom>
           <a:solidFill>
-            <a:srgbClr val="193B36"/>
+            <a:srgbClr val="23436D"/>
           </a:solidFill>
           <a:ln>
             <a:noFill/>
@@ -21366,7 +21366,7 @@
                   </a:txBody>
                   <a:tcPr marL="73152" marR="73152" marT="73152" marB="73152" anchor="ctr">
                     <a:solidFill>
-                      <a:srgbClr val="006666"/>
+                      <a:srgbClr val="216B7F"/>
                     </a:solidFill>
                   </a:tcPr>
                 </a:tc>
@@ -21460,7 +21460,7 @@
                   </a:txBody>
                   <a:tcPr marL="73152" marR="73152" marT="73152" marB="73152" anchor="ctr">
                     <a:solidFill>
-                      <a:srgbClr val="EBF3F3"/>
+                      <a:srgbClr val="EDF3F5"/>
                     </a:solidFill>
                   </a:tcPr>
                 </a:tc>
@@ -21554,7 +21554,7 @@
                   </a:txBody>
                   <a:tcPr marL="73152" marR="73152" marT="73152" marB="73152" anchor="ctr">
                     <a:solidFill>
-                      <a:srgbClr val="D5EAEA"/>
+                      <a:srgbClr val="D8EBEC"/>
                     </a:solidFill>
                   </a:tcPr>
                 </a:tc>
@@ -21648,7 +21648,7 @@
                   </a:txBody>
                   <a:tcPr marL="73152" marR="73152" marT="73152" marB="73152" anchor="ctr">
                     <a:solidFill>
-                      <a:srgbClr val="EBF3F3"/>
+                      <a:srgbClr val="EDF3F5"/>
                     </a:solidFill>
                   </a:tcPr>
                 </a:tc>
@@ -21742,7 +21742,7 @@
                   </a:txBody>
                   <a:tcPr marL="73152" marR="73152" marT="73152" marB="73152" anchor="ctr">
                     <a:solidFill>
-                      <a:srgbClr val="D5EAEA"/>
+                      <a:srgbClr val="D8EBEC"/>
                     </a:solidFill>
                   </a:tcPr>
                 </a:tc>
@@ -21836,7 +21836,7 @@
                   </a:txBody>
                   <a:tcPr marL="73152" marR="73152" marT="73152" marB="73152" anchor="ctr">
                     <a:solidFill>
-                      <a:srgbClr val="EBF3F3"/>
+                      <a:srgbClr val="EDF3F5"/>
                     </a:solidFill>
                   </a:tcPr>
                 </a:tc>
@@ -21882,7 +21882,7 @@
             <a:avLst/>
           </a:prstGeom>
           <a:solidFill>
-            <a:srgbClr val="006666"/>
+            <a:srgbClr val="216B7F"/>
           </a:solidFill>
           <a:ln>
             <a:noFill/>

--- a/NCT-Slide-Template-Corp-Demo.pptx
+++ b/NCT-Slide-Template-Corp-Demo.pptx
@@ -13374,7 +13374,65 @@
       </p:sp>
       <p:sp>
         <p:nvSpPr>
-          <p:cNvPr id="12" name="Left Content"/>
+          <p:cNvPr id="12" name="Left Heading"/>
+          <p:cNvSpPr>
+            <a:spLocks noGrp="1"/>
+          </p:cNvSpPr>
+          <p:nvPr>
+            <p:ph type="body" idx="3"/>
+          </p:nvPr>
+        </p:nvSpPr>
+        <p:spPr>
+          <a:xfrm>
+            <a:off x="914400" y="1691640"/>
+            <a:ext cx="5090160" cy="365760"/>
+          </a:xfrm>
+          <a:prstGeom prst="rect">
+            <a:avLst/>
+          </a:prstGeom>
+        </p:spPr>
+        <p:txBody>
+          <a:bodyPr wrap="square" anchor="t" lIns="0" tIns="0" rIns="0" bIns="0" rtlCol="0"/>
+          <a:lstStyle>
+            <a:lvl1pPr algn="l" marL="0" indent="0">
+              <a:lnSpc>
+                <a:spcPct val="115000"/>
+              </a:lnSpc>
+              <a:buNone/>
+              <a:defRPr lang="th-TH" sz="2000" b="1" dirty="0">
+                <a:solidFill>
+                  <a:srgbClr val="23436D"/>
+                </a:solidFill>
+                <a:latin typeface="+mj-lt"/>
+                <a:ea typeface="+mj-ea"/>
+                <a:cs typeface="+mj-cs"/>
+              </a:defRPr>
+            </a:lvl1pPr>
+          </a:lstStyle>
+          <a:p>
+            <a:pPr algn="l" marL="0" indent="0">
+              <a:lnSpc>
+                <a:spcPct val="115000"/>
+              </a:lnSpc>
+              <a:buNone/>
+            </a:pPr>
+            <a:r>
+              <a:rPr lang="th-TH" sz="2000" b="1" dirty="0">
+                <a:solidFill>
+                  <a:srgbClr val="23436D"/>
+                </a:solidFill>
+                <a:latin typeface="+mj-lt"/>
+                <a:ea typeface="+mj-ea"/>
+                <a:cs typeface="+mj-cs"/>
+              </a:rPr>
+              <a:t>หัวคอลัมน์ซ้าย</a:t>
+            </a:r>
+          </a:p>
+        </p:txBody>
+      </p:sp>
+      <p:sp>
+        <p:nvSpPr>
+          <p:cNvPr id="13" name="Left Content"/>
           <p:cNvSpPr>
             <a:spLocks noGrp="1"/>
           </p:cNvSpPr>
@@ -13384,8 +13442,8 @@
         </p:nvSpPr>
         <p:spPr>
           <a:xfrm>
-            <a:off x="914400" y="1691640"/>
-            <a:ext cx="5090160" cy="4343400"/>
+            <a:off x="914400" y="2240280"/>
+            <a:ext cx="5090160" cy="3794760"/>
           </a:xfrm>
           <a:prstGeom prst="rect">
             <a:avLst/>
@@ -13546,7 +13604,65 @@
       </p:sp>
       <p:sp>
         <p:nvSpPr>
-          <p:cNvPr id="13" name="Right Content"/>
+          <p:cNvPr id="14" name="Right Heading"/>
+          <p:cNvSpPr>
+            <a:spLocks noGrp="1"/>
+          </p:cNvSpPr>
+          <p:nvPr>
+            <p:ph type="body" idx="4"/>
+          </p:nvPr>
+        </p:nvSpPr>
+        <p:spPr>
+          <a:xfrm>
+            <a:off x="6187440" y="1691640"/>
+            <a:ext cx="5090160" cy="365760"/>
+          </a:xfrm>
+          <a:prstGeom prst="rect">
+            <a:avLst/>
+          </a:prstGeom>
+        </p:spPr>
+        <p:txBody>
+          <a:bodyPr wrap="square" anchor="t" lIns="0" tIns="0" rIns="0" bIns="0" rtlCol="0"/>
+          <a:lstStyle>
+            <a:lvl1pPr algn="l" marL="0" indent="0">
+              <a:lnSpc>
+                <a:spcPct val="115000"/>
+              </a:lnSpc>
+              <a:buNone/>
+              <a:defRPr lang="th-TH" sz="2000" b="1" dirty="0">
+                <a:solidFill>
+                  <a:srgbClr val="23436D"/>
+                </a:solidFill>
+                <a:latin typeface="+mj-lt"/>
+                <a:ea typeface="+mj-ea"/>
+                <a:cs typeface="+mj-cs"/>
+              </a:defRPr>
+            </a:lvl1pPr>
+          </a:lstStyle>
+          <a:p>
+            <a:pPr algn="l" marL="0" indent="0">
+              <a:lnSpc>
+                <a:spcPct val="115000"/>
+              </a:lnSpc>
+              <a:buNone/>
+            </a:pPr>
+            <a:r>
+              <a:rPr lang="th-TH" sz="2000" b="1" dirty="0">
+                <a:solidFill>
+                  <a:srgbClr val="23436D"/>
+                </a:solidFill>
+                <a:latin typeface="+mj-lt"/>
+                <a:ea typeface="+mj-ea"/>
+                <a:cs typeface="+mj-cs"/>
+              </a:rPr>
+              <a:t>หัวคอลัมน์ขวา</a:t>
+            </a:r>
+          </a:p>
+        </p:txBody>
+      </p:sp>
+      <p:sp>
+        <p:nvSpPr>
+          <p:cNvPr id="15" name="Right Content"/>
           <p:cNvSpPr>
             <a:spLocks noGrp="1"/>
           </p:cNvSpPr>
@@ -13556,8 +13672,8 @@
         </p:nvSpPr>
         <p:spPr>
           <a:xfrm>
-            <a:off x="6187440" y="1691640"/>
-            <a:ext cx="5090160" cy="4343400"/>
+            <a:off x="6187440" y="2240280"/>
+            <a:ext cx="5090160" cy="3794760"/>
           </a:xfrm>
           <a:prstGeom prst="rect">
             <a:avLst/>
@@ -23641,12 +23757,12 @@
       </p:sp>
       <p:sp>
         <p:nvSpPr>
-          <p:cNvPr id="3" name="L"/>
-          <p:cNvSpPr>
-            <a:spLocks noGrp="1"/>
-          </p:cNvSpPr>
-          <p:nvPr>
-            <p:ph type="body" idx="1"/>
+          <p:cNvPr id="3" name="LH"/>
+          <p:cNvSpPr>
+            <a:spLocks noGrp="1"/>
+          </p:cNvSpPr>
+          <p:nvPr>
+            <p:ph type="body" idx="3"/>
           </p:nvPr>
         </p:nvSpPr>
         <p:spPr/>
@@ -23660,15 +23776,31 @@
               <a:t>ก่อน</a:t>
             </a:r>
           </a:p>
-          <a:p>
-            <a:pPr lvl="1"/>
+        </p:txBody>
+      </p:sp>
+      <p:sp>
+        <p:nvSpPr>
+          <p:cNvPr id="4" name="L"/>
+          <p:cNvSpPr>
+            <a:spLocks noGrp="1"/>
+          </p:cNvSpPr>
+          <p:nvPr>
+            <p:ph type="body" idx="1"/>
+          </p:nvPr>
+        </p:nvSpPr>
+        <p:spPr/>
+        <p:txBody>
+          <a:bodyPr/>
+          <a:lstStyle/>
+          <a:p>
+            <a:pPr/>
             <a:r>
               <a:rPr lang="th-TH" dirty="0"/>
               <a:t>ระบบล่มบ่อย ไม่มีคนดูแลประจำ</a:t>
             </a:r>
           </a:p>
           <a:p>
-            <a:pPr lvl="1"/>
+            <a:pPr/>
             <a:r>
               <a:rPr lang="th-TH" dirty="0"/>
               <a:t>ค่าใช้จ่ายไม่แน่นอน</a:t>
@@ -23678,12 +23810,12 @@
       </p:sp>
       <p:sp>
         <p:nvSpPr>
-          <p:cNvPr id="4" name="R"/>
-          <p:cNvSpPr>
-            <a:spLocks noGrp="1"/>
-          </p:cNvSpPr>
-          <p:nvPr>
-            <p:ph type="body" idx="2"/>
+          <p:cNvPr id="5" name="RH"/>
+          <p:cNvSpPr>
+            <a:spLocks noGrp="1"/>
+          </p:cNvSpPr>
+          <p:nvPr>
+            <p:ph type="body" idx="4"/>
           </p:nvPr>
         </p:nvSpPr>
         <p:spPr/>
@@ -23697,15 +23829,31 @@
               <a:t>หลัง</a:t>
             </a:r>
           </a:p>
-          <a:p>
-            <a:pPr lvl="1"/>
+        </p:txBody>
+      </p:sp>
+      <p:sp>
+        <p:nvSpPr>
+          <p:cNvPr id="6" name="R"/>
+          <p:cNvSpPr>
+            <a:spLocks noGrp="1"/>
+          </p:cNvSpPr>
+          <p:nvPr>
+            <p:ph type="body" idx="2"/>
+          </p:nvPr>
+        </p:nvSpPr>
+        <p:spPr/>
+        <p:txBody>
+          <a:bodyPr/>
+          <a:lstStyle/>
+          <a:p>
+            <a:pPr/>
             <a:r>
               <a:rPr lang="th-TH" dirty="0"/>
               <a:t>มอนิเตอร์ 24 ชั่วโมง แจ้งเตือนอัตโนมัติ</a:t>
             </a:r>
           </a:p>
           <a:p>
-            <a:pPr lvl="1"/>
+            <a:pPr/>
             <a:r>
               <a:rPr lang="th-TH" dirty="0"/>
               <a:t>ค่าใช้จ่ายคงที่ต่อเดือน</a:t>

--- a/NCT-Slide-Template-Corp-Demo.pptx
+++ b/NCT-Slide-Template-Corp-Demo.pptx
@@ -25,6 +25,7 @@
     <p:sldId id="273" r:id="rId19"/>
     <p:sldId id="274" r:id="rId20"/>
     <p:sldId id="275" r:id="rId21"/>
+    <p:sldId id="276" r:id="rId22"/>
   </p:sldIdLst>
   <p:sldSz cx="12192000" cy="6858000"/>
   <p:notesSz cx="6858000" cy="9144000"/>
@@ -394,6 +395,292 @@
 </c:chartSpace>
 </file>
 
+<file path=ppt/charts/chart2.xml><?xml version="1.0" encoding="utf-8"?>
+<c:chartSpace xmlns:c="http://schemas.openxmlformats.org/drawingml/2006/chart" xmlns:a="http://schemas.openxmlformats.org/drawingml/2006/main" xmlns:r="http://schemas.openxmlformats.org/officeDocument/2006/relationships">
+  <c:roundedCorners val="0"/>
+  <c:chart>
+    <c:autoTitleDeleted val="1"/>
+    <c:plotArea>
+      <c:layout>
+        <c:manualLayout>
+          <c:layoutTarget val="inner"/>
+          <c:xMode val="edge"/>
+          <c:yMode val="edge"/>
+          <c:x val="0"/>
+          <c:y val="0"/>
+          <c:w val="1"/>
+          <c:h val="1"/>
+        </c:manualLayout>
+      </c:layout>
+      <c:barChart>
+        <c:barDir val="bar"/>
+        <c:grouping val="stacked"/>
+        <c:varyColors val="0"/>
+        <c:ser>
+          <c:idx val="0"/>
+          <c:order val="0"/>
+          <c:tx>
+            <c:strRef>
+              <c:f>Sheet1!$B$1</c:f>
+              <c:strCache>
+                <c:ptCount val="1"/>
+                <c:pt idx="0">
+                  <c:v>เริ่ม</c:v>
+                </c:pt>
+              </c:strCache>
+            </c:strRef>
+          </c:tx>
+          <c:spPr>
+            <a:noFill/>
+            <a:ln>
+              <a:noFill/>
+            </a:ln>
+          </c:spPr>
+          <c:invertIfNegative val="0"/>
+          <c:cat>
+            <c:strRef>
+              <c:f>Sheet1!$A$2:$A$9</c:f>
+              <c:strCache>
+                <c:ptCount val="8"/>
+                <c:pt idx="0">
+                  <c:v>1. เตรียมระบบ</c:v>
+                </c:pt>
+                <c:pt idx="1">
+                  <c:v>2. วิเคราะห์และออกแบบ</c:v>
+                </c:pt>
+                <c:pt idx="2">
+                  <c:v>3. พัฒนาและตั้งค่าระบบ</c:v>
+                </c:pt>
+                <c:pt idx="3">
+                  <c:v>4. ทดสอบ UAT</c:v>
+                </c:pt>
+                <c:pt idx="4">
+                  <c:v>5. อบรมผู้ใช้</c:v>
+                </c:pt>
+                <c:pt idx="5">
+                  <c:v>6. ขึ้นระบบ</c:v>
+                </c:pt>
+                <c:pt idx="6">
+                  <c:v>7. ดูแลหลังขึ้นระบบ</c:v>
+                </c:pt>
+                <c:pt idx="7">
+                  <c:v>8. รับประกันระบบ</c:v>
+                </c:pt>
+              </c:strCache>
+            </c:strRef>
+          </c:cat>
+          <c:val>
+            <c:numRef>
+              <c:f>Sheet1!$B$2:$B$9</c:f>
+              <c:numCache>
+                <c:formatCode>General</c:formatCode>
+                <c:ptCount val="8"/>
+                <c:pt idx="0">
+                  <c:v>0</c:v>
+                </c:pt>
+                <c:pt idx="1">
+                  <c:v>1</c:v>
+                </c:pt>
+                <c:pt idx="2">
+                  <c:v>2.5</c:v>
+                </c:pt>
+                <c:pt idx="3">
+                  <c:v>5</c:v>
+                </c:pt>
+                <c:pt idx="4">
+                  <c:v>5.75</c:v>
+                </c:pt>
+                <c:pt idx="5">
+                  <c:v>6</c:v>
+                </c:pt>
+                <c:pt idx="6">
+                  <c:v>6.5</c:v>
+                </c:pt>
+                <c:pt idx="7">
+                  <c:v>9.5</c:v>
+                </c:pt>
+              </c:numCache>
+            </c:numRef>
+          </c:val>
+        </c:ser>
+        <c:ser>
+          <c:idx val="1"/>
+          <c:order val="1"/>
+          <c:tx>
+            <c:strRef>
+              <c:f>Sheet1!$C$1</c:f>
+              <c:strCache>
+                <c:ptCount val="1"/>
+                <c:pt idx="0">
+                  <c:v>ระยะเวลา</c:v>
+                </c:pt>
+              </c:strCache>
+            </c:strRef>
+          </c:tx>
+          <c:spPr>
+            <a:solidFill>
+              <a:srgbClr val="90B4E4"/>
+            </a:solidFill>
+            <a:ln>
+              <a:noFill/>
+            </a:ln>
+          </c:spPr>
+          <c:invertIfNegative val="0"/>
+          <c:dPt>
+            <c:idx val="5"/>
+            <c:invertIfNegative val="0"/>
+            <c:bubble3D val="0"/>
+            <c:spPr>
+              <a:solidFill>
+                <a:srgbClr val="2A5EA0"/>
+              </a:solidFill>
+              <a:ln>
+                <a:noFill/>
+              </a:ln>
+            </c:spPr>
+          </c:dPt>
+          <c:cat>
+            <c:strRef>
+              <c:f>Sheet1!$A$2:$A$9</c:f>
+              <c:strCache>
+                <c:ptCount val="8"/>
+                <c:pt idx="0">
+                  <c:v>1. เตรียมระบบ</c:v>
+                </c:pt>
+                <c:pt idx="1">
+                  <c:v>2. วิเคราะห์และออกแบบ</c:v>
+                </c:pt>
+                <c:pt idx="2">
+                  <c:v>3. พัฒนาและตั้งค่าระบบ</c:v>
+                </c:pt>
+                <c:pt idx="3">
+                  <c:v>4. ทดสอบ UAT</c:v>
+                </c:pt>
+                <c:pt idx="4">
+                  <c:v>5. อบรมผู้ใช้</c:v>
+                </c:pt>
+                <c:pt idx="5">
+                  <c:v>6. ขึ้นระบบ</c:v>
+                </c:pt>
+                <c:pt idx="6">
+                  <c:v>7. ดูแลหลังขึ้นระบบ</c:v>
+                </c:pt>
+                <c:pt idx="7">
+                  <c:v>8. รับประกันระบบ</c:v>
+                </c:pt>
+              </c:strCache>
+            </c:strRef>
+          </c:cat>
+          <c:val>
+            <c:numRef>
+              <c:f>Sheet1!$C$2:$C$9</c:f>
+              <c:numCache>
+                <c:formatCode>General</c:formatCode>
+                <c:ptCount val="8"/>
+                <c:pt idx="0">
+                  <c:v>1</c:v>
+                </c:pt>
+                <c:pt idx="1">
+                  <c:v>1.5</c:v>
+                </c:pt>
+                <c:pt idx="2">
+                  <c:v>2.5</c:v>
+                </c:pt>
+                <c:pt idx="3">
+                  <c:v>1</c:v>
+                </c:pt>
+                <c:pt idx="4">
+                  <c:v>0.25</c:v>
+                </c:pt>
+                <c:pt idx="5">
+                  <c:v>0.5</c:v>
+                </c:pt>
+                <c:pt idx="6">
+                  <c:v>3</c:v>
+                </c:pt>
+                <c:pt idx="7">
+                  <c:v>2.5</c:v>
+                </c:pt>
+              </c:numCache>
+            </c:numRef>
+          </c:val>
+        </c:ser>
+        <c:gapWidth val="113"/>
+        <c:overlap val="100"/>
+        <c:axId val="21001"/>
+        <c:axId val="21002"/>
+      </c:barChart>
+      <c:catAx>
+        <c:axId val="21001"/>
+        <c:scaling>
+          <c:orientation val="maxMin"/>
+        </c:scaling>
+        <c:delete val="1"/>
+        <c:axPos val="l"/>
+        <c:majorTickMark val="none"/>
+        <c:minorTickMark val="none"/>
+        <c:tickLblPos val="none"/>
+        <c:crossAx val="21002"/>
+        <c:crosses val="autoZero"/>
+        <c:auto val="1"/>
+        <c:lblAlgn val="ctr"/>
+        <c:lblOffset val="100"/>
+        <c:noMultiLvlLbl val="0"/>
+      </c:catAx>
+      <c:valAx>
+        <c:axId val="21002"/>
+        <c:scaling>
+          <c:orientation val="minMax"/>
+          <c:max val="12"/>
+          <c:min val="0"/>
+        </c:scaling>
+        <c:delete val="0"/>
+        <c:axPos val="b"/>
+        <c:majorGridlines>
+          <c:spPr>
+            <a:ln w="9525">
+              <a:solidFill>
+                <a:srgbClr val="E5E5E5"/>
+              </a:solidFill>
+            </a:ln>
+          </c:spPr>
+        </c:majorGridlines>
+        <c:numFmt formatCode="General" sourceLinked="0"/>
+        <c:majorTickMark val="none"/>
+        <c:minorTickMark val="none"/>
+        <c:tickLblPos val="none"/>
+        <c:spPr>
+          <a:ln>
+            <a:noFill/>
+          </a:ln>
+        </c:spPr>
+        <c:crossAx val="21001"/>
+        <c:crosses val="max"/>
+        <c:crossBetween val="between"/>
+        <c:majorUnit val="1"/>
+      </c:valAx>
+      <c:spPr>
+        <a:noFill/>
+        <a:ln>
+          <a:noFill/>
+        </a:ln>
+      </c:spPr>
+    </c:plotArea>
+    <c:plotVisOnly val="1"/>
+    <c:dispBlanksAs val="gap"/>
+  </c:chart>
+  <c:spPr>
+    <a:noFill/>
+    <a:ln>
+      <a:noFill/>
+    </a:ln>
+  </c:spPr>
+  <c:externalData r:id="rId1">
+    <c:autoUpdate val="0"/>
+  </c:externalData>
+</c:chartSpace>
+</file>
+
 <file path=ppt/slideLayouts/slideLayout1.xml><?xml version="1.0" encoding="utf-8"?>
 <p:sldLayout xmlns:a="http://schemas.openxmlformats.org/drawingml/2006/main" xmlns:r="http://schemas.openxmlformats.org/officeDocument/2006/relationships" xmlns:p="http://schemas.openxmlformats.org/presentationml/2006/main" type="title" showMasterSp="0" preserve="1">
   <p:cSld name="01 Title Slide">
@@ -12720,6 +13007,2307 @@
 </p:sldLayout>
 </file>
 
+<file path=ppt/slideLayouts/slideLayout21.xml><?xml version="1.0" encoding="utf-8"?>
+<p:sldLayout xmlns:a="http://schemas.openxmlformats.org/drawingml/2006/main" xmlns:r="http://schemas.openxmlformats.org/officeDocument/2006/relationships" xmlns:p="http://schemas.openxmlformats.org/presentationml/2006/main" type="chart" showMasterSp="0" preserve="1">
+  <p:cSld name="21 Plan Timeline">
+    <p:bg>
+      <p:bgPr>
+        <a:solidFill>
+          <a:srgbClr val="FFFFFF"/>
+        </a:solidFill>
+        <a:effectLst/>
+      </p:bgPr>
+    </p:bg>
+    <p:spTree>
+      <p:nvGrpSpPr>
+        <p:cNvPr id="1" name=""/>
+        <p:cNvGrpSpPr/>
+        <p:nvPr/>
+      </p:nvGrpSpPr>
+      <p:grpSpPr>
+        <a:xfrm>
+          <a:off x="0" y="0"/>
+          <a:ext cx="0" cy="0"/>
+          <a:chOff x="0" y="0"/>
+          <a:chExt cx="0" cy="0"/>
+        </a:xfrm>
+      </p:grpSpPr>
+      <p:sp>
+        <p:nvSpPr>
+          <p:cNvPr id="10" name="Title Placeholder"/>
+          <p:cNvSpPr>
+            <a:spLocks noGrp="1"/>
+          </p:cNvSpPr>
+          <p:nvPr>
+            <p:ph type="title"/>
+          </p:nvPr>
+        </p:nvSpPr>
+        <p:spPr>
+          <a:xfrm>
+            <a:off x="914400" y="548640"/>
+            <a:ext cx="10363200" cy="731520"/>
+          </a:xfrm>
+          <a:prstGeom prst="rect">
+            <a:avLst/>
+          </a:prstGeom>
+        </p:spPr>
+        <p:txBody>
+          <a:bodyPr wrap="square" anchor="b" lIns="0" tIns="0" rIns="0" bIns="0" rtlCol="0"/>
+          <a:lstStyle>
+            <a:lvl1pPr algn="l" marL="0" indent="0">
+              <a:lnSpc>
+                <a:spcPct val="108000"/>
+              </a:lnSpc>
+              <a:buNone/>
+              <a:defRPr lang="th-TH" sz="3200" b="1" dirty="0">
+                <a:solidFill>
+                  <a:srgbClr val="23436D"/>
+                </a:solidFill>
+                <a:latin typeface="+mj-lt"/>
+                <a:ea typeface="+mj-ea"/>
+                <a:cs typeface="+mj-cs"/>
+              </a:defRPr>
+            </a:lvl1pPr>
+          </a:lstStyle>
+          <a:p>
+            <a:pPr algn="l" marL="0" indent="0">
+              <a:lnSpc>
+                <a:spcPct val="108000"/>
+              </a:lnSpc>
+              <a:buNone/>
+            </a:pPr>
+            <a:r>
+              <a:rPr lang="th-TH" sz="3200" b="1" dirty="0">
+                <a:solidFill>
+                  <a:srgbClr val="23436D"/>
+                </a:solidFill>
+                <a:latin typeface="+mj-lt"/>
+                <a:ea typeface="+mj-ea"/>
+                <a:cs typeface="+mj-cs"/>
+              </a:rPr>
+              <a:t>ชื่อสไลด์</a:t>
+            </a:r>
+          </a:p>
+        </p:txBody>
+      </p:sp>
+      <p:sp>
+        <p:nvSpPr>
+          <p:cNvPr id="11" name="Accent Rule"/>
+          <p:cNvSpPr/>
+          <p:nvPr/>
+        </p:nvSpPr>
+        <p:spPr>
+          <a:xfrm>
+            <a:off x="0" y="1371600"/>
+            <a:ext cx="12192000" cy="68580"/>
+          </a:xfrm>
+          <a:prstGeom prst="rect">
+            <a:avLst/>
+          </a:prstGeom>
+          <a:solidFill>
+            <a:srgbClr val="216B7F"/>
+          </a:solidFill>
+          <a:ln>
+            <a:noFill/>
+          </a:ln>
+        </p:spPr>
+        <p:txBody>
+          <a:bodyPr/>
+          <a:lstStyle/>
+          <a:p>
+            <a:endParaRPr lang="th-TH"/>
+          </a:p>
+        </p:txBody>
+      </p:sp>
+      <p:sp>
+        <p:nvSpPr>
+          <p:cNvPr id="12" name="Chart Placeholder"/>
+          <p:cNvSpPr>
+            <a:spLocks noGrp="1"/>
+          </p:cNvSpPr>
+          <p:nvPr>
+            <p:ph type="chart" idx="1"/>
+          </p:nvPr>
+        </p:nvSpPr>
+        <p:spPr>
+          <a:xfrm>
+            <a:off x="3566160" y="2057400"/>
+            <a:ext cx="7711440" cy="3108960"/>
+          </a:xfrm>
+          <a:prstGeom prst="rect">
+            <a:avLst/>
+          </a:prstGeom>
+        </p:spPr>
+        <p:txBody>
+          <a:bodyPr wrap="square" anchor="ctr" lIns="0" tIns="0" rIns="0" bIns="0" rtlCol="0"/>
+          <a:lstStyle>
+            <a:lvl1pPr algn="l" marL="0" indent="0">
+              <a:lnSpc>
+                <a:spcPct val="100000"/>
+              </a:lnSpc>
+              <a:buNone/>
+              <a:defRPr lang="th-TH" sz="1200" dirty="0">
+                <a:solidFill>
+                  <a:srgbClr val="5F5F5F"/>
+                </a:solidFill>
+                <a:latin typeface="+mn-lt"/>
+                <a:ea typeface="+mn-ea"/>
+                <a:cs typeface="+mn-cs"/>
+              </a:defRPr>
+            </a:lvl1pPr>
+          </a:lstStyle>
+          <a:p>
+            <a:pPr algn="l" marL="0" indent="0">
+              <a:lnSpc>
+                <a:spcPct val="100000"/>
+              </a:lnSpc>
+              <a:buNone/>
+            </a:pPr>
+            <a:endParaRPr lang="th-TH" sz="1200"/>
+          </a:p>
+        </p:txBody>
+      </p:sp>
+      <p:sp>
+        <p:nvSpPr>
+          <p:cNvPr id="13" name="Period 1"/>
+          <p:cNvSpPr>
+            <a:spLocks noGrp="1"/>
+          </p:cNvSpPr>
+          <p:nvPr>
+            <p:ph type="body" idx="20"/>
+          </p:nvPr>
+        </p:nvSpPr>
+        <p:spPr>
+          <a:xfrm>
+            <a:off x="3566160" y="1691640"/>
+            <a:ext cx="642620" cy="274320"/>
+          </a:xfrm>
+          <a:prstGeom prst="rect">
+            <a:avLst/>
+          </a:prstGeom>
+        </p:spPr>
+        <p:txBody>
+          <a:bodyPr wrap="square" anchor="b" lIns="0" tIns="0" rIns="0" bIns="0" rtlCol="0"/>
+          <a:lstStyle>
+            <a:lvl1pPr algn="ctr" marL="0" indent="0">
+              <a:lnSpc>
+                <a:spcPct val="100000"/>
+              </a:lnSpc>
+              <a:buNone/>
+              <a:defRPr lang="th-TH" sz="1200" b="1" dirty="0">
+                <a:solidFill>
+                  <a:srgbClr val="5F5F5F"/>
+                </a:solidFill>
+                <a:latin typeface="+mn-lt"/>
+                <a:ea typeface="+mn-ea"/>
+                <a:cs typeface="+mn-cs"/>
+              </a:defRPr>
+            </a:lvl1pPr>
+          </a:lstStyle>
+          <a:p>
+            <a:pPr algn="ctr" marL="0" indent="0">
+              <a:lnSpc>
+                <a:spcPct val="100000"/>
+              </a:lnSpc>
+              <a:buNone/>
+            </a:pPr>
+            <a:r>
+              <a:rPr lang="th-TH" sz="1200" b="1" dirty="0">
+                <a:solidFill>
+                  <a:srgbClr val="5F5F5F"/>
+                </a:solidFill>
+                <a:latin typeface="+mn-lt"/>
+                <a:ea typeface="+mn-ea"/>
+                <a:cs typeface="+mn-cs"/>
+              </a:rPr>
+              <a:t>ด.1</a:t>
+            </a:r>
+          </a:p>
+        </p:txBody>
+      </p:sp>
+      <p:sp>
+        <p:nvSpPr>
+          <p:cNvPr id="14" name="Period 2"/>
+          <p:cNvSpPr>
+            <a:spLocks noGrp="1"/>
+          </p:cNvSpPr>
+          <p:nvPr>
+            <p:ph type="body" idx="21"/>
+          </p:nvPr>
+        </p:nvSpPr>
+        <p:spPr>
+          <a:xfrm>
+            <a:off x="4208780" y="1691640"/>
+            <a:ext cx="642620" cy="274320"/>
+          </a:xfrm>
+          <a:prstGeom prst="rect">
+            <a:avLst/>
+          </a:prstGeom>
+        </p:spPr>
+        <p:txBody>
+          <a:bodyPr wrap="square" anchor="b" lIns="0" tIns="0" rIns="0" bIns="0" rtlCol="0"/>
+          <a:lstStyle>
+            <a:lvl1pPr algn="ctr" marL="0" indent="0">
+              <a:lnSpc>
+                <a:spcPct val="100000"/>
+              </a:lnSpc>
+              <a:buNone/>
+              <a:defRPr lang="th-TH" sz="1200" b="1" dirty="0">
+                <a:solidFill>
+                  <a:srgbClr val="5F5F5F"/>
+                </a:solidFill>
+                <a:latin typeface="+mn-lt"/>
+                <a:ea typeface="+mn-ea"/>
+                <a:cs typeface="+mn-cs"/>
+              </a:defRPr>
+            </a:lvl1pPr>
+          </a:lstStyle>
+          <a:p>
+            <a:pPr algn="ctr" marL="0" indent="0">
+              <a:lnSpc>
+                <a:spcPct val="100000"/>
+              </a:lnSpc>
+              <a:buNone/>
+            </a:pPr>
+            <a:r>
+              <a:rPr lang="th-TH" sz="1200" b="1" dirty="0">
+                <a:solidFill>
+                  <a:srgbClr val="5F5F5F"/>
+                </a:solidFill>
+                <a:latin typeface="+mn-lt"/>
+                <a:ea typeface="+mn-ea"/>
+                <a:cs typeface="+mn-cs"/>
+              </a:rPr>
+              <a:t>ด.2</a:t>
+            </a:r>
+          </a:p>
+        </p:txBody>
+      </p:sp>
+      <p:sp>
+        <p:nvSpPr>
+          <p:cNvPr id="15" name="Period 3"/>
+          <p:cNvSpPr>
+            <a:spLocks noGrp="1"/>
+          </p:cNvSpPr>
+          <p:nvPr>
+            <p:ph type="body" idx="22"/>
+          </p:nvPr>
+        </p:nvSpPr>
+        <p:spPr>
+          <a:xfrm>
+            <a:off x="4851400" y="1691640"/>
+            <a:ext cx="642620" cy="274320"/>
+          </a:xfrm>
+          <a:prstGeom prst="rect">
+            <a:avLst/>
+          </a:prstGeom>
+        </p:spPr>
+        <p:txBody>
+          <a:bodyPr wrap="square" anchor="b" lIns="0" tIns="0" rIns="0" bIns="0" rtlCol="0"/>
+          <a:lstStyle>
+            <a:lvl1pPr algn="ctr" marL="0" indent="0">
+              <a:lnSpc>
+                <a:spcPct val="100000"/>
+              </a:lnSpc>
+              <a:buNone/>
+              <a:defRPr lang="th-TH" sz="1200" b="1" dirty="0">
+                <a:solidFill>
+                  <a:srgbClr val="5F5F5F"/>
+                </a:solidFill>
+                <a:latin typeface="+mn-lt"/>
+                <a:ea typeface="+mn-ea"/>
+                <a:cs typeface="+mn-cs"/>
+              </a:defRPr>
+            </a:lvl1pPr>
+          </a:lstStyle>
+          <a:p>
+            <a:pPr algn="ctr" marL="0" indent="0">
+              <a:lnSpc>
+                <a:spcPct val="100000"/>
+              </a:lnSpc>
+              <a:buNone/>
+            </a:pPr>
+            <a:r>
+              <a:rPr lang="th-TH" sz="1200" b="1" dirty="0">
+                <a:solidFill>
+                  <a:srgbClr val="5F5F5F"/>
+                </a:solidFill>
+                <a:latin typeface="+mn-lt"/>
+                <a:ea typeface="+mn-ea"/>
+                <a:cs typeface="+mn-cs"/>
+              </a:rPr>
+              <a:t>ด.3</a:t>
+            </a:r>
+          </a:p>
+        </p:txBody>
+      </p:sp>
+      <p:sp>
+        <p:nvSpPr>
+          <p:cNvPr id="16" name="Period 4"/>
+          <p:cNvSpPr>
+            <a:spLocks noGrp="1"/>
+          </p:cNvSpPr>
+          <p:nvPr>
+            <p:ph type="body" idx="23"/>
+          </p:nvPr>
+        </p:nvSpPr>
+        <p:spPr>
+          <a:xfrm>
+            <a:off x="5494020" y="1691640"/>
+            <a:ext cx="642620" cy="274320"/>
+          </a:xfrm>
+          <a:prstGeom prst="rect">
+            <a:avLst/>
+          </a:prstGeom>
+        </p:spPr>
+        <p:txBody>
+          <a:bodyPr wrap="square" anchor="b" lIns="0" tIns="0" rIns="0" bIns="0" rtlCol="0"/>
+          <a:lstStyle>
+            <a:lvl1pPr algn="ctr" marL="0" indent="0">
+              <a:lnSpc>
+                <a:spcPct val="100000"/>
+              </a:lnSpc>
+              <a:buNone/>
+              <a:defRPr lang="th-TH" sz="1200" b="1" dirty="0">
+                <a:solidFill>
+                  <a:srgbClr val="5F5F5F"/>
+                </a:solidFill>
+                <a:latin typeface="+mn-lt"/>
+                <a:ea typeface="+mn-ea"/>
+                <a:cs typeface="+mn-cs"/>
+              </a:defRPr>
+            </a:lvl1pPr>
+          </a:lstStyle>
+          <a:p>
+            <a:pPr algn="ctr" marL="0" indent="0">
+              <a:lnSpc>
+                <a:spcPct val="100000"/>
+              </a:lnSpc>
+              <a:buNone/>
+            </a:pPr>
+            <a:r>
+              <a:rPr lang="th-TH" sz="1200" b="1" dirty="0">
+                <a:solidFill>
+                  <a:srgbClr val="5F5F5F"/>
+                </a:solidFill>
+                <a:latin typeface="+mn-lt"/>
+                <a:ea typeface="+mn-ea"/>
+                <a:cs typeface="+mn-cs"/>
+              </a:rPr>
+              <a:t>ด.4</a:t>
+            </a:r>
+          </a:p>
+        </p:txBody>
+      </p:sp>
+      <p:sp>
+        <p:nvSpPr>
+          <p:cNvPr id="17" name="Period 5"/>
+          <p:cNvSpPr>
+            <a:spLocks noGrp="1"/>
+          </p:cNvSpPr>
+          <p:nvPr>
+            <p:ph type="body" idx="24"/>
+          </p:nvPr>
+        </p:nvSpPr>
+        <p:spPr>
+          <a:xfrm>
+            <a:off x="6136640" y="1691640"/>
+            <a:ext cx="642620" cy="274320"/>
+          </a:xfrm>
+          <a:prstGeom prst="rect">
+            <a:avLst/>
+          </a:prstGeom>
+        </p:spPr>
+        <p:txBody>
+          <a:bodyPr wrap="square" anchor="b" lIns="0" tIns="0" rIns="0" bIns="0" rtlCol="0"/>
+          <a:lstStyle>
+            <a:lvl1pPr algn="ctr" marL="0" indent="0">
+              <a:lnSpc>
+                <a:spcPct val="100000"/>
+              </a:lnSpc>
+              <a:buNone/>
+              <a:defRPr lang="th-TH" sz="1200" b="1" dirty="0">
+                <a:solidFill>
+                  <a:srgbClr val="5F5F5F"/>
+                </a:solidFill>
+                <a:latin typeface="+mn-lt"/>
+                <a:ea typeface="+mn-ea"/>
+                <a:cs typeface="+mn-cs"/>
+              </a:defRPr>
+            </a:lvl1pPr>
+          </a:lstStyle>
+          <a:p>
+            <a:pPr algn="ctr" marL="0" indent="0">
+              <a:lnSpc>
+                <a:spcPct val="100000"/>
+              </a:lnSpc>
+              <a:buNone/>
+            </a:pPr>
+            <a:r>
+              <a:rPr lang="th-TH" sz="1200" b="1" dirty="0">
+                <a:solidFill>
+                  <a:srgbClr val="5F5F5F"/>
+                </a:solidFill>
+                <a:latin typeface="+mn-lt"/>
+                <a:ea typeface="+mn-ea"/>
+                <a:cs typeface="+mn-cs"/>
+              </a:rPr>
+              <a:t>ด.5</a:t>
+            </a:r>
+          </a:p>
+        </p:txBody>
+      </p:sp>
+      <p:sp>
+        <p:nvSpPr>
+          <p:cNvPr id="18" name="Period 6"/>
+          <p:cNvSpPr>
+            <a:spLocks noGrp="1"/>
+          </p:cNvSpPr>
+          <p:nvPr>
+            <p:ph type="body" idx="25"/>
+          </p:nvPr>
+        </p:nvSpPr>
+        <p:spPr>
+          <a:xfrm>
+            <a:off x="6779260" y="1691640"/>
+            <a:ext cx="642620" cy="274320"/>
+          </a:xfrm>
+          <a:prstGeom prst="rect">
+            <a:avLst/>
+          </a:prstGeom>
+        </p:spPr>
+        <p:txBody>
+          <a:bodyPr wrap="square" anchor="b" lIns="0" tIns="0" rIns="0" bIns="0" rtlCol="0"/>
+          <a:lstStyle>
+            <a:lvl1pPr algn="ctr" marL="0" indent="0">
+              <a:lnSpc>
+                <a:spcPct val="100000"/>
+              </a:lnSpc>
+              <a:buNone/>
+              <a:defRPr lang="th-TH" sz="1200" b="1" dirty="0">
+                <a:solidFill>
+                  <a:srgbClr val="5F5F5F"/>
+                </a:solidFill>
+                <a:latin typeface="+mn-lt"/>
+                <a:ea typeface="+mn-ea"/>
+                <a:cs typeface="+mn-cs"/>
+              </a:defRPr>
+            </a:lvl1pPr>
+          </a:lstStyle>
+          <a:p>
+            <a:pPr algn="ctr" marL="0" indent="0">
+              <a:lnSpc>
+                <a:spcPct val="100000"/>
+              </a:lnSpc>
+              <a:buNone/>
+            </a:pPr>
+            <a:r>
+              <a:rPr lang="th-TH" sz="1200" b="1" dirty="0">
+                <a:solidFill>
+                  <a:srgbClr val="5F5F5F"/>
+                </a:solidFill>
+                <a:latin typeface="+mn-lt"/>
+                <a:ea typeface="+mn-ea"/>
+                <a:cs typeface="+mn-cs"/>
+              </a:rPr>
+              <a:t>ด.6</a:t>
+            </a:r>
+          </a:p>
+        </p:txBody>
+      </p:sp>
+      <p:sp>
+        <p:nvSpPr>
+          <p:cNvPr id="19" name="Period 7"/>
+          <p:cNvSpPr>
+            <a:spLocks noGrp="1"/>
+          </p:cNvSpPr>
+          <p:nvPr>
+            <p:ph type="body" idx="26"/>
+          </p:nvPr>
+        </p:nvSpPr>
+        <p:spPr>
+          <a:xfrm>
+            <a:off x="7421880" y="1691640"/>
+            <a:ext cx="642620" cy="274320"/>
+          </a:xfrm>
+          <a:prstGeom prst="rect">
+            <a:avLst/>
+          </a:prstGeom>
+        </p:spPr>
+        <p:txBody>
+          <a:bodyPr wrap="square" anchor="b" lIns="0" tIns="0" rIns="0" bIns="0" rtlCol="0"/>
+          <a:lstStyle>
+            <a:lvl1pPr algn="ctr" marL="0" indent="0">
+              <a:lnSpc>
+                <a:spcPct val="100000"/>
+              </a:lnSpc>
+              <a:buNone/>
+              <a:defRPr lang="th-TH" sz="1200" b="1" dirty="0">
+                <a:solidFill>
+                  <a:srgbClr val="5F5F5F"/>
+                </a:solidFill>
+                <a:latin typeface="+mn-lt"/>
+                <a:ea typeface="+mn-ea"/>
+                <a:cs typeface="+mn-cs"/>
+              </a:defRPr>
+            </a:lvl1pPr>
+          </a:lstStyle>
+          <a:p>
+            <a:pPr algn="ctr" marL="0" indent="0">
+              <a:lnSpc>
+                <a:spcPct val="100000"/>
+              </a:lnSpc>
+              <a:buNone/>
+            </a:pPr>
+            <a:r>
+              <a:rPr lang="th-TH" sz="1200" b="1" dirty="0">
+                <a:solidFill>
+                  <a:srgbClr val="5F5F5F"/>
+                </a:solidFill>
+                <a:latin typeface="+mn-lt"/>
+                <a:ea typeface="+mn-ea"/>
+                <a:cs typeface="+mn-cs"/>
+              </a:rPr>
+              <a:t>ด.7</a:t>
+            </a:r>
+          </a:p>
+        </p:txBody>
+      </p:sp>
+      <p:sp>
+        <p:nvSpPr>
+          <p:cNvPr id="20" name="Period 8"/>
+          <p:cNvSpPr>
+            <a:spLocks noGrp="1"/>
+          </p:cNvSpPr>
+          <p:nvPr>
+            <p:ph type="body" idx="27"/>
+          </p:nvPr>
+        </p:nvSpPr>
+        <p:spPr>
+          <a:xfrm>
+            <a:off x="8064500" y="1691640"/>
+            <a:ext cx="642620" cy="274320"/>
+          </a:xfrm>
+          <a:prstGeom prst="rect">
+            <a:avLst/>
+          </a:prstGeom>
+        </p:spPr>
+        <p:txBody>
+          <a:bodyPr wrap="square" anchor="b" lIns="0" tIns="0" rIns="0" bIns="0" rtlCol="0"/>
+          <a:lstStyle>
+            <a:lvl1pPr algn="ctr" marL="0" indent="0">
+              <a:lnSpc>
+                <a:spcPct val="100000"/>
+              </a:lnSpc>
+              <a:buNone/>
+              <a:defRPr lang="th-TH" sz="1200" b="1" dirty="0">
+                <a:solidFill>
+                  <a:srgbClr val="5F5F5F"/>
+                </a:solidFill>
+                <a:latin typeface="+mn-lt"/>
+                <a:ea typeface="+mn-ea"/>
+                <a:cs typeface="+mn-cs"/>
+              </a:defRPr>
+            </a:lvl1pPr>
+          </a:lstStyle>
+          <a:p>
+            <a:pPr algn="ctr" marL="0" indent="0">
+              <a:lnSpc>
+                <a:spcPct val="100000"/>
+              </a:lnSpc>
+              <a:buNone/>
+            </a:pPr>
+            <a:r>
+              <a:rPr lang="th-TH" sz="1200" b="1" dirty="0">
+                <a:solidFill>
+                  <a:srgbClr val="5F5F5F"/>
+                </a:solidFill>
+                <a:latin typeface="+mn-lt"/>
+                <a:ea typeface="+mn-ea"/>
+                <a:cs typeface="+mn-cs"/>
+              </a:rPr>
+              <a:t>ด.8</a:t>
+            </a:r>
+          </a:p>
+        </p:txBody>
+      </p:sp>
+      <p:sp>
+        <p:nvSpPr>
+          <p:cNvPr id="21" name="Period 9"/>
+          <p:cNvSpPr>
+            <a:spLocks noGrp="1"/>
+          </p:cNvSpPr>
+          <p:nvPr>
+            <p:ph type="body" idx="28"/>
+          </p:nvPr>
+        </p:nvSpPr>
+        <p:spPr>
+          <a:xfrm>
+            <a:off x="8707120" y="1691640"/>
+            <a:ext cx="642620" cy="274320"/>
+          </a:xfrm>
+          <a:prstGeom prst="rect">
+            <a:avLst/>
+          </a:prstGeom>
+        </p:spPr>
+        <p:txBody>
+          <a:bodyPr wrap="square" anchor="b" lIns="0" tIns="0" rIns="0" bIns="0" rtlCol="0"/>
+          <a:lstStyle>
+            <a:lvl1pPr algn="ctr" marL="0" indent="0">
+              <a:lnSpc>
+                <a:spcPct val="100000"/>
+              </a:lnSpc>
+              <a:buNone/>
+              <a:defRPr lang="th-TH" sz="1200" b="1" dirty="0">
+                <a:solidFill>
+                  <a:srgbClr val="5F5F5F"/>
+                </a:solidFill>
+                <a:latin typeface="+mn-lt"/>
+                <a:ea typeface="+mn-ea"/>
+                <a:cs typeface="+mn-cs"/>
+              </a:defRPr>
+            </a:lvl1pPr>
+          </a:lstStyle>
+          <a:p>
+            <a:pPr algn="ctr" marL="0" indent="0">
+              <a:lnSpc>
+                <a:spcPct val="100000"/>
+              </a:lnSpc>
+              <a:buNone/>
+            </a:pPr>
+            <a:r>
+              <a:rPr lang="th-TH" sz="1200" b="1" dirty="0">
+                <a:solidFill>
+                  <a:srgbClr val="5F5F5F"/>
+                </a:solidFill>
+                <a:latin typeface="+mn-lt"/>
+                <a:ea typeface="+mn-ea"/>
+                <a:cs typeface="+mn-cs"/>
+              </a:rPr>
+              <a:t>ด.9</a:t>
+            </a:r>
+          </a:p>
+        </p:txBody>
+      </p:sp>
+      <p:sp>
+        <p:nvSpPr>
+          <p:cNvPr id="22" name="Period 10"/>
+          <p:cNvSpPr>
+            <a:spLocks noGrp="1"/>
+          </p:cNvSpPr>
+          <p:nvPr>
+            <p:ph type="body" idx="29"/>
+          </p:nvPr>
+        </p:nvSpPr>
+        <p:spPr>
+          <a:xfrm>
+            <a:off x="9349740" y="1691640"/>
+            <a:ext cx="642620" cy="274320"/>
+          </a:xfrm>
+          <a:prstGeom prst="rect">
+            <a:avLst/>
+          </a:prstGeom>
+        </p:spPr>
+        <p:txBody>
+          <a:bodyPr wrap="square" anchor="b" lIns="0" tIns="0" rIns="0" bIns="0" rtlCol="0"/>
+          <a:lstStyle>
+            <a:lvl1pPr algn="ctr" marL="0" indent="0">
+              <a:lnSpc>
+                <a:spcPct val="100000"/>
+              </a:lnSpc>
+              <a:buNone/>
+              <a:defRPr lang="th-TH" sz="1200" b="1" dirty="0">
+                <a:solidFill>
+                  <a:srgbClr val="5F5F5F"/>
+                </a:solidFill>
+                <a:latin typeface="+mn-lt"/>
+                <a:ea typeface="+mn-ea"/>
+                <a:cs typeface="+mn-cs"/>
+              </a:defRPr>
+            </a:lvl1pPr>
+          </a:lstStyle>
+          <a:p>
+            <a:pPr algn="ctr" marL="0" indent="0">
+              <a:lnSpc>
+                <a:spcPct val="100000"/>
+              </a:lnSpc>
+              <a:buNone/>
+            </a:pPr>
+            <a:r>
+              <a:rPr lang="th-TH" sz="1200" b="1" dirty="0">
+                <a:solidFill>
+                  <a:srgbClr val="5F5F5F"/>
+                </a:solidFill>
+                <a:latin typeface="+mn-lt"/>
+                <a:ea typeface="+mn-ea"/>
+                <a:cs typeface="+mn-cs"/>
+              </a:rPr>
+              <a:t>ด.10</a:t>
+            </a:r>
+          </a:p>
+        </p:txBody>
+      </p:sp>
+      <p:sp>
+        <p:nvSpPr>
+          <p:cNvPr id="23" name="Period 11"/>
+          <p:cNvSpPr>
+            <a:spLocks noGrp="1"/>
+          </p:cNvSpPr>
+          <p:nvPr>
+            <p:ph type="body" idx="30"/>
+          </p:nvPr>
+        </p:nvSpPr>
+        <p:spPr>
+          <a:xfrm>
+            <a:off x="9992360" y="1691640"/>
+            <a:ext cx="642620" cy="274320"/>
+          </a:xfrm>
+          <a:prstGeom prst="rect">
+            <a:avLst/>
+          </a:prstGeom>
+        </p:spPr>
+        <p:txBody>
+          <a:bodyPr wrap="square" anchor="b" lIns="0" tIns="0" rIns="0" bIns="0" rtlCol="0"/>
+          <a:lstStyle>
+            <a:lvl1pPr algn="ctr" marL="0" indent="0">
+              <a:lnSpc>
+                <a:spcPct val="100000"/>
+              </a:lnSpc>
+              <a:buNone/>
+              <a:defRPr lang="th-TH" sz="1200" b="1" dirty="0">
+                <a:solidFill>
+                  <a:srgbClr val="5F5F5F"/>
+                </a:solidFill>
+                <a:latin typeface="+mn-lt"/>
+                <a:ea typeface="+mn-ea"/>
+                <a:cs typeface="+mn-cs"/>
+              </a:defRPr>
+            </a:lvl1pPr>
+          </a:lstStyle>
+          <a:p>
+            <a:pPr algn="ctr" marL="0" indent="0">
+              <a:lnSpc>
+                <a:spcPct val="100000"/>
+              </a:lnSpc>
+              <a:buNone/>
+            </a:pPr>
+            <a:r>
+              <a:rPr lang="th-TH" sz="1200" b="1" dirty="0">
+                <a:solidFill>
+                  <a:srgbClr val="5F5F5F"/>
+                </a:solidFill>
+                <a:latin typeface="+mn-lt"/>
+                <a:ea typeface="+mn-ea"/>
+                <a:cs typeface="+mn-cs"/>
+              </a:rPr>
+              <a:t>ด.11</a:t>
+            </a:r>
+          </a:p>
+        </p:txBody>
+      </p:sp>
+      <p:sp>
+        <p:nvSpPr>
+          <p:cNvPr id="24" name="Period 12"/>
+          <p:cNvSpPr>
+            <a:spLocks noGrp="1"/>
+          </p:cNvSpPr>
+          <p:nvPr>
+            <p:ph type="body" idx="31"/>
+          </p:nvPr>
+        </p:nvSpPr>
+        <p:spPr>
+          <a:xfrm>
+            <a:off x="10634980" y="1691640"/>
+            <a:ext cx="642620" cy="274320"/>
+          </a:xfrm>
+          <a:prstGeom prst="rect">
+            <a:avLst/>
+          </a:prstGeom>
+        </p:spPr>
+        <p:txBody>
+          <a:bodyPr wrap="square" anchor="b" lIns="0" tIns="0" rIns="0" bIns="0" rtlCol="0"/>
+          <a:lstStyle>
+            <a:lvl1pPr algn="ctr" marL="0" indent="0">
+              <a:lnSpc>
+                <a:spcPct val="100000"/>
+              </a:lnSpc>
+              <a:buNone/>
+              <a:defRPr lang="th-TH" sz="1200" b="1" dirty="0">
+                <a:solidFill>
+                  <a:srgbClr val="5F5F5F"/>
+                </a:solidFill>
+                <a:latin typeface="+mn-lt"/>
+                <a:ea typeface="+mn-ea"/>
+                <a:cs typeface="+mn-cs"/>
+              </a:defRPr>
+            </a:lvl1pPr>
+          </a:lstStyle>
+          <a:p>
+            <a:pPr algn="ctr" marL="0" indent="0">
+              <a:lnSpc>
+                <a:spcPct val="100000"/>
+              </a:lnSpc>
+              <a:buNone/>
+            </a:pPr>
+            <a:r>
+              <a:rPr lang="th-TH" sz="1200" b="1" dirty="0">
+                <a:solidFill>
+                  <a:srgbClr val="5F5F5F"/>
+                </a:solidFill>
+                <a:latin typeface="+mn-lt"/>
+                <a:ea typeface="+mn-ea"/>
+                <a:cs typeface="+mn-cs"/>
+              </a:rPr>
+              <a:t>ด.12</a:t>
+            </a:r>
+          </a:p>
+        </p:txBody>
+      </p:sp>
+      <p:sp>
+        <p:nvSpPr>
+          <p:cNvPr id="25" name="Row 1 Label"/>
+          <p:cNvSpPr>
+            <a:spLocks noGrp="1"/>
+          </p:cNvSpPr>
+          <p:nvPr>
+            <p:ph type="body" idx="32"/>
+          </p:nvPr>
+        </p:nvSpPr>
+        <p:spPr>
+          <a:xfrm>
+            <a:off x="914400" y="2057400"/>
+            <a:ext cx="1737360" cy="388620"/>
+          </a:xfrm>
+          <a:prstGeom prst="rect">
+            <a:avLst/>
+          </a:prstGeom>
+        </p:spPr>
+        <p:txBody>
+          <a:bodyPr wrap="square" anchor="ctr" lIns="0" tIns="0" rIns="0" bIns="0" rtlCol="0"/>
+          <a:lstStyle>
+            <a:lvl1pPr algn="l" marL="0" indent="0">
+              <a:lnSpc>
+                <a:spcPct val="100000"/>
+              </a:lnSpc>
+              <a:buNone/>
+              <a:defRPr lang="th-TH" sz="1400" dirty="0">
+                <a:solidFill>
+                  <a:srgbClr val="333333"/>
+                </a:solidFill>
+                <a:latin typeface="+mn-lt"/>
+                <a:ea typeface="+mn-ea"/>
+                <a:cs typeface="+mn-cs"/>
+              </a:defRPr>
+            </a:lvl1pPr>
+          </a:lstStyle>
+          <a:p>
+            <a:pPr algn="l" marL="0" indent="0">
+              <a:lnSpc>
+                <a:spcPct val="100000"/>
+              </a:lnSpc>
+              <a:buNone/>
+            </a:pPr>
+            <a:r>
+              <a:rPr lang="th-TH" sz="1400" dirty="0">
+                <a:solidFill>
+                  <a:srgbClr val="333333"/>
+                </a:solidFill>
+                <a:latin typeface="+mn-lt"/>
+                <a:ea typeface="+mn-ea"/>
+                <a:cs typeface="+mn-cs"/>
+              </a:rPr>
+              <a:t>1. ชื่อเฟส</a:t>
+            </a:r>
+          </a:p>
+        </p:txBody>
+      </p:sp>
+      <p:sp>
+        <p:nvSpPr>
+          <p:cNvPr id="26" name="Row 1 Duration"/>
+          <p:cNvSpPr>
+            <a:spLocks noGrp="1"/>
+          </p:cNvSpPr>
+          <p:nvPr>
+            <p:ph type="body" idx="33"/>
+          </p:nvPr>
+        </p:nvSpPr>
+        <p:spPr>
+          <a:xfrm>
+            <a:off x="2651760" y="2057400"/>
+            <a:ext cx="731520" cy="388620"/>
+          </a:xfrm>
+          <a:prstGeom prst="rect">
+            <a:avLst/>
+          </a:prstGeom>
+        </p:spPr>
+        <p:txBody>
+          <a:bodyPr wrap="square" anchor="ctr" lIns="0" tIns="0" rIns="0" bIns="0" rtlCol="0"/>
+          <a:lstStyle>
+            <a:lvl1pPr algn="r" marL="0" indent="0">
+              <a:lnSpc>
+                <a:spcPct val="100000"/>
+              </a:lnSpc>
+              <a:buNone/>
+              <a:defRPr lang="th-TH" sz="1200" dirty="0">
+                <a:solidFill>
+                  <a:srgbClr val="5F5F5F"/>
+                </a:solidFill>
+                <a:latin typeface="+mn-lt"/>
+                <a:ea typeface="+mn-ea"/>
+                <a:cs typeface="+mn-cs"/>
+              </a:defRPr>
+            </a:lvl1pPr>
+          </a:lstStyle>
+          <a:p>
+            <a:pPr algn="r" marL="0" indent="0">
+              <a:lnSpc>
+                <a:spcPct val="100000"/>
+              </a:lnSpc>
+              <a:buNone/>
+            </a:pPr>
+            <a:r>
+              <a:rPr lang="th-TH" sz="1200" dirty="0">
+                <a:solidFill>
+                  <a:srgbClr val="5F5F5F"/>
+                </a:solidFill>
+                <a:latin typeface="+mn-lt"/>
+                <a:ea typeface="+mn-ea"/>
+                <a:cs typeface="+mn-cs"/>
+              </a:rPr>
+              <a:t>0 สัปดาห์</a:t>
+            </a:r>
+          </a:p>
+        </p:txBody>
+      </p:sp>
+      <p:sp>
+        <p:nvSpPr>
+          <p:cNvPr id="27" name="Row 2 Label"/>
+          <p:cNvSpPr>
+            <a:spLocks noGrp="1"/>
+          </p:cNvSpPr>
+          <p:nvPr>
+            <p:ph type="body" idx="34"/>
+          </p:nvPr>
+        </p:nvSpPr>
+        <p:spPr>
+          <a:xfrm>
+            <a:off x="914400" y="2446020"/>
+            <a:ext cx="1737360" cy="388620"/>
+          </a:xfrm>
+          <a:prstGeom prst="rect">
+            <a:avLst/>
+          </a:prstGeom>
+        </p:spPr>
+        <p:txBody>
+          <a:bodyPr wrap="square" anchor="ctr" lIns="0" tIns="0" rIns="0" bIns="0" rtlCol="0"/>
+          <a:lstStyle>
+            <a:lvl1pPr algn="l" marL="0" indent="0">
+              <a:lnSpc>
+                <a:spcPct val="100000"/>
+              </a:lnSpc>
+              <a:buNone/>
+              <a:defRPr lang="th-TH" sz="1400" dirty="0">
+                <a:solidFill>
+                  <a:srgbClr val="333333"/>
+                </a:solidFill>
+                <a:latin typeface="+mn-lt"/>
+                <a:ea typeface="+mn-ea"/>
+                <a:cs typeface="+mn-cs"/>
+              </a:defRPr>
+            </a:lvl1pPr>
+          </a:lstStyle>
+          <a:p>
+            <a:pPr algn="l" marL="0" indent="0">
+              <a:lnSpc>
+                <a:spcPct val="100000"/>
+              </a:lnSpc>
+              <a:buNone/>
+            </a:pPr>
+            <a:r>
+              <a:rPr lang="th-TH" sz="1400" dirty="0">
+                <a:solidFill>
+                  <a:srgbClr val="333333"/>
+                </a:solidFill>
+                <a:latin typeface="+mn-lt"/>
+                <a:ea typeface="+mn-ea"/>
+                <a:cs typeface="+mn-cs"/>
+              </a:rPr>
+              <a:t>2. ชื่อเฟส</a:t>
+            </a:r>
+          </a:p>
+        </p:txBody>
+      </p:sp>
+      <p:sp>
+        <p:nvSpPr>
+          <p:cNvPr id="28" name="Row 2 Duration"/>
+          <p:cNvSpPr>
+            <a:spLocks noGrp="1"/>
+          </p:cNvSpPr>
+          <p:nvPr>
+            <p:ph type="body" idx="35"/>
+          </p:nvPr>
+        </p:nvSpPr>
+        <p:spPr>
+          <a:xfrm>
+            <a:off x="2651760" y="2446020"/>
+            <a:ext cx="731520" cy="388620"/>
+          </a:xfrm>
+          <a:prstGeom prst="rect">
+            <a:avLst/>
+          </a:prstGeom>
+        </p:spPr>
+        <p:txBody>
+          <a:bodyPr wrap="square" anchor="ctr" lIns="0" tIns="0" rIns="0" bIns="0" rtlCol="0"/>
+          <a:lstStyle>
+            <a:lvl1pPr algn="r" marL="0" indent="0">
+              <a:lnSpc>
+                <a:spcPct val="100000"/>
+              </a:lnSpc>
+              <a:buNone/>
+              <a:defRPr lang="th-TH" sz="1200" dirty="0">
+                <a:solidFill>
+                  <a:srgbClr val="5F5F5F"/>
+                </a:solidFill>
+                <a:latin typeface="+mn-lt"/>
+                <a:ea typeface="+mn-ea"/>
+                <a:cs typeface="+mn-cs"/>
+              </a:defRPr>
+            </a:lvl1pPr>
+          </a:lstStyle>
+          <a:p>
+            <a:pPr algn="r" marL="0" indent="0">
+              <a:lnSpc>
+                <a:spcPct val="100000"/>
+              </a:lnSpc>
+              <a:buNone/>
+            </a:pPr>
+            <a:r>
+              <a:rPr lang="th-TH" sz="1200" dirty="0">
+                <a:solidFill>
+                  <a:srgbClr val="5F5F5F"/>
+                </a:solidFill>
+                <a:latin typeface="+mn-lt"/>
+                <a:ea typeface="+mn-ea"/>
+                <a:cs typeface="+mn-cs"/>
+              </a:rPr>
+              <a:t>0 สัปดาห์</a:t>
+            </a:r>
+          </a:p>
+        </p:txBody>
+      </p:sp>
+      <p:sp>
+        <p:nvSpPr>
+          <p:cNvPr id="29" name="Row 3 Label"/>
+          <p:cNvSpPr>
+            <a:spLocks noGrp="1"/>
+          </p:cNvSpPr>
+          <p:nvPr>
+            <p:ph type="body" idx="36"/>
+          </p:nvPr>
+        </p:nvSpPr>
+        <p:spPr>
+          <a:xfrm>
+            <a:off x="914400" y="2834640"/>
+            <a:ext cx="1737360" cy="388620"/>
+          </a:xfrm>
+          <a:prstGeom prst="rect">
+            <a:avLst/>
+          </a:prstGeom>
+        </p:spPr>
+        <p:txBody>
+          <a:bodyPr wrap="square" anchor="ctr" lIns="0" tIns="0" rIns="0" bIns="0" rtlCol="0"/>
+          <a:lstStyle>
+            <a:lvl1pPr algn="l" marL="0" indent="0">
+              <a:lnSpc>
+                <a:spcPct val="100000"/>
+              </a:lnSpc>
+              <a:buNone/>
+              <a:defRPr lang="th-TH" sz="1400" dirty="0">
+                <a:solidFill>
+                  <a:srgbClr val="333333"/>
+                </a:solidFill>
+                <a:latin typeface="+mn-lt"/>
+                <a:ea typeface="+mn-ea"/>
+                <a:cs typeface="+mn-cs"/>
+              </a:defRPr>
+            </a:lvl1pPr>
+          </a:lstStyle>
+          <a:p>
+            <a:pPr algn="l" marL="0" indent="0">
+              <a:lnSpc>
+                <a:spcPct val="100000"/>
+              </a:lnSpc>
+              <a:buNone/>
+            </a:pPr>
+            <a:r>
+              <a:rPr lang="th-TH" sz="1400" dirty="0">
+                <a:solidFill>
+                  <a:srgbClr val="333333"/>
+                </a:solidFill>
+                <a:latin typeface="+mn-lt"/>
+                <a:ea typeface="+mn-ea"/>
+                <a:cs typeface="+mn-cs"/>
+              </a:rPr>
+              <a:t>3. ชื่อเฟส</a:t>
+            </a:r>
+          </a:p>
+        </p:txBody>
+      </p:sp>
+      <p:sp>
+        <p:nvSpPr>
+          <p:cNvPr id="30" name="Row 3 Duration"/>
+          <p:cNvSpPr>
+            <a:spLocks noGrp="1"/>
+          </p:cNvSpPr>
+          <p:nvPr>
+            <p:ph type="body" idx="37"/>
+          </p:nvPr>
+        </p:nvSpPr>
+        <p:spPr>
+          <a:xfrm>
+            <a:off x="2651760" y="2834640"/>
+            <a:ext cx="731520" cy="388620"/>
+          </a:xfrm>
+          <a:prstGeom prst="rect">
+            <a:avLst/>
+          </a:prstGeom>
+        </p:spPr>
+        <p:txBody>
+          <a:bodyPr wrap="square" anchor="ctr" lIns="0" tIns="0" rIns="0" bIns="0" rtlCol="0"/>
+          <a:lstStyle>
+            <a:lvl1pPr algn="r" marL="0" indent="0">
+              <a:lnSpc>
+                <a:spcPct val="100000"/>
+              </a:lnSpc>
+              <a:buNone/>
+              <a:defRPr lang="th-TH" sz="1200" dirty="0">
+                <a:solidFill>
+                  <a:srgbClr val="5F5F5F"/>
+                </a:solidFill>
+                <a:latin typeface="+mn-lt"/>
+                <a:ea typeface="+mn-ea"/>
+                <a:cs typeface="+mn-cs"/>
+              </a:defRPr>
+            </a:lvl1pPr>
+          </a:lstStyle>
+          <a:p>
+            <a:pPr algn="r" marL="0" indent="0">
+              <a:lnSpc>
+                <a:spcPct val="100000"/>
+              </a:lnSpc>
+              <a:buNone/>
+            </a:pPr>
+            <a:r>
+              <a:rPr lang="th-TH" sz="1200" dirty="0">
+                <a:solidFill>
+                  <a:srgbClr val="5F5F5F"/>
+                </a:solidFill>
+                <a:latin typeface="+mn-lt"/>
+                <a:ea typeface="+mn-ea"/>
+                <a:cs typeface="+mn-cs"/>
+              </a:rPr>
+              <a:t>0 สัปดาห์</a:t>
+            </a:r>
+          </a:p>
+        </p:txBody>
+      </p:sp>
+      <p:sp>
+        <p:nvSpPr>
+          <p:cNvPr id="31" name="Row 4 Label"/>
+          <p:cNvSpPr>
+            <a:spLocks noGrp="1"/>
+          </p:cNvSpPr>
+          <p:nvPr>
+            <p:ph type="body" idx="38"/>
+          </p:nvPr>
+        </p:nvSpPr>
+        <p:spPr>
+          <a:xfrm>
+            <a:off x="914400" y="3223260"/>
+            <a:ext cx="1737360" cy="388620"/>
+          </a:xfrm>
+          <a:prstGeom prst="rect">
+            <a:avLst/>
+          </a:prstGeom>
+        </p:spPr>
+        <p:txBody>
+          <a:bodyPr wrap="square" anchor="ctr" lIns="0" tIns="0" rIns="0" bIns="0" rtlCol="0"/>
+          <a:lstStyle>
+            <a:lvl1pPr algn="l" marL="0" indent="0">
+              <a:lnSpc>
+                <a:spcPct val="100000"/>
+              </a:lnSpc>
+              <a:buNone/>
+              <a:defRPr lang="th-TH" sz="1400" dirty="0">
+                <a:solidFill>
+                  <a:srgbClr val="333333"/>
+                </a:solidFill>
+                <a:latin typeface="+mn-lt"/>
+                <a:ea typeface="+mn-ea"/>
+                <a:cs typeface="+mn-cs"/>
+              </a:defRPr>
+            </a:lvl1pPr>
+          </a:lstStyle>
+          <a:p>
+            <a:pPr algn="l" marL="0" indent="0">
+              <a:lnSpc>
+                <a:spcPct val="100000"/>
+              </a:lnSpc>
+              <a:buNone/>
+            </a:pPr>
+            <a:r>
+              <a:rPr lang="th-TH" sz="1400" dirty="0">
+                <a:solidFill>
+                  <a:srgbClr val="333333"/>
+                </a:solidFill>
+                <a:latin typeface="+mn-lt"/>
+                <a:ea typeface="+mn-ea"/>
+                <a:cs typeface="+mn-cs"/>
+              </a:rPr>
+              <a:t>4. ชื่อเฟส</a:t>
+            </a:r>
+          </a:p>
+        </p:txBody>
+      </p:sp>
+      <p:sp>
+        <p:nvSpPr>
+          <p:cNvPr id="32" name="Row 4 Duration"/>
+          <p:cNvSpPr>
+            <a:spLocks noGrp="1"/>
+          </p:cNvSpPr>
+          <p:nvPr>
+            <p:ph type="body" idx="39"/>
+          </p:nvPr>
+        </p:nvSpPr>
+        <p:spPr>
+          <a:xfrm>
+            <a:off x="2651760" y="3223260"/>
+            <a:ext cx="731520" cy="388620"/>
+          </a:xfrm>
+          <a:prstGeom prst="rect">
+            <a:avLst/>
+          </a:prstGeom>
+        </p:spPr>
+        <p:txBody>
+          <a:bodyPr wrap="square" anchor="ctr" lIns="0" tIns="0" rIns="0" bIns="0" rtlCol="0"/>
+          <a:lstStyle>
+            <a:lvl1pPr algn="r" marL="0" indent="0">
+              <a:lnSpc>
+                <a:spcPct val="100000"/>
+              </a:lnSpc>
+              <a:buNone/>
+              <a:defRPr lang="th-TH" sz="1200" dirty="0">
+                <a:solidFill>
+                  <a:srgbClr val="5F5F5F"/>
+                </a:solidFill>
+                <a:latin typeface="+mn-lt"/>
+                <a:ea typeface="+mn-ea"/>
+                <a:cs typeface="+mn-cs"/>
+              </a:defRPr>
+            </a:lvl1pPr>
+          </a:lstStyle>
+          <a:p>
+            <a:pPr algn="r" marL="0" indent="0">
+              <a:lnSpc>
+                <a:spcPct val="100000"/>
+              </a:lnSpc>
+              <a:buNone/>
+            </a:pPr>
+            <a:r>
+              <a:rPr lang="th-TH" sz="1200" dirty="0">
+                <a:solidFill>
+                  <a:srgbClr val="5F5F5F"/>
+                </a:solidFill>
+                <a:latin typeface="+mn-lt"/>
+                <a:ea typeface="+mn-ea"/>
+                <a:cs typeface="+mn-cs"/>
+              </a:rPr>
+              <a:t>0 สัปดาห์</a:t>
+            </a:r>
+          </a:p>
+        </p:txBody>
+      </p:sp>
+      <p:sp>
+        <p:nvSpPr>
+          <p:cNvPr id="33" name="Row 5 Label"/>
+          <p:cNvSpPr>
+            <a:spLocks noGrp="1"/>
+          </p:cNvSpPr>
+          <p:nvPr>
+            <p:ph type="body" idx="40"/>
+          </p:nvPr>
+        </p:nvSpPr>
+        <p:spPr>
+          <a:xfrm>
+            <a:off x="914400" y="3611880"/>
+            <a:ext cx="1737360" cy="388620"/>
+          </a:xfrm>
+          <a:prstGeom prst="rect">
+            <a:avLst/>
+          </a:prstGeom>
+        </p:spPr>
+        <p:txBody>
+          <a:bodyPr wrap="square" anchor="ctr" lIns="0" tIns="0" rIns="0" bIns="0" rtlCol="0"/>
+          <a:lstStyle>
+            <a:lvl1pPr algn="l" marL="0" indent="0">
+              <a:lnSpc>
+                <a:spcPct val="100000"/>
+              </a:lnSpc>
+              <a:buNone/>
+              <a:defRPr lang="th-TH" sz="1400" dirty="0">
+                <a:solidFill>
+                  <a:srgbClr val="333333"/>
+                </a:solidFill>
+                <a:latin typeface="+mn-lt"/>
+                <a:ea typeface="+mn-ea"/>
+                <a:cs typeface="+mn-cs"/>
+              </a:defRPr>
+            </a:lvl1pPr>
+          </a:lstStyle>
+          <a:p>
+            <a:pPr algn="l" marL="0" indent="0">
+              <a:lnSpc>
+                <a:spcPct val="100000"/>
+              </a:lnSpc>
+              <a:buNone/>
+            </a:pPr>
+            <a:r>
+              <a:rPr lang="th-TH" sz="1400" dirty="0">
+                <a:solidFill>
+                  <a:srgbClr val="333333"/>
+                </a:solidFill>
+                <a:latin typeface="+mn-lt"/>
+                <a:ea typeface="+mn-ea"/>
+                <a:cs typeface="+mn-cs"/>
+              </a:rPr>
+              <a:t>5. ชื่อเฟส</a:t>
+            </a:r>
+          </a:p>
+        </p:txBody>
+      </p:sp>
+      <p:sp>
+        <p:nvSpPr>
+          <p:cNvPr id="34" name="Row 5 Duration"/>
+          <p:cNvSpPr>
+            <a:spLocks noGrp="1"/>
+          </p:cNvSpPr>
+          <p:nvPr>
+            <p:ph type="body" idx="41"/>
+          </p:nvPr>
+        </p:nvSpPr>
+        <p:spPr>
+          <a:xfrm>
+            <a:off x="2651760" y="3611880"/>
+            <a:ext cx="731520" cy="388620"/>
+          </a:xfrm>
+          <a:prstGeom prst="rect">
+            <a:avLst/>
+          </a:prstGeom>
+        </p:spPr>
+        <p:txBody>
+          <a:bodyPr wrap="square" anchor="ctr" lIns="0" tIns="0" rIns="0" bIns="0" rtlCol="0"/>
+          <a:lstStyle>
+            <a:lvl1pPr algn="r" marL="0" indent="0">
+              <a:lnSpc>
+                <a:spcPct val="100000"/>
+              </a:lnSpc>
+              <a:buNone/>
+              <a:defRPr lang="th-TH" sz="1200" dirty="0">
+                <a:solidFill>
+                  <a:srgbClr val="5F5F5F"/>
+                </a:solidFill>
+                <a:latin typeface="+mn-lt"/>
+                <a:ea typeface="+mn-ea"/>
+                <a:cs typeface="+mn-cs"/>
+              </a:defRPr>
+            </a:lvl1pPr>
+          </a:lstStyle>
+          <a:p>
+            <a:pPr algn="r" marL="0" indent="0">
+              <a:lnSpc>
+                <a:spcPct val="100000"/>
+              </a:lnSpc>
+              <a:buNone/>
+            </a:pPr>
+            <a:r>
+              <a:rPr lang="th-TH" sz="1200" dirty="0">
+                <a:solidFill>
+                  <a:srgbClr val="5F5F5F"/>
+                </a:solidFill>
+                <a:latin typeface="+mn-lt"/>
+                <a:ea typeface="+mn-ea"/>
+                <a:cs typeface="+mn-cs"/>
+              </a:rPr>
+              <a:t>0 สัปดาห์</a:t>
+            </a:r>
+          </a:p>
+        </p:txBody>
+      </p:sp>
+      <p:sp>
+        <p:nvSpPr>
+          <p:cNvPr id="35" name="Row 6 Label"/>
+          <p:cNvSpPr>
+            <a:spLocks noGrp="1"/>
+          </p:cNvSpPr>
+          <p:nvPr>
+            <p:ph type="body" idx="42"/>
+          </p:nvPr>
+        </p:nvSpPr>
+        <p:spPr>
+          <a:xfrm>
+            <a:off x="914400" y="4000500"/>
+            <a:ext cx="1737360" cy="388620"/>
+          </a:xfrm>
+          <a:prstGeom prst="rect">
+            <a:avLst/>
+          </a:prstGeom>
+        </p:spPr>
+        <p:txBody>
+          <a:bodyPr wrap="square" anchor="ctr" lIns="0" tIns="0" rIns="0" bIns="0" rtlCol="0"/>
+          <a:lstStyle>
+            <a:lvl1pPr algn="l" marL="0" indent="0">
+              <a:lnSpc>
+                <a:spcPct val="100000"/>
+              </a:lnSpc>
+              <a:buNone/>
+              <a:defRPr lang="th-TH" sz="1400" dirty="0">
+                <a:solidFill>
+                  <a:srgbClr val="333333"/>
+                </a:solidFill>
+                <a:latin typeface="+mn-lt"/>
+                <a:ea typeface="+mn-ea"/>
+                <a:cs typeface="+mn-cs"/>
+              </a:defRPr>
+            </a:lvl1pPr>
+          </a:lstStyle>
+          <a:p>
+            <a:pPr algn="l" marL="0" indent="0">
+              <a:lnSpc>
+                <a:spcPct val="100000"/>
+              </a:lnSpc>
+              <a:buNone/>
+            </a:pPr>
+            <a:r>
+              <a:rPr lang="th-TH" sz="1400" dirty="0">
+                <a:solidFill>
+                  <a:srgbClr val="333333"/>
+                </a:solidFill>
+                <a:latin typeface="+mn-lt"/>
+                <a:ea typeface="+mn-ea"/>
+                <a:cs typeface="+mn-cs"/>
+              </a:rPr>
+              <a:t>6. ชื่อเฟส</a:t>
+            </a:r>
+          </a:p>
+        </p:txBody>
+      </p:sp>
+      <p:sp>
+        <p:nvSpPr>
+          <p:cNvPr id="36" name="Row 6 Duration"/>
+          <p:cNvSpPr>
+            <a:spLocks noGrp="1"/>
+          </p:cNvSpPr>
+          <p:nvPr>
+            <p:ph type="body" idx="43"/>
+          </p:nvPr>
+        </p:nvSpPr>
+        <p:spPr>
+          <a:xfrm>
+            <a:off x="2651760" y="4000500"/>
+            <a:ext cx="731520" cy="388620"/>
+          </a:xfrm>
+          <a:prstGeom prst="rect">
+            <a:avLst/>
+          </a:prstGeom>
+        </p:spPr>
+        <p:txBody>
+          <a:bodyPr wrap="square" anchor="ctr" lIns="0" tIns="0" rIns="0" bIns="0" rtlCol="0"/>
+          <a:lstStyle>
+            <a:lvl1pPr algn="r" marL="0" indent="0">
+              <a:lnSpc>
+                <a:spcPct val="100000"/>
+              </a:lnSpc>
+              <a:buNone/>
+              <a:defRPr lang="th-TH" sz="1200" dirty="0">
+                <a:solidFill>
+                  <a:srgbClr val="5F5F5F"/>
+                </a:solidFill>
+                <a:latin typeface="+mn-lt"/>
+                <a:ea typeface="+mn-ea"/>
+                <a:cs typeface="+mn-cs"/>
+              </a:defRPr>
+            </a:lvl1pPr>
+          </a:lstStyle>
+          <a:p>
+            <a:pPr algn="r" marL="0" indent="0">
+              <a:lnSpc>
+                <a:spcPct val="100000"/>
+              </a:lnSpc>
+              <a:buNone/>
+            </a:pPr>
+            <a:r>
+              <a:rPr lang="th-TH" sz="1200" dirty="0">
+                <a:solidFill>
+                  <a:srgbClr val="5F5F5F"/>
+                </a:solidFill>
+                <a:latin typeface="+mn-lt"/>
+                <a:ea typeface="+mn-ea"/>
+                <a:cs typeface="+mn-cs"/>
+              </a:rPr>
+              <a:t>0 สัปดาห์</a:t>
+            </a:r>
+          </a:p>
+        </p:txBody>
+      </p:sp>
+      <p:sp>
+        <p:nvSpPr>
+          <p:cNvPr id="37" name="Row 7 Label"/>
+          <p:cNvSpPr>
+            <a:spLocks noGrp="1"/>
+          </p:cNvSpPr>
+          <p:nvPr>
+            <p:ph type="body" idx="44"/>
+          </p:nvPr>
+        </p:nvSpPr>
+        <p:spPr>
+          <a:xfrm>
+            <a:off x="914400" y="4389120"/>
+            <a:ext cx="1737360" cy="388620"/>
+          </a:xfrm>
+          <a:prstGeom prst="rect">
+            <a:avLst/>
+          </a:prstGeom>
+        </p:spPr>
+        <p:txBody>
+          <a:bodyPr wrap="square" anchor="ctr" lIns="0" tIns="0" rIns="0" bIns="0" rtlCol="0"/>
+          <a:lstStyle>
+            <a:lvl1pPr algn="l" marL="0" indent="0">
+              <a:lnSpc>
+                <a:spcPct val="100000"/>
+              </a:lnSpc>
+              <a:buNone/>
+              <a:defRPr lang="th-TH" sz="1400" dirty="0">
+                <a:solidFill>
+                  <a:srgbClr val="333333"/>
+                </a:solidFill>
+                <a:latin typeface="+mn-lt"/>
+                <a:ea typeface="+mn-ea"/>
+                <a:cs typeface="+mn-cs"/>
+              </a:defRPr>
+            </a:lvl1pPr>
+          </a:lstStyle>
+          <a:p>
+            <a:pPr algn="l" marL="0" indent="0">
+              <a:lnSpc>
+                <a:spcPct val="100000"/>
+              </a:lnSpc>
+              <a:buNone/>
+            </a:pPr>
+            <a:r>
+              <a:rPr lang="th-TH" sz="1400" dirty="0">
+                <a:solidFill>
+                  <a:srgbClr val="333333"/>
+                </a:solidFill>
+                <a:latin typeface="+mn-lt"/>
+                <a:ea typeface="+mn-ea"/>
+                <a:cs typeface="+mn-cs"/>
+              </a:rPr>
+              <a:t>7. ชื่อเฟส</a:t>
+            </a:r>
+          </a:p>
+        </p:txBody>
+      </p:sp>
+      <p:sp>
+        <p:nvSpPr>
+          <p:cNvPr id="38" name="Row 7 Duration"/>
+          <p:cNvSpPr>
+            <a:spLocks noGrp="1"/>
+          </p:cNvSpPr>
+          <p:nvPr>
+            <p:ph type="body" idx="45"/>
+          </p:nvPr>
+        </p:nvSpPr>
+        <p:spPr>
+          <a:xfrm>
+            <a:off x="2651760" y="4389120"/>
+            <a:ext cx="731520" cy="388620"/>
+          </a:xfrm>
+          <a:prstGeom prst="rect">
+            <a:avLst/>
+          </a:prstGeom>
+        </p:spPr>
+        <p:txBody>
+          <a:bodyPr wrap="square" anchor="ctr" lIns="0" tIns="0" rIns="0" bIns="0" rtlCol="0"/>
+          <a:lstStyle>
+            <a:lvl1pPr algn="r" marL="0" indent="0">
+              <a:lnSpc>
+                <a:spcPct val="100000"/>
+              </a:lnSpc>
+              <a:buNone/>
+              <a:defRPr lang="th-TH" sz="1200" dirty="0">
+                <a:solidFill>
+                  <a:srgbClr val="5F5F5F"/>
+                </a:solidFill>
+                <a:latin typeface="+mn-lt"/>
+                <a:ea typeface="+mn-ea"/>
+                <a:cs typeface="+mn-cs"/>
+              </a:defRPr>
+            </a:lvl1pPr>
+          </a:lstStyle>
+          <a:p>
+            <a:pPr algn="r" marL="0" indent="0">
+              <a:lnSpc>
+                <a:spcPct val="100000"/>
+              </a:lnSpc>
+              <a:buNone/>
+            </a:pPr>
+            <a:r>
+              <a:rPr lang="th-TH" sz="1200" dirty="0">
+                <a:solidFill>
+                  <a:srgbClr val="5F5F5F"/>
+                </a:solidFill>
+                <a:latin typeface="+mn-lt"/>
+                <a:ea typeface="+mn-ea"/>
+                <a:cs typeface="+mn-cs"/>
+              </a:rPr>
+              <a:t>0 สัปดาห์</a:t>
+            </a:r>
+          </a:p>
+        </p:txBody>
+      </p:sp>
+      <p:sp>
+        <p:nvSpPr>
+          <p:cNvPr id="39" name="Row 8 Label"/>
+          <p:cNvSpPr>
+            <a:spLocks noGrp="1"/>
+          </p:cNvSpPr>
+          <p:nvPr>
+            <p:ph type="body" idx="46"/>
+          </p:nvPr>
+        </p:nvSpPr>
+        <p:spPr>
+          <a:xfrm>
+            <a:off x="914400" y="4777740"/>
+            <a:ext cx="1737360" cy="388620"/>
+          </a:xfrm>
+          <a:prstGeom prst="rect">
+            <a:avLst/>
+          </a:prstGeom>
+        </p:spPr>
+        <p:txBody>
+          <a:bodyPr wrap="square" anchor="ctr" lIns="0" tIns="0" rIns="0" bIns="0" rtlCol="0"/>
+          <a:lstStyle>
+            <a:lvl1pPr algn="l" marL="0" indent="0">
+              <a:lnSpc>
+                <a:spcPct val="100000"/>
+              </a:lnSpc>
+              <a:buNone/>
+              <a:defRPr lang="th-TH" sz="1400" dirty="0">
+                <a:solidFill>
+                  <a:srgbClr val="333333"/>
+                </a:solidFill>
+                <a:latin typeface="+mn-lt"/>
+                <a:ea typeface="+mn-ea"/>
+                <a:cs typeface="+mn-cs"/>
+              </a:defRPr>
+            </a:lvl1pPr>
+          </a:lstStyle>
+          <a:p>
+            <a:pPr algn="l" marL="0" indent="0">
+              <a:lnSpc>
+                <a:spcPct val="100000"/>
+              </a:lnSpc>
+              <a:buNone/>
+            </a:pPr>
+            <a:r>
+              <a:rPr lang="th-TH" sz="1400" dirty="0">
+                <a:solidFill>
+                  <a:srgbClr val="333333"/>
+                </a:solidFill>
+                <a:latin typeface="+mn-lt"/>
+                <a:ea typeface="+mn-ea"/>
+                <a:cs typeface="+mn-cs"/>
+              </a:rPr>
+              <a:t>8. ชื่อเฟส</a:t>
+            </a:r>
+          </a:p>
+        </p:txBody>
+      </p:sp>
+      <p:sp>
+        <p:nvSpPr>
+          <p:cNvPr id="40" name="Row 8 Duration"/>
+          <p:cNvSpPr>
+            <a:spLocks noGrp="1"/>
+          </p:cNvSpPr>
+          <p:nvPr>
+            <p:ph type="body" idx="47"/>
+          </p:nvPr>
+        </p:nvSpPr>
+        <p:spPr>
+          <a:xfrm>
+            <a:off x="2651760" y="4777740"/>
+            <a:ext cx="731520" cy="388620"/>
+          </a:xfrm>
+          <a:prstGeom prst="rect">
+            <a:avLst/>
+          </a:prstGeom>
+        </p:spPr>
+        <p:txBody>
+          <a:bodyPr wrap="square" anchor="ctr" lIns="0" tIns="0" rIns="0" bIns="0" rtlCol="0"/>
+          <a:lstStyle>
+            <a:lvl1pPr algn="r" marL="0" indent="0">
+              <a:lnSpc>
+                <a:spcPct val="100000"/>
+              </a:lnSpc>
+              <a:buNone/>
+              <a:defRPr lang="th-TH" sz="1200" dirty="0">
+                <a:solidFill>
+                  <a:srgbClr val="5F5F5F"/>
+                </a:solidFill>
+                <a:latin typeface="+mn-lt"/>
+                <a:ea typeface="+mn-ea"/>
+                <a:cs typeface="+mn-cs"/>
+              </a:defRPr>
+            </a:lvl1pPr>
+          </a:lstStyle>
+          <a:p>
+            <a:pPr algn="r" marL="0" indent="0">
+              <a:lnSpc>
+                <a:spcPct val="100000"/>
+              </a:lnSpc>
+              <a:buNone/>
+            </a:pPr>
+            <a:r>
+              <a:rPr lang="th-TH" sz="1200" dirty="0">
+                <a:solidFill>
+                  <a:srgbClr val="5F5F5F"/>
+                </a:solidFill>
+                <a:latin typeface="+mn-lt"/>
+                <a:ea typeface="+mn-ea"/>
+                <a:cs typeface="+mn-cs"/>
+              </a:rPr>
+              <a:t>0 สัปดาห์</a:t>
+            </a:r>
+          </a:p>
+        </p:txBody>
+      </p:sp>
+      <p:sp>
+        <p:nvSpPr>
+          <p:cNvPr id="41" name="Key"/>
+          <p:cNvSpPr>
+            <a:spLocks noGrp="1"/>
+          </p:cNvSpPr>
+          <p:nvPr>
+            <p:ph type="body" idx="2"/>
+          </p:nvPr>
+        </p:nvSpPr>
+        <p:spPr>
+          <a:xfrm>
+            <a:off x="914400" y="5257800"/>
+            <a:ext cx="5181600" cy="274320"/>
+          </a:xfrm>
+          <a:prstGeom prst="rect">
+            <a:avLst/>
+          </a:prstGeom>
+        </p:spPr>
+        <p:txBody>
+          <a:bodyPr wrap="square" anchor="t" lIns="0" tIns="0" rIns="0" bIns="0" rtlCol="0"/>
+          <a:lstStyle>
+            <a:lvl1pPr algn="l" marL="0" indent="0">
+              <a:lnSpc>
+                <a:spcPct val="130000"/>
+              </a:lnSpc>
+              <a:buNone/>
+              <a:defRPr lang="th-TH" sz="1000" dirty="0">
+                <a:solidFill>
+                  <a:srgbClr val="5F5F5F"/>
+                </a:solidFill>
+                <a:latin typeface="+mn-lt"/>
+                <a:ea typeface="+mn-ea"/>
+                <a:cs typeface="+mn-cs"/>
+              </a:defRPr>
+            </a:lvl1pPr>
+          </a:lstStyle>
+          <a:p>
+            <a:pPr algn="l" marL="0" indent="0">
+              <a:lnSpc>
+                <a:spcPct val="130000"/>
+              </a:lnSpc>
+              <a:buNone/>
+            </a:pPr>
+            <a:r>
+              <a:rPr lang="th-TH" sz="1000" dirty="0">
+                <a:solidFill>
+                  <a:srgbClr val="5F5F5F"/>
+                </a:solidFill>
+                <a:latin typeface="+mn-lt"/>
+                <a:ea typeface="+mn-ea"/>
+                <a:cs typeface="+mn-cs"/>
+              </a:rPr>
+              <a:t>■ ช่วงงาน   ◆ ส่งมอบ / ตรวจรับ</a:t>
+            </a:r>
+          </a:p>
+        </p:txBody>
+      </p:sp>
+      <p:sp>
+        <p:nvSpPr>
+          <p:cNvPr id="42" name="Assumption"/>
+          <p:cNvSpPr>
+            <a:spLocks noGrp="1"/>
+          </p:cNvSpPr>
+          <p:nvPr>
+            <p:ph type="body" idx="3"/>
+          </p:nvPr>
+        </p:nvSpPr>
+        <p:spPr>
+          <a:xfrm>
+            <a:off x="6096000" y="5257800"/>
+            <a:ext cx="5181600" cy="274320"/>
+          </a:xfrm>
+          <a:prstGeom prst="rect">
+            <a:avLst/>
+          </a:prstGeom>
+        </p:spPr>
+        <p:txBody>
+          <a:bodyPr wrap="square" anchor="t" lIns="0" tIns="0" rIns="0" bIns="0" rtlCol="0"/>
+          <a:lstStyle>
+            <a:lvl1pPr algn="r" marL="0" indent="0">
+              <a:lnSpc>
+                <a:spcPct val="130000"/>
+              </a:lnSpc>
+              <a:buNone/>
+              <a:defRPr lang="th-TH" sz="1000" dirty="0">
+                <a:solidFill>
+                  <a:srgbClr val="5F5F5F"/>
+                </a:solidFill>
+                <a:latin typeface="+mn-lt"/>
+                <a:ea typeface="+mn-ea"/>
+                <a:cs typeface="+mn-cs"/>
+              </a:defRPr>
+            </a:lvl1pPr>
+          </a:lstStyle>
+          <a:p>
+            <a:pPr algn="r" marL="0" indent="0">
+              <a:lnSpc>
+                <a:spcPct val="130000"/>
+              </a:lnSpc>
+              <a:buNone/>
+            </a:pPr>
+            <a:r>
+              <a:rPr lang="th-TH" sz="1000" dirty="0">
+                <a:solidFill>
+                  <a:srgbClr val="5F5F5F"/>
+                </a:solidFill>
+                <a:latin typeface="+mn-lt"/>
+                <a:ea typeface="+mn-ea"/>
+                <a:cs typeface="+mn-cs"/>
+              </a:rPr>
+              <a:t>นับจากวันลงนามสัญญา</a:t>
+            </a:r>
+          </a:p>
+        </p:txBody>
+      </p:sp>
+      <p:sp>
+        <p:nvSpPr>
+          <p:cNvPr id="43" name="Takeaway Band"/>
+          <p:cNvSpPr/>
+          <p:nvPr/>
+        </p:nvSpPr>
+        <p:spPr>
+          <a:xfrm>
+            <a:off x="914400" y="5623560"/>
+            <a:ext cx="10363200" cy="411480"/>
+          </a:xfrm>
+          <a:prstGeom prst="rect">
+            <a:avLst/>
+          </a:prstGeom>
+          <a:solidFill>
+            <a:srgbClr val="E8F6F5"/>
+          </a:solidFill>
+          <a:ln>
+            <a:noFill/>
+          </a:ln>
+        </p:spPr>
+        <p:txBody>
+          <a:bodyPr/>
+          <a:lstStyle/>
+          <a:p>
+            <a:endParaRPr lang="th-TH"/>
+          </a:p>
+        </p:txBody>
+      </p:sp>
+      <p:sp>
+        <p:nvSpPr>
+          <p:cNvPr id="44" name="Takeaway Label"/>
+          <p:cNvSpPr>
+            <a:spLocks noGrp="1"/>
+          </p:cNvSpPr>
+          <p:nvPr>
+            <p:ph type="body" idx="4"/>
+          </p:nvPr>
+        </p:nvSpPr>
+        <p:spPr>
+          <a:xfrm>
+            <a:off x="1097280" y="5684520"/>
+            <a:ext cx="1828800" cy="289560"/>
+          </a:xfrm>
+          <a:prstGeom prst="rect">
+            <a:avLst/>
+          </a:prstGeom>
+        </p:spPr>
+        <p:txBody>
+          <a:bodyPr wrap="square" anchor="ctr" lIns="0" tIns="0" rIns="0" bIns="0" rtlCol="0"/>
+          <a:lstStyle>
+            <a:lvl1pPr algn="l" marL="0" indent="0">
+              <a:lnSpc>
+                <a:spcPct val="100000"/>
+              </a:lnSpc>
+              <a:buNone/>
+              <a:defRPr lang="th-TH" sz="1200" b="1" spc="120" dirty="0">
+                <a:solidFill>
+                  <a:srgbClr val="216B7F"/>
+                </a:solidFill>
+                <a:latin typeface="+mn-lt"/>
+                <a:ea typeface="+mn-ea"/>
+                <a:cs typeface="+mn-cs"/>
+              </a:defRPr>
+            </a:lvl1pPr>
+          </a:lstStyle>
+          <a:p>
+            <a:pPr algn="l" marL="0" indent="0">
+              <a:lnSpc>
+                <a:spcPct val="100000"/>
+              </a:lnSpc>
+              <a:buNone/>
+            </a:pPr>
+            <a:r>
+              <a:rPr lang="th-TH" sz="1200" b="1" spc="120" dirty="0">
+                <a:solidFill>
+                  <a:srgbClr val="216B7F"/>
+                </a:solidFill>
+                <a:latin typeface="+mn-lt"/>
+                <a:ea typeface="+mn-ea"/>
+                <a:cs typeface="+mn-cs"/>
+              </a:rPr>
+              <a:t>สรุป</a:t>
+            </a:r>
+          </a:p>
+        </p:txBody>
+      </p:sp>
+      <p:sp>
+        <p:nvSpPr>
+          <p:cNvPr id="45" name="Takeaway Copy"/>
+          <p:cNvSpPr>
+            <a:spLocks noGrp="1"/>
+          </p:cNvSpPr>
+          <p:nvPr>
+            <p:ph type="body" idx="5"/>
+          </p:nvPr>
+        </p:nvSpPr>
+        <p:spPr>
+          <a:xfrm>
+            <a:off x="2926080" y="5684520"/>
+            <a:ext cx="8168640" cy="289560"/>
+          </a:xfrm>
+          <a:prstGeom prst="rect">
+            <a:avLst/>
+          </a:prstGeom>
+        </p:spPr>
+        <p:txBody>
+          <a:bodyPr wrap="square" anchor="ctr" lIns="0" tIns="0" rIns="0" bIns="0" rtlCol="0"/>
+          <a:lstStyle>
+            <a:lvl1pPr algn="l" marL="0" indent="0">
+              <a:lnSpc>
+                <a:spcPct val="100000"/>
+              </a:lnSpc>
+              <a:buNone/>
+              <a:defRPr lang="th-TH" sz="1400" dirty="0">
+                <a:solidFill>
+                  <a:srgbClr val="333333"/>
+                </a:solidFill>
+                <a:latin typeface="+mn-lt"/>
+                <a:ea typeface="+mn-ea"/>
+                <a:cs typeface="+mn-cs"/>
+              </a:defRPr>
+            </a:lvl1pPr>
+          </a:lstStyle>
+          <a:p>
+            <a:pPr algn="l" marL="0" indent="0">
+              <a:lnSpc>
+                <a:spcPct val="100000"/>
+              </a:lnSpc>
+              <a:buNone/>
+            </a:pPr>
+            <a:r>
+              <a:rPr lang="th-TH" sz="1400" dirty="0">
+                <a:solidFill>
+                  <a:srgbClr val="333333"/>
+                </a:solidFill>
+                <a:latin typeface="+mn-lt"/>
+                <a:ea typeface="+mn-ea"/>
+                <a:cs typeface="+mn-cs"/>
+              </a:rPr>
+              <a:t>ประเด็นสรุปหนึ่งบรรทัด</a:t>
+            </a:r>
+          </a:p>
+        </p:txBody>
+      </p:sp>
+      <p:sp>
+        <p:nvSpPr>
+          <p:cNvPr id="90" name="Foot Bar 1"/>
+          <p:cNvSpPr/>
+          <p:nvPr/>
+        </p:nvSpPr>
+        <p:spPr>
+          <a:xfrm>
+            <a:off x="0" y="6675120"/>
+            <a:ext cx="822960" cy="137160"/>
+          </a:xfrm>
+          <a:prstGeom prst="rect">
+            <a:avLst/>
+          </a:prstGeom>
+          <a:solidFill>
+            <a:srgbClr val="216B7F"/>
+          </a:solidFill>
+          <a:ln>
+            <a:noFill/>
+          </a:ln>
+        </p:spPr>
+        <p:txBody>
+          <a:bodyPr/>
+          <a:lstStyle/>
+          <a:p>
+            <a:endParaRPr lang="th-TH"/>
+          </a:p>
+        </p:txBody>
+      </p:sp>
+      <p:sp>
+        <p:nvSpPr>
+          <p:cNvPr id="91" name="Foot Bar 2"/>
+          <p:cNvSpPr/>
+          <p:nvPr/>
+        </p:nvSpPr>
+        <p:spPr>
+          <a:xfrm>
+            <a:off x="822960" y="6675120"/>
+            <a:ext cx="822960" cy="137160"/>
+          </a:xfrm>
+          <a:prstGeom prst="rect">
+            <a:avLst/>
+          </a:prstGeom>
+          <a:solidFill>
+            <a:srgbClr val="B1C4C9"/>
+          </a:solidFill>
+          <a:ln>
+            <a:noFill/>
+          </a:ln>
+        </p:spPr>
+        <p:txBody>
+          <a:bodyPr/>
+          <a:lstStyle/>
+          <a:p>
+            <a:endParaRPr lang="th-TH"/>
+          </a:p>
+        </p:txBody>
+      </p:sp>
+      <p:sp>
+        <p:nvSpPr>
+          <p:cNvPr id="92" name="Foot Bar 3"/>
+          <p:cNvSpPr/>
+          <p:nvPr/>
+        </p:nvSpPr>
+        <p:spPr>
+          <a:xfrm>
+            <a:off x="1645920" y="6675120"/>
+            <a:ext cx="822960" cy="137160"/>
+          </a:xfrm>
+          <a:prstGeom prst="rect">
+            <a:avLst/>
+          </a:prstGeom>
+          <a:solidFill>
+            <a:srgbClr val="E1E1E1"/>
+          </a:solidFill>
+          <a:ln>
+            <a:noFill/>
+          </a:ln>
+        </p:spPr>
+        <p:txBody>
+          <a:bodyPr/>
+          <a:lstStyle/>
+          <a:p>
+            <a:endParaRPr lang="th-TH"/>
+          </a:p>
+        </p:txBody>
+      </p:sp>
+      <p:sp>
+        <p:nvSpPr>
+          <p:cNvPr id="93" name="Footer Placeholder"/>
+          <p:cNvSpPr>
+            <a:spLocks noGrp="1"/>
+          </p:cNvSpPr>
+          <p:nvPr>
+            <p:ph type="ftr" idx="11"/>
+          </p:nvPr>
+        </p:nvSpPr>
+        <p:spPr>
+          <a:xfrm>
+            <a:off x="2697480" y="6400800"/>
+            <a:ext cx="4572000" cy="274320"/>
+          </a:xfrm>
+          <a:prstGeom prst="rect">
+            <a:avLst/>
+          </a:prstGeom>
+        </p:spPr>
+        <p:txBody>
+          <a:bodyPr wrap="square" anchor="ctr" lIns="0" tIns="0" rIns="0" bIns="0" rtlCol="0"/>
+          <a:lstStyle>
+            <a:lvl1pPr algn="l" marL="0" indent="0">
+              <a:lnSpc>
+                <a:spcPct val="100000"/>
+              </a:lnSpc>
+              <a:buNone/>
+              <a:defRPr lang="th-TH" sz="1000" dirty="0">
+                <a:solidFill>
+                  <a:srgbClr val="5F5F5F"/>
+                </a:solidFill>
+                <a:latin typeface="+mn-lt"/>
+                <a:ea typeface="+mn-ea"/>
+                <a:cs typeface="+mn-cs"/>
+              </a:defRPr>
+            </a:lvl1pPr>
+          </a:lstStyle>
+          <a:p>
+            <a:pPr algn="l" marL="0" indent="0">
+              <a:lnSpc>
+                <a:spcPct val="100000"/>
+              </a:lnSpc>
+              <a:buNone/>
+            </a:pPr>
+            <a:endParaRPr lang="th-TH" sz="1000"/>
+          </a:p>
+        </p:txBody>
+      </p:sp>
+      <p:sp>
+        <p:nvSpPr>
+          <p:cNvPr id="94" name="Slide Number Placeholder"/>
+          <p:cNvSpPr>
+            <a:spLocks noGrp="1"/>
+          </p:cNvSpPr>
+          <p:nvPr>
+            <p:ph type="sldNum" sz="quarter" idx="12"/>
+          </p:nvPr>
+        </p:nvSpPr>
+        <p:spPr>
+          <a:xfrm>
+            <a:off x="10591800" y="6400800"/>
+            <a:ext cx="1371600" cy="274320"/>
+          </a:xfrm>
+          <a:prstGeom prst="rect">
+            <a:avLst/>
+          </a:prstGeom>
+        </p:spPr>
+        <p:txBody>
+          <a:bodyPr anchor="ctr"/>
+          <a:lstStyle>
+            <a:lvl1pPr algn="r" marL="0" indent="0">
+              <a:lnSpc>
+                <a:spcPct val="100000"/>
+              </a:lnSpc>
+              <a:buNone/>
+              <a:defRPr lang="th-TH" sz="1000" dirty="0">
+                <a:solidFill>
+                  <a:srgbClr val="5F5F5F"/>
+                </a:solidFill>
+                <a:latin typeface="+mn-lt"/>
+                <a:ea typeface="+mn-ea"/>
+                <a:cs typeface="+mn-cs"/>
+              </a:defRPr>
+            </a:lvl1pPr>
+          </a:lstStyle>
+          <a:p>
+            <a:pPr algn="r" marL="0" indent="0">
+              <a:buNone/>
+            </a:pPr>
+            <a:fld id="{B7E3A1C2-4F5D-4A88-9C1E-6D2F0A93B451}" type="slidenum">
+              <a:rPr lang="th-TH" sz="1000">
+                <a:solidFill>
+                  <a:srgbClr val="5F5F5F"/>
+                </a:solidFill>
+                <a:latin typeface="+mn-lt"/>
+                <a:cs typeface="+mn-cs"/>
+              </a:rPr>
+              <a:t>2</a:t>
+            </a:fld>
+            <a:endParaRPr lang="th-TH" sz="1000"/>
+          </a:p>
+        </p:txBody>
+      </p:sp>
+      <p:sp>
+        <p:nvSpPr>
+          <p:cNvPr id="95" name="Corner Lockup"/>
+          <p:cNvSpPr/>
+          <p:nvPr/>
+        </p:nvSpPr>
+        <p:spPr>
+          <a:xfrm rot="10800000">
+            <a:off x="10546080" y="-274320"/>
+            <a:ext cx="1645920" cy="822960"/>
+          </a:xfrm>
+          <a:prstGeom prst="round2SameRect">
+            <a:avLst>
+              <a:gd name="adj1" fmla="val 12000"/>
+              <a:gd name="adj2" fmla="val 0"/>
+            </a:avLst>
+          </a:prstGeom>
+          <a:solidFill>
+            <a:srgbClr val="FFFFFF"/>
+          </a:solidFill>
+          <a:ln w="12700">
+            <a:solidFill>
+              <a:srgbClr val="216B7F"/>
+            </a:solidFill>
+          </a:ln>
+        </p:spPr>
+        <p:txBody>
+          <a:bodyPr/>
+          <a:lstStyle/>
+          <a:p>
+            <a:endParaRPr lang="th-TH"/>
+          </a:p>
+        </p:txBody>
+      </p:sp>
+      <p:pic>
+        <p:nvPicPr>
+          <p:cNvPr id="96" name="NCT Mark"/>
+          <p:cNvPicPr>
+            <a:picLocks noChangeAspect="1"/>
+          </p:cNvPicPr>
+          <p:nvPr/>
+        </p:nvPicPr>
+        <p:blipFill>
+          <a:blip r:embed="rId2"/>
+          <a:stretch>
+            <a:fillRect/>
+          </a:stretch>
+        </p:blipFill>
+        <p:spPr>
+          <a:xfrm>
+            <a:off x="11094720" y="99822"/>
+            <a:ext cx="548640" cy="348996"/>
+          </a:xfrm>
+          <a:prstGeom prst="rect">
+            <a:avLst/>
+          </a:prstGeom>
+        </p:spPr>
+      </p:pic>
+    </p:spTree>
+  </p:cSld>
+  <p:clrMapOvr>
+    <a:masterClrMapping/>
+  </p:clrMapOvr>
+</p:sldLayout>
+</file>
+
 <file path=ppt/slideLayouts/slideLayout3.xml><?xml version="1.0" encoding="utf-8"?>
 <p:sldLayout xmlns:a="http://schemas.openxmlformats.org/drawingml/2006/main" xmlns:r="http://schemas.openxmlformats.org/officeDocument/2006/relationships" xmlns:p="http://schemas.openxmlformats.org/presentationml/2006/main" type="obj" showMasterSp="0" preserve="1">
   <p:cSld name="03 Title and Content">
@@ -17921,7 +20509,7 @@
           <p:nvPr/>
         </p:nvPicPr>
         <p:blipFill>
-          <a:blip r:embed="rId22"/>
+          <a:blip r:embed="rId23"/>
           <a:stretch>
             <a:fillRect/>
           </a:stretch>
@@ -17960,6 +20548,7 @@
     <p:sldLayoutId id="2147483666" r:id="rId18"/>
     <p:sldLayoutId id="2147483667" r:id="rId19"/>
     <p:sldLayoutId id="2147483668" r:id="rId20"/>
+    <p:sldLayoutId id="2147483669" r:id="rId21"/>
   </p:sldLayoutIdLst>
   <p:txStyles>
     <p:titleStyle>
@@ -22101,19 +24690,39 @@
             <a:pPr/>
             <a:r>
               <a:rPr lang="th-TH" dirty="0"/>
-              <a:t>5. Implementation Stage</a:t>
-            </a:r>
-          </a:p>
-        </p:txBody>
-      </p:sp>
-      <p:sp>
-        <p:nvSpPr>
-          <p:cNvPr id="3" name="KAL"/>
-          <p:cNvSpPr>
-            <a:spLocks noGrp="1"/>
-          </p:cNvSpPr>
-          <p:nvPr>
-            <p:ph type="body" idx="1"/>
+              <a:t>แผนงาน 12 เดือน ขึ้นระบบต้นเดือนที่ 7</a:t>
+            </a:r>
+          </a:p>
+        </p:txBody>
+      </p:sp>
+      <p:graphicFrame>
+        <p:nvGraphicFramePr>
+          <p:cNvPr id="3" name="Plan"/>
+          <p:cNvGraphicFramePr>
+            <a:graphicFrameLocks noGrp="1"/>
+          </p:cNvGraphicFramePr>
+          <p:nvPr>
+            <p:ph type="chart" idx="1"/>
+          </p:nvPr>
+        </p:nvGraphicFramePr>
+        <p:xfrm>
+          <a:off x="3566160" y="2057400"/>
+          <a:ext cx="7711440" cy="3108960"/>
+        </p:xfrm>
+        <a:graphic>
+          <a:graphicData uri="http://schemas.openxmlformats.org/drawingml/2006/chart">
+            <c:chart xmlns:c="http://schemas.openxmlformats.org/drawingml/2006/chart" r:id="rId2"/>
+          </a:graphicData>
+        </a:graphic>
+      </p:graphicFrame>
+      <p:sp>
+        <p:nvSpPr>
+          <p:cNvPr id="4" name="P1"/>
+          <p:cNvSpPr>
+            <a:spLocks noGrp="1"/>
+          </p:cNvSpPr>
+          <p:nvPr>
+            <p:ph type="body" idx="20"/>
           </p:nvPr>
         </p:nvSpPr>
         <p:spPr/>
@@ -22124,14 +24733,635 @@
             <a:pPr/>
             <a:r>
               <a:rPr lang="th-TH" dirty="0"/>
-              <a:t>Key Activity :</a:t>
-            </a:r>
-          </a:p>
-        </p:txBody>
-      </p:sp>
-      <p:sp>
-        <p:nvSpPr>
-          <p:cNvPr id="4" name="KAV"/>
+              <a:t>ด.1</a:t>
+            </a:r>
+          </a:p>
+        </p:txBody>
+      </p:sp>
+      <p:sp>
+        <p:nvSpPr>
+          <p:cNvPr id="5" name="P2"/>
+          <p:cNvSpPr>
+            <a:spLocks noGrp="1"/>
+          </p:cNvSpPr>
+          <p:nvPr>
+            <p:ph type="body" idx="21"/>
+          </p:nvPr>
+        </p:nvSpPr>
+        <p:spPr/>
+        <p:txBody>
+          <a:bodyPr/>
+          <a:lstStyle/>
+          <a:p>
+            <a:pPr/>
+            <a:r>
+              <a:rPr lang="th-TH" dirty="0"/>
+              <a:t>ด.2</a:t>
+            </a:r>
+          </a:p>
+        </p:txBody>
+      </p:sp>
+      <p:sp>
+        <p:nvSpPr>
+          <p:cNvPr id="6" name="P3"/>
+          <p:cNvSpPr>
+            <a:spLocks noGrp="1"/>
+          </p:cNvSpPr>
+          <p:nvPr>
+            <p:ph type="body" idx="22"/>
+          </p:nvPr>
+        </p:nvSpPr>
+        <p:spPr/>
+        <p:txBody>
+          <a:bodyPr/>
+          <a:lstStyle/>
+          <a:p>
+            <a:pPr/>
+            <a:r>
+              <a:rPr lang="th-TH" dirty="0"/>
+              <a:t>ด.3</a:t>
+            </a:r>
+          </a:p>
+        </p:txBody>
+      </p:sp>
+      <p:sp>
+        <p:nvSpPr>
+          <p:cNvPr id="7" name="P4"/>
+          <p:cNvSpPr>
+            <a:spLocks noGrp="1"/>
+          </p:cNvSpPr>
+          <p:nvPr>
+            <p:ph type="body" idx="23"/>
+          </p:nvPr>
+        </p:nvSpPr>
+        <p:spPr/>
+        <p:txBody>
+          <a:bodyPr/>
+          <a:lstStyle/>
+          <a:p>
+            <a:pPr/>
+            <a:r>
+              <a:rPr lang="th-TH" dirty="0"/>
+              <a:t>ด.4</a:t>
+            </a:r>
+          </a:p>
+        </p:txBody>
+      </p:sp>
+      <p:sp>
+        <p:nvSpPr>
+          <p:cNvPr id="8" name="P5"/>
+          <p:cNvSpPr>
+            <a:spLocks noGrp="1"/>
+          </p:cNvSpPr>
+          <p:nvPr>
+            <p:ph type="body" idx="24"/>
+          </p:nvPr>
+        </p:nvSpPr>
+        <p:spPr/>
+        <p:txBody>
+          <a:bodyPr/>
+          <a:lstStyle/>
+          <a:p>
+            <a:pPr/>
+            <a:r>
+              <a:rPr lang="th-TH" dirty="0"/>
+              <a:t>ด.5</a:t>
+            </a:r>
+          </a:p>
+        </p:txBody>
+      </p:sp>
+      <p:sp>
+        <p:nvSpPr>
+          <p:cNvPr id="9" name="P6"/>
+          <p:cNvSpPr>
+            <a:spLocks noGrp="1"/>
+          </p:cNvSpPr>
+          <p:nvPr>
+            <p:ph type="body" idx="25"/>
+          </p:nvPr>
+        </p:nvSpPr>
+        <p:spPr/>
+        <p:txBody>
+          <a:bodyPr/>
+          <a:lstStyle/>
+          <a:p>
+            <a:pPr/>
+            <a:r>
+              <a:rPr lang="th-TH" dirty="0"/>
+              <a:t>ด.6</a:t>
+            </a:r>
+          </a:p>
+        </p:txBody>
+      </p:sp>
+      <p:sp>
+        <p:nvSpPr>
+          <p:cNvPr id="10" name="P7"/>
+          <p:cNvSpPr>
+            <a:spLocks noGrp="1"/>
+          </p:cNvSpPr>
+          <p:nvPr>
+            <p:ph type="body" idx="26"/>
+          </p:nvPr>
+        </p:nvSpPr>
+        <p:spPr/>
+        <p:txBody>
+          <a:bodyPr/>
+          <a:lstStyle/>
+          <a:p>
+            <a:pPr/>
+            <a:r>
+              <a:rPr lang="th-TH" dirty="0"/>
+              <a:t>ด.7</a:t>
+            </a:r>
+          </a:p>
+        </p:txBody>
+      </p:sp>
+      <p:sp>
+        <p:nvSpPr>
+          <p:cNvPr id="11" name="P8"/>
+          <p:cNvSpPr>
+            <a:spLocks noGrp="1"/>
+          </p:cNvSpPr>
+          <p:nvPr>
+            <p:ph type="body" idx="27"/>
+          </p:nvPr>
+        </p:nvSpPr>
+        <p:spPr/>
+        <p:txBody>
+          <a:bodyPr/>
+          <a:lstStyle/>
+          <a:p>
+            <a:pPr/>
+            <a:r>
+              <a:rPr lang="th-TH" dirty="0"/>
+              <a:t>ด.8</a:t>
+            </a:r>
+          </a:p>
+        </p:txBody>
+      </p:sp>
+      <p:sp>
+        <p:nvSpPr>
+          <p:cNvPr id="12" name="P9"/>
+          <p:cNvSpPr>
+            <a:spLocks noGrp="1"/>
+          </p:cNvSpPr>
+          <p:nvPr>
+            <p:ph type="body" idx="28"/>
+          </p:nvPr>
+        </p:nvSpPr>
+        <p:spPr/>
+        <p:txBody>
+          <a:bodyPr/>
+          <a:lstStyle/>
+          <a:p>
+            <a:pPr/>
+            <a:r>
+              <a:rPr lang="th-TH" dirty="0"/>
+              <a:t>ด.9</a:t>
+            </a:r>
+          </a:p>
+        </p:txBody>
+      </p:sp>
+      <p:sp>
+        <p:nvSpPr>
+          <p:cNvPr id="13" name="P10"/>
+          <p:cNvSpPr>
+            <a:spLocks noGrp="1"/>
+          </p:cNvSpPr>
+          <p:nvPr>
+            <p:ph type="body" idx="29"/>
+          </p:nvPr>
+        </p:nvSpPr>
+        <p:spPr/>
+        <p:txBody>
+          <a:bodyPr/>
+          <a:lstStyle/>
+          <a:p>
+            <a:pPr/>
+            <a:r>
+              <a:rPr lang="th-TH" dirty="0"/>
+              <a:t>ด.10</a:t>
+            </a:r>
+          </a:p>
+        </p:txBody>
+      </p:sp>
+      <p:sp>
+        <p:nvSpPr>
+          <p:cNvPr id="14" name="P11"/>
+          <p:cNvSpPr>
+            <a:spLocks noGrp="1"/>
+          </p:cNvSpPr>
+          <p:nvPr>
+            <p:ph type="body" idx="30"/>
+          </p:nvPr>
+        </p:nvSpPr>
+        <p:spPr/>
+        <p:txBody>
+          <a:bodyPr/>
+          <a:lstStyle/>
+          <a:p>
+            <a:pPr/>
+            <a:r>
+              <a:rPr lang="th-TH" dirty="0"/>
+              <a:t>ด.11</a:t>
+            </a:r>
+          </a:p>
+        </p:txBody>
+      </p:sp>
+      <p:sp>
+        <p:nvSpPr>
+          <p:cNvPr id="15" name="P12"/>
+          <p:cNvSpPr>
+            <a:spLocks noGrp="1"/>
+          </p:cNvSpPr>
+          <p:nvPr>
+            <p:ph type="body" idx="31"/>
+          </p:nvPr>
+        </p:nvSpPr>
+        <p:spPr/>
+        <p:txBody>
+          <a:bodyPr/>
+          <a:lstStyle/>
+          <a:p>
+            <a:pPr/>
+            <a:r>
+              <a:rPr lang="th-TH" dirty="0"/>
+              <a:t>ด.12</a:t>
+            </a:r>
+          </a:p>
+        </p:txBody>
+      </p:sp>
+      <p:sp>
+        <p:nvSpPr>
+          <p:cNvPr id="16" name="R1"/>
+          <p:cNvSpPr>
+            <a:spLocks noGrp="1"/>
+          </p:cNvSpPr>
+          <p:nvPr>
+            <p:ph type="body" idx="32"/>
+          </p:nvPr>
+        </p:nvSpPr>
+        <p:spPr/>
+        <p:txBody>
+          <a:bodyPr/>
+          <a:lstStyle/>
+          <a:p>
+            <a:pPr/>
+            <a:r>
+              <a:rPr lang="th-TH" dirty="0"/>
+              <a:t>1. เตรียมระบบ</a:t>
+            </a:r>
+          </a:p>
+        </p:txBody>
+      </p:sp>
+      <p:sp>
+        <p:nvSpPr>
+          <p:cNvPr id="17" name="D1"/>
+          <p:cNvSpPr>
+            <a:spLocks noGrp="1"/>
+          </p:cNvSpPr>
+          <p:nvPr>
+            <p:ph type="body" idx="33"/>
+          </p:nvPr>
+        </p:nvSpPr>
+        <p:spPr/>
+        <p:txBody>
+          <a:bodyPr/>
+          <a:lstStyle/>
+          <a:p>
+            <a:pPr/>
+            <a:r>
+              <a:rPr lang="th-TH" dirty="0"/>
+              <a:t>4 สัปดาห์</a:t>
+            </a:r>
+          </a:p>
+        </p:txBody>
+      </p:sp>
+      <p:sp>
+        <p:nvSpPr>
+          <p:cNvPr id="18" name="R2"/>
+          <p:cNvSpPr>
+            <a:spLocks noGrp="1"/>
+          </p:cNvSpPr>
+          <p:nvPr>
+            <p:ph type="body" idx="34"/>
+          </p:nvPr>
+        </p:nvSpPr>
+        <p:spPr/>
+        <p:txBody>
+          <a:bodyPr/>
+          <a:lstStyle/>
+          <a:p>
+            <a:pPr/>
+            <a:r>
+              <a:rPr lang="th-TH" dirty="0"/>
+              <a:t>2. วิเคราะห์และออกแบบ</a:t>
+            </a:r>
+          </a:p>
+        </p:txBody>
+      </p:sp>
+      <p:sp>
+        <p:nvSpPr>
+          <p:cNvPr id="19" name="D2"/>
+          <p:cNvSpPr>
+            <a:spLocks noGrp="1"/>
+          </p:cNvSpPr>
+          <p:nvPr>
+            <p:ph type="body" idx="35"/>
+          </p:nvPr>
+        </p:nvSpPr>
+        <p:spPr/>
+        <p:txBody>
+          <a:bodyPr/>
+          <a:lstStyle/>
+          <a:p>
+            <a:pPr/>
+            <a:r>
+              <a:rPr lang="th-TH" dirty="0"/>
+              <a:t>6 สัปดาห์</a:t>
+            </a:r>
+          </a:p>
+        </p:txBody>
+      </p:sp>
+      <p:sp>
+        <p:nvSpPr>
+          <p:cNvPr id="20" name="R3"/>
+          <p:cNvSpPr>
+            <a:spLocks noGrp="1"/>
+          </p:cNvSpPr>
+          <p:nvPr>
+            <p:ph type="body" idx="36"/>
+          </p:nvPr>
+        </p:nvSpPr>
+        <p:spPr/>
+        <p:txBody>
+          <a:bodyPr/>
+          <a:lstStyle/>
+          <a:p>
+            <a:pPr/>
+            <a:r>
+              <a:rPr lang="th-TH" dirty="0"/>
+              <a:t>3. พัฒนาและตั้งค่าระบบ</a:t>
+            </a:r>
+          </a:p>
+        </p:txBody>
+      </p:sp>
+      <p:sp>
+        <p:nvSpPr>
+          <p:cNvPr id="21" name="D3"/>
+          <p:cNvSpPr>
+            <a:spLocks noGrp="1"/>
+          </p:cNvSpPr>
+          <p:nvPr>
+            <p:ph type="body" idx="37"/>
+          </p:nvPr>
+        </p:nvSpPr>
+        <p:spPr/>
+        <p:txBody>
+          <a:bodyPr/>
+          <a:lstStyle/>
+          <a:p>
+            <a:pPr/>
+            <a:r>
+              <a:rPr lang="th-TH" dirty="0"/>
+              <a:t>10 สัปดาห์</a:t>
+            </a:r>
+          </a:p>
+        </p:txBody>
+      </p:sp>
+      <p:sp>
+        <p:nvSpPr>
+          <p:cNvPr id="22" name="R4"/>
+          <p:cNvSpPr>
+            <a:spLocks noGrp="1"/>
+          </p:cNvSpPr>
+          <p:nvPr>
+            <p:ph type="body" idx="38"/>
+          </p:nvPr>
+        </p:nvSpPr>
+        <p:spPr/>
+        <p:txBody>
+          <a:bodyPr/>
+          <a:lstStyle/>
+          <a:p>
+            <a:pPr/>
+            <a:r>
+              <a:rPr lang="th-TH" dirty="0"/>
+              <a:t>4. ทดสอบ UAT</a:t>
+            </a:r>
+          </a:p>
+        </p:txBody>
+      </p:sp>
+      <p:sp>
+        <p:nvSpPr>
+          <p:cNvPr id="23" name="D4"/>
+          <p:cNvSpPr>
+            <a:spLocks noGrp="1"/>
+          </p:cNvSpPr>
+          <p:nvPr>
+            <p:ph type="body" idx="39"/>
+          </p:nvPr>
+        </p:nvSpPr>
+        <p:spPr/>
+        <p:txBody>
+          <a:bodyPr/>
+          <a:lstStyle/>
+          <a:p>
+            <a:pPr/>
+            <a:r>
+              <a:rPr lang="th-TH" dirty="0"/>
+              <a:t>4 สัปดาห์</a:t>
+            </a:r>
+          </a:p>
+        </p:txBody>
+      </p:sp>
+      <p:sp>
+        <p:nvSpPr>
+          <p:cNvPr id="24" name="R5"/>
+          <p:cNvSpPr>
+            <a:spLocks noGrp="1"/>
+          </p:cNvSpPr>
+          <p:nvPr>
+            <p:ph type="body" idx="40"/>
+          </p:nvPr>
+        </p:nvSpPr>
+        <p:spPr/>
+        <p:txBody>
+          <a:bodyPr/>
+          <a:lstStyle/>
+          <a:p>
+            <a:pPr/>
+            <a:r>
+              <a:rPr lang="th-TH" dirty="0"/>
+              <a:t>5. อบรมผู้ใช้</a:t>
+            </a:r>
+          </a:p>
+        </p:txBody>
+      </p:sp>
+      <p:sp>
+        <p:nvSpPr>
+          <p:cNvPr id="25" name="D5"/>
+          <p:cNvSpPr>
+            <a:spLocks noGrp="1"/>
+          </p:cNvSpPr>
+          <p:nvPr>
+            <p:ph type="body" idx="41"/>
+          </p:nvPr>
+        </p:nvSpPr>
+        <p:spPr/>
+        <p:txBody>
+          <a:bodyPr/>
+          <a:lstStyle/>
+          <a:p>
+            <a:pPr/>
+            <a:r>
+              <a:rPr lang="th-TH" dirty="0"/>
+              <a:t>1 สัปดาห์</a:t>
+            </a:r>
+          </a:p>
+        </p:txBody>
+      </p:sp>
+      <p:sp>
+        <p:nvSpPr>
+          <p:cNvPr id="26" name="R6"/>
+          <p:cNvSpPr>
+            <a:spLocks noGrp="1"/>
+          </p:cNvSpPr>
+          <p:nvPr>
+            <p:ph type="body" idx="42"/>
+          </p:nvPr>
+        </p:nvSpPr>
+        <p:spPr/>
+        <p:txBody>
+          <a:bodyPr/>
+          <a:lstStyle/>
+          <a:p>
+            <a:pPr/>
+            <a:r>
+              <a:rPr lang="th-TH" dirty="0"/>
+              <a:t>6. ขึ้นระบบ</a:t>
+            </a:r>
+          </a:p>
+        </p:txBody>
+      </p:sp>
+      <p:sp>
+        <p:nvSpPr>
+          <p:cNvPr id="27" name="D6"/>
+          <p:cNvSpPr>
+            <a:spLocks noGrp="1"/>
+          </p:cNvSpPr>
+          <p:nvPr>
+            <p:ph type="body" idx="43"/>
+          </p:nvPr>
+        </p:nvSpPr>
+        <p:spPr/>
+        <p:txBody>
+          <a:bodyPr/>
+          <a:lstStyle/>
+          <a:p>
+            <a:pPr/>
+            <a:r>
+              <a:rPr lang="th-TH" dirty="0"/>
+              <a:t>2 สัปดาห์</a:t>
+            </a:r>
+          </a:p>
+        </p:txBody>
+      </p:sp>
+      <p:sp>
+        <p:nvSpPr>
+          <p:cNvPr id="28" name="R7"/>
+          <p:cNvSpPr>
+            <a:spLocks noGrp="1"/>
+          </p:cNvSpPr>
+          <p:nvPr>
+            <p:ph type="body" idx="44"/>
+          </p:nvPr>
+        </p:nvSpPr>
+        <p:spPr/>
+        <p:txBody>
+          <a:bodyPr/>
+          <a:lstStyle/>
+          <a:p>
+            <a:pPr/>
+            <a:r>
+              <a:rPr lang="th-TH" dirty="0"/>
+              <a:t>7. ดูแลหลังขึ้นระบบ</a:t>
+            </a:r>
+          </a:p>
+        </p:txBody>
+      </p:sp>
+      <p:sp>
+        <p:nvSpPr>
+          <p:cNvPr id="29" name="D7"/>
+          <p:cNvSpPr>
+            <a:spLocks noGrp="1"/>
+          </p:cNvSpPr>
+          <p:nvPr>
+            <p:ph type="body" idx="45"/>
+          </p:nvPr>
+        </p:nvSpPr>
+        <p:spPr/>
+        <p:txBody>
+          <a:bodyPr/>
+          <a:lstStyle/>
+          <a:p>
+            <a:pPr/>
+            <a:r>
+              <a:rPr lang="th-TH" dirty="0"/>
+              <a:t>3 เดือน</a:t>
+            </a:r>
+          </a:p>
+        </p:txBody>
+      </p:sp>
+      <p:sp>
+        <p:nvSpPr>
+          <p:cNvPr id="30" name="R8"/>
+          <p:cNvSpPr>
+            <a:spLocks noGrp="1"/>
+          </p:cNvSpPr>
+          <p:nvPr>
+            <p:ph type="body" idx="46"/>
+          </p:nvPr>
+        </p:nvSpPr>
+        <p:spPr/>
+        <p:txBody>
+          <a:bodyPr/>
+          <a:lstStyle/>
+          <a:p>
+            <a:pPr/>
+            <a:r>
+              <a:rPr lang="th-TH" dirty="0"/>
+              <a:t>8. รับประกันระบบ</a:t>
+            </a:r>
+          </a:p>
+        </p:txBody>
+      </p:sp>
+      <p:sp>
+        <p:nvSpPr>
+          <p:cNvPr id="31" name="D8"/>
+          <p:cNvSpPr>
+            <a:spLocks noGrp="1"/>
+          </p:cNvSpPr>
+          <p:nvPr>
+            <p:ph type="body" idx="47"/>
+          </p:nvPr>
+        </p:nvSpPr>
+        <p:spPr/>
+        <p:txBody>
+          <a:bodyPr/>
+          <a:lstStyle/>
+          <a:p>
+            <a:pPr/>
+            <a:r>
+              <a:rPr lang="th-TH" dirty="0"/>
+              <a:t>2.5 เดือน</a:t>
+            </a:r>
+          </a:p>
+        </p:txBody>
+      </p:sp>
+      <p:sp>
+        <p:nvSpPr>
+          <p:cNvPr id="32" name="Key"/>
           <p:cNvSpPr>
             <a:spLocks noGrp="1"/>
           </p:cNvSpPr>
@@ -22147,14 +25377,14 @@
             <a:pPr/>
             <a:r>
               <a:rPr lang="th-TH" dirty="0"/>
-              <a:t>ตั้งค่าสภาพแวดล้อม ติดตั้งฮาร์ดแวร์และซอฟต์แวร์</a:t>
-            </a:r>
-          </a:p>
-        </p:txBody>
-      </p:sp>
-      <p:sp>
-        <p:nvSpPr>
-          <p:cNvPr id="5" name="PL"/>
+              <a:t>■ ช่วงงาน   ◆ ส่งมอบ / ตรวจรับ</a:t>
+            </a:r>
+          </a:p>
+        </p:txBody>
+      </p:sp>
+      <p:sp>
+        <p:nvSpPr>
+          <p:cNvPr id="33" name="Asm"/>
           <p:cNvSpPr>
             <a:spLocks noGrp="1"/>
           </p:cNvSpPr>
@@ -22170,14 +25400,14 @@
             <a:pPr/>
             <a:r>
               <a:rPr lang="th-TH" dirty="0"/>
-              <a:t>Participant :</a:t>
-            </a:r>
-          </a:p>
-        </p:txBody>
-      </p:sp>
-      <p:sp>
-        <p:nvSpPr>
-          <p:cNvPr id="6" name="PV"/>
+              <a:t>นับจากวันลงนามสัญญา · หน่วย: เดือน</a:t>
+            </a:r>
+          </a:p>
+        </p:txBody>
+      </p:sp>
+      <p:sp>
+        <p:nvSpPr>
+          <p:cNvPr id="34" name="TL"/>
           <p:cNvSpPr>
             <a:spLocks noGrp="1"/>
           </p:cNvSpPr>
@@ -22193,14 +25423,14 @@
             <a:pPr/>
             <a:r>
               <a:rPr lang="th-TH" dirty="0"/>
-              <a:t>NCT Infra Engineer, ทีมไอทีลูกค้า, Business Analyst</a:t>
-            </a:r>
-          </a:p>
-        </p:txBody>
-      </p:sp>
-      <p:sp>
-        <p:nvSpPr>
-          <p:cNvPr id="7" name="PN"/>
+              <a:t>สรุป</a:t>
+            </a:r>
+          </a:p>
+        </p:txBody>
+      </p:sp>
+      <p:sp>
+        <p:nvSpPr>
+          <p:cNvPr id="35" name="TC"/>
           <p:cNvSpPr>
             <a:spLocks noGrp="1"/>
           </p:cNvSpPr>
@@ -22216,97 +25446,229 @@
             <a:pPr/>
             <a:r>
               <a:rPr lang="th-TH" dirty="0"/>
-              <a:t>01</a:t>
-            </a:r>
-          </a:p>
-        </p:txBody>
-      </p:sp>
-      <p:sp>
-        <p:nvSpPr>
-          <p:cNvPr id="8" name="PP"/>
-          <p:cNvSpPr>
-            <a:spLocks noGrp="1"/>
-          </p:cNvSpPr>
-          <p:nvPr>
-            <p:ph type="body" idx="6"/>
-          </p:nvPr>
-        </p:nvSpPr>
-        <p:spPr/>
-        <p:txBody>
-          <a:bodyPr/>
-          <a:lstStyle/>
-          <a:p>
-            <a:pPr/>
-            <a:r>
-              <a:rPr lang="th-TH" dirty="0"/>
-              <a:t>Preparation Phase</a:t>
-            </a:r>
-          </a:p>
-        </p:txBody>
-      </p:sp>
-      <p:sp>
-        <p:nvSpPr>
-          <p:cNvPr id="9" name="PI"/>
-          <p:cNvSpPr>
-            <a:spLocks noGrp="1"/>
-          </p:cNvSpPr>
-          <p:nvPr>
-            <p:ph type="body" idx="7"/>
-          </p:nvPr>
-        </p:nvSpPr>
-        <p:spPr/>
-        <p:txBody>
-          <a:bodyPr/>
-          <a:lstStyle/>
-          <a:p>
-            <a:pPr/>
-            <a:r>
-              <a:rPr lang="th-TH" dirty="0"/>
-              <a:t>สรุปสเปกเครื่องและบริการคลาวด์ที่ต้องเตรียมให้พร้อมก่อนเริ่มงานพัฒนา</a:t>
-            </a:r>
-          </a:p>
-        </p:txBody>
-      </p:sp>
-      <p:sp>
-        <p:nvSpPr>
-          <p:cNvPr id="10" name="PB"/>
-          <p:cNvSpPr>
-            <a:spLocks noGrp="1"/>
-          </p:cNvSpPr>
-          <p:nvPr>
-            <p:ph type="body" idx="8"/>
-          </p:nvPr>
-        </p:nvSpPr>
-        <p:spPr/>
-        <p:txBody>
-          <a:bodyPr/>
-          <a:lstStyle/>
-          <a:p>
-            <a:pPr/>
-            <a:r>
-              <a:rPr lang="th-TH" dirty="0"/>
-              <a:t>PRD · 4 คอร์ / 16GB / SSD 300GB</a:t>
-            </a:r>
-          </a:p>
-          <a:p>
-            <a:pPr/>
-            <a:r>
-              <a:rPr lang="th-TH" dirty="0"/>
-              <a:t>QA · 4 คอร์ / 16GB / SSD 150GB</a:t>
-            </a:r>
-          </a:p>
-          <a:p>
-            <a:pPr/>
-            <a:r>
-              <a:rPr lang="th-TH" dirty="0"/>
-              <a:t>Windows Server 2022 ทั้งสองเครื่อง</a:t>
-            </a:r>
-          </a:p>
-          <a:p>
-            <a:pPr/>
-            <a:r>
-              <a:rPr lang="th-TH" dirty="0"/>
-              <a:t>Lambda, EC2 และ Cognito เปิดทั้งสองสภาพแวดล้อม</a:t>
+              <a:t>ขึ้นระบบต้นเดือนที่ 7 ตรวจรับ 3 งวดตามจุดส่งมอบ</a:t>
+            </a:r>
+          </a:p>
+        </p:txBody>
+      </p:sp>
+      <p:sp>
+        <p:nvSpPr>
+          <p:cNvPr id="36" name="Milestone 2"/>
+          <p:cNvSpPr/>
+          <p:nvPr/>
+        </p:nvSpPr>
+        <p:spPr>
+          <a:xfrm>
+            <a:off x="5099558" y="2567178"/>
+            <a:ext cx="146304" cy="146304"/>
+          </a:xfrm>
+          <a:prstGeom prst="diamond">
+            <a:avLst/>
+          </a:prstGeom>
+          <a:solidFill>
+            <a:srgbClr val="BB731B"/>
+          </a:solidFill>
+          <a:ln w="19050">
+            <a:solidFill>
+              <a:srgbClr val="FFFFFF"/>
+            </a:solidFill>
+          </a:ln>
+        </p:spPr>
+        <p:txBody>
+          <a:bodyPr/>
+          <a:lstStyle/>
+          <a:p>
+            <a:endParaRPr lang="th-TH"/>
+          </a:p>
+        </p:txBody>
+      </p:sp>
+      <p:sp>
+        <p:nvSpPr>
+          <p:cNvPr id="37" name="Milestone 2 Label"/>
+          <p:cNvSpPr/>
+          <p:nvPr/>
+        </p:nvSpPr>
+        <p:spPr>
+          <a:xfrm>
+            <a:off x="5291582" y="2446020"/>
+            <a:ext cx="1463040" cy="388620"/>
+          </a:xfrm>
+          <a:prstGeom prst="rect">
+            <a:avLst/>
+          </a:prstGeom>
+          <a:noFill/>
+          <a:ln>
+            <a:noFill/>
+          </a:ln>
+        </p:spPr>
+        <p:txBody>
+          <a:bodyPr wrap="square" anchor="ctr" lIns="0" tIns="0" rIns="0" bIns="0" rtlCol="0"/>
+          <a:lstStyle/>
+          <a:p>
+            <a:pPr algn="l" marL="0" indent="0">
+              <a:lnSpc>
+                <a:spcPct val="100000"/>
+              </a:lnSpc>
+              <a:buNone/>
+            </a:pPr>
+            <a:r>
+              <a:rPr lang="th-TH" sz="1000" dirty="0">
+                <a:solidFill>
+                  <a:srgbClr val="5F5F5F"/>
+                </a:solidFill>
+                <a:latin typeface="+mn-lt"/>
+                <a:ea typeface="+mn-ea"/>
+                <a:cs typeface="+mn-cs"/>
+              </a:rPr>
+              <a:t>ตรวจรับงวด 1</a:t>
+            </a:r>
+          </a:p>
+        </p:txBody>
+      </p:sp>
+      <p:sp>
+        <p:nvSpPr>
+          <p:cNvPr id="38" name="Milestone 4"/>
+          <p:cNvSpPr/>
+          <p:nvPr/>
+        </p:nvSpPr>
+        <p:spPr>
+          <a:xfrm>
+            <a:off x="7348728" y="3344418"/>
+            <a:ext cx="146304" cy="146304"/>
+          </a:xfrm>
+          <a:prstGeom prst="diamond">
+            <a:avLst/>
+          </a:prstGeom>
+          <a:solidFill>
+            <a:srgbClr val="BB731B"/>
+          </a:solidFill>
+          <a:ln w="19050">
+            <a:solidFill>
+              <a:srgbClr val="FFFFFF"/>
+            </a:solidFill>
+          </a:ln>
+        </p:spPr>
+        <p:txBody>
+          <a:bodyPr/>
+          <a:lstStyle/>
+          <a:p>
+            <a:endParaRPr lang="th-TH"/>
+          </a:p>
+        </p:txBody>
+      </p:sp>
+      <p:sp>
+        <p:nvSpPr>
+          <p:cNvPr id="39" name="Milestone 4 Label"/>
+          <p:cNvSpPr/>
+          <p:nvPr/>
+        </p:nvSpPr>
+        <p:spPr>
+          <a:xfrm>
+            <a:off x="7540752" y="3223260"/>
+            <a:ext cx="1463040" cy="388620"/>
+          </a:xfrm>
+          <a:prstGeom prst="rect">
+            <a:avLst/>
+          </a:prstGeom>
+          <a:noFill/>
+          <a:ln>
+            <a:noFill/>
+          </a:ln>
+        </p:spPr>
+        <p:txBody>
+          <a:bodyPr wrap="square" anchor="ctr" lIns="0" tIns="0" rIns="0" bIns="0" rtlCol="0"/>
+          <a:lstStyle/>
+          <a:p>
+            <a:pPr algn="l" marL="0" indent="0">
+              <a:lnSpc>
+                <a:spcPct val="100000"/>
+              </a:lnSpc>
+              <a:buNone/>
+            </a:pPr>
+            <a:r>
+              <a:rPr lang="th-TH" sz="1000" dirty="0">
+                <a:solidFill>
+                  <a:srgbClr val="5F5F5F"/>
+                </a:solidFill>
+                <a:latin typeface="+mn-lt"/>
+                <a:ea typeface="+mn-ea"/>
+                <a:cs typeface="+mn-cs"/>
+              </a:rPr>
+              <a:t>ตรวจรับงวด 2</a:t>
+            </a:r>
+          </a:p>
+        </p:txBody>
+      </p:sp>
+      <p:sp>
+        <p:nvSpPr>
+          <p:cNvPr id="40" name="Milestone 7"/>
+          <p:cNvSpPr/>
+          <p:nvPr/>
+        </p:nvSpPr>
+        <p:spPr>
+          <a:xfrm>
+            <a:off x="9597898" y="4510278"/>
+            <a:ext cx="146304" cy="146304"/>
+          </a:xfrm>
+          <a:prstGeom prst="diamond">
+            <a:avLst/>
+          </a:prstGeom>
+          <a:solidFill>
+            <a:srgbClr val="BB731B"/>
+          </a:solidFill>
+          <a:ln w="19050">
+            <a:solidFill>
+              <a:srgbClr val="FFFFFF"/>
+            </a:solidFill>
+          </a:ln>
+        </p:spPr>
+        <p:txBody>
+          <a:bodyPr/>
+          <a:lstStyle/>
+          <a:p>
+            <a:endParaRPr lang="th-TH"/>
+          </a:p>
+        </p:txBody>
+      </p:sp>
+      <p:sp>
+        <p:nvSpPr>
+          <p:cNvPr id="41" name="Milestone 7 Label"/>
+          <p:cNvSpPr/>
+          <p:nvPr/>
+        </p:nvSpPr>
+        <p:spPr>
+          <a:xfrm>
+            <a:off x="9789922" y="4389120"/>
+            <a:ext cx="1463040" cy="388620"/>
+          </a:xfrm>
+          <a:prstGeom prst="rect">
+            <a:avLst/>
+          </a:prstGeom>
+          <a:noFill/>
+          <a:ln>
+            <a:noFill/>
+          </a:ln>
+        </p:spPr>
+        <p:txBody>
+          <a:bodyPr wrap="square" anchor="ctr" lIns="0" tIns="0" rIns="0" bIns="0" rtlCol="0"/>
+          <a:lstStyle/>
+          <a:p>
+            <a:pPr algn="l" marL="0" indent="0">
+              <a:lnSpc>
+                <a:spcPct val="100000"/>
+              </a:lnSpc>
+              <a:buNone/>
+            </a:pPr>
+            <a:r>
+              <a:rPr lang="th-TH" sz="1000" dirty="0">
+                <a:solidFill>
+                  <a:srgbClr val="5F5F5F"/>
+                </a:solidFill>
+                <a:latin typeface="+mn-lt"/>
+                <a:ea typeface="+mn-ea"/>
+                <a:cs typeface="+mn-cs"/>
+              </a:rPr>
+              <a:t>ตรวจรับงวด 3</a:t>
             </a:r>
           </a:p>
         </p:txBody>
@@ -22320,6 +25682,330 @@
 </file>
 
 <file path=ppt/slides/slide19.xml><?xml version="1.0" encoding="utf-8"?>
+<p:sld xmlns:a="http://schemas.openxmlformats.org/drawingml/2006/main" xmlns:r="http://schemas.openxmlformats.org/officeDocument/2006/relationships" xmlns:p="http://schemas.openxmlformats.org/presentationml/2006/main">
+  <p:cSld name="">
+    <p:spTree>
+      <p:nvGrpSpPr>
+        <p:cNvPr id="1" name=""/>
+        <p:cNvGrpSpPr/>
+        <p:nvPr/>
+      </p:nvGrpSpPr>
+      <p:grpSpPr>
+        <a:xfrm>
+          <a:off x="0" y="0"/>
+          <a:ext cx="0" cy="0"/>
+          <a:chOff x="0" y="0"/>
+          <a:chExt cx="0" cy="0"/>
+        </a:xfrm>
+      </p:grpSpPr>
+      <p:sp>
+        <p:nvSpPr>
+          <p:cNvPr id="2" name="Title"/>
+          <p:cNvSpPr>
+            <a:spLocks noGrp="1"/>
+          </p:cNvSpPr>
+          <p:nvPr>
+            <p:ph type="title"/>
+          </p:nvPr>
+        </p:nvSpPr>
+        <p:spPr/>
+        <p:txBody>
+          <a:bodyPr/>
+          <a:lstStyle/>
+          <a:p>
+            <a:pPr/>
+            <a:r>
+              <a:rPr lang="th-TH" dirty="0"/>
+              <a:t>5. Implementation Stage</a:t>
+            </a:r>
+          </a:p>
+        </p:txBody>
+      </p:sp>
+      <p:sp>
+        <p:nvSpPr>
+          <p:cNvPr id="3" name="KAL"/>
+          <p:cNvSpPr>
+            <a:spLocks noGrp="1"/>
+          </p:cNvSpPr>
+          <p:nvPr>
+            <p:ph type="body" idx="1"/>
+          </p:nvPr>
+        </p:nvSpPr>
+        <p:spPr/>
+        <p:txBody>
+          <a:bodyPr/>
+          <a:lstStyle/>
+          <a:p>
+            <a:pPr/>
+            <a:r>
+              <a:rPr lang="th-TH" dirty="0"/>
+              <a:t>Key Activity :</a:t>
+            </a:r>
+          </a:p>
+        </p:txBody>
+      </p:sp>
+      <p:sp>
+        <p:nvSpPr>
+          <p:cNvPr id="4" name="KAV"/>
+          <p:cNvSpPr>
+            <a:spLocks noGrp="1"/>
+          </p:cNvSpPr>
+          <p:nvPr>
+            <p:ph type="body" idx="2"/>
+          </p:nvPr>
+        </p:nvSpPr>
+        <p:spPr/>
+        <p:txBody>
+          <a:bodyPr/>
+          <a:lstStyle/>
+          <a:p>
+            <a:pPr/>
+            <a:r>
+              <a:rPr lang="th-TH" dirty="0"/>
+              <a:t>ตั้งค่าสภาพแวดล้อม ติดตั้งฮาร์ดแวร์และซอฟต์แวร์</a:t>
+            </a:r>
+          </a:p>
+        </p:txBody>
+      </p:sp>
+      <p:sp>
+        <p:nvSpPr>
+          <p:cNvPr id="5" name="PL"/>
+          <p:cNvSpPr>
+            <a:spLocks noGrp="1"/>
+          </p:cNvSpPr>
+          <p:nvPr>
+            <p:ph type="body" idx="3"/>
+          </p:nvPr>
+        </p:nvSpPr>
+        <p:spPr/>
+        <p:txBody>
+          <a:bodyPr/>
+          <a:lstStyle/>
+          <a:p>
+            <a:pPr/>
+            <a:r>
+              <a:rPr lang="th-TH" dirty="0"/>
+              <a:t>Participant :</a:t>
+            </a:r>
+          </a:p>
+        </p:txBody>
+      </p:sp>
+      <p:sp>
+        <p:nvSpPr>
+          <p:cNvPr id="6" name="PV"/>
+          <p:cNvSpPr>
+            <a:spLocks noGrp="1"/>
+          </p:cNvSpPr>
+          <p:nvPr>
+            <p:ph type="body" idx="4"/>
+          </p:nvPr>
+        </p:nvSpPr>
+        <p:spPr/>
+        <p:txBody>
+          <a:bodyPr/>
+          <a:lstStyle/>
+          <a:p>
+            <a:pPr/>
+            <a:r>
+              <a:rPr lang="th-TH" dirty="0"/>
+              <a:t>NCT Infra Engineer, ทีมไอทีลูกค้า, Business Analyst</a:t>
+            </a:r>
+          </a:p>
+        </p:txBody>
+      </p:sp>
+      <p:sp>
+        <p:nvSpPr>
+          <p:cNvPr id="7" name="PN"/>
+          <p:cNvSpPr>
+            <a:spLocks noGrp="1"/>
+          </p:cNvSpPr>
+          <p:nvPr>
+            <p:ph type="body" idx="5"/>
+          </p:nvPr>
+        </p:nvSpPr>
+        <p:spPr/>
+        <p:txBody>
+          <a:bodyPr/>
+          <a:lstStyle/>
+          <a:p>
+            <a:pPr/>
+            <a:r>
+              <a:rPr lang="th-TH" dirty="0"/>
+              <a:t>01</a:t>
+            </a:r>
+          </a:p>
+        </p:txBody>
+      </p:sp>
+      <p:sp>
+        <p:nvSpPr>
+          <p:cNvPr id="8" name="PP"/>
+          <p:cNvSpPr>
+            <a:spLocks noGrp="1"/>
+          </p:cNvSpPr>
+          <p:nvPr>
+            <p:ph type="body" idx="6"/>
+          </p:nvPr>
+        </p:nvSpPr>
+        <p:spPr/>
+        <p:txBody>
+          <a:bodyPr/>
+          <a:lstStyle/>
+          <a:p>
+            <a:pPr/>
+            <a:r>
+              <a:rPr lang="th-TH" dirty="0"/>
+              <a:t>Preparation Phase</a:t>
+            </a:r>
+          </a:p>
+        </p:txBody>
+      </p:sp>
+      <p:sp>
+        <p:nvSpPr>
+          <p:cNvPr id="9" name="PI"/>
+          <p:cNvSpPr>
+            <a:spLocks noGrp="1"/>
+          </p:cNvSpPr>
+          <p:nvPr>
+            <p:ph type="body" idx="7"/>
+          </p:nvPr>
+        </p:nvSpPr>
+        <p:spPr/>
+        <p:txBody>
+          <a:bodyPr/>
+          <a:lstStyle/>
+          <a:p>
+            <a:pPr/>
+            <a:r>
+              <a:rPr lang="th-TH" dirty="0"/>
+              <a:t>สรุปสเปกเครื่องและบริการคลาวด์ที่ต้องเตรียมให้พร้อมก่อนเริ่มงานพัฒนา</a:t>
+            </a:r>
+          </a:p>
+        </p:txBody>
+      </p:sp>
+      <p:sp>
+        <p:nvSpPr>
+          <p:cNvPr id="10" name="PB"/>
+          <p:cNvSpPr>
+            <a:spLocks noGrp="1"/>
+          </p:cNvSpPr>
+          <p:nvPr>
+            <p:ph type="body" idx="8"/>
+          </p:nvPr>
+        </p:nvSpPr>
+        <p:spPr/>
+        <p:txBody>
+          <a:bodyPr/>
+          <a:lstStyle/>
+          <a:p>
+            <a:pPr/>
+            <a:r>
+              <a:rPr lang="th-TH" dirty="0"/>
+              <a:t>PRD · 4 คอร์ / 16GB / SSD 300GB</a:t>
+            </a:r>
+          </a:p>
+          <a:p>
+            <a:pPr/>
+            <a:r>
+              <a:rPr lang="th-TH" dirty="0"/>
+              <a:t>QA · 4 คอร์ / 16GB / SSD 150GB</a:t>
+            </a:r>
+          </a:p>
+          <a:p>
+            <a:pPr/>
+            <a:r>
+              <a:rPr lang="th-TH" dirty="0"/>
+              <a:t>Windows Server 2022 ทั้งสองเครื่อง</a:t>
+            </a:r>
+          </a:p>
+          <a:p>
+            <a:pPr/>
+            <a:r>
+              <a:rPr lang="th-TH" dirty="0"/>
+              <a:t>Lambda, EC2 และ Cognito เปิดทั้งสองสภาพแวดล้อม</a:t>
+            </a:r>
+          </a:p>
+        </p:txBody>
+      </p:sp>
+    </p:spTree>
+  </p:cSld>
+  <p:clrMapOvr>
+    <a:masterClrMapping/>
+  </p:clrMapOvr>
+</p:sld>
+</file>
+
+<file path=ppt/slides/slide2.xml><?xml version="1.0" encoding="utf-8"?>
+<p:sld xmlns:a="http://schemas.openxmlformats.org/drawingml/2006/main" xmlns:r="http://schemas.openxmlformats.org/officeDocument/2006/relationships" xmlns:p="http://schemas.openxmlformats.org/presentationml/2006/main">
+  <p:cSld name="">
+    <p:spTree>
+      <p:nvGrpSpPr>
+        <p:cNvPr id="1" name=""/>
+        <p:cNvGrpSpPr/>
+        <p:nvPr/>
+      </p:nvGrpSpPr>
+      <p:grpSpPr>
+        <a:xfrm>
+          <a:off x="0" y="0"/>
+          <a:ext cx="0" cy="0"/>
+          <a:chOff x="0" y="0"/>
+          <a:chExt cx="0" cy="0"/>
+        </a:xfrm>
+      </p:grpSpPr>
+      <p:sp>
+        <p:nvSpPr>
+          <p:cNvPr id="2" name="Title"/>
+          <p:cNvSpPr>
+            <a:spLocks noGrp="1"/>
+          </p:cNvSpPr>
+          <p:nvPr>
+            <p:ph type="ctrTitle"/>
+          </p:nvPr>
+        </p:nvSpPr>
+        <p:spPr/>
+        <p:txBody>
+          <a:bodyPr/>
+          <a:lstStyle/>
+          <a:p>
+            <a:pPr/>
+            <a:r>
+              <a:rPr lang="th-TH" dirty="0"/>
+              <a:t>เปลี่ยนงานบัญชีให้ระบบทำแทน</a:t>
+            </a:r>
+          </a:p>
+        </p:txBody>
+      </p:sp>
+      <p:sp>
+        <p:nvSpPr>
+          <p:cNvPr id="3" name="Subtitle"/>
+          <p:cNvSpPr>
+            <a:spLocks noGrp="1"/>
+          </p:cNvSpPr>
+          <p:nvPr>
+            <p:ph type="subTitle" idx="1"/>
+          </p:nvPr>
+        </p:nvSpPr>
+        <p:spPr/>
+        <p:txBody>
+          <a:bodyPr/>
+          <a:lstStyle/>
+          <a:p>
+            <a:pPr/>
+            <a:r>
+              <a:rPr lang="th-TH" dirty="0"/>
+              <a:t>NCT · สัมมนาลูกค้า 2569</a:t>
+            </a:r>
+          </a:p>
+        </p:txBody>
+      </p:sp>
+    </p:spTree>
+  </p:cSld>
+  <p:clrMapOvr>
+    <a:masterClrMapping/>
+  </p:clrMapOvr>
+</p:sld>
+</file>
+
+<file path=ppt/slides/slide20.xml><?xml version="1.0" encoding="utf-8"?>
 <p:sld xmlns:a="http://schemas.openxmlformats.org/drawingml/2006/main" xmlns:r="http://schemas.openxmlformats.org/officeDocument/2006/relationships" xmlns:p="http://schemas.openxmlformats.org/presentationml/2006/main">
   <p:cSld name="">
     <p:spTree>
@@ -22805,78 +26491,7 @@
 </p:sld>
 </file>
 
-<file path=ppt/slides/slide2.xml><?xml version="1.0" encoding="utf-8"?>
-<p:sld xmlns:a="http://schemas.openxmlformats.org/drawingml/2006/main" xmlns:r="http://schemas.openxmlformats.org/officeDocument/2006/relationships" xmlns:p="http://schemas.openxmlformats.org/presentationml/2006/main">
-  <p:cSld name="">
-    <p:spTree>
-      <p:nvGrpSpPr>
-        <p:cNvPr id="1" name=""/>
-        <p:cNvGrpSpPr/>
-        <p:nvPr/>
-      </p:nvGrpSpPr>
-      <p:grpSpPr>
-        <a:xfrm>
-          <a:off x="0" y="0"/>
-          <a:ext cx="0" cy="0"/>
-          <a:chOff x="0" y="0"/>
-          <a:chExt cx="0" cy="0"/>
-        </a:xfrm>
-      </p:grpSpPr>
-      <p:sp>
-        <p:nvSpPr>
-          <p:cNvPr id="2" name="Title"/>
-          <p:cNvSpPr>
-            <a:spLocks noGrp="1"/>
-          </p:cNvSpPr>
-          <p:nvPr>
-            <p:ph type="ctrTitle"/>
-          </p:nvPr>
-        </p:nvSpPr>
-        <p:spPr/>
-        <p:txBody>
-          <a:bodyPr/>
-          <a:lstStyle/>
-          <a:p>
-            <a:pPr/>
-            <a:r>
-              <a:rPr lang="th-TH" dirty="0"/>
-              <a:t>เปลี่ยนงานบัญชีให้ระบบทำแทน</a:t>
-            </a:r>
-          </a:p>
-        </p:txBody>
-      </p:sp>
-      <p:sp>
-        <p:nvSpPr>
-          <p:cNvPr id="3" name="Subtitle"/>
-          <p:cNvSpPr>
-            <a:spLocks noGrp="1"/>
-          </p:cNvSpPr>
-          <p:nvPr>
-            <p:ph type="subTitle" idx="1"/>
-          </p:nvPr>
-        </p:nvSpPr>
-        <p:spPr/>
-        <p:txBody>
-          <a:bodyPr/>
-          <a:lstStyle/>
-          <a:p>
-            <a:pPr/>
-            <a:r>
-              <a:rPr lang="th-TH" dirty="0"/>
-              <a:t>NCT · สัมมนาลูกค้า 2569</a:t>
-            </a:r>
-          </a:p>
-        </p:txBody>
-      </p:sp>
-    </p:spTree>
-  </p:cSld>
-  <p:clrMapOvr>
-    <a:masterClrMapping/>
-  </p:clrMapOvr>
-</p:sld>
-</file>
-
-<file path=ppt/slides/slide20.xml><?xml version="1.0" encoding="utf-8"?>
+<file path=ppt/slides/slide21.xml><?xml version="1.0" encoding="utf-8"?>
 <p:sld xmlns:a="http://schemas.openxmlformats.org/drawingml/2006/main" xmlns:r="http://schemas.openxmlformats.org/officeDocument/2006/relationships" xmlns:p="http://schemas.openxmlformats.org/presentationml/2006/main">
   <p:cSld name="">
     <p:spTree>

--- a/NCT-Slide-Template-Corp-Demo.pptx
+++ b/NCT-Slide-Template-Corp-Demo.pptx
@@ -26,6 +26,7 @@
     <p:sldId id="274" r:id="rId20"/>
     <p:sldId id="275" r:id="rId21"/>
     <p:sldId id="276" r:id="rId22"/>
+    <p:sldId id="277" r:id="rId23"/>
   </p:sldIdLst>
   <p:sldSz cx="12192000" cy="6858000"/>
   <p:notesSz cx="6858000" cy="9144000"/>
@@ -681,6 +682,290 @@
 </c:chartSpace>
 </file>
 
+<file path=ppt/charts/chart3.xml><?xml version="1.0" encoding="utf-8"?>
+<c:chartSpace xmlns:c="http://schemas.openxmlformats.org/drawingml/2006/chart" xmlns:a="http://schemas.openxmlformats.org/drawingml/2006/main" xmlns:r="http://schemas.openxmlformats.org/officeDocument/2006/relationships">
+  <c:roundedCorners val="0"/>
+  <c:chart>
+    <c:autoTitleDeleted val="1"/>
+    <c:plotArea>
+      <c:layout>
+        <c:manualLayout>
+          <c:layoutTarget val="inner"/>
+          <c:xMode val="edge"/>
+          <c:yMode val="edge"/>
+          <c:x val="0"/>
+          <c:y val="0"/>
+          <c:w val="1"/>
+          <c:h val="1"/>
+        </c:manualLayout>
+      </c:layout>
+      <c:barChart>
+        <c:barDir val="bar"/>
+        <c:grouping val="percentStacked"/>
+        <c:varyColors val="0"/>
+        <c:ser>
+          <c:idx val="0"/>
+          <c:order val="0"/>
+          <c:tx>
+            <c:strRef>
+              <c:f>Sheet1!$B$1</c:f>
+              <c:strCache>
+                <c:ptCount val="1"/>
+                <c:pt idx="0">
+                  <c:v>พัฒนาและตั้งค่าระบบ</c:v>
+                </c:pt>
+              </c:strCache>
+            </c:strRef>
+          </c:tx>
+          <c:spPr>
+            <a:solidFill>
+              <a:srgbClr val="2A5EA0"/>
+            </a:solidFill>
+            <a:ln w="19050">
+              <a:solidFill>
+                <a:srgbClr val="FFFFFF"/>
+              </a:solidFill>
+            </a:ln>
+          </c:spPr>
+          <c:invertIfNegative val="0"/>
+          <c:cat>
+            <c:strRef>
+              <c:f>Sheet1!$A$2:$A$4</c:f>
+              <c:strCache>
+                <c:ptCount val="3"/>
+                <c:pt idx="0">
+                  <c:v>งบโครงการ</c:v>
+                </c:pt>
+              </c:strCache>
+            </c:strRef>
+          </c:cat>
+          <c:val>
+            <c:numRef>
+              <c:f>Sheet1!$B$2:$B$4</c:f>
+              <c:numCache>
+                <c:formatCode>General</c:formatCode>
+                <c:ptCount val="3"/>
+                <c:pt idx="0">
+                  <c:v>2.4</c:v>
+                </c:pt>
+              </c:numCache>
+            </c:numRef>
+          </c:val>
+        </c:ser>
+        <c:ser>
+          <c:idx val="1"/>
+          <c:order val="1"/>
+          <c:tx>
+            <c:strRef>
+              <c:f>Sheet1!$C$1</c:f>
+              <c:strCache>
+                <c:ptCount val="1"/>
+                <c:pt idx="0">
+                  <c:v>ไลเซนส์ซอฟต์แวร์</c:v>
+                </c:pt>
+              </c:strCache>
+            </c:strRef>
+          </c:tx>
+          <c:spPr>
+            <a:solidFill>
+              <a:srgbClr val="BB731B"/>
+            </a:solidFill>
+            <a:ln w="19050">
+              <a:solidFill>
+                <a:srgbClr val="FFFFFF"/>
+              </a:solidFill>
+            </a:ln>
+          </c:spPr>
+          <c:invertIfNegative val="0"/>
+          <c:cat>
+            <c:strRef>
+              <c:f>Sheet1!$A$2:$A$4</c:f>
+              <c:strCache>
+                <c:ptCount val="3"/>
+                <c:pt idx="0">
+                  <c:v>งบโครงการ</c:v>
+                </c:pt>
+              </c:strCache>
+            </c:strRef>
+          </c:cat>
+          <c:val>
+            <c:numRef>
+              <c:f>Sheet1!$C$2:$C$4</c:f>
+              <c:numCache>
+                <c:formatCode>General</c:formatCode>
+                <c:ptCount val="3"/>
+                <c:pt idx="0">
+                  <c:v>1.2</c:v>
+                </c:pt>
+              </c:numCache>
+            </c:numRef>
+          </c:val>
+        </c:ser>
+        <c:ser>
+          <c:idx val="2"/>
+          <c:order val="2"/>
+          <c:tx>
+            <c:strRef>
+              <c:f>Sheet1!$D$1</c:f>
+              <c:strCache>
+                <c:ptCount val="1"/>
+                <c:pt idx="0">
+                  <c:v>คลาวด์ปีแรก</c:v>
+                </c:pt>
+              </c:strCache>
+            </c:strRef>
+          </c:tx>
+          <c:spPr>
+            <a:solidFill>
+              <a:srgbClr val="0D9298"/>
+            </a:solidFill>
+            <a:ln w="19050">
+              <a:solidFill>
+                <a:srgbClr val="FFFFFF"/>
+              </a:solidFill>
+            </a:ln>
+          </c:spPr>
+          <c:invertIfNegative val="0"/>
+          <c:cat>
+            <c:strRef>
+              <c:f>Sheet1!$A$2:$A$4</c:f>
+              <c:strCache>
+                <c:ptCount val="3"/>
+                <c:pt idx="0">
+                  <c:v>งบโครงการ</c:v>
+                </c:pt>
+              </c:strCache>
+            </c:strRef>
+          </c:cat>
+          <c:val>
+            <c:numRef>
+              <c:f>Sheet1!$D$2:$D$4</c:f>
+              <c:numCache>
+                <c:formatCode>General</c:formatCode>
+                <c:ptCount val="3"/>
+                <c:pt idx="0">
+                  <c:v>0.7</c:v>
+                </c:pt>
+              </c:numCache>
+            </c:numRef>
+          </c:val>
+        </c:ser>
+        <c:ser>
+          <c:idx val="3"/>
+          <c:order val="3"/>
+          <c:tx>
+            <c:strRef>
+              <c:f>Sheet1!$E$1</c:f>
+              <c:strCache>
+                <c:ptCount val="1"/>
+                <c:pt idx="0">
+                  <c:v>อื่น ๆ</c:v>
+                </c:pt>
+              </c:strCache>
+            </c:strRef>
+          </c:tx>
+          <c:spPr>
+            <a:solidFill>
+              <a:srgbClr val="A4A4A4"/>
+            </a:solidFill>
+            <a:ln w="19050">
+              <a:solidFill>
+                <a:srgbClr val="FFFFFF"/>
+              </a:solidFill>
+            </a:ln>
+          </c:spPr>
+          <c:invertIfNegative val="0"/>
+          <c:cat>
+            <c:strRef>
+              <c:f>Sheet1!$A$2:$A$4</c:f>
+              <c:strCache>
+                <c:ptCount val="3"/>
+                <c:pt idx="0">
+                  <c:v>งบโครงการ</c:v>
+                </c:pt>
+              </c:strCache>
+            </c:strRef>
+          </c:cat>
+          <c:val>
+            <c:numRef>
+              <c:f>Sheet1!$E$2:$E$4</c:f>
+              <c:numCache>
+                <c:formatCode>General</c:formatCode>
+                <c:ptCount val="3"/>
+                <c:pt idx="0">
+                  <c:v>0.5</c:v>
+                </c:pt>
+              </c:numCache>
+            </c:numRef>
+          </c:val>
+        </c:ser>
+        <c:gapWidth val="100"/>
+        <c:overlap val="100"/>
+        <c:axId val="21001"/>
+        <c:axId val="21002"/>
+      </c:barChart>
+      <c:catAx>
+        <c:axId val="21001"/>
+        <c:scaling>
+          <c:orientation val="maxMin"/>
+        </c:scaling>
+        <c:delete val="1"/>
+        <c:axPos val="l"/>
+        <c:majorTickMark val="none"/>
+        <c:minorTickMark val="none"/>
+        <c:tickLblPos val="none"/>
+        <c:crossAx val="21002"/>
+        <c:crosses val="autoZero"/>
+        <c:auto val="1"/>
+        <c:lblAlgn val="ctr"/>
+        <c:lblOffset val="100"/>
+        <c:noMultiLvlLbl val="0"/>
+      </c:catAx>
+      <c:valAx>
+        <c:axId val="21002"/>
+        <c:scaling>
+          <c:orientation val="minMax"/>
+          <c:max val="1"/>
+          <c:min val="0"/>
+        </c:scaling>
+        <c:delete val="0"/>
+        <c:axPos val="b"/>
+        <c:numFmt formatCode="General" sourceLinked="0"/>
+        <c:majorTickMark val="none"/>
+        <c:minorTickMark val="none"/>
+        <c:tickLblPos val="none"/>
+        <c:spPr>
+          <a:ln>
+            <a:noFill/>
+          </a:ln>
+        </c:spPr>
+        <c:crossAx val="21001"/>
+        <c:crosses val="max"/>
+        <c:crossBetween val="between"/>
+        <c:majorUnit val="1"/>
+      </c:valAx>
+      <c:spPr>
+        <a:noFill/>
+        <a:ln>
+          <a:noFill/>
+        </a:ln>
+      </c:spPr>
+    </c:plotArea>
+    <c:plotVisOnly val="1"/>
+    <c:dispBlanksAs val="gap"/>
+  </c:chart>
+  <c:spPr>
+    <a:noFill/>
+    <a:ln>
+      <a:noFill/>
+    </a:ln>
+  </c:spPr>
+  <c:externalData r:id="rId1">
+    <c:autoUpdate val="0"/>
+  </c:externalData>
+</c:chartSpace>
+</file>
+
 <file path=ppt/slideLayouts/slideLayout1.xml><?xml version="1.0" encoding="utf-8"?>
 <p:sldLayout xmlns:a="http://schemas.openxmlformats.org/drawingml/2006/main" xmlns:r="http://schemas.openxmlformats.org/officeDocument/2006/relationships" xmlns:p="http://schemas.openxmlformats.org/presentationml/2006/main" type="title" showMasterSp="0" preserve="1">
   <p:cSld name="01 Title Slide">
@@ -15308,6 +15593,1959 @@
 </p:sldLayout>
 </file>
 
+<file path=ppt/slideLayouts/slideLayout22.xml><?xml version="1.0" encoding="utf-8"?>
+<p:sldLayout xmlns:a="http://schemas.openxmlformats.org/drawingml/2006/main" xmlns:r="http://schemas.openxmlformats.org/officeDocument/2006/relationships" xmlns:p="http://schemas.openxmlformats.org/presentationml/2006/main" type="chart" showMasterSp="0" preserve="1">
+  <p:cSld name="22 Composition">
+    <p:bg>
+      <p:bgPr>
+        <a:solidFill>
+          <a:srgbClr val="FFFFFF"/>
+        </a:solidFill>
+        <a:effectLst/>
+      </p:bgPr>
+    </p:bg>
+    <p:spTree>
+      <p:nvGrpSpPr>
+        <p:cNvPr id="1" name=""/>
+        <p:cNvGrpSpPr/>
+        <p:nvPr/>
+      </p:nvGrpSpPr>
+      <p:grpSpPr>
+        <a:xfrm>
+          <a:off x="0" y="0"/>
+          <a:ext cx="0" cy="0"/>
+          <a:chOff x="0" y="0"/>
+          <a:chExt cx="0" cy="0"/>
+        </a:xfrm>
+      </p:grpSpPr>
+      <p:sp>
+        <p:nvSpPr>
+          <p:cNvPr id="10" name="Title Placeholder"/>
+          <p:cNvSpPr>
+            <a:spLocks noGrp="1"/>
+          </p:cNvSpPr>
+          <p:nvPr>
+            <p:ph type="title"/>
+          </p:nvPr>
+        </p:nvSpPr>
+        <p:spPr>
+          <a:xfrm>
+            <a:off x="914400" y="548640"/>
+            <a:ext cx="10363200" cy="731520"/>
+          </a:xfrm>
+          <a:prstGeom prst="rect">
+            <a:avLst/>
+          </a:prstGeom>
+        </p:spPr>
+        <p:txBody>
+          <a:bodyPr wrap="square" anchor="b" lIns="0" tIns="0" rIns="0" bIns="0" rtlCol="0"/>
+          <a:lstStyle>
+            <a:lvl1pPr algn="l" marL="0" indent="0">
+              <a:lnSpc>
+                <a:spcPct val="108000"/>
+              </a:lnSpc>
+              <a:buNone/>
+              <a:defRPr lang="th-TH" sz="3200" b="1" dirty="0">
+                <a:solidFill>
+                  <a:srgbClr val="23436D"/>
+                </a:solidFill>
+                <a:latin typeface="+mj-lt"/>
+                <a:ea typeface="+mj-ea"/>
+                <a:cs typeface="+mj-cs"/>
+              </a:defRPr>
+            </a:lvl1pPr>
+          </a:lstStyle>
+          <a:p>
+            <a:pPr algn="l" marL="0" indent="0">
+              <a:lnSpc>
+                <a:spcPct val="108000"/>
+              </a:lnSpc>
+              <a:buNone/>
+            </a:pPr>
+            <a:r>
+              <a:rPr lang="th-TH" sz="3200" b="1" dirty="0">
+                <a:solidFill>
+                  <a:srgbClr val="23436D"/>
+                </a:solidFill>
+                <a:latin typeface="+mj-lt"/>
+                <a:ea typeface="+mj-ea"/>
+                <a:cs typeface="+mj-cs"/>
+              </a:rPr>
+              <a:t>ชื่อสไลด์</a:t>
+            </a:r>
+          </a:p>
+        </p:txBody>
+      </p:sp>
+      <p:sp>
+        <p:nvSpPr>
+          <p:cNvPr id="11" name="Accent Rule"/>
+          <p:cNvSpPr/>
+          <p:nvPr/>
+        </p:nvSpPr>
+        <p:spPr>
+          <a:xfrm>
+            <a:off x="0" y="1371600"/>
+            <a:ext cx="12192000" cy="68580"/>
+          </a:xfrm>
+          <a:prstGeom prst="rect">
+            <a:avLst/>
+          </a:prstGeom>
+          <a:solidFill>
+            <a:srgbClr val="216B7F"/>
+          </a:solidFill>
+          <a:ln>
+            <a:noFill/>
+          </a:ln>
+        </p:spPr>
+        <p:txBody>
+          <a:bodyPr/>
+          <a:lstStyle/>
+          <a:p>
+            <a:endParaRPr lang="th-TH"/>
+          </a:p>
+        </p:txBody>
+      </p:sp>
+      <p:sp>
+        <p:nvSpPr>
+          <p:cNvPr id="12" name="Total"/>
+          <p:cNvSpPr>
+            <a:spLocks noGrp="1"/>
+          </p:cNvSpPr>
+          <p:nvPr>
+            <p:ph type="body" idx="2"/>
+          </p:nvPr>
+        </p:nvSpPr>
+        <p:spPr>
+          <a:xfrm>
+            <a:off x="914400" y="1691640"/>
+            <a:ext cx="5090160" cy="731520"/>
+          </a:xfrm>
+          <a:prstGeom prst="rect">
+            <a:avLst/>
+          </a:prstGeom>
+        </p:spPr>
+        <p:txBody>
+          <a:bodyPr wrap="square" anchor="b" lIns="0" tIns="0" rIns="0" bIns="0" rtlCol="0"/>
+          <a:lstStyle>
+            <a:lvl1pPr algn="l" marL="0" indent="0">
+              <a:lnSpc>
+                <a:spcPct val="100000"/>
+              </a:lnSpc>
+              <a:buNone/>
+              <a:defRPr lang="th-TH" sz="4000" b="1" dirty="0">
+                <a:solidFill>
+                  <a:srgbClr val="23436D"/>
+                </a:solidFill>
+                <a:latin typeface="+mj-lt"/>
+                <a:ea typeface="+mj-ea"/>
+                <a:cs typeface="+mj-cs"/>
+              </a:defRPr>
+            </a:lvl1pPr>
+          </a:lstStyle>
+          <a:p>
+            <a:pPr algn="l" marL="0" indent="0">
+              <a:lnSpc>
+                <a:spcPct val="100000"/>
+              </a:lnSpc>
+              <a:buNone/>
+            </a:pPr>
+            <a:r>
+              <a:rPr lang="th-TH" sz="4000" b="1" dirty="0">
+                <a:solidFill>
+                  <a:srgbClr val="23436D"/>
+                </a:solidFill>
+                <a:latin typeface="+mj-lt"/>
+                <a:ea typeface="+mj-ea"/>
+                <a:cs typeface="+mj-cs"/>
+              </a:rPr>
+              <a:t>0.0 ล้านบาท</a:t>
+            </a:r>
+          </a:p>
+        </p:txBody>
+      </p:sp>
+      <p:sp>
+        <p:nvSpPr>
+          <p:cNvPr id="13" name="Total Label"/>
+          <p:cNvSpPr>
+            <a:spLocks noGrp="1"/>
+          </p:cNvSpPr>
+          <p:nvPr>
+            <p:ph type="body" idx="3"/>
+          </p:nvPr>
+        </p:nvSpPr>
+        <p:spPr>
+          <a:xfrm>
+            <a:off x="914400" y="2423160"/>
+            <a:ext cx="5090160" cy="274320"/>
+          </a:xfrm>
+          <a:prstGeom prst="rect">
+            <a:avLst/>
+          </a:prstGeom>
+        </p:spPr>
+        <p:txBody>
+          <a:bodyPr wrap="square" anchor="t" lIns="0" tIns="0" rIns="0" bIns="0" rtlCol="0"/>
+          <a:lstStyle>
+            <a:lvl1pPr algn="l" marL="0" indent="0">
+              <a:lnSpc>
+                <a:spcPct val="130000"/>
+              </a:lnSpc>
+              <a:buNone/>
+              <a:defRPr lang="th-TH" sz="1200" b="1" spc="120" dirty="0">
+                <a:solidFill>
+                  <a:srgbClr val="5F5F5F"/>
+                </a:solidFill>
+                <a:latin typeface="+mn-lt"/>
+                <a:ea typeface="+mn-ea"/>
+                <a:cs typeface="+mn-cs"/>
+              </a:defRPr>
+            </a:lvl1pPr>
+          </a:lstStyle>
+          <a:p>
+            <a:pPr algn="l" marL="0" indent="0">
+              <a:lnSpc>
+                <a:spcPct val="130000"/>
+              </a:lnSpc>
+              <a:buNone/>
+            </a:pPr>
+            <a:r>
+              <a:rPr lang="th-TH" sz="1200" b="1" spc="120" dirty="0">
+                <a:solidFill>
+                  <a:srgbClr val="5F5F5F"/>
+                </a:solidFill>
+                <a:latin typeface="+mn-lt"/>
+                <a:ea typeface="+mn-ea"/>
+                <a:cs typeface="+mn-cs"/>
+              </a:rPr>
+              <a:t>ยอดรวมนี้คืออะไร</a:t>
+            </a:r>
+          </a:p>
+        </p:txBody>
+      </p:sp>
+      <p:sp>
+        <p:nvSpPr>
+          <p:cNvPr id="14" name="Intro"/>
+          <p:cNvSpPr>
+            <a:spLocks noGrp="1"/>
+          </p:cNvSpPr>
+          <p:nvPr>
+            <p:ph type="body" idx="4"/>
+          </p:nvPr>
+        </p:nvSpPr>
+        <p:spPr>
+          <a:xfrm>
+            <a:off x="6187440" y="1691640"/>
+            <a:ext cx="5090160" cy="1005840"/>
+          </a:xfrm>
+          <a:prstGeom prst="rect">
+            <a:avLst/>
+          </a:prstGeom>
+        </p:spPr>
+        <p:txBody>
+          <a:bodyPr wrap="square" anchor="t" lIns="0" tIns="0" rIns="0" bIns="0" rtlCol="0"/>
+          <a:lstStyle>
+            <a:lvl1pPr algn="l" marL="0" indent="0">
+              <a:lnSpc>
+                <a:spcPct val="130000"/>
+              </a:lnSpc>
+              <a:buNone/>
+              <a:defRPr lang="th-TH" sz="1400" dirty="0">
+                <a:solidFill>
+                  <a:srgbClr val="5F5F5F"/>
+                </a:solidFill>
+                <a:latin typeface="+mn-lt"/>
+                <a:ea typeface="+mn-ea"/>
+                <a:cs typeface="+mn-cs"/>
+              </a:defRPr>
+            </a:lvl1pPr>
+          </a:lstStyle>
+          <a:p>
+            <a:pPr algn="l" marL="0" indent="0">
+              <a:lnSpc>
+                <a:spcPct val="130000"/>
+              </a:lnSpc>
+              <a:buNone/>
+            </a:pPr>
+            <a:r>
+              <a:rPr lang="th-TH" sz="1400" dirty="0">
+                <a:solidFill>
+                  <a:srgbClr val="5F5F5F"/>
+                </a:solidFill>
+                <a:latin typeface="+mn-lt"/>
+                <a:ea typeface="+mn-ea"/>
+                <a:cs typeface="+mn-cs"/>
+              </a:rPr>
+              <a:t>เงื่อนไขของตัวเลข: รวม VAT หรือไม่ ระยะสัญญา</a:t>
+            </a:r>
+          </a:p>
+        </p:txBody>
+      </p:sp>
+      <p:sp>
+        <p:nvSpPr>
+          <p:cNvPr id="15" name="Chart Placeholder"/>
+          <p:cNvSpPr>
+            <a:spLocks noGrp="1"/>
+          </p:cNvSpPr>
+          <p:nvPr>
+            <p:ph type="chart" idx="1"/>
+          </p:nvPr>
+        </p:nvSpPr>
+        <p:spPr>
+          <a:xfrm>
+            <a:off x="2697480" y="3703320"/>
+            <a:ext cx="7299960" cy="1371600"/>
+          </a:xfrm>
+          <a:prstGeom prst="rect">
+            <a:avLst/>
+          </a:prstGeom>
+        </p:spPr>
+        <p:txBody>
+          <a:bodyPr wrap="square" anchor="ctr" lIns="0" tIns="0" rIns="0" bIns="0" rtlCol="0"/>
+          <a:lstStyle>
+            <a:lvl1pPr algn="l" marL="0" indent="0">
+              <a:lnSpc>
+                <a:spcPct val="100000"/>
+              </a:lnSpc>
+              <a:buNone/>
+              <a:defRPr lang="th-TH" sz="1200" dirty="0">
+                <a:solidFill>
+                  <a:srgbClr val="5F5F5F"/>
+                </a:solidFill>
+                <a:latin typeface="+mn-lt"/>
+                <a:ea typeface="+mn-ea"/>
+                <a:cs typeface="+mn-cs"/>
+              </a:defRPr>
+            </a:lvl1pPr>
+          </a:lstStyle>
+          <a:p>
+            <a:pPr algn="l" marL="0" indent="0">
+              <a:lnSpc>
+                <a:spcPct val="100000"/>
+              </a:lnSpc>
+              <a:buNone/>
+            </a:pPr>
+            <a:endParaRPr lang="th-TH" sz="1200"/>
+          </a:p>
+        </p:txBody>
+      </p:sp>
+      <p:sp>
+        <p:nvSpPr>
+          <p:cNvPr id="16" name="Bar 1 Label"/>
+          <p:cNvSpPr>
+            <a:spLocks noGrp="1"/>
+          </p:cNvSpPr>
+          <p:nvPr>
+            <p:ph type="body" idx="20"/>
+          </p:nvPr>
+        </p:nvSpPr>
+        <p:spPr>
+          <a:xfrm>
+            <a:off x="914400" y="3703320"/>
+            <a:ext cx="1645920" cy="457200"/>
+          </a:xfrm>
+          <a:prstGeom prst="rect">
+            <a:avLst/>
+          </a:prstGeom>
+        </p:spPr>
+        <p:txBody>
+          <a:bodyPr wrap="square" anchor="ctr" lIns="0" tIns="0" rIns="0" bIns="0" rtlCol="0"/>
+          <a:lstStyle>
+            <a:lvl1pPr algn="l" marL="0" indent="0">
+              <a:lnSpc>
+                <a:spcPct val="100000"/>
+              </a:lnSpc>
+              <a:buNone/>
+              <a:defRPr lang="th-TH" sz="1400" b="1" dirty="0">
+                <a:solidFill>
+                  <a:srgbClr val="333333"/>
+                </a:solidFill>
+                <a:latin typeface="+mn-lt"/>
+                <a:ea typeface="+mn-ea"/>
+                <a:cs typeface="+mn-cs"/>
+              </a:defRPr>
+            </a:lvl1pPr>
+          </a:lstStyle>
+          <a:p>
+            <a:pPr algn="l" marL="0" indent="0">
+              <a:lnSpc>
+                <a:spcPct val="100000"/>
+              </a:lnSpc>
+              <a:buNone/>
+            </a:pPr>
+            <a:r>
+              <a:rPr lang="th-TH" sz="1400" b="1" dirty="0">
+                <a:solidFill>
+                  <a:srgbClr val="333333"/>
+                </a:solidFill>
+                <a:latin typeface="+mn-lt"/>
+                <a:ea typeface="+mn-ea"/>
+                <a:cs typeface="+mn-cs"/>
+              </a:rPr>
+              <a:t>ชื่อแท่ง</a:t>
+            </a:r>
+          </a:p>
+        </p:txBody>
+      </p:sp>
+      <p:sp>
+        <p:nvSpPr>
+          <p:cNvPr id="17" name="Bar 1 Total"/>
+          <p:cNvSpPr>
+            <a:spLocks noGrp="1"/>
+          </p:cNvSpPr>
+          <p:nvPr>
+            <p:ph type="body" idx="21"/>
+          </p:nvPr>
+        </p:nvSpPr>
+        <p:spPr>
+          <a:xfrm>
+            <a:off x="10180320" y="3703320"/>
+            <a:ext cx="1097280" cy="457200"/>
+          </a:xfrm>
+          <a:prstGeom prst="rect">
+            <a:avLst/>
+          </a:prstGeom>
+        </p:spPr>
+        <p:txBody>
+          <a:bodyPr wrap="square" anchor="ctr" lIns="0" tIns="0" rIns="0" bIns="0" rtlCol="0"/>
+          <a:lstStyle>
+            <a:lvl1pPr algn="l" marL="0" indent="0">
+              <a:lnSpc>
+                <a:spcPct val="100000"/>
+              </a:lnSpc>
+              <a:buNone/>
+              <a:defRPr lang="th-TH" sz="1400" b="1" dirty="0">
+                <a:solidFill>
+                  <a:srgbClr val="333333"/>
+                </a:solidFill>
+                <a:latin typeface="+mn-lt"/>
+                <a:ea typeface="+mn-ea"/>
+                <a:cs typeface="+mn-cs"/>
+              </a:defRPr>
+            </a:lvl1pPr>
+          </a:lstStyle>
+          <a:p>
+            <a:pPr algn="l" marL="0" indent="0">
+              <a:lnSpc>
+                <a:spcPct val="100000"/>
+              </a:lnSpc>
+              <a:buNone/>
+            </a:pPr>
+            <a:r>
+              <a:rPr lang="th-TH" sz="1400" b="1" dirty="0">
+                <a:solidFill>
+                  <a:srgbClr val="333333"/>
+                </a:solidFill>
+                <a:latin typeface="+mn-lt"/>
+                <a:ea typeface="+mn-ea"/>
+                <a:cs typeface="+mn-cs"/>
+              </a:rPr>
+              <a:t>ยอดรวม</a:t>
+            </a:r>
+          </a:p>
+        </p:txBody>
+      </p:sp>
+      <p:sp>
+        <p:nvSpPr>
+          <p:cNvPr id="18" name="Bar 2 Label"/>
+          <p:cNvSpPr>
+            <a:spLocks noGrp="1"/>
+          </p:cNvSpPr>
+          <p:nvPr>
+            <p:ph type="body" idx="22"/>
+          </p:nvPr>
+        </p:nvSpPr>
+        <p:spPr>
+          <a:xfrm>
+            <a:off x="914400" y="4160520"/>
+            <a:ext cx="1645920" cy="457200"/>
+          </a:xfrm>
+          <a:prstGeom prst="rect">
+            <a:avLst/>
+          </a:prstGeom>
+        </p:spPr>
+        <p:txBody>
+          <a:bodyPr wrap="square" anchor="ctr" lIns="0" tIns="0" rIns="0" bIns="0" rtlCol="0"/>
+          <a:lstStyle>
+            <a:lvl1pPr algn="l" marL="0" indent="0">
+              <a:lnSpc>
+                <a:spcPct val="100000"/>
+              </a:lnSpc>
+              <a:buNone/>
+              <a:defRPr lang="th-TH" sz="1400" b="1" dirty="0">
+                <a:solidFill>
+                  <a:srgbClr val="333333"/>
+                </a:solidFill>
+                <a:latin typeface="+mn-lt"/>
+                <a:ea typeface="+mn-ea"/>
+                <a:cs typeface="+mn-cs"/>
+              </a:defRPr>
+            </a:lvl1pPr>
+          </a:lstStyle>
+          <a:p>
+            <a:pPr algn="l" marL="0" indent="0">
+              <a:lnSpc>
+                <a:spcPct val="100000"/>
+              </a:lnSpc>
+              <a:buNone/>
+            </a:pPr>
+            <a:r>
+              <a:rPr lang="th-TH" sz="1400" b="1" dirty="0">
+                <a:solidFill>
+                  <a:srgbClr val="333333"/>
+                </a:solidFill>
+                <a:latin typeface="+mn-lt"/>
+                <a:ea typeface="+mn-ea"/>
+                <a:cs typeface="+mn-cs"/>
+              </a:rPr>
+              <a:t>ชื่อแท่ง</a:t>
+            </a:r>
+          </a:p>
+        </p:txBody>
+      </p:sp>
+      <p:sp>
+        <p:nvSpPr>
+          <p:cNvPr id="19" name="Bar 2 Total"/>
+          <p:cNvSpPr>
+            <a:spLocks noGrp="1"/>
+          </p:cNvSpPr>
+          <p:nvPr>
+            <p:ph type="body" idx="23"/>
+          </p:nvPr>
+        </p:nvSpPr>
+        <p:spPr>
+          <a:xfrm>
+            <a:off x="10180320" y="4160520"/>
+            <a:ext cx="1097280" cy="457200"/>
+          </a:xfrm>
+          <a:prstGeom prst="rect">
+            <a:avLst/>
+          </a:prstGeom>
+        </p:spPr>
+        <p:txBody>
+          <a:bodyPr wrap="square" anchor="ctr" lIns="0" tIns="0" rIns="0" bIns="0" rtlCol="0"/>
+          <a:lstStyle>
+            <a:lvl1pPr algn="l" marL="0" indent="0">
+              <a:lnSpc>
+                <a:spcPct val="100000"/>
+              </a:lnSpc>
+              <a:buNone/>
+              <a:defRPr lang="th-TH" sz="1400" b="1" dirty="0">
+                <a:solidFill>
+                  <a:srgbClr val="333333"/>
+                </a:solidFill>
+                <a:latin typeface="+mn-lt"/>
+                <a:ea typeface="+mn-ea"/>
+                <a:cs typeface="+mn-cs"/>
+              </a:defRPr>
+            </a:lvl1pPr>
+          </a:lstStyle>
+          <a:p>
+            <a:pPr algn="l" marL="0" indent="0">
+              <a:lnSpc>
+                <a:spcPct val="100000"/>
+              </a:lnSpc>
+              <a:buNone/>
+            </a:pPr>
+            <a:r>
+              <a:rPr lang="th-TH" sz="1400" b="1" dirty="0">
+                <a:solidFill>
+                  <a:srgbClr val="333333"/>
+                </a:solidFill>
+                <a:latin typeface="+mn-lt"/>
+                <a:ea typeface="+mn-ea"/>
+                <a:cs typeface="+mn-cs"/>
+              </a:rPr>
+              <a:t>ยอดรวม</a:t>
+            </a:r>
+          </a:p>
+        </p:txBody>
+      </p:sp>
+      <p:sp>
+        <p:nvSpPr>
+          <p:cNvPr id="20" name="Bar 3 Label"/>
+          <p:cNvSpPr>
+            <a:spLocks noGrp="1"/>
+          </p:cNvSpPr>
+          <p:nvPr>
+            <p:ph type="body" idx="24"/>
+          </p:nvPr>
+        </p:nvSpPr>
+        <p:spPr>
+          <a:xfrm>
+            <a:off x="914400" y="4617720"/>
+            <a:ext cx="1645920" cy="457200"/>
+          </a:xfrm>
+          <a:prstGeom prst="rect">
+            <a:avLst/>
+          </a:prstGeom>
+        </p:spPr>
+        <p:txBody>
+          <a:bodyPr wrap="square" anchor="ctr" lIns="0" tIns="0" rIns="0" bIns="0" rtlCol="0"/>
+          <a:lstStyle>
+            <a:lvl1pPr algn="l" marL="0" indent="0">
+              <a:lnSpc>
+                <a:spcPct val="100000"/>
+              </a:lnSpc>
+              <a:buNone/>
+              <a:defRPr lang="th-TH" sz="1400" b="1" dirty="0">
+                <a:solidFill>
+                  <a:srgbClr val="333333"/>
+                </a:solidFill>
+                <a:latin typeface="+mn-lt"/>
+                <a:ea typeface="+mn-ea"/>
+                <a:cs typeface="+mn-cs"/>
+              </a:defRPr>
+            </a:lvl1pPr>
+          </a:lstStyle>
+          <a:p>
+            <a:pPr algn="l" marL="0" indent="0">
+              <a:lnSpc>
+                <a:spcPct val="100000"/>
+              </a:lnSpc>
+              <a:buNone/>
+            </a:pPr>
+            <a:r>
+              <a:rPr lang="th-TH" sz="1400" b="1" dirty="0">
+                <a:solidFill>
+                  <a:srgbClr val="333333"/>
+                </a:solidFill>
+                <a:latin typeface="+mn-lt"/>
+                <a:ea typeface="+mn-ea"/>
+                <a:cs typeface="+mn-cs"/>
+              </a:rPr>
+              <a:t>ชื่อแท่ง</a:t>
+            </a:r>
+          </a:p>
+        </p:txBody>
+      </p:sp>
+      <p:sp>
+        <p:nvSpPr>
+          <p:cNvPr id="21" name="Bar 3 Total"/>
+          <p:cNvSpPr>
+            <a:spLocks noGrp="1"/>
+          </p:cNvSpPr>
+          <p:nvPr>
+            <p:ph type="body" idx="25"/>
+          </p:nvPr>
+        </p:nvSpPr>
+        <p:spPr>
+          <a:xfrm>
+            <a:off x="10180320" y="4617720"/>
+            <a:ext cx="1097280" cy="457200"/>
+          </a:xfrm>
+          <a:prstGeom prst="rect">
+            <a:avLst/>
+          </a:prstGeom>
+        </p:spPr>
+        <p:txBody>
+          <a:bodyPr wrap="square" anchor="ctr" lIns="0" tIns="0" rIns="0" bIns="0" rtlCol="0"/>
+          <a:lstStyle>
+            <a:lvl1pPr algn="l" marL="0" indent="0">
+              <a:lnSpc>
+                <a:spcPct val="100000"/>
+              </a:lnSpc>
+              <a:buNone/>
+              <a:defRPr lang="th-TH" sz="1400" b="1" dirty="0">
+                <a:solidFill>
+                  <a:srgbClr val="333333"/>
+                </a:solidFill>
+                <a:latin typeface="+mn-lt"/>
+                <a:ea typeface="+mn-ea"/>
+                <a:cs typeface="+mn-cs"/>
+              </a:defRPr>
+            </a:lvl1pPr>
+          </a:lstStyle>
+          <a:p>
+            <a:pPr algn="l" marL="0" indent="0">
+              <a:lnSpc>
+                <a:spcPct val="100000"/>
+              </a:lnSpc>
+              <a:buNone/>
+            </a:pPr>
+            <a:r>
+              <a:rPr lang="th-TH" sz="1400" b="1" dirty="0">
+                <a:solidFill>
+                  <a:srgbClr val="333333"/>
+                </a:solidFill>
+                <a:latin typeface="+mn-lt"/>
+                <a:ea typeface="+mn-ea"/>
+                <a:cs typeface="+mn-cs"/>
+              </a:rPr>
+              <a:t>ยอดรวม</a:t>
+            </a:r>
+          </a:p>
+        </p:txBody>
+      </p:sp>
+      <p:sp>
+        <p:nvSpPr>
+          <p:cNvPr id="22" name="Swatch 1"/>
+          <p:cNvSpPr/>
+          <p:nvPr/>
+        </p:nvSpPr>
+        <p:spPr>
+          <a:xfrm>
+            <a:off x="914400" y="2999740"/>
+            <a:ext cx="127000" cy="127000"/>
+          </a:xfrm>
+          <a:prstGeom prst="rect">
+            <a:avLst/>
+          </a:prstGeom>
+          <a:solidFill>
+            <a:srgbClr val="2A5EA0"/>
+          </a:solidFill>
+          <a:ln>
+            <a:noFill/>
+          </a:ln>
+        </p:spPr>
+        <p:txBody>
+          <a:bodyPr/>
+          <a:lstStyle/>
+          <a:p>
+            <a:endParaRPr lang="th-TH"/>
+          </a:p>
+        </p:txBody>
+      </p:sp>
+      <p:sp>
+        <p:nvSpPr>
+          <p:cNvPr id="23" name="Segment 1 Name"/>
+          <p:cNvSpPr>
+            <a:spLocks noGrp="1"/>
+          </p:cNvSpPr>
+          <p:nvPr>
+            <p:ph type="body" idx="26"/>
+          </p:nvPr>
+        </p:nvSpPr>
+        <p:spPr>
+          <a:xfrm>
+            <a:off x="1132840" y="2926080"/>
+            <a:ext cx="2235200" cy="274320"/>
+          </a:xfrm>
+          <a:prstGeom prst="rect">
+            <a:avLst/>
+          </a:prstGeom>
+        </p:spPr>
+        <p:txBody>
+          <a:bodyPr wrap="square" anchor="ctr" lIns="0" tIns="0" rIns="0" bIns="0" rtlCol="0"/>
+          <a:lstStyle>
+            <a:lvl1pPr algn="l" marL="0" indent="0">
+              <a:lnSpc>
+                <a:spcPct val="100000"/>
+              </a:lnSpc>
+              <a:buNone/>
+              <a:defRPr lang="th-TH" sz="1200" dirty="0">
+                <a:solidFill>
+                  <a:srgbClr val="333333"/>
+                </a:solidFill>
+                <a:latin typeface="+mn-lt"/>
+                <a:ea typeface="+mn-ea"/>
+                <a:cs typeface="+mn-cs"/>
+              </a:defRPr>
+            </a:lvl1pPr>
+          </a:lstStyle>
+          <a:p>
+            <a:pPr algn="l" marL="0" indent="0">
+              <a:lnSpc>
+                <a:spcPct val="100000"/>
+              </a:lnSpc>
+              <a:buNone/>
+            </a:pPr>
+            <a:r>
+              <a:rPr lang="th-TH" sz="1200" dirty="0">
+                <a:solidFill>
+                  <a:srgbClr val="333333"/>
+                </a:solidFill>
+                <a:latin typeface="+mn-lt"/>
+                <a:ea typeface="+mn-ea"/>
+                <a:cs typeface="+mn-cs"/>
+              </a:rPr>
+              <a:t>หมวด 1</a:t>
+            </a:r>
+          </a:p>
+        </p:txBody>
+      </p:sp>
+      <p:sp>
+        <p:nvSpPr>
+          <p:cNvPr id="24" name="Segment 1 Value"/>
+          <p:cNvSpPr>
+            <a:spLocks noGrp="1"/>
+          </p:cNvSpPr>
+          <p:nvPr>
+            <p:ph type="body" idx="27"/>
+          </p:nvPr>
+        </p:nvSpPr>
+        <p:spPr>
+          <a:xfrm>
+            <a:off x="914400" y="3200400"/>
+            <a:ext cx="1325880" cy="365760"/>
+          </a:xfrm>
+          <a:prstGeom prst="rect">
+            <a:avLst/>
+          </a:prstGeom>
+        </p:spPr>
+        <p:txBody>
+          <a:bodyPr wrap="square" anchor="ctr" lIns="0" tIns="0" rIns="0" bIns="0" rtlCol="0"/>
+          <a:lstStyle>
+            <a:lvl1pPr algn="l" marL="0" indent="0">
+              <a:lnSpc>
+                <a:spcPct val="100000"/>
+              </a:lnSpc>
+              <a:buNone/>
+              <a:defRPr lang="th-TH" sz="1600" b="1" dirty="0">
+                <a:solidFill>
+                  <a:srgbClr val="333333"/>
+                </a:solidFill>
+                <a:latin typeface="+mn-lt"/>
+                <a:ea typeface="+mn-ea"/>
+                <a:cs typeface="+mn-cs"/>
+              </a:defRPr>
+            </a:lvl1pPr>
+          </a:lstStyle>
+          <a:p>
+            <a:pPr algn="l" marL="0" indent="0">
+              <a:lnSpc>
+                <a:spcPct val="100000"/>
+              </a:lnSpc>
+              <a:buNone/>
+            </a:pPr>
+            <a:r>
+              <a:rPr lang="th-TH" sz="1600" b="1" dirty="0">
+                <a:solidFill>
+                  <a:srgbClr val="333333"/>
+                </a:solidFill>
+                <a:latin typeface="+mn-lt"/>
+                <a:ea typeface="+mn-ea"/>
+                <a:cs typeface="+mn-cs"/>
+              </a:rPr>
+              <a:t>0.0</a:t>
+            </a:r>
+          </a:p>
+        </p:txBody>
+      </p:sp>
+      <p:sp>
+        <p:nvSpPr>
+          <p:cNvPr id="25" name="Segment 1 Share"/>
+          <p:cNvSpPr>
+            <a:spLocks noGrp="1"/>
+          </p:cNvSpPr>
+          <p:nvPr>
+            <p:ph type="body" idx="28"/>
+          </p:nvPr>
+        </p:nvSpPr>
+        <p:spPr>
+          <a:xfrm>
+            <a:off x="2240280" y="3200400"/>
+            <a:ext cx="1127760" cy="365760"/>
+          </a:xfrm>
+          <a:prstGeom prst="rect">
+            <a:avLst/>
+          </a:prstGeom>
+        </p:spPr>
+        <p:txBody>
+          <a:bodyPr wrap="square" anchor="ctr" lIns="0" tIns="0" rIns="0" bIns="0" rtlCol="0"/>
+          <a:lstStyle>
+            <a:lvl1pPr algn="l" marL="0" indent="0">
+              <a:lnSpc>
+                <a:spcPct val="100000"/>
+              </a:lnSpc>
+              <a:buNone/>
+              <a:defRPr lang="th-TH" sz="1200" dirty="0">
+                <a:solidFill>
+                  <a:srgbClr val="5F5F5F"/>
+                </a:solidFill>
+                <a:latin typeface="+mn-lt"/>
+                <a:ea typeface="+mn-ea"/>
+                <a:cs typeface="+mn-cs"/>
+              </a:defRPr>
+            </a:lvl1pPr>
+          </a:lstStyle>
+          <a:p>
+            <a:pPr algn="l" marL="0" indent="0">
+              <a:lnSpc>
+                <a:spcPct val="100000"/>
+              </a:lnSpc>
+              <a:buNone/>
+            </a:pPr>
+            <a:r>
+              <a:rPr lang="th-TH" sz="1200" dirty="0">
+                <a:solidFill>
+                  <a:srgbClr val="5F5F5F"/>
+                </a:solidFill>
+                <a:latin typeface="+mn-lt"/>
+                <a:ea typeface="+mn-ea"/>
+                <a:cs typeface="+mn-cs"/>
+              </a:rPr>
+              <a:t>0%</a:t>
+            </a:r>
+          </a:p>
+        </p:txBody>
+      </p:sp>
+      <p:sp>
+        <p:nvSpPr>
+          <p:cNvPr id="26" name="Swatch 2"/>
+          <p:cNvSpPr/>
+          <p:nvPr/>
+        </p:nvSpPr>
+        <p:spPr>
+          <a:xfrm>
+            <a:off x="3550920" y="2999740"/>
+            <a:ext cx="127000" cy="127000"/>
+          </a:xfrm>
+          <a:prstGeom prst="rect">
+            <a:avLst/>
+          </a:prstGeom>
+          <a:solidFill>
+            <a:srgbClr val="BB731B"/>
+          </a:solidFill>
+          <a:ln>
+            <a:noFill/>
+          </a:ln>
+        </p:spPr>
+        <p:txBody>
+          <a:bodyPr/>
+          <a:lstStyle/>
+          <a:p>
+            <a:endParaRPr lang="th-TH"/>
+          </a:p>
+        </p:txBody>
+      </p:sp>
+      <p:sp>
+        <p:nvSpPr>
+          <p:cNvPr id="27" name="Segment 2 Name"/>
+          <p:cNvSpPr>
+            <a:spLocks noGrp="1"/>
+          </p:cNvSpPr>
+          <p:nvPr>
+            <p:ph type="body" idx="29"/>
+          </p:nvPr>
+        </p:nvSpPr>
+        <p:spPr>
+          <a:xfrm>
+            <a:off x="3769360" y="2926080"/>
+            <a:ext cx="2235200" cy="274320"/>
+          </a:xfrm>
+          <a:prstGeom prst="rect">
+            <a:avLst/>
+          </a:prstGeom>
+        </p:spPr>
+        <p:txBody>
+          <a:bodyPr wrap="square" anchor="ctr" lIns="0" tIns="0" rIns="0" bIns="0" rtlCol="0"/>
+          <a:lstStyle>
+            <a:lvl1pPr algn="l" marL="0" indent="0">
+              <a:lnSpc>
+                <a:spcPct val="100000"/>
+              </a:lnSpc>
+              <a:buNone/>
+              <a:defRPr lang="th-TH" sz="1200" dirty="0">
+                <a:solidFill>
+                  <a:srgbClr val="333333"/>
+                </a:solidFill>
+                <a:latin typeface="+mn-lt"/>
+                <a:ea typeface="+mn-ea"/>
+                <a:cs typeface="+mn-cs"/>
+              </a:defRPr>
+            </a:lvl1pPr>
+          </a:lstStyle>
+          <a:p>
+            <a:pPr algn="l" marL="0" indent="0">
+              <a:lnSpc>
+                <a:spcPct val="100000"/>
+              </a:lnSpc>
+              <a:buNone/>
+            </a:pPr>
+            <a:r>
+              <a:rPr lang="th-TH" sz="1200" dirty="0">
+                <a:solidFill>
+                  <a:srgbClr val="333333"/>
+                </a:solidFill>
+                <a:latin typeface="+mn-lt"/>
+                <a:ea typeface="+mn-ea"/>
+                <a:cs typeface="+mn-cs"/>
+              </a:rPr>
+              <a:t>หมวด 2</a:t>
+            </a:r>
+          </a:p>
+        </p:txBody>
+      </p:sp>
+      <p:sp>
+        <p:nvSpPr>
+          <p:cNvPr id="28" name="Segment 2 Value"/>
+          <p:cNvSpPr>
+            <a:spLocks noGrp="1"/>
+          </p:cNvSpPr>
+          <p:nvPr>
+            <p:ph type="body" idx="30"/>
+          </p:nvPr>
+        </p:nvSpPr>
+        <p:spPr>
+          <a:xfrm>
+            <a:off x="3550920" y="3200400"/>
+            <a:ext cx="1325880" cy="365760"/>
+          </a:xfrm>
+          <a:prstGeom prst="rect">
+            <a:avLst/>
+          </a:prstGeom>
+        </p:spPr>
+        <p:txBody>
+          <a:bodyPr wrap="square" anchor="ctr" lIns="0" tIns="0" rIns="0" bIns="0" rtlCol="0"/>
+          <a:lstStyle>
+            <a:lvl1pPr algn="l" marL="0" indent="0">
+              <a:lnSpc>
+                <a:spcPct val="100000"/>
+              </a:lnSpc>
+              <a:buNone/>
+              <a:defRPr lang="th-TH" sz="1600" b="1" dirty="0">
+                <a:solidFill>
+                  <a:srgbClr val="333333"/>
+                </a:solidFill>
+                <a:latin typeface="+mn-lt"/>
+                <a:ea typeface="+mn-ea"/>
+                <a:cs typeface="+mn-cs"/>
+              </a:defRPr>
+            </a:lvl1pPr>
+          </a:lstStyle>
+          <a:p>
+            <a:pPr algn="l" marL="0" indent="0">
+              <a:lnSpc>
+                <a:spcPct val="100000"/>
+              </a:lnSpc>
+              <a:buNone/>
+            </a:pPr>
+            <a:r>
+              <a:rPr lang="th-TH" sz="1600" b="1" dirty="0">
+                <a:solidFill>
+                  <a:srgbClr val="333333"/>
+                </a:solidFill>
+                <a:latin typeface="+mn-lt"/>
+                <a:ea typeface="+mn-ea"/>
+                <a:cs typeface="+mn-cs"/>
+              </a:rPr>
+              <a:t>0.0</a:t>
+            </a:r>
+          </a:p>
+        </p:txBody>
+      </p:sp>
+      <p:sp>
+        <p:nvSpPr>
+          <p:cNvPr id="29" name="Segment 2 Share"/>
+          <p:cNvSpPr>
+            <a:spLocks noGrp="1"/>
+          </p:cNvSpPr>
+          <p:nvPr>
+            <p:ph type="body" idx="31"/>
+          </p:nvPr>
+        </p:nvSpPr>
+        <p:spPr>
+          <a:xfrm>
+            <a:off x="4876800" y="3200400"/>
+            <a:ext cx="1127760" cy="365760"/>
+          </a:xfrm>
+          <a:prstGeom prst="rect">
+            <a:avLst/>
+          </a:prstGeom>
+        </p:spPr>
+        <p:txBody>
+          <a:bodyPr wrap="square" anchor="ctr" lIns="0" tIns="0" rIns="0" bIns="0" rtlCol="0"/>
+          <a:lstStyle>
+            <a:lvl1pPr algn="l" marL="0" indent="0">
+              <a:lnSpc>
+                <a:spcPct val="100000"/>
+              </a:lnSpc>
+              <a:buNone/>
+              <a:defRPr lang="th-TH" sz="1200" dirty="0">
+                <a:solidFill>
+                  <a:srgbClr val="5F5F5F"/>
+                </a:solidFill>
+                <a:latin typeface="+mn-lt"/>
+                <a:ea typeface="+mn-ea"/>
+                <a:cs typeface="+mn-cs"/>
+              </a:defRPr>
+            </a:lvl1pPr>
+          </a:lstStyle>
+          <a:p>
+            <a:pPr algn="l" marL="0" indent="0">
+              <a:lnSpc>
+                <a:spcPct val="100000"/>
+              </a:lnSpc>
+              <a:buNone/>
+            </a:pPr>
+            <a:r>
+              <a:rPr lang="th-TH" sz="1200" dirty="0">
+                <a:solidFill>
+                  <a:srgbClr val="5F5F5F"/>
+                </a:solidFill>
+                <a:latin typeface="+mn-lt"/>
+                <a:ea typeface="+mn-ea"/>
+                <a:cs typeface="+mn-cs"/>
+              </a:rPr>
+              <a:t>0%</a:t>
+            </a:r>
+          </a:p>
+        </p:txBody>
+      </p:sp>
+      <p:sp>
+        <p:nvSpPr>
+          <p:cNvPr id="30" name="Swatch 3"/>
+          <p:cNvSpPr/>
+          <p:nvPr/>
+        </p:nvSpPr>
+        <p:spPr>
+          <a:xfrm>
+            <a:off x="6187440" y="2999740"/>
+            <a:ext cx="127000" cy="127000"/>
+          </a:xfrm>
+          <a:prstGeom prst="rect">
+            <a:avLst/>
+          </a:prstGeom>
+          <a:solidFill>
+            <a:srgbClr val="0D9298"/>
+          </a:solidFill>
+          <a:ln>
+            <a:noFill/>
+          </a:ln>
+        </p:spPr>
+        <p:txBody>
+          <a:bodyPr/>
+          <a:lstStyle/>
+          <a:p>
+            <a:endParaRPr lang="th-TH"/>
+          </a:p>
+        </p:txBody>
+      </p:sp>
+      <p:sp>
+        <p:nvSpPr>
+          <p:cNvPr id="31" name="Segment 3 Name"/>
+          <p:cNvSpPr>
+            <a:spLocks noGrp="1"/>
+          </p:cNvSpPr>
+          <p:nvPr>
+            <p:ph type="body" idx="32"/>
+          </p:nvPr>
+        </p:nvSpPr>
+        <p:spPr>
+          <a:xfrm>
+            <a:off x="6405880" y="2926080"/>
+            <a:ext cx="2235200" cy="274320"/>
+          </a:xfrm>
+          <a:prstGeom prst="rect">
+            <a:avLst/>
+          </a:prstGeom>
+        </p:spPr>
+        <p:txBody>
+          <a:bodyPr wrap="square" anchor="ctr" lIns="0" tIns="0" rIns="0" bIns="0" rtlCol="0"/>
+          <a:lstStyle>
+            <a:lvl1pPr algn="l" marL="0" indent="0">
+              <a:lnSpc>
+                <a:spcPct val="100000"/>
+              </a:lnSpc>
+              <a:buNone/>
+              <a:defRPr lang="th-TH" sz="1200" dirty="0">
+                <a:solidFill>
+                  <a:srgbClr val="333333"/>
+                </a:solidFill>
+                <a:latin typeface="+mn-lt"/>
+                <a:ea typeface="+mn-ea"/>
+                <a:cs typeface="+mn-cs"/>
+              </a:defRPr>
+            </a:lvl1pPr>
+          </a:lstStyle>
+          <a:p>
+            <a:pPr algn="l" marL="0" indent="0">
+              <a:lnSpc>
+                <a:spcPct val="100000"/>
+              </a:lnSpc>
+              <a:buNone/>
+            </a:pPr>
+            <a:r>
+              <a:rPr lang="th-TH" sz="1200" dirty="0">
+                <a:solidFill>
+                  <a:srgbClr val="333333"/>
+                </a:solidFill>
+                <a:latin typeface="+mn-lt"/>
+                <a:ea typeface="+mn-ea"/>
+                <a:cs typeface="+mn-cs"/>
+              </a:rPr>
+              <a:t>หมวด 3</a:t>
+            </a:r>
+          </a:p>
+        </p:txBody>
+      </p:sp>
+      <p:sp>
+        <p:nvSpPr>
+          <p:cNvPr id="32" name="Segment 3 Value"/>
+          <p:cNvSpPr>
+            <a:spLocks noGrp="1"/>
+          </p:cNvSpPr>
+          <p:nvPr>
+            <p:ph type="body" idx="33"/>
+          </p:nvPr>
+        </p:nvSpPr>
+        <p:spPr>
+          <a:xfrm>
+            <a:off x="6187440" y="3200400"/>
+            <a:ext cx="1325880" cy="365760"/>
+          </a:xfrm>
+          <a:prstGeom prst="rect">
+            <a:avLst/>
+          </a:prstGeom>
+        </p:spPr>
+        <p:txBody>
+          <a:bodyPr wrap="square" anchor="ctr" lIns="0" tIns="0" rIns="0" bIns="0" rtlCol="0"/>
+          <a:lstStyle>
+            <a:lvl1pPr algn="l" marL="0" indent="0">
+              <a:lnSpc>
+                <a:spcPct val="100000"/>
+              </a:lnSpc>
+              <a:buNone/>
+              <a:defRPr lang="th-TH" sz="1600" b="1" dirty="0">
+                <a:solidFill>
+                  <a:srgbClr val="333333"/>
+                </a:solidFill>
+                <a:latin typeface="+mn-lt"/>
+                <a:ea typeface="+mn-ea"/>
+                <a:cs typeface="+mn-cs"/>
+              </a:defRPr>
+            </a:lvl1pPr>
+          </a:lstStyle>
+          <a:p>
+            <a:pPr algn="l" marL="0" indent="0">
+              <a:lnSpc>
+                <a:spcPct val="100000"/>
+              </a:lnSpc>
+              <a:buNone/>
+            </a:pPr>
+            <a:r>
+              <a:rPr lang="th-TH" sz="1600" b="1" dirty="0">
+                <a:solidFill>
+                  <a:srgbClr val="333333"/>
+                </a:solidFill>
+                <a:latin typeface="+mn-lt"/>
+                <a:ea typeface="+mn-ea"/>
+                <a:cs typeface="+mn-cs"/>
+              </a:rPr>
+              <a:t>0.0</a:t>
+            </a:r>
+          </a:p>
+        </p:txBody>
+      </p:sp>
+      <p:sp>
+        <p:nvSpPr>
+          <p:cNvPr id="33" name="Segment 3 Share"/>
+          <p:cNvSpPr>
+            <a:spLocks noGrp="1"/>
+          </p:cNvSpPr>
+          <p:nvPr>
+            <p:ph type="body" idx="34"/>
+          </p:nvPr>
+        </p:nvSpPr>
+        <p:spPr>
+          <a:xfrm>
+            <a:off x="7513320" y="3200400"/>
+            <a:ext cx="1127760" cy="365760"/>
+          </a:xfrm>
+          <a:prstGeom prst="rect">
+            <a:avLst/>
+          </a:prstGeom>
+        </p:spPr>
+        <p:txBody>
+          <a:bodyPr wrap="square" anchor="ctr" lIns="0" tIns="0" rIns="0" bIns="0" rtlCol="0"/>
+          <a:lstStyle>
+            <a:lvl1pPr algn="l" marL="0" indent="0">
+              <a:lnSpc>
+                <a:spcPct val="100000"/>
+              </a:lnSpc>
+              <a:buNone/>
+              <a:defRPr lang="th-TH" sz="1200" dirty="0">
+                <a:solidFill>
+                  <a:srgbClr val="5F5F5F"/>
+                </a:solidFill>
+                <a:latin typeface="+mn-lt"/>
+                <a:ea typeface="+mn-ea"/>
+                <a:cs typeface="+mn-cs"/>
+              </a:defRPr>
+            </a:lvl1pPr>
+          </a:lstStyle>
+          <a:p>
+            <a:pPr algn="l" marL="0" indent="0">
+              <a:lnSpc>
+                <a:spcPct val="100000"/>
+              </a:lnSpc>
+              <a:buNone/>
+            </a:pPr>
+            <a:r>
+              <a:rPr lang="th-TH" sz="1200" dirty="0">
+                <a:solidFill>
+                  <a:srgbClr val="5F5F5F"/>
+                </a:solidFill>
+                <a:latin typeface="+mn-lt"/>
+                <a:ea typeface="+mn-ea"/>
+                <a:cs typeface="+mn-cs"/>
+              </a:rPr>
+              <a:t>0%</a:t>
+            </a:r>
+          </a:p>
+        </p:txBody>
+      </p:sp>
+      <p:sp>
+        <p:nvSpPr>
+          <p:cNvPr id="34" name="Swatch 4"/>
+          <p:cNvSpPr/>
+          <p:nvPr/>
+        </p:nvSpPr>
+        <p:spPr>
+          <a:xfrm>
+            <a:off x="8823960" y="2999740"/>
+            <a:ext cx="127000" cy="127000"/>
+          </a:xfrm>
+          <a:prstGeom prst="rect">
+            <a:avLst/>
+          </a:prstGeom>
+          <a:solidFill>
+            <a:srgbClr val="A4A4A4"/>
+          </a:solidFill>
+          <a:ln>
+            <a:noFill/>
+          </a:ln>
+        </p:spPr>
+        <p:txBody>
+          <a:bodyPr/>
+          <a:lstStyle/>
+          <a:p>
+            <a:endParaRPr lang="th-TH"/>
+          </a:p>
+        </p:txBody>
+      </p:sp>
+      <p:sp>
+        <p:nvSpPr>
+          <p:cNvPr id="35" name="Segment 4 Name"/>
+          <p:cNvSpPr>
+            <a:spLocks noGrp="1"/>
+          </p:cNvSpPr>
+          <p:nvPr>
+            <p:ph type="body" idx="35"/>
+          </p:nvPr>
+        </p:nvSpPr>
+        <p:spPr>
+          <a:xfrm>
+            <a:off x="9042400" y="2926080"/>
+            <a:ext cx="2235200" cy="274320"/>
+          </a:xfrm>
+          <a:prstGeom prst="rect">
+            <a:avLst/>
+          </a:prstGeom>
+        </p:spPr>
+        <p:txBody>
+          <a:bodyPr wrap="square" anchor="ctr" lIns="0" tIns="0" rIns="0" bIns="0" rtlCol="0"/>
+          <a:lstStyle>
+            <a:lvl1pPr algn="l" marL="0" indent="0">
+              <a:lnSpc>
+                <a:spcPct val="100000"/>
+              </a:lnSpc>
+              <a:buNone/>
+              <a:defRPr lang="th-TH" sz="1200" dirty="0">
+                <a:solidFill>
+                  <a:srgbClr val="333333"/>
+                </a:solidFill>
+                <a:latin typeface="+mn-lt"/>
+                <a:ea typeface="+mn-ea"/>
+                <a:cs typeface="+mn-cs"/>
+              </a:defRPr>
+            </a:lvl1pPr>
+          </a:lstStyle>
+          <a:p>
+            <a:pPr algn="l" marL="0" indent="0">
+              <a:lnSpc>
+                <a:spcPct val="100000"/>
+              </a:lnSpc>
+              <a:buNone/>
+            </a:pPr>
+            <a:r>
+              <a:rPr lang="th-TH" sz="1200" dirty="0">
+                <a:solidFill>
+                  <a:srgbClr val="333333"/>
+                </a:solidFill>
+                <a:latin typeface="+mn-lt"/>
+                <a:ea typeface="+mn-ea"/>
+                <a:cs typeface="+mn-cs"/>
+              </a:rPr>
+              <a:t>หมวด 4</a:t>
+            </a:r>
+          </a:p>
+        </p:txBody>
+      </p:sp>
+      <p:sp>
+        <p:nvSpPr>
+          <p:cNvPr id="36" name="Segment 4 Value"/>
+          <p:cNvSpPr>
+            <a:spLocks noGrp="1"/>
+          </p:cNvSpPr>
+          <p:nvPr>
+            <p:ph type="body" idx="36"/>
+          </p:nvPr>
+        </p:nvSpPr>
+        <p:spPr>
+          <a:xfrm>
+            <a:off x="8823960" y="3200400"/>
+            <a:ext cx="1325880" cy="365760"/>
+          </a:xfrm>
+          <a:prstGeom prst="rect">
+            <a:avLst/>
+          </a:prstGeom>
+        </p:spPr>
+        <p:txBody>
+          <a:bodyPr wrap="square" anchor="ctr" lIns="0" tIns="0" rIns="0" bIns="0" rtlCol="0"/>
+          <a:lstStyle>
+            <a:lvl1pPr algn="l" marL="0" indent="0">
+              <a:lnSpc>
+                <a:spcPct val="100000"/>
+              </a:lnSpc>
+              <a:buNone/>
+              <a:defRPr lang="th-TH" sz="1600" b="1" dirty="0">
+                <a:solidFill>
+                  <a:srgbClr val="333333"/>
+                </a:solidFill>
+                <a:latin typeface="+mn-lt"/>
+                <a:ea typeface="+mn-ea"/>
+                <a:cs typeface="+mn-cs"/>
+              </a:defRPr>
+            </a:lvl1pPr>
+          </a:lstStyle>
+          <a:p>
+            <a:pPr algn="l" marL="0" indent="0">
+              <a:lnSpc>
+                <a:spcPct val="100000"/>
+              </a:lnSpc>
+              <a:buNone/>
+            </a:pPr>
+            <a:r>
+              <a:rPr lang="th-TH" sz="1600" b="1" dirty="0">
+                <a:solidFill>
+                  <a:srgbClr val="333333"/>
+                </a:solidFill>
+                <a:latin typeface="+mn-lt"/>
+                <a:ea typeface="+mn-ea"/>
+                <a:cs typeface="+mn-cs"/>
+              </a:rPr>
+              <a:t>0.0</a:t>
+            </a:r>
+          </a:p>
+        </p:txBody>
+      </p:sp>
+      <p:sp>
+        <p:nvSpPr>
+          <p:cNvPr id="37" name="Segment 4 Share"/>
+          <p:cNvSpPr>
+            <a:spLocks noGrp="1"/>
+          </p:cNvSpPr>
+          <p:nvPr>
+            <p:ph type="body" idx="37"/>
+          </p:nvPr>
+        </p:nvSpPr>
+        <p:spPr>
+          <a:xfrm>
+            <a:off x="10149840" y="3200400"/>
+            <a:ext cx="1127760" cy="365760"/>
+          </a:xfrm>
+          <a:prstGeom prst="rect">
+            <a:avLst/>
+          </a:prstGeom>
+        </p:spPr>
+        <p:txBody>
+          <a:bodyPr wrap="square" anchor="ctr" lIns="0" tIns="0" rIns="0" bIns="0" rtlCol="0"/>
+          <a:lstStyle>
+            <a:lvl1pPr algn="l" marL="0" indent="0">
+              <a:lnSpc>
+                <a:spcPct val="100000"/>
+              </a:lnSpc>
+              <a:buNone/>
+              <a:defRPr lang="th-TH" sz="1200" dirty="0">
+                <a:solidFill>
+                  <a:srgbClr val="5F5F5F"/>
+                </a:solidFill>
+                <a:latin typeface="+mn-lt"/>
+                <a:ea typeface="+mn-ea"/>
+                <a:cs typeface="+mn-cs"/>
+              </a:defRPr>
+            </a:lvl1pPr>
+          </a:lstStyle>
+          <a:p>
+            <a:pPr algn="l" marL="0" indent="0">
+              <a:lnSpc>
+                <a:spcPct val="100000"/>
+              </a:lnSpc>
+              <a:buNone/>
+            </a:pPr>
+            <a:r>
+              <a:rPr lang="th-TH" sz="1200" dirty="0">
+                <a:solidFill>
+                  <a:srgbClr val="5F5F5F"/>
+                </a:solidFill>
+                <a:latin typeface="+mn-lt"/>
+                <a:ea typeface="+mn-ea"/>
+                <a:cs typeface="+mn-cs"/>
+              </a:rPr>
+              <a:t>0%</a:t>
+            </a:r>
+          </a:p>
+        </p:txBody>
+      </p:sp>
+      <p:sp>
+        <p:nvSpPr>
+          <p:cNvPr id="38" name="Source"/>
+          <p:cNvSpPr>
+            <a:spLocks noGrp="1"/>
+          </p:cNvSpPr>
+          <p:nvPr>
+            <p:ph type="body" idx="5"/>
+          </p:nvPr>
+        </p:nvSpPr>
+        <p:spPr>
+          <a:xfrm>
+            <a:off x="914400" y="5257800"/>
+            <a:ext cx="10363200" cy="274320"/>
+          </a:xfrm>
+          <a:prstGeom prst="rect">
+            <a:avLst/>
+          </a:prstGeom>
+        </p:spPr>
+        <p:txBody>
+          <a:bodyPr wrap="square" anchor="t" lIns="0" tIns="0" rIns="0" bIns="0" rtlCol="0"/>
+          <a:lstStyle>
+            <a:lvl1pPr algn="l" marL="0" indent="0">
+              <a:lnSpc>
+                <a:spcPct val="130000"/>
+              </a:lnSpc>
+              <a:buNone/>
+              <a:defRPr lang="th-TH" sz="1000" dirty="0">
+                <a:solidFill>
+                  <a:srgbClr val="5F5F5F"/>
+                </a:solidFill>
+                <a:latin typeface="+mn-lt"/>
+                <a:ea typeface="+mn-ea"/>
+                <a:cs typeface="+mn-cs"/>
+              </a:defRPr>
+            </a:lvl1pPr>
+          </a:lstStyle>
+          <a:p>
+            <a:pPr algn="l" marL="0" indent="0">
+              <a:lnSpc>
+                <a:spcPct val="130000"/>
+              </a:lnSpc>
+              <a:buNone/>
+            </a:pPr>
+            <a:r>
+              <a:rPr lang="th-TH" sz="1000" dirty="0">
+                <a:solidFill>
+                  <a:srgbClr val="5F5F5F"/>
+                </a:solidFill>
+                <a:latin typeface="+mn-lt"/>
+                <a:ea typeface="+mn-ea"/>
+                <a:cs typeface="+mn-cs"/>
+              </a:rPr>
+              <a:t>ที่มาของตัวเลข · ปัดเศษ</a:t>
+            </a:r>
+          </a:p>
+        </p:txBody>
+      </p:sp>
+      <p:sp>
+        <p:nvSpPr>
+          <p:cNvPr id="39" name="Takeaway Band"/>
+          <p:cNvSpPr/>
+          <p:nvPr/>
+        </p:nvSpPr>
+        <p:spPr>
+          <a:xfrm>
+            <a:off x="914400" y="5623560"/>
+            <a:ext cx="10363200" cy="411480"/>
+          </a:xfrm>
+          <a:prstGeom prst="rect">
+            <a:avLst/>
+          </a:prstGeom>
+          <a:solidFill>
+            <a:srgbClr val="E8F6F5"/>
+          </a:solidFill>
+          <a:ln>
+            <a:noFill/>
+          </a:ln>
+        </p:spPr>
+        <p:txBody>
+          <a:bodyPr/>
+          <a:lstStyle/>
+          <a:p>
+            <a:endParaRPr lang="th-TH"/>
+          </a:p>
+        </p:txBody>
+      </p:sp>
+      <p:sp>
+        <p:nvSpPr>
+          <p:cNvPr id="40" name="Takeaway Label"/>
+          <p:cNvSpPr>
+            <a:spLocks noGrp="1"/>
+          </p:cNvSpPr>
+          <p:nvPr>
+            <p:ph type="body" idx="6"/>
+          </p:nvPr>
+        </p:nvSpPr>
+        <p:spPr>
+          <a:xfrm>
+            <a:off x="1097280" y="5684520"/>
+            <a:ext cx="1828800" cy="289560"/>
+          </a:xfrm>
+          <a:prstGeom prst="rect">
+            <a:avLst/>
+          </a:prstGeom>
+        </p:spPr>
+        <p:txBody>
+          <a:bodyPr wrap="square" anchor="ctr" lIns="0" tIns="0" rIns="0" bIns="0" rtlCol="0"/>
+          <a:lstStyle>
+            <a:lvl1pPr algn="l" marL="0" indent="0">
+              <a:lnSpc>
+                <a:spcPct val="100000"/>
+              </a:lnSpc>
+              <a:buNone/>
+              <a:defRPr lang="th-TH" sz="1200" b="1" spc="120" dirty="0">
+                <a:solidFill>
+                  <a:srgbClr val="216B7F"/>
+                </a:solidFill>
+                <a:latin typeface="+mn-lt"/>
+                <a:ea typeface="+mn-ea"/>
+                <a:cs typeface="+mn-cs"/>
+              </a:defRPr>
+            </a:lvl1pPr>
+          </a:lstStyle>
+          <a:p>
+            <a:pPr algn="l" marL="0" indent="0">
+              <a:lnSpc>
+                <a:spcPct val="100000"/>
+              </a:lnSpc>
+              <a:buNone/>
+            </a:pPr>
+            <a:r>
+              <a:rPr lang="th-TH" sz="1200" b="1" spc="120" dirty="0">
+                <a:solidFill>
+                  <a:srgbClr val="216B7F"/>
+                </a:solidFill>
+                <a:latin typeface="+mn-lt"/>
+                <a:ea typeface="+mn-ea"/>
+                <a:cs typeface="+mn-cs"/>
+              </a:rPr>
+              <a:t>สรุป</a:t>
+            </a:r>
+          </a:p>
+        </p:txBody>
+      </p:sp>
+      <p:sp>
+        <p:nvSpPr>
+          <p:cNvPr id="41" name="Takeaway Copy"/>
+          <p:cNvSpPr>
+            <a:spLocks noGrp="1"/>
+          </p:cNvSpPr>
+          <p:nvPr>
+            <p:ph type="body" idx="7"/>
+          </p:nvPr>
+        </p:nvSpPr>
+        <p:spPr>
+          <a:xfrm>
+            <a:off x="2926080" y="5684520"/>
+            <a:ext cx="8168640" cy="289560"/>
+          </a:xfrm>
+          <a:prstGeom prst="rect">
+            <a:avLst/>
+          </a:prstGeom>
+        </p:spPr>
+        <p:txBody>
+          <a:bodyPr wrap="square" anchor="ctr" lIns="0" tIns="0" rIns="0" bIns="0" rtlCol="0"/>
+          <a:lstStyle>
+            <a:lvl1pPr algn="l" marL="0" indent="0">
+              <a:lnSpc>
+                <a:spcPct val="100000"/>
+              </a:lnSpc>
+              <a:buNone/>
+              <a:defRPr lang="th-TH" sz="1400" dirty="0">
+                <a:solidFill>
+                  <a:srgbClr val="333333"/>
+                </a:solidFill>
+                <a:latin typeface="+mn-lt"/>
+                <a:ea typeface="+mn-ea"/>
+                <a:cs typeface="+mn-cs"/>
+              </a:defRPr>
+            </a:lvl1pPr>
+          </a:lstStyle>
+          <a:p>
+            <a:pPr algn="l" marL="0" indent="0">
+              <a:lnSpc>
+                <a:spcPct val="100000"/>
+              </a:lnSpc>
+              <a:buNone/>
+            </a:pPr>
+            <a:r>
+              <a:rPr lang="th-TH" sz="1400" dirty="0">
+                <a:solidFill>
+                  <a:srgbClr val="333333"/>
+                </a:solidFill>
+                <a:latin typeface="+mn-lt"/>
+                <a:ea typeface="+mn-ea"/>
+                <a:cs typeface="+mn-cs"/>
+              </a:rPr>
+              <a:t>ประเด็นสรุปหนึ่งบรรทัด</a:t>
+            </a:r>
+          </a:p>
+        </p:txBody>
+      </p:sp>
+      <p:sp>
+        <p:nvSpPr>
+          <p:cNvPr id="90" name="Foot Bar 1"/>
+          <p:cNvSpPr/>
+          <p:nvPr/>
+        </p:nvSpPr>
+        <p:spPr>
+          <a:xfrm>
+            <a:off x="0" y="6675120"/>
+            <a:ext cx="822960" cy="137160"/>
+          </a:xfrm>
+          <a:prstGeom prst="rect">
+            <a:avLst/>
+          </a:prstGeom>
+          <a:solidFill>
+            <a:srgbClr val="216B7F"/>
+          </a:solidFill>
+          <a:ln>
+            <a:noFill/>
+          </a:ln>
+        </p:spPr>
+        <p:txBody>
+          <a:bodyPr/>
+          <a:lstStyle/>
+          <a:p>
+            <a:endParaRPr lang="th-TH"/>
+          </a:p>
+        </p:txBody>
+      </p:sp>
+      <p:sp>
+        <p:nvSpPr>
+          <p:cNvPr id="91" name="Foot Bar 2"/>
+          <p:cNvSpPr/>
+          <p:nvPr/>
+        </p:nvSpPr>
+        <p:spPr>
+          <a:xfrm>
+            <a:off x="822960" y="6675120"/>
+            <a:ext cx="822960" cy="137160"/>
+          </a:xfrm>
+          <a:prstGeom prst="rect">
+            <a:avLst/>
+          </a:prstGeom>
+          <a:solidFill>
+            <a:srgbClr val="B1C4C9"/>
+          </a:solidFill>
+          <a:ln>
+            <a:noFill/>
+          </a:ln>
+        </p:spPr>
+        <p:txBody>
+          <a:bodyPr/>
+          <a:lstStyle/>
+          <a:p>
+            <a:endParaRPr lang="th-TH"/>
+          </a:p>
+        </p:txBody>
+      </p:sp>
+      <p:sp>
+        <p:nvSpPr>
+          <p:cNvPr id="92" name="Foot Bar 3"/>
+          <p:cNvSpPr/>
+          <p:nvPr/>
+        </p:nvSpPr>
+        <p:spPr>
+          <a:xfrm>
+            <a:off x="1645920" y="6675120"/>
+            <a:ext cx="822960" cy="137160"/>
+          </a:xfrm>
+          <a:prstGeom prst="rect">
+            <a:avLst/>
+          </a:prstGeom>
+          <a:solidFill>
+            <a:srgbClr val="E1E1E1"/>
+          </a:solidFill>
+          <a:ln>
+            <a:noFill/>
+          </a:ln>
+        </p:spPr>
+        <p:txBody>
+          <a:bodyPr/>
+          <a:lstStyle/>
+          <a:p>
+            <a:endParaRPr lang="th-TH"/>
+          </a:p>
+        </p:txBody>
+      </p:sp>
+      <p:sp>
+        <p:nvSpPr>
+          <p:cNvPr id="93" name="Footer Placeholder"/>
+          <p:cNvSpPr>
+            <a:spLocks noGrp="1"/>
+          </p:cNvSpPr>
+          <p:nvPr>
+            <p:ph type="ftr" idx="11"/>
+          </p:nvPr>
+        </p:nvSpPr>
+        <p:spPr>
+          <a:xfrm>
+            <a:off x="2697480" y="6400800"/>
+            <a:ext cx="4572000" cy="274320"/>
+          </a:xfrm>
+          <a:prstGeom prst="rect">
+            <a:avLst/>
+          </a:prstGeom>
+        </p:spPr>
+        <p:txBody>
+          <a:bodyPr wrap="square" anchor="ctr" lIns="0" tIns="0" rIns="0" bIns="0" rtlCol="0"/>
+          <a:lstStyle>
+            <a:lvl1pPr algn="l" marL="0" indent="0">
+              <a:lnSpc>
+                <a:spcPct val="100000"/>
+              </a:lnSpc>
+              <a:buNone/>
+              <a:defRPr lang="th-TH" sz="1000" dirty="0">
+                <a:solidFill>
+                  <a:srgbClr val="5F5F5F"/>
+                </a:solidFill>
+                <a:latin typeface="+mn-lt"/>
+                <a:ea typeface="+mn-ea"/>
+                <a:cs typeface="+mn-cs"/>
+              </a:defRPr>
+            </a:lvl1pPr>
+          </a:lstStyle>
+          <a:p>
+            <a:pPr algn="l" marL="0" indent="0">
+              <a:lnSpc>
+                <a:spcPct val="100000"/>
+              </a:lnSpc>
+              <a:buNone/>
+            </a:pPr>
+            <a:endParaRPr lang="th-TH" sz="1000"/>
+          </a:p>
+        </p:txBody>
+      </p:sp>
+      <p:sp>
+        <p:nvSpPr>
+          <p:cNvPr id="94" name="Slide Number Placeholder"/>
+          <p:cNvSpPr>
+            <a:spLocks noGrp="1"/>
+          </p:cNvSpPr>
+          <p:nvPr>
+            <p:ph type="sldNum" sz="quarter" idx="12"/>
+          </p:nvPr>
+        </p:nvSpPr>
+        <p:spPr>
+          <a:xfrm>
+            <a:off x="10591800" y="6400800"/>
+            <a:ext cx="1371600" cy="274320"/>
+          </a:xfrm>
+          <a:prstGeom prst="rect">
+            <a:avLst/>
+          </a:prstGeom>
+        </p:spPr>
+        <p:txBody>
+          <a:bodyPr anchor="ctr"/>
+          <a:lstStyle>
+            <a:lvl1pPr algn="r" marL="0" indent="0">
+              <a:lnSpc>
+                <a:spcPct val="100000"/>
+              </a:lnSpc>
+              <a:buNone/>
+              <a:defRPr lang="th-TH" sz="1000" dirty="0">
+                <a:solidFill>
+                  <a:srgbClr val="5F5F5F"/>
+                </a:solidFill>
+                <a:latin typeface="+mn-lt"/>
+                <a:ea typeface="+mn-ea"/>
+                <a:cs typeface="+mn-cs"/>
+              </a:defRPr>
+            </a:lvl1pPr>
+          </a:lstStyle>
+          <a:p>
+            <a:pPr algn="r" marL="0" indent="0">
+              <a:buNone/>
+            </a:pPr>
+            <a:fld id="{B7E3A1C2-4F5D-4A88-9C1E-6D2F0A93B451}" type="slidenum">
+              <a:rPr lang="th-TH" sz="1000">
+                <a:solidFill>
+                  <a:srgbClr val="5F5F5F"/>
+                </a:solidFill>
+                <a:latin typeface="+mn-lt"/>
+                <a:cs typeface="+mn-cs"/>
+              </a:rPr>
+              <a:t>2</a:t>
+            </a:fld>
+            <a:endParaRPr lang="th-TH" sz="1000"/>
+          </a:p>
+        </p:txBody>
+      </p:sp>
+      <p:sp>
+        <p:nvSpPr>
+          <p:cNvPr id="95" name="Corner Lockup"/>
+          <p:cNvSpPr/>
+          <p:nvPr/>
+        </p:nvSpPr>
+        <p:spPr>
+          <a:xfrm rot="10800000">
+            <a:off x="10546080" y="-274320"/>
+            <a:ext cx="1645920" cy="822960"/>
+          </a:xfrm>
+          <a:prstGeom prst="round2SameRect">
+            <a:avLst>
+              <a:gd name="adj1" fmla="val 12000"/>
+              <a:gd name="adj2" fmla="val 0"/>
+            </a:avLst>
+          </a:prstGeom>
+          <a:solidFill>
+            <a:srgbClr val="FFFFFF"/>
+          </a:solidFill>
+          <a:ln w="12700">
+            <a:solidFill>
+              <a:srgbClr val="216B7F"/>
+            </a:solidFill>
+          </a:ln>
+        </p:spPr>
+        <p:txBody>
+          <a:bodyPr/>
+          <a:lstStyle/>
+          <a:p>
+            <a:endParaRPr lang="th-TH"/>
+          </a:p>
+        </p:txBody>
+      </p:sp>
+      <p:pic>
+        <p:nvPicPr>
+          <p:cNvPr id="96" name="NCT Mark"/>
+          <p:cNvPicPr>
+            <a:picLocks noChangeAspect="1"/>
+          </p:cNvPicPr>
+          <p:nvPr/>
+        </p:nvPicPr>
+        <p:blipFill>
+          <a:blip r:embed="rId2"/>
+          <a:stretch>
+            <a:fillRect/>
+          </a:stretch>
+        </p:blipFill>
+        <p:spPr>
+          <a:xfrm>
+            <a:off x="11094720" y="99822"/>
+            <a:ext cx="548640" cy="348996"/>
+          </a:xfrm>
+          <a:prstGeom prst="rect">
+            <a:avLst/>
+          </a:prstGeom>
+        </p:spPr>
+      </p:pic>
+    </p:spTree>
+  </p:cSld>
+  <p:clrMapOvr>
+    <a:masterClrMapping/>
+  </p:clrMapOvr>
+</p:sldLayout>
+</file>
+
 <file path=ppt/slideLayouts/slideLayout3.xml><?xml version="1.0" encoding="utf-8"?>
 <p:sldLayout xmlns:a="http://schemas.openxmlformats.org/drawingml/2006/main" xmlns:r="http://schemas.openxmlformats.org/officeDocument/2006/relationships" xmlns:p="http://schemas.openxmlformats.org/presentationml/2006/main" type="obj" showMasterSp="0" preserve="1">
   <p:cSld name="03 Title and Content">
@@ -20509,7 +22747,7 @@
           <p:nvPr/>
         </p:nvPicPr>
         <p:blipFill>
-          <a:blip r:embed="rId23"/>
+          <a:blip r:embed="rId24"/>
           <a:stretch>
             <a:fillRect/>
           </a:stretch>
@@ -20549,6 +22787,7 @@
     <p:sldLayoutId id="2147483667" r:id="rId19"/>
     <p:sldLayoutId id="2147483668" r:id="rId20"/>
     <p:sldLayoutId id="2147483669" r:id="rId21"/>
+    <p:sldLayoutId id="2147483670" r:id="rId22"/>
   </p:sldLayoutIdLst>
   <p:txStyles>
     <p:titleStyle>
@@ -25716,19 +27955,19 @@
             <a:pPr/>
             <a:r>
               <a:rPr lang="th-TH" dirty="0"/>
-              <a:t>5. Implementation Stage</a:t>
-            </a:r>
-          </a:p>
-        </p:txBody>
-      </p:sp>
-      <p:sp>
-        <p:nvSpPr>
-          <p:cNvPr id="3" name="KAL"/>
-          <p:cNvSpPr>
-            <a:spLocks noGrp="1"/>
-          </p:cNvSpPr>
-          <p:nvPr>
-            <p:ph type="body" idx="1"/>
+              <a:t>ครึ่งหนึ่งของงบ 4.8 ล้านบาท คือค่าพัฒนาระบบ</a:t>
+            </a:r>
+          </a:p>
+        </p:txBody>
+      </p:sp>
+      <p:sp>
+        <p:nvSpPr>
+          <p:cNvPr id="3" name="Total"/>
+          <p:cNvSpPr>
+            <a:spLocks noGrp="1"/>
+          </p:cNvSpPr>
+          <p:nvPr>
+            <p:ph type="body" idx="2"/>
           </p:nvPr>
         </p:nvSpPr>
         <p:spPr/>
@@ -25739,19 +27978,19 @@
             <a:pPr/>
             <a:r>
               <a:rPr lang="th-TH" dirty="0"/>
-              <a:t>Key Activity :</a:t>
-            </a:r>
-          </a:p>
-        </p:txBody>
-      </p:sp>
-      <p:sp>
-        <p:nvSpPr>
-          <p:cNvPr id="4" name="KAV"/>
-          <p:cNvSpPr>
-            <a:spLocks noGrp="1"/>
-          </p:cNvSpPr>
-          <p:nvPr>
-            <p:ph type="body" idx="2"/>
+              <a:t>4.8 ล้านบาท</a:t>
+            </a:r>
+          </a:p>
+        </p:txBody>
+      </p:sp>
+      <p:sp>
+        <p:nvSpPr>
+          <p:cNvPr id="4" name="TotalL"/>
+          <p:cNvSpPr>
+            <a:spLocks noGrp="1"/>
+          </p:cNvSpPr>
+          <p:nvPr>
+            <p:ph type="body" idx="3"/>
           </p:nvPr>
         </p:nvSpPr>
         <p:spPr/>
@@ -25762,19 +28001,19 @@
             <a:pPr/>
             <a:r>
               <a:rPr lang="th-TH" dirty="0"/>
-              <a:t>ตั้งค่าสภาพแวดล้อม ติดตั้งฮาร์ดแวร์และซอฟต์แวร์</a:t>
-            </a:r>
-          </a:p>
-        </p:txBody>
-      </p:sp>
-      <p:sp>
-        <p:nvSpPr>
-          <p:cNvPr id="5" name="PL"/>
-          <p:cNvSpPr>
-            <a:spLocks noGrp="1"/>
-          </p:cNvSpPr>
-          <p:nvPr>
-            <p:ph type="body" idx="3"/>
+              <a:t>งบโครงการรวมทั้งสิ้น</a:t>
+            </a:r>
+          </a:p>
+        </p:txBody>
+      </p:sp>
+      <p:sp>
+        <p:nvSpPr>
+          <p:cNvPr id="5" name="Intro"/>
+          <p:cNvSpPr>
+            <a:spLocks noGrp="1"/>
+          </p:cNvSpPr>
+          <p:nvPr>
+            <p:ph type="body" idx="4"/>
           </p:nvPr>
         </p:nvSpPr>
         <p:spPr/>
@@ -25785,19 +28024,39 @@
             <a:pPr/>
             <a:r>
               <a:rPr lang="th-TH" dirty="0"/>
-              <a:t>Participant :</a:t>
-            </a:r>
-          </a:p>
-        </p:txBody>
-      </p:sp>
-      <p:sp>
-        <p:nvSpPr>
-          <p:cNvPr id="6" name="PV"/>
-          <p:cNvSpPr>
-            <a:spLocks noGrp="1"/>
-          </p:cNvSpPr>
-          <p:nvPr>
-            <p:ph type="body" idx="4"/>
+              <a:t>รวมภาษีมูลค่าเพิ่ม · สัญญา 12 เดือน ไม่รวมค่าบริการรายเดือนหลังปีแรก</a:t>
+            </a:r>
+          </a:p>
+        </p:txBody>
+      </p:sp>
+      <p:graphicFrame>
+        <p:nvGraphicFramePr>
+          <p:cNvPr id="6" name="Composition"/>
+          <p:cNvGraphicFramePr>
+            <a:graphicFrameLocks noGrp="1"/>
+          </p:cNvGraphicFramePr>
+          <p:nvPr>
+            <p:ph type="chart" idx="1"/>
+          </p:nvPr>
+        </p:nvGraphicFramePr>
+        <p:xfrm>
+          <a:off x="2697480" y="3703320"/>
+          <a:ext cx="7299960" cy="1371600"/>
+        </p:xfrm>
+        <a:graphic>
+          <a:graphicData uri="http://schemas.openxmlformats.org/drawingml/2006/chart">
+            <c:chart xmlns:c="http://schemas.openxmlformats.org/drawingml/2006/chart" r:id="rId2"/>
+          </a:graphicData>
+        </a:graphic>
+      </p:graphicFrame>
+      <p:sp>
+        <p:nvSpPr>
+          <p:cNvPr id="7" name="B1"/>
+          <p:cNvSpPr>
+            <a:spLocks noGrp="1"/>
+          </p:cNvSpPr>
+          <p:nvPr>
+            <p:ph type="body" idx="20"/>
           </p:nvPr>
         </p:nvSpPr>
         <p:spPr/>
@@ -25808,14 +28067,290 @@
             <a:pPr/>
             <a:r>
               <a:rPr lang="th-TH" dirty="0"/>
-              <a:t>NCT Infra Engineer, ทีมไอทีลูกค้า, Business Analyst</a:t>
-            </a:r>
-          </a:p>
-        </p:txBody>
-      </p:sp>
-      <p:sp>
-        <p:nvSpPr>
-          <p:cNvPr id="7" name="PN"/>
+              <a:t>งบโครงการ</a:t>
+            </a:r>
+          </a:p>
+        </p:txBody>
+      </p:sp>
+      <p:sp>
+        <p:nvSpPr>
+          <p:cNvPr id="8" name="SN"/>
+          <p:cNvSpPr>
+            <a:spLocks noGrp="1"/>
+          </p:cNvSpPr>
+          <p:nvPr>
+            <p:ph type="body" idx="26"/>
+          </p:nvPr>
+        </p:nvSpPr>
+        <p:spPr/>
+        <p:txBody>
+          <a:bodyPr/>
+          <a:lstStyle/>
+          <a:p>
+            <a:pPr/>
+            <a:r>
+              <a:rPr lang="th-TH" dirty="0"/>
+              <a:t>พัฒนาและตั้งค่าระบบ</a:t>
+            </a:r>
+          </a:p>
+        </p:txBody>
+      </p:sp>
+      <p:sp>
+        <p:nvSpPr>
+          <p:cNvPr id="9" name="SV"/>
+          <p:cNvSpPr>
+            <a:spLocks noGrp="1"/>
+          </p:cNvSpPr>
+          <p:nvPr>
+            <p:ph type="body" idx="27"/>
+          </p:nvPr>
+        </p:nvSpPr>
+        <p:spPr/>
+        <p:txBody>
+          <a:bodyPr/>
+          <a:lstStyle/>
+          <a:p>
+            <a:pPr/>
+            <a:r>
+              <a:rPr lang="th-TH" dirty="0"/>
+              <a:t>2.4 ล้านบาท</a:t>
+            </a:r>
+          </a:p>
+        </p:txBody>
+      </p:sp>
+      <p:sp>
+        <p:nvSpPr>
+          <p:cNvPr id="10" name="SP"/>
+          <p:cNvSpPr>
+            <a:spLocks noGrp="1"/>
+          </p:cNvSpPr>
+          <p:nvPr>
+            <p:ph type="body" idx="28"/>
+          </p:nvPr>
+        </p:nvSpPr>
+        <p:spPr/>
+        <p:txBody>
+          <a:bodyPr/>
+          <a:lstStyle/>
+          <a:p>
+            <a:pPr/>
+            <a:r>
+              <a:rPr lang="th-TH" dirty="0"/>
+              <a:t>50%</a:t>
+            </a:r>
+          </a:p>
+        </p:txBody>
+      </p:sp>
+      <p:sp>
+        <p:nvSpPr>
+          <p:cNvPr id="11" name="SN"/>
+          <p:cNvSpPr>
+            <a:spLocks noGrp="1"/>
+          </p:cNvSpPr>
+          <p:nvPr>
+            <p:ph type="body" idx="29"/>
+          </p:nvPr>
+        </p:nvSpPr>
+        <p:spPr/>
+        <p:txBody>
+          <a:bodyPr/>
+          <a:lstStyle/>
+          <a:p>
+            <a:pPr/>
+            <a:r>
+              <a:rPr lang="th-TH" dirty="0"/>
+              <a:t>ไลเซนส์ซอฟต์แวร์</a:t>
+            </a:r>
+          </a:p>
+        </p:txBody>
+      </p:sp>
+      <p:sp>
+        <p:nvSpPr>
+          <p:cNvPr id="12" name="SV"/>
+          <p:cNvSpPr>
+            <a:spLocks noGrp="1"/>
+          </p:cNvSpPr>
+          <p:nvPr>
+            <p:ph type="body" idx="30"/>
+          </p:nvPr>
+        </p:nvSpPr>
+        <p:spPr/>
+        <p:txBody>
+          <a:bodyPr/>
+          <a:lstStyle/>
+          <a:p>
+            <a:pPr/>
+            <a:r>
+              <a:rPr lang="th-TH" dirty="0"/>
+              <a:t>1.2 ล้านบาท</a:t>
+            </a:r>
+          </a:p>
+        </p:txBody>
+      </p:sp>
+      <p:sp>
+        <p:nvSpPr>
+          <p:cNvPr id="13" name="SP"/>
+          <p:cNvSpPr>
+            <a:spLocks noGrp="1"/>
+          </p:cNvSpPr>
+          <p:nvPr>
+            <p:ph type="body" idx="31"/>
+          </p:nvPr>
+        </p:nvSpPr>
+        <p:spPr/>
+        <p:txBody>
+          <a:bodyPr/>
+          <a:lstStyle/>
+          <a:p>
+            <a:pPr/>
+            <a:r>
+              <a:rPr lang="th-TH" dirty="0"/>
+              <a:t>25%</a:t>
+            </a:r>
+          </a:p>
+        </p:txBody>
+      </p:sp>
+      <p:sp>
+        <p:nvSpPr>
+          <p:cNvPr id="14" name="SN"/>
+          <p:cNvSpPr>
+            <a:spLocks noGrp="1"/>
+          </p:cNvSpPr>
+          <p:nvPr>
+            <p:ph type="body" idx="32"/>
+          </p:nvPr>
+        </p:nvSpPr>
+        <p:spPr/>
+        <p:txBody>
+          <a:bodyPr/>
+          <a:lstStyle/>
+          <a:p>
+            <a:pPr/>
+            <a:r>
+              <a:rPr lang="th-TH" dirty="0"/>
+              <a:t>คลาวด์ปีแรก</a:t>
+            </a:r>
+          </a:p>
+        </p:txBody>
+      </p:sp>
+      <p:sp>
+        <p:nvSpPr>
+          <p:cNvPr id="15" name="SV"/>
+          <p:cNvSpPr>
+            <a:spLocks noGrp="1"/>
+          </p:cNvSpPr>
+          <p:nvPr>
+            <p:ph type="body" idx="33"/>
+          </p:nvPr>
+        </p:nvSpPr>
+        <p:spPr/>
+        <p:txBody>
+          <a:bodyPr/>
+          <a:lstStyle/>
+          <a:p>
+            <a:pPr/>
+            <a:r>
+              <a:rPr lang="th-TH" dirty="0"/>
+              <a:t>0.7 ล้านบาท</a:t>
+            </a:r>
+          </a:p>
+        </p:txBody>
+      </p:sp>
+      <p:sp>
+        <p:nvSpPr>
+          <p:cNvPr id="16" name="SP"/>
+          <p:cNvSpPr>
+            <a:spLocks noGrp="1"/>
+          </p:cNvSpPr>
+          <p:nvPr>
+            <p:ph type="body" idx="34"/>
+          </p:nvPr>
+        </p:nvSpPr>
+        <p:spPr/>
+        <p:txBody>
+          <a:bodyPr/>
+          <a:lstStyle/>
+          <a:p>
+            <a:pPr/>
+            <a:r>
+              <a:rPr lang="th-TH" dirty="0"/>
+              <a:t>15%</a:t>
+            </a:r>
+          </a:p>
+        </p:txBody>
+      </p:sp>
+      <p:sp>
+        <p:nvSpPr>
+          <p:cNvPr id="17" name="SN"/>
+          <p:cNvSpPr>
+            <a:spLocks noGrp="1"/>
+          </p:cNvSpPr>
+          <p:nvPr>
+            <p:ph type="body" idx="35"/>
+          </p:nvPr>
+        </p:nvSpPr>
+        <p:spPr/>
+        <p:txBody>
+          <a:bodyPr/>
+          <a:lstStyle/>
+          <a:p>
+            <a:pPr/>
+            <a:r>
+              <a:rPr lang="th-TH" dirty="0"/>
+              <a:t>อื่น ๆ</a:t>
+            </a:r>
+          </a:p>
+        </p:txBody>
+      </p:sp>
+      <p:sp>
+        <p:nvSpPr>
+          <p:cNvPr id="18" name="SV"/>
+          <p:cNvSpPr>
+            <a:spLocks noGrp="1"/>
+          </p:cNvSpPr>
+          <p:nvPr>
+            <p:ph type="body" idx="36"/>
+          </p:nvPr>
+        </p:nvSpPr>
+        <p:spPr/>
+        <p:txBody>
+          <a:bodyPr/>
+          <a:lstStyle/>
+          <a:p>
+            <a:pPr/>
+            <a:r>
+              <a:rPr lang="th-TH" dirty="0"/>
+              <a:t>0.5 ล้านบาท</a:t>
+            </a:r>
+          </a:p>
+        </p:txBody>
+      </p:sp>
+      <p:sp>
+        <p:nvSpPr>
+          <p:cNvPr id="19" name="SP"/>
+          <p:cNvSpPr>
+            <a:spLocks noGrp="1"/>
+          </p:cNvSpPr>
+          <p:nvPr>
+            <p:ph type="body" idx="37"/>
+          </p:nvPr>
+        </p:nvSpPr>
+        <p:spPr/>
+        <p:txBody>
+          <a:bodyPr/>
+          <a:lstStyle/>
+          <a:p>
+            <a:pPr/>
+            <a:r>
+              <a:rPr lang="th-TH" dirty="0"/>
+              <a:t>10%</a:t>
+            </a:r>
+          </a:p>
+        </p:txBody>
+      </p:sp>
+      <p:sp>
+        <p:nvSpPr>
+          <p:cNvPr id="20" name="Src"/>
           <p:cNvSpPr>
             <a:spLocks noGrp="1"/>
           </p:cNvSpPr>
@@ -25831,14 +28366,14 @@
             <a:pPr/>
             <a:r>
               <a:rPr lang="th-TH" dirty="0"/>
-              <a:t>01</a:t>
-            </a:r>
-          </a:p>
-        </p:txBody>
-      </p:sp>
-      <p:sp>
-        <p:nvSpPr>
-          <p:cNvPr id="8" name="PP"/>
+              <a:t>ใบเสนอราคา NCT-2569-041 · ปัดเป็นแสนบาท</a:t>
+            </a:r>
+          </a:p>
+        </p:txBody>
+      </p:sp>
+      <p:sp>
+        <p:nvSpPr>
+          <p:cNvPr id="21" name="TL"/>
           <p:cNvSpPr>
             <a:spLocks noGrp="1"/>
           </p:cNvSpPr>
@@ -25854,14 +28389,14 @@
             <a:pPr/>
             <a:r>
               <a:rPr lang="th-TH" dirty="0"/>
-              <a:t>Preparation Phase</a:t>
-            </a:r>
-          </a:p>
-        </p:txBody>
-      </p:sp>
-      <p:sp>
-        <p:nvSpPr>
-          <p:cNvPr id="9" name="PI"/>
+              <a:t>สรุป</a:t>
+            </a:r>
+          </a:p>
+        </p:txBody>
+      </p:sp>
+      <p:sp>
+        <p:nvSpPr>
+          <p:cNvPr id="22" name="TC"/>
           <p:cNvSpPr>
             <a:spLocks noGrp="1"/>
           </p:cNvSpPr>
@@ -25877,51 +28412,7 @@
             <a:pPr/>
             <a:r>
               <a:rPr lang="th-TH" dirty="0"/>
-              <a:t>สรุปสเปกเครื่องและบริการคลาวด์ที่ต้องเตรียมให้พร้อมก่อนเริ่มงานพัฒนา</a:t>
-            </a:r>
-          </a:p>
-        </p:txBody>
-      </p:sp>
-      <p:sp>
-        <p:nvSpPr>
-          <p:cNvPr id="10" name="PB"/>
-          <p:cNvSpPr>
-            <a:spLocks noGrp="1"/>
-          </p:cNvSpPr>
-          <p:nvPr>
-            <p:ph type="body" idx="8"/>
-          </p:nvPr>
-        </p:nvSpPr>
-        <p:spPr/>
-        <p:txBody>
-          <a:bodyPr/>
-          <a:lstStyle/>
-          <a:p>
-            <a:pPr/>
-            <a:r>
-              <a:rPr lang="th-TH" dirty="0"/>
-              <a:t>PRD · 4 คอร์ / 16GB / SSD 300GB</a:t>
-            </a:r>
-          </a:p>
-          <a:p>
-            <a:pPr/>
-            <a:r>
-              <a:rPr lang="th-TH" dirty="0"/>
-              <a:t>QA · 4 คอร์ / 16GB / SSD 150GB</a:t>
-            </a:r>
-          </a:p>
-          <a:p>
-            <a:pPr/>
-            <a:r>
-              <a:rPr lang="th-TH" dirty="0"/>
-              <a:t>Windows Server 2022 ทั้งสองเครื่อง</a:t>
-            </a:r>
-          </a:p>
-          <a:p>
-            <a:pPr/>
-            <a:r>
-              <a:rPr lang="th-TH" dirty="0"/>
-              <a:t>Lambda, EC2 และ Cognito เปิดทั้งสองสภาพแวดล้อม</a:t>
+              <a:t>ไลเซนส์กับคลาวด์รวมกันไม่ถึง 40% งบส่วนใหญ่จ่ายให้งานที่ทำครั้งเดียว</a:t>
             </a:r>
           </a:p>
         </p:txBody>
@@ -26006,6 +28497,259 @@
 </file>
 
 <file path=ppt/slides/slide20.xml><?xml version="1.0" encoding="utf-8"?>
+<p:sld xmlns:a="http://schemas.openxmlformats.org/drawingml/2006/main" xmlns:r="http://schemas.openxmlformats.org/officeDocument/2006/relationships" xmlns:p="http://schemas.openxmlformats.org/presentationml/2006/main">
+  <p:cSld name="">
+    <p:spTree>
+      <p:nvGrpSpPr>
+        <p:cNvPr id="1" name=""/>
+        <p:cNvGrpSpPr/>
+        <p:nvPr/>
+      </p:nvGrpSpPr>
+      <p:grpSpPr>
+        <a:xfrm>
+          <a:off x="0" y="0"/>
+          <a:ext cx="0" cy="0"/>
+          <a:chOff x="0" y="0"/>
+          <a:chExt cx="0" cy="0"/>
+        </a:xfrm>
+      </p:grpSpPr>
+      <p:sp>
+        <p:nvSpPr>
+          <p:cNvPr id="2" name="Title"/>
+          <p:cNvSpPr>
+            <a:spLocks noGrp="1"/>
+          </p:cNvSpPr>
+          <p:nvPr>
+            <p:ph type="title"/>
+          </p:nvPr>
+        </p:nvSpPr>
+        <p:spPr/>
+        <p:txBody>
+          <a:bodyPr/>
+          <a:lstStyle/>
+          <a:p>
+            <a:pPr/>
+            <a:r>
+              <a:rPr lang="th-TH" dirty="0"/>
+              <a:t>5. Implementation Stage</a:t>
+            </a:r>
+          </a:p>
+        </p:txBody>
+      </p:sp>
+      <p:sp>
+        <p:nvSpPr>
+          <p:cNvPr id="3" name="KAL"/>
+          <p:cNvSpPr>
+            <a:spLocks noGrp="1"/>
+          </p:cNvSpPr>
+          <p:nvPr>
+            <p:ph type="body" idx="1"/>
+          </p:nvPr>
+        </p:nvSpPr>
+        <p:spPr/>
+        <p:txBody>
+          <a:bodyPr/>
+          <a:lstStyle/>
+          <a:p>
+            <a:pPr/>
+            <a:r>
+              <a:rPr lang="th-TH" dirty="0"/>
+              <a:t>Key Activity :</a:t>
+            </a:r>
+          </a:p>
+        </p:txBody>
+      </p:sp>
+      <p:sp>
+        <p:nvSpPr>
+          <p:cNvPr id="4" name="KAV"/>
+          <p:cNvSpPr>
+            <a:spLocks noGrp="1"/>
+          </p:cNvSpPr>
+          <p:nvPr>
+            <p:ph type="body" idx="2"/>
+          </p:nvPr>
+        </p:nvSpPr>
+        <p:spPr/>
+        <p:txBody>
+          <a:bodyPr/>
+          <a:lstStyle/>
+          <a:p>
+            <a:pPr/>
+            <a:r>
+              <a:rPr lang="th-TH" dirty="0"/>
+              <a:t>ตั้งค่าสภาพแวดล้อม ติดตั้งฮาร์ดแวร์และซอฟต์แวร์</a:t>
+            </a:r>
+          </a:p>
+        </p:txBody>
+      </p:sp>
+      <p:sp>
+        <p:nvSpPr>
+          <p:cNvPr id="5" name="PL"/>
+          <p:cNvSpPr>
+            <a:spLocks noGrp="1"/>
+          </p:cNvSpPr>
+          <p:nvPr>
+            <p:ph type="body" idx="3"/>
+          </p:nvPr>
+        </p:nvSpPr>
+        <p:spPr/>
+        <p:txBody>
+          <a:bodyPr/>
+          <a:lstStyle/>
+          <a:p>
+            <a:pPr/>
+            <a:r>
+              <a:rPr lang="th-TH" dirty="0"/>
+              <a:t>Participant :</a:t>
+            </a:r>
+          </a:p>
+        </p:txBody>
+      </p:sp>
+      <p:sp>
+        <p:nvSpPr>
+          <p:cNvPr id="6" name="PV"/>
+          <p:cNvSpPr>
+            <a:spLocks noGrp="1"/>
+          </p:cNvSpPr>
+          <p:nvPr>
+            <p:ph type="body" idx="4"/>
+          </p:nvPr>
+        </p:nvSpPr>
+        <p:spPr/>
+        <p:txBody>
+          <a:bodyPr/>
+          <a:lstStyle/>
+          <a:p>
+            <a:pPr/>
+            <a:r>
+              <a:rPr lang="th-TH" dirty="0"/>
+              <a:t>NCT Infra Engineer, ทีมไอทีลูกค้า, Business Analyst</a:t>
+            </a:r>
+          </a:p>
+        </p:txBody>
+      </p:sp>
+      <p:sp>
+        <p:nvSpPr>
+          <p:cNvPr id="7" name="PN"/>
+          <p:cNvSpPr>
+            <a:spLocks noGrp="1"/>
+          </p:cNvSpPr>
+          <p:nvPr>
+            <p:ph type="body" idx="5"/>
+          </p:nvPr>
+        </p:nvSpPr>
+        <p:spPr/>
+        <p:txBody>
+          <a:bodyPr/>
+          <a:lstStyle/>
+          <a:p>
+            <a:pPr/>
+            <a:r>
+              <a:rPr lang="th-TH" dirty="0"/>
+              <a:t>01</a:t>
+            </a:r>
+          </a:p>
+        </p:txBody>
+      </p:sp>
+      <p:sp>
+        <p:nvSpPr>
+          <p:cNvPr id="8" name="PP"/>
+          <p:cNvSpPr>
+            <a:spLocks noGrp="1"/>
+          </p:cNvSpPr>
+          <p:nvPr>
+            <p:ph type="body" idx="6"/>
+          </p:nvPr>
+        </p:nvSpPr>
+        <p:spPr/>
+        <p:txBody>
+          <a:bodyPr/>
+          <a:lstStyle/>
+          <a:p>
+            <a:pPr/>
+            <a:r>
+              <a:rPr lang="th-TH" dirty="0"/>
+              <a:t>Preparation Phase</a:t>
+            </a:r>
+          </a:p>
+        </p:txBody>
+      </p:sp>
+      <p:sp>
+        <p:nvSpPr>
+          <p:cNvPr id="9" name="PI"/>
+          <p:cNvSpPr>
+            <a:spLocks noGrp="1"/>
+          </p:cNvSpPr>
+          <p:nvPr>
+            <p:ph type="body" idx="7"/>
+          </p:nvPr>
+        </p:nvSpPr>
+        <p:spPr/>
+        <p:txBody>
+          <a:bodyPr/>
+          <a:lstStyle/>
+          <a:p>
+            <a:pPr/>
+            <a:r>
+              <a:rPr lang="th-TH" dirty="0"/>
+              <a:t>สรุปสเปกเครื่องและบริการคลาวด์ที่ต้องเตรียมให้พร้อมก่อนเริ่มงานพัฒนา</a:t>
+            </a:r>
+          </a:p>
+        </p:txBody>
+      </p:sp>
+      <p:sp>
+        <p:nvSpPr>
+          <p:cNvPr id="10" name="PB"/>
+          <p:cNvSpPr>
+            <a:spLocks noGrp="1"/>
+          </p:cNvSpPr>
+          <p:nvPr>
+            <p:ph type="body" idx="8"/>
+          </p:nvPr>
+        </p:nvSpPr>
+        <p:spPr/>
+        <p:txBody>
+          <a:bodyPr/>
+          <a:lstStyle/>
+          <a:p>
+            <a:pPr/>
+            <a:r>
+              <a:rPr lang="th-TH" dirty="0"/>
+              <a:t>PRD · 4 คอร์ / 16GB / SSD 300GB</a:t>
+            </a:r>
+          </a:p>
+          <a:p>
+            <a:pPr/>
+            <a:r>
+              <a:rPr lang="th-TH" dirty="0"/>
+              <a:t>QA · 4 คอร์ / 16GB / SSD 150GB</a:t>
+            </a:r>
+          </a:p>
+          <a:p>
+            <a:pPr/>
+            <a:r>
+              <a:rPr lang="th-TH" dirty="0"/>
+              <a:t>Windows Server 2022 ทั้งสองเครื่อง</a:t>
+            </a:r>
+          </a:p>
+          <a:p>
+            <a:pPr/>
+            <a:r>
+              <a:rPr lang="th-TH" dirty="0"/>
+              <a:t>Lambda, EC2 และ Cognito เปิดทั้งสองสภาพแวดล้อม</a:t>
+            </a:r>
+          </a:p>
+        </p:txBody>
+      </p:sp>
+    </p:spTree>
+  </p:cSld>
+  <p:clrMapOvr>
+    <a:masterClrMapping/>
+  </p:clrMapOvr>
+</p:sld>
+</file>
+
+<file path=ppt/slides/slide21.xml><?xml version="1.0" encoding="utf-8"?>
 <p:sld xmlns:a="http://schemas.openxmlformats.org/drawingml/2006/main" xmlns:r="http://schemas.openxmlformats.org/officeDocument/2006/relationships" xmlns:p="http://schemas.openxmlformats.org/presentationml/2006/main">
   <p:cSld name="">
     <p:spTree>
@@ -26491,7 +29235,7 @@
 </p:sld>
 </file>
 
-<file path=ppt/slides/slide21.xml><?xml version="1.0" encoding="utf-8"?>
+<file path=ppt/slides/slide22.xml><?xml version="1.0" encoding="utf-8"?>
 <p:sld xmlns:a="http://schemas.openxmlformats.org/drawingml/2006/main" xmlns:r="http://schemas.openxmlformats.org/officeDocument/2006/relationships" xmlns:p="http://schemas.openxmlformats.org/presentationml/2006/main">
   <p:cSld name="">
     <p:spTree>

--- a/NCT-Slide-Template-Corp-Demo.pptx
+++ b/NCT-Slide-Template-Corp-Demo.pptx
@@ -27,6 +27,7 @@
     <p:sldId id="275" r:id="rId21"/>
     <p:sldId id="276" r:id="rId22"/>
     <p:sldId id="277" r:id="rId23"/>
+    <p:sldId id="278" r:id="rId24"/>
   </p:sldIdLst>
   <p:sldSz cx="12192000" cy="6858000"/>
   <p:notesSz cx="6858000" cy="9144000"/>
@@ -397,6 +398,394 @@
 </file>
 
 <file path=ppt/charts/chart2.xml><?xml version="1.0" encoding="utf-8"?>
+<c:chartSpace xmlns:c="http://schemas.openxmlformats.org/drawingml/2006/chart" xmlns:a="http://schemas.openxmlformats.org/drawingml/2006/main" xmlns:r="http://schemas.openxmlformats.org/officeDocument/2006/relationships">
+  <c:roundedCorners val="0"/>
+  <c:chart>
+    <c:autoTitleDeleted val="1"/>
+    <c:plotArea>
+      <c:layout/>
+      <c:lineChart>
+        <c:grouping val="standard"/>
+        <c:varyColors val="0"/>
+        <c:ser>
+          <c:idx val="0"/>
+          <c:order val="0"/>
+          <c:tx>
+            <c:strRef>
+              <c:f>Sheet1!$B$1</c:f>
+              <c:strCache>
+                <c:ptCount val="1"/>
+                <c:pt idx="0">
+                  <c:v>เอกสารเข้า</c:v>
+                </c:pt>
+              </c:strCache>
+            </c:strRef>
+          </c:tx>
+          <c:spPr>
+            <a:ln w="19050" cap="rnd">
+              <a:solidFill>
+                <a:srgbClr val="2A5EA0"/>
+              </a:solidFill>
+              <a:round/>
+            </a:ln>
+          </c:spPr>
+          <c:marker>
+            <c:symbol val="none"/>
+          </c:marker>
+          <c:dPt>
+            <c:idx val="5"/>
+            <c:marker>
+              <c:symbol val="circle"/>
+              <c:size val="7"/>
+              <c:spPr>
+                <a:solidFill>
+                  <a:srgbClr val="2A5EA0"/>
+                </a:solidFill>
+                <a:ln w="19050">
+                  <a:solidFill>
+                    <a:srgbClr val="FFFFFF"/>
+                  </a:solidFill>
+                </a:ln>
+              </c:spPr>
+            </c:marker>
+            <c:bubble3D val="0"/>
+          </c:dPt>
+          <c:dLbls>
+            <c:dLbl>
+              <c:idx val="5"/>
+              <c:numFmt formatCode="#,##0" sourceLinked="0"/>
+              <c:spPr>
+                <a:noFill/>
+                <a:ln>
+                  <a:noFill/>
+                </a:ln>
+              </c:spPr>
+              <c:txPr>
+                <a:bodyPr/>
+                <a:lstStyle/>
+                <a:p>
+                  <a:pPr>
+                    <a:defRPr sz="1400" b="1">
+                      <a:solidFill>
+                        <a:srgbClr val="333333"/>
+                      </a:solidFill>
+                      <a:latin typeface="+mn-lt"/>
+                      <a:ea typeface="+mn-ea"/>
+                      <a:cs typeface="+mn-cs"/>
+                    </a:defRPr>
+                  </a:pPr>
+                  <a:endParaRPr lang="th-TH"/>
+                </a:p>
+              </c:txPr>
+              <c:dLblPos val="r"/>
+              <c:showLegendKey val="0"/>
+              <c:showVal val="1"/>
+              <c:showCatName val="0"/>
+              <c:showSerName val="0"/>
+              <c:showPercent val="0"/>
+              <c:showBubbleSize val="0"/>
+            </c:dLbl>
+            <c:showLegendKey val="0"/>
+            <c:showVal val="0"/>
+            <c:showCatName val="0"/>
+            <c:showSerName val="0"/>
+            <c:showPercent val="0"/>
+            <c:showBubbleSize val="0"/>
+          </c:dLbls>
+          <c:cat>
+            <c:strRef>
+              <c:f>Sheet1!$A$2:$A$7</c:f>
+              <c:strCache>
+                <c:ptCount val="6"/>
+                <c:pt idx="0">
+                  <c:v>ม.ค.</c:v>
+                </c:pt>
+                <c:pt idx="1">
+                  <c:v>ก.พ.</c:v>
+                </c:pt>
+                <c:pt idx="2">
+                  <c:v>มี.ค.</c:v>
+                </c:pt>
+                <c:pt idx="3">
+                  <c:v>เม.ย.</c:v>
+                </c:pt>
+                <c:pt idx="4">
+                  <c:v>พ.ค.</c:v>
+                </c:pt>
+                <c:pt idx="5">
+                  <c:v>มิ.ย.</c:v>
+                </c:pt>
+              </c:strCache>
+            </c:strRef>
+          </c:cat>
+          <c:val>
+            <c:numRef>
+              <c:f>Sheet1!$B$2:$B$7</c:f>
+              <c:numCache>
+                <c:formatCode>General</c:formatCode>
+                <c:ptCount val="6"/>
+                <c:pt idx="0">
+                  <c:v>1000</c:v>
+                </c:pt>
+                <c:pt idx="1">
+                  <c:v>1100</c:v>
+                </c:pt>
+                <c:pt idx="2">
+                  <c:v>1000</c:v>
+                </c:pt>
+                <c:pt idx="3">
+                  <c:v>1200</c:v>
+                </c:pt>
+                <c:pt idx="4">
+                  <c:v>1350</c:v>
+                </c:pt>
+                <c:pt idx="5">
+                  <c:v>1150</c:v>
+                </c:pt>
+              </c:numCache>
+            </c:numRef>
+          </c:val>
+          <c:smooth val="0"/>
+        </c:ser>
+        <c:ser>
+          <c:idx val="1"/>
+          <c:order val="1"/>
+          <c:tx>
+            <c:strRef>
+              <c:f>Sheet1!$C$1</c:f>
+              <c:strCache>
+                <c:ptCount val="1"/>
+                <c:pt idx="0">
+                  <c:v>กำลังคีย์ 1,200 ใบ</c:v>
+                </c:pt>
+              </c:strCache>
+            </c:strRef>
+          </c:tx>
+          <c:spPr>
+            <a:ln w="9525">
+              <a:solidFill>
+                <a:srgbClr val="A4A4A4"/>
+              </a:solidFill>
+            </a:ln>
+          </c:spPr>
+          <c:marker>
+            <c:symbol val="none"/>
+          </c:marker>
+          <c:dLbls>
+            <c:dLbl>
+              <c:idx val="0"/>
+              <c:numFmt formatCode="#,##0" sourceLinked="0"/>
+              <c:spPr>
+                <a:noFill/>
+                <a:ln>
+                  <a:noFill/>
+                </a:ln>
+              </c:spPr>
+              <c:txPr>
+                <a:bodyPr/>
+                <a:lstStyle/>
+                <a:p>
+                  <a:pPr>
+                    <a:defRPr sz="1200">
+                      <a:solidFill>
+                        <a:srgbClr val="5F5F5F"/>
+                      </a:solidFill>
+                      <a:latin typeface="+mn-lt"/>
+                      <a:ea typeface="+mn-ea"/>
+                      <a:cs typeface="+mn-cs"/>
+                    </a:defRPr>
+                  </a:pPr>
+                  <a:endParaRPr lang="th-TH"/>
+                </a:p>
+              </c:txPr>
+              <c:dLblPos val="t"/>
+              <c:showLegendKey val="0"/>
+              <c:showVal val="0"/>
+              <c:showCatName val="0"/>
+              <c:showSerName val="1"/>
+              <c:showPercent val="0"/>
+              <c:showBubbleSize val="0"/>
+            </c:dLbl>
+            <c:showLegendKey val="0"/>
+            <c:showVal val="0"/>
+            <c:showCatName val="0"/>
+            <c:showSerName val="0"/>
+            <c:showPercent val="0"/>
+            <c:showBubbleSize val="0"/>
+          </c:dLbls>
+          <c:cat>
+            <c:strRef>
+              <c:f>Sheet1!$A$2:$A$7</c:f>
+              <c:strCache>
+                <c:ptCount val="6"/>
+                <c:pt idx="0">
+                  <c:v>ม.ค.</c:v>
+                </c:pt>
+                <c:pt idx="1">
+                  <c:v>ก.พ.</c:v>
+                </c:pt>
+                <c:pt idx="2">
+                  <c:v>มี.ค.</c:v>
+                </c:pt>
+                <c:pt idx="3">
+                  <c:v>เม.ย.</c:v>
+                </c:pt>
+                <c:pt idx="4">
+                  <c:v>พ.ค.</c:v>
+                </c:pt>
+                <c:pt idx="5">
+                  <c:v>มิ.ย.</c:v>
+                </c:pt>
+              </c:strCache>
+            </c:strRef>
+          </c:cat>
+          <c:val>
+            <c:numRef>
+              <c:f>Sheet1!$C$2:$C$7</c:f>
+              <c:numCache>
+                <c:formatCode>General</c:formatCode>
+                <c:ptCount val="6"/>
+                <c:pt idx="0">
+                  <c:v>1200</c:v>
+                </c:pt>
+                <c:pt idx="1">
+                  <c:v>1200</c:v>
+                </c:pt>
+                <c:pt idx="2">
+                  <c:v>1200</c:v>
+                </c:pt>
+                <c:pt idx="3">
+                  <c:v>1200</c:v>
+                </c:pt>
+                <c:pt idx="4">
+                  <c:v>1200</c:v>
+                </c:pt>
+                <c:pt idx="5">
+                  <c:v>1200</c:v>
+                </c:pt>
+              </c:numCache>
+            </c:numRef>
+          </c:val>
+          <c:smooth val="0"/>
+        </c:ser>
+        <c:marker val="1"/>
+        <c:axId val="23001"/>
+        <c:axId val="23002"/>
+      </c:lineChart>
+      <c:catAx>
+        <c:axId val="23001"/>
+        <c:scaling>
+          <c:orientation val="minMax"/>
+        </c:scaling>
+        <c:delete val="0"/>
+        <c:axPos val="b"/>
+        <c:numFmt formatCode="General" sourceLinked="0"/>
+        <c:majorTickMark val="none"/>
+        <c:minorTickMark val="none"/>
+        <c:tickLblPos val="nextTo"/>
+        <c:spPr>
+          <a:ln w="9525">
+            <a:solidFill>
+              <a:srgbClr val="A4A4A4"/>
+            </a:solidFill>
+          </a:ln>
+        </c:spPr>
+        <c:txPr>
+          <a:bodyPr/>
+          <a:lstStyle/>
+          <a:p>
+            <a:pPr>
+              <a:defRPr sz="1200">
+                <a:solidFill>
+                  <a:srgbClr val="5F5F5F"/>
+                </a:solidFill>
+                <a:latin typeface="+mn-lt"/>
+                <a:ea typeface="+mn-ea"/>
+                <a:cs typeface="+mn-cs"/>
+              </a:defRPr>
+            </a:pPr>
+            <a:endParaRPr lang="th-TH"/>
+          </a:p>
+        </c:txPr>
+        <c:crossAx val="23002"/>
+        <c:crosses val="autoZero"/>
+        <c:auto val="1"/>
+        <c:lblAlgn val="ctr"/>
+        <c:lblOffset val="100"/>
+        <c:noMultiLvlLbl val="0"/>
+      </c:catAx>
+      <c:valAx>
+        <c:axId val="23002"/>
+        <c:scaling>
+          <c:orientation val="minMax"/>
+          <c:max val="1500"/>
+          <c:min val="0"/>
+        </c:scaling>
+        <c:delete val="0"/>
+        <c:axPos val="l"/>
+        <c:majorGridlines>
+          <c:spPr>
+            <a:ln w="9525">
+              <a:solidFill>
+                <a:srgbClr val="E5E5E5"/>
+              </a:solidFill>
+            </a:ln>
+          </c:spPr>
+        </c:majorGridlines>
+        <c:numFmt formatCode="#,##0" sourceLinked="0"/>
+        <c:majorTickMark val="none"/>
+        <c:minorTickMark val="none"/>
+        <c:tickLblPos val="nextTo"/>
+        <c:spPr>
+          <a:ln>
+            <a:noFill/>
+          </a:ln>
+        </c:spPr>
+        <c:txPr>
+          <a:bodyPr/>
+          <a:lstStyle/>
+          <a:p>
+            <a:pPr>
+              <a:defRPr sz="1200">
+                <a:solidFill>
+                  <a:srgbClr val="5F5F5F"/>
+                </a:solidFill>
+                <a:latin typeface="+mn-lt"/>
+                <a:ea typeface="+mn-ea"/>
+                <a:cs typeface="+mn-cs"/>
+              </a:defRPr>
+            </a:pPr>
+            <a:endParaRPr lang="th-TH"/>
+          </a:p>
+        </c:txPr>
+        <c:crossAx val="23001"/>
+        <c:crosses val="autoZero"/>
+        <c:crossBetween val="between"/>
+        <c:majorUnit val="500"/>
+      </c:valAx>
+      <c:spPr>
+        <a:noFill/>
+        <a:ln>
+          <a:noFill/>
+        </a:ln>
+      </c:spPr>
+    </c:plotArea>
+    <c:plotVisOnly val="1"/>
+    <c:dispBlanksAs val="gap"/>
+  </c:chart>
+  <c:spPr>
+    <a:noFill/>
+    <a:ln>
+      <a:noFill/>
+    </a:ln>
+  </c:spPr>
+  <c:externalData r:id="rId1">
+    <c:autoUpdate val="0"/>
+  </c:externalData>
+</c:chartSpace>
+</file>
+
+<file path=ppt/charts/chart3.xml><?xml version="1.0" encoding="utf-8"?>
 <c:chartSpace xmlns:c="http://schemas.openxmlformats.org/drawingml/2006/chart" xmlns:a="http://schemas.openxmlformats.org/drawingml/2006/main" xmlns:r="http://schemas.openxmlformats.org/officeDocument/2006/relationships">
   <c:roundedCorners val="0"/>
   <c:chart>
@@ -682,7 +1071,7 @@
 </c:chartSpace>
 </file>
 
-<file path=ppt/charts/chart3.xml><?xml version="1.0" encoding="utf-8"?>
+<file path=ppt/charts/chart4.xml><?xml version="1.0" encoding="utf-8"?>
 <c:chartSpace xmlns:c="http://schemas.openxmlformats.org/drawingml/2006/chart" xmlns:a="http://schemas.openxmlformats.org/drawingml/2006/main" xmlns:r="http://schemas.openxmlformats.org/officeDocument/2006/relationships">
   <c:roundedCorners val="0"/>
   <c:chart>
@@ -17546,6 +17935,1234 @@
 </p:sldLayout>
 </file>
 
+<file path=ppt/slideLayouts/slideLayout23.xml><?xml version="1.0" encoding="utf-8"?>
+<p:sldLayout xmlns:a="http://schemas.openxmlformats.org/drawingml/2006/main" xmlns:r="http://schemas.openxmlformats.org/officeDocument/2006/relationships" xmlns:p="http://schemas.openxmlformats.org/presentationml/2006/main" type="chart" showMasterSp="0" preserve="1">
+  <p:cSld name="23 KPI + Trend">
+    <p:bg>
+      <p:bgPr>
+        <a:solidFill>
+          <a:srgbClr val="FFFFFF"/>
+        </a:solidFill>
+        <a:effectLst/>
+      </p:bgPr>
+    </p:bg>
+    <p:spTree>
+      <p:nvGrpSpPr>
+        <p:cNvPr id="1" name=""/>
+        <p:cNvGrpSpPr/>
+        <p:nvPr/>
+      </p:nvGrpSpPr>
+      <p:grpSpPr>
+        <a:xfrm>
+          <a:off x="0" y="0"/>
+          <a:ext cx="0" cy="0"/>
+          <a:chOff x="0" y="0"/>
+          <a:chExt cx="0" cy="0"/>
+        </a:xfrm>
+      </p:grpSpPr>
+      <p:sp>
+        <p:nvSpPr>
+          <p:cNvPr id="10" name="Title Placeholder"/>
+          <p:cNvSpPr>
+            <a:spLocks noGrp="1"/>
+          </p:cNvSpPr>
+          <p:nvPr>
+            <p:ph type="title"/>
+          </p:nvPr>
+        </p:nvSpPr>
+        <p:spPr>
+          <a:xfrm>
+            <a:off x="914400" y="548640"/>
+            <a:ext cx="10363200" cy="731520"/>
+          </a:xfrm>
+          <a:prstGeom prst="rect">
+            <a:avLst/>
+          </a:prstGeom>
+        </p:spPr>
+        <p:txBody>
+          <a:bodyPr wrap="square" anchor="b" lIns="0" tIns="0" rIns="0" bIns="0" rtlCol="0"/>
+          <a:lstStyle>
+            <a:lvl1pPr algn="l" marL="0" indent="0">
+              <a:lnSpc>
+                <a:spcPct val="108000"/>
+              </a:lnSpc>
+              <a:buNone/>
+              <a:defRPr lang="th-TH" sz="3200" b="1" dirty="0">
+                <a:solidFill>
+                  <a:srgbClr val="23436D"/>
+                </a:solidFill>
+                <a:latin typeface="+mj-lt"/>
+                <a:ea typeface="+mj-ea"/>
+                <a:cs typeface="+mj-cs"/>
+              </a:defRPr>
+            </a:lvl1pPr>
+          </a:lstStyle>
+          <a:p>
+            <a:pPr algn="l" marL="0" indent="0">
+              <a:lnSpc>
+                <a:spcPct val="108000"/>
+              </a:lnSpc>
+              <a:buNone/>
+            </a:pPr>
+            <a:r>
+              <a:rPr lang="th-TH" sz="3200" b="1" dirty="0">
+                <a:solidFill>
+                  <a:srgbClr val="23436D"/>
+                </a:solidFill>
+                <a:latin typeface="+mj-lt"/>
+                <a:ea typeface="+mj-ea"/>
+                <a:cs typeface="+mj-cs"/>
+              </a:rPr>
+              <a:t>ชื่อสไลด์</a:t>
+            </a:r>
+          </a:p>
+        </p:txBody>
+      </p:sp>
+      <p:sp>
+        <p:nvSpPr>
+          <p:cNvPr id="11" name="Accent Rule"/>
+          <p:cNvSpPr/>
+          <p:nvPr/>
+        </p:nvSpPr>
+        <p:spPr>
+          <a:xfrm>
+            <a:off x="0" y="1371600"/>
+            <a:ext cx="12192000" cy="68580"/>
+          </a:xfrm>
+          <a:prstGeom prst="rect">
+            <a:avLst/>
+          </a:prstGeom>
+          <a:solidFill>
+            <a:srgbClr val="216B7F"/>
+          </a:solidFill>
+          <a:ln>
+            <a:noFill/>
+          </a:ln>
+        </p:spPr>
+        <p:txBody>
+          <a:bodyPr/>
+          <a:lstStyle/>
+          <a:p>
+            <a:endParaRPr lang="th-TH"/>
+          </a:p>
+        </p:txBody>
+      </p:sp>
+      <p:sp>
+        <p:nvSpPr>
+          <p:cNvPr id="12" name="Tile 1 Rule"/>
+          <p:cNvSpPr/>
+          <p:nvPr/>
+        </p:nvSpPr>
+        <p:spPr>
+          <a:xfrm>
+            <a:off x="914400" y="1691640"/>
+            <a:ext cx="3332480" cy="45720"/>
+          </a:xfrm>
+          <a:prstGeom prst="rect">
+            <a:avLst/>
+          </a:prstGeom>
+          <a:solidFill>
+            <a:srgbClr val="2A5EA0"/>
+          </a:solidFill>
+          <a:ln>
+            <a:noFill/>
+          </a:ln>
+        </p:spPr>
+        <p:txBody>
+          <a:bodyPr/>
+          <a:lstStyle/>
+          <a:p>
+            <a:endParaRPr lang="th-TH"/>
+          </a:p>
+        </p:txBody>
+      </p:sp>
+      <p:sp>
+        <p:nvSpPr>
+          <p:cNvPr id="13" name="Tile 1 Label"/>
+          <p:cNvSpPr>
+            <a:spLocks noGrp="1"/>
+          </p:cNvSpPr>
+          <p:nvPr>
+            <p:ph type="body" idx="20"/>
+          </p:nvPr>
+        </p:nvSpPr>
+        <p:spPr>
+          <a:xfrm>
+            <a:off x="914400" y="1810512"/>
+            <a:ext cx="3332480" cy="274320"/>
+          </a:xfrm>
+          <a:prstGeom prst="rect">
+            <a:avLst/>
+          </a:prstGeom>
+        </p:spPr>
+        <p:txBody>
+          <a:bodyPr wrap="square" anchor="t" lIns="0" tIns="0" rIns="0" bIns="0" rtlCol="0"/>
+          <a:lstStyle>
+            <a:lvl1pPr algn="l" marL="0" indent="0">
+              <a:lnSpc>
+                <a:spcPct val="130000"/>
+              </a:lnSpc>
+              <a:buNone/>
+              <a:defRPr lang="th-TH" sz="1200" b="1" spc="120" dirty="0">
+                <a:solidFill>
+                  <a:srgbClr val="5F5F5F"/>
+                </a:solidFill>
+                <a:latin typeface="+mn-lt"/>
+                <a:ea typeface="+mn-ea"/>
+                <a:cs typeface="+mn-cs"/>
+              </a:defRPr>
+            </a:lvl1pPr>
+          </a:lstStyle>
+          <a:p>
+            <a:pPr algn="l" marL="0" indent="0">
+              <a:lnSpc>
+                <a:spcPct val="130000"/>
+              </a:lnSpc>
+              <a:buNone/>
+            </a:pPr>
+            <a:r>
+              <a:rPr lang="th-TH" sz="1200" b="1" spc="120" dirty="0">
+                <a:solidFill>
+                  <a:srgbClr val="5F5F5F"/>
+                </a:solidFill>
+                <a:latin typeface="+mn-lt"/>
+                <a:ea typeface="+mn-ea"/>
+                <a:cs typeface="+mn-cs"/>
+              </a:rPr>
+              <a:t>ตัวเลขนี้วัดอะไร</a:t>
+            </a:r>
+          </a:p>
+        </p:txBody>
+      </p:sp>
+      <p:sp>
+        <p:nvSpPr>
+          <p:cNvPr id="14" name="Tile 1 Value"/>
+          <p:cNvSpPr>
+            <a:spLocks noGrp="1"/>
+          </p:cNvSpPr>
+          <p:nvPr>
+            <p:ph type="body" idx="21"/>
+          </p:nvPr>
+        </p:nvSpPr>
+        <p:spPr>
+          <a:xfrm>
+            <a:off x="914400" y="2084832"/>
+            <a:ext cx="3332480" cy="640080"/>
+          </a:xfrm>
+          <a:prstGeom prst="rect">
+            <a:avLst/>
+          </a:prstGeom>
+        </p:spPr>
+        <p:txBody>
+          <a:bodyPr wrap="square" anchor="b" lIns="0" tIns="0" rIns="0" bIns="0" rtlCol="0"/>
+          <a:lstStyle>
+            <a:lvl1pPr algn="l" marL="0" indent="0">
+              <a:lnSpc>
+                <a:spcPct val="100000"/>
+              </a:lnSpc>
+              <a:buNone/>
+              <a:defRPr lang="th-TH" sz="4000" b="1" dirty="0">
+                <a:solidFill>
+                  <a:srgbClr val="23436D"/>
+                </a:solidFill>
+                <a:latin typeface="+mj-lt"/>
+                <a:ea typeface="+mj-ea"/>
+                <a:cs typeface="+mj-cs"/>
+              </a:defRPr>
+            </a:lvl1pPr>
+          </a:lstStyle>
+          <a:p>
+            <a:pPr algn="l" marL="0" indent="0">
+              <a:lnSpc>
+                <a:spcPct val="100000"/>
+              </a:lnSpc>
+              <a:buNone/>
+            </a:pPr>
+            <a:r>
+              <a:rPr lang="th-TH" sz="4000" b="1" dirty="0">
+                <a:solidFill>
+                  <a:srgbClr val="23436D"/>
+                </a:solidFill>
+                <a:latin typeface="+mj-lt"/>
+                <a:ea typeface="+mj-ea"/>
+                <a:cs typeface="+mj-cs"/>
+              </a:rPr>
+              <a:t>0</a:t>
+            </a:r>
+          </a:p>
+        </p:txBody>
+      </p:sp>
+      <p:sp>
+        <p:nvSpPr>
+          <p:cNvPr id="15" name="Tile 1 Delta"/>
+          <p:cNvSpPr>
+            <a:spLocks noGrp="1"/>
+          </p:cNvSpPr>
+          <p:nvPr>
+            <p:ph type="body" idx="22"/>
+          </p:nvPr>
+        </p:nvSpPr>
+        <p:spPr>
+          <a:xfrm>
+            <a:off x="914400" y="2743200"/>
+            <a:ext cx="1666240" cy="274320"/>
+          </a:xfrm>
+          <a:prstGeom prst="rect">
+            <a:avLst/>
+          </a:prstGeom>
+        </p:spPr>
+        <p:txBody>
+          <a:bodyPr wrap="square" anchor="ctr" lIns="0" tIns="0" rIns="0" bIns="0" rtlCol="0"/>
+          <a:lstStyle>
+            <a:lvl1pPr algn="l" marL="0" indent="0">
+              <a:lnSpc>
+                <a:spcPct val="100000"/>
+              </a:lnSpc>
+              <a:buNone/>
+              <a:defRPr lang="th-TH" sz="1200" dirty="0">
+                <a:solidFill>
+                  <a:srgbClr val="333333"/>
+                </a:solidFill>
+                <a:latin typeface="+mn-lt"/>
+                <a:ea typeface="+mn-ea"/>
+                <a:cs typeface="+mn-cs"/>
+              </a:defRPr>
+            </a:lvl1pPr>
+          </a:lstStyle>
+          <a:p>
+            <a:pPr algn="l" marL="0" indent="0">
+              <a:lnSpc>
+                <a:spcPct val="100000"/>
+              </a:lnSpc>
+              <a:buNone/>
+            </a:pPr>
+            <a:r>
+              <a:rPr lang="th-TH" sz="1200" dirty="0">
+                <a:solidFill>
+                  <a:srgbClr val="333333"/>
+                </a:solidFill>
+                <a:latin typeface="+mn-lt"/>
+                <a:ea typeface="+mn-ea"/>
+                <a:cs typeface="+mn-cs"/>
+              </a:rPr>
+              <a:t>▲ 0% จาก …</a:t>
+            </a:r>
+          </a:p>
+        </p:txBody>
+      </p:sp>
+      <p:sp>
+        <p:nvSpPr>
+          <p:cNvPr id="16" name="Tile 2 Rule"/>
+          <p:cNvSpPr/>
+          <p:nvPr/>
+        </p:nvSpPr>
+        <p:spPr>
+          <a:xfrm>
+            <a:off x="4429760" y="1691640"/>
+            <a:ext cx="3332480" cy="12700"/>
+          </a:xfrm>
+          <a:prstGeom prst="rect">
+            <a:avLst/>
+          </a:prstGeom>
+          <a:solidFill>
+            <a:srgbClr val="E5E5E5"/>
+          </a:solidFill>
+          <a:ln>
+            <a:noFill/>
+          </a:ln>
+        </p:spPr>
+        <p:txBody>
+          <a:bodyPr/>
+          <a:lstStyle/>
+          <a:p>
+            <a:endParaRPr lang="th-TH"/>
+          </a:p>
+        </p:txBody>
+      </p:sp>
+      <p:sp>
+        <p:nvSpPr>
+          <p:cNvPr id="17" name="Tile 2 Label"/>
+          <p:cNvSpPr>
+            <a:spLocks noGrp="1"/>
+          </p:cNvSpPr>
+          <p:nvPr>
+            <p:ph type="body" idx="23"/>
+          </p:nvPr>
+        </p:nvSpPr>
+        <p:spPr>
+          <a:xfrm>
+            <a:off x="4429760" y="1810512"/>
+            <a:ext cx="3332480" cy="274320"/>
+          </a:xfrm>
+          <a:prstGeom prst="rect">
+            <a:avLst/>
+          </a:prstGeom>
+        </p:spPr>
+        <p:txBody>
+          <a:bodyPr wrap="square" anchor="t" lIns="0" tIns="0" rIns="0" bIns="0" rtlCol="0"/>
+          <a:lstStyle>
+            <a:lvl1pPr algn="l" marL="0" indent="0">
+              <a:lnSpc>
+                <a:spcPct val="130000"/>
+              </a:lnSpc>
+              <a:buNone/>
+              <a:defRPr lang="th-TH" sz="1200" b="1" spc="120" dirty="0">
+                <a:solidFill>
+                  <a:srgbClr val="5F5F5F"/>
+                </a:solidFill>
+                <a:latin typeface="+mn-lt"/>
+                <a:ea typeface="+mn-ea"/>
+                <a:cs typeface="+mn-cs"/>
+              </a:defRPr>
+            </a:lvl1pPr>
+          </a:lstStyle>
+          <a:p>
+            <a:pPr algn="l" marL="0" indent="0">
+              <a:lnSpc>
+                <a:spcPct val="130000"/>
+              </a:lnSpc>
+              <a:buNone/>
+            </a:pPr>
+            <a:r>
+              <a:rPr lang="th-TH" sz="1200" b="1" spc="120" dirty="0">
+                <a:solidFill>
+                  <a:srgbClr val="5F5F5F"/>
+                </a:solidFill>
+                <a:latin typeface="+mn-lt"/>
+                <a:ea typeface="+mn-ea"/>
+                <a:cs typeface="+mn-cs"/>
+              </a:rPr>
+              <a:t>ตัวเลขนี้วัดอะไร</a:t>
+            </a:r>
+          </a:p>
+        </p:txBody>
+      </p:sp>
+      <p:sp>
+        <p:nvSpPr>
+          <p:cNvPr id="18" name="Tile 2 Value"/>
+          <p:cNvSpPr>
+            <a:spLocks noGrp="1"/>
+          </p:cNvSpPr>
+          <p:nvPr>
+            <p:ph type="body" idx="24"/>
+          </p:nvPr>
+        </p:nvSpPr>
+        <p:spPr>
+          <a:xfrm>
+            <a:off x="4429760" y="2084832"/>
+            <a:ext cx="3332480" cy="640080"/>
+          </a:xfrm>
+          <a:prstGeom prst="rect">
+            <a:avLst/>
+          </a:prstGeom>
+        </p:spPr>
+        <p:txBody>
+          <a:bodyPr wrap="square" anchor="b" lIns="0" tIns="0" rIns="0" bIns="0" rtlCol="0"/>
+          <a:lstStyle>
+            <a:lvl1pPr algn="l" marL="0" indent="0">
+              <a:lnSpc>
+                <a:spcPct val="100000"/>
+              </a:lnSpc>
+              <a:buNone/>
+              <a:defRPr lang="th-TH" sz="4000" b="1" dirty="0">
+                <a:solidFill>
+                  <a:srgbClr val="23436D"/>
+                </a:solidFill>
+                <a:latin typeface="+mj-lt"/>
+                <a:ea typeface="+mj-ea"/>
+                <a:cs typeface="+mj-cs"/>
+              </a:defRPr>
+            </a:lvl1pPr>
+          </a:lstStyle>
+          <a:p>
+            <a:pPr algn="l" marL="0" indent="0">
+              <a:lnSpc>
+                <a:spcPct val="100000"/>
+              </a:lnSpc>
+              <a:buNone/>
+            </a:pPr>
+            <a:r>
+              <a:rPr lang="th-TH" sz="4000" b="1" dirty="0">
+                <a:solidFill>
+                  <a:srgbClr val="23436D"/>
+                </a:solidFill>
+                <a:latin typeface="+mj-lt"/>
+                <a:ea typeface="+mj-ea"/>
+                <a:cs typeface="+mj-cs"/>
+              </a:rPr>
+              <a:t>0</a:t>
+            </a:r>
+          </a:p>
+        </p:txBody>
+      </p:sp>
+      <p:sp>
+        <p:nvSpPr>
+          <p:cNvPr id="19" name="Tile 2 Delta"/>
+          <p:cNvSpPr>
+            <a:spLocks noGrp="1"/>
+          </p:cNvSpPr>
+          <p:nvPr>
+            <p:ph type="body" idx="25"/>
+          </p:nvPr>
+        </p:nvSpPr>
+        <p:spPr>
+          <a:xfrm>
+            <a:off x="4429760" y="2743200"/>
+            <a:ext cx="1666240" cy="274320"/>
+          </a:xfrm>
+          <a:prstGeom prst="rect">
+            <a:avLst/>
+          </a:prstGeom>
+        </p:spPr>
+        <p:txBody>
+          <a:bodyPr wrap="square" anchor="ctr" lIns="0" tIns="0" rIns="0" bIns="0" rtlCol="0"/>
+          <a:lstStyle>
+            <a:lvl1pPr algn="l" marL="0" indent="0">
+              <a:lnSpc>
+                <a:spcPct val="100000"/>
+              </a:lnSpc>
+              <a:buNone/>
+              <a:defRPr lang="th-TH" sz="1200" dirty="0">
+                <a:solidFill>
+                  <a:srgbClr val="333333"/>
+                </a:solidFill>
+                <a:latin typeface="+mn-lt"/>
+                <a:ea typeface="+mn-ea"/>
+                <a:cs typeface="+mn-cs"/>
+              </a:defRPr>
+            </a:lvl1pPr>
+          </a:lstStyle>
+          <a:p>
+            <a:pPr algn="l" marL="0" indent="0">
+              <a:lnSpc>
+                <a:spcPct val="100000"/>
+              </a:lnSpc>
+              <a:buNone/>
+            </a:pPr>
+            <a:r>
+              <a:rPr lang="th-TH" sz="1200" dirty="0">
+                <a:solidFill>
+                  <a:srgbClr val="333333"/>
+                </a:solidFill>
+                <a:latin typeface="+mn-lt"/>
+                <a:ea typeface="+mn-ea"/>
+                <a:cs typeface="+mn-cs"/>
+              </a:rPr>
+              <a:t>▲ 0% จาก …</a:t>
+            </a:r>
+          </a:p>
+        </p:txBody>
+      </p:sp>
+      <p:sp>
+        <p:nvSpPr>
+          <p:cNvPr id="20" name="Tile 3 Rule"/>
+          <p:cNvSpPr/>
+          <p:nvPr/>
+        </p:nvSpPr>
+        <p:spPr>
+          <a:xfrm>
+            <a:off x="7945120" y="1691640"/>
+            <a:ext cx="3332480" cy="12700"/>
+          </a:xfrm>
+          <a:prstGeom prst="rect">
+            <a:avLst/>
+          </a:prstGeom>
+          <a:solidFill>
+            <a:srgbClr val="E5E5E5"/>
+          </a:solidFill>
+          <a:ln>
+            <a:noFill/>
+          </a:ln>
+        </p:spPr>
+        <p:txBody>
+          <a:bodyPr/>
+          <a:lstStyle/>
+          <a:p>
+            <a:endParaRPr lang="th-TH"/>
+          </a:p>
+        </p:txBody>
+      </p:sp>
+      <p:sp>
+        <p:nvSpPr>
+          <p:cNvPr id="21" name="Tile 3 Label"/>
+          <p:cNvSpPr>
+            <a:spLocks noGrp="1"/>
+          </p:cNvSpPr>
+          <p:nvPr>
+            <p:ph type="body" idx="26"/>
+          </p:nvPr>
+        </p:nvSpPr>
+        <p:spPr>
+          <a:xfrm>
+            <a:off x="7945120" y="1810512"/>
+            <a:ext cx="3332480" cy="274320"/>
+          </a:xfrm>
+          <a:prstGeom prst="rect">
+            <a:avLst/>
+          </a:prstGeom>
+        </p:spPr>
+        <p:txBody>
+          <a:bodyPr wrap="square" anchor="t" lIns="0" tIns="0" rIns="0" bIns="0" rtlCol="0"/>
+          <a:lstStyle>
+            <a:lvl1pPr algn="l" marL="0" indent="0">
+              <a:lnSpc>
+                <a:spcPct val="130000"/>
+              </a:lnSpc>
+              <a:buNone/>
+              <a:defRPr lang="th-TH" sz="1200" b="1" spc="120" dirty="0">
+                <a:solidFill>
+                  <a:srgbClr val="5F5F5F"/>
+                </a:solidFill>
+                <a:latin typeface="+mn-lt"/>
+                <a:ea typeface="+mn-ea"/>
+                <a:cs typeface="+mn-cs"/>
+              </a:defRPr>
+            </a:lvl1pPr>
+          </a:lstStyle>
+          <a:p>
+            <a:pPr algn="l" marL="0" indent="0">
+              <a:lnSpc>
+                <a:spcPct val="130000"/>
+              </a:lnSpc>
+              <a:buNone/>
+            </a:pPr>
+            <a:r>
+              <a:rPr lang="th-TH" sz="1200" b="1" spc="120" dirty="0">
+                <a:solidFill>
+                  <a:srgbClr val="5F5F5F"/>
+                </a:solidFill>
+                <a:latin typeface="+mn-lt"/>
+                <a:ea typeface="+mn-ea"/>
+                <a:cs typeface="+mn-cs"/>
+              </a:rPr>
+              <a:t>ตัวเลขนี้วัดอะไร</a:t>
+            </a:r>
+          </a:p>
+        </p:txBody>
+      </p:sp>
+      <p:sp>
+        <p:nvSpPr>
+          <p:cNvPr id="22" name="Tile 3 Value"/>
+          <p:cNvSpPr>
+            <a:spLocks noGrp="1"/>
+          </p:cNvSpPr>
+          <p:nvPr>
+            <p:ph type="body" idx="27"/>
+          </p:nvPr>
+        </p:nvSpPr>
+        <p:spPr>
+          <a:xfrm>
+            <a:off x="7945120" y="2084832"/>
+            <a:ext cx="3332480" cy="640080"/>
+          </a:xfrm>
+          <a:prstGeom prst="rect">
+            <a:avLst/>
+          </a:prstGeom>
+        </p:spPr>
+        <p:txBody>
+          <a:bodyPr wrap="square" anchor="b" lIns="0" tIns="0" rIns="0" bIns="0" rtlCol="0"/>
+          <a:lstStyle>
+            <a:lvl1pPr algn="l" marL="0" indent="0">
+              <a:lnSpc>
+                <a:spcPct val="100000"/>
+              </a:lnSpc>
+              <a:buNone/>
+              <a:defRPr lang="th-TH" sz="4000" b="1" dirty="0">
+                <a:solidFill>
+                  <a:srgbClr val="23436D"/>
+                </a:solidFill>
+                <a:latin typeface="+mj-lt"/>
+                <a:ea typeface="+mj-ea"/>
+                <a:cs typeface="+mj-cs"/>
+              </a:defRPr>
+            </a:lvl1pPr>
+          </a:lstStyle>
+          <a:p>
+            <a:pPr algn="l" marL="0" indent="0">
+              <a:lnSpc>
+                <a:spcPct val="100000"/>
+              </a:lnSpc>
+              <a:buNone/>
+            </a:pPr>
+            <a:r>
+              <a:rPr lang="th-TH" sz="4000" b="1" dirty="0">
+                <a:solidFill>
+                  <a:srgbClr val="23436D"/>
+                </a:solidFill>
+                <a:latin typeface="+mj-lt"/>
+                <a:ea typeface="+mj-ea"/>
+                <a:cs typeface="+mj-cs"/>
+              </a:rPr>
+              <a:t>0</a:t>
+            </a:r>
+          </a:p>
+        </p:txBody>
+      </p:sp>
+      <p:sp>
+        <p:nvSpPr>
+          <p:cNvPr id="23" name="Tile 3 Delta"/>
+          <p:cNvSpPr>
+            <a:spLocks noGrp="1"/>
+          </p:cNvSpPr>
+          <p:nvPr>
+            <p:ph type="body" idx="28"/>
+          </p:nvPr>
+        </p:nvSpPr>
+        <p:spPr>
+          <a:xfrm>
+            <a:off x="7945120" y="2743200"/>
+            <a:ext cx="1666240" cy="274320"/>
+          </a:xfrm>
+          <a:prstGeom prst="rect">
+            <a:avLst/>
+          </a:prstGeom>
+        </p:spPr>
+        <p:txBody>
+          <a:bodyPr wrap="square" anchor="ctr" lIns="0" tIns="0" rIns="0" bIns="0" rtlCol="0"/>
+          <a:lstStyle>
+            <a:lvl1pPr algn="l" marL="0" indent="0">
+              <a:lnSpc>
+                <a:spcPct val="100000"/>
+              </a:lnSpc>
+              <a:buNone/>
+              <a:defRPr lang="th-TH" sz="1200" dirty="0">
+                <a:solidFill>
+                  <a:srgbClr val="333333"/>
+                </a:solidFill>
+                <a:latin typeface="+mn-lt"/>
+                <a:ea typeface="+mn-ea"/>
+                <a:cs typeface="+mn-cs"/>
+              </a:defRPr>
+            </a:lvl1pPr>
+          </a:lstStyle>
+          <a:p>
+            <a:pPr algn="l" marL="0" indent="0">
+              <a:lnSpc>
+                <a:spcPct val="100000"/>
+              </a:lnSpc>
+              <a:buNone/>
+            </a:pPr>
+            <a:r>
+              <a:rPr lang="th-TH" sz="1200" dirty="0">
+                <a:solidFill>
+                  <a:srgbClr val="333333"/>
+                </a:solidFill>
+                <a:latin typeface="+mn-lt"/>
+                <a:ea typeface="+mn-ea"/>
+                <a:cs typeface="+mn-cs"/>
+              </a:rPr>
+              <a:t>▲ 0% จาก …</a:t>
+            </a:r>
+          </a:p>
+        </p:txBody>
+      </p:sp>
+      <p:sp>
+        <p:nvSpPr>
+          <p:cNvPr id="24" name="Chart Placeholder"/>
+          <p:cNvSpPr>
+            <a:spLocks noGrp="1"/>
+          </p:cNvSpPr>
+          <p:nvPr>
+            <p:ph type="chart" idx="1"/>
+          </p:nvPr>
+        </p:nvSpPr>
+        <p:spPr>
+          <a:xfrm>
+            <a:off x="914400" y="3291840"/>
+            <a:ext cx="10363200" cy="1874520"/>
+          </a:xfrm>
+          <a:prstGeom prst="rect">
+            <a:avLst/>
+          </a:prstGeom>
+        </p:spPr>
+        <p:txBody>
+          <a:bodyPr wrap="square" anchor="ctr" lIns="0" tIns="0" rIns="0" bIns="0" rtlCol="0"/>
+          <a:lstStyle>
+            <a:lvl1pPr algn="l" marL="0" indent="0">
+              <a:lnSpc>
+                <a:spcPct val="100000"/>
+              </a:lnSpc>
+              <a:buNone/>
+              <a:defRPr lang="th-TH" sz="1200" dirty="0">
+                <a:solidFill>
+                  <a:srgbClr val="5F5F5F"/>
+                </a:solidFill>
+                <a:latin typeface="+mn-lt"/>
+                <a:ea typeface="+mn-ea"/>
+                <a:cs typeface="+mn-cs"/>
+              </a:defRPr>
+            </a:lvl1pPr>
+          </a:lstStyle>
+          <a:p>
+            <a:pPr algn="l" marL="0" indent="0">
+              <a:lnSpc>
+                <a:spcPct val="100000"/>
+              </a:lnSpc>
+              <a:buNone/>
+            </a:pPr>
+            <a:endParaRPr lang="th-TH" sz="1200"/>
+          </a:p>
+        </p:txBody>
+      </p:sp>
+      <p:sp>
+        <p:nvSpPr>
+          <p:cNvPr id="25" name="Source"/>
+          <p:cNvSpPr>
+            <a:spLocks noGrp="1"/>
+          </p:cNvSpPr>
+          <p:nvPr>
+            <p:ph type="body" idx="2"/>
+          </p:nvPr>
+        </p:nvSpPr>
+        <p:spPr>
+          <a:xfrm>
+            <a:off x="914400" y="5257800"/>
+            <a:ext cx="10363200" cy="274320"/>
+          </a:xfrm>
+          <a:prstGeom prst="rect">
+            <a:avLst/>
+          </a:prstGeom>
+        </p:spPr>
+        <p:txBody>
+          <a:bodyPr wrap="square" anchor="t" lIns="0" tIns="0" rIns="0" bIns="0" rtlCol="0"/>
+          <a:lstStyle>
+            <a:lvl1pPr algn="l" marL="0" indent="0">
+              <a:lnSpc>
+                <a:spcPct val="130000"/>
+              </a:lnSpc>
+              <a:buNone/>
+              <a:defRPr lang="th-TH" sz="1000" dirty="0">
+                <a:solidFill>
+                  <a:srgbClr val="5F5F5F"/>
+                </a:solidFill>
+                <a:latin typeface="+mn-lt"/>
+                <a:ea typeface="+mn-ea"/>
+                <a:cs typeface="+mn-cs"/>
+              </a:defRPr>
+            </a:lvl1pPr>
+          </a:lstStyle>
+          <a:p>
+            <a:pPr algn="l" marL="0" indent="0">
+              <a:lnSpc>
+                <a:spcPct val="130000"/>
+              </a:lnSpc>
+              <a:buNone/>
+            </a:pPr>
+            <a:r>
+              <a:rPr lang="th-TH" sz="1000" dirty="0">
+                <a:solidFill>
+                  <a:srgbClr val="5F5F5F"/>
+                </a:solidFill>
+                <a:latin typeface="+mn-lt"/>
+                <a:ea typeface="+mn-ea"/>
+                <a:cs typeface="+mn-cs"/>
+              </a:rPr>
+              <a:t>ที่มาของข้อมูล</a:t>
+            </a:r>
+          </a:p>
+        </p:txBody>
+      </p:sp>
+      <p:sp>
+        <p:nvSpPr>
+          <p:cNvPr id="26" name="Takeaway Band"/>
+          <p:cNvSpPr/>
+          <p:nvPr/>
+        </p:nvSpPr>
+        <p:spPr>
+          <a:xfrm>
+            <a:off x="914400" y="5623560"/>
+            <a:ext cx="10363200" cy="411480"/>
+          </a:xfrm>
+          <a:prstGeom prst="rect">
+            <a:avLst/>
+          </a:prstGeom>
+          <a:solidFill>
+            <a:srgbClr val="E8F6F5"/>
+          </a:solidFill>
+          <a:ln>
+            <a:noFill/>
+          </a:ln>
+        </p:spPr>
+        <p:txBody>
+          <a:bodyPr/>
+          <a:lstStyle/>
+          <a:p>
+            <a:endParaRPr lang="th-TH"/>
+          </a:p>
+        </p:txBody>
+      </p:sp>
+      <p:sp>
+        <p:nvSpPr>
+          <p:cNvPr id="27" name="Takeaway Label"/>
+          <p:cNvSpPr>
+            <a:spLocks noGrp="1"/>
+          </p:cNvSpPr>
+          <p:nvPr>
+            <p:ph type="body" idx="3"/>
+          </p:nvPr>
+        </p:nvSpPr>
+        <p:spPr>
+          <a:xfrm>
+            <a:off x="1097280" y="5684520"/>
+            <a:ext cx="1828800" cy="289560"/>
+          </a:xfrm>
+          <a:prstGeom prst="rect">
+            <a:avLst/>
+          </a:prstGeom>
+        </p:spPr>
+        <p:txBody>
+          <a:bodyPr wrap="square" anchor="ctr" lIns="0" tIns="0" rIns="0" bIns="0" rtlCol="0"/>
+          <a:lstStyle>
+            <a:lvl1pPr algn="l" marL="0" indent="0">
+              <a:lnSpc>
+                <a:spcPct val="100000"/>
+              </a:lnSpc>
+              <a:buNone/>
+              <a:defRPr lang="th-TH" sz="1200" b="1" spc="120" dirty="0">
+                <a:solidFill>
+                  <a:srgbClr val="216B7F"/>
+                </a:solidFill>
+                <a:latin typeface="+mn-lt"/>
+                <a:ea typeface="+mn-ea"/>
+                <a:cs typeface="+mn-cs"/>
+              </a:defRPr>
+            </a:lvl1pPr>
+          </a:lstStyle>
+          <a:p>
+            <a:pPr algn="l" marL="0" indent="0">
+              <a:lnSpc>
+                <a:spcPct val="100000"/>
+              </a:lnSpc>
+              <a:buNone/>
+            </a:pPr>
+            <a:r>
+              <a:rPr lang="th-TH" sz="1200" b="1" spc="120" dirty="0">
+                <a:solidFill>
+                  <a:srgbClr val="216B7F"/>
+                </a:solidFill>
+                <a:latin typeface="+mn-lt"/>
+                <a:ea typeface="+mn-ea"/>
+                <a:cs typeface="+mn-cs"/>
+              </a:rPr>
+              <a:t>สรุป</a:t>
+            </a:r>
+          </a:p>
+        </p:txBody>
+      </p:sp>
+      <p:sp>
+        <p:nvSpPr>
+          <p:cNvPr id="28" name="Takeaway Copy"/>
+          <p:cNvSpPr>
+            <a:spLocks noGrp="1"/>
+          </p:cNvSpPr>
+          <p:nvPr>
+            <p:ph type="body" idx="4"/>
+          </p:nvPr>
+        </p:nvSpPr>
+        <p:spPr>
+          <a:xfrm>
+            <a:off x="2926080" y="5684520"/>
+            <a:ext cx="8168640" cy="289560"/>
+          </a:xfrm>
+          <a:prstGeom prst="rect">
+            <a:avLst/>
+          </a:prstGeom>
+        </p:spPr>
+        <p:txBody>
+          <a:bodyPr wrap="square" anchor="ctr" lIns="0" tIns="0" rIns="0" bIns="0" rtlCol="0"/>
+          <a:lstStyle>
+            <a:lvl1pPr algn="l" marL="0" indent="0">
+              <a:lnSpc>
+                <a:spcPct val="100000"/>
+              </a:lnSpc>
+              <a:buNone/>
+              <a:defRPr lang="th-TH" sz="1400" dirty="0">
+                <a:solidFill>
+                  <a:srgbClr val="333333"/>
+                </a:solidFill>
+                <a:latin typeface="+mn-lt"/>
+                <a:ea typeface="+mn-ea"/>
+                <a:cs typeface="+mn-cs"/>
+              </a:defRPr>
+            </a:lvl1pPr>
+          </a:lstStyle>
+          <a:p>
+            <a:pPr algn="l" marL="0" indent="0">
+              <a:lnSpc>
+                <a:spcPct val="100000"/>
+              </a:lnSpc>
+              <a:buNone/>
+            </a:pPr>
+            <a:r>
+              <a:rPr lang="th-TH" sz="1400" dirty="0">
+                <a:solidFill>
+                  <a:srgbClr val="333333"/>
+                </a:solidFill>
+                <a:latin typeface="+mn-lt"/>
+                <a:ea typeface="+mn-ea"/>
+                <a:cs typeface="+mn-cs"/>
+              </a:rPr>
+              <a:t>ประเด็นสรุปหนึ่งบรรทัด</a:t>
+            </a:r>
+          </a:p>
+        </p:txBody>
+      </p:sp>
+      <p:sp>
+        <p:nvSpPr>
+          <p:cNvPr id="90" name="Foot Bar 1"/>
+          <p:cNvSpPr/>
+          <p:nvPr/>
+        </p:nvSpPr>
+        <p:spPr>
+          <a:xfrm>
+            <a:off x="0" y="6675120"/>
+            <a:ext cx="822960" cy="137160"/>
+          </a:xfrm>
+          <a:prstGeom prst="rect">
+            <a:avLst/>
+          </a:prstGeom>
+          <a:solidFill>
+            <a:srgbClr val="216B7F"/>
+          </a:solidFill>
+          <a:ln>
+            <a:noFill/>
+          </a:ln>
+        </p:spPr>
+        <p:txBody>
+          <a:bodyPr/>
+          <a:lstStyle/>
+          <a:p>
+            <a:endParaRPr lang="th-TH"/>
+          </a:p>
+        </p:txBody>
+      </p:sp>
+      <p:sp>
+        <p:nvSpPr>
+          <p:cNvPr id="91" name="Foot Bar 2"/>
+          <p:cNvSpPr/>
+          <p:nvPr/>
+        </p:nvSpPr>
+        <p:spPr>
+          <a:xfrm>
+            <a:off x="822960" y="6675120"/>
+            <a:ext cx="822960" cy="137160"/>
+          </a:xfrm>
+          <a:prstGeom prst="rect">
+            <a:avLst/>
+          </a:prstGeom>
+          <a:solidFill>
+            <a:srgbClr val="B1C4C9"/>
+          </a:solidFill>
+          <a:ln>
+            <a:noFill/>
+          </a:ln>
+        </p:spPr>
+        <p:txBody>
+          <a:bodyPr/>
+          <a:lstStyle/>
+          <a:p>
+            <a:endParaRPr lang="th-TH"/>
+          </a:p>
+        </p:txBody>
+      </p:sp>
+      <p:sp>
+        <p:nvSpPr>
+          <p:cNvPr id="92" name="Foot Bar 3"/>
+          <p:cNvSpPr/>
+          <p:nvPr/>
+        </p:nvSpPr>
+        <p:spPr>
+          <a:xfrm>
+            <a:off x="1645920" y="6675120"/>
+            <a:ext cx="822960" cy="137160"/>
+          </a:xfrm>
+          <a:prstGeom prst="rect">
+            <a:avLst/>
+          </a:prstGeom>
+          <a:solidFill>
+            <a:srgbClr val="E1E1E1"/>
+          </a:solidFill>
+          <a:ln>
+            <a:noFill/>
+          </a:ln>
+        </p:spPr>
+        <p:txBody>
+          <a:bodyPr/>
+          <a:lstStyle/>
+          <a:p>
+            <a:endParaRPr lang="th-TH"/>
+          </a:p>
+        </p:txBody>
+      </p:sp>
+      <p:sp>
+        <p:nvSpPr>
+          <p:cNvPr id="93" name="Footer Placeholder"/>
+          <p:cNvSpPr>
+            <a:spLocks noGrp="1"/>
+          </p:cNvSpPr>
+          <p:nvPr>
+            <p:ph type="ftr" idx="11"/>
+          </p:nvPr>
+        </p:nvSpPr>
+        <p:spPr>
+          <a:xfrm>
+            <a:off x="2697480" y="6400800"/>
+            <a:ext cx="4572000" cy="274320"/>
+          </a:xfrm>
+          <a:prstGeom prst="rect">
+            <a:avLst/>
+          </a:prstGeom>
+        </p:spPr>
+        <p:txBody>
+          <a:bodyPr wrap="square" anchor="ctr" lIns="0" tIns="0" rIns="0" bIns="0" rtlCol="0"/>
+          <a:lstStyle>
+            <a:lvl1pPr algn="l" marL="0" indent="0">
+              <a:lnSpc>
+                <a:spcPct val="100000"/>
+              </a:lnSpc>
+              <a:buNone/>
+              <a:defRPr lang="th-TH" sz="1000" dirty="0">
+                <a:solidFill>
+                  <a:srgbClr val="5F5F5F"/>
+                </a:solidFill>
+                <a:latin typeface="+mn-lt"/>
+                <a:ea typeface="+mn-ea"/>
+                <a:cs typeface="+mn-cs"/>
+              </a:defRPr>
+            </a:lvl1pPr>
+          </a:lstStyle>
+          <a:p>
+            <a:pPr algn="l" marL="0" indent="0">
+              <a:lnSpc>
+                <a:spcPct val="100000"/>
+              </a:lnSpc>
+              <a:buNone/>
+            </a:pPr>
+            <a:endParaRPr lang="th-TH" sz="1000"/>
+          </a:p>
+        </p:txBody>
+      </p:sp>
+      <p:sp>
+        <p:nvSpPr>
+          <p:cNvPr id="94" name="Slide Number Placeholder"/>
+          <p:cNvSpPr>
+            <a:spLocks noGrp="1"/>
+          </p:cNvSpPr>
+          <p:nvPr>
+            <p:ph type="sldNum" sz="quarter" idx="12"/>
+          </p:nvPr>
+        </p:nvSpPr>
+        <p:spPr>
+          <a:xfrm>
+            <a:off x="10591800" y="6400800"/>
+            <a:ext cx="1371600" cy="274320"/>
+          </a:xfrm>
+          <a:prstGeom prst="rect">
+            <a:avLst/>
+          </a:prstGeom>
+        </p:spPr>
+        <p:txBody>
+          <a:bodyPr anchor="ctr"/>
+          <a:lstStyle>
+            <a:lvl1pPr algn="r" marL="0" indent="0">
+              <a:lnSpc>
+                <a:spcPct val="100000"/>
+              </a:lnSpc>
+              <a:buNone/>
+              <a:defRPr lang="th-TH" sz="1000" dirty="0">
+                <a:solidFill>
+                  <a:srgbClr val="5F5F5F"/>
+                </a:solidFill>
+                <a:latin typeface="+mn-lt"/>
+                <a:ea typeface="+mn-ea"/>
+                <a:cs typeface="+mn-cs"/>
+              </a:defRPr>
+            </a:lvl1pPr>
+          </a:lstStyle>
+          <a:p>
+            <a:pPr algn="r" marL="0" indent="0">
+              <a:buNone/>
+            </a:pPr>
+            <a:fld id="{B7E3A1C2-4F5D-4A88-9C1E-6D2F0A93B451}" type="slidenum">
+              <a:rPr lang="th-TH" sz="1000">
+                <a:solidFill>
+                  <a:srgbClr val="5F5F5F"/>
+                </a:solidFill>
+                <a:latin typeface="+mn-lt"/>
+                <a:cs typeface="+mn-cs"/>
+              </a:rPr>
+              <a:t>2</a:t>
+            </a:fld>
+            <a:endParaRPr lang="th-TH" sz="1000"/>
+          </a:p>
+        </p:txBody>
+      </p:sp>
+      <p:sp>
+        <p:nvSpPr>
+          <p:cNvPr id="95" name="Corner Lockup"/>
+          <p:cNvSpPr/>
+          <p:nvPr/>
+        </p:nvSpPr>
+        <p:spPr>
+          <a:xfrm rot="10800000">
+            <a:off x="10546080" y="-274320"/>
+            <a:ext cx="1645920" cy="822960"/>
+          </a:xfrm>
+          <a:prstGeom prst="round2SameRect">
+            <a:avLst>
+              <a:gd name="adj1" fmla="val 12000"/>
+              <a:gd name="adj2" fmla="val 0"/>
+            </a:avLst>
+          </a:prstGeom>
+          <a:solidFill>
+            <a:srgbClr val="FFFFFF"/>
+          </a:solidFill>
+          <a:ln w="12700">
+            <a:solidFill>
+              <a:srgbClr val="216B7F"/>
+            </a:solidFill>
+          </a:ln>
+        </p:spPr>
+        <p:txBody>
+          <a:bodyPr/>
+          <a:lstStyle/>
+          <a:p>
+            <a:endParaRPr lang="th-TH"/>
+          </a:p>
+        </p:txBody>
+      </p:sp>
+      <p:pic>
+        <p:nvPicPr>
+          <p:cNvPr id="96" name="NCT Mark"/>
+          <p:cNvPicPr>
+            <a:picLocks noChangeAspect="1"/>
+          </p:cNvPicPr>
+          <p:nvPr/>
+        </p:nvPicPr>
+        <p:blipFill>
+          <a:blip r:embed="rId2"/>
+          <a:stretch>
+            <a:fillRect/>
+          </a:stretch>
+        </p:blipFill>
+        <p:spPr>
+          <a:xfrm>
+            <a:off x="11094720" y="99822"/>
+            <a:ext cx="548640" cy="348996"/>
+          </a:xfrm>
+          <a:prstGeom prst="rect">
+            <a:avLst/>
+          </a:prstGeom>
+        </p:spPr>
+      </p:pic>
+    </p:spTree>
+  </p:cSld>
+  <p:clrMapOvr>
+    <a:masterClrMapping/>
+  </p:clrMapOvr>
+</p:sldLayout>
+</file>
+
 <file path=ppt/slideLayouts/slideLayout3.xml><?xml version="1.0" encoding="utf-8"?>
 <p:sldLayout xmlns:a="http://schemas.openxmlformats.org/drawingml/2006/main" xmlns:r="http://schemas.openxmlformats.org/officeDocument/2006/relationships" xmlns:p="http://schemas.openxmlformats.org/presentationml/2006/main" type="obj" showMasterSp="0" preserve="1">
   <p:cSld name="03 Title and Content">
@@ -22747,7 +24364,7 @@
           <p:nvPr/>
         </p:nvPicPr>
         <p:blipFill>
-          <a:blip r:embed="rId24"/>
+          <a:blip r:embed="rId25"/>
           <a:stretch>
             <a:fillRect/>
           </a:stretch>
@@ -22788,6 +24405,7 @@
     <p:sldLayoutId id="2147483668" r:id="rId20"/>
     <p:sldLayoutId id="2147483669" r:id="rId21"/>
     <p:sldLayoutId id="2147483670" r:id="rId22"/>
+    <p:sldLayoutId id="2147483671" r:id="rId23"/>
   </p:sldLayoutIdLst>
   <p:txStyles>
     <p:titleStyle>
@@ -23044,19 +24662,19 @@
             <a:pPr/>
             <a:r>
               <a:rPr lang="th-TH" dirty="0"/>
-              <a:t>กระบวนการที่เสนอ</a:t>
-            </a:r>
-          </a:p>
-        </p:txBody>
-      </p:sp>
-      <p:sp>
-        <p:nvSpPr>
-          <p:cNvPr id="3" name="Sub"/>
-          <p:cNvSpPr>
-            <a:spLocks noGrp="1"/>
-          </p:cNvSpPr>
-          <p:nvPr>
-            <p:ph type="body" idx="1"/>
+              <a:t>วิธีการทำงาน</a:t>
+            </a:r>
+          </a:p>
+        </p:txBody>
+      </p:sp>
+      <p:sp>
+        <p:nvSpPr>
+          <p:cNvPr id="3" name="Cap"/>
+          <p:cNvSpPr>
+            <a:spLocks noGrp="1"/>
+          </p:cNvSpPr>
+          <p:nvPr>
+            <p:ph type="body" idx="2"/>
           </p:nvPr>
         </p:nvSpPr>
         <p:spPr/>
@@ -23067,398 +24685,7 @@
             <a:pPr/>
             <a:r>
               <a:rPr lang="th-TH" dirty="0"/>
-              <a:t>ห้าขั้นตอน ทำงานต่อเนื่องโดยไม่ต้องคีย์ซ้ำ</a:t>
-            </a:r>
-          </a:p>
-        </p:txBody>
-      </p:sp>
-      <p:sp>
-        <p:nvSpPr>
-          <p:cNvPr id="4" name="C0"/>
-          <p:cNvSpPr>
-            <a:spLocks noGrp="1"/>
-          </p:cNvSpPr>
-          <p:nvPr>
-            <p:ph type="body" idx="20"/>
-          </p:nvPr>
-        </p:nvSpPr>
-        <p:spPr/>
-        <p:txBody>
-          <a:bodyPr/>
-          <a:lstStyle/>
-          <a:p>
-            <a:pPr/>
-            <a:r>
-              <a:rPr lang="th-TH" dirty="0"/>
-              <a:t>1</a:t>
-            </a:r>
-          </a:p>
-        </p:txBody>
-      </p:sp>
-      <p:sp>
-        <p:nvSpPr>
-          <p:cNvPr id="5" name="H0"/>
-          <p:cNvSpPr>
-            <a:spLocks noGrp="1"/>
-          </p:cNvSpPr>
-          <p:nvPr>
-            <p:ph type="body" idx="21"/>
-          </p:nvPr>
-        </p:nvSpPr>
-        <p:spPr/>
-        <p:txBody>
-          <a:bodyPr/>
-          <a:lstStyle/>
-          <a:p>
-            <a:pPr/>
-            <a:r>
-              <a:rPr lang="th-TH" dirty="0"/>
-              <a:t>รับเอกสาร</a:t>
-            </a:r>
-          </a:p>
-        </p:txBody>
-      </p:sp>
-      <p:sp>
-        <p:nvSpPr>
-          <p:cNvPr id="6" name="B0"/>
-          <p:cNvSpPr>
-            <a:spLocks noGrp="1"/>
-          </p:cNvSpPr>
-          <p:nvPr>
-            <p:ph type="body" idx="22"/>
-          </p:nvPr>
-        </p:nvSpPr>
-        <p:spPr/>
-        <p:txBody>
-          <a:bodyPr/>
-          <a:lstStyle/>
-          <a:p>
-            <a:pPr/>
-            <a:r>
-              <a:rPr lang="th-TH" dirty="0"/>
-              <a:t>สแกนหรือรับไฟล์เข้าคิวกลาง</a:t>
-            </a:r>
-          </a:p>
-        </p:txBody>
-      </p:sp>
-      <p:sp>
-        <p:nvSpPr>
-          <p:cNvPr id="7" name="C1"/>
-          <p:cNvSpPr>
-            <a:spLocks noGrp="1"/>
-          </p:cNvSpPr>
-          <p:nvPr>
-            <p:ph type="body" idx="23"/>
-          </p:nvPr>
-        </p:nvSpPr>
-        <p:spPr/>
-        <p:txBody>
-          <a:bodyPr/>
-          <a:lstStyle/>
-          <a:p>
-            <a:pPr/>
-            <a:r>
-              <a:rPr lang="th-TH" dirty="0"/>
-              <a:t>2</a:t>
-            </a:r>
-          </a:p>
-        </p:txBody>
-      </p:sp>
-      <p:sp>
-        <p:nvSpPr>
-          <p:cNvPr id="8" name="H1"/>
-          <p:cNvSpPr>
-            <a:spLocks noGrp="1"/>
-          </p:cNvSpPr>
-          <p:nvPr>
-            <p:ph type="body" idx="24"/>
-          </p:nvPr>
-        </p:nvSpPr>
-        <p:spPr/>
-        <p:txBody>
-          <a:bodyPr/>
-          <a:lstStyle/>
-          <a:p>
-            <a:pPr/>
-            <a:r>
-              <a:rPr lang="th-TH" dirty="0"/>
-              <a:t>อ่านข้อมูล</a:t>
-            </a:r>
-          </a:p>
-        </p:txBody>
-      </p:sp>
-      <p:sp>
-        <p:nvSpPr>
-          <p:cNvPr id="9" name="B1"/>
-          <p:cNvSpPr>
-            <a:spLocks noGrp="1"/>
-          </p:cNvSpPr>
-          <p:nvPr>
-            <p:ph type="body" idx="25"/>
-          </p:nvPr>
-        </p:nvSpPr>
-        <p:spPr/>
-        <p:txBody>
-          <a:bodyPr/>
-          <a:lstStyle/>
-          <a:p>
-            <a:pPr/>
-            <a:r>
-              <a:rPr lang="th-TH" dirty="0"/>
-              <a:t>ดึงฟิลด์สำคัญ ตรวจกับต้นทาง</a:t>
-            </a:r>
-          </a:p>
-        </p:txBody>
-      </p:sp>
-      <p:sp>
-        <p:nvSpPr>
-          <p:cNvPr id="10" name="C2"/>
-          <p:cNvSpPr>
-            <a:spLocks noGrp="1"/>
-          </p:cNvSpPr>
-          <p:nvPr>
-            <p:ph type="body" idx="26"/>
-          </p:nvPr>
-        </p:nvSpPr>
-        <p:spPr/>
-        <p:txBody>
-          <a:bodyPr/>
-          <a:lstStyle/>
-          <a:p>
-            <a:pPr/>
-            <a:r>
-              <a:rPr lang="th-TH" dirty="0"/>
-              <a:t>3</a:t>
-            </a:r>
-          </a:p>
-        </p:txBody>
-      </p:sp>
-      <p:sp>
-        <p:nvSpPr>
-          <p:cNvPr id="11" name="H2"/>
-          <p:cNvSpPr>
-            <a:spLocks noGrp="1"/>
-          </p:cNvSpPr>
-          <p:nvPr>
-            <p:ph type="body" idx="27"/>
-          </p:nvPr>
-        </p:nvSpPr>
-        <p:spPr/>
-        <p:txBody>
-          <a:bodyPr/>
-          <a:lstStyle/>
-          <a:p>
-            <a:pPr/>
-            <a:r>
-              <a:rPr lang="th-TH" dirty="0"/>
-              <a:t>ตรวจสอบ</a:t>
-            </a:r>
-          </a:p>
-        </p:txBody>
-      </p:sp>
-      <p:sp>
-        <p:nvSpPr>
-          <p:cNvPr id="12" name="B2"/>
-          <p:cNvSpPr>
-            <a:spLocks noGrp="1"/>
-          </p:cNvSpPr>
-          <p:nvPr>
-            <p:ph type="body" idx="28"/>
-          </p:nvPr>
-        </p:nvSpPr>
-        <p:spPr/>
-        <p:txBody>
-          <a:bodyPr/>
-          <a:lstStyle/>
-          <a:p>
-            <a:pPr/>
-            <a:r>
-              <a:rPr lang="th-TH" dirty="0"/>
-              <a:t>กฎธุรกิจและวงเงินอนุมัติ</a:t>
-            </a:r>
-          </a:p>
-        </p:txBody>
-      </p:sp>
-      <p:sp>
-        <p:nvSpPr>
-          <p:cNvPr id="13" name="C3"/>
-          <p:cNvSpPr>
-            <a:spLocks noGrp="1"/>
-          </p:cNvSpPr>
-          <p:nvPr>
-            <p:ph type="body" idx="29"/>
-          </p:nvPr>
-        </p:nvSpPr>
-        <p:spPr/>
-        <p:txBody>
-          <a:bodyPr/>
-          <a:lstStyle/>
-          <a:p>
-            <a:pPr/>
-            <a:r>
-              <a:rPr lang="th-TH" dirty="0"/>
-              <a:t>4</a:t>
-            </a:r>
-          </a:p>
-        </p:txBody>
-      </p:sp>
-      <p:sp>
-        <p:nvSpPr>
-          <p:cNvPr id="14" name="H3"/>
-          <p:cNvSpPr>
-            <a:spLocks noGrp="1"/>
-          </p:cNvSpPr>
-          <p:nvPr>
-            <p:ph type="body" idx="30"/>
-          </p:nvPr>
-        </p:nvSpPr>
-        <p:spPr/>
-        <p:txBody>
-          <a:bodyPr/>
-          <a:lstStyle/>
-          <a:p>
-            <a:pPr/>
-            <a:r>
-              <a:rPr lang="th-TH" dirty="0"/>
-              <a:t>บันทึก</a:t>
-            </a:r>
-          </a:p>
-        </p:txBody>
-      </p:sp>
-      <p:sp>
-        <p:nvSpPr>
-          <p:cNvPr id="15" name="B3"/>
-          <p:cNvSpPr>
-            <a:spLocks noGrp="1"/>
-          </p:cNvSpPr>
-          <p:nvPr>
-            <p:ph type="body" idx="31"/>
-          </p:nvPr>
-        </p:nvSpPr>
-        <p:spPr/>
-        <p:txBody>
-          <a:bodyPr/>
-          <a:lstStyle/>
-          <a:p>
-            <a:pPr/>
-            <a:r>
-              <a:rPr lang="th-TH" dirty="0"/>
-              <a:t>ลงระบบบัญชีพร้อม audit trail</a:t>
-            </a:r>
-          </a:p>
-        </p:txBody>
-      </p:sp>
-      <p:sp>
-        <p:nvSpPr>
-          <p:cNvPr id="16" name="C4"/>
-          <p:cNvSpPr>
-            <a:spLocks noGrp="1"/>
-          </p:cNvSpPr>
-          <p:nvPr>
-            <p:ph type="body" idx="32"/>
-          </p:nvPr>
-        </p:nvSpPr>
-        <p:spPr/>
-        <p:txBody>
-          <a:bodyPr/>
-          <a:lstStyle/>
-          <a:p>
-            <a:pPr/>
-            <a:r>
-              <a:rPr lang="th-TH" dirty="0"/>
-              <a:t>5</a:t>
-            </a:r>
-          </a:p>
-        </p:txBody>
-      </p:sp>
-      <p:sp>
-        <p:nvSpPr>
-          <p:cNvPr id="17" name="H4"/>
-          <p:cNvSpPr>
-            <a:spLocks noGrp="1"/>
-          </p:cNvSpPr>
-          <p:nvPr>
-            <p:ph type="body" idx="33"/>
-          </p:nvPr>
-        </p:nvSpPr>
-        <p:spPr/>
-        <p:txBody>
-          <a:bodyPr/>
-          <a:lstStyle/>
-          <a:p>
-            <a:pPr/>
-            <a:r>
-              <a:rPr lang="th-TH" dirty="0"/>
-              <a:t>กระทบยอด</a:t>
-            </a:r>
-          </a:p>
-        </p:txBody>
-      </p:sp>
-      <p:sp>
-        <p:nvSpPr>
-          <p:cNvPr id="18" name="B4"/>
-          <p:cNvSpPr>
-            <a:spLocks noGrp="1"/>
-          </p:cNvSpPr>
-          <p:nvPr>
-            <p:ph type="body" idx="34"/>
-          </p:nvPr>
-        </p:nvSpPr>
-        <p:spPr/>
-        <p:txBody>
-          <a:bodyPr/>
-          <a:lstStyle/>
-          <a:p>
-            <a:pPr/>
-            <a:r>
-              <a:rPr lang="th-TH" dirty="0"/>
-              <a:t>จับคู่อัตโนมัติ ส่งรายงาน</a:t>
-            </a:r>
-          </a:p>
-        </p:txBody>
-      </p:sp>
-      <p:sp>
-        <p:nvSpPr>
-          <p:cNvPr id="19" name="RL"/>
-          <p:cNvSpPr>
-            <a:spLocks noGrp="1"/>
-          </p:cNvSpPr>
-          <p:nvPr>
-            <p:ph type="body" idx="35"/>
-          </p:nvPr>
-        </p:nvSpPr>
-        <p:spPr/>
-        <p:txBody>
-          <a:bodyPr/>
-          <a:lstStyle/>
-          <a:p>
-            <a:pPr/>
-            <a:r>
-              <a:rPr lang="th-TH" dirty="0"/>
-              <a:t>ผลลัพธ์</a:t>
-            </a:r>
-          </a:p>
-        </p:txBody>
-      </p:sp>
-      <p:sp>
-        <p:nvSpPr>
-          <p:cNvPr id="20" name="RC"/>
-          <p:cNvSpPr>
-            <a:spLocks noGrp="1"/>
-          </p:cNvSpPr>
-          <p:nvPr>
-            <p:ph type="body" idx="36"/>
-          </p:nvPr>
-        </p:nvSpPr>
-        <p:spPr/>
-        <p:txBody>
-          <a:bodyPr/>
-          <a:lstStyle/>
-          <a:p>
-            <a:pPr/>
-            <a:r>
-              <a:rPr lang="th-TH" dirty="0"/>
-              <a:t>เอกสารหนึ่งใบผ่านครบห้าขั้นโดยไม่มีการคีย์ซ้ำเลย</a:t>
+              <a:t>กระบวนการ สถาปัตยกรรม และขอบเขตที่ตกลงกัน</a:t>
             </a:r>
           </a:p>
         </p:txBody>
@@ -23506,7 +24733,7 @@
             <a:pPr/>
             <a:r>
               <a:rPr lang="th-TH" dirty="0"/>
-              <a:t>ภาพรวมสถาปัตยกรรมระบบ</a:t>
+              <a:t>กระบวนการที่เสนอ</a:t>
             </a:r>
           </a:p>
         </p:txBody>
@@ -23529,19 +24756,19 @@
             <a:pPr/>
             <a:r>
               <a:rPr lang="th-TH" dirty="0"/>
-              <a:t>ใช้ชุดชิ้นส่วนมาตรฐาน — กล่องมุมตรง เส้นหักมุมฉาก ไม่มีเงา</a:t>
-            </a:r>
-          </a:p>
-        </p:txBody>
-      </p:sp>
-      <p:sp>
-        <p:nvSpPr>
-          <p:cNvPr id="4" name="Leg"/>
-          <p:cNvSpPr>
-            <a:spLocks noGrp="1"/>
-          </p:cNvSpPr>
-          <p:nvPr>
-            <p:ph type="body" idx="2"/>
+              <a:t>ห้าขั้นตอน ทำงานต่อเนื่องโดยไม่ต้องคีย์ซ้ำ</a:t>
+            </a:r>
+          </a:p>
+        </p:txBody>
+      </p:sp>
+      <p:sp>
+        <p:nvSpPr>
+          <p:cNvPr id="4" name="C0"/>
+          <p:cNvSpPr>
+            <a:spLocks noGrp="1"/>
+          </p:cNvSpPr>
+          <p:nvPr>
+            <p:ph type="body" idx="20"/>
           </p:nvPr>
         </p:nvSpPr>
         <p:spPr/>
@@ -23552,19 +24779,19 @@
             <a:pPr/>
             <a:r>
               <a:rPr lang="th-TH" dirty="0"/>
-              <a:t>กล่องทึบ = ระบบที่มีอยู่  ·  กล่องมีสีหมวด = ส่วนที่เพิ่ม  ·  เส้นทึบ = ข้อมูลไหลอัตโนมัติ</a:t>
-            </a:r>
-          </a:p>
-        </p:txBody>
-      </p:sp>
-      <p:sp>
-        <p:nvSpPr>
-          <p:cNvPr id="5" name="TL"/>
-          <p:cNvSpPr>
-            <a:spLocks noGrp="1"/>
-          </p:cNvSpPr>
-          <p:nvPr>
-            <p:ph type="body" idx="3"/>
+              <a:t>1</a:t>
+            </a:r>
+          </a:p>
+        </p:txBody>
+      </p:sp>
+      <p:sp>
+        <p:nvSpPr>
+          <p:cNvPr id="5" name="H0"/>
+          <p:cNvSpPr>
+            <a:spLocks noGrp="1"/>
+          </p:cNvSpPr>
+          <p:nvPr>
+            <p:ph type="body" idx="21"/>
           </p:nvPr>
         </p:nvSpPr>
         <p:spPr/>
@@ -23575,19 +24802,19 @@
             <a:pPr/>
             <a:r>
               <a:rPr lang="th-TH" dirty="0"/>
-              <a:t>สรุป</a:t>
-            </a:r>
-          </a:p>
-        </p:txBody>
-      </p:sp>
-      <p:sp>
-        <p:nvSpPr>
-          <p:cNvPr id="6" name="TC"/>
-          <p:cNvSpPr>
-            <a:spLocks noGrp="1"/>
-          </p:cNvSpPr>
-          <p:nvPr>
-            <p:ph type="body" idx="4"/>
+              <a:t>รับเอกสาร</a:t>
+            </a:r>
+          </a:p>
+        </p:txBody>
+      </p:sp>
+      <p:sp>
+        <p:nvSpPr>
+          <p:cNvPr id="6" name="B0"/>
+          <p:cNvSpPr>
+            <a:spLocks noGrp="1"/>
+          </p:cNvSpPr>
+          <p:nvPr>
+            <p:ph type="body" idx="22"/>
           </p:nvPr>
         </p:nvSpPr>
         <p:spPr/>
@@ -23598,457 +24825,329 @@
             <a:pPr/>
             <a:r>
               <a:rPr lang="th-TH" dirty="0"/>
-              <a:t>ระบบเดิมไม่ถูกแก้ ของใหม่แทรกเป็นคิวและตัวตรวจกฎคั่นกลางเท่านั้น</a:t>
-            </a:r>
-          </a:p>
-        </p:txBody>
-      </p:sp>
-      <p:sp>
-        <p:nvSpPr>
-          <p:cNvPr id="10" name="Group Zone"/>
-          <p:cNvSpPr/>
-          <p:nvPr/>
-        </p:nvSpPr>
-        <p:spPr>
-          <a:xfrm>
-            <a:off x="3566160" y="2766060"/>
-            <a:ext cx="5257800" cy="1645920"/>
-          </a:xfrm>
-          <a:prstGeom prst="rect">
-            <a:avLst/>
-          </a:prstGeom>
-          <a:solidFill>
-            <a:srgbClr val="E8F6F5"/>
-          </a:solidFill>
-          <a:ln>
-            <a:noFill/>
-          </a:ln>
-        </p:spPr>
-        <p:txBody>
-          <a:bodyPr/>
-          <a:lstStyle/>
-          <a:p>
-            <a:endParaRPr lang="th-TH"/>
-          </a:p>
-        </p:txBody>
-      </p:sp>
-      <p:sp>
-        <p:nvSpPr>
-          <p:cNvPr id="11" name="Group Label"/>
-          <p:cNvSpPr/>
-          <p:nvPr/>
-        </p:nvSpPr>
-        <p:spPr>
-          <a:xfrm>
-            <a:off x="3840480" y="2926080"/>
-            <a:ext cx="3200400" cy="228600"/>
-          </a:xfrm>
-          <a:prstGeom prst="rect">
-            <a:avLst/>
-          </a:prstGeom>
-          <a:noFill/>
-          <a:ln>
-            <a:noFill/>
-          </a:ln>
-        </p:spPr>
-        <p:txBody>
-          <a:bodyPr wrap="square" anchor="ctr" lIns="0" tIns="0" rIns="0" bIns="0" rtlCol="0"/>
-          <a:lstStyle/>
-          <a:p>
-            <a:pPr algn="l" marL="0" indent="0">
-              <a:lnSpc>
-                <a:spcPct val="100000"/>
-              </a:lnSpc>
-              <a:buNone/>
-            </a:pPr>
-            <a:r>
-              <a:rPr lang="th-TH" sz="1200" b="1" spc="120" dirty="0">
-                <a:solidFill>
-                  <a:srgbClr val="216B7F"/>
-                </a:solidFill>
-                <a:latin typeface="+mn-lt"/>
-                <a:ea typeface="+mn-ea"/>
-                <a:cs typeface="+mn-cs"/>
-              </a:rPr>
-              <a:t>ส่วนที่เพิ่มใหม่</a:t>
-            </a:r>
-          </a:p>
-        </p:txBody>
-      </p:sp>
-      <p:sp>
-        <p:nvSpPr>
-          <p:cNvPr id="12" name="Box 1"/>
-          <p:cNvSpPr/>
-          <p:nvPr/>
-        </p:nvSpPr>
-        <p:spPr>
-          <a:xfrm>
-            <a:off x="1143000" y="3223260"/>
-            <a:ext cx="2011680" cy="731520"/>
-          </a:xfrm>
-          <a:prstGeom prst="rect">
-            <a:avLst/>
-          </a:prstGeom>
-          <a:solidFill>
-            <a:srgbClr val="23436D"/>
-          </a:solidFill>
-          <a:ln>
-            <a:noFill/>
-          </a:ln>
-        </p:spPr>
-        <p:txBody>
-          <a:bodyPr wrap="square" anchor="ctr" lIns="0" tIns="0" rIns="0" bIns="0" rtlCol="0"/>
-          <a:lstStyle/>
-          <a:p>
-            <a:pPr algn="ctr" marL="0" indent="0">
-              <a:lnSpc>
-                <a:spcPct val="110000"/>
-              </a:lnSpc>
-              <a:buNone/>
-            </a:pPr>
-            <a:r>
-              <a:rPr lang="th-TH" sz="1200" dirty="0">
-                <a:solidFill>
-                  <a:srgbClr val="FFFFFF"/>
-                </a:solidFill>
-                <a:latin typeface="+mn-lt"/>
-                <a:ea typeface="+mn-ea"/>
-                <a:cs typeface="+mn-cs"/>
-              </a:rPr>
-              <a:t>ระบบ ERP ปัจจุบัน</a:t>
-            </a:r>
-          </a:p>
-        </p:txBody>
-      </p:sp>
-      <p:sp>
-        <p:nvSpPr>
-          <p:cNvPr id="13" name="Box 2"/>
-          <p:cNvSpPr/>
-          <p:nvPr/>
-        </p:nvSpPr>
-        <p:spPr>
-          <a:xfrm>
-            <a:off x="3840480" y="3223260"/>
-            <a:ext cx="2011680" cy="731520"/>
-          </a:xfrm>
-          <a:prstGeom prst="rect">
-            <a:avLst/>
-          </a:prstGeom>
-          <a:solidFill>
-            <a:srgbClr val="FFFFFF"/>
-          </a:solidFill>
-          <a:ln w="12700">
-            <a:solidFill>
-              <a:srgbClr val="2A5EA0"/>
-            </a:solidFill>
-          </a:ln>
-        </p:spPr>
-        <p:txBody>
-          <a:bodyPr wrap="square" anchor="ctr" lIns="0" tIns="0" rIns="0" bIns="0" rtlCol="0"/>
-          <a:lstStyle/>
-          <a:p>
-            <a:pPr algn="ctr" marL="0" indent="0">
-              <a:lnSpc>
-                <a:spcPct val="110000"/>
-              </a:lnSpc>
-              <a:buNone/>
-            </a:pPr>
-            <a:r>
-              <a:rPr lang="th-TH" sz="1200" dirty="0">
-                <a:solidFill>
-                  <a:srgbClr val="333333"/>
-                </a:solidFill>
-                <a:latin typeface="+mn-lt"/>
-                <a:ea typeface="+mn-ea"/>
-                <a:cs typeface="+mn-cs"/>
-              </a:rPr>
-              <a:t>คิวเอกสารกลาง</a:t>
-            </a:r>
-          </a:p>
-        </p:txBody>
-      </p:sp>
-      <p:sp>
-        <p:nvSpPr>
-          <p:cNvPr id="113" name="Box 2 Tab"/>
-          <p:cNvSpPr/>
-          <p:nvPr/>
-        </p:nvSpPr>
-        <p:spPr>
-          <a:xfrm>
-            <a:off x="3954780" y="3337560"/>
-            <a:ext cx="205740" cy="45720"/>
-          </a:xfrm>
-          <a:prstGeom prst="rect">
-            <a:avLst/>
-          </a:prstGeom>
-          <a:solidFill>
-            <a:srgbClr val="2A5EA0"/>
-          </a:solidFill>
-          <a:ln>
-            <a:noFill/>
-          </a:ln>
-        </p:spPr>
-        <p:txBody>
-          <a:bodyPr/>
-          <a:lstStyle/>
-          <a:p>
-            <a:endParaRPr lang="th-TH"/>
-          </a:p>
-        </p:txBody>
-      </p:sp>
-      <p:sp>
-        <p:nvSpPr>
-          <p:cNvPr id="14" name="Box 3"/>
-          <p:cNvSpPr/>
-          <p:nvPr/>
-        </p:nvSpPr>
-        <p:spPr>
-          <a:xfrm>
-            <a:off x="6537960" y="3223260"/>
-            <a:ext cx="2011680" cy="731520"/>
-          </a:xfrm>
-          <a:prstGeom prst="rect">
-            <a:avLst/>
-          </a:prstGeom>
-          <a:solidFill>
-            <a:srgbClr val="FFFFFF"/>
-          </a:solidFill>
-          <a:ln w="12700">
-            <a:solidFill>
-              <a:srgbClr val="BB731B"/>
-            </a:solidFill>
-          </a:ln>
-        </p:spPr>
-        <p:txBody>
-          <a:bodyPr wrap="square" anchor="ctr" lIns="0" tIns="0" rIns="0" bIns="0" rtlCol="0"/>
-          <a:lstStyle/>
-          <a:p>
-            <a:pPr algn="ctr" marL="0" indent="0">
-              <a:lnSpc>
-                <a:spcPct val="110000"/>
-              </a:lnSpc>
-              <a:buNone/>
-            </a:pPr>
-            <a:r>
-              <a:rPr lang="th-TH" sz="1200" dirty="0">
-                <a:solidFill>
-                  <a:srgbClr val="333333"/>
-                </a:solidFill>
-                <a:latin typeface="+mn-lt"/>
-                <a:ea typeface="+mn-ea"/>
-                <a:cs typeface="+mn-cs"/>
-              </a:rPr>
-              <a:t>ตัวตรวจกฎธุรกิจ</a:t>
-            </a:r>
-          </a:p>
-        </p:txBody>
-      </p:sp>
-      <p:sp>
-        <p:nvSpPr>
-          <p:cNvPr id="114" name="Box 3 Tab"/>
-          <p:cNvSpPr/>
-          <p:nvPr/>
-        </p:nvSpPr>
-        <p:spPr>
-          <a:xfrm>
-            <a:off x="6652260" y="3337560"/>
-            <a:ext cx="205740" cy="45720"/>
-          </a:xfrm>
-          <a:prstGeom prst="rect">
-            <a:avLst/>
-          </a:prstGeom>
-          <a:solidFill>
-            <a:srgbClr val="BB731B"/>
-          </a:solidFill>
-          <a:ln>
-            <a:noFill/>
-          </a:ln>
-        </p:spPr>
-        <p:txBody>
-          <a:bodyPr/>
-          <a:lstStyle/>
-          <a:p>
-            <a:endParaRPr lang="th-TH"/>
-          </a:p>
-        </p:txBody>
-      </p:sp>
-      <p:sp>
-        <p:nvSpPr>
-          <p:cNvPr id="15" name="Box 4"/>
-          <p:cNvSpPr/>
-          <p:nvPr/>
-        </p:nvSpPr>
-        <p:spPr>
-          <a:xfrm>
-            <a:off x="9235440" y="3223260"/>
-            <a:ext cx="2011680" cy="731520"/>
-          </a:xfrm>
-          <a:prstGeom prst="rect">
-            <a:avLst/>
-          </a:prstGeom>
-          <a:solidFill>
-            <a:srgbClr val="23436D"/>
-          </a:solidFill>
-          <a:ln>
-            <a:noFill/>
-          </a:ln>
-        </p:spPr>
-        <p:txBody>
-          <a:bodyPr wrap="square" anchor="ctr" lIns="0" tIns="0" rIns="0" bIns="0" rtlCol="0"/>
-          <a:lstStyle/>
-          <a:p>
-            <a:pPr algn="ctr" marL="0" indent="0">
-              <a:lnSpc>
-                <a:spcPct val="110000"/>
-              </a:lnSpc>
-              <a:buNone/>
-            </a:pPr>
-            <a:r>
-              <a:rPr lang="th-TH" sz="1200" dirty="0">
-                <a:solidFill>
-                  <a:srgbClr val="FFFFFF"/>
-                </a:solidFill>
-                <a:latin typeface="+mn-lt"/>
-                <a:ea typeface="+mn-ea"/>
-                <a:cs typeface="+mn-cs"/>
-              </a:rPr>
-              <a:t>ระบบบัญชี</a:t>
-            </a:r>
-          </a:p>
-        </p:txBody>
-      </p:sp>
-      <p:sp>
-        <p:nvSpPr>
-          <p:cNvPr id="16" name="Link 1"/>
-          <p:cNvSpPr/>
-          <p:nvPr/>
-        </p:nvSpPr>
-        <p:spPr>
-          <a:xfrm>
-            <a:off x="3268980" y="3589020"/>
-            <a:ext cx="457200" cy="0"/>
-          </a:xfrm>
-          <a:prstGeom prst="line">
-            <a:avLst/>
-          </a:prstGeom>
-          <a:noFill/>
-          <a:ln w="15875" cap="flat">
-            <a:solidFill>
-              <a:srgbClr val="216B7F"/>
-            </a:solidFill>
-            <a:prstDash val="solid"/>
-            <a:tailEnd type="triangle" w="med" len="med"/>
-          </a:ln>
-        </p:spPr>
-        <p:txBody>
-          <a:bodyPr/>
-          <a:lstStyle/>
-          <a:p>
-            <a:endParaRPr lang="th-TH"/>
-          </a:p>
-        </p:txBody>
-      </p:sp>
-      <p:sp>
-        <p:nvSpPr>
-          <p:cNvPr id="17" name="Link 2"/>
-          <p:cNvSpPr/>
-          <p:nvPr/>
-        </p:nvSpPr>
-        <p:spPr>
-          <a:xfrm>
-            <a:off x="5966460" y="3589020"/>
-            <a:ext cx="457200" cy="0"/>
-          </a:xfrm>
-          <a:prstGeom prst="line">
-            <a:avLst/>
-          </a:prstGeom>
-          <a:noFill/>
-          <a:ln w="15875" cap="flat">
-            <a:solidFill>
-              <a:srgbClr val="216B7F"/>
-            </a:solidFill>
-            <a:prstDash val="solid"/>
-            <a:tailEnd type="triangle" w="med" len="med"/>
-          </a:ln>
-        </p:spPr>
-        <p:txBody>
-          <a:bodyPr/>
-          <a:lstStyle/>
-          <a:p>
-            <a:endParaRPr lang="th-TH"/>
-          </a:p>
-        </p:txBody>
-      </p:sp>
-      <p:sp>
-        <p:nvSpPr>
-          <p:cNvPr id="18" name="Link 3"/>
-          <p:cNvSpPr/>
-          <p:nvPr/>
-        </p:nvSpPr>
-        <p:spPr>
-          <a:xfrm>
-            <a:off x="8663940" y="3589020"/>
-            <a:ext cx="457200" cy="0"/>
-          </a:xfrm>
-          <a:prstGeom prst="line">
-            <a:avLst/>
-          </a:prstGeom>
-          <a:noFill/>
-          <a:ln w="15875" cap="flat">
-            <a:solidFill>
-              <a:srgbClr val="216B7F"/>
-            </a:solidFill>
-            <a:prstDash val="solid"/>
-            <a:tailEnd type="triangle" w="med" len="med"/>
-          </a:ln>
-        </p:spPr>
-        <p:txBody>
-          <a:bodyPr/>
-          <a:lstStyle/>
-          <a:p>
-            <a:endParaRPr lang="th-TH"/>
-          </a:p>
-        </p:txBody>
-      </p:sp>
-      <p:sp>
-        <p:nvSpPr>
-          <p:cNvPr id="19" name="Edge Label"/>
-          <p:cNvSpPr/>
-          <p:nvPr/>
-        </p:nvSpPr>
-        <p:spPr>
-          <a:xfrm>
-            <a:off x="5806440" y="3268980"/>
-            <a:ext cx="822960" cy="228600"/>
-          </a:xfrm>
-          <a:prstGeom prst="rect">
-            <a:avLst/>
-          </a:prstGeom>
-          <a:noFill/>
-          <a:ln>
-            <a:noFill/>
-          </a:ln>
-        </p:spPr>
-        <p:txBody>
-          <a:bodyPr wrap="square" anchor="ctr" lIns="0" tIns="0" rIns="0" bIns="0" rtlCol="0"/>
-          <a:lstStyle/>
-          <a:p>
-            <a:pPr algn="ctr" marL="0" indent="0">
-              <a:lnSpc>
-                <a:spcPct val="100000"/>
-              </a:lnSpc>
-              <a:buNone/>
-            </a:pPr>
-            <a:r>
-              <a:rPr lang="th-TH" sz="1000" dirty="0">
-                <a:solidFill>
-                  <a:srgbClr val="5F5F5F"/>
-                </a:solidFill>
-                <a:latin typeface="+mn-lt"/>
-                <a:ea typeface="+mn-ea"/>
-                <a:cs typeface="+mn-cs"/>
-              </a:rPr>
-              <a:t>ผ่านกฎ</a:t>
+              <a:t>สแกนหรือรับไฟล์เข้าคิวกลาง</a:t>
+            </a:r>
+          </a:p>
+        </p:txBody>
+      </p:sp>
+      <p:sp>
+        <p:nvSpPr>
+          <p:cNvPr id="7" name="C1"/>
+          <p:cNvSpPr>
+            <a:spLocks noGrp="1"/>
+          </p:cNvSpPr>
+          <p:nvPr>
+            <p:ph type="body" idx="23"/>
+          </p:nvPr>
+        </p:nvSpPr>
+        <p:spPr/>
+        <p:txBody>
+          <a:bodyPr/>
+          <a:lstStyle/>
+          <a:p>
+            <a:pPr/>
+            <a:r>
+              <a:rPr lang="th-TH" dirty="0"/>
+              <a:t>2</a:t>
+            </a:r>
+          </a:p>
+        </p:txBody>
+      </p:sp>
+      <p:sp>
+        <p:nvSpPr>
+          <p:cNvPr id="8" name="H1"/>
+          <p:cNvSpPr>
+            <a:spLocks noGrp="1"/>
+          </p:cNvSpPr>
+          <p:nvPr>
+            <p:ph type="body" idx="24"/>
+          </p:nvPr>
+        </p:nvSpPr>
+        <p:spPr/>
+        <p:txBody>
+          <a:bodyPr/>
+          <a:lstStyle/>
+          <a:p>
+            <a:pPr/>
+            <a:r>
+              <a:rPr lang="th-TH" dirty="0"/>
+              <a:t>อ่านข้อมูล</a:t>
+            </a:r>
+          </a:p>
+        </p:txBody>
+      </p:sp>
+      <p:sp>
+        <p:nvSpPr>
+          <p:cNvPr id="9" name="B1"/>
+          <p:cNvSpPr>
+            <a:spLocks noGrp="1"/>
+          </p:cNvSpPr>
+          <p:nvPr>
+            <p:ph type="body" idx="25"/>
+          </p:nvPr>
+        </p:nvSpPr>
+        <p:spPr/>
+        <p:txBody>
+          <a:bodyPr/>
+          <a:lstStyle/>
+          <a:p>
+            <a:pPr/>
+            <a:r>
+              <a:rPr lang="th-TH" dirty="0"/>
+              <a:t>ดึงฟิลด์สำคัญ ตรวจกับต้นทาง</a:t>
+            </a:r>
+          </a:p>
+        </p:txBody>
+      </p:sp>
+      <p:sp>
+        <p:nvSpPr>
+          <p:cNvPr id="10" name="C2"/>
+          <p:cNvSpPr>
+            <a:spLocks noGrp="1"/>
+          </p:cNvSpPr>
+          <p:nvPr>
+            <p:ph type="body" idx="26"/>
+          </p:nvPr>
+        </p:nvSpPr>
+        <p:spPr/>
+        <p:txBody>
+          <a:bodyPr/>
+          <a:lstStyle/>
+          <a:p>
+            <a:pPr/>
+            <a:r>
+              <a:rPr lang="th-TH" dirty="0"/>
+              <a:t>3</a:t>
+            </a:r>
+          </a:p>
+        </p:txBody>
+      </p:sp>
+      <p:sp>
+        <p:nvSpPr>
+          <p:cNvPr id="11" name="H2"/>
+          <p:cNvSpPr>
+            <a:spLocks noGrp="1"/>
+          </p:cNvSpPr>
+          <p:nvPr>
+            <p:ph type="body" idx="27"/>
+          </p:nvPr>
+        </p:nvSpPr>
+        <p:spPr/>
+        <p:txBody>
+          <a:bodyPr/>
+          <a:lstStyle/>
+          <a:p>
+            <a:pPr/>
+            <a:r>
+              <a:rPr lang="th-TH" dirty="0"/>
+              <a:t>ตรวจสอบ</a:t>
+            </a:r>
+          </a:p>
+        </p:txBody>
+      </p:sp>
+      <p:sp>
+        <p:nvSpPr>
+          <p:cNvPr id="12" name="B2"/>
+          <p:cNvSpPr>
+            <a:spLocks noGrp="1"/>
+          </p:cNvSpPr>
+          <p:nvPr>
+            <p:ph type="body" idx="28"/>
+          </p:nvPr>
+        </p:nvSpPr>
+        <p:spPr/>
+        <p:txBody>
+          <a:bodyPr/>
+          <a:lstStyle/>
+          <a:p>
+            <a:pPr/>
+            <a:r>
+              <a:rPr lang="th-TH" dirty="0"/>
+              <a:t>กฎธุรกิจและวงเงินอนุมัติ</a:t>
+            </a:r>
+          </a:p>
+        </p:txBody>
+      </p:sp>
+      <p:sp>
+        <p:nvSpPr>
+          <p:cNvPr id="13" name="C3"/>
+          <p:cNvSpPr>
+            <a:spLocks noGrp="1"/>
+          </p:cNvSpPr>
+          <p:nvPr>
+            <p:ph type="body" idx="29"/>
+          </p:nvPr>
+        </p:nvSpPr>
+        <p:spPr/>
+        <p:txBody>
+          <a:bodyPr/>
+          <a:lstStyle/>
+          <a:p>
+            <a:pPr/>
+            <a:r>
+              <a:rPr lang="th-TH" dirty="0"/>
+              <a:t>4</a:t>
+            </a:r>
+          </a:p>
+        </p:txBody>
+      </p:sp>
+      <p:sp>
+        <p:nvSpPr>
+          <p:cNvPr id="14" name="H3"/>
+          <p:cNvSpPr>
+            <a:spLocks noGrp="1"/>
+          </p:cNvSpPr>
+          <p:nvPr>
+            <p:ph type="body" idx="30"/>
+          </p:nvPr>
+        </p:nvSpPr>
+        <p:spPr/>
+        <p:txBody>
+          <a:bodyPr/>
+          <a:lstStyle/>
+          <a:p>
+            <a:pPr/>
+            <a:r>
+              <a:rPr lang="th-TH" dirty="0"/>
+              <a:t>บันทึก</a:t>
+            </a:r>
+          </a:p>
+        </p:txBody>
+      </p:sp>
+      <p:sp>
+        <p:nvSpPr>
+          <p:cNvPr id="15" name="B3"/>
+          <p:cNvSpPr>
+            <a:spLocks noGrp="1"/>
+          </p:cNvSpPr>
+          <p:nvPr>
+            <p:ph type="body" idx="31"/>
+          </p:nvPr>
+        </p:nvSpPr>
+        <p:spPr/>
+        <p:txBody>
+          <a:bodyPr/>
+          <a:lstStyle/>
+          <a:p>
+            <a:pPr/>
+            <a:r>
+              <a:rPr lang="th-TH" dirty="0"/>
+              <a:t>ลงระบบบัญชีพร้อม audit trail</a:t>
+            </a:r>
+          </a:p>
+        </p:txBody>
+      </p:sp>
+      <p:sp>
+        <p:nvSpPr>
+          <p:cNvPr id="16" name="C4"/>
+          <p:cNvSpPr>
+            <a:spLocks noGrp="1"/>
+          </p:cNvSpPr>
+          <p:nvPr>
+            <p:ph type="body" idx="32"/>
+          </p:nvPr>
+        </p:nvSpPr>
+        <p:spPr/>
+        <p:txBody>
+          <a:bodyPr/>
+          <a:lstStyle/>
+          <a:p>
+            <a:pPr/>
+            <a:r>
+              <a:rPr lang="th-TH" dirty="0"/>
+              <a:t>5</a:t>
+            </a:r>
+          </a:p>
+        </p:txBody>
+      </p:sp>
+      <p:sp>
+        <p:nvSpPr>
+          <p:cNvPr id="17" name="H4"/>
+          <p:cNvSpPr>
+            <a:spLocks noGrp="1"/>
+          </p:cNvSpPr>
+          <p:nvPr>
+            <p:ph type="body" idx="33"/>
+          </p:nvPr>
+        </p:nvSpPr>
+        <p:spPr/>
+        <p:txBody>
+          <a:bodyPr/>
+          <a:lstStyle/>
+          <a:p>
+            <a:pPr/>
+            <a:r>
+              <a:rPr lang="th-TH" dirty="0"/>
+              <a:t>กระทบยอด</a:t>
+            </a:r>
+          </a:p>
+        </p:txBody>
+      </p:sp>
+      <p:sp>
+        <p:nvSpPr>
+          <p:cNvPr id="18" name="B4"/>
+          <p:cNvSpPr>
+            <a:spLocks noGrp="1"/>
+          </p:cNvSpPr>
+          <p:nvPr>
+            <p:ph type="body" idx="34"/>
+          </p:nvPr>
+        </p:nvSpPr>
+        <p:spPr/>
+        <p:txBody>
+          <a:bodyPr/>
+          <a:lstStyle/>
+          <a:p>
+            <a:pPr/>
+            <a:r>
+              <a:rPr lang="th-TH" dirty="0"/>
+              <a:t>จับคู่อัตโนมัติ ส่งรายงาน</a:t>
+            </a:r>
+          </a:p>
+        </p:txBody>
+      </p:sp>
+      <p:sp>
+        <p:nvSpPr>
+          <p:cNvPr id="19" name="RL"/>
+          <p:cNvSpPr>
+            <a:spLocks noGrp="1"/>
+          </p:cNvSpPr>
+          <p:nvPr>
+            <p:ph type="body" idx="35"/>
+          </p:nvPr>
+        </p:nvSpPr>
+        <p:spPr/>
+        <p:txBody>
+          <a:bodyPr/>
+          <a:lstStyle/>
+          <a:p>
+            <a:pPr/>
+            <a:r>
+              <a:rPr lang="th-TH" dirty="0"/>
+              <a:t>ผลลัพธ์</a:t>
+            </a:r>
+          </a:p>
+        </p:txBody>
+      </p:sp>
+      <p:sp>
+        <p:nvSpPr>
+          <p:cNvPr id="20" name="RC"/>
+          <p:cNvSpPr>
+            <a:spLocks noGrp="1"/>
+          </p:cNvSpPr>
+          <p:nvPr>
+            <p:ph type="body" idx="36"/>
+          </p:nvPr>
+        </p:nvSpPr>
+        <p:spPr/>
+        <p:txBody>
+          <a:bodyPr/>
+          <a:lstStyle/>
+          <a:p>
+            <a:pPr/>
+            <a:r>
+              <a:rPr lang="th-TH" dirty="0"/>
+              <a:t>เอกสารหนึ่งใบผ่านครบห้าขั้นโดยไม่มีการคีย์ซ้ำเลย</a:t>
             </a:r>
           </a:p>
         </p:txBody>
@@ -24062,6 +25161,596 @@
 </file>
 
 <file path=ppt/slides/slide12.xml><?xml version="1.0" encoding="utf-8"?>
+<p:sld xmlns:a="http://schemas.openxmlformats.org/drawingml/2006/main" xmlns:r="http://schemas.openxmlformats.org/officeDocument/2006/relationships" xmlns:p="http://schemas.openxmlformats.org/presentationml/2006/main">
+  <p:cSld name="">
+    <p:spTree>
+      <p:nvGrpSpPr>
+        <p:cNvPr id="1" name=""/>
+        <p:cNvGrpSpPr/>
+        <p:nvPr/>
+      </p:nvGrpSpPr>
+      <p:grpSpPr>
+        <a:xfrm>
+          <a:off x="0" y="0"/>
+          <a:ext cx="0" cy="0"/>
+          <a:chOff x="0" y="0"/>
+          <a:chExt cx="0" cy="0"/>
+        </a:xfrm>
+      </p:grpSpPr>
+      <p:sp>
+        <p:nvSpPr>
+          <p:cNvPr id="2" name="Title"/>
+          <p:cNvSpPr>
+            <a:spLocks noGrp="1"/>
+          </p:cNvSpPr>
+          <p:nvPr>
+            <p:ph type="title"/>
+          </p:nvPr>
+        </p:nvSpPr>
+        <p:spPr/>
+        <p:txBody>
+          <a:bodyPr/>
+          <a:lstStyle/>
+          <a:p>
+            <a:pPr/>
+            <a:r>
+              <a:rPr lang="th-TH" dirty="0"/>
+              <a:t>ภาพรวมสถาปัตยกรรมระบบ</a:t>
+            </a:r>
+          </a:p>
+        </p:txBody>
+      </p:sp>
+      <p:sp>
+        <p:nvSpPr>
+          <p:cNvPr id="3" name="Sub"/>
+          <p:cNvSpPr>
+            <a:spLocks noGrp="1"/>
+          </p:cNvSpPr>
+          <p:nvPr>
+            <p:ph type="body" idx="1"/>
+          </p:nvPr>
+        </p:nvSpPr>
+        <p:spPr/>
+        <p:txBody>
+          <a:bodyPr/>
+          <a:lstStyle/>
+          <a:p>
+            <a:pPr/>
+            <a:r>
+              <a:rPr lang="th-TH" dirty="0"/>
+              <a:t>ใช้ชุดชิ้นส่วนมาตรฐาน — กล่องมุมตรง เส้นหักมุมฉาก ไม่มีเงา</a:t>
+            </a:r>
+          </a:p>
+        </p:txBody>
+      </p:sp>
+      <p:sp>
+        <p:nvSpPr>
+          <p:cNvPr id="4" name="Leg"/>
+          <p:cNvSpPr>
+            <a:spLocks noGrp="1"/>
+          </p:cNvSpPr>
+          <p:nvPr>
+            <p:ph type="body" idx="2"/>
+          </p:nvPr>
+        </p:nvSpPr>
+        <p:spPr/>
+        <p:txBody>
+          <a:bodyPr/>
+          <a:lstStyle/>
+          <a:p>
+            <a:pPr/>
+            <a:r>
+              <a:rPr lang="th-TH" dirty="0"/>
+              <a:t>กล่องทึบ = ระบบที่มีอยู่  ·  กล่องมีสีหมวด = ส่วนที่เพิ่ม  ·  เส้นทึบ = ข้อมูลไหลอัตโนมัติ</a:t>
+            </a:r>
+          </a:p>
+        </p:txBody>
+      </p:sp>
+      <p:sp>
+        <p:nvSpPr>
+          <p:cNvPr id="5" name="TL"/>
+          <p:cNvSpPr>
+            <a:spLocks noGrp="1"/>
+          </p:cNvSpPr>
+          <p:nvPr>
+            <p:ph type="body" idx="3"/>
+          </p:nvPr>
+        </p:nvSpPr>
+        <p:spPr/>
+        <p:txBody>
+          <a:bodyPr/>
+          <a:lstStyle/>
+          <a:p>
+            <a:pPr/>
+            <a:r>
+              <a:rPr lang="th-TH" dirty="0"/>
+              <a:t>สรุป</a:t>
+            </a:r>
+          </a:p>
+        </p:txBody>
+      </p:sp>
+      <p:sp>
+        <p:nvSpPr>
+          <p:cNvPr id="6" name="TC"/>
+          <p:cNvSpPr>
+            <a:spLocks noGrp="1"/>
+          </p:cNvSpPr>
+          <p:nvPr>
+            <p:ph type="body" idx="4"/>
+          </p:nvPr>
+        </p:nvSpPr>
+        <p:spPr/>
+        <p:txBody>
+          <a:bodyPr/>
+          <a:lstStyle/>
+          <a:p>
+            <a:pPr/>
+            <a:r>
+              <a:rPr lang="th-TH" dirty="0"/>
+              <a:t>ระบบเดิมไม่ถูกแก้ ของใหม่แทรกเป็นคิวและตัวตรวจกฎคั่นกลางเท่านั้น</a:t>
+            </a:r>
+          </a:p>
+        </p:txBody>
+      </p:sp>
+      <p:sp>
+        <p:nvSpPr>
+          <p:cNvPr id="10" name="Group Zone"/>
+          <p:cNvSpPr/>
+          <p:nvPr/>
+        </p:nvSpPr>
+        <p:spPr>
+          <a:xfrm>
+            <a:off x="3566160" y="2766060"/>
+            <a:ext cx="5257800" cy="1645920"/>
+          </a:xfrm>
+          <a:prstGeom prst="rect">
+            <a:avLst/>
+          </a:prstGeom>
+          <a:solidFill>
+            <a:srgbClr val="E8F6F5"/>
+          </a:solidFill>
+          <a:ln>
+            <a:noFill/>
+          </a:ln>
+        </p:spPr>
+        <p:txBody>
+          <a:bodyPr/>
+          <a:lstStyle/>
+          <a:p>
+            <a:endParaRPr lang="th-TH"/>
+          </a:p>
+        </p:txBody>
+      </p:sp>
+      <p:sp>
+        <p:nvSpPr>
+          <p:cNvPr id="11" name="Group Label"/>
+          <p:cNvSpPr/>
+          <p:nvPr/>
+        </p:nvSpPr>
+        <p:spPr>
+          <a:xfrm>
+            <a:off x="3840480" y="2926080"/>
+            <a:ext cx="3200400" cy="228600"/>
+          </a:xfrm>
+          <a:prstGeom prst="rect">
+            <a:avLst/>
+          </a:prstGeom>
+          <a:noFill/>
+          <a:ln>
+            <a:noFill/>
+          </a:ln>
+        </p:spPr>
+        <p:txBody>
+          <a:bodyPr wrap="square" anchor="ctr" lIns="0" tIns="0" rIns="0" bIns="0" rtlCol="0"/>
+          <a:lstStyle/>
+          <a:p>
+            <a:pPr algn="l" marL="0" indent="0">
+              <a:lnSpc>
+                <a:spcPct val="100000"/>
+              </a:lnSpc>
+              <a:buNone/>
+            </a:pPr>
+            <a:r>
+              <a:rPr lang="th-TH" sz="1200" b="1" spc="120" dirty="0">
+                <a:solidFill>
+                  <a:srgbClr val="216B7F"/>
+                </a:solidFill>
+                <a:latin typeface="+mn-lt"/>
+                <a:ea typeface="+mn-ea"/>
+                <a:cs typeface="+mn-cs"/>
+              </a:rPr>
+              <a:t>ส่วนที่เพิ่มใหม่</a:t>
+            </a:r>
+          </a:p>
+        </p:txBody>
+      </p:sp>
+      <p:sp>
+        <p:nvSpPr>
+          <p:cNvPr id="12" name="Box 1"/>
+          <p:cNvSpPr/>
+          <p:nvPr/>
+        </p:nvSpPr>
+        <p:spPr>
+          <a:xfrm>
+            <a:off x="1143000" y="3223260"/>
+            <a:ext cx="2011680" cy="731520"/>
+          </a:xfrm>
+          <a:prstGeom prst="rect">
+            <a:avLst/>
+          </a:prstGeom>
+          <a:solidFill>
+            <a:srgbClr val="23436D"/>
+          </a:solidFill>
+          <a:ln>
+            <a:noFill/>
+          </a:ln>
+        </p:spPr>
+        <p:txBody>
+          <a:bodyPr wrap="square" anchor="ctr" lIns="0" tIns="0" rIns="0" bIns="0" rtlCol="0"/>
+          <a:lstStyle/>
+          <a:p>
+            <a:pPr algn="ctr" marL="0" indent="0">
+              <a:lnSpc>
+                <a:spcPct val="110000"/>
+              </a:lnSpc>
+              <a:buNone/>
+            </a:pPr>
+            <a:r>
+              <a:rPr lang="th-TH" sz="1200" dirty="0">
+                <a:solidFill>
+                  <a:srgbClr val="FFFFFF"/>
+                </a:solidFill>
+                <a:latin typeface="+mn-lt"/>
+                <a:ea typeface="+mn-ea"/>
+                <a:cs typeface="+mn-cs"/>
+              </a:rPr>
+              <a:t>ระบบ ERP ปัจจุบัน</a:t>
+            </a:r>
+          </a:p>
+        </p:txBody>
+      </p:sp>
+      <p:sp>
+        <p:nvSpPr>
+          <p:cNvPr id="13" name="Box 2"/>
+          <p:cNvSpPr/>
+          <p:nvPr/>
+        </p:nvSpPr>
+        <p:spPr>
+          <a:xfrm>
+            <a:off x="3840480" y="3223260"/>
+            <a:ext cx="2011680" cy="731520"/>
+          </a:xfrm>
+          <a:prstGeom prst="rect">
+            <a:avLst/>
+          </a:prstGeom>
+          <a:solidFill>
+            <a:srgbClr val="FFFFFF"/>
+          </a:solidFill>
+          <a:ln w="12700">
+            <a:solidFill>
+              <a:srgbClr val="2A5EA0"/>
+            </a:solidFill>
+          </a:ln>
+        </p:spPr>
+        <p:txBody>
+          <a:bodyPr wrap="square" anchor="ctr" lIns="0" tIns="0" rIns="0" bIns="0" rtlCol="0"/>
+          <a:lstStyle/>
+          <a:p>
+            <a:pPr algn="ctr" marL="0" indent="0">
+              <a:lnSpc>
+                <a:spcPct val="110000"/>
+              </a:lnSpc>
+              <a:buNone/>
+            </a:pPr>
+            <a:r>
+              <a:rPr lang="th-TH" sz="1200" dirty="0">
+                <a:solidFill>
+                  <a:srgbClr val="333333"/>
+                </a:solidFill>
+                <a:latin typeface="+mn-lt"/>
+                <a:ea typeface="+mn-ea"/>
+                <a:cs typeface="+mn-cs"/>
+              </a:rPr>
+              <a:t>คิวเอกสารกลาง</a:t>
+            </a:r>
+          </a:p>
+        </p:txBody>
+      </p:sp>
+      <p:sp>
+        <p:nvSpPr>
+          <p:cNvPr id="113" name="Box 2 Tab"/>
+          <p:cNvSpPr/>
+          <p:nvPr/>
+        </p:nvSpPr>
+        <p:spPr>
+          <a:xfrm>
+            <a:off x="3954780" y="3337560"/>
+            <a:ext cx="205740" cy="45720"/>
+          </a:xfrm>
+          <a:prstGeom prst="rect">
+            <a:avLst/>
+          </a:prstGeom>
+          <a:solidFill>
+            <a:srgbClr val="2A5EA0"/>
+          </a:solidFill>
+          <a:ln>
+            <a:noFill/>
+          </a:ln>
+        </p:spPr>
+        <p:txBody>
+          <a:bodyPr/>
+          <a:lstStyle/>
+          <a:p>
+            <a:endParaRPr lang="th-TH"/>
+          </a:p>
+        </p:txBody>
+      </p:sp>
+      <p:sp>
+        <p:nvSpPr>
+          <p:cNvPr id="14" name="Box 3"/>
+          <p:cNvSpPr/>
+          <p:nvPr/>
+        </p:nvSpPr>
+        <p:spPr>
+          <a:xfrm>
+            <a:off x="6537960" y="3223260"/>
+            <a:ext cx="2011680" cy="731520"/>
+          </a:xfrm>
+          <a:prstGeom prst="rect">
+            <a:avLst/>
+          </a:prstGeom>
+          <a:solidFill>
+            <a:srgbClr val="FFFFFF"/>
+          </a:solidFill>
+          <a:ln w="12700">
+            <a:solidFill>
+              <a:srgbClr val="BB731B"/>
+            </a:solidFill>
+          </a:ln>
+        </p:spPr>
+        <p:txBody>
+          <a:bodyPr wrap="square" anchor="ctr" lIns="0" tIns="0" rIns="0" bIns="0" rtlCol="0"/>
+          <a:lstStyle/>
+          <a:p>
+            <a:pPr algn="ctr" marL="0" indent="0">
+              <a:lnSpc>
+                <a:spcPct val="110000"/>
+              </a:lnSpc>
+              <a:buNone/>
+            </a:pPr>
+            <a:r>
+              <a:rPr lang="th-TH" sz="1200" dirty="0">
+                <a:solidFill>
+                  <a:srgbClr val="333333"/>
+                </a:solidFill>
+                <a:latin typeface="+mn-lt"/>
+                <a:ea typeface="+mn-ea"/>
+                <a:cs typeface="+mn-cs"/>
+              </a:rPr>
+              <a:t>ตัวตรวจกฎธุรกิจ</a:t>
+            </a:r>
+          </a:p>
+        </p:txBody>
+      </p:sp>
+      <p:sp>
+        <p:nvSpPr>
+          <p:cNvPr id="114" name="Box 3 Tab"/>
+          <p:cNvSpPr/>
+          <p:nvPr/>
+        </p:nvSpPr>
+        <p:spPr>
+          <a:xfrm>
+            <a:off x="6652260" y="3337560"/>
+            <a:ext cx="205740" cy="45720"/>
+          </a:xfrm>
+          <a:prstGeom prst="rect">
+            <a:avLst/>
+          </a:prstGeom>
+          <a:solidFill>
+            <a:srgbClr val="BB731B"/>
+          </a:solidFill>
+          <a:ln>
+            <a:noFill/>
+          </a:ln>
+        </p:spPr>
+        <p:txBody>
+          <a:bodyPr/>
+          <a:lstStyle/>
+          <a:p>
+            <a:endParaRPr lang="th-TH"/>
+          </a:p>
+        </p:txBody>
+      </p:sp>
+      <p:sp>
+        <p:nvSpPr>
+          <p:cNvPr id="15" name="Box 4"/>
+          <p:cNvSpPr/>
+          <p:nvPr/>
+        </p:nvSpPr>
+        <p:spPr>
+          <a:xfrm>
+            <a:off x="9235440" y="3223260"/>
+            <a:ext cx="2011680" cy="731520"/>
+          </a:xfrm>
+          <a:prstGeom prst="rect">
+            <a:avLst/>
+          </a:prstGeom>
+          <a:solidFill>
+            <a:srgbClr val="23436D"/>
+          </a:solidFill>
+          <a:ln>
+            <a:noFill/>
+          </a:ln>
+        </p:spPr>
+        <p:txBody>
+          <a:bodyPr wrap="square" anchor="ctr" lIns="0" tIns="0" rIns="0" bIns="0" rtlCol="0"/>
+          <a:lstStyle/>
+          <a:p>
+            <a:pPr algn="ctr" marL="0" indent="0">
+              <a:lnSpc>
+                <a:spcPct val="110000"/>
+              </a:lnSpc>
+              <a:buNone/>
+            </a:pPr>
+            <a:r>
+              <a:rPr lang="th-TH" sz="1200" dirty="0">
+                <a:solidFill>
+                  <a:srgbClr val="FFFFFF"/>
+                </a:solidFill>
+                <a:latin typeface="+mn-lt"/>
+                <a:ea typeface="+mn-ea"/>
+                <a:cs typeface="+mn-cs"/>
+              </a:rPr>
+              <a:t>ระบบบัญชี</a:t>
+            </a:r>
+          </a:p>
+        </p:txBody>
+      </p:sp>
+      <p:sp>
+        <p:nvSpPr>
+          <p:cNvPr id="16" name="Link 1"/>
+          <p:cNvSpPr/>
+          <p:nvPr/>
+        </p:nvSpPr>
+        <p:spPr>
+          <a:xfrm>
+            <a:off x="3268980" y="3589020"/>
+            <a:ext cx="457200" cy="0"/>
+          </a:xfrm>
+          <a:prstGeom prst="line">
+            <a:avLst/>
+          </a:prstGeom>
+          <a:noFill/>
+          <a:ln w="15875" cap="flat">
+            <a:solidFill>
+              <a:srgbClr val="216B7F"/>
+            </a:solidFill>
+            <a:prstDash val="solid"/>
+            <a:tailEnd type="triangle" w="med" len="med"/>
+          </a:ln>
+        </p:spPr>
+        <p:txBody>
+          <a:bodyPr/>
+          <a:lstStyle/>
+          <a:p>
+            <a:endParaRPr lang="th-TH"/>
+          </a:p>
+        </p:txBody>
+      </p:sp>
+      <p:sp>
+        <p:nvSpPr>
+          <p:cNvPr id="17" name="Link 2"/>
+          <p:cNvSpPr/>
+          <p:nvPr/>
+        </p:nvSpPr>
+        <p:spPr>
+          <a:xfrm>
+            <a:off x="5966460" y="3589020"/>
+            <a:ext cx="457200" cy="0"/>
+          </a:xfrm>
+          <a:prstGeom prst="line">
+            <a:avLst/>
+          </a:prstGeom>
+          <a:noFill/>
+          <a:ln w="15875" cap="flat">
+            <a:solidFill>
+              <a:srgbClr val="216B7F"/>
+            </a:solidFill>
+            <a:prstDash val="solid"/>
+            <a:tailEnd type="triangle" w="med" len="med"/>
+          </a:ln>
+        </p:spPr>
+        <p:txBody>
+          <a:bodyPr/>
+          <a:lstStyle/>
+          <a:p>
+            <a:endParaRPr lang="th-TH"/>
+          </a:p>
+        </p:txBody>
+      </p:sp>
+      <p:sp>
+        <p:nvSpPr>
+          <p:cNvPr id="18" name="Link 3"/>
+          <p:cNvSpPr/>
+          <p:nvPr/>
+        </p:nvSpPr>
+        <p:spPr>
+          <a:xfrm>
+            <a:off x="8663940" y="3589020"/>
+            <a:ext cx="457200" cy="0"/>
+          </a:xfrm>
+          <a:prstGeom prst="line">
+            <a:avLst/>
+          </a:prstGeom>
+          <a:noFill/>
+          <a:ln w="15875" cap="flat">
+            <a:solidFill>
+              <a:srgbClr val="216B7F"/>
+            </a:solidFill>
+            <a:prstDash val="solid"/>
+            <a:tailEnd type="triangle" w="med" len="med"/>
+          </a:ln>
+        </p:spPr>
+        <p:txBody>
+          <a:bodyPr/>
+          <a:lstStyle/>
+          <a:p>
+            <a:endParaRPr lang="th-TH"/>
+          </a:p>
+        </p:txBody>
+      </p:sp>
+      <p:sp>
+        <p:nvSpPr>
+          <p:cNvPr id="19" name="Edge Label"/>
+          <p:cNvSpPr/>
+          <p:nvPr/>
+        </p:nvSpPr>
+        <p:spPr>
+          <a:xfrm>
+            <a:off x="5806440" y="3268980"/>
+            <a:ext cx="822960" cy="228600"/>
+          </a:xfrm>
+          <a:prstGeom prst="rect">
+            <a:avLst/>
+          </a:prstGeom>
+          <a:noFill/>
+          <a:ln>
+            <a:noFill/>
+          </a:ln>
+        </p:spPr>
+        <p:txBody>
+          <a:bodyPr wrap="square" anchor="ctr" lIns="0" tIns="0" rIns="0" bIns="0" rtlCol="0"/>
+          <a:lstStyle/>
+          <a:p>
+            <a:pPr algn="ctr" marL="0" indent="0">
+              <a:lnSpc>
+                <a:spcPct val="100000"/>
+              </a:lnSpc>
+              <a:buNone/>
+            </a:pPr>
+            <a:r>
+              <a:rPr lang="th-TH" sz="1000" dirty="0">
+                <a:solidFill>
+                  <a:srgbClr val="5F5F5F"/>
+                </a:solidFill>
+                <a:latin typeface="+mn-lt"/>
+                <a:ea typeface="+mn-ea"/>
+                <a:cs typeface="+mn-cs"/>
+              </a:rPr>
+              <a:t>ผ่านกฎ</a:t>
+            </a:r>
+          </a:p>
+        </p:txBody>
+      </p:sp>
+    </p:spTree>
+  </p:cSld>
+  <p:clrMapOvr>
+    <a:masterClrMapping/>
+  </p:clrMapOvr>
+</p:sld>
+</file>
+
+<file path=ppt/slides/slide13.xml><?xml version="1.0" encoding="utf-8"?>
 <p:sld xmlns:a="http://schemas.openxmlformats.org/drawingml/2006/main" xmlns:r="http://schemas.openxmlformats.org/officeDocument/2006/relationships" xmlns:p="http://schemas.openxmlformats.org/presentationml/2006/main">
   <p:cSld name="">
     <p:spTree>
@@ -25598,105 +27287,6 @@
 </p:sld>
 </file>
 
-<file path=ppt/slides/slide13.xml><?xml version="1.0" encoding="utf-8"?>
-<p:sld xmlns:a="http://schemas.openxmlformats.org/drawingml/2006/main" xmlns:r="http://schemas.openxmlformats.org/officeDocument/2006/relationships" xmlns:p="http://schemas.openxmlformats.org/presentationml/2006/main">
-  <p:cSld name="">
-    <p:spTree>
-      <p:nvGrpSpPr>
-        <p:cNvPr id="1" name=""/>
-        <p:cNvGrpSpPr/>
-        <p:nvPr/>
-      </p:nvGrpSpPr>
-      <p:grpSpPr>
-        <a:xfrm>
-          <a:off x="0" y="0"/>
-          <a:ext cx="0" cy="0"/>
-          <a:chOff x="0" y="0"/>
-          <a:chExt cx="0" cy="0"/>
-        </a:xfrm>
-      </p:grpSpPr>
-      <p:sp>
-        <p:nvSpPr>
-          <p:cNvPr id="2" name="Title"/>
-          <p:cNvSpPr>
-            <a:spLocks noGrp="1"/>
-          </p:cNvSpPr>
-          <p:nvPr>
-            <p:ph type="title"/>
-          </p:nvPr>
-        </p:nvSpPr>
-        <p:spPr/>
-        <p:txBody>
-          <a:bodyPr/>
-          <a:lstStyle/>
-          <a:p>
-            <a:pPr/>
-            <a:r>
-              <a:rPr lang="th-TH" dirty="0"/>
-              <a:t>ขอบเขตบริการของ NCT</a:t>
-            </a:r>
-          </a:p>
-        </p:txBody>
-      </p:sp>
-      <p:sp>
-        <p:nvSpPr>
-          <p:cNvPr id="3" name="Body"/>
-          <p:cNvSpPr>
-            <a:spLocks noGrp="1"/>
-          </p:cNvSpPr>
-          <p:nvPr>
-            <p:ph type="body" idx="1"/>
-          </p:nvPr>
-        </p:nvSpPr>
-        <p:spPr/>
-        <p:txBody>
-          <a:bodyPr/>
-          <a:lstStyle/>
-          <a:p>
-            <a:pPr/>
-            <a:r>
-              <a:rPr lang="th-TH" dirty="0"/>
-              <a:t>วางระบบโครงสร้างพื้นฐานไอทีสำหรับองค์กร</a:t>
-            </a:r>
-          </a:p>
-          <a:p>
-            <a:pPr lvl="1"/>
-            <a:r>
-              <a:rPr lang="th-TH" dirty="0"/>
-              <a:t>ออกแบบเครือข่าย ระบบสำรองข้อมูล และความปลอดภัย</a:t>
-            </a:r>
-          </a:p>
-          <a:p>
-            <a:pPr/>
-            <a:r>
-              <a:rPr lang="th-TH" dirty="0"/>
-              <a:t>ดูแลระบบต่อเนื่องแบบ Managed Service</a:t>
-            </a:r>
-          </a:p>
-          <a:p>
-            <a:pPr lvl="1"/>
-            <a:r>
-              <a:rPr lang="th-TH" dirty="0"/>
-              <a:t>มีทีมซัพพอร์ตตอบกลับภายใน SLA ที่ตกลงกัน</a:t>
-            </a:r>
-          </a:p>
-          <a:p>
-            <a:pPr/>
-            <a:r>
-              <a:rPr lang="th-TH" dirty="0"/>
-              <a:t>ให้คำปรึกษาการย้ายระบบขึ้นคลาวด์</a:t>
-            </a:r>
-          </a:p>
-        </p:txBody>
-      </p:sp>
-    </p:spTree>
-  </p:cSld>
-  <p:clrMapOvr>
-    <a:masterClrMapping/>
-  </p:clrMapOvr>
-</p:sld>
-</file>
-
 <file path=ppt/slides/slide14.xml><?xml version="1.0" encoding="utf-8"?>
 <p:sld xmlns:a="http://schemas.openxmlformats.org/drawingml/2006/main" xmlns:r="http://schemas.openxmlformats.org/officeDocument/2006/relationships" xmlns:p="http://schemas.openxmlformats.org/presentationml/2006/main">
   <p:cSld name="">
@@ -25732,14 +27322,14 @@
             <a:pPr/>
             <a:r>
               <a:rPr lang="th-TH" dirty="0"/>
-              <a:t>สามเสาหลักของบริการ</a:t>
-            </a:r>
-          </a:p>
-        </p:txBody>
-      </p:sp>
-      <p:sp>
-        <p:nvSpPr>
-          <p:cNvPr id="3" name="C1H"/>
+              <a:t>ขอบเขตบริการของ NCT</a:t>
+            </a:r>
+          </a:p>
+        </p:txBody>
+      </p:sp>
+      <p:sp>
+        <p:nvSpPr>
+          <p:cNvPr id="3" name="Body"/>
           <p:cNvSpPr>
             <a:spLocks noGrp="1"/>
           </p:cNvSpPr>
@@ -25755,122 +27345,35 @@
             <a:pPr/>
             <a:r>
               <a:rPr lang="th-TH" dirty="0"/>
-              <a:t>Infrastructure</a:t>
-            </a:r>
-          </a:p>
-        </p:txBody>
-      </p:sp>
-      <p:sp>
-        <p:nvSpPr>
-          <p:cNvPr id="4" name="C1B"/>
-          <p:cNvSpPr>
-            <a:spLocks noGrp="1"/>
-          </p:cNvSpPr>
-          <p:nvPr>
-            <p:ph type="body" idx="2"/>
-          </p:nvPr>
-        </p:nvSpPr>
-        <p:spPr/>
-        <p:txBody>
-          <a:bodyPr/>
-          <a:lstStyle/>
+              <a:t>วางระบบโครงสร้างพื้นฐานไอทีสำหรับองค์กร</a:t>
+            </a:r>
+          </a:p>
+          <a:p>
+            <a:pPr lvl="1"/>
+            <a:r>
+              <a:rPr lang="th-TH" dirty="0"/>
+              <a:t>ออกแบบเครือข่าย ระบบสำรองข้อมูล และความปลอดภัย</a:t>
+            </a:r>
+          </a:p>
           <a:p>
             <a:pPr/>
             <a:r>
               <a:rPr lang="th-TH" dirty="0"/>
-              <a:t>ออกแบบและติดตั้งเครือข่าย เซิร์ฟเวอร์ และระบบสำรองข้อมูล</a:t>
-            </a:r>
-          </a:p>
-        </p:txBody>
-      </p:sp>
-      <p:sp>
-        <p:nvSpPr>
-          <p:cNvPr id="5" name="C2H"/>
-          <p:cNvSpPr>
-            <a:spLocks noGrp="1"/>
-          </p:cNvSpPr>
-          <p:nvPr>
-            <p:ph type="body" idx="3"/>
-          </p:nvPr>
-        </p:nvSpPr>
-        <p:spPr/>
-        <p:txBody>
-          <a:bodyPr/>
-          <a:lstStyle/>
+              <a:t>ดูแลระบบต่อเนื่องแบบ Managed Service</a:t>
+            </a:r>
+          </a:p>
+          <a:p>
+            <a:pPr lvl="1"/>
+            <a:r>
+              <a:rPr lang="th-TH" dirty="0"/>
+              <a:t>มีทีมซัพพอร์ตตอบกลับภายใน SLA ที่ตกลงกัน</a:t>
+            </a:r>
+          </a:p>
           <a:p>
             <a:pPr/>
             <a:r>
               <a:rPr lang="th-TH" dirty="0"/>
-              <a:t>Managed Service</a:t>
-            </a:r>
-          </a:p>
-        </p:txBody>
-      </p:sp>
-      <p:sp>
-        <p:nvSpPr>
-          <p:cNvPr id="6" name="C2B"/>
-          <p:cNvSpPr>
-            <a:spLocks noGrp="1"/>
-          </p:cNvSpPr>
-          <p:nvPr>
-            <p:ph type="body" idx="4"/>
-          </p:nvPr>
-        </p:nvSpPr>
-        <p:spPr/>
-        <p:txBody>
-          <a:bodyPr/>
-          <a:lstStyle/>
-          <a:p>
-            <a:pPr/>
-            <a:r>
-              <a:rPr lang="th-TH" dirty="0"/>
-              <a:t>ดูแลระบบรายเดือน พร้อมทีมซัพพอร์ตและรายงานสุขภาพระบบ</a:t>
-            </a:r>
-          </a:p>
-        </p:txBody>
-      </p:sp>
-      <p:sp>
-        <p:nvSpPr>
-          <p:cNvPr id="7" name="C3H"/>
-          <p:cNvSpPr>
-            <a:spLocks noGrp="1"/>
-          </p:cNvSpPr>
-          <p:nvPr>
-            <p:ph type="body" idx="5"/>
-          </p:nvPr>
-        </p:nvSpPr>
-        <p:spPr/>
-        <p:txBody>
-          <a:bodyPr/>
-          <a:lstStyle/>
-          <a:p>
-            <a:pPr/>
-            <a:r>
-              <a:rPr lang="th-TH" dirty="0"/>
-              <a:t>Cloud &amp; Security</a:t>
-            </a:r>
-          </a:p>
-        </p:txBody>
-      </p:sp>
-      <p:sp>
-        <p:nvSpPr>
-          <p:cNvPr id="8" name="C3B"/>
-          <p:cNvSpPr>
-            <a:spLocks noGrp="1"/>
-          </p:cNvSpPr>
-          <p:nvPr>
-            <p:ph type="body" idx="6"/>
-          </p:nvPr>
-        </p:nvSpPr>
-        <p:spPr/>
-        <p:txBody>
-          <a:bodyPr/>
-          <a:lstStyle/>
-          <a:p>
-            <a:pPr/>
-            <a:r>
-              <a:rPr lang="th-TH" dirty="0"/>
-              <a:t>ย้ายระบบขึ้นคลาวด์ และวางมาตรการความปลอดภัยตามมาตรฐาน</a:t>
+              <a:t>ให้คำปรึกษาการย้ายระบบขึ้นคลาวด์</a:t>
             </a:r>
           </a:p>
         </p:txBody>
@@ -25918,14 +27421,14 @@
             <a:pPr/>
             <a:r>
               <a:rPr lang="th-TH" dirty="0"/>
-              <a:t>ตัวเลขที่บอกเรื่องเรา</a:t>
-            </a:r>
-          </a:p>
-        </p:txBody>
-      </p:sp>
-      <p:sp>
-        <p:nvSpPr>
-          <p:cNvPr id="3" name="F1"/>
+              <a:t>สามเสาหลักของบริการ</a:t>
+            </a:r>
+          </a:p>
+        </p:txBody>
+      </p:sp>
+      <p:sp>
+        <p:nvSpPr>
+          <p:cNvPr id="3" name="C1H"/>
           <p:cNvSpPr>
             <a:spLocks noGrp="1"/>
           </p:cNvSpPr>
@@ -25941,14 +27444,14 @@
             <a:pPr/>
             <a:r>
               <a:rPr lang="th-TH" dirty="0"/>
-              <a:t>12</a:t>
-            </a:r>
-          </a:p>
-        </p:txBody>
-      </p:sp>
-      <p:sp>
-        <p:nvSpPr>
-          <p:cNvPr id="4" name="F1L"/>
+              <a:t>Infrastructure</a:t>
+            </a:r>
+          </a:p>
+        </p:txBody>
+      </p:sp>
+      <p:sp>
+        <p:nvSpPr>
+          <p:cNvPr id="4" name="C1B"/>
           <p:cNvSpPr>
             <a:spLocks noGrp="1"/>
           </p:cNvSpPr>
@@ -25964,14 +27467,14 @@
             <a:pPr/>
             <a:r>
               <a:rPr lang="th-TH" dirty="0"/>
-              <a:t>ปีที่ให้บริการองค์กรไทย</a:t>
-            </a:r>
-          </a:p>
-        </p:txBody>
-      </p:sp>
-      <p:sp>
-        <p:nvSpPr>
-          <p:cNvPr id="5" name="F2"/>
+              <a:t>ออกแบบและติดตั้งเครือข่าย เซิร์ฟเวอร์ และระบบสำรองข้อมูล</a:t>
+            </a:r>
+          </a:p>
+        </p:txBody>
+      </p:sp>
+      <p:sp>
+        <p:nvSpPr>
+          <p:cNvPr id="5" name="C2H"/>
           <p:cNvSpPr>
             <a:spLocks noGrp="1"/>
           </p:cNvSpPr>
@@ -25987,14 +27490,14 @@
             <a:pPr/>
             <a:r>
               <a:rPr lang="th-TH" dirty="0"/>
-              <a:t>99.9%</a:t>
-            </a:r>
-          </a:p>
-        </p:txBody>
-      </p:sp>
-      <p:sp>
-        <p:nvSpPr>
-          <p:cNvPr id="6" name="F2L"/>
+              <a:t>Managed Service</a:t>
+            </a:r>
+          </a:p>
+        </p:txBody>
+      </p:sp>
+      <p:sp>
+        <p:nvSpPr>
+          <p:cNvPr id="6" name="C2B"/>
           <p:cNvSpPr>
             <a:spLocks noGrp="1"/>
           </p:cNvSpPr>
@@ -26010,14 +27513,14 @@
             <a:pPr/>
             <a:r>
               <a:rPr lang="th-TH" dirty="0"/>
-              <a:t>Uptime เฉลี่ยของระบบที่ดูแล</a:t>
-            </a:r>
-          </a:p>
-        </p:txBody>
-      </p:sp>
-      <p:sp>
-        <p:nvSpPr>
-          <p:cNvPr id="7" name="F3"/>
+              <a:t>ดูแลระบบรายเดือน พร้อมทีมซัพพอร์ตและรายงานสุขภาพระบบ</a:t>
+            </a:r>
+          </a:p>
+        </p:txBody>
+      </p:sp>
+      <p:sp>
+        <p:nvSpPr>
+          <p:cNvPr id="7" name="C3H"/>
           <p:cNvSpPr>
             <a:spLocks noGrp="1"/>
           </p:cNvSpPr>
@@ -26033,14 +27536,14 @@
             <a:pPr/>
             <a:r>
               <a:rPr lang="th-TH" dirty="0"/>
-              <a:t>24/7</a:t>
-            </a:r>
-          </a:p>
-        </p:txBody>
-      </p:sp>
-      <p:sp>
-        <p:nvSpPr>
-          <p:cNvPr id="8" name="F3L"/>
+              <a:t>Cloud &amp; Security</a:t>
+            </a:r>
+          </a:p>
+        </p:txBody>
+      </p:sp>
+      <p:sp>
+        <p:nvSpPr>
+          <p:cNvPr id="8" name="C3B"/>
           <p:cNvSpPr>
             <a:spLocks noGrp="1"/>
           </p:cNvSpPr>
@@ -26056,30 +27559,7 @@
             <a:pPr/>
             <a:r>
               <a:rPr lang="th-TH" dirty="0"/>
-              <a:t>ทีมเฝ้าระวังและตอบกลับ</a:t>
-            </a:r>
-          </a:p>
-        </p:txBody>
-      </p:sp>
-      <p:sp>
-        <p:nvSpPr>
-          <p:cNvPr id="9" name="FN"/>
-          <p:cNvSpPr>
-            <a:spLocks noGrp="1"/>
-          </p:cNvSpPr>
-          <p:nvPr>
-            <p:ph type="body" idx="7"/>
-          </p:nvPr>
-        </p:nvSpPr>
-        <p:spPr/>
-        <p:txBody>
-          <a:bodyPr/>
-          <a:lstStyle/>
-          <a:p>
-            <a:pPr/>
-            <a:r>
-              <a:rPr lang="th-TH" dirty="0"/>
-              <a:t>ข้อมูล ณ ไตรมาส 1 ปี 2569</a:t>
+              <a:t>ย้ายระบบขึ้นคลาวด์ และวางมาตรการความปลอดภัยตามมาตรฐาน</a:t>
             </a:r>
           </a:p>
         </p:txBody>
@@ -26111,7 +27591,30 @@
       </p:grpSpPr>
       <p:sp>
         <p:nvSpPr>
-          <p:cNvPr id="2" name="Q"/>
+          <p:cNvPr id="2" name="Title"/>
+          <p:cNvSpPr>
+            <a:spLocks noGrp="1"/>
+          </p:cNvSpPr>
+          <p:nvPr>
+            <p:ph type="title"/>
+          </p:nvPr>
+        </p:nvSpPr>
+        <p:spPr/>
+        <p:txBody>
+          <a:bodyPr/>
+          <a:lstStyle/>
+          <a:p>
+            <a:pPr/>
+            <a:r>
+              <a:rPr lang="th-TH" dirty="0"/>
+              <a:t>ตัวเลขที่บอกเรื่องเรา</a:t>
+            </a:r>
+          </a:p>
+        </p:txBody>
+      </p:sp>
+      <p:sp>
+        <p:nvSpPr>
+          <p:cNvPr id="3" name="F1"/>
           <p:cNvSpPr>
             <a:spLocks noGrp="1"/>
           </p:cNvSpPr>
@@ -26127,14 +27630,14 @@
             <a:pPr/>
             <a:r>
               <a:rPr lang="th-TH" dirty="0"/>
-              <a:t>ระบบไม่ล่มอีกเลยตั้งแต่เปลี่ยนมาใช้ทีมนี้ดูแล และเราวางแผนงบประมาณได้ล่วงหน้าจริง ๆ</a:t>
-            </a:r>
-          </a:p>
-        </p:txBody>
-      </p:sp>
-      <p:sp>
-        <p:nvSpPr>
-          <p:cNvPr id="3" name="A"/>
+              <a:t>12</a:t>
+            </a:r>
+          </a:p>
+        </p:txBody>
+      </p:sp>
+      <p:sp>
+        <p:nvSpPr>
+          <p:cNvPr id="4" name="F1L"/>
           <p:cNvSpPr>
             <a:spLocks noGrp="1"/>
           </p:cNvSpPr>
@@ -26150,7 +27653,122 @@
             <a:pPr/>
             <a:r>
               <a:rPr lang="th-TH" dirty="0"/>
-              <a:t>คุณสมชาย ป. — ผู้จัดการฝ่ายไอที, บริษัทตัวอย่าง จำกัด</a:t>
+              <a:t>ปีที่ให้บริการองค์กรไทย</a:t>
+            </a:r>
+          </a:p>
+        </p:txBody>
+      </p:sp>
+      <p:sp>
+        <p:nvSpPr>
+          <p:cNvPr id="5" name="F2"/>
+          <p:cNvSpPr>
+            <a:spLocks noGrp="1"/>
+          </p:cNvSpPr>
+          <p:nvPr>
+            <p:ph type="body" idx="3"/>
+          </p:nvPr>
+        </p:nvSpPr>
+        <p:spPr/>
+        <p:txBody>
+          <a:bodyPr/>
+          <a:lstStyle/>
+          <a:p>
+            <a:pPr/>
+            <a:r>
+              <a:rPr lang="th-TH" dirty="0"/>
+              <a:t>99.9%</a:t>
+            </a:r>
+          </a:p>
+        </p:txBody>
+      </p:sp>
+      <p:sp>
+        <p:nvSpPr>
+          <p:cNvPr id="6" name="F2L"/>
+          <p:cNvSpPr>
+            <a:spLocks noGrp="1"/>
+          </p:cNvSpPr>
+          <p:nvPr>
+            <p:ph type="body" idx="4"/>
+          </p:nvPr>
+        </p:nvSpPr>
+        <p:spPr/>
+        <p:txBody>
+          <a:bodyPr/>
+          <a:lstStyle/>
+          <a:p>
+            <a:pPr/>
+            <a:r>
+              <a:rPr lang="th-TH" dirty="0"/>
+              <a:t>Uptime เฉลี่ยของระบบที่ดูแล</a:t>
+            </a:r>
+          </a:p>
+        </p:txBody>
+      </p:sp>
+      <p:sp>
+        <p:nvSpPr>
+          <p:cNvPr id="7" name="F3"/>
+          <p:cNvSpPr>
+            <a:spLocks noGrp="1"/>
+          </p:cNvSpPr>
+          <p:nvPr>
+            <p:ph type="body" idx="5"/>
+          </p:nvPr>
+        </p:nvSpPr>
+        <p:spPr/>
+        <p:txBody>
+          <a:bodyPr/>
+          <a:lstStyle/>
+          <a:p>
+            <a:pPr/>
+            <a:r>
+              <a:rPr lang="th-TH" dirty="0"/>
+              <a:t>24/7</a:t>
+            </a:r>
+          </a:p>
+        </p:txBody>
+      </p:sp>
+      <p:sp>
+        <p:nvSpPr>
+          <p:cNvPr id="8" name="F3L"/>
+          <p:cNvSpPr>
+            <a:spLocks noGrp="1"/>
+          </p:cNvSpPr>
+          <p:nvPr>
+            <p:ph type="body" idx="6"/>
+          </p:nvPr>
+        </p:nvSpPr>
+        <p:spPr/>
+        <p:txBody>
+          <a:bodyPr/>
+          <a:lstStyle/>
+          <a:p>
+            <a:pPr/>
+            <a:r>
+              <a:rPr lang="th-TH" dirty="0"/>
+              <a:t>ทีมเฝ้าระวังและตอบกลับ</a:t>
+            </a:r>
+          </a:p>
+        </p:txBody>
+      </p:sp>
+      <p:sp>
+        <p:nvSpPr>
+          <p:cNvPr id="9" name="FN"/>
+          <p:cNvSpPr>
+            <a:spLocks noGrp="1"/>
+          </p:cNvSpPr>
+          <p:nvPr>
+            <p:ph type="body" idx="7"/>
+          </p:nvPr>
+        </p:nvSpPr>
+        <p:spPr/>
+        <p:txBody>
+          <a:bodyPr/>
+          <a:lstStyle/>
+          <a:p>
+            <a:pPr/>
+            <a:r>
+              <a:rPr lang="th-TH" dirty="0"/>
+              <a:t>ข้อมูล ณ ไตรมาส 1 ปี 2569</a:t>
             </a:r>
           </a:p>
         </p:txBody>
@@ -26164,6 +27782,77 @@
 </file>
 
 <file path=ppt/slides/slide17.xml><?xml version="1.0" encoding="utf-8"?>
+<p:sld xmlns:a="http://schemas.openxmlformats.org/drawingml/2006/main" xmlns:r="http://schemas.openxmlformats.org/officeDocument/2006/relationships" xmlns:p="http://schemas.openxmlformats.org/presentationml/2006/main">
+  <p:cSld name="">
+    <p:spTree>
+      <p:nvGrpSpPr>
+        <p:cNvPr id="1" name=""/>
+        <p:cNvGrpSpPr/>
+        <p:nvPr/>
+      </p:nvGrpSpPr>
+      <p:grpSpPr>
+        <a:xfrm>
+          <a:off x="0" y="0"/>
+          <a:ext cx="0" cy="0"/>
+          <a:chOff x="0" y="0"/>
+          <a:chExt cx="0" cy="0"/>
+        </a:xfrm>
+      </p:grpSpPr>
+      <p:sp>
+        <p:nvSpPr>
+          <p:cNvPr id="2" name="Q"/>
+          <p:cNvSpPr>
+            <a:spLocks noGrp="1"/>
+          </p:cNvSpPr>
+          <p:nvPr>
+            <p:ph type="body" idx="1"/>
+          </p:nvPr>
+        </p:nvSpPr>
+        <p:spPr/>
+        <p:txBody>
+          <a:bodyPr/>
+          <a:lstStyle/>
+          <a:p>
+            <a:pPr/>
+            <a:r>
+              <a:rPr lang="th-TH" dirty="0"/>
+              <a:t>ระบบไม่ล่มอีกเลยตั้งแต่เปลี่ยนมาใช้ทีมนี้ดูแล และเราวางแผนงบประมาณได้ล่วงหน้าจริง ๆ</a:t>
+            </a:r>
+          </a:p>
+        </p:txBody>
+      </p:sp>
+      <p:sp>
+        <p:nvSpPr>
+          <p:cNvPr id="3" name="A"/>
+          <p:cNvSpPr>
+            <a:spLocks noGrp="1"/>
+          </p:cNvSpPr>
+          <p:nvPr>
+            <p:ph type="body" idx="2"/>
+          </p:nvPr>
+        </p:nvSpPr>
+        <p:spPr/>
+        <p:txBody>
+          <a:bodyPr/>
+          <a:lstStyle/>
+          <a:p>
+            <a:pPr/>
+            <a:r>
+              <a:rPr lang="th-TH" dirty="0"/>
+              <a:t>คุณสมชาย ป. — ผู้จัดการฝ่ายไอที, บริษัทตัวอย่าง จำกัด</a:t>
+            </a:r>
+          </a:p>
+        </p:txBody>
+      </p:sp>
+    </p:spTree>
+  </p:cSld>
+  <p:clrMapOvr>
+    <a:masterClrMapping/>
+  </p:clrMapOvr>
+</p:sld>
+</file>
+
+<file path=ppt/slides/slide18.xml><?xml version="1.0" encoding="utf-8"?>
 <p:sld xmlns:a="http://schemas.openxmlformats.org/drawingml/2006/main" xmlns:r="http://schemas.openxmlformats.org/officeDocument/2006/relationships" xmlns:p="http://schemas.openxmlformats.org/presentationml/2006/main">
   <p:cSld name="">
     <p:spTree>
@@ -26894,1032 +28583,6 @@
 </p:sld>
 </file>
 
-<file path=ppt/slides/slide18.xml><?xml version="1.0" encoding="utf-8"?>
-<p:sld xmlns:a="http://schemas.openxmlformats.org/drawingml/2006/main" xmlns:r="http://schemas.openxmlformats.org/officeDocument/2006/relationships" xmlns:p="http://schemas.openxmlformats.org/presentationml/2006/main">
-  <p:cSld name="">
-    <p:spTree>
-      <p:nvGrpSpPr>
-        <p:cNvPr id="1" name=""/>
-        <p:cNvGrpSpPr/>
-        <p:nvPr/>
-      </p:nvGrpSpPr>
-      <p:grpSpPr>
-        <a:xfrm>
-          <a:off x="0" y="0"/>
-          <a:ext cx="0" cy="0"/>
-          <a:chOff x="0" y="0"/>
-          <a:chExt cx="0" cy="0"/>
-        </a:xfrm>
-      </p:grpSpPr>
-      <p:sp>
-        <p:nvSpPr>
-          <p:cNvPr id="2" name="Title"/>
-          <p:cNvSpPr>
-            <a:spLocks noGrp="1"/>
-          </p:cNvSpPr>
-          <p:nvPr>
-            <p:ph type="title"/>
-          </p:nvPr>
-        </p:nvSpPr>
-        <p:spPr/>
-        <p:txBody>
-          <a:bodyPr/>
-          <a:lstStyle/>
-          <a:p>
-            <a:pPr/>
-            <a:r>
-              <a:rPr lang="th-TH" dirty="0"/>
-              <a:t>แผนงาน 12 เดือน ขึ้นระบบต้นเดือนที่ 7</a:t>
-            </a:r>
-          </a:p>
-        </p:txBody>
-      </p:sp>
-      <p:graphicFrame>
-        <p:nvGraphicFramePr>
-          <p:cNvPr id="3" name="Plan"/>
-          <p:cNvGraphicFramePr>
-            <a:graphicFrameLocks noGrp="1"/>
-          </p:cNvGraphicFramePr>
-          <p:nvPr>
-            <p:ph type="chart" idx="1"/>
-          </p:nvPr>
-        </p:nvGraphicFramePr>
-        <p:xfrm>
-          <a:off x="3566160" y="2057400"/>
-          <a:ext cx="7711440" cy="3108960"/>
-        </p:xfrm>
-        <a:graphic>
-          <a:graphicData uri="http://schemas.openxmlformats.org/drawingml/2006/chart">
-            <c:chart xmlns:c="http://schemas.openxmlformats.org/drawingml/2006/chart" r:id="rId2"/>
-          </a:graphicData>
-        </a:graphic>
-      </p:graphicFrame>
-      <p:sp>
-        <p:nvSpPr>
-          <p:cNvPr id="4" name="P1"/>
-          <p:cNvSpPr>
-            <a:spLocks noGrp="1"/>
-          </p:cNvSpPr>
-          <p:nvPr>
-            <p:ph type="body" idx="20"/>
-          </p:nvPr>
-        </p:nvSpPr>
-        <p:spPr/>
-        <p:txBody>
-          <a:bodyPr/>
-          <a:lstStyle/>
-          <a:p>
-            <a:pPr/>
-            <a:r>
-              <a:rPr lang="th-TH" dirty="0"/>
-              <a:t>ด.1</a:t>
-            </a:r>
-          </a:p>
-        </p:txBody>
-      </p:sp>
-      <p:sp>
-        <p:nvSpPr>
-          <p:cNvPr id="5" name="P2"/>
-          <p:cNvSpPr>
-            <a:spLocks noGrp="1"/>
-          </p:cNvSpPr>
-          <p:nvPr>
-            <p:ph type="body" idx="21"/>
-          </p:nvPr>
-        </p:nvSpPr>
-        <p:spPr/>
-        <p:txBody>
-          <a:bodyPr/>
-          <a:lstStyle/>
-          <a:p>
-            <a:pPr/>
-            <a:r>
-              <a:rPr lang="th-TH" dirty="0"/>
-              <a:t>ด.2</a:t>
-            </a:r>
-          </a:p>
-        </p:txBody>
-      </p:sp>
-      <p:sp>
-        <p:nvSpPr>
-          <p:cNvPr id="6" name="P3"/>
-          <p:cNvSpPr>
-            <a:spLocks noGrp="1"/>
-          </p:cNvSpPr>
-          <p:nvPr>
-            <p:ph type="body" idx="22"/>
-          </p:nvPr>
-        </p:nvSpPr>
-        <p:spPr/>
-        <p:txBody>
-          <a:bodyPr/>
-          <a:lstStyle/>
-          <a:p>
-            <a:pPr/>
-            <a:r>
-              <a:rPr lang="th-TH" dirty="0"/>
-              <a:t>ด.3</a:t>
-            </a:r>
-          </a:p>
-        </p:txBody>
-      </p:sp>
-      <p:sp>
-        <p:nvSpPr>
-          <p:cNvPr id="7" name="P4"/>
-          <p:cNvSpPr>
-            <a:spLocks noGrp="1"/>
-          </p:cNvSpPr>
-          <p:nvPr>
-            <p:ph type="body" idx="23"/>
-          </p:nvPr>
-        </p:nvSpPr>
-        <p:spPr/>
-        <p:txBody>
-          <a:bodyPr/>
-          <a:lstStyle/>
-          <a:p>
-            <a:pPr/>
-            <a:r>
-              <a:rPr lang="th-TH" dirty="0"/>
-              <a:t>ด.4</a:t>
-            </a:r>
-          </a:p>
-        </p:txBody>
-      </p:sp>
-      <p:sp>
-        <p:nvSpPr>
-          <p:cNvPr id="8" name="P5"/>
-          <p:cNvSpPr>
-            <a:spLocks noGrp="1"/>
-          </p:cNvSpPr>
-          <p:nvPr>
-            <p:ph type="body" idx="24"/>
-          </p:nvPr>
-        </p:nvSpPr>
-        <p:spPr/>
-        <p:txBody>
-          <a:bodyPr/>
-          <a:lstStyle/>
-          <a:p>
-            <a:pPr/>
-            <a:r>
-              <a:rPr lang="th-TH" dirty="0"/>
-              <a:t>ด.5</a:t>
-            </a:r>
-          </a:p>
-        </p:txBody>
-      </p:sp>
-      <p:sp>
-        <p:nvSpPr>
-          <p:cNvPr id="9" name="P6"/>
-          <p:cNvSpPr>
-            <a:spLocks noGrp="1"/>
-          </p:cNvSpPr>
-          <p:nvPr>
-            <p:ph type="body" idx="25"/>
-          </p:nvPr>
-        </p:nvSpPr>
-        <p:spPr/>
-        <p:txBody>
-          <a:bodyPr/>
-          <a:lstStyle/>
-          <a:p>
-            <a:pPr/>
-            <a:r>
-              <a:rPr lang="th-TH" dirty="0"/>
-              <a:t>ด.6</a:t>
-            </a:r>
-          </a:p>
-        </p:txBody>
-      </p:sp>
-      <p:sp>
-        <p:nvSpPr>
-          <p:cNvPr id="10" name="P7"/>
-          <p:cNvSpPr>
-            <a:spLocks noGrp="1"/>
-          </p:cNvSpPr>
-          <p:nvPr>
-            <p:ph type="body" idx="26"/>
-          </p:nvPr>
-        </p:nvSpPr>
-        <p:spPr/>
-        <p:txBody>
-          <a:bodyPr/>
-          <a:lstStyle/>
-          <a:p>
-            <a:pPr/>
-            <a:r>
-              <a:rPr lang="th-TH" dirty="0"/>
-              <a:t>ด.7</a:t>
-            </a:r>
-          </a:p>
-        </p:txBody>
-      </p:sp>
-      <p:sp>
-        <p:nvSpPr>
-          <p:cNvPr id="11" name="P8"/>
-          <p:cNvSpPr>
-            <a:spLocks noGrp="1"/>
-          </p:cNvSpPr>
-          <p:nvPr>
-            <p:ph type="body" idx="27"/>
-          </p:nvPr>
-        </p:nvSpPr>
-        <p:spPr/>
-        <p:txBody>
-          <a:bodyPr/>
-          <a:lstStyle/>
-          <a:p>
-            <a:pPr/>
-            <a:r>
-              <a:rPr lang="th-TH" dirty="0"/>
-              <a:t>ด.8</a:t>
-            </a:r>
-          </a:p>
-        </p:txBody>
-      </p:sp>
-      <p:sp>
-        <p:nvSpPr>
-          <p:cNvPr id="12" name="P9"/>
-          <p:cNvSpPr>
-            <a:spLocks noGrp="1"/>
-          </p:cNvSpPr>
-          <p:nvPr>
-            <p:ph type="body" idx="28"/>
-          </p:nvPr>
-        </p:nvSpPr>
-        <p:spPr/>
-        <p:txBody>
-          <a:bodyPr/>
-          <a:lstStyle/>
-          <a:p>
-            <a:pPr/>
-            <a:r>
-              <a:rPr lang="th-TH" dirty="0"/>
-              <a:t>ด.9</a:t>
-            </a:r>
-          </a:p>
-        </p:txBody>
-      </p:sp>
-      <p:sp>
-        <p:nvSpPr>
-          <p:cNvPr id="13" name="P10"/>
-          <p:cNvSpPr>
-            <a:spLocks noGrp="1"/>
-          </p:cNvSpPr>
-          <p:nvPr>
-            <p:ph type="body" idx="29"/>
-          </p:nvPr>
-        </p:nvSpPr>
-        <p:spPr/>
-        <p:txBody>
-          <a:bodyPr/>
-          <a:lstStyle/>
-          <a:p>
-            <a:pPr/>
-            <a:r>
-              <a:rPr lang="th-TH" dirty="0"/>
-              <a:t>ด.10</a:t>
-            </a:r>
-          </a:p>
-        </p:txBody>
-      </p:sp>
-      <p:sp>
-        <p:nvSpPr>
-          <p:cNvPr id="14" name="P11"/>
-          <p:cNvSpPr>
-            <a:spLocks noGrp="1"/>
-          </p:cNvSpPr>
-          <p:nvPr>
-            <p:ph type="body" idx="30"/>
-          </p:nvPr>
-        </p:nvSpPr>
-        <p:spPr/>
-        <p:txBody>
-          <a:bodyPr/>
-          <a:lstStyle/>
-          <a:p>
-            <a:pPr/>
-            <a:r>
-              <a:rPr lang="th-TH" dirty="0"/>
-              <a:t>ด.11</a:t>
-            </a:r>
-          </a:p>
-        </p:txBody>
-      </p:sp>
-      <p:sp>
-        <p:nvSpPr>
-          <p:cNvPr id="15" name="P12"/>
-          <p:cNvSpPr>
-            <a:spLocks noGrp="1"/>
-          </p:cNvSpPr>
-          <p:nvPr>
-            <p:ph type="body" idx="31"/>
-          </p:nvPr>
-        </p:nvSpPr>
-        <p:spPr/>
-        <p:txBody>
-          <a:bodyPr/>
-          <a:lstStyle/>
-          <a:p>
-            <a:pPr/>
-            <a:r>
-              <a:rPr lang="th-TH" dirty="0"/>
-              <a:t>ด.12</a:t>
-            </a:r>
-          </a:p>
-        </p:txBody>
-      </p:sp>
-      <p:sp>
-        <p:nvSpPr>
-          <p:cNvPr id="16" name="R1"/>
-          <p:cNvSpPr>
-            <a:spLocks noGrp="1"/>
-          </p:cNvSpPr>
-          <p:nvPr>
-            <p:ph type="body" idx="32"/>
-          </p:nvPr>
-        </p:nvSpPr>
-        <p:spPr/>
-        <p:txBody>
-          <a:bodyPr/>
-          <a:lstStyle/>
-          <a:p>
-            <a:pPr/>
-            <a:r>
-              <a:rPr lang="th-TH" dirty="0"/>
-              <a:t>1. เตรียมระบบ</a:t>
-            </a:r>
-          </a:p>
-        </p:txBody>
-      </p:sp>
-      <p:sp>
-        <p:nvSpPr>
-          <p:cNvPr id="17" name="D1"/>
-          <p:cNvSpPr>
-            <a:spLocks noGrp="1"/>
-          </p:cNvSpPr>
-          <p:nvPr>
-            <p:ph type="body" idx="33"/>
-          </p:nvPr>
-        </p:nvSpPr>
-        <p:spPr/>
-        <p:txBody>
-          <a:bodyPr/>
-          <a:lstStyle/>
-          <a:p>
-            <a:pPr/>
-            <a:r>
-              <a:rPr lang="th-TH" dirty="0"/>
-              <a:t>4 สัปดาห์</a:t>
-            </a:r>
-          </a:p>
-        </p:txBody>
-      </p:sp>
-      <p:sp>
-        <p:nvSpPr>
-          <p:cNvPr id="18" name="R2"/>
-          <p:cNvSpPr>
-            <a:spLocks noGrp="1"/>
-          </p:cNvSpPr>
-          <p:nvPr>
-            <p:ph type="body" idx="34"/>
-          </p:nvPr>
-        </p:nvSpPr>
-        <p:spPr/>
-        <p:txBody>
-          <a:bodyPr/>
-          <a:lstStyle/>
-          <a:p>
-            <a:pPr/>
-            <a:r>
-              <a:rPr lang="th-TH" dirty="0"/>
-              <a:t>2. วิเคราะห์และออกแบบ</a:t>
-            </a:r>
-          </a:p>
-        </p:txBody>
-      </p:sp>
-      <p:sp>
-        <p:nvSpPr>
-          <p:cNvPr id="19" name="D2"/>
-          <p:cNvSpPr>
-            <a:spLocks noGrp="1"/>
-          </p:cNvSpPr>
-          <p:nvPr>
-            <p:ph type="body" idx="35"/>
-          </p:nvPr>
-        </p:nvSpPr>
-        <p:spPr/>
-        <p:txBody>
-          <a:bodyPr/>
-          <a:lstStyle/>
-          <a:p>
-            <a:pPr/>
-            <a:r>
-              <a:rPr lang="th-TH" dirty="0"/>
-              <a:t>6 สัปดาห์</a:t>
-            </a:r>
-          </a:p>
-        </p:txBody>
-      </p:sp>
-      <p:sp>
-        <p:nvSpPr>
-          <p:cNvPr id="20" name="R3"/>
-          <p:cNvSpPr>
-            <a:spLocks noGrp="1"/>
-          </p:cNvSpPr>
-          <p:nvPr>
-            <p:ph type="body" idx="36"/>
-          </p:nvPr>
-        </p:nvSpPr>
-        <p:spPr/>
-        <p:txBody>
-          <a:bodyPr/>
-          <a:lstStyle/>
-          <a:p>
-            <a:pPr/>
-            <a:r>
-              <a:rPr lang="th-TH" dirty="0"/>
-              <a:t>3. พัฒนาและตั้งค่าระบบ</a:t>
-            </a:r>
-          </a:p>
-        </p:txBody>
-      </p:sp>
-      <p:sp>
-        <p:nvSpPr>
-          <p:cNvPr id="21" name="D3"/>
-          <p:cNvSpPr>
-            <a:spLocks noGrp="1"/>
-          </p:cNvSpPr>
-          <p:nvPr>
-            <p:ph type="body" idx="37"/>
-          </p:nvPr>
-        </p:nvSpPr>
-        <p:spPr/>
-        <p:txBody>
-          <a:bodyPr/>
-          <a:lstStyle/>
-          <a:p>
-            <a:pPr/>
-            <a:r>
-              <a:rPr lang="th-TH" dirty="0"/>
-              <a:t>10 สัปดาห์</a:t>
-            </a:r>
-          </a:p>
-        </p:txBody>
-      </p:sp>
-      <p:sp>
-        <p:nvSpPr>
-          <p:cNvPr id="22" name="R4"/>
-          <p:cNvSpPr>
-            <a:spLocks noGrp="1"/>
-          </p:cNvSpPr>
-          <p:nvPr>
-            <p:ph type="body" idx="38"/>
-          </p:nvPr>
-        </p:nvSpPr>
-        <p:spPr/>
-        <p:txBody>
-          <a:bodyPr/>
-          <a:lstStyle/>
-          <a:p>
-            <a:pPr/>
-            <a:r>
-              <a:rPr lang="th-TH" dirty="0"/>
-              <a:t>4. ทดสอบ UAT</a:t>
-            </a:r>
-          </a:p>
-        </p:txBody>
-      </p:sp>
-      <p:sp>
-        <p:nvSpPr>
-          <p:cNvPr id="23" name="D4"/>
-          <p:cNvSpPr>
-            <a:spLocks noGrp="1"/>
-          </p:cNvSpPr>
-          <p:nvPr>
-            <p:ph type="body" idx="39"/>
-          </p:nvPr>
-        </p:nvSpPr>
-        <p:spPr/>
-        <p:txBody>
-          <a:bodyPr/>
-          <a:lstStyle/>
-          <a:p>
-            <a:pPr/>
-            <a:r>
-              <a:rPr lang="th-TH" dirty="0"/>
-              <a:t>4 สัปดาห์</a:t>
-            </a:r>
-          </a:p>
-        </p:txBody>
-      </p:sp>
-      <p:sp>
-        <p:nvSpPr>
-          <p:cNvPr id="24" name="R5"/>
-          <p:cNvSpPr>
-            <a:spLocks noGrp="1"/>
-          </p:cNvSpPr>
-          <p:nvPr>
-            <p:ph type="body" idx="40"/>
-          </p:nvPr>
-        </p:nvSpPr>
-        <p:spPr/>
-        <p:txBody>
-          <a:bodyPr/>
-          <a:lstStyle/>
-          <a:p>
-            <a:pPr/>
-            <a:r>
-              <a:rPr lang="th-TH" dirty="0"/>
-              <a:t>5. อบรมผู้ใช้</a:t>
-            </a:r>
-          </a:p>
-        </p:txBody>
-      </p:sp>
-      <p:sp>
-        <p:nvSpPr>
-          <p:cNvPr id="25" name="D5"/>
-          <p:cNvSpPr>
-            <a:spLocks noGrp="1"/>
-          </p:cNvSpPr>
-          <p:nvPr>
-            <p:ph type="body" idx="41"/>
-          </p:nvPr>
-        </p:nvSpPr>
-        <p:spPr/>
-        <p:txBody>
-          <a:bodyPr/>
-          <a:lstStyle/>
-          <a:p>
-            <a:pPr/>
-            <a:r>
-              <a:rPr lang="th-TH" dirty="0"/>
-              <a:t>1 สัปดาห์</a:t>
-            </a:r>
-          </a:p>
-        </p:txBody>
-      </p:sp>
-      <p:sp>
-        <p:nvSpPr>
-          <p:cNvPr id="26" name="R6"/>
-          <p:cNvSpPr>
-            <a:spLocks noGrp="1"/>
-          </p:cNvSpPr>
-          <p:nvPr>
-            <p:ph type="body" idx="42"/>
-          </p:nvPr>
-        </p:nvSpPr>
-        <p:spPr/>
-        <p:txBody>
-          <a:bodyPr/>
-          <a:lstStyle/>
-          <a:p>
-            <a:pPr/>
-            <a:r>
-              <a:rPr lang="th-TH" dirty="0"/>
-              <a:t>6. ขึ้นระบบ</a:t>
-            </a:r>
-          </a:p>
-        </p:txBody>
-      </p:sp>
-      <p:sp>
-        <p:nvSpPr>
-          <p:cNvPr id="27" name="D6"/>
-          <p:cNvSpPr>
-            <a:spLocks noGrp="1"/>
-          </p:cNvSpPr>
-          <p:nvPr>
-            <p:ph type="body" idx="43"/>
-          </p:nvPr>
-        </p:nvSpPr>
-        <p:spPr/>
-        <p:txBody>
-          <a:bodyPr/>
-          <a:lstStyle/>
-          <a:p>
-            <a:pPr/>
-            <a:r>
-              <a:rPr lang="th-TH" dirty="0"/>
-              <a:t>2 สัปดาห์</a:t>
-            </a:r>
-          </a:p>
-        </p:txBody>
-      </p:sp>
-      <p:sp>
-        <p:nvSpPr>
-          <p:cNvPr id="28" name="R7"/>
-          <p:cNvSpPr>
-            <a:spLocks noGrp="1"/>
-          </p:cNvSpPr>
-          <p:nvPr>
-            <p:ph type="body" idx="44"/>
-          </p:nvPr>
-        </p:nvSpPr>
-        <p:spPr/>
-        <p:txBody>
-          <a:bodyPr/>
-          <a:lstStyle/>
-          <a:p>
-            <a:pPr/>
-            <a:r>
-              <a:rPr lang="th-TH" dirty="0"/>
-              <a:t>7. ดูแลหลังขึ้นระบบ</a:t>
-            </a:r>
-          </a:p>
-        </p:txBody>
-      </p:sp>
-      <p:sp>
-        <p:nvSpPr>
-          <p:cNvPr id="29" name="D7"/>
-          <p:cNvSpPr>
-            <a:spLocks noGrp="1"/>
-          </p:cNvSpPr>
-          <p:nvPr>
-            <p:ph type="body" idx="45"/>
-          </p:nvPr>
-        </p:nvSpPr>
-        <p:spPr/>
-        <p:txBody>
-          <a:bodyPr/>
-          <a:lstStyle/>
-          <a:p>
-            <a:pPr/>
-            <a:r>
-              <a:rPr lang="th-TH" dirty="0"/>
-              <a:t>3 เดือน</a:t>
-            </a:r>
-          </a:p>
-        </p:txBody>
-      </p:sp>
-      <p:sp>
-        <p:nvSpPr>
-          <p:cNvPr id="30" name="R8"/>
-          <p:cNvSpPr>
-            <a:spLocks noGrp="1"/>
-          </p:cNvSpPr>
-          <p:nvPr>
-            <p:ph type="body" idx="46"/>
-          </p:nvPr>
-        </p:nvSpPr>
-        <p:spPr/>
-        <p:txBody>
-          <a:bodyPr/>
-          <a:lstStyle/>
-          <a:p>
-            <a:pPr/>
-            <a:r>
-              <a:rPr lang="th-TH" dirty="0"/>
-              <a:t>8. รับประกันระบบ</a:t>
-            </a:r>
-          </a:p>
-        </p:txBody>
-      </p:sp>
-      <p:sp>
-        <p:nvSpPr>
-          <p:cNvPr id="31" name="D8"/>
-          <p:cNvSpPr>
-            <a:spLocks noGrp="1"/>
-          </p:cNvSpPr>
-          <p:nvPr>
-            <p:ph type="body" idx="47"/>
-          </p:nvPr>
-        </p:nvSpPr>
-        <p:spPr/>
-        <p:txBody>
-          <a:bodyPr/>
-          <a:lstStyle/>
-          <a:p>
-            <a:pPr/>
-            <a:r>
-              <a:rPr lang="th-TH" dirty="0"/>
-              <a:t>2.5 เดือน</a:t>
-            </a:r>
-          </a:p>
-        </p:txBody>
-      </p:sp>
-      <p:sp>
-        <p:nvSpPr>
-          <p:cNvPr id="32" name="Key"/>
-          <p:cNvSpPr>
-            <a:spLocks noGrp="1"/>
-          </p:cNvSpPr>
-          <p:nvPr>
-            <p:ph type="body" idx="2"/>
-          </p:nvPr>
-        </p:nvSpPr>
-        <p:spPr/>
-        <p:txBody>
-          <a:bodyPr/>
-          <a:lstStyle/>
-          <a:p>
-            <a:pPr/>
-            <a:r>
-              <a:rPr lang="th-TH" dirty="0"/>
-              <a:t>■ ช่วงงาน   ◆ ส่งมอบ / ตรวจรับ</a:t>
-            </a:r>
-          </a:p>
-        </p:txBody>
-      </p:sp>
-      <p:sp>
-        <p:nvSpPr>
-          <p:cNvPr id="33" name="Asm"/>
-          <p:cNvSpPr>
-            <a:spLocks noGrp="1"/>
-          </p:cNvSpPr>
-          <p:nvPr>
-            <p:ph type="body" idx="3"/>
-          </p:nvPr>
-        </p:nvSpPr>
-        <p:spPr/>
-        <p:txBody>
-          <a:bodyPr/>
-          <a:lstStyle/>
-          <a:p>
-            <a:pPr/>
-            <a:r>
-              <a:rPr lang="th-TH" dirty="0"/>
-              <a:t>นับจากวันลงนามสัญญา · หน่วย: เดือน</a:t>
-            </a:r>
-          </a:p>
-        </p:txBody>
-      </p:sp>
-      <p:sp>
-        <p:nvSpPr>
-          <p:cNvPr id="34" name="TL"/>
-          <p:cNvSpPr>
-            <a:spLocks noGrp="1"/>
-          </p:cNvSpPr>
-          <p:nvPr>
-            <p:ph type="body" idx="4"/>
-          </p:nvPr>
-        </p:nvSpPr>
-        <p:spPr/>
-        <p:txBody>
-          <a:bodyPr/>
-          <a:lstStyle/>
-          <a:p>
-            <a:pPr/>
-            <a:r>
-              <a:rPr lang="th-TH" dirty="0"/>
-              <a:t>สรุป</a:t>
-            </a:r>
-          </a:p>
-        </p:txBody>
-      </p:sp>
-      <p:sp>
-        <p:nvSpPr>
-          <p:cNvPr id="35" name="TC"/>
-          <p:cNvSpPr>
-            <a:spLocks noGrp="1"/>
-          </p:cNvSpPr>
-          <p:nvPr>
-            <p:ph type="body" idx="5"/>
-          </p:nvPr>
-        </p:nvSpPr>
-        <p:spPr/>
-        <p:txBody>
-          <a:bodyPr/>
-          <a:lstStyle/>
-          <a:p>
-            <a:pPr/>
-            <a:r>
-              <a:rPr lang="th-TH" dirty="0"/>
-              <a:t>ขึ้นระบบต้นเดือนที่ 7 ตรวจรับ 3 งวดตามจุดส่งมอบ</a:t>
-            </a:r>
-          </a:p>
-        </p:txBody>
-      </p:sp>
-      <p:sp>
-        <p:nvSpPr>
-          <p:cNvPr id="36" name="Milestone 2"/>
-          <p:cNvSpPr/>
-          <p:nvPr/>
-        </p:nvSpPr>
-        <p:spPr>
-          <a:xfrm>
-            <a:off x="5099558" y="2567178"/>
-            <a:ext cx="146304" cy="146304"/>
-          </a:xfrm>
-          <a:prstGeom prst="diamond">
-            <a:avLst/>
-          </a:prstGeom>
-          <a:solidFill>
-            <a:srgbClr val="BB731B"/>
-          </a:solidFill>
-          <a:ln w="19050">
-            <a:solidFill>
-              <a:srgbClr val="FFFFFF"/>
-            </a:solidFill>
-          </a:ln>
-        </p:spPr>
-        <p:txBody>
-          <a:bodyPr/>
-          <a:lstStyle/>
-          <a:p>
-            <a:endParaRPr lang="th-TH"/>
-          </a:p>
-        </p:txBody>
-      </p:sp>
-      <p:sp>
-        <p:nvSpPr>
-          <p:cNvPr id="37" name="Milestone 2 Label"/>
-          <p:cNvSpPr/>
-          <p:nvPr/>
-        </p:nvSpPr>
-        <p:spPr>
-          <a:xfrm>
-            <a:off x="5291582" y="2446020"/>
-            <a:ext cx="1463040" cy="388620"/>
-          </a:xfrm>
-          <a:prstGeom prst="rect">
-            <a:avLst/>
-          </a:prstGeom>
-          <a:noFill/>
-          <a:ln>
-            <a:noFill/>
-          </a:ln>
-        </p:spPr>
-        <p:txBody>
-          <a:bodyPr wrap="square" anchor="ctr" lIns="0" tIns="0" rIns="0" bIns="0" rtlCol="0"/>
-          <a:lstStyle/>
-          <a:p>
-            <a:pPr algn="l" marL="0" indent="0">
-              <a:lnSpc>
-                <a:spcPct val="100000"/>
-              </a:lnSpc>
-              <a:buNone/>
-            </a:pPr>
-            <a:r>
-              <a:rPr lang="th-TH" sz="1000" dirty="0">
-                <a:solidFill>
-                  <a:srgbClr val="5F5F5F"/>
-                </a:solidFill>
-                <a:latin typeface="+mn-lt"/>
-                <a:ea typeface="+mn-ea"/>
-                <a:cs typeface="+mn-cs"/>
-              </a:rPr>
-              <a:t>ตรวจรับงวด 1</a:t>
-            </a:r>
-          </a:p>
-        </p:txBody>
-      </p:sp>
-      <p:sp>
-        <p:nvSpPr>
-          <p:cNvPr id="38" name="Milestone 4"/>
-          <p:cNvSpPr/>
-          <p:nvPr/>
-        </p:nvSpPr>
-        <p:spPr>
-          <a:xfrm>
-            <a:off x="7348728" y="3344418"/>
-            <a:ext cx="146304" cy="146304"/>
-          </a:xfrm>
-          <a:prstGeom prst="diamond">
-            <a:avLst/>
-          </a:prstGeom>
-          <a:solidFill>
-            <a:srgbClr val="BB731B"/>
-          </a:solidFill>
-          <a:ln w="19050">
-            <a:solidFill>
-              <a:srgbClr val="FFFFFF"/>
-            </a:solidFill>
-          </a:ln>
-        </p:spPr>
-        <p:txBody>
-          <a:bodyPr/>
-          <a:lstStyle/>
-          <a:p>
-            <a:endParaRPr lang="th-TH"/>
-          </a:p>
-        </p:txBody>
-      </p:sp>
-      <p:sp>
-        <p:nvSpPr>
-          <p:cNvPr id="39" name="Milestone 4 Label"/>
-          <p:cNvSpPr/>
-          <p:nvPr/>
-        </p:nvSpPr>
-        <p:spPr>
-          <a:xfrm>
-            <a:off x="7540752" y="3223260"/>
-            <a:ext cx="1463040" cy="388620"/>
-          </a:xfrm>
-          <a:prstGeom prst="rect">
-            <a:avLst/>
-          </a:prstGeom>
-          <a:noFill/>
-          <a:ln>
-            <a:noFill/>
-          </a:ln>
-        </p:spPr>
-        <p:txBody>
-          <a:bodyPr wrap="square" anchor="ctr" lIns="0" tIns="0" rIns="0" bIns="0" rtlCol="0"/>
-          <a:lstStyle/>
-          <a:p>
-            <a:pPr algn="l" marL="0" indent="0">
-              <a:lnSpc>
-                <a:spcPct val="100000"/>
-              </a:lnSpc>
-              <a:buNone/>
-            </a:pPr>
-            <a:r>
-              <a:rPr lang="th-TH" sz="1000" dirty="0">
-                <a:solidFill>
-                  <a:srgbClr val="5F5F5F"/>
-                </a:solidFill>
-                <a:latin typeface="+mn-lt"/>
-                <a:ea typeface="+mn-ea"/>
-                <a:cs typeface="+mn-cs"/>
-              </a:rPr>
-              <a:t>ตรวจรับงวด 2</a:t>
-            </a:r>
-          </a:p>
-        </p:txBody>
-      </p:sp>
-      <p:sp>
-        <p:nvSpPr>
-          <p:cNvPr id="40" name="Milestone 7"/>
-          <p:cNvSpPr/>
-          <p:nvPr/>
-        </p:nvSpPr>
-        <p:spPr>
-          <a:xfrm>
-            <a:off x="9597898" y="4510278"/>
-            <a:ext cx="146304" cy="146304"/>
-          </a:xfrm>
-          <a:prstGeom prst="diamond">
-            <a:avLst/>
-          </a:prstGeom>
-          <a:solidFill>
-            <a:srgbClr val="BB731B"/>
-          </a:solidFill>
-          <a:ln w="19050">
-            <a:solidFill>
-              <a:srgbClr val="FFFFFF"/>
-            </a:solidFill>
-          </a:ln>
-        </p:spPr>
-        <p:txBody>
-          <a:bodyPr/>
-          <a:lstStyle/>
-          <a:p>
-            <a:endParaRPr lang="th-TH"/>
-          </a:p>
-        </p:txBody>
-      </p:sp>
-      <p:sp>
-        <p:nvSpPr>
-          <p:cNvPr id="41" name="Milestone 7 Label"/>
-          <p:cNvSpPr/>
-          <p:nvPr/>
-        </p:nvSpPr>
-        <p:spPr>
-          <a:xfrm>
-            <a:off x="9789922" y="4389120"/>
-            <a:ext cx="1463040" cy="388620"/>
-          </a:xfrm>
-          <a:prstGeom prst="rect">
-            <a:avLst/>
-          </a:prstGeom>
-          <a:noFill/>
-          <a:ln>
-            <a:noFill/>
-          </a:ln>
-        </p:spPr>
-        <p:txBody>
-          <a:bodyPr wrap="square" anchor="ctr" lIns="0" tIns="0" rIns="0" bIns="0" rtlCol="0"/>
-          <a:lstStyle/>
-          <a:p>
-            <a:pPr algn="l" marL="0" indent="0">
-              <a:lnSpc>
-                <a:spcPct val="100000"/>
-              </a:lnSpc>
-              <a:buNone/>
-            </a:pPr>
-            <a:r>
-              <a:rPr lang="th-TH" sz="1000" dirty="0">
-                <a:solidFill>
-                  <a:srgbClr val="5F5F5F"/>
-                </a:solidFill>
-                <a:latin typeface="+mn-lt"/>
-                <a:ea typeface="+mn-ea"/>
-                <a:cs typeface="+mn-cs"/>
-              </a:rPr>
-              <a:t>ตรวจรับงวด 3</a:t>
-            </a:r>
-          </a:p>
-        </p:txBody>
-      </p:sp>
-    </p:spTree>
-  </p:cSld>
-  <p:clrMapOvr>
-    <a:masterClrMapping/>
-  </p:clrMapOvr>
-</p:sld>
-</file>
-
 <file path=ppt/slides/slide19.xml><?xml version="1.0" encoding="utf-8"?>
 <p:sld xmlns:a="http://schemas.openxmlformats.org/drawingml/2006/main" xmlns:r="http://schemas.openxmlformats.org/officeDocument/2006/relationships" xmlns:p="http://schemas.openxmlformats.org/presentationml/2006/main">
   <p:cSld name="">
@@ -27955,83 +28618,14 @@
             <a:pPr/>
             <a:r>
               <a:rPr lang="th-TH" dirty="0"/>
-              <a:t>ครึ่งหนึ่งของงบ 4.8 ล้านบาท คือค่าพัฒนาระบบ</a:t>
-            </a:r>
-          </a:p>
-        </p:txBody>
-      </p:sp>
-      <p:sp>
-        <p:nvSpPr>
-          <p:cNvPr id="3" name="Total"/>
-          <p:cNvSpPr>
-            <a:spLocks noGrp="1"/>
-          </p:cNvSpPr>
-          <p:nvPr>
-            <p:ph type="body" idx="2"/>
-          </p:nvPr>
-        </p:nvSpPr>
-        <p:spPr/>
-        <p:txBody>
-          <a:bodyPr/>
-          <a:lstStyle/>
-          <a:p>
-            <a:pPr/>
-            <a:r>
-              <a:rPr lang="th-TH" dirty="0"/>
-              <a:t>4.8 ล้านบาท</a:t>
-            </a:r>
-          </a:p>
-        </p:txBody>
-      </p:sp>
-      <p:sp>
-        <p:nvSpPr>
-          <p:cNvPr id="4" name="TotalL"/>
-          <p:cNvSpPr>
-            <a:spLocks noGrp="1"/>
-          </p:cNvSpPr>
-          <p:nvPr>
-            <p:ph type="body" idx="3"/>
-          </p:nvPr>
-        </p:nvSpPr>
-        <p:spPr/>
-        <p:txBody>
-          <a:bodyPr/>
-          <a:lstStyle/>
-          <a:p>
-            <a:pPr/>
-            <a:r>
-              <a:rPr lang="th-TH" dirty="0"/>
-              <a:t>งบโครงการรวมทั้งสิ้น</a:t>
-            </a:r>
-          </a:p>
-        </p:txBody>
-      </p:sp>
-      <p:sp>
-        <p:nvSpPr>
-          <p:cNvPr id="5" name="Intro"/>
-          <p:cNvSpPr>
-            <a:spLocks noGrp="1"/>
-          </p:cNvSpPr>
-          <p:nvPr>
-            <p:ph type="body" idx="4"/>
-          </p:nvPr>
-        </p:nvSpPr>
-        <p:spPr/>
-        <p:txBody>
-          <a:bodyPr/>
-          <a:lstStyle/>
-          <a:p>
-            <a:pPr/>
-            <a:r>
-              <a:rPr lang="th-TH" dirty="0"/>
-              <a:t>รวมภาษีมูลค่าเพิ่ม · สัญญา 12 เดือน ไม่รวมค่าบริการรายเดือนหลังปีแรก</a:t>
+              <a:t>แผนงาน 12 เดือน ขึ้นระบบต้นเดือนที่ 7</a:t>
             </a:r>
           </a:p>
         </p:txBody>
       </p:sp>
       <p:graphicFrame>
         <p:nvGraphicFramePr>
-          <p:cNvPr id="6" name="Composition"/>
+          <p:cNvPr id="3" name="Plan"/>
           <p:cNvGraphicFramePr>
             <a:graphicFrameLocks noGrp="1"/>
           </p:cNvGraphicFramePr>
@@ -28040,8 +28634,8 @@
           </p:nvPr>
         </p:nvGraphicFramePr>
         <p:xfrm>
-          <a:off x="2697480" y="3703320"/>
-          <a:ext cx="7299960" cy="1371600"/>
+          <a:off x="3566160" y="2057400"/>
+          <a:ext cx="7711440" cy="3108960"/>
         </p:xfrm>
         <a:graphic>
           <a:graphicData uri="http://schemas.openxmlformats.org/drawingml/2006/chart">
@@ -28051,7 +28645,7 @@
       </p:graphicFrame>
       <p:sp>
         <p:nvSpPr>
-          <p:cNvPr id="7" name="B1"/>
+          <p:cNvPr id="4" name="P1"/>
           <p:cNvSpPr>
             <a:spLocks noGrp="1"/>
           </p:cNvSpPr>
@@ -28067,14 +28661,129 @@
             <a:pPr/>
             <a:r>
               <a:rPr lang="th-TH" dirty="0"/>
-              <a:t>งบโครงการ</a:t>
-            </a:r>
-          </a:p>
-        </p:txBody>
-      </p:sp>
-      <p:sp>
-        <p:nvSpPr>
-          <p:cNvPr id="8" name="SN"/>
+              <a:t>ด.1</a:t>
+            </a:r>
+          </a:p>
+        </p:txBody>
+      </p:sp>
+      <p:sp>
+        <p:nvSpPr>
+          <p:cNvPr id="5" name="P2"/>
+          <p:cNvSpPr>
+            <a:spLocks noGrp="1"/>
+          </p:cNvSpPr>
+          <p:nvPr>
+            <p:ph type="body" idx="21"/>
+          </p:nvPr>
+        </p:nvSpPr>
+        <p:spPr/>
+        <p:txBody>
+          <a:bodyPr/>
+          <a:lstStyle/>
+          <a:p>
+            <a:pPr/>
+            <a:r>
+              <a:rPr lang="th-TH" dirty="0"/>
+              <a:t>ด.2</a:t>
+            </a:r>
+          </a:p>
+        </p:txBody>
+      </p:sp>
+      <p:sp>
+        <p:nvSpPr>
+          <p:cNvPr id="6" name="P3"/>
+          <p:cNvSpPr>
+            <a:spLocks noGrp="1"/>
+          </p:cNvSpPr>
+          <p:nvPr>
+            <p:ph type="body" idx="22"/>
+          </p:nvPr>
+        </p:nvSpPr>
+        <p:spPr/>
+        <p:txBody>
+          <a:bodyPr/>
+          <a:lstStyle/>
+          <a:p>
+            <a:pPr/>
+            <a:r>
+              <a:rPr lang="th-TH" dirty="0"/>
+              <a:t>ด.3</a:t>
+            </a:r>
+          </a:p>
+        </p:txBody>
+      </p:sp>
+      <p:sp>
+        <p:nvSpPr>
+          <p:cNvPr id="7" name="P4"/>
+          <p:cNvSpPr>
+            <a:spLocks noGrp="1"/>
+          </p:cNvSpPr>
+          <p:nvPr>
+            <p:ph type="body" idx="23"/>
+          </p:nvPr>
+        </p:nvSpPr>
+        <p:spPr/>
+        <p:txBody>
+          <a:bodyPr/>
+          <a:lstStyle/>
+          <a:p>
+            <a:pPr/>
+            <a:r>
+              <a:rPr lang="th-TH" dirty="0"/>
+              <a:t>ด.4</a:t>
+            </a:r>
+          </a:p>
+        </p:txBody>
+      </p:sp>
+      <p:sp>
+        <p:nvSpPr>
+          <p:cNvPr id="8" name="P5"/>
+          <p:cNvSpPr>
+            <a:spLocks noGrp="1"/>
+          </p:cNvSpPr>
+          <p:nvPr>
+            <p:ph type="body" idx="24"/>
+          </p:nvPr>
+        </p:nvSpPr>
+        <p:spPr/>
+        <p:txBody>
+          <a:bodyPr/>
+          <a:lstStyle/>
+          <a:p>
+            <a:pPr/>
+            <a:r>
+              <a:rPr lang="th-TH" dirty="0"/>
+              <a:t>ด.5</a:t>
+            </a:r>
+          </a:p>
+        </p:txBody>
+      </p:sp>
+      <p:sp>
+        <p:nvSpPr>
+          <p:cNvPr id="9" name="P6"/>
+          <p:cNvSpPr>
+            <a:spLocks noGrp="1"/>
+          </p:cNvSpPr>
+          <p:nvPr>
+            <p:ph type="body" idx="25"/>
+          </p:nvPr>
+        </p:nvSpPr>
+        <p:spPr/>
+        <p:txBody>
+          <a:bodyPr/>
+          <a:lstStyle/>
+          <a:p>
+            <a:pPr/>
+            <a:r>
+              <a:rPr lang="th-TH" dirty="0"/>
+              <a:t>ด.6</a:t>
+            </a:r>
+          </a:p>
+        </p:txBody>
+      </p:sp>
+      <p:sp>
+        <p:nvSpPr>
+          <p:cNvPr id="10" name="P7"/>
           <p:cNvSpPr>
             <a:spLocks noGrp="1"/>
           </p:cNvSpPr>
@@ -28090,14 +28799,14 @@
             <a:pPr/>
             <a:r>
               <a:rPr lang="th-TH" dirty="0"/>
-              <a:t>พัฒนาและตั้งค่าระบบ</a:t>
-            </a:r>
-          </a:p>
-        </p:txBody>
-      </p:sp>
-      <p:sp>
-        <p:nvSpPr>
-          <p:cNvPr id="9" name="SV"/>
+              <a:t>ด.7</a:t>
+            </a:r>
+          </a:p>
+        </p:txBody>
+      </p:sp>
+      <p:sp>
+        <p:nvSpPr>
+          <p:cNvPr id="11" name="P8"/>
           <p:cNvSpPr>
             <a:spLocks noGrp="1"/>
           </p:cNvSpPr>
@@ -28113,14 +28822,14 @@
             <a:pPr/>
             <a:r>
               <a:rPr lang="th-TH" dirty="0"/>
-              <a:t>2.4 ล้านบาท</a:t>
-            </a:r>
-          </a:p>
-        </p:txBody>
-      </p:sp>
-      <p:sp>
-        <p:nvSpPr>
-          <p:cNvPr id="10" name="SP"/>
+              <a:t>ด.8</a:t>
+            </a:r>
+          </a:p>
+        </p:txBody>
+      </p:sp>
+      <p:sp>
+        <p:nvSpPr>
+          <p:cNvPr id="12" name="P9"/>
           <p:cNvSpPr>
             <a:spLocks noGrp="1"/>
           </p:cNvSpPr>
@@ -28136,14 +28845,14 @@
             <a:pPr/>
             <a:r>
               <a:rPr lang="th-TH" dirty="0"/>
-              <a:t>50%</a:t>
-            </a:r>
-          </a:p>
-        </p:txBody>
-      </p:sp>
-      <p:sp>
-        <p:nvSpPr>
-          <p:cNvPr id="11" name="SN"/>
+              <a:t>ด.9</a:t>
+            </a:r>
+          </a:p>
+        </p:txBody>
+      </p:sp>
+      <p:sp>
+        <p:nvSpPr>
+          <p:cNvPr id="13" name="P10"/>
           <p:cNvSpPr>
             <a:spLocks noGrp="1"/>
           </p:cNvSpPr>
@@ -28159,14 +28868,14 @@
             <a:pPr/>
             <a:r>
               <a:rPr lang="th-TH" dirty="0"/>
-              <a:t>ไลเซนส์ซอฟต์แวร์</a:t>
-            </a:r>
-          </a:p>
-        </p:txBody>
-      </p:sp>
-      <p:sp>
-        <p:nvSpPr>
-          <p:cNvPr id="12" name="SV"/>
+              <a:t>ด.10</a:t>
+            </a:r>
+          </a:p>
+        </p:txBody>
+      </p:sp>
+      <p:sp>
+        <p:nvSpPr>
+          <p:cNvPr id="14" name="P11"/>
           <p:cNvSpPr>
             <a:spLocks noGrp="1"/>
           </p:cNvSpPr>
@@ -28182,14 +28891,14 @@
             <a:pPr/>
             <a:r>
               <a:rPr lang="th-TH" dirty="0"/>
-              <a:t>1.2 ล้านบาท</a:t>
-            </a:r>
-          </a:p>
-        </p:txBody>
-      </p:sp>
-      <p:sp>
-        <p:nvSpPr>
-          <p:cNvPr id="13" name="SP"/>
+              <a:t>ด.11</a:t>
+            </a:r>
+          </a:p>
+        </p:txBody>
+      </p:sp>
+      <p:sp>
+        <p:nvSpPr>
+          <p:cNvPr id="15" name="P12"/>
           <p:cNvSpPr>
             <a:spLocks noGrp="1"/>
           </p:cNvSpPr>
@@ -28205,14 +28914,14 @@
             <a:pPr/>
             <a:r>
               <a:rPr lang="th-TH" dirty="0"/>
-              <a:t>25%</a:t>
-            </a:r>
-          </a:p>
-        </p:txBody>
-      </p:sp>
-      <p:sp>
-        <p:nvSpPr>
-          <p:cNvPr id="14" name="SN"/>
+              <a:t>ด.12</a:t>
+            </a:r>
+          </a:p>
+        </p:txBody>
+      </p:sp>
+      <p:sp>
+        <p:nvSpPr>
+          <p:cNvPr id="16" name="R1"/>
           <p:cNvSpPr>
             <a:spLocks noGrp="1"/>
           </p:cNvSpPr>
@@ -28228,14 +28937,14 @@
             <a:pPr/>
             <a:r>
               <a:rPr lang="th-TH" dirty="0"/>
-              <a:t>คลาวด์ปีแรก</a:t>
-            </a:r>
-          </a:p>
-        </p:txBody>
-      </p:sp>
-      <p:sp>
-        <p:nvSpPr>
-          <p:cNvPr id="15" name="SV"/>
+              <a:t>1. เตรียมระบบ</a:t>
+            </a:r>
+          </a:p>
+        </p:txBody>
+      </p:sp>
+      <p:sp>
+        <p:nvSpPr>
+          <p:cNvPr id="17" name="D1"/>
           <p:cNvSpPr>
             <a:spLocks noGrp="1"/>
           </p:cNvSpPr>
@@ -28251,14 +28960,14 @@
             <a:pPr/>
             <a:r>
               <a:rPr lang="th-TH" dirty="0"/>
-              <a:t>0.7 ล้านบาท</a:t>
-            </a:r>
-          </a:p>
-        </p:txBody>
-      </p:sp>
-      <p:sp>
-        <p:nvSpPr>
-          <p:cNvPr id="16" name="SP"/>
+              <a:t>4 สัปดาห์</a:t>
+            </a:r>
+          </a:p>
+        </p:txBody>
+      </p:sp>
+      <p:sp>
+        <p:nvSpPr>
+          <p:cNvPr id="18" name="R2"/>
           <p:cNvSpPr>
             <a:spLocks noGrp="1"/>
           </p:cNvSpPr>
@@ -28274,14 +28983,14 @@
             <a:pPr/>
             <a:r>
               <a:rPr lang="th-TH" dirty="0"/>
-              <a:t>15%</a:t>
-            </a:r>
-          </a:p>
-        </p:txBody>
-      </p:sp>
-      <p:sp>
-        <p:nvSpPr>
-          <p:cNvPr id="17" name="SN"/>
+              <a:t>2. วิเคราะห์และออกแบบ</a:t>
+            </a:r>
+          </a:p>
+        </p:txBody>
+      </p:sp>
+      <p:sp>
+        <p:nvSpPr>
+          <p:cNvPr id="19" name="D2"/>
           <p:cNvSpPr>
             <a:spLocks noGrp="1"/>
           </p:cNvSpPr>
@@ -28297,14 +29006,14 @@
             <a:pPr/>
             <a:r>
               <a:rPr lang="th-TH" dirty="0"/>
-              <a:t>อื่น ๆ</a:t>
-            </a:r>
-          </a:p>
-        </p:txBody>
-      </p:sp>
-      <p:sp>
-        <p:nvSpPr>
-          <p:cNvPr id="18" name="SV"/>
+              <a:t>6 สัปดาห์</a:t>
+            </a:r>
+          </a:p>
+        </p:txBody>
+      </p:sp>
+      <p:sp>
+        <p:nvSpPr>
+          <p:cNvPr id="20" name="R3"/>
           <p:cNvSpPr>
             <a:spLocks noGrp="1"/>
           </p:cNvSpPr>
@@ -28320,14 +29029,14 @@
             <a:pPr/>
             <a:r>
               <a:rPr lang="th-TH" dirty="0"/>
-              <a:t>0.5 ล้านบาท</a:t>
-            </a:r>
-          </a:p>
-        </p:txBody>
-      </p:sp>
-      <p:sp>
-        <p:nvSpPr>
-          <p:cNvPr id="19" name="SP"/>
+              <a:t>3. พัฒนาและตั้งค่าระบบ</a:t>
+            </a:r>
+          </a:p>
+        </p:txBody>
+      </p:sp>
+      <p:sp>
+        <p:nvSpPr>
+          <p:cNvPr id="21" name="D3"/>
           <p:cNvSpPr>
             <a:spLocks noGrp="1"/>
           </p:cNvSpPr>
@@ -28343,19 +29052,19 @@
             <a:pPr/>
             <a:r>
               <a:rPr lang="th-TH" dirty="0"/>
-              <a:t>10%</a:t>
-            </a:r>
-          </a:p>
-        </p:txBody>
-      </p:sp>
-      <p:sp>
-        <p:nvSpPr>
-          <p:cNvPr id="20" name="Src"/>
-          <p:cNvSpPr>
-            <a:spLocks noGrp="1"/>
-          </p:cNvSpPr>
-          <p:nvPr>
-            <p:ph type="body" idx="5"/>
+              <a:t>10 สัปดาห์</a:t>
+            </a:r>
+          </a:p>
+        </p:txBody>
+      </p:sp>
+      <p:sp>
+        <p:nvSpPr>
+          <p:cNvPr id="22" name="R4"/>
+          <p:cNvSpPr>
+            <a:spLocks noGrp="1"/>
+          </p:cNvSpPr>
+          <p:nvPr>
+            <p:ph type="body" idx="38"/>
           </p:nvPr>
         </p:nvSpPr>
         <p:spPr/>
@@ -28366,19 +29075,272 @@
             <a:pPr/>
             <a:r>
               <a:rPr lang="th-TH" dirty="0"/>
-              <a:t>ใบเสนอราคา NCT-2569-041 · ปัดเป็นแสนบาท</a:t>
-            </a:r>
-          </a:p>
-        </p:txBody>
-      </p:sp>
-      <p:sp>
-        <p:nvSpPr>
-          <p:cNvPr id="21" name="TL"/>
-          <p:cNvSpPr>
-            <a:spLocks noGrp="1"/>
-          </p:cNvSpPr>
-          <p:nvPr>
-            <p:ph type="body" idx="6"/>
+              <a:t>4. ทดสอบ UAT</a:t>
+            </a:r>
+          </a:p>
+        </p:txBody>
+      </p:sp>
+      <p:sp>
+        <p:nvSpPr>
+          <p:cNvPr id="23" name="D4"/>
+          <p:cNvSpPr>
+            <a:spLocks noGrp="1"/>
+          </p:cNvSpPr>
+          <p:nvPr>
+            <p:ph type="body" idx="39"/>
+          </p:nvPr>
+        </p:nvSpPr>
+        <p:spPr/>
+        <p:txBody>
+          <a:bodyPr/>
+          <a:lstStyle/>
+          <a:p>
+            <a:pPr/>
+            <a:r>
+              <a:rPr lang="th-TH" dirty="0"/>
+              <a:t>4 สัปดาห์</a:t>
+            </a:r>
+          </a:p>
+        </p:txBody>
+      </p:sp>
+      <p:sp>
+        <p:nvSpPr>
+          <p:cNvPr id="24" name="R5"/>
+          <p:cNvSpPr>
+            <a:spLocks noGrp="1"/>
+          </p:cNvSpPr>
+          <p:nvPr>
+            <p:ph type="body" idx="40"/>
+          </p:nvPr>
+        </p:nvSpPr>
+        <p:spPr/>
+        <p:txBody>
+          <a:bodyPr/>
+          <a:lstStyle/>
+          <a:p>
+            <a:pPr/>
+            <a:r>
+              <a:rPr lang="th-TH" dirty="0"/>
+              <a:t>5. อบรมผู้ใช้</a:t>
+            </a:r>
+          </a:p>
+        </p:txBody>
+      </p:sp>
+      <p:sp>
+        <p:nvSpPr>
+          <p:cNvPr id="25" name="D5"/>
+          <p:cNvSpPr>
+            <a:spLocks noGrp="1"/>
+          </p:cNvSpPr>
+          <p:nvPr>
+            <p:ph type="body" idx="41"/>
+          </p:nvPr>
+        </p:nvSpPr>
+        <p:spPr/>
+        <p:txBody>
+          <a:bodyPr/>
+          <a:lstStyle/>
+          <a:p>
+            <a:pPr/>
+            <a:r>
+              <a:rPr lang="th-TH" dirty="0"/>
+              <a:t>1 สัปดาห์</a:t>
+            </a:r>
+          </a:p>
+        </p:txBody>
+      </p:sp>
+      <p:sp>
+        <p:nvSpPr>
+          <p:cNvPr id="26" name="R6"/>
+          <p:cNvSpPr>
+            <a:spLocks noGrp="1"/>
+          </p:cNvSpPr>
+          <p:nvPr>
+            <p:ph type="body" idx="42"/>
+          </p:nvPr>
+        </p:nvSpPr>
+        <p:spPr/>
+        <p:txBody>
+          <a:bodyPr/>
+          <a:lstStyle/>
+          <a:p>
+            <a:pPr/>
+            <a:r>
+              <a:rPr lang="th-TH" dirty="0"/>
+              <a:t>6. ขึ้นระบบ</a:t>
+            </a:r>
+          </a:p>
+        </p:txBody>
+      </p:sp>
+      <p:sp>
+        <p:nvSpPr>
+          <p:cNvPr id="27" name="D6"/>
+          <p:cNvSpPr>
+            <a:spLocks noGrp="1"/>
+          </p:cNvSpPr>
+          <p:nvPr>
+            <p:ph type="body" idx="43"/>
+          </p:nvPr>
+        </p:nvSpPr>
+        <p:spPr/>
+        <p:txBody>
+          <a:bodyPr/>
+          <a:lstStyle/>
+          <a:p>
+            <a:pPr/>
+            <a:r>
+              <a:rPr lang="th-TH" dirty="0"/>
+              <a:t>2 สัปดาห์</a:t>
+            </a:r>
+          </a:p>
+        </p:txBody>
+      </p:sp>
+      <p:sp>
+        <p:nvSpPr>
+          <p:cNvPr id="28" name="R7"/>
+          <p:cNvSpPr>
+            <a:spLocks noGrp="1"/>
+          </p:cNvSpPr>
+          <p:nvPr>
+            <p:ph type="body" idx="44"/>
+          </p:nvPr>
+        </p:nvSpPr>
+        <p:spPr/>
+        <p:txBody>
+          <a:bodyPr/>
+          <a:lstStyle/>
+          <a:p>
+            <a:pPr/>
+            <a:r>
+              <a:rPr lang="th-TH" dirty="0"/>
+              <a:t>7. ดูแลหลังขึ้นระบบ</a:t>
+            </a:r>
+          </a:p>
+        </p:txBody>
+      </p:sp>
+      <p:sp>
+        <p:nvSpPr>
+          <p:cNvPr id="29" name="D7"/>
+          <p:cNvSpPr>
+            <a:spLocks noGrp="1"/>
+          </p:cNvSpPr>
+          <p:nvPr>
+            <p:ph type="body" idx="45"/>
+          </p:nvPr>
+        </p:nvSpPr>
+        <p:spPr/>
+        <p:txBody>
+          <a:bodyPr/>
+          <a:lstStyle/>
+          <a:p>
+            <a:pPr/>
+            <a:r>
+              <a:rPr lang="th-TH" dirty="0"/>
+              <a:t>3 เดือน</a:t>
+            </a:r>
+          </a:p>
+        </p:txBody>
+      </p:sp>
+      <p:sp>
+        <p:nvSpPr>
+          <p:cNvPr id="30" name="R8"/>
+          <p:cNvSpPr>
+            <a:spLocks noGrp="1"/>
+          </p:cNvSpPr>
+          <p:nvPr>
+            <p:ph type="body" idx="46"/>
+          </p:nvPr>
+        </p:nvSpPr>
+        <p:spPr/>
+        <p:txBody>
+          <a:bodyPr/>
+          <a:lstStyle/>
+          <a:p>
+            <a:pPr/>
+            <a:r>
+              <a:rPr lang="th-TH" dirty="0"/>
+              <a:t>8. รับประกันระบบ</a:t>
+            </a:r>
+          </a:p>
+        </p:txBody>
+      </p:sp>
+      <p:sp>
+        <p:nvSpPr>
+          <p:cNvPr id="31" name="D8"/>
+          <p:cNvSpPr>
+            <a:spLocks noGrp="1"/>
+          </p:cNvSpPr>
+          <p:nvPr>
+            <p:ph type="body" idx="47"/>
+          </p:nvPr>
+        </p:nvSpPr>
+        <p:spPr/>
+        <p:txBody>
+          <a:bodyPr/>
+          <a:lstStyle/>
+          <a:p>
+            <a:pPr/>
+            <a:r>
+              <a:rPr lang="th-TH" dirty="0"/>
+              <a:t>2.5 เดือน</a:t>
+            </a:r>
+          </a:p>
+        </p:txBody>
+      </p:sp>
+      <p:sp>
+        <p:nvSpPr>
+          <p:cNvPr id="32" name="Key"/>
+          <p:cNvSpPr>
+            <a:spLocks noGrp="1"/>
+          </p:cNvSpPr>
+          <p:nvPr>
+            <p:ph type="body" idx="2"/>
+          </p:nvPr>
+        </p:nvSpPr>
+        <p:spPr/>
+        <p:txBody>
+          <a:bodyPr/>
+          <a:lstStyle/>
+          <a:p>
+            <a:pPr/>
+            <a:r>
+              <a:rPr lang="th-TH" dirty="0"/>
+              <a:t>■ ช่วงงาน   ◆ ส่งมอบ / ตรวจรับ</a:t>
+            </a:r>
+          </a:p>
+        </p:txBody>
+      </p:sp>
+      <p:sp>
+        <p:nvSpPr>
+          <p:cNvPr id="33" name="Asm"/>
+          <p:cNvSpPr>
+            <a:spLocks noGrp="1"/>
+          </p:cNvSpPr>
+          <p:nvPr>
+            <p:ph type="body" idx="3"/>
+          </p:nvPr>
+        </p:nvSpPr>
+        <p:spPr/>
+        <p:txBody>
+          <a:bodyPr/>
+          <a:lstStyle/>
+          <a:p>
+            <a:pPr/>
+            <a:r>
+              <a:rPr lang="th-TH" dirty="0"/>
+              <a:t>นับจากวันลงนามสัญญา · หน่วย: เดือน</a:t>
+            </a:r>
+          </a:p>
+        </p:txBody>
+      </p:sp>
+      <p:sp>
+        <p:nvSpPr>
+          <p:cNvPr id="34" name="TL"/>
+          <p:cNvSpPr>
+            <a:spLocks noGrp="1"/>
+          </p:cNvSpPr>
+          <p:nvPr>
+            <p:ph type="body" idx="4"/>
           </p:nvPr>
         </p:nvSpPr>
         <p:spPr/>
@@ -28396,12 +29358,12 @@
       </p:sp>
       <p:sp>
         <p:nvSpPr>
-          <p:cNvPr id="22" name="TC"/>
-          <p:cNvSpPr>
-            <a:spLocks noGrp="1"/>
-          </p:cNvSpPr>
-          <p:nvPr>
-            <p:ph type="body" idx="7"/>
+          <p:cNvPr id="35" name="TC"/>
+          <p:cNvSpPr>
+            <a:spLocks noGrp="1"/>
+          </p:cNvSpPr>
+          <p:nvPr>
+            <p:ph type="body" idx="5"/>
           </p:nvPr>
         </p:nvSpPr>
         <p:spPr/>
@@ -28412,7 +29374,229 @@
             <a:pPr/>
             <a:r>
               <a:rPr lang="th-TH" dirty="0"/>
-              <a:t>ไลเซนส์กับคลาวด์รวมกันไม่ถึง 40% งบส่วนใหญ่จ่ายให้งานที่ทำครั้งเดียว</a:t>
+              <a:t>ขึ้นระบบต้นเดือนที่ 7 ตรวจรับ 3 งวดตามจุดส่งมอบ</a:t>
+            </a:r>
+          </a:p>
+        </p:txBody>
+      </p:sp>
+      <p:sp>
+        <p:nvSpPr>
+          <p:cNvPr id="36" name="Milestone 2"/>
+          <p:cNvSpPr/>
+          <p:nvPr/>
+        </p:nvSpPr>
+        <p:spPr>
+          <a:xfrm>
+            <a:off x="5099558" y="2567178"/>
+            <a:ext cx="146304" cy="146304"/>
+          </a:xfrm>
+          <a:prstGeom prst="diamond">
+            <a:avLst/>
+          </a:prstGeom>
+          <a:solidFill>
+            <a:srgbClr val="BB731B"/>
+          </a:solidFill>
+          <a:ln w="19050">
+            <a:solidFill>
+              <a:srgbClr val="FFFFFF"/>
+            </a:solidFill>
+          </a:ln>
+        </p:spPr>
+        <p:txBody>
+          <a:bodyPr/>
+          <a:lstStyle/>
+          <a:p>
+            <a:endParaRPr lang="th-TH"/>
+          </a:p>
+        </p:txBody>
+      </p:sp>
+      <p:sp>
+        <p:nvSpPr>
+          <p:cNvPr id="37" name="Milestone 2 Label"/>
+          <p:cNvSpPr/>
+          <p:nvPr/>
+        </p:nvSpPr>
+        <p:spPr>
+          <a:xfrm>
+            <a:off x="5291582" y="2446020"/>
+            <a:ext cx="1463040" cy="388620"/>
+          </a:xfrm>
+          <a:prstGeom prst="rect">
+            <a:avLst/>
+          </a:prstGeom>
+          <a:noFill/>
+          <a:ln>
+            <a:noFill/>
+          </a:ln>
+        </p:spPr>
+        <p:txBody>
+          <a:bodyPr wrap="square" anchor="ctr" lIns="0" tIns="0" rIns="0" bIns="0" rtlCol="0"/>
+          <a:lstStyle/>
+          <a:p>
+            <a:pPr algn="l" marL="0" indent="0">
+              <a:lnSpc>
+                <a:spcPct val="100000"/>
+              </a:lnSpc>
+              <a:buNone/>
+            </a:pPr>
+            <a:r>
+              <a:rPr lang="th-TH" sz="1000" dirty="0">
+                <a:solidFill>
+                  <a:srgbClr val="5F5F5F"/>
+                </a:solidFill>
+                <a:latin typeface="+mn-lt"/>
+                <a:ea typeface="+mn-ea"/>
+                <a:cs typeface="+mn-cs"/>
+              </a:rPr>
+              <a:t>ตรวจรับงวด 1</a:t>
+            </a:r>
+          </a:p>
+        </p:txBody>
+      </p:sp>
+      <p:sp>
+        <p:nvSpPr>
+          <p:cNvPr id="38" name="Milestone 4"/>
+          <p:cNvSpPr/>
+          <p:nvPr/>
+        </p:nvSpPr>
+        <p:spPr>
+          <a:xfrm>
+            <a:off x="7348728" y="3344418"/>
+            <a:ext cx="146304" cy="146304"/>
+          </a:xfrm>
+          <a:prstGeom prst="diamond">
+            <a:avLst/>
+          </a:prstGeom>
+          <a:solidFill>
+            <a:srgbClr val="BB731B"/>
+          </a:solidFill>
+          <a:ln w="19050">
+            <a:solidFill>
+              <a:srgbClr val="FFFFFF"/>
+            </a:solidFill>
+          </a:ln>
+        </p:spPr>
+        <p:txBody>
+          <a:bodyPr/>
+          <a:lstStyle/>
+          <a:p>
+            <a:endParaRPr lang="th-TH"/>
+          </a:p>
+        </p:txBody>
+      </p:sp>
+      <p:sp>
+        <p:nvSpPr>
+          <p:cNvPr id="39" name="Milestone 4 Label"/>
+          <p:cNvSpPr/>
+          <p:nvPr/>
+        </p:nvSpPr>
+        <p:spPr>
+          <a:xfrm>
+            <a:off x="7540752" y="3223260"/>
+            <a:ext cx="1463040" cy="388620"/>
+          </a:xfrm>
+          <a:prstGeom prst="rect">
+            <a:avLst/>
+          </a:prstGeom>
+          <a:noFill/>
+          <a:ln>
+            <a:noFill/>
+          </a:ln>
+        </p:spPr>
+        <p:txBody>
+          <a:bodyPr wrap="square" anchor="ctr" lIns="0" tIns="0" rIns="0" bIns="0" rtlCol="0"/>
+          <a:lstStyle/>
+          <a:p>
+            <a:pPr algn="l" marL="0" indent="0">
+              <a:lnSpc>
+                <a:spcPct val="100000"/>
+              </a:lnSpc>
+              <a:buNone/>
+            </a:pPr>
+            <a:r>
+              <a:rPr lang="th-TH" sz="1000" dirty="0">
+                <a:solidFill>
+                  <a:srgbClr val="5F5F5F"/>
+                </a:solidFill>
+                <a:latin typeface="+mn-lt"/>
+                <a:ea typeface="+mn-ea"/>
+                <a:cs typeface="+mn-cs"/>
+              </a:rPr>
+              <a:t>ตรวจรับงวด 2</a:t>
+            </a:r>
+          </a:p>
+        </p:txBody>
+      </p:sp>
+      <p:sp>
+        <p:nvSpPr>
+          <p:cNvPr id="40" name="Milestone 7"/>
+          <p:cNvSpPr/>
+          <p:nvPr/>
+        </p:nvSpPr>
+        <p:spPr>
+          <a:xfrm>
+            <a:off x="9597898" y="4510278"/>
+            <a:ext cx="146304" cy="146304"/>
+          </a:xfrm>
+          <a:prstGeom prst="diamond">
+            <a:avLst/>
+          </a:prstGeom>
+          <a:solidFill>
+            <a:srgbClr val="BB731B"/>
+          </a:solidFill>
+          <a:ln w="19050">
+            <a:solidFill>
+              <a:srgbClr val="FFFFFF"/>
+            </a:solidFill>
+          </a:ln>
+        </p:spPr>
+        <p:txBody>
+          <a:bodyPr/>
+          <a:lstStyle/>
+          <a:p>
+            <a:endParaRPr lang="th-TH"/>
+          </a:p>
+        </p:txBody>
+      </p:sp>
+      <p:sp>
+        <p:nvSpPr>
+          <p:cNvPr id="41" name="Milestone 7 Label"/>
+          <p:cNvSpPr/>
+          <p:nvPr/>
+        </p:nvSpPr>
+        <p:spPr>
+          <a:xfrm>
+            <a:off x="9789922" y="4389120"/>
+            <a:ext cx="1463040" cy="388620"/>
+          </a:xfrm>
+          <a:prstGeom prst="rect">
+            <a:avLst/>
+          </a:prstGeom>
+          <a:noFill/>
+          <a:ln>
+            <a:noFill/>
+          </a:ln>
+        </p:spPr>
+        <p:txBody>
+          <a:bodyPr wrap="square" anchor="ctr" lIns="0" tIns="0" rIns="0" bIns="0" rtlCol="0"/>
+          <a:lstStyle/>
+          <a:p>
+            <a:pPr algn="l" marL="0" indent="0">
+              <a:lnSpc>
+                <a:spcPct val="100000"/>
+              </a:lnSpc>
+              <a:buNone/>
+            </a:pPr>
+            <a:r>
+              <a:rPr lang="th-TH" sz="1000" dirty="0">
+                <a:solidFill>
+                  <a:srgbClr val="5F5F5F"/>
+                </a:solidFill>
+                <a:latin typeface="+mn-lt"/>
+                <a:ea typeface="+mn-ea"/>
+                <a:cs typeface="+mn-cs"/>
+              </a:rPr>
+              <a:t>ตรวจรับงวด 3</a:t>
             </a:r>
           </a:p>
         </p:txBody>
@@ -28531,19 +29715,19 @@
             <a:pPr/>
             <a:r>
               <a:rPr lang="th-TH" dirty="0"/>
-              <a:t>5. Implementation Stage</a:t>
-            </a:r>
-          </a:p>
-        </p:txBody>
-      </p:sp>
-      <p:sp>
-        <p:nvSpPr>
-          <p:cNvPr id="3" name="KAL"/>
-          <p:cNvSpPr>
-            <a:spLocks noGrp="1"/>
-          </p:cNvSpPr>
-          <p:nvPr>
-            <p:ph type="body" idx="1"/>
+              <a:t>ครึ่งหนึ่งของงบ 4.8 ล้านบาท คือค่าพัฒนาระบบ</a:t>
+            </a:r>
+          </a:p>
+        </p:txBody>
+      </p:sp>
+      <p:sp>
+        <p:nvSpPr>
+          <p:cNvPr id="3" name="Total"/>
+          <p:cNvSpPr>
+            <a:spLocks noGrp="1"/>
+          </p:cNvSpPr>
+          <p:nvPr>
+            <p:ph type="body" idx="2"/>
           </p:nvPr>
         </p:nvSpPr>
         <p:spPr/>
@@ -28554,19 +29738,19 @@
             <a:pPr/>
             <a:r>
               <a:rPr lang="th-TH" dirty="0"/>
-              <a:t>Key Activity :</a:t>
-            </a:r>
-          </a:p>
-        </p:txBody>
-      </p:sp>
-      <p:sp>
-        <p:nvSpPr>
-          <p:cNvPr id="4" name="KAV"/>
-          <p:cNvSpPr>
-            <a:spLocks noGrp="1"/>
-          </p:cNvSpPr>
-          <p:nvPr>
-            <p:ph type="body" idx="2"/>
+              <a:t>4.8 ล้านบาท</a:t>
+            </a:r>
+          </a:p>
+        </p:txBody>
+      </p:sp>
+      <p:sp>
+        <p:nvSpPr>
+          <p:cNvPr id="4" name="TotalL"/>
+          <p:cNvSpPr>
+            <a:spLocks noGrp="1"/>
+          </p:cNvSpPr>
+          <p:nvPr>
+            <p:ph type="body" idx="3"/>
           </p:nvPr>
         </p:nvSpPr>
         <p:spPr/>
@@ -28577,19 +29761,19 @@
             <a:pPr/>
             <a:r>
               <a:rPr lang="th-TH" dirty="0"/>
-              <a:t>ตั้งค่าสภาพแวดล้อม ติดตั้งฮาร์ดแวร์และซอฟต์แวร์</a:t>
-            </a:r>
-          </a:p>
-        </p:txBody>
-      </p:sp>
-      <p:sp>
-        <p:nvSpPr>
-          <p:cNvPr id="5" name="PL"/>
-          <p:cNvSpPr>
-            <a:spLocks noGrp="1"/>
-          </p:cNvSpPr>
-          <p:nvPr>
-            <p:ph type="body" idx="3"/>
+              <a:t>งบโครงการรวมทั้งสิ้น</a:t>
+            </a:r>
+          </a:p>
+        </p:txBody>
+      </p:sp>
+      <p:sp>
+        <p:nvSpPr>
+          <p:cNvPr id="5" name="Intro"/>
+          <p:cNvSpPr>
+            <a:spLocks noGrp="1"/>
+          </p:cNvSpPr>
+          <p:nvPr>
+            <p:ph type="body" idx="4"/>
           </p:nvPr>
         </p:nvSpPr>
         <p:spPr/>
@@ -28600,19 +29784,39 @@
             <a:pPr/>
             <a:r>
               <a:rPr lang="th-TH" dirty="0"/>
-              <a:t>Participant :</a:t>
-            </a:r>
-          </a:p>
-        </p:txBody>
-      </p:sp>
-      <p:sp>
-        <p:nvSpPr>
-          <p:cNvPr id="6" name="PV"/>
-          <p:cNvSpPr>
-            <a:spLocks noGrp="1"/>
-          </p:cNvSpPr>
-          <p:nvPr>
-            <p:ph type="body" idx="4"/>
+              <a:t>รวมภาษีมูลค่าเพิ่ม · สัญญา 12 เดือน ไม่รวมค่าบริการรายเดือนหลังปีแรก</a:t>
+            </a:r>
+          </a:p>
+        </p:txBody>
+      </p:sp>
+      <p:graphicFrame>
+        <p:nvGraphicFramePr>
+          <p:cNvPr id="6" name="Composition"/>
+          <p:cNvGraphicFramePr>
+            <a:graphicFrameLocks noGrp="1"/>
+          </p:cNvGraphicFramePr>
+          <p:nvPr>
+            <p:ph type="chart" idx="1"/>
+          </p:nvPr>
+        </p:nvGraphicFramePr>
+        <p:xfrm>
+          <a:off x="2697480" y="3703320"/>
+          <a:ext cx="7299960" cy="1371600"/>
+        </p:xfrm>
+        <a:graphic>
+          <a:graphicData uri="http://schemas.openxmlformats.org/drawingml/2006/chart">
+            <c:chart xmlns:c="http://schemas.openxmlformats.org/drawingml/2006/chart" r:id="rId2"/>
+          </a:graphicData>
+        </a:graphic>
+      </p:graphicFrame>
+      <p:sp>
+        <p:nvSpPr>
+          <p:cNvPr id="7" name="B1"/>
+          <p:cNvSpPr>
+            <a:spLocks noGrp="1"/>
+          </p:cNvSpPr>
+          <p:nvPr>
+            <p:ph type="body" idx="20"/>
           </p:nvPr>
         </p:nvSpPr>
         <p:spPr/>
@@ -28623,14 +29827,290 @@
             <a:pPr/>
             <a:r>
               <a:rPr lang="th-TH" dirty="0"/>
-              <a:t>NCT Infra Engineer, ทีมไอทีลูกค้า, Business Analyst</a:t>
-            </a:r>
-          </a:p>
-        </p:txBody>
-      </p:sp>
-      <p:sp>
-        <p:nvSpPr>
-          <p:cNvPr id="7" name="PN"/>
+              <a:t>งบโครงการ</a:t>
+            </a:r>
+          </a:p>
+        </p:txBody>
+      </p:sp>
+      <p:sp>
+        <p:nvSpPr>
+          <p:cNvPr id="8" name="SN"/>
+          <p:cNvSpPr>
+            <a:spLocks noGrp="1"/>
+          </p:cNvSpPr>
+          <p:nvPr>
+            <p:ph type="body" idx="26"/>
+          </p:nvPr>
+        </p:nvSpPr>
+        <p:spPr/>
+        <p:txBody>
+          <a:bodyPr/>
+          <a:lstStyle/>
+          <a:p>
+            <a:pPr/>
+            <a:r>
+              <a:rPr lang="th-TH" dirty="0"/>
+              <a:t>พัฒนาและตั้งค่าระบบ</a:t>
+            </a:r>
+          </a:p>
+        </p:txBody>
+      </p:sp>
+      <p:sp>
+        <p:nvSpPr>
+          <p:cNvPr id="9" name="SV"/>
+          <p:cNvSpPr>
+            <a:spLocks noGrp="1"/>
+          </p:cNvSpPr>
+          <p:nvPr>
+            <p:ph type="body" idx="27"/>
+          </p:nvPr>
+        </p:nvSpPr>
+        <p:spPr/>
+        <p:txBody>
+          <a:bodyPr/>
+          <a:lstStyle/>
+          <a:p>
+            <a:pPr/>
+            <a:r>
+              <a:rPr lang="th-TH" dirty="0"/>
+              <a:t>2.4 ล้านบาท</a:t>
+            </a:r>
+          </a:p>
+        </p:txBody>
+      </p:sp>
+      <p:sp>
+        <p:nvSpPr>
+          <p:cNvPr id="10" name="SP"/>
+          <p:cNvSpPr>
+            <a:spLocks noGrp="1"/>
+          </p:cNvSpPr>
+          <p:nvPr>
+            <p:ph type="body" idx="28"/>
+          </p:nvPr>
+        </p:nvSpPr>
+        <p:spPr/>
+        <p:txBody>
+          <a:bodyPr/>
+          <a:lstStyle/>
+          <a:p>
+            <a:pPr/>
+            <a:r>
+              <a:rPr lang="th-TH" dirty="0"/>
+              <a:t>50%</a:t>
+            </a:r>
+          </a:p>
+        </p:txBody>
+      </p:sp>
+      <p:sp>
+        <p:nvSpPr>
+          <p:cNvPr id="11" name="SN"/>
+          <p:cNvSpPr>
+            <a:spLocks noGrp="1"/>
+          </p:cNvSpPr>
+          <p:nvPr>
+            <p:ph type="body" idx="29"/>
+          </p:nvPr>
+        </p:nvSpPr>
+        <p:spPr/>
+        <p:txBody>
+          <a:bodyPr/>
+          <a:lstStyle/>
+          <a:p>
+            <a:pPr/>
+            <a:r>
+              <a:rPr lang="th-TH" dirty="0"/>
+              <a:t>ไลเซนส์ซอฟต์แวร์</a:t>
+            </a:r>
+          </a:p>
+        </p:txBody>
+      </p:sp>
+      <p:sp>
+        <p:nvSpPr>
+          <p:cNvPr id="12" name="SV"/>
+          <p:cNvSpPr>
+            <a:spLocks noGrp="1"/>
+          </p:cNvSpPr>
+          <p:nvPr>
+            <p:ph type="body" idx="30"/>
+          </p:nvPr>
+        </p:nvSpPr>
+        <p:spPr/>
+        <p:txBody>
+          <a:bodyPr/>
+          <a:lstStyle/>
+          <a:p>
+            <a:pPr/>
+            <a:r>
+              <a:rPr lang="th-TH" dirty="0"/>
+              <a:t>1.2 ล้านบาท</a:t>
+            </a:r>
+          </a:p>
+        </p:txBody>
+      </p:sp>
+      <p:sp>
+        <p:nvSpPr>
+          <p:cNvPr id="13" name="SP"/>
+          <p:cNvSpPr>
+            <a:spLocks noGrp="1"/>
+          </p:cNvSpPr>
+          <p:nvPr>
+            <p:ph type="body" idx="31"/>
+          </p:nvPr>
+        </p:nvSpPr>
+        <p:spPr/>
+        <p:txBody>
+          <a:bodyPr/>
+          <a:lstStyle/>
+          <a:p>
+            <a:pPr/>
+            <a:r>
+              <a:rPr lang="th-TH" dirty="0"/>
+              <a:t>25%</a:t>
+            </a:r>
+          </a:p>
+        </p:txBody>
+      </p:sp>
+      <p:sp>
+        <p:nvSpPr>
+          <p:cNvPr id="14" name="SN"/>
+          <p:cNvSpPr>
+            <a:spLocks noGrp="1"/>
+          </p:cNvSpPr>
+          <p:nvPr>
+            <p:ph type="body" idx="32"/>
+          </p:nvPr>
+        </p:nvSpPr>
+        <p:spPr/>
+        <p:txBody>
+          <a:bodyPr/>
+          <a:lstStyle/>
+          <a:p>
+            <a:pPr/>
+            <a:r>
+              <a:rPr lang="th-TH" dirty="0"/>
+              <a:t>คลาวด์ปีแรก</a:t>
+            </a:r>
+          </a:p>
+        </p:txBody>
+      </p:sp>
+      <p:sp>
+        <p:nvSpPr>
+          <p:cNvPr id="15" name="SV"/>
+          <p:cNvSpPr>
+            <a:spLocks noGrp="1"/>
+          </p:cNvSpPr>
+          <p:nvPr>
+            <p:ph type="body" idx="33"/>
+          </p:nvPr>
+        </p:nvSpPr>
+        <p:spPr/>
+        <p:txBody>
+          <a:bodyPr/>
+          <a:lstStyle/>
+          <a:p>
+            <a:pPr/>
+            <a:r>
+              <a:rPr lang="th-TH" dirty="0"/>
+              <a:t>0.7 ล้านบาท</a:t>
+            </a:r>
+          </a:p>
+        </p:txBody>
+      </p:sp>
+      <p:sp>
+        <p:nvSpPr>
+          <p:cNvPr id="16" name="SP"/>
+          <p:cNvSpPr>
+            <a:spLocks noGrp="1"/>
+          </p:cNvSpPr>
+          <p:nvPr>
+            <p:ph type="body" idx="34"/>
+          </p:nvPr>
+        </p:nvSpPr>
+        <p:spPr/>
+        <p:txBody>
+          <a:bodyPr/>
+          <a:lstStyle/>
+          <a:p>
+            <a:pPr/>
+            <a:r>
+              <a:rPr lang="th-TH" dirty="0"/>
+              <a:t>15%</a:t>
+            </a:r>
+          </a:p>
+        </p:txBody>
+      </p:sp>
+      <p:sp>
+        <p:nvSpPr>
+          <p:cNvPr id="17" name="SN"/>
+          <p:cNvSpPr>
+            <a:spLocks noGrp="1"/>
+          </p:cNvSpPr>
+          <p:nvPr>
+            <p:ph type="body" idx="35"/>
+          </p:nvPr>
+        </p:nvSpPr>
+        <p:spPr/>
+        <p:txBody>
+          <a:bodyPr/>
+          <a:lstStyle/>
+          <a:p>
+            <a:pPr/>
+            <a:r>
+              <a:rPr lang="th-TH" dirty="0"/>
+              <a:t>อื่น ๆ</a:t>
+            </a:r>
+          </a:p>
+        </p:txBody>
+      </p:sp>
+      <p:sp>
+        <p:nvSpPr>
+          <p:cNvPr id="18" name="SV"/>
+          <p:cNvSpPr>
+            <a:spLocks noGrp="1"/>
+          </p:cNvSpPr>
+          <p:nvPr>
+            <p:ph type="body" idx="36"/>
+          </p:nvPr>
+        </p:nvSpPr>
+        <p:spPr/>
+        <p:txBody>
+          <a:bodyPr/>
+          <a:lstStyle/>
+          <a:p>
+            <a:pPr/>
+            <a:r>
+              <a:rPr lang="th-TH" dirty="0"/>
+              <a:t>0.5 ล้านบาท</a:t>
+            </a:r>
+          </a:p>
+        </p:txBody>
+      </p:sp>
+      <p:sp>
+        <p:nvSpPr>
+          <p:cNvPr id="19" name="SP"/>
+          <p:cNvSpPr>
+            <a:spLocks noGrp="1"/>
+          </p:cNvSpPr>
+          <p:nvPr>
+            <p:ph type="body" idx="37"/>
+          </p:nvPr>
+        </p:nvSpPr>
+        <p:spPr/>
+        <p:txBody>
+          <a:bodyPr/>
+          <a:lstStyle/>
+          <a:p>
+            <a:pPr/>
+            <a:r>
+              <a:rPr lang="th-TH" dirty="0"/>
+              <a:t>10%</a:t>
+            </a:r>
+          </a:p>
+        </p:txBody>
+      </p:sp>
+      <p:sp>
+        <p:nvSpPr>
+          <p:cNvPr id="20" name="Src"/>
           <p:cNvSpPr>
             <a:spLocks noGrp="1"/>
           </p:cNvSpPr>
@@ -28646,14 +30126,14 @@
             <a:pPr/>
             <a:r>
               <a:rPr lang="th-TH" dirty="0"/>
-              <a:t>01</a:t>
-            </a:r>
-          </a:p>
-        </p:txBody>
-      </p:sp>
-      <p:sp>
-        <p:nvSpPr>
-          <p:cNvPr id="8" name="PP"/>
+              <a:t>ใบเสนอราคา NCT-2569-041 · ปัดเป็นแสนบาท</a:t>
+            </a:r>
+          </a:p>
+        </p:txBody>
+      </p:sp>
+      <p:sp>
+        <p:nvSpPr>
+          <p:cNvPr id="21" name="TL"/>
           <p:cNvSpPr>
             <a:spLocks noGrp="1"/>
           </p:cNvSpPr>
@@ -28669,14 +30149,14 @@
             <a:pPr/>
             <a:r>
               <a:rPr lang="th-TH" dirty="0"/>
-              <a:t>Preparation Phase</a:t>
-            </a:r>
-          </a:p>
-        </p:txBody>
-      </p:sp>
-      <p:sp>
-        <p:nvSpPr>
-          <p:cNvPr id="9" name="PI"/>
+              <a:t>สรุป</a:t>
+            </a:r>
+          </a:p>
+        </p:txBody>
+      </p:sp>
+      <p:sp>
+        <p:nvSpPr>
+          <p:cNvPr id="22" name="TC"/>
           <p:cNvSpPr>
             <a:spLocks noGrp="1"/>
           </p:cNvSpPr>
@@ -28692,51 +30172,7 @@
             <a:pPr/>
             <a:r>
               <a:rPr lang="th-TH" dirty="0"/>
-              <a:t>สรุปสเปกเครื่องและบริการคลาวด์ที่ต้องเตรียมให้พร้อมก่อนเริ่มงานพัฒนา</a:t>
-            </a:r>
-          </a:p>
-        </p:txBody>
-      </p:sp>
-      <p:sp>
-        <p:nvSpPr>
-          <p:cNvPr id="10" name="PB"/>
-          <p:cNvSpPr>
-            <a:spLocks noGrp="1"/>
-          </p:cNvSpPr>
-          <p:nvPr>
-            <p:ph type="body" idx="8"/>
-          </p:nvPr>
-        </p:nvSpPr>
-        <p:spPr/>
-        <p:txBody>
-          <a:bodyPr/>
-          <a:lstStyle/>
-          <a:p>
-            <a:pPr/>
-            <a:r>
-              <a:rPr lang="th-TH" dirty="0"/>
-              <a:t>PRD · 4 คอร์ / 16GB / SSD 300GB</a:t>
-            </a:r>
-          </a:p>
-          <a:p>
-            <a:pPr/>
-            <a:r>
-              <a:rPr lang="th-TH" dirty="0"/>
-              <a:t>QA · 4 คอร์ / 16GB / SSD 150GB</a:t>
-            </a:r>
-          </a:p>
-          <a:p>
-            <a:pPr/>
-            <a:r>
-              <a:rPr lang="th-TH" dirty="0"/>
-              <a:t>Windows Server 2022 ทั้งสองเครื่อง</a:t>
-            </a:r>
-          </a:p>
-          <a:p>
-            <a:pPr/>
-            <a:r>
-              <a:rPr lang="th-TH" dirty="0"/>
-              <a:t>Lambda, EC2 และ Cognito เปิดทั้งสองสภาพแวดล้อม</a:t>
+              <a:t>ไลเซนส์กับคลาวด์รวมกันไม่ถึง 40% งบส่วนใหญ่จ่ายให้งานที่ทำครั้งเดียว</a:t>
             </a:r>
           </a:p>
         </p:txBody>
@@ -28750,6 +30186,259 @@
 </file>
 
 <file path=ppt/slides/slide21.xml><?xml version="1.0" encoding="utf-8"?>
+<p:sld xmlns:a="http://schemas.openxmlformats.org/drawingml/2006/main" xmlns:r="http://schemas.openxmlformats.org/officeDocument/2006/relationships" xmlns:p="http://schemas.openxmlformats.org/presentationml/2006/main">
+  <p:cSld name="">
+    <p:spTree>
+      <p:nvGrpSpPr>
+        <p:cNvPr id="1" name=""/>
+        <p:cNvGrpSpPr/>
+        <p:nvPr/>
+      </p:nvGrpSpPr>
+      <p:grpSpPr>
+        <a:xfrm>
+          <a:off x="0" y="0"/>
+          <a:ext cx="0" cy="0"/>
+          <a:chOff x="0" y="0"/>
+          <a:chExt cx="0" cy="0"/>
+        </a:xfrm>
+      </p:grpSpPr>
+      <p:sp>
+        <p:nvSpPr>
+          <p:cNvPr id="2" name="Title"/>
+          <p:cNvSpPr>
+            <a:spLocks noGrp="1"/>
+          </p:cNvSpPr>
+          <p:nvPr>
+            <p:ph type="title"/>
+          </p:nvPr>
+        </p:nvSpPr>
+        <p:spPr/>
+        <p:txBody>
+          <a:bodyPr/>
+          <a:lstStyle/>
+          <a:p>
+            <a:pPr/>
+            <a:r>
+              <a:rPr lang="th-TH" dirty="0"/>
+              <a:t>5. Implementation Stage</a:t>
+            </a:r>
+          </a:p>
+        </p:txBody>
+      </p:sp>
+      <p:sp>
+        <p:nvSpPr>
+          <p:cNvPr id="3" name="KAL"/>
+          <p:cNvSpPr>
+            <a:spLocks noGrp="1"/>
+          </p:cNvSpPr>
+          <p:nvPr>
+            <p:ph type="body" idx="1"/>
+          </p:nvPr>
+        </p:nvSpPr>
+        <p:spPr/>
+        <p:txBody>
+          <a:bodyPr/>
+          <a:lstStyle/>
+          <a:p>
+            <a:pPr/>
+            <a:r>
+              <a:rPr lang="th-TH" dirty="0"/>
+              <a:t>Key Activity :</a:t>
+            </a:r>
+          </a:p>
+        </p:txBody>
+      </p:sp>
+      <p:sp>
+        <p:nvSpPr>
+          <p:cNvPr id="4" name="KAV"/>
+          <p:cNvSpPr>
+            <a:spLocks noGrp="1"/>
+          </p:cNvSpPr>
+          <p:nvPr>
+            <p:ph type="body" idx="2"/>
+          </p:nvPr>
+        </p:nvSpPr>
+        <p:spPr/>
+        <p:txBody>
+          <a:bodyPr/>
+          <a:lstStyle/>
+          <a:p>
+            <a:pPr/>
+            <a:r>
+              <a:rPr lang="th-TH" dirty="0"/>
+              <a:t>ตั้งค่าสภาพแวดล้อม ติดตั้งฮาร์ดแวร์และซอฟต์แวร์</a:t>
+            </a:r>
+          </a:p>
+        </p:txBody>
+      </p:sp>
+      <p:sp>
+        <p:nvSpPr>
+          <p:cNvPr id="5" name="PL"/>
+          <p:cNvSpPr>
+            <a:spLocks noGrp="1"/>
+          </p:cNvSpPr>
+          <p:nvPr>
+            <p:ph type="body" idx="3"/>
+          </p:nvPr>
+        </p:nvSpPr>
+        <p:spPr/>
+        <p:txBody>
+          <a:bodyPr/>
+          <a:lstStyle/>
+          <a:p>
+            <a:pPr/>
+            <a:r>
+              <a:rPr lang="th-TH" dirty="0"/>
+              <a:t>Participant :</a:t>
+            </a:r>
+          </a:p>
+        </p:txBody>
+      </p:sp>
+      <p:sp>
+        <p:nvSpPr>
+          <p:cNvPr id="6" name="PV"/>
+          <p:cNvSpPr>
+            <a:spLocks noGrp="1"/>
+          </p:cNvSpPr>
+          <p:nvPr>
+            <p:ph type="body" idx="4"/>
+          </p:nvPr>
+        </p:nvSpPr>
+        <p:spPr/>
+        <p:txBody>
+          <a:bodyPr/>
+          <a:lstStyle/>
+          <a:p>
+            <a:pPr/>
+            <a:r>
+              <a:rPr lang="th-TH" dirty="0"/>
+              <a:t>NCT Infra Engineer, ทีมไอทีลูกค้า, Business Analyst</a:t>
+            </a:r>
+          </a:p>
+        </p:txBody>
+      </p:sp>
+      <p:sp>
+        <p:nvSpPr>
+          <p:cNvPr id="7" name="PN"/>
+          <p:cNvSpPr>
+            <a:spLocks noGrp="1"/>
+          </p:cNvSpPr>
+          <p:nvPr>
+            <p:ph type="body" idx="5"/>
+          </p:nvPr>
+        </p:nvSpPr>
+        <p:spPr/>
+        <p:txBody>
+          <a:bodyPr/>
+          <a:lstStyle/>
+          <a:p>
+            <a:pPr/>
+            <a:r>
+              <a:rPr lang="th-TH" dirty="0"/>
+              <a:t>01</a:t>
+            </a:r>
+          </a:p>
+        </p:txBody>
+      </p:sp>
+      <p:sp>
+        <p:nvSpPr>
+          <p:cNvPr id="8" name="PP"/>
+          <p:cNvSpPr>
+            <a:spLocks noGrp="1"/>
+          </p:cNvSpPr>
+          <p:nvPr>
+            <p:ph type="body" idx="6"/>
+          </p:nvPr>
+        </p:nvSpPr>
+        <p:spPr/>
+        <p:txBody>
+          <a:bodyPr/>
+          <a:lstStyle/>
+          <a:p>
+            <a:pPr/>
+            <a:r>
+              <a:rPr lang="th-TH" dirty="0"/>
+              <a:t>Preparation Phase</a:t>
+            </a:r>
+          </a:p>
+        </p:txBody>
+      </p:sp>
+      <p:sp>
+        <p:nvSpPr>
+          <p:cNvPr id="9" name="PI"/>
+          <p:cNvSpPr>
+            <a:spLocks noGrp="1"/>
+          </p:cNvSpPr>
+          <p:nvPr>
+            <p:ph type="body" idx="7"/>
+          </p:nvPr>
+        </p:nvSpPr>
+        <p:spPr/>
+        <p:txBody>
+          <a:bodyPr/>
+          <a:lstStyle/>
+          <a:p>
+            <a:pPr/>
+            <a:r>
+              <a:rPr lang="th-TH" dirty="0"/>
+              <a:t>สรุปสเปกเครื่องและบริการคลาวด์ที่ต้องเตรียมให้พร้อมก่อนเริ่มงานพัฒนา</a:t>
+            </a:r>
+          </a:p>
+        </p:txBody>
+      </p:sp>
+      <p:sp>
+        <p:nvSpPr>
+          <p:cNvPr id="10" name="PB"/>
+          <p:cNvSpPr>
+            <a:spLocks noGrp="1"/>
+          </p:cNvSpPr>
+          <p:nvPr>
+            <p:ph type="body" idx="8"/>
+          </p:nvPr>
+        </p:nvSpPr>
+        <p:spPr/>
+        <p:txBody>
+          <a:bodyPr/>
+          <a:lstStyle/>
+          <a:p>
+            <a:pPr/>
+            <a:r>
+              <a:rPr lang="th-TH" dirty="0"/>
+              <a:t>PRD · 4 คอร์ / 16GB / SSD 300GB</a:t>
+            </a:r>
+          </a:p>
+          <a:p>
+            <a:pPr/>
+            <a:r>
+              <a:rPr lang="th-TH" dirty="0"/>
+              <a:t>QA · 4 คอร์ / 16GB / SSD 150GB</a:t>
+            </a:r>
+          </a:p>
+          <a:p>
+            <a:pPr/>
+            <a:r>
+              <a:rPr lang="th-TH" dirty="0"/>
+              <a:t>Windows Server 2022 ทั้งสองเครื่อง</a:t>
+            </a:r>
+          </a:p>
+          <a:p>
+            <a:pPr/>
+            <a:r>
+              <a:rPr lang="th-TH" dirty="0"/>
+              <a:t>Lambda, EC2 และ Cognito เปิดทั้งสองสภาพแวดล้อม</a:t>
+            </a:r>
+          </a:p>
+        </p:txBody>
+      </p:sp>
+    </p:spTree>
+  </p:cSld>
+  <p:clrMapOvr>
+    <a:masterClrMapping/>
+  </p:clrMapOvr>
+</p:sld>
+</file>
+
+<file path=ppt/slides/slide22.xml><?xml version="1.0" encoding="utf-8"?>
 <p:sld xmlns:a="http://schemas.openxmlformats.org/drawingml/2006/main" xmlns:r="http://schemas.openxmlformats.org/officeDocument/2006/relationships" xmlns:p="http://schemas.openxmlformats.org/presentationml/2006/main">
   <p:cSld name="">
     <p:spTree>
@@ -29235,7 +30924,7 @@
 </p:sld>
 </file>
 
-<file path=ppt/slides/slide22.xml><?xml version="1.0" encoding="utf-8"?>
+<file path=ppt/slides/slide23.xml><?xml version="1.0" encoding="utf-8"?>
 <p:sld xmlns:a="http://schemas.openxmlformats.org/drawingml/2006/main" xmlns:r="http://schemas.openxmlformats.org/officeDocument/2006/relationships" xmlns:p="http://schemas.openxmlformats.org/presentationml/2006/main">
   <p:cSld name="">
     <p:spTree>
@@ -30109,14 +31798,288 @@
             <a:pPr/>
             <a:r>
               <a:rPr lang="th-TH" dirty="0"/>
-              <a:t>ก่อนและหลังใช้บริการ</a:t>
-            </a:r>
-          </a:p>
-        </p:txBody>
-      </p:sp>
-      <p:sp>
-        <p:nvSpPr>
-          <p:cNvPr id="3" name="LH"/>
+              <a:t>เอกสารเกินกำลังคีย์ 1,200 ใบครั้งแรกเดือน พ.ค.</a:t>
+            </a:r>
+          </a:p>
+        </p:txBody>
+      </p:sp>
+      <p:sp>
+        <p:nvSpPr>
+          <p:cNvPr id="3" name="TL0"/>
+          <p:cNvSpPr>
+            <a:spLocks noGrp="1"/>
+          </p:cNvSpPr>
+          <p:nvPr>
+            <p:ph type="body" idx="20"/>
+          </p:nvPr>
+        </p:nvSpPr>
+        <p:spPr/>
+        <p:txBody>
+          <a:bodyPr/>
+          <a:lstStyle/>
+          <a:p>
+            <a:pPr/>
+            <a:r>
+              <a:rPr lang="th-TH" dirty="0"/>
+              <a:t>เอกสารเข้า มิ.ย.</a:t>
+            </a:r>
+          </a:p>
+        </p:txBody>
+      </p:sp>
+      <p:sp>
+        <p:nvSpPr>
+          <p:cNvPr id="4" name="TV0"/>
+          <p:cNvSpPr>
+            <a:spLocks noGrp="1"/>
+          </p:cNvSpPr>
+          <p:nvPr>
+            <p:ph type="body" idx="21"/>
+          </p:nvPr>
+        </p:nvSpPr>
+        <p:spPr/>
+        <p:txBody>
+          <a:bodyPr/>
+          <a:lstStyle/>
+          <a:p>
+            <a:pPr/>
+            <a:r>
+              <a:rPr lang="th-TH" dirty="0"/>
+              <a:t>1,150 ใบ</a:t>
+            </a:r>
+          </a:p>
+        </p:txBody>
+      </p:sp>
+      <p:sp>
+        <p:nvSpPr>
+          <p:cNvPr id="5" name="TD0"/>
+          <p:cNvSpPr>
+            <a:spLocks noGrp="1"/>
+          </p:cNvSpPr>
+          <p:nvPr>
+            <p:ph type="body" idx="22"/>
+          </p:nvPr>
+        </p:nvSpPr>
+        <p:spPr/>
+        <p:txBody>
+          <a:bodyPr/>
+          <a:lstStyle/>
+          <a:p>
+            <a:pPr/>
+            <a:r>
+              <a:rPr lang="th-TH" dirty="0">
+                <a:solidFill>
+                  <a:srgbClr val="B3261E"/>
+                </a:solidFill>
+              </a:rPr>
+              <a:t>▲ </a:t>
+            </a:r>
+            <a:r>
+              <a:rPr lang="th-TH" dirty="0"/>
+              <a:t>15% จาก ม.ค.</a:t>
+            </a:r>
+          </a:p>
+        </p:txBody>
+      </p:sp>
+      <p:sp>
+        <p:nvSpPr>
+          <p:cNvPr id="6" name="TL1"/>
+          <p:cNvSpPr>
+            <a:spLocks noGrp="1"/>
+          </p:cNvSpPr>
+          <p:nvPr>
+            <p:ph type="body" idx="23"/>
+          </p:nvPr>
+        </p:nvSpPr>
+        <p:spPr/>
+        <p:txBody>
+          <a:bodyPr/>
+          <a:lstStyle/>
+          <a:p>
+            <a:pPr/>
+            <a:r>
+              <a:rPr lang="th-TH" dirty="0"/>
+              <a:t>เวลาคีย์ต่อใบ</a:t>
+            </a:r>
+          </a:p>
+        </p:txBody>
+      </p:sp>
+      <p:sp>
+        <p:nvSpPr>
+          <p:cNvPr id="7" name="TV1"/>
+          <p:cNvSpPr>
+            <a:spLocks noGrp="1"/>
+          </p:cNvSpPr>
+          <p:nvPr>
+            <p:ph type="body" idx="24"/>
+          </p:nvPr>
+        </p:nvSpPr>
+        <p:spPr/>
+        <p:txBody>
+          <a:bodyPr/>
+          <a:lstStyle/>
+          <a:p>
+            <a:pPr/>
+            <a:r>
+              <a:rPr lang="th-TH" dirty="0"/>
+              <a:t>4 นาที</a:t>
+            </a:r>
+          </a:p>
+        </p:txBody>
+      </p:sp>
+      <p:sp>
+        <p:nvSpPr>
+          <p:cNvPr id="8" name="TD1"/>
+          <p:cNvSpPr>
+            <a:spLocks noGrp="1"/>
+          </p:cNvSpPr>
+          <p:nvPr>
+            <p:ph type="body" idx="25"/>
+          </p:nvPr>
+        </p:nvSpPr>
+        <p:spPr/>
+        <p:txBody>
+          <a:bodyPr/>
+          <a:lstStyle/>
+          <a:p>
+            <a:pPr/>
+            <a:r>
+              <a:rPr lang="th-TH" dirty="0">
+                <a:solidFill>
+                  <a:srgbClr val="1A6647"/>
+                </a:solidFill>
+              </a:rPr>
+              <a:t>▼ </a:t>
+            </a:r>
+            <a:r>
+              <a:rPr lang="th-TH" dirty="0"/>
+              <a:t>0.5 นาที จากปีก่อน</a:t>
+            </a:r>
+          </a:p>
+        </p:txBody>
+      </p:sp>
+      <p:sp>
+        <p:nvSpPr>
+          <p:cNvPr id="9" name="TL2"/>
+          <p:cNvSpPr>
+            <a:spLocks noGrp="1"/>
+          </p:cNvSpPr>
+          <p:nvPr>
+            <p:ph type="body" idx="26"/>
+          </p:nvPr>
+        </p:nvSpPr>
+        <p:spPr/>
+        <p:txBody>
+          <a:bodyPr/>
+          <a:lstStyle/>
+          <a:p>
+            <a:pPr/>
+            <a:r>
+              <a:rPr lang="th-TH" dirty="0"/>
+              <a:t>ชั่วโมงคีย์ต่อเดือน</a:t>
+            </a:r>
+          </a:p>
+        </p:txBody>
+      </p:sp>
+      <p:sp>
+        <p:nvSpPr>
+          <p:cNvPr id="10" name="TV2"/>
+          <p:cNvSpPr>
+            <a:spLocks noGrp="1"/>
+          </p:cNvSpPr>
+          <p:nvPr>
+            <p:ph type="body" idx="27"/>
+          </p:nvPr>
+        </p:nvSpPr>
+        <p:spPr/>
+        <p:txBody>
+          <a:bodyPr/>
+          <a:lstStyle/>
+          <a:p>
+            <a:pPr/>
+            <a:r>
+              <a:rPr lang="th-TH" dirty="0"/>
+              <a:t>77 ชม.</a:t>
+            </a:r>
+          </a:p>
+        </p:txBody>
+      </p:sp>
+      <p:sp>
+        <p:nvSpPr>
+          <p:cNvPr id="11" name="TD2"/>
+          <p:cNvSpPr>
+            <a:spLocks noGrp="1"/>
+          </p:cNvSpPr>
+          <p:nvPr>
+            <p:ph type="body" idx="28"/>
+          </p:nvPr>
+        </p:nvSpPr>
+        <p:spPr/>
+        <p:txBody>
+          <a:bodyPr/>
+          <a:lstStyle/>
+          <a:p>
+            <a:pPr/>
+            <a:r>
+              <a:rPr lang="th-TH" dirty="0">
+                <a:solidFill>
+                  <a:srgbClr val="B3261E"/>
+                </a:solidFill>
+              </a:rPr>
+              <a:t>▲ </a:t>
+            </a:r>
+            <a:r>
+              <a:rPr lang="th-TH" dirty="0"/>
+              <a:t>10 ชม. จาก ม.ค.</a:t>
+            </a:r>
+          </a:p>
+        </p:txBody>
+      </p:sp>
+      <p:graphicFrame>
+        <p:nvGraphicFramePr>
+          <p:cNvPr id="12" name="Trend"/>
+          <p:cNvGraphicFramePr>
+            <a:graphicFrameLocks noGrp="1"/>
+          </p:cNvGraphicFramePr>
+          <p:nvPr>
+            <p:ph type="chart" idx="1"/>
+          </p:nvPr>
+        </p:nvGraphicFramePr>
+        <p:xfrm>
+          <a:off x="914400" y="3291840"/>
+          <a:ext cx="10363200" cy="1874520"/>
+        </p:xfrm>
+        <a:graphic>
+          <a:graphicData uri="http://schemas.openxmlformats.org/drawingml/2006/chart">
+            <c:chart xmlns:c="http://schemas.openxmlformats.org/drawingml/2006/chart" r:id="rId2"/>
+          </a:graphicData>
+        </a:graphic>
+      </p:graphicFrame>
+      <p:sp>
+        <p:nvSpPr>
+          <p:cNvPr id="13" name="Src"/>
+          <p:cNvSpPr>
+            <a:spLocks noGrp="1"/>
+          </p:cNvSpPr>
+          <p:nvPr>
+            <p:ph type="body" idx="2"/>
+          </p:nvPr>
+        </p:nvSpPr>
+        <p:spPr/>
+        <p:txBody>
+          <a:bodyPr/>
+          <a:lstStyle/>
+          <a:p>
+            <a:pPr/>
+            <a:r>
+              <a:rPr lang="th-TH" dirty="0"/>
+              <a:t>ระบบบัญชีของลูกค้า · ม.ค.–มิ.ย. 2569 · หน่วย: ใบต่อเดือน</a:t>
+            </a:r>
+          </a:p>
+        </p:txBody>
+      </p:sp>
+      <p:sp>
+        <p:nvSpPr>
+          <p:cNvPr id="14" name="TkL"/>
           <p:cNvSpPr>
             <a:spLocks noGrp="1"/>
           </p:cNvSpPr>
@@ -30132,19 +32095,19 @@
             <a:pPr/>
             <a:r>
               <a:rPr lang="th-TH" dirty="0"/>
-              <a:t>ก่อน</a:t>
-            </a:r>
-          </a:p>
-        </p:txBody>
-      </p:sp>
-      <p:sp>
-        <p:nvSpPr>
-          <p:cNvPr id="4" name="L"/>
-          <p:cNvSpPr>
-            <a:spLocks noGrp="1"/>
-          </p:cNvSpPr>
-          <p:nvPr>
-            <p:ph type="body" idx="1"/>
+              <a:t>สรุป</a:t>
+            </a:r>
+          </a:p>
+        </p:txBody>
+      </p:sp>
+      <p:sp>
+        <p:nvSpPr>
+          <p:cNvPr id="15" name="TkC"/>
+          <p:cNvSpPr>
+            <a:spLocks noGrp="1"/>
+          </p:cNvSpPr>
+          <p:nvPr>
+            <p:ph type="body" idx="4"/>
           </p:nvPr>
         </p:nvSpPr>
         <p:spPr/>
@@ -30155,67 +32118,7 @@
             <a:pPr/>
             <a:r>
               <a:rPr lang="th-TH" dirty="0"/>
-              <a:t>ระบบล่มบ่อย ไม่มีคนดูแลประจำ</a:t>
-            </a:r>
-          </a:p>
-          <a:p>
-            <a:pPr/>
-            <a:r>
-              <a:rPr lang="th-TH" dirty="0"/>
-              <a:t>ค่าใช้จ่ายไม่แน่นอน</a:t>
-            </a:r>
-          </a:p>
-        </p:txBody>
-      </p:sp>
-      <p:sp>
-        <p:nvSpPr>
-          <p:cNvPr id="5" name="RH"/>
-          <p:cNvSpPr>
-            <a:spLocks noGrp="1"/>
-          </p:cNvSpPr>
-          <p:nvPr>
-            <p:ph type="body" idx="4"/>
-          </p:nvPr>
-        </p:nvSpPr>
-        <p:spPr/>
-        <p:txBody>
-          <a:bodyPr/>
-          <a:lstStyle/>
-          <a:p>
-            <a:pPr/>
-            <a:r>
-              <a:rPr lang="th-TH" dirty="0"/>
-              <a:t>หลัง</a:t>
-            </a:r>
-          </a:p>
-        </p:txBody>
-      </p:sp>
-      <p:sp>
-        <p:nvSpPr>
-          <p:cNvPr id="6" name="R"/>
-          <p:cNvSpPr>
-            <a:spLocks noGrp="1"/>
-          </p:cNvSpPr>
-          <p:nvPr>
-            <p:ph type="body" idx="2"/>
-          </p:nvPr>
-        </p:nvSpPr>
-        <p:spPr/>
-        <p:txBody>
-          <a:bodyPr/>
-          <a:lstStyle/>
-          <a:p>
-            <a:pPr/>
-            <a:r>
-              <a:rPr lang="th-TH" dirty="0"/>
-              <a:t>มอนิเตอร์ 24 ชั่วโมง แจ้งเตือนอัตโนมัติ</a:t>
-            </a:r>
-          </a:p>
-          <a:p>
-            <a:pPr/>
-            <a:r>
-              <a:rPr lang="th-TH" dirty="0"/>
-              <a:t>ค่าใช้จ่ายคงที่ต่อเดือน</a:t>
+              <a:t>เดือนที่เกินกำลังคีย์คือเดือนที่ปิดงบนานสุด ต้องลดงานคีย์ ไม่ใช่เพิ่มคน</a:t>
             </a:r>
           </a:p>
         </p:txBody>
@@ -30263,19 +32166,19 @@
             <a:pPr/>
             <a:r>
               <a:rPr lang="th-TH" dirty="0"/>
-              <a:t>สี่ผลลัพธ์ที่ข้อเสนอนี้ให้</a:t>
-            </a:r>
-          </a:p>
-        </p:txBody>
-      </p:sp>
-      <p:sp>
-        <p:nvSpPr>
-          <p:cNvPr id="3" name="N0"/>
-          <p:cNvSpPr>
-            <a:spLocks noGrp="1"/>
-          </p:cNvSpPr>
-          <p:nvPr>
-            <p:ph type="body" idx="20"/>
+              <a:t>ก่อนและหลังใช้บริการ</a:t>
+            </a:r>
+          </a:p>
+        </p:txBody>
+      </p:sp>
+      <p:sp>
+        <p:nvSpPr>
+          <p:cNvPr id="3" name="LH"/>
+          <p:cNvSpPr>
+            <a:spLocks noGrp="1"/>
+          </p:cNvSpPr>
+          <p:nvPr>
+            <p:ph type="body" idx="3"/>
           </p:nvPr>
         </p:nvSpPr>
         <p:spPr/>
@@ -30286,19 +32189,19 @@
             <a:pPr/>
             <a:r>
               <a:rPr lang="th-TH" dirty="0"/>
-              <a:t>01</a:t>
-            </a:r>
-          </a:p>
-        </p:txBody>
-      </p:sp>
-      <p:sp>
-        <p:nvSpPr>
-          <p:cNvPr id="4" name="H0"/>
-          <p:cNvSpPr>
-            <a:spLocks noGrp="1"/>
-          </p:cNvSpPr>
-          <p:nvPr>
-            <p:ph type="body" idx="21"/>
+              <a:t>ก่อน</a:t>
+            </a:r>
+          </a:p>
+        </p:txBody>
+      </p:sp>
+      <p:sp>
+        <p:nvSpPr>
+          <p:cNvPr id="4" name="L"/>
+          <p:cNvSpPr>
+            <a:spLocks noGrp="1"/>
+          </p:cNvSpPr>
+          <p:nvPr>
+            <p:ph type="body" idx="1"/>
           </p:nvPr>
         </p:nvSpPr>
         <p:spPr/>
@@ -30309,19 +32212,26 @@
             <a:pPr/>
             <a:r>
               <a:rPr lang="th-TH" dirty="0"/>
-              <a:t>ลดงานคีย์ซ้ำ</a:t>
-            </a:r>
-          </a:p>
-        </p:txBody>
-      </p:sp>
-      <p:sp>
-        <p:nvSpPr>
-          <p:cNvPr id="5" name="B0"/>
-          <p:cNvSpPr>
-            <a:spLocks noGrp="1"/>
-          </p:cNvSpPr>
-          <p:nvPr>
-            <p:ph type="body" idx="22"/>
+              <a:t>ระบบล่มบ่อย ไม่มีคนดูแลประจำ</a:t>
+            </a:r>
+          </a:p>
+          <a:p>
+            <a:pPr/>
+            <a:r>
+              <a:rPr lang="th-TH" dirty="0"/>
+              <a:t>ค่าใช้จ่ายไม่แน่นอน</a:t>
+            </a:r>
+          </a:p>
+        </p:txBody>
+      </p:sp>
+      <p:sp>
+        <p:nvSpPr>
+          <p:cNvPr id="5" name="RH"/>
+          <p:cNvSpPr>
+            <a:spLocks noGrp="1"/>
+          </p:cNvSpPr>
+          <p:nvPr>
+            <p:ph type="body" idx="4"/>
           </p:nvPr>
         </p:nvSpPr>
         <p:spPr/>
@@ -30332,19 +32242,19 @@
             <a:pPr/>
             <a:r>
               <a:rPr lang="th-TH" dirty="0"/>
-              <a:t>รับเอกสารเข้าระบบเดียว แล้วกระจายต่อให้ทุกปลายทางอัตโนมัติ</a:t>
-            </a:r>
-          </a:p>
-        </p:txBody>
-      </p:sp>
-      <p:sp>
-        <p:nvSpPr>
-          <p:cNvPr id="6" name="N1"/>
-          <p:cNvSpPr>
-            <a:spLocks noGrp="1"/>
-          </p:cNvSpPr>
-          <p:nvPr>
-            <p:ph type="body" idx="23"/>
+              <a:t>หลัง</a:t>
+            </a:r>
+          </a:p>
+        </p:txBody>
+      </p:sp>
+      <p:sp>
+        <p:nvSpPr>
+          <p:cNvPr id="6" name="R"/>
+          <p:cNvSpPr>
+            <a:spLocks noGrp="1"/>
+          </p:cNvSpPr>
+          <p:nvPr>
+            <p:ph type="body" idx="2"/>
           </p:nvPr>
         </p:nvSpPr>
         <p:spPr/>
@@ -30355,237 +32265,14 @@
             <a:pPr/>
             <a:r>
               <a:rPr lang="th-TH" dirty="0"/>
-              <a:t>02</a:t>
-            </a:r>
-          </a:p>
-        </p:txBody>
-      </p:sp>
-      <p:sp>
-        <p:nvSpPr>
-          <p:cNvPr id="7" name="H1"/>
-          <p:cNvSpPr>
-            <a:spLocks noGrp="1"/>
-          </p:cNvSpPr>
-          <p:nvPr>
-            <p:ph type="body" idx="24"/>
-          </p:nvPr>
-        </p:nvSpPr>
-        <p:spPr/>
-        <p:txBody>
-          <a:bodyPr/>
-          <a:lstStyle/>
+              <a:t>มอนิเตอร์ 24 ชั่วโมง แจ้งเตือนอัตโนมัติ</a:t>
+            </a:r>
+          </a:p>
           <a:p>
             <a:pPr/>
             <a:r>
               <a:rPr lang="th-TH" dirty="0"/>
-              <a:t>ตรวจสอบได้</a:t>
-            </a:r>
-          </a:p>
-        </p:txBody>
-      </p:sp>
-      <p:sp>
-        <p:nvSpPr>
-          <p:cNvPr id="8" name="B1"/>
-          <p:cNvSpPr>
-            <a:spLocks noGrp="1"/>
-          </p:cNvSpPr>
-          <p:nvPr>
-            <p:ph type="body" idx="25"/>
-          </p:nvPr>
-        </p:nvSpPr>
-        <p:spPr/>
-        <p:txBody>
-          <a:bodyPr/>
-          <a:lstStyle/>
-          <a:p>
-            <a:pPr/>
-            <a:r>
-              <a:rPr lang="th-TH" dirty="0"/>
-              <a:t>ทุกรายการมี audit trail ผู้ทำ เวลา และค่าก่อนหลัง</a:t>
-            </a:r>
-          </a:p>
-        </p:txBody>
-      </p:sp>
-      <p:sp>
-        <p:nvSpPr>
-          <p:cNvPr id="9" name="N2"/>
-          <p:cNvSpPr>
-            <a:spLocks noGrp="1"/>
-          </p:cNvSpPr>
-          <p:nvPr>
-            <p:ph type="body" idx="26"/>
-          </p:nvPr>
-        </p:nvSpPr>
-        <p:spPr/>
-        <p:txBody>
-          <a:bodyPr/>
-          <a:lstStyle/>
-          <a:p>
-            <a:pPr/>
-            <a:r>
-              <a:rPr lang="th-TH" dirty="0"/>
-              <a:t>03</a:t>
-            </a:r>
-          </a:p>
-        </p:txBody>
-      </p:sp>
-      <p:sp>
-        <p:nvSpPr>
-          <p:cNvPr id="10" name="H2"/>
-          <p:cNvSpPr>
-            <a:spLocks noGrp="1"/>
-          </p:cNvSpPr>
-          <p:nvPr>
-            <p:ph type="body" idx="27"/>
-          </p:nvPr>
-        </p:nvSpPr>
-        <p:spPr/>
-        <p:txBody>
-          <a:bodyPr/>
-          <a:lstStyle/>
-          <a:p>
-            <a:pPr/>
-            <a:r>
-              <a:rPr lang="th-TH" dirty="0"/>
-              <a:t>ปิดงบเร็วขึ้น</a:t>
-            </a:r>
-          </a:p>
-        </p:txBody>
-      </p:sp>
-      <p:sp>
-        <p:nvSpPr>
-          <p:cNvPr id="11" name="B2"/>
-          <p:cNvSpPr>
-            <a:spLocks noGrp="1"/>
-          </p:cNvSpPr>
-          <p:nvPr>
-            <p:ph type="body" idx="28"/>
-          </p:nvPr>
-        </p:nvSpPr>
-        <p:spPr/>
-        <p:txBody>
-          <a:bodyPr/>
-          <a:lstStyle/>
-          <a:p>
-            <a:pPr/>
-            <a:r>
-              <a:rPr lang="th-TH" dirty="0"/>
-              <a:t>กระทบยอดอัตโนมัติรายวัน ไม่ต้องรอสิ้นเดือน</a:t>
-            </a:r>
-          </a:p>
-        </p:txBody>
-      </p:sp>
-      <p:sp>
-        <p:nvSpPr>
-          <p:cNvPr id="12" name="N3"/>
-          <p:cNvSpPr>
-            <a:spLocks noGrp="1"/>
-          </p:cNvSpPr>
-          <p:nvPr>
-            <p:ph type="body" idx="29"/>
-          </p:nvPr>
-        </p:nvSpPr>
-        <p:spPr/>
-        <p:txBody>
-          <a:bodyPr/>
-          <a:lstStyle/>
-          <a:p>
-            <a:pPr/>
-            <a:r>
-              <a:rPr lang="th-TH" dirty="0"/>
-              <a:t>04</a:t>
-            </a:r>
-          </a:p>
-        </p:txBody>
-      </p:sp>
-      <p:sp>
-        <p:nvSpPr>
-          <p:cNvPr id="13" name="H3"/>
-          <p:cNvSpPr>
-            <a:spLocks noGrp="1"/>
-          </p:cNvSpPr>
-          <p:nvPr>
-            <p:ph type="body" idx="30"/>
-          </p:nvPr>
-        </p:nvSpPr>
-        <p:spPr/>
-        <p:txBody>
-          <a:bodyPr/>
-          <a:lstStyle/>
-          <a:p>
-            <a:pPr/>
-            <a:r>
-              <a:rPr lang="th-TH" dirty="0"/>
-              <a:t>ขยายต่อได้</a:t>
-            </a:r>
-          </a:p>
-        </p:txBody>
-      </p:sp>
-      <p:sp>
-        <p:nvSpPr>
-          <p:cNvPr id="14" name="B3"/>
-          <p:cNvSpPr>
-            <a:spLocks noGrp="1"/>
-          </p:cNvSpPr>
-          <p:nvPr>
-            <p:ph type="body" idx="31"/>
-          </p:nvPr>
-        </p:nvSpPr>
-        <p:spPr/>
-        <p:txBody>
-          <a:bodyPr/>
-          <a:lstStyle/>
-          <a:p>
-            <a:pPr/>
-            <a:r>
-              <a:rPr lang="th-TH" dirty="0"/>
-              <a:t>เพิ่มกระบวนการใหม่โดยไม่แก้ของเดิม</a:t>
-            </a:r>
-          </a:p>
-        </p:txBody>
-      </p:sp>
-      <p:sp>
-        <p:nvSpPr>
-          <p:cNvPr id="15" name="BL"/>
-          <p:cNvSpPr>
-            <a:spLocks noGrp="1"/>
-          </p:cNvSpPr>
-          <p:nvPr>
-            <p:ph type="body" idx="32"/>
-          </p:nvPr>
-        </p:nvSpPr>
-        <p:spPr/>
-        <p:txBody>
-          <a:bodyPr/>
-          <a:lstStyle/>
-          <a:p>
-            <a:pPr/>
-            <a:r>
-              <a:rPr lang="th-TH" dirty="0"/>
-              <a:t>สรุป</a:t>
-            </a:r>
-          </a:p>
-        </p:txBody>
-      </p:sp>
-      <p:sp>
-        <p:nvSpPr>
-          <p:cNvPr id="16" name="BC"/>
-          <p:cNvSpPr>
-            <a:spLocks noGrp="1"/>
-          </p:cNvSpPr>
-          <p:nvPr>
-            <p:ph type="body" idx="33"/>
-          </p:nvPr>
-        </p:nvSpPr>
-        <p:spPr/>
-        <p:txBody>
-          <a:bodyPr/>
-          <a:lstStyle/>
-          <a:p>
-            <a:pPr/>
-            <a:r>
-              <a:rPr lang="th-TH" dirty="0"/>
-              <a:t>ทั้งสี่ข้อมาจากการแก้จุดเดียวกัน คือรวมจุดรับเอกสาร</a:t>
+              <a:t>ค่าใช้จ่ายคงที่ต่อเดือน</a:t>
             </a:r>
           </a:p>
         </p:txBody>
@@ -30633,19 +32320,19 @@
             <a:pPr/>
             <a:r>
               <a:rPr lang="th-TH" dirty="0"/>
-              <a:t>วิธีการทำงาน</a:t>
-            </a:r>
-          </a:p>
-        </p:txBody>
-      </p:sp>
-      <p:sp>
-        <p:nvSpPr>
-          <p:cNvPr id="3" name="Cap"/>
-          <p:cNvSpPr>
-            <a:spLocks noGrp="1"/>
-          </p:cNvSpPr>
-          <p:nvPr>
-            <p:ph type="body" idx="2"/>
+              <a:t>สี่ผลลัพธ์ที่ข้อเสนอนี้ให้</a:t>
+            </a:r>
+          </a:p>
+        </p:txBody>
+      </p:sp>
+      <p:sp>
+        <p:nvSpPr>
+          <p:cNvPr id="3" name="N0"/>
+          <p:cNvSpPr>
+            <a:spLocks noGrp="1"/>
+          </p:cNvSpPr>
+          <p:nvPr>
+            <p:ph type="body" idx="20"/>
           </p:nvPr>
         </p:nvSpPr>
         <p:spPr/>
@@ -30656,7 +32343,306 @@
             <a:pPr/>
             <a:r>
               <a:rPr lang="th-TH" dirty="0"/>
-              <a:t>กระบวนการ สถาปัตยกรรม และขอบเขตที่ตกลงกัน</a:t>
+              <a:t>01</a:t>
+            </a:r>
+          </a:p>
+        </p:txBody>
+      </p:sp>
+      <p:sp>
+        <p:nvSpPr>
+          <p:cNvPr id="4" name="H0"/>
+          <p:cNvSpPr>
+            <a:spLocks noGrp="1"/>
+          </p:cNvSpPr>
+          <p:nvPr>
+            <p:ph type="body" idx="21"/>
+          </p:nvPr>
+        </p:nvSpPr>
+        <p:spPr/>
+        <p:txBody>
+          <a:bodyPr/>
+          <a:lstStyle/>
+          <a:p>
+            <a:pPr/>
+            <a:r>
+              <a:rPr lang="th-TH" dirty="0"/>
+              <a:t>ลดงานคีย์ซ้ำ</a:t>
+            </a:r>
+          </a:p>
+        </p:txBody>
+      </p:sp>
+      <p:sp>
+        <p:nvSpPr>
+          <p:cNvPr id="5" name="B0"/>
+          <p:cNvSpPr>
+            <a:spLocks noGrp="1"/>
+          </p:cNvSpPr>
+          <p:nvPr>
+            <p:ph type="body" idx="22"/>
+          </p:nvPr>
+        </p:nvSpPr>
+        <p:spPr/>
+        <p:txBody>
+          <a:bodyPr/>
+          <a:lstStyle/>
+          <a:p>
+            <a:pPr/>
+            <a:r>
+              <a:rPr lang="th-TH" dirty="0"/>
+              <a:t>รับเอกสารเข้าระบบเดียว แล้วกระจายต่อให้ทุกปลายทางอัตโนมัติ</a:t>
+            </a:r>
+          </a:p>
+        </p:txBody>
+      </p:sp>
+      <p:sp>
+        <p:nvSpPr>
+          <p:cNvPr id="6" name="N1"/>
+          <p:cNvSpPr>
+            <a:spLocks noGrp="1"/>
+          </p:cNvSpPr>
+          <p:nvPr>
+            <p:ph type="body" idx="23"/>
+          </p:nvPr>
+        </p:nvSpPr>
+        <p:spPr/>
+        <p:txBody>
+          <a:bodyPr/>
+          <a:lstStyle/>
+          <a:p>
+            <a:pPr/>
+            <a:r>
+              <a:rPr lang="th-TH" dirty="0"/>
+              <a:t>02</a:t>
+            </a:r>
+          </a:p>
+        </p:txBody>
+      </p:sp>
+      <p:sp>
+        <p:nvSpPr>
+          <p:cNvPr id="7" name="H1"/>
+          <p:cNvSpPr>
+            <a:spLocks noGrp="1"/>
+          </p:cNvSpPr>
+          <p:nvPr>
+            <p:ph type="body" idx="24"/>
+          </p:nvPr>
+        </p:nvSpPr>
+        <p:spPr/>
+        <p:txBody>
+          <a:bodyPr/>
+          <a:lstStyle/>
+          <a:p>
+            <a:pPr/>
+            <a:r>
+              <a:rPr lang="th-TH" dirty="0"/>
+              <a:t>ตรวจสอบได้</a:t>
+            </a:r>
+          </a:p>
+        </p:txBody>
+      </p:sp>
+      <p:sp>
+        <p:nvSpPr>
+          <p:cNvPr id="8" name="B1"/>
+          <p:cNvSpPr>
+            <a:spLocks noGrp="1"/>
+          </p:cNvSpPr>
+          <p:nvPr>
+            <p:ph type="body" idx="25"/>
+          </p:nvPr>
+        </p:nvSpPr>
+        <p:spPr/>
+        <p:txBody>
+          <a:bodyPr/>
+          <a:lstStyle/>
+          <a:p>
+            <a:pPr/>
+            <a:r>
+              <a:rPr lang="th-TH" dirty="0"/>
+              <a:t>ทุกรายการมี audit trail ผู้ทำ เวลา และค่าก่อนหลัง</a:t>
+            </a:r>
+          </a:p>
+        </p:txBody>
+      </p:sp>
+      <p:sp>
+        <p:nvSpPr>
+          <p:cNvPr id="9" name="N2"/>
+          <p:cNvSpPr>
+            <a:spLocks noGrp="1"/>
+          </p:cNvSpPr>
+          <p:nvPr>
+            <p:ph type="body" idx="26"/>
+          </p:nvPr>
+        </p:nvSpPr>
+        <p:spPr/>
+        <p:txBody>
+          <a:bodyPr/>
+          <a:lstStyle/>
+          <a:p>
+            <a:pPr/>
+            <a:r>
+              <a:rPr lang="th-TH" dirty="0"/>
+              <a:t>03</a:t>
+            </a:r>
+          </a:p>
+        </p:txBody>
+      </p:sp>
+      <p:sp>
+        <p:nvSpPr>
+          <p:cNvPr id="10" name="H2"/>
+          <p:cNvSpPr>
+            <a:spLocks noGrp="1"/>
+          </p:cNvSpPr>
+          <p:nvPr>
+            <p:ph type="body" idx="27"/>
+          </p:nvPr>
+        </p:nvSpPr>
+        <p:spPr/>
+        <p:txBody>
+          <a:bodyPr/>
+          <a:lstStyle/>
+          <a:p>
+            <a:pPr/>
+            <a:r>
+              <a:rPr lang="th-TH" dirty="0"/>
+              <a:t>ปิดงบเร็วขึ้น</a:t>
+            </a:r>
+          </a:p>
+        </p:txBody>
+      </p:sp>
+      <p:sp>
+        <p:nvSpPr>
+          <p:cNvPr id="11" name="B2"/>
+          <p:cNvSpPr>
+            <a:spLocks noGrp="1"/>
+          </p:cNvSpPr>
+          <p:nvPr>
+            <p:ph type="body" idx="28"/>
+          </p:nvPr>
+        </p:nvSpPr>
+        <p:spPr/>
+        <p:txBody>
+          <a:bodyPr/>
+          <a:lstStyle/>
+          <a:p>
+            <a:pPr/>
+            <a:r>
+              <a:rPr lang="th-TH" dirty="0"/>
+              <a:t>กระทบยอดอัตโนมัติรายวัน ไม่ต้องรอสิ้นเดือน</a:t>
+            </a:r>
+          </a:p>
+        </p:txBody>
+      </p:sp>
+      <p:sp>
+        <p:nvSpPr>
+          <p:cNvPr id="12" name="N3"/>
+          <p:cNvSpPr>
+            <a:spLocks noGrp="1"/>
+          </p:cNvSpPr>
+          <p:nvPr>
+            <p:ph type="body" idx="29"/>
+          </p:nvPr>
+        </p:nvSpPr>
+        <p:spPr/>
+        <p:txBody>
+          <a:bodyPr/>
+          <a:lstStyle/>
+          <a:p>
+            <a:pPr/>
+            <a:r>
+              <a:rPr lang="th-TH" dirty="0"/>
+              <a:t>04</a:t>
+            </a:r>
+          </a:p>
+        </p:txBody>
+      </p:sp>
+      <p:sp>
+        <p:nvSpPr>
+          <p:cNvPr id="13" name="H3"/>
+          <p:cNvSpPr>
+            <a:spLocks noGrp="1"/>
+          </p:cNvSpPr>
+          <p:nvPr>
+            <p:ph type="body" idx="30"/>
+          </p:nvPr>
+        </p:nvSpPr>
+        <p:spPr/>
+        <p:txBody>
+          <a:bodyPr/>
+          <a:lstStyle/>
+          <a:p>
+            <a:pPr/>
+            <a:r>
+              <a:rPr lang="th-TH" dirty="0"/>
+              <a:t>ขยายต่อได้</a:t>
+            </a:r>
+          </a:p>
+        </p:txBody>
+      </p:sp>
+      <p:sp>
+        <p:nvSpPr>
+          <p:cNvPr id="14" name="B3"/>
+          <p:cNvSpPr>
+            <a:spLocks noGrp="1"/>
+          </p:cNvSpPr>
+          <p:nvPr>
+            <p:ph type="body" idx="31"/>
+          </p:nvPr>
+        </p:nvSpPr>
+        <p:spPr/>
+        <p:txBody>
+          <a:bodyPr/>
+          <a:lstStyle/>
+          <a:p>
+            <a:pPr/>
+            <a:r>
+              <a:rPr lang="th-TH" dirty="0"/>
+              <a:t>เพิ่มกระบวนการใหม่โดยไม่แก้ของเดิม</a:t>
+            </a:r>
+          </a:p>
+        </p:txBody>
+      </p:sp>
+      <p:sp>
+        <p:nvSpPr>
+          <p:cNvPr id="15" name="BL"/>
+          <p:cNvSpPr>
+            <a:spLocks noGrp="1"/>
+          </p:cNvSpPr>
+          <p:nvPr>
+            <p:ph type="body" idx="32"/>
+          </p:nvPr>
+        </p:nvSpPr>
+        <p:spPr/>
+        <p:txBody>
+          <a:bodyPr/>
+          <a:lstStyle/>
+          <a:p>
+            <a:pPr/>
+            <a:r>
+              <a:rPr lang="th-TH" dirty="0"/>
+              <a:t>สรุป</a:t>
+            </a:r>
+          </a:p>
+        </p:txBody>
+      </p:sp>
+      <p:sp>
+        <p:nvSpPr>
+          <p:cNvPr id="16" name="BC"/>
+          <p:cNvSpPr>
+            <a:spLocks noGrp="1"/>
+          </p:cNvSpPr>
+          <p:nvPr>
+            <p:ph type="body" idx="33"/>
+          </p:nvPr>
+        </p:nvSpPr>
+        <p:spPr/>
+        <p:txBody>
+          <a:bodyPr/>
+          <a:lstStyle/>
+          <a:p>
+            <a:pPr/>
+            <a:r>
+              <a:rPr lang="th-TH" dirty="0"/>
+              <a:t>ทั้งสี่ข้อมาจากการแก้จุดเดียวกัน คือรวมจุดรับเอกสาร</a:t>
             </a:r>
           </a:p>
         </p:txBody>

--- a/NCT-Slide-Template-Corp-Demo.pptx
+++ b/NCT-Slide-Template-Corp-Demo.pptx
@@ -28,6 +28,7 @@
     <p:sldId id="276" r:id="rId22"/>
     <p:sldId id="277" r:id="rId23"/>
     <p:sldId id="278" r:id="rId24"/>
+    <p:sldId id="279" r:id="rId25"/>
   </p:sldIdLst>
   <p:sldSz cx="12192000" cy="6858000"/>
   <p:notesSz cx="6858000" cy="9144000"/>
@@ -436,7 +437,7 @@
             <c:idx val="5"/>
             <c:marker>
               <c:symbol val="circle"/>
-              <c:size val="7"/>
+              <c:size val="8"/>
               <c:spPr>
                 <a:solidFill>
                   <a:srgbClr val="2A5EA0"/>
@@ -786,6 +787,548 @@
 </file>
 
 <file path=ppt/charts/chart3.xml><?xml version="1.0" encoding="utf-8"?>
+<c:chartSpace xmlns:c="http://schemas.openxmlformats.org/drawingml/2006/chart" xmlns:a="http://schemas.openxmlformats.org/drawingml/2006/main" xmlns:r="http://schemas.openxmlformats.org/officeDocument/2006/relationships">
+  <c:roundedCorners val="0"/>
+  <c:chart>
+    <c:autoTitleDeleted val="1"/>
+    <c:plotArea>
+      <c:layout>
+        <c:manualLayout>
+          <c:layoutTarget val="inner"/>
+          <c:xMode val="edge"/>
+          <c:yMode val="edge"/>
+          <c:x val="0"/>
+          <c:y val="0.1042"/>
+          <c:w val="1"/>
+          <c:h val="0.8958"/>
+        </c:manualLayout>
+      </c:layout>
+      <c:scatterChart>
+        <c:scatterStyle val="lineMarker"/>
+        <c:varyColors val="0"/>
+        <c:ser>
+          <c:idx val="0"/>
+          <c:order val="0"/>
+          <c:tx>
+            <c:strRef>
+              <c:f>Sheet1!$A$2</c:f>
+              <c:strCache>
+                <c:ptCount val="1"/>
+                <c:pt idx="0">
+                  <c:v>ปิดงบสิ้นเดือน</c:v>
+                </c:pt>
+              </c:strCache>
+            </c:strRef>
+          </c:tx>
+          <c:spPr>
+            <a:ln w="19050" cap="rnd">
+              <a:solidFill>
+                <a:srgbClr val="90B4E4"/>
+              </a:solidFill>
+              <a:round/>
+            </a:ln>
+          </c:spPr>
+          <c:marker>
+            <c:symbol val="circle"/>
+            <c:size val="8"/>
+            <c:spPr>
+              <a:solidFill>
+                <a:srgbClr val="90B4E4"/>
+              </a:solidFill>
+              <a:ln w="19050">
+                <a:solidFill>
+                  <a:srgbClr val="FFFFFF"/>
+                </a:solidFill>
+              </a:ln>
+            </c:spPr>
+          </c:marker>
+          <c:dPt>
+            <c:idx val="1"/>
+            <c:marker>
+              <c:symbol val="circle"/>
+              <c:size val="8"/>
+              <c:spPr>
+                <a:solidFill>
+                  <a:srgbClr val="2A5EA0"/>
+                </a:solidFill>
+                <a:ln w="19050">
+                  <a:solidFill>
+                    <a:srgbClr val="FFFFFF"/>
+                  </a:solidFill>
+                </a:ln>
+              </c:spPr>
+            </c:marker>
+            <c:bubble3D val="0"/>
+          </c:dPt>
+          <c:xVal>
+            <c:numRef>
+              <c:f>Sheet1!$B$2:$C$2</c:f>
+              <c:numCache>
+                <c:formatCode>General</c:formatCode>
+                <c:ptCount val="2"/>
+                <c:pt idx="0">
+                  <c:v>48</c:v>
+                </c:pt>
+                <c:pt idx="1">
+                  <c:v>16</c:v>
+                </c:pt>
+              </c:numCache>
+            </c:numRef>
+          </c:xVal>
+          <c:yVal>
+            <c:numRef>
+              <c:f>Sheet1!$D$2:$E$2</c:f>
+              <c:numCache>
+                <c:formatCode>General</c:formatCode>
+                <c:ptCount val="2"/>
+                <c:pt idx="0">
+                  <c:v>1</c:v>
+                </c:pt>
+                <c:pt idx="1">
+                  <c:v>1</c:v>
+                </c:pt>
+              </c:numCache>
+            </c:numRef>
+          </c:yVal>
+          <c:smooth val="0"/>
+        </c:ser>
+        <c:ser>
+          <c:idx val="1"/>
+          <c:order val="1"/>
+          <c:tx>
+            <c:strRef>
+              <c:f>Sheet1!$A$3</c:f>
+              <c:strCache>
+                <c:ptCount val="1"/>
+                <c:pt idx="0">
+                  <c:v>คีย์ใบแจ้งหนี้ซื้อ</c:v>
+                </c:pt>
+              </c:strCache>
+            </c:strRef>
+          </c:tx>
+          <c:spPr>
+            <a:ln w="19050" cap="rnd">
+              <a:solidFill>
+                <a:srgbClr val="90B4E4"/>
+              </a:solidFill>
+              <a:round/>
+            </a:ln>
+          </c:spPr>
+          <c:marker>
+            <c:symbol val="circle"/>
+            <c:size val="8"/>
+            <c:spPr>
+              <a:solidFill>
+                <a:srgbClr val="90B4E4"/>
+              </a:solidFill>
+              <a:ln w="19050">
+                <a:solidFill>
+                  <a:srgbClr val="FFFFFF"/>
+                </a:solidFill>
+              </a:ln>
+            </c:spPr>
+          </c:marker>
+          <c:dPt>
+            <c:idx val="1"/>
+            <c:marker>
+              <c:symbol val="circle"/>
+              <c:size val="8"/>
+              <c:spPr>
+                <a:solidFill>
+                  <a:srgbClr val="2A5EA0"/>
+                </a:solidFill>
+                <a:ln w="19050">
+                  <a:solidFill>
+                    <a:srgbClr val="FFFFFF"/>
+                  </a:solidFill>
+                </a:ln>
+              </c:spPr>
+            </c:marker>
+            <c:bubble3D val="0"/>
+          </c:dPt>
+          <c:xVal>
+            <c:numRef>
+              <c:f>Sheet1!$B$3:$C$3</c:f>
+              <c:numCache>
+                <c:formatCode>General</c:formatCode>
+                <c:ptCount val="2"/>
+                <c:pt idx="0">
+                  <c:v>28</c:v>
+                </c:pt>
+                <c:pt idx="1">
+                  <c:v>3</c:v>
+                </c:pt>
+              </c:numCache>
+            </c:numRef>
+          </c:xVal>
+          <c:yVal>
+            <c:numRef>
+              <c:f>Sheet1!$D$3:$E$3</c:f>
+              <c:numCache>
+                <c:formatCode>General</c:formatCode>
+                <c:ptCount val="2"/>
+                <c:pt idx="0">
+                  <c:v>2</c:v>
+                </c:pt>
+                <c:pt idx="1">
+                  <c:v>2</c:v>
+                </c:pt>
+              </c:numCache>
+            </c:numRef>
+          </c:yVal>
+          <c:smooth val="0"/>
+        </c:ser>
+        <c:ser>
+          <c:idx val="2"/>
+          <c:order val="2"/>
+          <c:tx>
+            <c:strRef>
+              <c:f>Sheet1!$A$4</c:f>
+              <c:strCache>
+                <c:ptCount val="1"/>
+                <c:pt idx="0">
+                  <c:v>กระทบยอดธนาคาร</c:v>
+                </c:pt>
+              </c:strCache>
+            </c:strRef>
+          </c:tx>
+          <c:spPr>
+            <a:ln w="19050" cap="rnd">
+              <a:solidFill>
+                <a:srgbClr val="90B4E4"/>
+              </a:solidFill>
+              <a:round/>
+            </a:ln>
+          </c:spPr>
+          <c:marker>
+            <c:symbol val="circle"/>
+            <c:size val="8"/>
+            <c:spPr>
+              <a:solidFill>
+                <a:srgbClr val="90B4E4"/>
+              </a:solidFill>
+              <a:ln w="19050">
+                <a:solidFill>
+                  <a:srgbClr val="FFFFFF"/>
+                </a:solidFill>
+              </a:ln>
+            </c:spPr>
+          </c:marker>
+          <c:dPt>
+            <c:idx val="1"/>
+            <c:marker>
+              <c:symbol val="circle"/>
+              <c:size val="8"/>
+              <c:spPr>
+                <a:solidFill>
+                  <a:srgbClr val="2A5EA0"/>
+                </a:solidFill>
+                <a:ln w="19050">
+                  <a:solidFill>
+                    <a:srgbClr val="FFFFFF"/>
+                  </a:solidFill>
+                </a:ln>
+              </c:spPr>
+            </c:marker>
+            <c:bubble3D val="0"/>
+          </c:dPt>
+          <c:xVal>
+            <c:numRef>
+              <c:f>Sheet1!$B$4:$C$4</c:f>
+              <c:numCache>
+                <c:formatCode>General</c:formatCode>
+                <c:ptCount val="2"/>
+                <c:pt idx="0">
+                  <c:v>16</c:v>
+                </c:pt>
+                <c:pt idx="1">
+                  <c:v>2</c:v>
+                </c:pt>
+              </c:numCache>
+            </c:numRef>
+          </c:xVal>
+          <c:yVal>
+            <c:numRef>
+              <c:f>Sheet1!$D$4:$E$4</c:f>
+              <c:numCache>
+                <c:formatCode>General</c:formatCode>
+                <c:ptCount val="2"/>
+                <c:pt idx="0">
+                  <c:v>3</c:v>
+                </c:pt>
+                <c:pt idx="1">
+                  <c:v>3</c:v>
+                </c:pt>
+              </c:numCache>
+            </c:numRef>
+          </c:yVal>
+          <c:smooth val="0"/>
+        </c:ser>
+        <c:ser>
+          <c:idx val="3"/>
+          <c:order val="3"/>
+          <c:tx>
+            <c:strRef>
+              <c:f>Sheet1!$A$5</c:f>
+              <c:strCache>
+                <c:ptCount val="1"/>
+                <c:pt idx="0">
+                  <c:v>ออกใบแจ้งหนี้ขาย</c:v>
+                </c:pt>
+              </c:strCache>
+            </c:strRef>
+          </c:tx>
+          <c:spPr>
+            <a:ln w="19050" cap="rnd">
+              <a:solidFill>
+                <a:srgbClr val="90B4E4"/>
+              </a:solidFill>
+              <a:round/>
+            </a:ln>
+          </c:spPr>
+          <c:marker>
+            <c:symbol val="circle"/>
+            <c:size val="8"/>
+            <c:spPr>
+              <a:solidFill>
+                <a:srgbClr val="90B4E4"/>
+              </a:solidFill>
+              <a:ln w="19050">
+                <a:solidFill>
+                  <a:srgbClr val="FFFFFF"/>
+                </a:solidFill>
+              </a:ln>
+            </c:spPr>
+          </c:marker>
+          <c:dPt>
+            <c:idx val="1"/>
+            <c:marker>
+              <c:symbol val="circle"/>
+              <c:size val="8"/>
+              <c:spPr>
+                <a:solidFill>
+                  <a:srgbClr val="2A5EA0"/>
+                </a:solidFill>
+                <a:ln w="19050">
+                  <a:solidFill>
+                    <a:srgbClr val="FFFFFF"/>
+                  </a:solidFill>
+                </a:ln>
+              </c:spPr>
+            </c:marker>
+            <c:bubble3D val="0"/>
+          </c:dPt>
+          <c:xVal>
+            <c:numRef>
+              <c:f>Sheet1!$B$5:$C$5</c:f>
+              <c:numCache>
+                <c:formatCode>General</c:formatCode>
+                <c:ptCount val="2"/>
+                <c:pt idx="0">
+                  <c:v>12</c:v>
+                </c:pt>
+                <c:pt idx="1">
+                  <c:v>4</c:v>
+                </c:pt>
+              </c:numCache>
+            </c:numRef>
+          </c:xVal>
+          <c:yVal>
+            <c:numRef>
+              <c:f>Sheet1!$D$5:$E$5</c:f>
+              <c:numCache>
+                <c:formatCode>General</c:formatCode>
+                <c:ptCount val="2"/>
+                <c:pt idx="0">
+                  <c:v>4</c:v>
+                </c:pt>
+                <c:pt idx="1">
+                  <c:v>4</c:v>
+                </c:pt>
+              </c:numCache>
+            </c:numRef>
+          </c:yVal>
+          <c:smooth val="0"/>
+        </c:ser>
+        <c:ser>
+          <c:idx val="4"/>
+          <c:order val="4"/>
+          <c:tx>
+            <c:strRef>
+              <c:f>Sheet1!$A$6</c:f>
+              <c:strCache>
+                <c:ptCount val="1"/>
+                <c:pt idx="0">
+                  <c:v>ติดตามลูกหนี้</c:v>
+                </c:pt>
+              </c:strCache>
+            </c:strRef>
+          </c:tx>
+          <c:spPr>
+            <a:ln w="19050" cap="rnd">
+              <a:solidFill>
+                <a:srgbClr val="90B4E4"/>
+              </a:solidFill>
+              <a:round/>
+            </a:ln>
+          </c:spPr>
+          <c:marker>
+            <c:symbol val="circle"/>
+            <c:size val="8"/>
+            <c:spPr>
+              <a:solidFill>
+                <a:srgbClr val="90B4E4"/>
+              </a:solidFill>
+              <a:ln w="19050">
+                <a:solidFill>
+                  <a:srgbClr val="FFFFFF"/>
+                </a:solidFill>
+              </a:ln>
+            </c:spPr>
+          </c:marker>
+          <c:dPt>
+            <c:idx val="1"/>
+            <c:marker>
+              <c:symbol val="circle"/>
+              <c:size val="8"/>
+              <c:spPr>
+                <a:solidFill>
+                  <a:srgbClr val="2A5EA0"/>
+                </a:solidFill>
+                <a:ln w="19050">
+                  <a:solidFill>
+                    <a:srgbClr val="FFFFFF"/>
+                  </a:solidFill>
+                </a:ln>
+              </c:spPr>
+            </c:marker>
+            <c:bubble3D val="0"/>
+          </c:dPt>
+          <c:xVal>
+            <c:numRef>
+              <c:f>Sheet1!$B$6:$C$6</c:f>
+              <c:numCache>
+                <c:formatCode>General</c:formatCode>
+                <c:ptCount val="2"/>
+                <c:pt idx="0">
+                  <c:v>10</c:v>
+                </c:pt>
+                <c:pt idx="1">
+                  <c:v>6</c:v>
+                </c:pt>
+              </c:numCache>
+            </c:numRef>
+          </c:xVal>
+          <c:yVal>
+            <c:numRef>
+              <c:f>Sheet1!$D$6:$E$6</c:f>
+              <c:numCache>
+                <c:formatCode>General</c:formatCode>
+                <c:ptCount val="2"/>
+                <c:pt idx="0">
+                  <c:v>5</c:v>
+                </c:pt>
+                <c:pt idx="1">
+                  <c:v>5</c:v>
+                </c:pt>
+              </c:numCache>
+            </c:numRef>
+          </c:yVal>
+          <c:smooth val="0"/>
+        </c:ser>
+        <c:axId val="24001"/>
+        <c:axId val="24002"/>
+      </c:scatterChart>
+      <c:valAx>
+        <c:axId val="24001"/>
+        <c:scaling>
+          <c:orientation val="minMax"/>
+          <c:max val="50"/>
+          <c:min val="0"/>
+        </c:scaling>
+        <c:delete val="0"/>
+        <c:axPos val="t"/>
+        <c:majorGridlines>
+          <c:spPr>
+            <a:ln w="9525">
+              <a:solidFill>
+                <a:srgbClr val="E5E5E5"/>
+              </a:solidFill>
+            </a:ln>
+          </c:spPr>
+        </c:majorGridlines>
+        <c:numFmt formatCode="#,##0" sourceLinked="0"/>
+        <c:majorTickMark val="none"/>
+        <c:minorTickMark val="none"/>
+        <c:tickLblPos val="low"/>
+        <c:spPr>
+          <a:ln>
+            <a:noFill/>
+          </a:ln>
+        </c:spPr>
+        <c:txPr>
+          <a:bodyPr/>
+          <a:lstStyle/>
+          <a:p>
+            <a:pPr>
+              <a:defRPr sz="1200">
+                <a:solidFill>
+                  <a:srgbClr val="5F5F5F"/>
+                </a:solidFill>
+                <a:latin typeface="+mn-lt"/>
+                <a:ea typeface="+mn-ea"/>
+                <a:cs typeface="+mn-cs"/>
+              </a:defRPr>
+            </a:pPr>
+            <a:endParaRPr lang="th-TH"/>
+          </a:p>
+        </c:txPr>
+        <c:crossAx val="24002"/>
+        <c:crosses val="min"/>
+        <c:crossBetween val="midCat"/>
+        <c:majorUnit val="10"/>
+      </c:valAx>
+      <c:valAx>
+        <c:axId val="24002"/>
+        <c:scaling>
+          <c:orientation val="maxMin"/>
+          <c:max val="7.5"/>
+          <c:min val="0.5"/>
+        </c:scaling>
+        <c:delete val="1"/>
+        <c:axPos val="l"/>
+        <c:numFmt formatCode="General" sourceLinked="0"/>
+        <c:majorTickMark val="none"/>
+        <c:minorTickMark val="none"/>
+        <c:tickLblPos val="none"/>
+        <c:crossAx val="24001"/>
+        <c:crosses val="autoZero"/>
+        <c:crossBetween val="midCat"/>
+        <c:majorUnit val="1"/>
+      </c:valAx>
+      <c:spPr>
+        <a:noFill/>
+        <a:ln>
+          <a:noFill/>
+        </a:ln>
+      </c:spPr>
+    </c:plotArea>
+    <c:plotVisOnly val="1"/>
+    <c:dispBlanksAs val="gap"/>
+  </c:chart>
+  <c:spPr>
+    <a:noFill/>
+    <a:ln>
+      <a:noFill/>
+    </a:ln>
+  </c:spPr>
+  <c:externalData r:id="rId1">
+    <c:autoUpdate val="0"/>
+  </c:externalData>
+</c:chartSpace>
+</file>
+
+<file path=ppt/charts/chart4.xml><?xml version="1.0" encoding="utf-8"?>
 <c:chartSpace xmlns:c="http://schemas.openxmlformats.org/drawingml/2006/chart" xmlns:a="http://schemas.openxmlformats.org/drawingml/2006/main" xmlns:r="http://schemas.openxmlformats.org/officeDocument/2006/relationships">
   <c:roundedCorners val="0"/>
   <c:chart>
@@ -1071,7 +1614,7 @@
 </c:chartSpace>
 </file>
 
-<file path=ppt/charts/chart4.xml><?xml version="1.0" encoding="utf-8"?>
+<file path=ppt/charts/chart5.xml><?xml version="1.0" encoding="utf-8"?>
 <c:chartSpace xmlns:c="http://schemas.openxmlformats.org/drawingml/2006/chart" xmlns:a="http://schemas.openxmlformats.org/drawingml/2006/main" xmlns:r="http://schemas.openxmlformats.org/officeDocument/2006/relationships">
   <c:roundedCorners val="0"/>
   <c:chart>
@@ -19163,6 +19706,1553 @@
 </p:sldLayout>
 </file>
 
+<file path=ppt/slideLayouts/slideLayout24.xml><?xml version="1.0" encoding="utf-8"?>
+<p:sldLayout xmlns:a="http://schemas.openxmlformats.org/drawingml/2006/main" xmlns:r="http://schemas.openxmlformats.org/officeDocument/2006/relationships" xmlns:p="http://schemas.openxmlformats.org/presentationml/2006/main" type="chart" showMasterSp="0" preserve="1">
+  <p:cSld name="24 Before After">
+    <p:bg>
+      <p:bgPr>
+        <a:solidFill>
+          <a:srgbClr val="FFFFFF"/>
+        </a:solidFill>
+        <a:effectLst/>
+      </p:bgPr>
+    </p:bg>
+    <p:spTree>
+      <p:nvGrpSpPr>
+        <p:cNvPr id="1" name=""/>
+        <p:cNvGrpSpPr/>
+        <p:nvPr/>
+      </p:nvGrpSpPr>
+      <p:grpSpPr>
+        <a:xfrm>
+          <a:off x="0" y="0"/>
+          <a:ext cx="0" cy="0"/>
+          <a:chOff x="0" y="0"/>
+          <a:chExt cx="0" cy="0"/>
+        </a:xfrm>
+      </p:grpSpPr>
+      <p:sp>
+        <p:nvSpPr>
+          <p:cNvPr id="10" name="Title Placeholder"/>
+          <p:cNvSpPr>
+            <a:spLocks noGrp="1"/>
+          </p:cNvSpPr>
+          <p:nvPr>
+            <p:ph type="title"/>
+          </p:nvPr>
+        </p:nvSpPr>
+        <p:spPr>
+          <a:xfrm>
+            <a:off x="914400" y="548640"/>
+            <a:ext cx="10363200" cy="731520"/>
+          </a:xfrm>
+          <a:prstGeom prst="rect">
+            <a:avLst/>
+          </a:prstGeom>
+        </p:spPr>
+        <p:txBody>
+          <a:bodyPr wrap="square" anchor="b" lIns="0" tIns="0" rIns="0" bIns="0" rtlCol="0"/>
+          <a:lstStyle>
+            <a:lvl1pPr algn="l" marL="0" indent="0">
+              <a:lnSpc>
+                <a:spcPct val="108000"/>
+              </a:lnSpc>
+              <a:buNone/>
+              <a:defRPr lang="th-TH" sz="3200" b="1" dirty="0">
+                <a:solidFill>
+                  <a:srgbClr val="23436D"/>
+                </a:solidFill>
+                <a:latin typeface="+mj-lt"/>
+                <a:ea typeface="+mj-ea"/>
+                <a:cs typeface="+mj-cs"/>
+              </a:defRPr>
+            </a:lvl1pPr>
+          </a:lstStyle>
+          <a:p>
+            <a:pPr algn="l" marL="0" indent="0">
+              <a:lnSpc>
+                <a:spcPct val="108000"/>
+              </a:lnSpc>
+              <a:buNone/>
+            </a:pPr>
+            <a:r>
+              <a:rPr lang="th-TH" sz="3200" b="1" dirty="0">
+                <a:solidFill>
+                  <a:srgbClr val="23436D"/>
+                </a:solidFill>
+                <a:latin typeface="+mj-lt"/>
+                <a:ea typeface="+mj-ea"/>
+                <a:cs typeface="+mj-cs"/>
+              </a:rPr>
+              <a:t>ชื่อสไลด์</a:t>
+            </a:r>
+          </a:p>
+        </p:txBody>
+      </p:sp>
+      <p:sp>
+        <p:nvSpPr>
+          <p:cNvPr id="11" name="Accent Rule"/>
+          <p:cNvSpPr/>
+          <p:nvPr/>
+        </p:nvSpPr>
+        <p:spPr>
+          <a:xfrm>
+            <a:off x="0" y="1371600"/>
+            <a:ext cx="12192000" cy="68580"/>
+          </a:xfrm>
+          <a:prstGeom prst="rect">
+            <a:avLst/>
+          </a:prstGeom>
+          <a:solidFill>
+            <a:srgbClr val="216B7F"/>
+          </a:solidFill>
+          <a:ln>
+            <a:noFill/>
+          </a:ln>
+        </p:spPr>
+        <p:txBody>
+          <a:bodyPr/>
+          <a:lstStyle/>
+          <a:p>
+            <a:endParaRPr lang="th-TH"/>
+          </a:p>
+        </p:txBody>
+      </p:sp>
+      <p:sp>
+        <p:nvSpPr>
+          <p:cNvPr id="12" name="Intro"/>
+          <p:cNvSpPr>
+            <a:spLocks noGrp="1"/>
+          </p:cNvSpPr>
+          <p:nvPr>
+            <p:ph type="body" idx="2"/>
+          </p:nvPr>
+        </p:nvSpPr>
+        <p:spPr>
+          <a:xfrm>
+            <a:off x="914400" y="1691640"/>
+            <a:ext cx="6400800" cy="274320"/>
+          </a:xfrm>
+          <a:prstGeom prst="rect">
+            <a:avLst/>
+          </a:prstGeom>
+        </p:spPr>
+        <p:txBody>
+          <a:bodyPr wrap="square" anchor="ctr" lIns="0" tIns="0" rIns="0" bIns="0" rtlCol="0"/>
+          <a:lstStyle>
+            <a:lvl1pPr algn="l" marL="0" indent="0">
+              <a:lnSpc>
+                <a:spcPct val="100000"/>
+              </a:lnSpc>
+              <a:buNone/>
+              <a:defRPr lang="th-TH" sz="1400" dirty="0">
+                <a:solidFill>
+                  <a:srgbClr val="5F5F5F"/>
+                </a:solidFill>
+                <a:latin typeface="+mn-lt"/>
+                <a:ea typeface="+mn-ea"/>
+                <a:cs typeface="+mn-cs"/>
+              </a:defRPr>
+            </a:lvl1pPr>
+          </a:lstStyle>
+          <a:p>
+            <a:pPr algn="l" marL="0" indent="0">
+              <a:lnSpc>
+                <a:spcPct val="100000"/>
+              </a:lnSpc>
+              <a:buNone/>
+            </a:pPr>
+            <a:r>
+              <a:rPr lang="th-TH" sz="1400" dirty="0">
+                <a:solidFill>
+                  <a:srgbClr val="5F5F5F"/>
+                </a:solidFill>
+                <a:latin typeface="+mn-lt"/>
+                <a:ea typeface="+mn-ea"/>
+                <a:cs typeface="+mn-cs"/>
+              </a:rPr>
+              <a:t>หน่วย · ทิศที่ดี (น้อยกว่าดีกว่า)</a:t>
+            </a:r>
+          </a:p>
+        </p:txBody>
+      </p:sp>
+      <p:sp>
+        <p:nvSpPr>
+          <p:cNvPr id="13" name="Legend"/>
+          <p:cNvSpPr>
+            <a:spLocks noGrp="1"/>
+          </p:cNvSpPr>
+          <p:nvPr>
+            <p:ph type="body" idx="3"/>
+          </p:nvPr>
+        </p:nvSpPr>
+        <p:spPr>
+          <a:xfrm>
+            <a:off x="7620000" y="1691640"/>
+            <a:ext cx="3657600" cy="274320"/>
+          </a:xfrm>
+          <a:prstGeom prst="rect">
+            <a:avLst/>
+          </a:prstGeom>
+        </p:spPr>
+        <p:txBody>
+          <a:bodyPr wrap="square" anchor="ctr" lIns="0" tIns="0" rIns="0" bIns="0" rtlCol="0"/>
+          <a:lstStyle>
+            <a:lvl1pPr algn="r" marL="0" indent="0">
+              <a:lnSpc>
+                <a:spcPct val="100000"/>
+              </a:lnSpc>
+              <a:buNone/>
+              <a:defRPr lang="th-TH" sz="1200" dirty="0">
+                <a:solidFill>
+                  <a:srgbClr val="333333"/>
+                </a:solidFill>
+                <a:latin typeface="+mn-lt"/>
+                <a:ea typeface="+mn-ea"/>
+                <a:cs typeface="+mn-cs"/>
+              </a:defRPr>
+            </a:lvl1pPr>
+          </a:lstStyle>
+          <a:p>
+            <a:pPr algn="r" marL="0" indent="0">
+              <a:lnSpc>
+                <a:spcPct val="100000"/>
+              </a:lnSpc>
+              <a:buNone/>
+            </a:pPr>
+            <a:r>
+              <a:rPr lang="th-TH" sz="1200" dirty="0">
+                <a:solidFill>
+                  <a:srgbClr val="333333"/>
+                </a:solidFill>
+                <a:latin typeface="+mn-lt"/>
+                <a:ea typeface="+mn-ea"/>
+                <a:cs typeface="+mn-cs"/>
+              </a:rPr>
+              <a:t>● ก่อน   ● หลัง</a:t>
+            </a:r>
+          </a:p>
+        </p:txBody>
+      </p:sp>
+      <p:sp>
+        <p:nvSpPr>
+          <p:cNvPr id="14" name="Chart Placeholder"/>
+          <p:cNvSpPr>
+            <a:spLocks noGrp="1"/>
+          </p:cNvSpPr>
+          <p:nvPr>
+            <p:ph type="chart" idx="1"/>
+          </p:nvPr>
+        </p:nvSpPr>
+        <p:spPr>
+          <a:xfrm>
+            <a:off x="3840480" y="2057400"/>
+            <a:ext cx="5791200" cy="3072384"/>
+          </a:xfrm>
+          <a:prstGeom prst="rect">
+            <a:avLst/>
+          </a:prstGeom>
+        </p:spPr>
+        <p:txBody>
+          <a:bodyPr wrap="square" anchor="ctr" lIns="0" tIns="0" rIns="0" bIns="0" rtlCol="0"/>
+          <a:lstStyle>
+            <a:lvl1pPr algn="l" marL="0" indent="0">
+              <a:lnSpc>
+                <a:spcPct val="100000"/>
+              </a:lnSpc>
+              <a:buNone/>
+              <a:defRPr lang="th-TH" sz="1200" dirty="0">
+                <a:solidFill>
+                  <a:srgbClr val="5F5F5F"/>
+                </a:solidFill>
+                <a:latin typeface="+mn-lt"/>
+                <a:ea typeface="+mn-ea"/>
+                <a:cs typeface="+mn-cs"/>
+              </a:defRPr>
+            </a:lvl1pPr>
+          </a:lstStyle>
+          <a:p>
+            <a:pPr algn="l" marL="0" indent="0">
+              <a:lnSpc>
+                <a:spcPct val="100000"/>
+              </a:lnSpc>
+              <a:buNone/>
+            </a:pPr>
+            <a:endParaRPr lang="th-TH" sz="1200"/>
+          </a:p>
+        </p:txBody>
+      </p:sp>
+      <p:sp>
+        <p:nvSpPr>
+          <p:cNvPr id="15" name="Row 1 Label"/>
+          <p:cNvSpPr>
+            <a:spLocks noGrp="1"/>
+          </p:cNvSpPr>
+          <p:nvPr>
+            <p:ph type="body" idx="20"/>
+          </p:nvPr>
+        </p:nvSpPr>
+        <p:spPr>
+          <a:xfrm>
+            <a:off x="914400" y="2377440"/>
+            <a:ext cx="2743200" cy="393192"/>
+          </a:xfrm>
+          <a:prstGeom prst="rect">
+            <a:avLst/>
+          </a:prstGeom>
+        </p:spPr>
+        <p:txBody>
+          <a:bodyPr wrap="square" anchor="ctr" lIns="0" tIns="0" rIns="0" bIns="0" rtlCol="0"/>
+          <a:lstStyle>
+            <a:lvl1pPr algn="l" marL="0" indent="0">
+              <a:lnSpc>
+                <a:spcPct val="100000"/>
+              </a:lnSpc>
+              <a:buNone/>
+              <a:defRPr lang="th-TH" sz="1400" dirty="0">
+                <a:solidFill>
+                  <a:srgbClr val="333333"/>
+                </a:solidFill>
+                <a:latin typeface="+mn-lt"/>
+                <a:ea typeface="+mn-ea"/>
+                <a:cs typeface="+mn-cs"/>
+              </a:defRPr>
+            </a:lvl1pPr>
+          </a:lstStyle>
+          <a:p>
+            <a:pPr algn="l" marL="0" indent="0">
+              <a:lnSpc>
+                <a:spcPct val="100000"/>
+              </a:lnSpc>
+              <a:buNone/>
+            </a:pPr>
+            <a:r>
+              <a:rPr lang="th-TH" sz="1400" dirty="0">
+                <a:solidFill>
+                  <a:srgbClr val="333333"/>
+                </a:solidFill>
+                <a:latin typeface="+mn-lt"/>
+                <a:ea typeface="+mn-ea"/>
+                <a:cs typeface="+mn-cs"/>
+              </a:rPr>
+              <a:t>รายการ</a:t>
+            </a:r>
+          </a:p>
+        </p:txBody>
+      </p:sp>
+      <p:sp>
+        <p:nvSpPr>
+          <p:cNvPr id="16" name="Row 1 Change"/>
+          <p:cNvSpPr>
+            <a:spLocks noGrp="1"/>
+          </p:cNvSpPr>
+          <p:nvPr>
+            <p:ph type="body" idx="21"/>
+          </p:nvPr>
+        </p:nvSpPr>
+        <p:spPr>
+          <a:xfrm>
+            <a:off x="9814560" y="2377440"/>
+            <a:ext cx="1463040" cy="393192"/>
+          </a:xfrm>
+          <a:prstGeom prst="rect">
+            <a:avLst/>
+          </a:prstGeom>
+        </p:spPr>
+        <p:txBody>
+          <a:bodyPr wrap="square" anchor="ctr" lIns="0" tIns="0" rIns="0" bIns="0" rtlCol="0"/>
+          <a:lstStyle>
+            <a:lvl1pPr algn="r" marL="0" indent="0">
+              <a:lnSpc>
+                <a:spcPct val="100000"/>
+              </a:lnSpc>
+              <a:buNone/>
+              <a:defRPr lang="th-TH" sz="1400" b="1" dirty="0">
+                <a:solidFill>
+                  <a:srgbClr val="333333"/>
+                </a:solidFill>
+                <a:latin typeface="+mn-lt"/>
+                <a:ea typeface="+mn-ea"/>
+                <a:cs typeface="+mn-cs"/>
+              </a:defRPr>
+            </a:lvl1pPr>
+          </a:lstStyle>
+          <a:p>
+            <a:pPr algn="r" marL="0" indent="0">
+              <a:lnSpc>
+                <a:spcPct val="100000"/>
+              </a:lnSpc>
+              <a:buNone/>
+            </a:pPr>
+            <a:r>
+              <a:rPr lang="th-TH" sz="1400" b="1" dirty="0">
+                <a:solidFill>
+                  <a:srgbClr val="333333"/>
+                </a:solidFill>
+                <a:latin typeface="+mn-lt"/>
+                <a:ea typeface="+mn-ea"/>
+                <a:cs typeface="+mn-cs"/>
+              </a:rPr>
+              <a:t>−0</a:t>
+            </a:r>
+          </a:p>
+        </p:txBody>
+      </p:sp>
+      <p:sp>
+        <p:nvSpPr>
+          <p:cNvPr id="17" name="Row 2 Label"/>
+          <p:cNvSpPr>
+            <a:spLocks noGrp="1"/>
+          </p:cNvSpPr>
+          <p:nvPr>
+            <p:ph type="body" idx="22"/>
+          </p:nvPr>
+        </p:nvSpPr>
+        <p:spPr>
+          <a:xfrm>
+            <a:off x="914400" y="2770632"/>
+            <a:ext cx="2743200" cy="393192"/>
+          </a:xfrm>
+          <a:prstGeom prst="rect">
+            <a:avLst/>
+          </a:prstGeom>
+        </p:spPr>
+        <p:txBody>
+          <a:bodyPr wrap="square" anchor="ctr" lIns="0" tIns="0" rIns="0" bIns="0" rtlCol="0"/>
+          <a:lstStyle>
+            <a:lvl1pPr algn="l" marL="0" indent="0">
+              <a:lnSpc>
+                <a:spcPct val="100000"/>
+              </a:lnSpc>
+              <a:buNone/>
+              <a:defRPr lang="th-TH" sz="1400" dirty="0">
+                <a:solidFill>
+                  <a:srgbClr val="333333"/>
+                </a:solidFill>
+                <a:latin typeface="+mn-lt"/>
+                <a:ea typeface="+mn-ea"/>
+                <a:cs typeface="+mn-cs"/>
+              </a:defRPr>
+            </a:lvl1pPr>
+          </a:lstStyle>
+          <a:p>
+            <a:pPr algn="l" marL="0" indent="0">
+              <a:lnSpc>
+                <a:spcPct val="100000"/>
+              </a:lnSpc>
+              <a:buNone/>
+            </a:pPr>
+            <a:r>
+              <a:rPr lang="th-TH" sz="1400" dirty="0">
+                <a:solidFill>
+                  <a:srgbClr val="333333"/>
+                </a:solidFill>
+                <a:latin typeface="+mn-lt"/>
+                <a:ea typeface="+mn-ea"/>
+                <a:cs typeface="+mn-cs"/>
+              </a:rPr>
+              <a:t>รายการ</a:t>
+            </a:r>
+          </a:p>
+        </p:txBody>
+      </p:sp>
+      <p:sp>
+        <p:nvSpPr>
+          <p:cNvPr id="18" name="Row 2 Change"/>
+          <p:cNvSpPr>
+            <a:spLocks noGrp="1"/>
+          </p:cNvSpPr>
+          <p:nvPr>
+            <p:ph type="body" idx="23"/>
+          </p:nvPr>
+        </p:nvSpPr>
+        <p:spPr>
+          <a:xfrm>
+            <a:off x="9814560" y="2770632"/>
+            <a:ext cx="1463040" cy="393192"/>
+          </a:xfrm>
+          <a:prstGeom prst="rect">
+            <a:avLst/>
+          </a:prstGeom>
+        </p:spPr>
+        <p:txBody>
+          <a:bodyPr wrap="square" anchor="ctr" lIns="0" tIns="0" rIns="0" bIns="0" rtlCol="0"/>
+          <a:lstStyle>
+            <a:lvl1pPr algn="r" marL="0" indent="0">
+              <a:lnSpc>
+                <a:spcPct val="100000"/>
+              </a:lnSpc>
+              <a:buNone/>
+              <a:defRPr lang="th-TH" sz="1400" b="1" dirty="0">
+                <a:solidFill>
+                  <a:srgbClr val="333333"/>
+                </a:solidFill>
+                <a:latin typeface="+mn-lt"/>
+                <a:ea typeface="+mn-ea"/>
+                <a:cs typeface="+mn-cs"/>
+              </a:defRPr>
+            </a:lvl1pPr>
+          </a:lstStyle>
+          <a:p>
+            <a:pPr algn="r" marL="0" indent="0">
+              <a:lnSpc>
+                <a:spcPct val="100000"/>
+              </a:lnSpc>
+              <a:buNone/>
+            </a:pPr>
+            <a:r>
+              <a:rPr lang="th-TH" sz="1400" b="1" dirty="0">
+                <a:solidFill>
+                  <a:srgbClr val="333333"/>
+                </a:solidFill>
+                <a:latin typeface="+mn-lt"/>
+                <a:ea typeface="+mn-ea"/>
+                <a:cs typeface="+mn-cs"/>
+              </a:rPr>
+              <a:t>−0</a:t>
+            </a:r>
+          </a:p>
+        </p:txBody>
+      </p:sp>
+      <p:sp>
+        <p:nvSpPr>
+          <p:cNvPr id="19" name="Row 3 Label"/>
+          <p:cNvSpPr>
+            <a:spLocks noGrp="1"/>
+          </p:cNvSpPr>
+          <p:nvPr>
+            <p:ph type="body" idx="24"/>
+          </p:nvPr>
+        </p:nvSpPr>
+        <p:spPr>
+          <a:xfrm>
+            <a:off x="914400" y="3163824"/>
+            <a:ext cx="2743200" cy="393192"/>
+          </a:xfrm>
+          <a:prstGeom prst="rect">
+            <a:avLst/>
+          </a:prstGeom>
+        </p:spPr>
+        <p:txBody>
+          <a:bodyPr wrap="square" anchor="ctr" lIns="0" tIns="0" rIns="0" bIns="0" rtlCol="0"/>
+          <a:lstStyle>
+            <a:lvl1pPr algn="l" marL="0" indent="0">
+              <a:lnSpc>
+                <a:spcPct val="100000"/>
+              </a:lnSpc>
+              <a:buNone/>
+              <a:defRPr lang="th-TH" sz="1400" dirty="0">
+                <a:solidFill>
+                  <a:srgbClr val="333333"/>
+                </a:solidFill>
+                <a:latin typeface="+mn-lt"/>
+                <a:ea typeface="+mn-ea"/>
+                <a:cs typeface="+mn-cs"/>
+              </a:defRPr>
+            </a:lvl1pPr>
+          </a:lstStyle>
+          <a:p>
+            <a:pPr algn="l" marL="0" indent="0">
+              <a:lnSpc>
+                <a:spcPct val="100000"/>
+              </a:lnSpc>
+              <a:buNone/>
+            </a:pPr>
+            <a:r>
+              <a:rPr lang="th-TH" sz="1400" dirty="0">
+                <a:solidFill>
+                  <a:srgbClr val="333333"/>
+                </a:solidFill>
+                <a:latin typeface="+mn-lt"/>
+                <a:ea typeface="+mn-ea"/>
+                <a:cs typeface="+mn-cs"/>
+              </a:rPr>
+              <a:t>รายการ</a:t>
+            </a:r>
+          </a:p>
+        </p:txBody>
+      </p:sp>
+      <p:sp>
+        <p:nvSpPr>
+          <p:cNvPr id="20" name="Row 3 Change"/>
+          <p:cNvSpPr>
+            <a:spLocks noGrp="1"/>
+          </p:cNvSpPr>
+          <p:nvPr>
+            <p:ph type="body" idx="25"/>
+          </p:nvPr>
+        </p:nvSpPr>
+        <p:spPr>
+          <a:xfrm>
+            <a:off x="9814560" y="3163824"/>
+            <a:ext cx="1463040" cy="393192"/>
+          </a:xfrm>
+          <a:prstGeom prst="rect">
+            <a:avLst/>
+          </a:prstGeom>
+        </p:spPr>
+        <p:txBody>
+          <a:bodyPr wrap="square" anchor="ctr" lIns="0" tIns="0" rIns="0" bIns="0" rtlCol="0"/>
+          <a:lstStyle>
+            <a:lvl1pPr algn="r" marL="0" indent="0">
+              <a:lnSpc>
+                <a:spcPct val="100000"/>
+              </a:lnSpc>
+              <a:buNone/>
+              <a:defRPr lang="th-TH" sz="1400" b="1" dirty="0">
+                <a:solidFill>
+                  <a:srgbClr val="333333"/>
+                </a:solidFill>
+                <a:latin typeface="+mn-lt"/>
+                <a:ea typeface="+mn-ea"/>
+                <a:cs typeface="+mn-cs"/>
+              </a:defRPr>
+            </a:lvl1pPr>
+          </a:lstStyle>
+          <a:p>
+            <a:pPr algn="r" marL="0" indent="0">
+              <a:lnSpc>
+                <a:spcPct val="100000"/>
+              </a:lnSpc>
+              <a:buNone/>
+            </a:pPr>
+            <a:r>
+              <a:rPr lang="th-TH" sz="1400" b="1" dirty="0">
+                <a:solidFill>
+                  <a:srgbClr val="333333"/>
+                </a:solidFill>
+                <a:latin typeface="+mn-lt"/>
+                <a:ea typeface="+mn-ea"/>
+                <a:cs typeface="+mn-cs"/>
+              </a:rPr>
+              <a:t>−0</a:t>
+            </a:r>
+          </a:p>
+        </p:txBody>
+      </p:sp>
+      <p:sp>
+        <p:nvSpPr>
+          <p:cNvPr id="21" name="Row 4 Label"/>
+          <p:cNvSpPr>
+            <a:spLocks noGrp="1"/>
+          </p:cNvSpPr>
+          <p:nvPr>
+            <p:ph type="body" idx="26"/>
+          </p:nvPr>
+        </p:nvSpPr>
+        <p:spPr>
+          <a:xfrm>
+            <a:off x="914400" y="3557016"/>
+            <a:ext cx="2743200" cy="393192"/>
+          </a:xfrm>
+          <a:prstGeom prst="rect">
+            <a:avLst/>
+          </a:prstGeom>
+        </p:spPr>
+        <p:txBody>
+          <a:bodyPr wrap="square" anchor="ctr" lIns="0" tIns="0" rIns="0" bIns="0" rtlCol="0"/>
+          <a:lstStyle>
+            <a:lvl1pPr algn="l" marL="0" indent="0">
+              <a:lnSpc>
+                <a:spcPct val="100000"/>
+              </a:lnSpc>
+              <a:buNone/>
+              <a:defRPr lang="th-TH" sz="1400" dirty="0">
+                <a:solidFill>
+                  <a:srgbClr val="333333"/>
+                </a:solidFill>
+                <a:latin typeface="+mn-lt"/>
+                <a:ea typeface="+mn-ea"/>
+                <a:cs typeface="+mn-cs"/>
+              </a:defRPr>
+            </a:lvl1pPr>
+          </a:lstStyle>
+          <a:p>
+            <a:pPr algn="l" marL="0" indent="0">
+              <a:lnSpc>
+                <a:spcPct val="100000"/>
+              </a:lnSpc>
+              <a:buNone/>
+            </a:pPr>
+            <a:r>
+              <a:rPr lang="th-TH" sz="1400" dirty="0">
+                <a:solidFill>
+                  <a:srgbClr val="333333"/>
+                </a:solidFill>
+                <a:latin typeface="+mn-lt"/>
+                <a:ea typeface="+mn-ea"/>
+                <a:cs typeface="+mn-cs"/>
+              </a:rPr>
+              <a:t>รายการ</a:t>
+            </a:r>
+          </a:p>
+        </p:txBody>
+      </p:sp>
+      <p:sp>
+        <p:nvSpPr>
+          <p:cNvPr id="22" name="Row 4 Change"/>
+          <p:cNvSpPr>
+            <a:spLocks noGrp="1"/>
+          </p:cNvSpPr>
+          <p:nvPr>
+            <p:ph type="body" idx="27"/>
+          </p:nvPr>
+        </p:nvSpPr>
+        <p:spPr>
+          <a:xfrm>
+            <a:off x="9814560" y="3557016"/>
+            <a:ext cx="1463040" cy="393192"/>
+          </a:xfrm>
+          <a:prstGeom prst="rect">
+            <a:avLst/>
+          </a:prstGeom>
+        </p:spPr>
+        <p:txBody>
+          <a:bodyPr wrap="square" anchor="ctr" lIns="0" tIns="0" rIns="0" bIns="0" rtlCol="0"/>
+          <a:lstStyle>
+            <a:lvl1pPr algn="r" marL="0" indent="0">
+              <a:lnSpc>
+                <a:spcPct val="100000"/>
+              </a:lnSpc>
+              <a:buNone/>
+              <a:defRPr lang="th-TH" sz="1400" b="1" dirty="0">
+                <a:solidFill>
+                  <a:srgbClr val="333333"/>
+                </a:solidFill>
+                <a:latin typeface="+mn-lt"/>
+                <a:ea typeface="+mn-ea"/>
+                <a:cs typeface="+mn-cs"/>
+              </a:defRPr>
+            </a:lvl1pPr>
+          </a:lstStyle>
+          <a:p>
+            <a:pPr algn="r" marL="0" indent="0">
+              <a:lnSpc>
+                <a:spcPct val="100000"/>
+              </a:lnSpc>
+              <a:buNone/>
+            </a:pPr>
+            <a:r>
+              <a:rPr lang="th-TH" sz="1400" b="1" dirty="0">
+                <a:solidFill>
+                  <a:srgbClr val="333333"/>
+                </a:solidFill>
+                <a:latin typeface="+mn-lt"/>
+                <a:ea typeface="+mn-ea"/>
+                <a:cs typeface="+mn-cs"/>
+              </a:rPr>
+              <a:t>−0</a:t>
+            </a:r>
+          </a:p>
+        </p:txBody>
+      </p:sp>
+      <p:sp>
+        <p:nvSpPr>
+          <p:cNvPr id="23" name="Row 5 Label"/>
+          <p:cNvSpPr>
+            <a:spLocks noGrp="1"/>
+          </p:cNvSpPr>
+          <p:nvPr>
+            <p:ph type="body" idx="28"/>
+          </p:nvPr>
+        </p:nvSpPr>
+        <p:spPr>
+          <a:xfrm>
+            <a:off x="914400" y="3950208"/>
+            <a:ext cx="2743200" cy="393192"/>
+          </a:xfrm>
+          <a:prstGeom prst="rect">
+            <a:avLst/>
+          </a:prstGeom>
+        </p:spPr>
+        <p:txBody>
+          <a:bodyPr wrap="square" anchor="ctr" lIns="0" tIns="0" rIns="0" bIns="0" rtlCol="0"/>
+          <a:lstStyle>
+            <a:lvl1pPr algn="l" marL="0" indent="0">
+              <a:lnSpc>
+                <a:spcPct val="100000"/>
+              </a:lnSpc>
+              <a:buNone/>
+              <a:defRPr lang="th-TH" sz="1400" dirty="0">
+                <a:solidFill>
+                  <a:srgbClr val="333333"/>
+                </a:solidFill>
+                <a:latin typeface="+mn-lt"/>
+                <a:ea typeface="+mn-ea"/>
+                <a:cs typeface="+mn-cs"/>
+              </a:defRPr>
+            </a:lvl1pPr>
+          </a:lstStyle>
+          <a:p>
+            <a:pPr algn="l" marL="0" indent="0">
+              <a:lnSpc>
+                <a:spcPct val="100000"/>
+              </a:lnSpc>
+              <a:buNone/>
+            </a:pPr>
+            <a:r>
+              <a:rPr lang="th-TH" sz="1400" dirty="0">
+                <a:solidFill>
+                  <a:srgbClr val="333333"/>
+                </a:solidFill>
+                <a:latin typeface="+mn-lt"/>
+                <a:ea typeface="+mn-ea"/>
+                <a:cs typeface="+mn-cs"/>
+              </a:rPr>
+              <a:t>รายการ</a:t>
+            </a:r>
+          </a:p>
+        </p:txBody>
+      </p:sp>
+      <p:sp>
+        <p:nvSpPr>
+          <p:cNvPr id="24" name="Row 5 Change"/>
+          <p:cNvSpPr>
+            <a:spLocks noGrp="1"/>
+          </p:cNvSpPr>
+          <p:nvPr>
+            <p:ph type="body" idx="29"/>
+          </p:nvPr>
+        </p:nvSpPr>
+        <p:spPr>
+          <a:xfrm>
+            <a:off x="9814560" y="3950208"/>
+            <a:ext cx="1463040" cy="393192"/>
+          </a:xfrm>
+          <a:prstGeom prst="rect">
+            <a:avLst/>
+          </a:prstGeom>
+        </p:spPr>
+        <p:txBody>
+          <a:bodyPr wrap="square" anchor="ctr" lIns="0" tIns="0" rIns="0" bIns="0" rtlCol="0"/>
+          <a:lstStyle>
+            <a:lvl1pPr algn="r" marL="0" indent="0">
+              <a:lnSpc>
+                <a:spcPct val="100000"/>
+              </a:lnSpc>
+              <a:buNone/>
+              <a:defRPr lang="th-TH" sz="1400" b="1" dirty="0">
+                <a:solidFill>
+                  <a:srgbClr val="333333"/>
+                </a:solidFill>
+                <a:latin typeface="+mn-lt"/>
+                <a:ea typeface="+mn-ea"/>
+                <a:cs typeface="+mn-cs"/>
+              </a:defRPr>
+            </a:lvl1pPr>
+          </a:lstStyle>
+          <a:p>
+            <a:pPr algn="r" marL="0" indent="0">
+              <a:lnSpc>
+                <a:spcPct val="100000"/>
+              </a:lnSpc>
+              <a:buNone/>
+            </a:pPr>
+            <a:r>
+              <a:rPr lang="th-TH" sz="1400" b="1" dirty="0">
+                <a:solidFill>
+                  <a:srgbClr val="333333"/>
+                </a:solidFill>
+                <a:latin typeface="+mn-lt"/>
+                <a:ea typeface="+mn-ea"/>
+                <a:cs typeface="+mn-cs"/>
+              </a:rPr>
+              <a:t>−0</a:t>
+            </a:r>
+          </a:p>
+        </p:txBody>
+      </p:sp>
+      <p:sp>
+        <p:nvSpPr>
+          <p:cNvPr id="25" name="Row 6 Label"/>
+          <p:cNvSpPr>
+            <a:spLocks noGrp="1"/>
+          </p:cNvSpPr>
+          <p:nvPr>
+            <p:ph type="body" idx="30"/>
+          </p:nvPr>
+        </p:nvSpPr>
+        <p:spPr>
+          <a:xfrm>
+            <a:off x="914400" y="4343400"/>
+            <a:ext cx="2743200" cy="393192"/>
+          </a:xfrm>
+          <a:prstGeom prst="rect">
+            <a:avLst/>
+          </a:prstGeom>
+        </p:spPr>
+        <p:txBody>
+          <a:bodyPr wrap="square" anchor="ctr" lIns="0" tIns="0" rIns="0" bIns="0" rtlCol="0"/>
+          <a:lstStyle>
+            <a:lvl1pPr algn="l" marL="0" indent="0">
+              <a:lnSpc>
+                <a:spcPct val="100000"/>
+              </a:lnSpc>
+              <a:buNone/>
+              <a:defRPr lang="th-TH" sz="1400" dirty="0">
+                <a:solidFill>
+                  <a:srgbClr val="333333"/>
+                </a:solidFill>
+                <a:latin typeface="+mn-lt"/>
+                <a:ea typeface="+mn-ea"/>
+                <a:cs typeface="+mn-cs"/>
+              </a:defRPr>
+            </a:lvl1pPr>
+          </a:lstStyle>
+          <a:p>
+            <a:pPr algn="l" marL="0" indent="0">
+              <a:lnSpc>
+                <a:spcPct val="100000"/>
+              </a:lnSpc>
+              <a:buNone/>
+            </a:pPr>
+            <a:r>
+              <a:rPr lang="th-TH" sz="1400" dirty="0">
+                <a:solidFill>
+                  <a:srgbClr val="333333"/>
+                </a:solidFill>
+                <a:latin typeface="+mn-lt"/>
+                <a:ea typeface="+mn-ea"/>
+                <a:cs typeface="+mn-cs"/>
+              </a:rPr>
+              <a:t>รายการ</a:t>
+            </a:r>
+          </a:p>
+        </p:txBody>
+      </p:sp>
+      <p:sp>
+        <p:nvSpPr>
+          <p:cNvPr id="26" name="Row 6 Change"/>
+          <p:cNvSpPr>
+            <a:spLocks noGrp="1"/>
+          </p:cNvSpPr>
+          <p:nvPr>
+            <p:ph type="body" idx="31"/>
+          </p:nvPr>
+        </p:nvSpPr>
+        <p:spPr>
+          <a:xfrm>
+            <a:off x="9814560" y="4343400"/>
+            <a:ext cx="1463040" cy="393192"/>
+          </a:xfrm>
+          <a:prstGeom prst="rect">
+            <a:avLst/>
+          </a:prstGeom>
+        </p:spPr>
+        <p:txBody>
+          <a:bodyPr wrap="square" anchor="ctr" lIns="0" tIns="0" rIns="0" bIns="0" rtlCol="0"/>
+          <a:lstStyle>
+            <a:lvl1pPr algn="r" marL="0" indent="0">
+              <a:lnSpc>
+                <a:spcPct val="100000"/>
+              </a:lnSpc>
+              <a:buNone/>
+              <a:defRPr lang="th-TH" sz="1400" b="1" dirty="0">
+                <a:solidFill>
+                  <a:srgbClr val="333333"/>
+                </a:solidFill>
+                <a:latin typeface="+mn-lt"/>
+                <a:ea typeface="+mn-ea"/>
+                <a:cs typeface="+mn-cs"/>
+              </a:defRPr>
+            </a:lvl1pPr>
+          </a:lstStyle>
+          <a:p>
+            <a:pPr algn="r" marL="0" indent="0">
+              <a:lnSpc>
+                <a:spcPct val="100000"/>
+              </a:lnSpc>
+              <a:buNone/>
+            </a:pPr>
+            <a:r>
+              <a:rPr lang="th-TH" sz="1400" b="1" dirty="0">
+                <a:solidFill>
+                  <a:srgbClr val="333333"/>
+                </a:solidFill>
+                <a:latin typeface="+mn-lt"/>
+                <a:ea typeface="+mn-ea"/>
+                <a:cs typeface="+mn-cs"/>
+              </a:rPr>
+              <a:t>−0</a:t>
+            </a:r>
+          </a:p>
+        </p:txBody>
+      </p:sp>
+      <p:sp>
+        <p:nvSpPr>
+          <p:cNvPr id="27" name="Row 7 Label"/>
+          <p:cNvSpPr>
+            <a:spLocks noGrp="1"/>
+          </p:cNvSpPr>
+          <p:nvPr>
+            <p:ph type="body" idx="32"/>
+          </p:nvPr>
+        </p:nvSpPr>
+        <p:spPr>
+          <a:xfrm>
+            <a:off x="914400" y="4736592"/>
+            <a:ext cx="2743200" cy="393192"/>
+          </a:xfrm>
+          <a:prstGeom prst="rect">
+            <a:avLst/>
+          </a:prstGeom>
+        </p:spPr>
+        <p:txBody>
+          <a:bodyPr wrap="square" anchor="ctr" lIns="0" tIns="0" rIns="0" bIns="0" rtlCol="0"/>
+          <a:lstStyle>
+            <a:lvl1pPr algn="l" marL="0" indent="0">
+              <a:lnSpc>
+                <a:spcPct val="100000"/>
+              </a:lnSpc>
+              <a:buNone/>
+              <a:defRPr lang="th-TH" sz="1400" dirty="0">
+                <a:solidFill>
+                  <a:srgbClr val="333333"/>
+                </a:solidFill>
+                <a:latin typeface="+mn-lt"/>
+                <a:ea typeface="+mn-ea"/>
+                <a:cs typeface="+mn-cs"/>
+              </a:defRPr>
+            </a:lvl1pPr>
+          </a:lstStyle>
+          <a:p>
+            <a:pPr algn="l" marL="0" indent="0">
+              <a:lnSpc>
+                <a:spcPct val="100000"/>
+              </a:lnSpc>
+              <a:buNone/>
+            </a:pPr>
+            <a:r>
+              <a:rPr lang="th-TH" sz="1400" dirty="0">
+                <a:solidFill>
+                  <a:srgbClr val="333333"/>
+                </a:solidFill>
+                <a:latin typeface="+mn-lt"/>
+                <a:ea typeface="+mn-ea"/>
+                <a:cs typeface="+mn-cs"/>
+              </a:rPr>
+              <a:t>รายการ</a:t>
+            </a:r>
+          </a:p>
+        </p:txBody>
+      </p:sp>
+      <p:sp>
+        <p:nvSpPr>
+          <p:cNvPr id="28" name="Row 7 Change"/>
+          <p:cNvSpPr>
+            <a:spLocks noGrp="1"/>
+          </p:cNvSpPr>
+          <p:nvPr>
+            <p:ph type="body" idx="33"/>
+          </p:nvPr>
+        </p:nvSpPr>
+        <p:spPr>
+          <a:xfrm>
+            <a:off x="9814560" y="4736592"/>
+            <a:ext cx="1463040" cy="393192"/>
+          </a:xfrm>
+          <a:prstGeom prst="rect">
+            <a:avLst/>
+          </a:prstGeom>
+        </p:spPr>
+        <p:txBody>
+          <a:bodyPr wrap="square" anchor="ctr" lIns="0" tIns="0" rIns="0" bIns="0" rtlCol="0"/>
+          <a:lstStyle>
+            <a:lvl1pPr algn="r" marL="0" indent="0">
+              <a:lnSpc>
+                <a:spcPct val="100000"/>
+              </a:lnSpc>
+              <a:buNone/>
+              <a:defRPr lang="th-TH" sz="1400" b="1" dirty="0">
+                <a:solidFill>
+                  <a:srgbClr val="333333"/>
+                </a:solidFill>
+                <a:latin typeface="+mn-lt"/>
+                <a:ea typeface="+mn-ea"/>
+                <a:cs typeface="+mn-cs"/>
+              </a:defRPr>
+            </a:lvl1pPr>
+          </a:lstStyle>
+          <a:p>
+            <a:pPr algn="r" marL="0" indent="0">
+              <a:lnSpc>
+                <a:spcPct val="100000"/>
+              </a:lnSpc>
+              <a:buNone/>
+            </a:pPr>
+            <a:r>
+              <a:rPr lang="th-TH" sz="1400" b="1" dirty="0">
+                <a:solidFill>
+                  <a:srgbClr val="333333"/>
+                </a:solidFill>
+                <a:latin typeface="+mn-lt"/>
+                <a:ea typeface="+mn-ea"/>
+                <a:cs typeface="+mn-cs"/>
+              </a:rPr>
+              <a:t>−0</a:t>
+            </a:r>
+          </a:p>
+        </p:txBody>
+      </p:sp>
+      <p:sp>
+        <p:nvSpPr>
+          <p:cNvPr id="29" name="Source"/>
+          <p:cNvSpPr>
+            <a:spLocks noGrp="1"/>
+          </p:cNvSpPr>
+          <p:nvPr>
+            <p:ph type="body" idx="4"/>
+          </p:nvPr>
+        </p:nvSpPr>
+        <p:spPr>
+          <a:xfrm>
+            <a:off x="914400" y="5257800"/>
+            <a:ext cx="10363200" cy="274320"/>
+          </a:xfrm>
+          <a:prstGeom prst="rect">
+            <a:avLst/>
+          </a:prstGeom>
+        </p:spPr>
+        <p:txBody>
+          <a:bodyPr wrap="square" anchor="t" lIns="0" tIns="0" rIns="0" bIns="0" rtlCol="0"/>
+          <a:lstStyle>
+            <a:lvl1pPr algn="l" marL="0" indent="0">
+              <a:lnSpc>
+                <a:spcPct val="130000"/>
+              </a:lnSpc>
+              <a:buNone/>
+              <a:defRPr lang="th-TH" sz="1000" dirty="0">
+                <a:solidFill>
+                  <a:srgbClr val="5F5F5F"/>
+                </a:solidFill>
+                <a:latin typeface="+mn-lt"/>
+                <a:ea typeface="+mn-ea"/>
+                <a:cs typeface="+mn-cs"/>
+              </a:defRPr>
+            </a:lvl1pPr>
+          </a:lstStyle>
+          <a:p>
+            <a:pPr algn="l" marL="0" indent="0">
+              <a:lnSpc>
+                <a:spcPct val="130000"/>
+              </a:lnSpc>
+              <a:buNone/>
+            </a:pPr>
+            <a:r>
+              <a:rPr lang="th-TH" sz="1000" dirty="0">
+                <a:solidFill>
+                  <a:srgbClr val="5F5F5F"/>
+                </a:solidFill>
+                <a:latin typeface="+mn-lt"/>
+                <a:ea typeface="+mn-ea"/>
+                <a:cs typeface="+mn-cs"/>
+              </a:rPr>
+              <a:t>ที่มาของตัวเลข · ตัวเลขเต็มอยู่ภาคผนวก</a:t>
+            </a:r>
+          </a:p>
+        </p:txBody>
+      </p:sp>
+      <p:sp>
+        <p:nvSpPr>
+          <p:cNvPr id="30" name="Takeaway Band"/>
+          <p:cNvSpPr/>
+          <p:nvPr/>
+        </p:nvSpPr>
+        <p:spPr>
+          <a:xfrm>
+            <a:off x="914400" y="5623560"/>
+            <a:ext cx="10363200" cy="411480"/>
+          </a:xfrm>
+          <a:prstGeom prst="rect">
+            <a:avLst/>
+          </a:prstGeom>
+          <a:solidFill>
+            <a:srgbClr val="E8F6F5"/>
+          </a:solidFill>
+          <a:ln>
+            <a:noFill/>
+          </a:ln>
+        </p:spPr>
+        <p:txBody>
+          <a:bodyPr/>
+          <a:lstStyle/>
+          <a:p>
+            <a:endParaRPr lang="th-TH"/>
+          </a:p>
+        </p:txBody>
+      </p:sp>
+      <p:sp>
+        <p:nvSpPr>
+          <p:cNvPr id="31" name="Takeaway Label"/>
+          <p:cNvSpPr>
+            <a:spLocks noGrp="1"/>
+          </p:cNvSpPr>
+          <p:nvPr>
+            <p:ph type="body" idx="5"/>
+          </p:nvPr>
+        </p:nvSpPr>
+        <p:spPr>
+          <a:xfrm>
+            <a:off x="1097280" y="5684520"/>
+            <a:ext cx="1828800" cy="289560"/>
+          </a:xfrm>
+          <a:prstGeom prst="rect">
+            <a:avLst/>
+          </a:prstGeom>
+        </p:spPr>
+        <p:txBody>
+          <a:bodyPr wrap="square" anchor="ctr" lIns="0" tIns="0" rIns="0" bIns="0" rtlCol="0"/>
+          <a:lstStyle>
+            <a:lvl1pPr algn="l" marL="0" indent="0">
+              <a:lnSpc>
+                <a:spcPct val="100000"/>
+              </a:lnSpc>
+              <a:buNone/>
+              <a:defRPr lang="th-TH" sz="1200" b="1" spc="120" dirty="0">
+                <a:solidFill>
+                  <a:srgbClr val="216B7F"/>
+                </a:solidFill>
+                <a:latin typeface="+mn-lt"/>
+                <a:ea typeface="+mn-ea"/>
+                <a:cs typeface="+mn-cs"/>
+              </a:defRPr>
+            </a:lvl1pPr>
+          </a:lstStyle>
+          <a:p>
+            <a:pPr algn="l" marL="0" indent="0">
+              <a:lnSpc>
+                <a:spcPct val="100000"/>
+              </a:lnSpc>
+              <a:buNone/>
+            </a:pPr>
+            <a:r>
+              <a:rPr lang="th-TH" sz="1200" b="1" spc="120" dirty="0">
+                <a:solidFill>
+                  <a:srgbClr val="216B7F"/>
+                </a:solidFill>
+                <a:latin typeface="+mn-lt"/>
+                <a:ea typeface="+mn-ea"/>
+                <a:cs typeface="+mn-cs"/>
+              </a:rPr>
+              <a:t>สรุป</a:t>
+            </a:r>
+          </a:p>
+        </p:txBody>
+      </p:sp>
+      <p:sp>
+        <p:nvSpPr>
+          <p:cNvPr id="32" name="Takeaway Copy"/>
+          <p:cNvSpPr>
+            <a:spLocks noGrp="1"/>
+          </p:cNvSpPr>
+          <p:nvPr>
+            <p:ph type="body" idx="6"/>
+          </p:nvPr>
+        </p:nvSpPr>
+        <p:spPr>
+          <a:xfrm>
+            <a:off x="2926080" y="5684520"/>
+            <a:ext cx="8168640" cy="289560"/>
+          </a:xfrm>
+          <a:prstGeom prst="rect">
+            <a:avLst/>
+          </a:prstGeom>
+        </p:spPr>
+        <p:txBody>
+          <a:bodyPr wrap="square" anchor="ctr" lIns="0" tIns="0" rIns="0" bIns="0" rtlCol="0"/>
+          <a:lstStyle>
+            <a:lvl1pPr algn="l" marL="0" indent="0">
+              <a:lnSpc>
+                <a:spcPct val="100000"/>
+              </a:lnSpc>
+              <a:buNone/>
+              <a:defRPr lang="th-TH" sz="1400" dirty="0">
+                <a:solidFill>
+                  <a:srgbClr val="333333"/>
+                </a:solidFill>
+                <a:latin typeface="+mn-lt"/>
+                <a:ea typeface="+mn-ea"/>
+                <a:cs typeface="+mn-cs"/>
+              </a:defRPr>
+            </a:lvl1pPr>
+          </a:lstStyle>
+          <a:p>
+            <a:pPr algn="l" marL="0" indent="0">
+              <a:lnSpc>
+                <a:spcPct val="100000"/>
+              </a:lnSpc>
+              <a:buNone/>
+            </a:pPr>
+            <a:r>
+              <a:rPr lang="th-TH" sz="1400" dirty="0">
+                <a:solidFill>
+                  <a:srgbClr val="333333"/>
+                </a:solidFill>
+                <a:latin typeface="+mn-lt"/>
+                <a:ea typeface="+mn-ea"/>
+                <a:cs typeface="+mn-cs"/>
+              </a:rPr>
+              <a:t>ประเด็นสรุปหนึ่งบรรทัด</a:t>
+            </a:r>
+          </a:p>
+        </p:txBody>
+      </p:sp>
+      <p:sp>
+        <p:nvSpPr>
+          <p:cNvPr id="90" name="Foot Bar 1"/>
+          <p:cNvSpPr/>
+          <p:nvPr/>
+        </p:nvSpPr>
+        <p:spPr>
+          <a:xfrm>
+            <a:off x="0" y="6675120"/>
+            <a:ext cx="822960" cy="137160"/>
+          </a:xfrm>
+          <a:prstGeom prst="rect">
+            <a:avLst/>
+          </a:prstGeom>
+          <a:solidFill>
+            <a:srgbClr val="216B7F"/>
+          </a:solidFill>
+          <a:ln>
+            <a:noFill/>
+          </a:ln>
+        </p:spPr>
+        <p:txBody>
+          <a:bodyPr/>
+          <a:lstStyle/>
+          <a:p>
+            <a:endParaRPr lang="th-TH"/>
+          </a:p>
+        </p:txBody>
+      </p:sp>
+      <p:sp>
+        <p:nvSpPr>
+          <p:cNvPr id="91" name="Foot Bar 2"/>
+          <p:cNvSpPr/>
+          <p:nvPr/>
+        </p:nvSpPr>
+        <p:spPr>
+          <a:xfrm>
+            <a:off x="822960" y="6675120"/>
+            <a:ext cx="822960" cy="137160"/>
+          </a:xfrm>
+          <a:prstGeom prst="rect">
+            <a:avLst/>
+          </a:prstGeom>
+          <a:solidFill>
+            <a:srgbClr val="B1C4C9"/>
+          </a:solidFill>
+          <a:ln>
+            <a:noFill/>
+          </a:ln>
+        </p:spPr>
+        <p:txBody>
+          <a:bodyPr/>
+          <a:lstStyle/>
+          <a:p>
+            <a:endParaRPr lang="th-TH"/>
+          </a:p>
+        </p:txBody>
+      </p:sp>
+      <p:sp>
+        <p:nvSpPr>
+          <p:cNvPr id="92" name="Foot Bar 3"/>
+          <p:cNvSpPr/>
+          <p:nvPr/>
+        </p:nvSpPr>
+        <p:spPr>
+          <a:xfrm>
+            <a:off x="1645920" y="6675120"/>
+            <a:ext cx="822960" cy="137160"/>
+          </a:xfrm>
+          <a:prstGeom prst="rect">
+            <a:avLst/>
+          </a:prstGeom>
+          <a:solidFill>
+            <a:srgbClr val="E1E1E1"/>
+          </a:solidFill>
+          <a:ln>
+            <a:noFill/>
+          </a:ln>
+        </p:spPr>
+        <p:txBody>
+          <a:bodyPr/>
+          <a:lstStyle/>
+          <a:p>
+            <a:endParaRPr lang="th-TH"/>
+          </a:p>
+        </p:txBody>
+      </p:sp>
+      <p:sp>
+        <p:nvSpPr>
+          <p:cNvPr id="93" name="Footer Placeholder"/>
+          <p:cNvSpPr>
+            <a:spLocks noGrp="1"/>
+          </p:cNvSpPr>
+          <p:nvPr>
+            <p:ph type="ftr" idx="11"/>
+          </p:nvPr>
+        </p:nvSpPr>
+        <p:spPr>
+          <a:xfrm>
+            <a:off x="2697480" y="6400800"/>
+            <a:ext cx="4572000" cy="274320"/>
+          </a:xfrm>
+          <a:prstGeom prst="rect">
+            <a:avLst/>
+          </a:prstGeom>
+        </p:spPr>
+        <p:txBody>
+          <a:bodyPr wrap="square" anchor="ctr" lIns="0" tIns="0" rIns="0" bIns="0" rtlCol="0"/>
+          <a:lstStyle>
+            <a:lvl1pPr algn="l" marL="0" indent="0">
+              <a:lnSpc>
+                <a:spcPct val="100000"/>
+              </a:lnSpc>
+              <a:buNone/>
+              <a:defRPr lang="th-TH" sz="1000" dirty="0">
+                <a:solidFill>
+                  <a:srgbClr val="5F5F5F"/>
+                </a:solidFill>
+                <a:latin typeface="+mn-lt"/>
+                <a:ea typeface="+mn-ea"/>
+                <a:cs typeface="+mn-cs"/>
+              </a:defRPr>
+            </a:lvl1pPr>
+          </a:lstStyle>
+          <a:p>
+            <a:pPr algn="l" marL="0" indent="0">
+              <a:lnSpc>
+                <a:spcPct val="100000"/>
+              </a:lnSpc>
+              <a:buNone/>
+            </a:pPr>
+            <a:endParaRPr lang="th-TH" sz="1000"/>
+          </a:p>
+        </p:txBody>
+      </p:sp>
+      <p:sp>
+        <p:nvSpPr>
+          <p:cNvPr id="94" name="Slide Number Placeholder"/>
+          <p:cNvSpPr>
+            <a:spLocks noGrp="1"/>
+          </p:cNvSpPr>
+          <p:nvPr>
+            <p:ph type="sldNum" sz="quarter" idx="12"/>
+          </p:nvPr>
+        </p:nvSpPr>
+        <p:spPr>
+          <a:xfrm>
+            <a:off x="10591800" y="6400800"/>
+            <a:ext cx="1371600" cy="274320"/>
+          </a:xfrm>
+          <a:prstGeom prst="rect">
+            <a:avLst/>
+          </a:prstGeom>
+        </p:spPr>
+        <p:txBody>
+          <a:bodyPr anchor="ctr"/>
+          <a:lstStyle>
+            <a:lvl1pPr algn="r" marL="0" indent="0">
+              <a:lnSpc>
+                <a:spcPct val="100000"/>
+              </a:lnSpc>
+              <a:buNone/>
+              <a:defRPr lang="th-TH" sz="1000" dirty="0">
+                <a:solidFill>
+                  <a:srgbClr val="5F5F5F"/>
+                </a:solidFill>
+                <a:latin typeface="+mn-lt"/>
+                <a:ea typeface="+mn-ea"/>
+                <a:cs typeface="+mn-cs"/>
+              </a:defRPr>
+            </a:lvl1pPr>
+          </a:lstStyle>
+          <a:p>
+            <a:pPr algn="r" marL="0" indent="0">
+              <a:buNone/>
+            </a:pPr>
+            <a:fld id="{B7E3A1C2-4F5D-4A88-9C1E-6D2F0A93B451}" type="slidenum">
+              <a:rPr lang="th-TH" sz="1000">
+                <a:solidFill>
+                  <a:srgbClr val="5F5F5F"/>
+                </a:solidFill>
+                <a:latin typeface="+mn-lt"/>
+                <a:cs typeface="+mn-cs"/>
+              </a:rPr>
+              <a:t>2</a:t>
+            </a:fld>
+            <a:endParaRPr lang="th-TH" sz="1000"/>
+          </a:p>
+        </p:txBody>
+      </p:sp>
+      <p:sp>
+        <p:nvSpPr>
+          <p:cNvPr id="95" name="Corner Lockup"/>
+          <p:cNvSpPr/>
+          <p:nvPr/>
+        </p:nvSpPr>
+        <p:spPr>
+          <a:xfrm rot="10800000">
+            <a:off x="10546080" y="-274320"/>
+            <a:ext cx="1645920" cy="822960"/>
+          </a:xfrm>
+          <a:prstGeom prst="round2SameRect">
+            <a:avLst>
+              <a:gd name="adj1" fmla="val 12000"/>
+              <a:gd name="adj2" fmla="val 0"/>
+            </a:avLst>
+          </a:prstGeom>
+          <a:solidFill>
+            <a:srgbClr val="FFFFFF"/>
+          </a:solidFill>
+          <a:ln w="12700">
+            <a:solidFill>
+              <a:srgbClr val="216B7F"/>
+            </a:solidFill>
+          </a:ln>
+        </p:spPr>
+        <p:txBody>
+          <a:bodyPr/>
+          <a:lstStyle/>
+          <a:p>
+            <a:endParaRPr lang="th-TH"/>
+          </a:p>
+        </p:txBody>
+      </p:sp>
+      <p:pic>
+        <p:nvPicPr>
+          <p:cNvPr id="96" name="NCT Mark"/>
+          <p:cNvPicPr>
+            <a:picLocks noChangeAspect="1"/>
+          </p:cNvPicPr>
+          <p:nvPr/>
+        </p:nvPicPr>
+        <p:blipFill>
+          <a:blip r:embed="rId2"/>
+          <a:stretch>
+            <a:fillRect/>
+          </a:stretch>
+        </p:blipFill>
+        <p:spPr>
+          <a:xfrm>
+            <a:off x="11094720" y="99822"/>
+            <a:ext cx="548640" cy="348996"/>
+          </a:xfrm>
+          <a:prstGeom prst="rect">
+            <a:avLst/>
+          </a:prstGeom>
+        </p:spPr>
+      </p:pic>
+    </p:spTree>
+  </p:cSld>
+  <p:clrMapOvr>
+    <a:masterClrMapping/>
+  </p:clrMapOvr>
+</p:sldLayout>
+</file>
+
 <file path=ppt/slideLayouts/slideLayout3.xml><?xml version="1.0" encoding="utf-8"?>
 <p:sldLayout xmlns:a="http://schemas.openxmlformats.org/drawingml/2006/main" xmlns:r="http://schemas.openxmlformats.org/officeDocument/2006/relationships" xmlns:p="http://schemas.openxmlformats.org/presentationml/2006/main" type="obj" showMasterSp="0" preserve="1">
   <p:cSld name="03 Title and Content">
@@ -24364,7 +26454,7 @@
           <p:nvPr/>
         </p:nvPicPr>
         <p:blipFill>
-          <a:blip r:embed="rId25"/>
+          <a:blip r:embed="rId26"/>
           <a:stretch>
             <a:fillRect/>
           </a:stretch>
@@ -24406,6 +26496,7 @@
     <p:sldLayoutId id="2147483669" r:id="rId21"/>
     <p:sldLayoutId id="2147483670" r:id="rId22"/>
     <p:sldLayoutId id="2147483671" r:id="rId23"/>
+    <p:sldLayoutId id="2147483672" r:id="rId24"/>
   </p:sldLayoutIdLst>
   <p:txStyles>
     <p:titleStyle>
@@ -27800,12 +29891,12 @@
       </p:grpSpPr>
       <p:sp>
         <p:nvSpPr>
-          <p:cNvPr id="2" name="Q"/>
-          <p:cNvSpPr>
-            <a:spLocks noGrp="1"/>
-          </p:cNvSpPr>
-          <p:nvPr>
-            <p:ph type="body" idx="1"/>
+          <p:cNvPr id="2" name="Title"/>
+          <p:cNvSpPr>
+            <a:spLocks noGrp="1"/>
+          </p:cNvSpPr>
+          <p:nvPr>
+            <p:ph type="title"/>
           </p:nvPr>
         </p:nvSpPr>
         <p:spPr/>
@@ -27816,14 +29907,14 @@
             <a:pPr/>
             <a:r>
               <a:rPr lang="th-TH" dirty="0"/>
-              <a:t>ระบบไม่ล่มอีกเลยตั้งแต่เปลี่ยนมาใช้ทีมนี้ดูแล และเราวางแผนงบประมาณได้ล่วงหน้าจริง ๆ</a:t>
-            </a:r>
-          </a:p>
-        </p:txBody>
-      </p:sp>
-      <p:sp>
-        <p:nvSpPr>
-          <p:cNvPr id="3" name="A"/>
+              <a:t>ลูกค้ารายเดิมลดงานบัญชีจาก 114 เหลือ 31 ชั่วโมงต่อเดือน</a:t>
+            </a:r>
+          </a:p>
+        </p:txBody>
+      </p:sp>
+      <p:sp>
+        <p:nvSpPr>
+          <p:cNvPr id="3" name="Intro"/>
           <p:cNvSpPr>
             <a:spLocks noGrp="1"/>
           </p:cNvSpPr>
@@ -27839,7 +29930,369 @@
             <a:pPr/>
             <a:r>
               <a:rPr lang="th-TH" dirty="0"/>
-              <a:t>คุณสมชาย ป. — ผู้จัดการฝ่ายไอที, บริษัทตัวอย่าง จำกัด</a:t>
+              <a:t>ชั่วโมงทำงานต่อเดือน · น้อยกว่าดีกว่า</a:t>
+            </a:r>
+          </a:p>
+        </p:txBody>
+      </p:sp>
+      <p:sp>
+        <p:nvSpPr>
+          <p:cNvPr id="4" name="Legend"/>
+          <p:cNvSpPr>
+            <a:spLocks noGrp="1"/>
+          </p:cNvSpPr>
+          <p:nvPr>
+            <p:ph type="body" idx="3"/>
+          </p:nvPr>
+        </p:nvSpPr>
+        <p:spPr/>
+        <p:txBody>
+          <a:bodyPr/>
+          <a:lstStyle/>
+          <a:p>
+            <a:pPr/>
+            <a:r>
+              <a:rPr lang="th-TH" dirty="0">
+                <a:solidFill>
+                  <a:srgbClr val="90B4E4"/>
+                </a:solidFill>
+              </a:rPr>
+              <a:t>● </a:t>
+            </a:r>
+            <a:r>
+              <a:rPr lang="th-TH" dirty="0"/>
+              <a:t>ก่อน   </a:t>
+            </a:r>
+            <a:r>
+              <a:rPr lang="th-TH" dirty="0">
+                <a:solidFill>
+                  <a:srgbClr val="2A5EA0"/>
+                </a:solidFill>
+              </a:rPr>
+              <a:t>● </a:t>
+            </a:r>
+            <a:r>
+              <a:rPr lang="th-TH" dirty="0"/>
+              <a:t>หลัง</a:t>
+            </a:r>
+          </a:p>
+        </p:txBody>
+      </p:sp>
+      <p:graphicFrame>
+        <p:nvGraphicFramePr>
+          <p:cNvPr id="5" name="Before After"/>
+          <p:cNvGraphicFramePr>
+            <a:graphicFrameLocks noGrp="1"/>
+          </p:cNvGraphicFramePr>
+          <p:nvPr>
+            <p:ph type="chart" idx="1"/>
+          </p:nvPr>
+        </p:nvGraphicFramePr>
+        <p:xfrm>
+          <a:off x="3840480" y="2057400"/>
+          <a:ext cx="5791200" cy="3072384"/>
+        </p:xfrm>
+        <a:graphic>
+          <a:graphicData uri="http://schemas.openxmlformats.org/drawingml/2006/chart">
+            <c:chart xmlns:c="http://schemas.openxmlformats.org/drawingml/2006/chart" r:id="rId2"/>
+          </a:graphicData>
+        </a:graphic>
+      </p:graphicFrame>
+      <p:sp>
+        <p:nvSpPr>
+          <p:cNvPr id="6" name="R0"/>
+          <p:cNvSpPr>
+            <a:spLocks noGrp="1"/>
+          </p:cNvSpPr>
+          <p:nvPr>
+            <p:ph type="body" idx="20"/>
+          </p:nvPr>
+        </p:nvSpPr>
+        <p:spPr/>
+        <p:txBody>
+          <a:bodyPr/>
+          <a:lstStyle/>
+          <a:p>
+            <a:pPr/>
+            <a:r>
+              <a:rPr lang="th-TH" dirty="0"/>
+              <a:t>ปิดงบสิ้นเดือน</a:t>
+            </a:r>
+          </a:p>
+        </p:txBody>
+      </p:sp>
+      <p:sp>
+        <p:nvSpPr>
+          <p:cNvPr id="7" name="C0"/>
+          <p:cNvSpPr>
+            <a:spLocks noGrp="1"/>
+          </p:cNvSpPr>
+          <p:nvPr>
+            <p:ph type="body" idx="21"/>
+          </p:nvPr>
+        </p:nvSpPr>
+        <p:spPr/>
+        <p:txBody>
+          <a:bodyPr/>
+          <a:lstStyle/>
+          <a:p>
+            <a:pPr/>
+            <a:r>
+              <a:rPr lang="th-TH" dirty="0"/>
+              <a:t>−32 ชม.</a:t>
+            </a:r>
+          </a:p>
+        </p:txBody>
+      </p:sp>
+      <p:sp>
+        <p:nvSpPr>
+          <p:cNvPr id="8" name="R1"/>
+          <p:cNvSpPr>
+            <a:spLocks noGrp="1"/>
+          </p:cNvSpPr>
+          <p:nvPr>
+            <p:ph type="body" idx="22"/>
+          </p:nvPr>
+        </p:nvSpPr>
+        <p:spPr/>
+        <p:txBody>
+          <a:bodyPr/>
+          <a:lstStyle/>
+          <a:p>
+            <a:pPr/>
+            <a:r>
+              <a:rPr lang="th-TH" dirty="0"/>
+              <a:t>คีย์ใบแจ้งหนี้ซื้อ</a:t>
+            </a:r>
+          </a:p>
+        </p:txBody>
+      </p:sp>
+      <p:sp>
+        <p:nvSpPr>
+          <p:cNvPr id="9" name="C1"/>
+          <p:cNvSpPr>
+            <a:spLocks noGrp="1"/>
+          </p:cNvSpPr>
+          <p:nvPr>
+            <p:ph type="body" idx="23"/>
+          </p:nvPr>
+        </p:nvSpPr>
+        <p:spPr/>
+        <p:txBody>
+          <a:bodyPr/>
+          <a:lstStyle/>
+          <a:p>
+            <a:pPr/>
+            <a:r>
+              <a:rPr lang="th-TH" dirty="0"/>
+              <a:t>−25 ชม.</a:t>
+            </a:r>
+          </a:p>
+        </p:txBody>
+      </p:sp>
+      <p:sp>
+        <p:nvSpPr>
+          <p:cNvPr id="10" name="R2"/>
+          <p:cNvSpPr>
+            <a:spLocks noGrp="1"/>
+          </p:cNvSpPr>
+          <p:nvPr>
+            <p:ph type="body" idx="24"/>
+          </p:nvPr>
+        </p:nvSpPr>
+        <p:spPr/>
+        <p:txBody>
+          <a:bodyPr/>
+          <a:lstStyle/>
+          <a:p>
+            <a:pPr/>
+            <a:r>
+              <a:rPr lang="th-TH" dirty="0"/>
+              <a:t>กระทบยอดธนาคาร</a:t>
+            </a:r>
+          </a:p>
+        </p:txBody>
+      </p:sp>
+      <p:sp>
+        <p:nvSpPr>
+          <p:cNvPr id="11" name="C2"/>
+          <p:cNvSpPr>
+            <a:spLocks noGrp="1"/>
+          </p:cNvSpPr>
+          <p:nvPr>
+            <p:ph type="body" idx="25"/>
+          </p:nvPr>
+        </p:nvSpPr>
+        <p:spPr/>
+        <p:txBody>
+          <a:bodyPr/>
+          <a:lstStyle/>
+          <a:p>
+            <a:pPr/>
+            <a:r>
+              <a:rPr lang="th-TH" dirty="0"/>
+              <a:t>−14 ชม.</a:t>
+            </a:r>
+          </a:p>
+        </p:txBody>
+      </p:sp>
+      <p:sp>
+        <p:nvSpPr>
+          <p:cNvPr id="12" name="R3"/>
+          <p:cNvSpPr>
+            <a:spLocks noGrp="1"/>
+          </p:cNvSpPr>
+          <p:nvPr>
+            <p:ph type="body" idx="26"/>
+          </p:nvPr>
+        </p:nvSpPr>
+        <p:spPr/>
+        <p:txBody>
+          <a:bodyPr/>
+          <a:lstStyle/>
+          <a:p>
+            <a:pPr/>
+            <a:r>
+              <a:rPr lang="th-TH" dirty="0"/>
+              <a:t>ออกใบแจ้งหนี้ขาย</a:t>
+            </a:r>
+          </a:p>
+        </p:txBody>
+      </p:sp>
+      <p:sp>
+        <p:nvSpPr>
+          <p:cNvPr id="13" name="C3"/>
+          <p:cNvSpPr>
+            <a:spLocks noGrp="1"/>
+          </p:cNvSpPr>
+          <p:nvPr>
+            <p:ph type="body" idx="27"/>
+          </p:nvPr>
+        </p:nvSpPr>
+        <p:spPr/>
+        <p:txBody>
+          <a:bodyPr/>
+          <a:lstStyle/>
+          <a:p>
+            <a:pPr/>
+            <a:r>
+              <a:rPr lang="th-TH" dirty="0"/>
+              <a:t>−8 ชม.</a:t>
+            </a:r>
+          </a:p>
+        </p:txBody>
+      </p:sp>
+      <p:sp>
+        <p:nvSpPr>
+          <p:cNvPr id="14" name="R4"/>
+          <p:cNvSpPr>
+            <a:spLocks noGrp="1"/>
+          </p:cNvSpPr>
+          <p:nvPr>
+            <p:ph type="body" idx="28"/>
+          </p:nvPr>
+        </p:nvSpPr>
+        <p:spPr/>
+        <p:txBody>
+          <a:bodyPr/>
+          <a:lstStyle/>
+          <a:p>
+            <a:pPr/>
+            <a:r>
+              <a:rPr lang="th-TH" dirty="0"/>
+              <a:t>ติดตามลูกหนี้</a:t>
+            </a:r>
+          </a:p>
+        </p:txBody>
+      </p:sp>
+      <p:sp>
+        <p:nvSpPr>
+          <p:cNvPr id="15" name="C4"/>
+          <p:cNvSpPr>
+            <a:spLocks noGrp="1"/>
+          </p:cNvSpPr>
+          <p:nvPr>
+            <p:ph type="body" idx="29"/>
+          </p:nvPr>
+        </p:nvSpPr>
+        <p:spPr/>
+        <p:txBody>
+          <a:bodyPr/>
+          <a:lstStyle/>
+          <a:p>
+            <a:pPr/>
+            <a:r>
+              <a:rPr lang="th-TH" dirty="0"/>
+              <a:t>−4 ชม.</a:t>
+            </a:r>
+          </a:p>
+        </p:txBody>
+      </p:sp>
+      <p:sp>
+        <p:nvSpPr>
+          <p:cNvPr id="16" name="Src"/>
+          <p:cNvSpPr>
+            <a:spLocks noGrp="1"/>
+          </p:cNvSpPr>
+          <p:nvPr>
+            <p:ph type="body" idx="4"/>
+          </p:nvPr>
+        </p:nvSpPr>
+        <p:spPr/>
+        <p:txBody>
+          <a:bodyPr/>
+          <a:lstStyle/>
+          <a:p>
+            <a:pPr/>
+            <a:r>
+              <a:rPr lang="th-TH" dirty="0"/>
+              <a:t>ลูกค้าธุรกิจค้าปลีก ปี 2568 · วัดก่อนขึ้นระบบและหลังขึ้นระบบ 3 เดือน</a:t>
+            </a:r>
+          </a:p>
+        </p:txBody>
+      </p:sp>
+      <p:sp>
+        <p:nvSpPr>
+          <p:cNvPr id="17" name="TkL"/>
+          <p:cNvSpPr>
+            <a:spLocks noGrp="1"/>
+          </p:cNvSpPr>
+          <p:nvPr>
+            <p:ph type="body" idx="5"/>
+          </p:nvPr>
+        </p:nvSpPr>
+        <p:spPr/>
+        <p:txBody>
+          <a:bodyPr/>
+          <a:lstStyle/>
+          <a:p>
+            <a:pPr/>
+            <a:r>
+              <a:rPr lang="th-TH" dirty="0"/>
+              <a:t>สรุป</a:t>
+            </a:r>
+          </a:p>
+        </p:txBody>
+      </p:sp>
+      <p:sp>
+        <p:nvSpPr>
+          <p:cNvPr id="18" name="TkC"/>
+          <p:cNvSpPr>
+            <a:spLocks noGrp="1"/>
+          </p:cNvSpPr>
+          <p:nvPr>
+            <p:ph type="body" idx="6"/>
+          </p:nvPr>
+        </p:nvSpPr>
+        <p:spPr/>
+        <p:txBody>
+          <a:bodyPr/>
+          <a:lstStyle/>
+          <a:p>
+            <a:pPr/>
+            <a:r>
+              <a:rPr lang="th-TH" dirty="0"/>
+              <a:t>ปิดงบลดได้มากสุด ไม่ใช่งานคีย์ เพราะระบบกระทบยอดให้ทุกวัน</a:t>
             </a:r>
           </a:p>
         </p:txBody>
@@ -27853,6 +30306,77 @@
 </file>
 
 <file path=ppt/slides/slide18.xml><?xml version="1.0" encoding="utf-8"?>
+<p:sld xmlns:a="http://schemas.openxmlformats.org/drawingml/2006/main" xmlns:r="http://schemas.openxmlformats.org/officeDocument/2006/relationships" xmlns:p="http://schemas.openxmlformats.org/presentationml/2006/main">
+  <p:cSld name="">
+    <p:spTree>
+      <p:nvGrpSpPr>
+        <p:cNvPr id="1" name=""/>
+        <p:cNvGrpSpPr/>
+        <p:nvPr/>
+      </p:nvGrpSpPr>
+      <p:grpSpPr>
+        <a:xfrm>
+          <a:off x="0" y="0"/>
+          <a:ext cx="0" cy="0"/>
+          <a:chOff x="0" y="0"/>
+          <a:chExt cx="0" cy="0"/>
+        </a:xfrm>
+      </p:grpSpPr>
+      <p:sp>
+        <p:nvSpPr>
+          <p:cNvPr id="2" name="Q"/>
+          <p:cNvSpPr>
+            <a:spLocks noGrp="1"/>
+          </p:cNvSpPr>
+          <p:nvPr>
+            <p:ph type="body" idx="1"/>
+          </p:nvPr>
+        </p:nvSpPr>
+        <p:spPr/>
+        <p:txBody>
+          <a:bodyPr/>
+          <a:lstStyle/>
+          <a:p>
+            <a:pPr/>
+            <a:r>
+              <a:rPr lang="th-TH" dirty="0"/>
+              <a:t>ระบบไม่ล่มอีกเลยตั้งแต่เปลี่ยนมาใช้ทีมนี้ดูแล และเราวางแผนงบประมาณได้ล่วงหน้าจริง ๆ</a:t>
+            </a:r>
+          </a:p>
+        </p:txBody>
+      </p:sp>
+      <p:sp>
+        <p:nvSpPr>
+          <p:cNvPr id="3" name="A"/>
+          <p:cNvSpPr>
+            <a:spLocks noGrp="1"/>
+          </p:cNvSpPr>
+          <p:nvPr>
+            <p:ph type="body" idx="2"/>
+          </p:nvPr>
+        </p:nvSpPr>
+        <p:spPr/>
+        <p:txBody>
+          <a:bodyPr/>
+          <a:lstStyle/>
+          <a:p>
+            <a:pPr/>
+            <a:r>
+              <a:rPr lang="th-TH" dirty="0"/>
+              <a:t>คุณสมชาย ป. — ผู้จัดการฝ่ายไอที, บริษัทตัวอย่าง จำกัด</a:t>
+            </a:r>
+          </a:p>
+        </p:txBody>
+      </p:sp>
+    </p:spTree>
+  </p:cSld>
+  <p:clrMapOvr>
+    <a:masterClrMapping/>
+  </p:clrMapOvr>
+</p:sld>
+</file>
+
+<file path=ppt/slides/slide19.xml><?xml version="1.0" encoding="utf-8"?>
 <p:sld xmlns:a="http://schemas.openxmlformats.org/drawingml/2006/main" xmlns:r="http://schemas.openxmlformats.org/officeDocument/2006/relationships" xmlns:p="http://schemas.openxmlformats.org/presentationml/2006/main">
   <p:cSld name="">
     <p:spTree>
@@ -28583,1032 +31107,6 @@
 </p:sld>
 </file>
 
-<file path=ppt/slides/slide19.xml><?xml version="1.0" encoding="utf-8"?>
-<p:sld xmlns:a="http://schemas.openxmlformats.org/drawingml/2006/main" xmlns:r="http://schemas.openxmlformats.org/officeDocument/2006/relationships" xmlns:p="http://schemas.openxmlformats.org/presentationml/2006/main">
-  <p:cSld name="">
-    <p:spTree>
-      <p:nvGrpSpPr>
-        <p:cNvPr id="1" name=""/>
-        <p:cNvGrpSpPr/>
-        <p:nvPr/>
-      </p:nvGrpSpPr>
-      <p:grpSpPr>
-        <a:xfrm>
-          <a:off x="0" y="0"/>
-          <a:ext cx="0" cy="0"/>
-          <a:chOff x="0" y="0"/>
-          <a:chExt cx="0" cy="0"/>
-        </a:xfrm>
-      </p:grpSpPr>
-      <p:sp>
-        <p:nvSpPr>
-          <p:cNvPr id="2" name="Title"/>
-          <p:cNvSpPr>
-            <a:spLocks noGrp="1"/>
-          </p:cNvSpPr>
-          <p:nvPr>
-            <p:ph type="title"/>
-          </p:nvPr>
-        </p:nvSpPr>
-        <p:spPr/>
-        <p:txBody>
-          <a:bodyPr/>
-          <a:lstStyle/>
-          <a:p>
-            <a:pPr/>
-            <a:r>
-              <a:rPr lang="th-TH" dirty="0"/>
-              <a:t>แผนงาน 12 เดือน ขึ้นระบบต้นเดือนที่ 7</a:t>
-            </a:r>
-          </a:p>
-        </p:txBody>
-      </p:sp>
-      <p:graphicFrame>
-        <p:nvGraphicFramePr>
-          <p:cNvPr id="3" name="Plan"/>
-          <p:cNvGraphicFramePr>
-            <a:graphicFrameLocks noGrp="1"/>
-          </p:cNvGraphicFramePr>
-          <p:nvPr>
-            <p:ph type="chart" idx="1"/>
-          </p:nvPr>
-        </p:nvGraphicFramePr>
-        <p:xfrm>
-          <a:off x="3566160" y="2057400"/>
-          <a:ext cx="7711440" cy="3108960"/>
-        </p:xfrm>
-        <a:graphic>
-          <a:graphicData uri="http://schemas.openxmlformats.org/drawingml/2006/chart">
-            <c:chart xmlns:c="http://schemas.openxmlformats.org/drawingml/2006/chart" r:id="rId2"/>
-          </a:graphicData>
-        </a:graphic>
-      </p:graphicFrame>
-      <p:sp>
-        <p:nvSpPr>
-          <p:cNvPr id="4" name="P1"/>
-          <p:cNvSpPr>
-            <a:spLocks noGrp="1"/>
-          </p:cNvSpPr>
-          <p:nvPr>
-            <p:ph type="body" idx="20"/>
-          </p:nvPr>
-        </p:nvSpPr>
-        <p:spPr/>
-        <p:txBody>
-          <a:bodyPr/>
-          <a:lstStyle/>
-          <a:p>
-            <a:pPr/>
-            <a:r>
-              <a:rPr lang="th-TH" dirty="0"/>
-              <a:t>ด.1</a:t>
-            </a:r>
-          </a:p>
-        </p:txBody>
-      </p:sp>
-      <p:sp>
-        <p:nvSpPr>
-          <p:cNvPr id="5" name="P2"/>
-          <p:cNvSpPr>
-            <a:spLocks noGrp="1"/>
-          </p:cNvSpPr>
-          <p:nvPr>
-            <p:ph type="body" idx="21"/>
-          </p:nvPr>
-        </p:nvSpPr>
-        <p:spPr/>
-        <p:txBody>
-          <a:bodyPr/>
-          <a:lstStyle/>
-          <a:p>
-            <a:pPr/>
-            <a:r>
-              <a:rPr lang="th-TH" dirty="0"/>
-              <a:t>ด.2</a:t>
-            </a:r>
-          </a:p>
-        </p:txBody>
-      </p:sp>
-      <p:sp>
-        <p:nvSpPr>
-          <p:cNvPr id="6" name="P3"/>
-          <p:cNvSpPr>
-            <a:spLocks noGrp="1"/>
-          </p:cNvSpPr>
-          <p:nvPr>
-            <p:ph type="body" idx="22"/>
-          </p:nvPr>
-        </p:nvSpPr>
-        <p:spPr/>
-        <p:txBody>
-          <a:bodyPr/>
-          <a:lstStyle/>
-          <a:p>
-            <a:pPr/>
-            <a:r>
-              <a:rPr lang="th-TH" dirty="0"/>
-              <a:t>ด.3</a:t>
-            </a:r>
-          </a:p>
-        </p:txBody>
-      </p:sp>
-      <p:sp>
-        <p:nvSpPr>
-          <p:cNvPr id="7" name="P4"/>
-          <p:cNvSpPr>
-            <a:spLocks noGrp="1"/>
-          </p:cNvSpPr>
-          <p:nvPr>
-            <p:ph type="body" idx="23"/>
-          </p:nvPr>
-        </p:nvSpPr>
-        <p:spPr/>
-        <p:txBody>
-          <a:bodyPr/>
-          <a:lstStyle/>
-          <a:p>
-            <a:pPr/>
-            <a:r>
-              <a:rPr lang="th-TH" dirty="0"/>
-              <a:t>ด.4</a:t>
-            </a:r>
-          </a:p>
-        </p:txBody>
-      </p:sp>
-      <p:sp>
-        <p:nvSpPr>
-          <p:cNvPr id="8" name="P5"/>
-          <p:cNvSpPr>
-            <a:spLocks noGrp="1"/>
-          </p:cNvSpPr>
-          <p:nvPr>
-            <p:ph type="body" idx="24"/>
-          </p:nvPr>
-        </p:nvSpPr>
-        <p:spPr/>
-        <p:txBody>
-          <a:bodyPr/>
-          <a:lstStyle/>
-          <a:p>
-            <a:pPr/>
-            <a:r>
-              <a:rPr lang="th-TH" dirty="0"/>
-              <a:t>ด.5</a:t>
-            </a:r>
-          </a:p>
-        </p:txBody>
-      </p:sp>
-      <p:sp>
-        <p:nvSpPr>
-          <p:cNvPr id="9" name="P6"/>
-          <p:cNvSpPr>
-            <a:spLocks noGrp="1"/>
-          </p:cNvSpPr>
-          <p:nvPr>
-            <p:ph type="body" idx="25"/>
-          </p:nvPr>
-        </p:nvSpPr>
-        <p:spPr/>
-        <p:txBody>
-          <a:bodyPr/>
-          <a:lstStyle/>
-          <a:p>
-            <a:pPr/>
-            <a:r>
-              <a:rPr lang="th-TH" dirty="0"/>
-              <a:t>ด.6</a:t>
-            </a:r>
-          </a:p>
-        </p:txBody>
-      </p:sp>
-      <p:sp>
-        <p:nvSpPr>
-          <p:cNvPr id="10" name="P7"/>
-          <p:cNvSpPr>
-            <a:spLocks noGrp="1"/>
-          </p:cNvSpPr>
-          <p:nvPr>
-            <p:ph type="body" idx="26"/>
-          </p:nvPr>
-        </p:nvSpPr>
-        <p:spPr/>
-        <p:txBody>
-          <a:bodyPr/>
-          <a:lstStyle/>
-          <a:p>
-            <a:pPr/>
-            <a:r>
-              <a:rPr lang="th-TH" dirty="0"/>
-              <a:t>ด.7</a:t>
-            </a:r>
-          </a:p>
-        </p:txBody>
-      </p:sp>
-      <p:sp>
-        <p:nvSpPr>
-          <p:cNvPr id="11" name="P8"/>
-          <p:cNvSpPr>
-            <a:spLocks noGrp="1"/>
-          </p:cNvSpPr>
-          <p:nvPr>
-            <p:ph type="body" idx="27"/>
-          </p:nvPr>
-        </p:nvSpPr>
-        <p:spPr/>
-        <p:txBody>
-          <a:bodyPr/>
-          <a:lstStyle/>
-          <a:p>
-            <a:pPr/>
-            <a:r>
-              <a:rPr lang="th-TH" dirty="0"/>
-              <a:t>ด.8</a:t>
-            </a:r>
-          </a:p>
-        </p:txBody>
-      </p:sp>
-      <p:sp>
-        <p:nvSpPr>
-          <p:cNvPr id="12" name="P9"/>
-          <p:cNvSpPr>
-            <a:spLocks noGrp="1"/>
-          </p:cNvSpPr>
-          <p:nvPr>
-            <p:ph type="body" idx="28"/>
-          </p:nvPr>
-        </p:nvSpPr>
-        <p:spPr/>
-        <p:txBody>
-          <a:bodyPr/>
-          <a:lstStyle/>
-          <a:p>
-            <a:pPr/>
-            <a:r>
-              <a:rPr lang="th-TH" dirty="0"/>
-              <a:t>ด.9</a:t>
-            </a:r>
-          </a:p>
-        </p:txBody>
-      </p:sp>
-      <p:sp>
-        <p:nvSpPr>
-          <p:cNvPr id="13" name="P10"/>
-          <p:cNvSpPr>
-            <a:spLocks noGrp="1"/>
-          </p:cNvSpPr>
-          <p:nvPr>
-            <p:ph type="body" idx="29"/>
-          </p:nvPr>
-        </p:nvSpPr>
-        <p:spPr/>
-        <p:txBody>
-          <a:bodyPr/>
-          <a:lstStyle/>
-          <a:p>
-            <a:pPr/>
-            <a:r>
-              <a:rPr lang="th-TH" dirty="0"/>
-              <a:t>ด.10</a:t>
-            </a:r>
-          </a:p>
-        </p:txBody>
-      </p:sp>
-      <p:sp>
-        <p:nvSpPr>
-          <p:cNvPr id="14" name="P11"/>
-          <p:cNvSpPr>
-            <a:spLocks noGrp="1"/>
-          </p:cNvSpPr>
-          <p:nvPr>
-            <p:ph type="body" idx="30"/>
-          </p:nvPr>
-        </p:nvSpPr>
-        <p:spPr/>
-        <p:txBody>
-          <a:bodyPr/>
-          <a:lstStyle/>
-          <a:p>
-            <a:pPr/>
-            <a:r>
-              <a:rPr lang="th-TH" dirty="0"/>
-              <a:t>ด.11</a:t>
-            </a:r>
-          </a:p>
-        </p:txBody>
-      </p:sp>
-      <p:sp>
-        <p:nvSpPr>
-          <p:cNvPr id="15" name="P12"/>
-          <p:cNvSpPr>
-            <a:spLocks noGrp="1"/>
-          </p:cNvSpPr>
-          <p:nvPr>
-            <p:ph type="body" idx="31"/>
-          </p:nvPr>
-        </p:nvSpPr>
-        <p:spPr/>
-        <p:txBody>
-          <a:bodyPr/>
-          <a:lstStyle/>
-          <a:p>
-            <a:pPr/>
-            <a:r>
-              <a:rPr lang="th-TH" dirty="0"/>
-              <a:t>ด.12</a:t>
-            </a:r>
-          </a:p>
-        </p:txBody>
-      </p:sp>
-      <p:sp>
-        <p:nvSpPr>
-          <p:cNvPr id="16" name="R1"/>
-          <p:cNvSpPr>
-            <a:spLocks noGrp="1"/>
-          </p:cNvSpPr>
-          <p:nvPr>
-            <p:ph type="body" idx="32"/>
-          </p:nvPr>
-        </p:nvSpPr>
-        <p:spPr/>
-        <p:txBody>
-          <a:bodyPr/>
-          <a:lstStyle/>
-          <a:p>
-            <a:pPr/>
-            <a:r>
-              <a:rPr lang="th-TH" dirty="0"/>
-              <a:t>1. เตรียมระบบ</a:t>
-            </a:r>
-          </a:p>
-        </p:txBody>
-      </p:sp>
-      <p:sp>
-        <p:nvSpPr>
-          <p:cNvPr id="17" name="D1"/>
-          <p:cNvSpPr>
-            <a:spLocks noGrp="1"/>
-          </p:cNvSpPr>
-          <p:nvPr>
-            <p:ph type="body" idx="33"/>
-          </p:nvPr>
-        </p:nvSpPr>
-        <p:spPr/>
-        <p:txBody>
-          <a:bodyPr/>
-          <a:lstStyle/>
-          <a:p>
-            <a:pPr/>
-            <a:r>
-              <a:rPr lang="th-TH" dirty="0"/>
-              <a:t>4 สัปดาห์</a:t>
-            </a:r>
-          </a:p>
-        </p:txBody>
-      </p:sp>
-      <p:sp>
-        <p:nvSpPr>
-          <p:cNvPr id="18" name="R2"/>
-          <p:cNvSpPr>
-            <a:spLocks noGrp="1"/>
-          </p:cNvSpPr>
-          <p:nvPr>
-            <p:ph type="body" idx="34"/>
-          </p:nvPr>
-        </p:nvSpPr>
-        <p:spPr/>
-        <p:txBody>
-          <a:bodyPr/>
-          <a:lstStyle/>
-          <a:p>
-            <a:pPr/>
-            <a:r>
-              <a:rPr lang="th-TH" dirty="0"/>
-              <a:t>2. วิเคราะห์และออกแบบ</a:t>
-            </a:r>
-          </a:p>
-        </p:txBody>
-      </p:sp>
-      <p:sp>
-        <p:nvSpPr>
-          <p:cNvPr id="19" name="D2"/>
-          <p:cNvSpPr>
-            <a:spLocks noGrp="1"/>
-          </p:cNvSpPr>
-          <p:nvPr>
-            <p:ph type="body" idx="35"/>
-          </p:nvPr>
-        </p:nvSpPr>
-        <p:spPr/>
-        <p:txBody>
-          <a:bodyPr/>
-          <a:lstStyle/>
-          <a:p>
-            <a:pPr/>
-            <a:r>
-              <a:rPr lang="th-TH" dirty="0"/>
-              <a:t>6 สัปดาห์</a:t>
-            </a:r>
-          </a:p>
-        </p:txBody>
-      </p:sp>
-      <p:sp>
-        <p:nvSpPr>
-          <p:cNvPr id="20" name="R3"/>
-          <p:cNvSpPr>
-            <a:spLocks noGrp="1"/>
-          </p:cNvSpPr>
-          <p:nvPr>
-            <p:ph type="body" idx="36"/>
-          </p:nvPr>
-        </p:nvSpPr>
-        <p:spPr/>
-        <p:txBody>
-          <a:bodyPr/>
-          <a:lstStyle/>
-          <a:p>
-            <a:pPr/>
-            <a:r>
-              <a:rPr lang="th-TH" dirty="0"/>
-              <a:t>3. พัฒนาและตั้งค่าระบบ</a:t>
-            </a:r>
-          </a:p>
-        </p:txBody>
-      </p:sp>
-      <p:sp>
-        <p:nvSpPr>
-          <p:cNvPr id="21" name="D3"/>
-          <p:cNvSpPr>
-            <a:spLocks noGrp="1"/>
-          </p:cNvSpPr>
-          <p:nvPr>
-            <p:ph type="body" idx="37"/>
-          </p:nvPr>
-        </p:nvSpPr>
-        <p:spPr/>
-        <p:txBody>
-          <a:bodyPr/>
-          <a:lstStyle/>
-          <a:p>
-            <a:pPr/>
-            <a:r>
-              <a:rPr lang="th-TH" dirty="0"/>
-              <a:t>10 สัปดาห์</a:t>
-            </a:r>
-          </a:p>
-        </p:txBody>
-      </p:sp>
-      <p:sp>
-        <p:nvSpPr>
-          <p:cNvPr id="22" name="R4"/>
-          <p:cNvSpPr>
-            <a:spLocks noGrp="1"/>
-          </p:cNvSpPr>
-          <p:nvPr>
-            <p:ph type="body" idx="38"/>
-          </p:nvPr>
-        </p:nvSpPr>
-        <p:spPr/>
-        <p:txBody>
-          <a:bodyPr/>
-          <a:lstStyle/>
-          <a:p>
-            <a:pPr/>
-            <a:r>
-              <a:rPr lang="th-TH" dirty="0"/>
-              <a:t>4. ทดสอบ UAT</a:t>
-            </a:r>
-          </a:p>
-        </p:txBody>
-      </p:sp>
-      <p:sp>
-        <p:nvSpPr>
-          <p:cNvPr id="23" name="D4"/>
-          <p:cNvSpPr>
-            <a:spLocks noGrp="1"/>
-          </p:cNvSpPr>
-          <p:nvPr>
-            <p:ph type="body" idx="39"/>
-          </p:nvPr>
-        </p:nvSpPr>
-        <p:spPr/>
-        <p:txBody>
-          <a:bodyPr/>
-          <a:lstStyle/>
-          <a:p>
-            <a:pPr/>
-            <a:r>
-              <a:rPr lang="th-TH" dirty="0"/>
-              <a:t>4 สัปดาห์</a:t>
-            </a:r>
-          </a:p>
-        </p:txBody>
-      </p:sp>
-      <p:sp>
-        <p:nvSpPr>
-          <p:cNvPr id="24" name="R5"/>
-          <p:cNvSpPr>
-            <a:spLocks noGrp="1"/>
-          </p:cNvSpPr>
-          <p:nvPr>
-            <p:ph type="body" idx="40"/>
-          </p:nvPr>
-        </p:nvSpPr>
-        <p:spPr/>
-        <p:txBody>
-          <a:bodyPr/>
-          <a:lstStyle/>
-          <a:p>
-            <a:pPr/>
-            <a:r>
-              <a:rPr lang="th-TH" dirty="0"/>
-              <a:t>5. อบรมผู้ใช้</a:t>
-            </a:r>
-          </a:p>
-        </p:txBody>
-      </p:sp>
-      <p:sp>
-        <p:nvSpPr>
-          <p:cNvPr id="25" name="D5"/>
-          <p:cNvSpPr>
-            <a:spLocks noGrp="1"/>
-          </p:cNvSpPr>
-          <p:nvPr>
-            <p:ph type="body" idx="41"/>
-          </p:nvPr>
-        </p:nvSpPr>
-        <p:spPr/>
-        <p:txBody>
-          <a:bodyPr/>
-          <a:lstStyle/>
-          <a:p>
-            <a:pPr/>
-            <a:r>
-              <a:rPr lang="th-TH" dirty="0"/>
-              <a:t>1 สัปดาห์</a:t>
-            </a:r>
-          </a:p>
-        </p:txBody>
-      </p:sp>
-      <p:sp>
-        <p:nvSpPr>
-          <p:cNvPr id="26" name="R6"/>
-          <p:cNvSpPr>
-            <a:spLocks noGrp="1"/>
-          </p:cNvSpPr>
-          <p:nvPr>
-            <p:ph type="body" idx="42"/>
-          </p:nvPr>
-        </p:nvSpPr>
-        <p:spPr/>
-        <p:txBody>
-          <a:bodyPr/>
-          <a:lstStyle/>
-          <a:p>
-            <a:pPr/>
-            <a:r>
-              <a:rPr lang="th-TH" dirty="0"/>
-              <a:t>6. ขึ้นระบบ</a:t>
-            </a:r>
-          </a:p>
-        </p:txBody>
-      </p:sp>
-      <p:sp>
-        <p:nvSpPr>
-          <p:cNvPr id="27" name="D6"/>
-          <p:cNvSpPr>
-            <a:spLocks noGrp="1"/>
-          </p:cNvSpPr>
-          <p:nvPr>
-            <p:ph type="body" idx="43"/>
-          </p:nvPr>
-        </p:nvSpPr>
-        <p:spPr/>
-        <p:txBody>
-          <a:bodyPr/>
-          <a:lstStyle/>
-          <a:p>
-            <a:pPr/>
-            <a:r>
-              <a:rPr lang="th-TH" dirty="0"/>
-              <a:t>2 สัปดาห์</a:t>
-            </a:r>
-          </a:p>
-        </p:txBody>
-      </p:sp>
-      <p:sp>
-        <p:nvSpPr>
-          <p:cNvPr id="28" name="R7"/>
-          <p:cNvSpPr>
-            <a:spLocks noGrp="1"/>
-          </p:cNvSpPr>
-          <p:nvPr>
-            <p:ph type="body" idx="44"/>
-          </p:nvPr>
-        </p:nvSpPr>
-        <p:spPr/>
-        <p:txBody>
-          <a:bodyPr/>
-          <a:lstStyle/>
-          <a:p>
-            <a:pPr/>
-            <a:r>
-              <a:rPr lang="th-TH" dirty="0"/>
-              <a:t>7. ดูแลหลังขึ้นระบบ</a:t>
-            </a:r>
-          </a:p>
-        </p:txBody>
-      </p:sp>
-      <p:sp>
-        <p:nvSpPr>
-          <p:cNvPr id="29" name="D7"/>
-          <p:cNvSpPr>
-            <a:spLocks noGrp="1"/>
-          </p:cNvSpPr>
-          <p:nvPr>
-            <p:ph type="body" idx="45"/>
-          </p:nvPr>
-        </p:nvSpPr>
-        <p:spPr/>
-        <p:txBody>
-          <a:bodyPr/>
-          <a:lstStyle/>
-          <a:p>
-            <a:pPr/>
-            <a:r>
-              <a:rPr lang="th-TH" dirty="0"/>
-              <a:t>3 เดือน</a:t>
-            </a:r>
-          </a:p>
-        </p:txBody>
-      </p:sp>
-      <p:sp>
-        <p:nvSpPr>
-          <p:cNvPr id="30" name="R8"/>
-          <p:cNvSpPr>
-            <a:spLocks noGrp="1"/>
-          </p:cNvSpPr>
-          <p:nvPr>
-            <p:ph type="body" idx="46"/>
-          </p:nvPr>
-        </p:nvSpPr>
-        <p:spPr/>
-        <p:txBody>
-          <a:bodyPr/>
-          <a:lstStyle/>
-          <a:p>
-            <a:pPr/>
-            <a:r>
-              <a:rPr lang="th-TH" dirty="0"/>
-              <a:t>8. รับประกันระบบ</a:t>
-            </a:r>
-          </a:p>
-        </p:txBody>
-      </p:sp>
-      <p:sp>
-        <p:nvSpPr>
-          <p:cNvPr id="31" name="D8"/>
-          <p:cNvSpPr>
-            <a:spLocks noGrp="1"/>
-          </p:cNvSpPr>
-          <p:nvPr>
-            <p:ph type="body" idx="47"/>
-          </p:nvPr>
-        </p:nvSpPr>
-        <p:spPr/>
-        <p:txBody>
-          <a:bodyPr/>
-          <a:lstStyle/>
-          <a:p>
-            <a:pPr/>
-            <a:r>
-              <a:rPr lang="th-TH" dirty="0"/>
-              <a:t>2.5 เดือน</a:t>
-            </a:r>
-          </a:p>
-        </p:txBody>
-      </p:sp>
-      <p:sp>
-        <p:nvSpPr>
-          <p:cNvPr id="32" name="Key"/>
-          <p:cNvSpPr>
-            <a:spLocks noGrp="1"/>
-          </p:cNvSpPr>
-          <p:nvPr>
-            <p:ph type="body" idx="2"/>
-          </p:nvPr>
-        </p:nvSpPr>
-        <p:spPr/>
-        <p:txBody>
-          <a:bodyPr/>
-          <a:lstStyle/>
-          <a:p>
-            <a:pPr/>
-            <a:r>
-              <a:rPr lang="th-TH" dirty="0"/>
-              <a:t>■ ช่วงงาน   ◆ ส่งมอบ / ตรวจรับ</a:t>
-            </a:r>
-          </a:p>
-        </p:txBody>
-      </p:sp>
-      <p:sp>
-        <p:nvSpPr>
-          <p:cNvPr id="33" name="Asm"/>
-          <p:cNvSpPr>
-            <a:spLocks noGrp="1"/>
-          </p:cNvSpPr>
-          <p:nvPr>
-            <p:ph type="body" idx="3"/>
-          </p:nvPr>
-        </p:nvSpPr>
-        <p:spPr/>
-        <p:txBody>
-          <a:bodyPr/>
-          <a:lstStyle/>
-          <a:p>
-            <a:pPr/>
-            <a:r>
-              <a:rPr lang="th-TH" dirty="0"/>
-              <a:t>นับจากวันลงนามสัญญา · หน่วย: เดือน</a:t>
-            </a:r>
-          </a:p>
-        </p:txBody>
-      </p:sp>
-      <p:sp>
-        <p:nvSpPr>
-          <p:cNvPr id="34" name="TL"/>
-          <p:cNvSpPr>
-            <a:spLocks noGrp="1"/>
-          </p:cNvSpPr>
-          <p:nvPr>
-            <p:ph type="body" idx="4"/>
-          </p:nvPr>
-        </p:nvSpPr>
-        <p:spPr/>
-        <p:txBody>
-          <a:bodyPr/>
-          <a:lstStyle/>
-          <a:p>
-            <a:pPr/>
-            <a:r>
-              <a:rPr lang="th-TH" dirty="0"/>
-              <a:t>สรุป</a:t>
-            </a:r>
-          </a:p>
-        </p:txBody>
-      </p:sp>
-      <p:sp>
-        <p:nvSpPr>
-          <p:cNvPr id="35" name="TC"/>
-          <p:cNvSpPr>
-            <a:spLocks noGrp="1"/>
-          </p:cNvSpPr>
-          <p:nvPr>
-            <p:ph type="body" idx="5"/>
-          </p:nvPr>
-        </p:nvSpPr>
-        <p:spPr/>
-        <p:txBody>
-          <a:bodyPr/>
-          <a:lstStyle/>
-          <a:p>
-            <a:pPr/>
-            <a:r>
-              <a:rPr lang="th-TH" dirty="0"/>
-              <a:t>ขึ้นระบบต้นเดือนที่ 7 ตรวจรับ 3 งวดตามจุดส่งมอบ</a:t>
-            </a:r>
-          </a:p>
-        </p:txBody>
-      </p:sp>
-      <p:sp>
-        <p:nvSpPr>
-          <p:cNvPr id="36" name="Milestone 2"/>
-          <p:cNvSpPr/>
-          <p:nvPr/>
-        </p:nvSpPr>
-        <p:spPr>
-          <a:xfrm>
-            <a:off x="5099558" y="2567178"/>
-            <a:ext cx="146304" cy="146304"/>
-          </a:xfrm>
-          <a:prstGeom prst="diamond">
-            <a:avLst/>
-          </a:prstGeom>
-          <a:solidFill>
-            <a:srgbClr val="BB731B"/>
-          </a:solidFill>
-          <a:ln w="19050">
-            <a:solidFill>
-              <a:srgbClr val="FFFFFF"/>
-            </a:solidFill>
-          </a:ln>
-        </p:spPr>
-        <p:txBody>
-          <a:bodyPr/>
-          <a:lstStyle/>
-          <a:p>
-            <a:endParaRPr lang="th-TH"/>
-          </a:p>
-        </p:txBody>
-      </p:sp>
-      <p:sp>
-        <p:nvSpPr>
-          <p:cNvPr id="37" name="Milestone 2 Label"/>
-          <p:cNvSpPr/>
-          <p:nvPr/>
-        </p:nvSpPr>
-        <p:spPr>
-          <a:xfrm>
-            <a:off x="5291582" y="2446020"/>
-            <a:ext cx="1463040" cy="388620"/>
-          </a:xfrm>
-          <a:prstGeom prst="rect">
-            <a:avLst/>
-          </a:prstGeom>
-          <a:noFill/>
-          <a:ln>
-            <a:noFill/>
-          </a:ln>
-        </p:spPr>
-        <p:txBody>
-          <a:bodyPr wrap="square" anchor="ctr" lIns="0" tIns="0" rIns="0" bIns="0" rtlCol="0"/>
-          <a:lstStyle/>
-          <a:p>
-            <a:pPr algn="l" marL="0" indent="0">
-              <a:lnSpc>
-                <a:spcPct val="100000"/>
-              </a:lnSpc>
-              <a:buNone/>
-            </a:pPr>
-            <a:r>
-              <a:rPr lang="th-TH" sz="1000" dirty="0">
-                <a:solidFill>
-                  <a:srgbClr val="5F5F5F"/>
-                </a:solidFill>
-                <a:latin typeface="+mn-lt"/>
-                <a:ea typeface="+mn-ea"/>
-                <a:cs typeface="+mn-cs"/>
-              </a:rPr>
-              <a:t>ตรวจรับงวด 1</a:t>
-            </a:r>
-          </a:p>
-        </p:txBody>
-      </p:sp>
-      <p:sp>
-        <p:nvSpPr>
-          <p:cNvPr id="38" name="Milestone 4"/>
-          <p:cNvSpPr/>
-          <p:nvPr/>
-        </p:nvSpPr>
-        <p:spPr>
-          <a:xfrm>
-            <a:off x="7348728" y="3344418"/>
-            <a:ext cx="146304" cy="146304"/>
-          </a:xfrm>
-          <a:prstGeom prst="diamond">
-            <a:avLst/>
-          </a:prstGeom>
-          <a:solidFill>
-            <a:srgbClr val="BB731B"/>
-          </a:solidFill>
-          <a:ln w="19050">
-            <a:solidFill>
-              <a:srgbClr val="FFFFFF"/>
-            </a:solidFill>
-          </a:ln>
-        </p:spPr>
-        <p:txBody>
-          <a:bodyPr/>
-          <a:lstStyle/>
-          <a:p>
-            <a:endParaRPr lang="th-TH"/>
-          </a:p>
-        </p:txBody>
-      </p:sp>
-      <p:sp>
-        <p:nvSpPr>
-          <p:cNvPr id="39" name="Milestone 4 Label"/>
-          <p:cNvSpPr/>
-          <p:nvPr/>
-        </p:nvSpPr>
-        <p:spPr>
-          <a:xfrm>
-            <a:off x="7540752" y="3223260"/>
-            <a:ext cx="1463040" cy="388620"/>
-          </a:xfrm>
-          <a:prstGeom prst="rect">
-            <a:avLst/>
-          </a:prstGeom>
-          <a:noFill/>
-          <a:ln>
-            <a:noFill/>
-          </a:ln>
-        </p:spPr>
-        <p:txBody>
-          <a:bodyPr wrap="square" anchor="ctr" lIns="0" tIns="0" rIns="0" bIns="0" rtlCol="0"/>
-          <a:lstStyle/>
-          <a:p>
-            <a:pPr algn="l" marL="0" indent="0">
-              <a:lnSpc>
-                <a:spcPct val="100000"/>
-              </a:lnSpc>
-              <a:buNone/>
-            </a:pPr>
-            <a:r>
-              <a:rPr lang="th-TH" sz="1000" dirty="0">
-                <a:solidFill>
-                  <a:srgbClr val="5F5F5F"/>
-                </a:solidFill>
-                <a:latin typeface="+mn-lt"/>
-                <a:ea typeface="+mn-ea"/>
-                <a:cs typeface="+mn-cs"/>
-              </a:rPr>
-              <a:t>ตรวจรับงวด 2</a:t>
-            </a:r>
-          </a:p>
-        </p:txBody>
-      </p:sp>
-      <p:sp>
-        <p:nvSpPr>
-          <p:cNvPr id="40" name="Milestone 7"/>
-          <p:cNvSpPr/>
-          <p:nvPr/>
-        </p:nvSpPr>
-        <p:spPr>
-          <a:xfrm>
-            <a:off x="9597898" y="4510278"/>
-            <a:ext cx="146304" cy="146304"/>
-          </a:xfrm>
-          <a:prstGeom prst="diamond">
-            <a:avLst/>
-          </a:prstGeom>
-          <a:solidFill>
-            <a:srgbClr val="BB731B"/>
-          </a:solidFill>
-          <a:ln w="19050">
-            <a:solidFill>
-              <a:srgbClr val="FFFFFF"/>
-            </a:solidFill>
-          </a:ln>
-        </p:spPr>
-        <p:txBody>
-          <a:bodyPr/>
-          <a:lstStyle/>
-          <a:p>
-            <a:endParaRPr lang="th-TH"/>
-          </a:p>
-        </p:txBody>
-      </p:sp>
-      <p:sp>
-        <p:nvSpPr>
-          <p:cNvPr id="41" name="Milestone 7 Label"/>
-          <p:cNvSpPr/>
-          <p:nvPr/>
-        </p:nvSpPr>
-        <p:spPr>
-          <a:xfrm>
-            <a:off x="9789922" y="4389120"/>
-            <a:ext cx="1463040" cy="388620"/>
-          </a:xfrm>
-          <a:prstGeom prst="rect">
-            <a:avLst/>
-          </a:prstGeom>
-          <a:noFill/>
-          <a:ln>
-            <a:noFill/>
-          </a:ln>
-        </p:spPr>
-        <p:txBody>
-          <a:bodyPr wrap="square" anchor="ctr" lIns="0" tIns="0" rIns="0" bIns="0" rtlCol="0"/>
-          <a:lstStyle/>
-          <a:p>
-            <a:pPr algn="l" marL="0" indent="0">
-              <a:lnSpc>
-                <a:spcPct val="100000"/>
-              </a:lnSpc>
-              <a:buNone/>
-            </a:pPr>
-            <a:r>
-              <a:rPr lang="th-TH" sz="1000" dirty="0">
-                <a:solidFill>
-                  <a:srgbClr val="5F5F5F"/>
-                </a:solidFill>
-                <a:latin typeface="+mn-lt"/>
-                <a:ea typeface="+mn-ea"/>
-                <a:cs typeface="+mn-cs"/>
-              </a:rPr>
-              <a:t>ตรวจรับงวด 3</a:t>
-            </a:r>
-          </a:p>
-        </p:txBody>
-      </p:sp>
-    </p:spTree>
-  </p:cSld>
-  <p:clrMapOvr>
-    <a:masterClrMapping/>
-  </p:clrMapOvr>
-</p:sld>
-</file>
-
 <file path=ppt/slides/slide2.xml><?xml version="1.0" encoding="utf-8"?>
 <p:sld xmlns:a="http://schemas.openxmlformats.org/drawingml/2006/main" xmlns:r="http://schemas.openxmlformats.org/officeDocument/2006/relationships" xmlns:p="http://schemas.openxmlformats.org/presentationml/2006/main">
   <p:cSld name="">
@@ -29715,83 +31213,14 @@
             <a:pPr/>
             <a:r>
               <a:rPr lang="th-TH" dirty="0"/>
-              <a:t>ครึ่งหนึ่งของงบ 4.8 ล้านบาท คือค่าพัฒนาระบบ</a:t>
-            </a:r>
-          </a:p>
-        </p:txBody>
-      </p:sp>
-      <p:sp>
-        <p:nvSpPr>
-          <p:cNvPr id="3" name="Total"/>
-          <p:cNvSpPr>
-            <a:spLocks noGrp="1"/>
-          </p:cNvSpPr>
-          <p:nvPr>
-            <p:ph type="body" idx="2"/>
-          </p:nvPr>
-        </p:nvSpPr>
-        <p:spPr/>
-        <p:txBody>
-          <a:bodyPr/>
-          <a:lstStyle/>
-          <a:p>
-            <a:pPr/>
-            <a:r>
-              <a:rPr lang="th-TH" dirty="0"/>
-              <a:t>4.8 ล้านบาท</a:t>
-            </a:r>
-          </a:p>
-        </p:txBody>
-      </p:sp>
-      <p:sp>
-        <p:nvSpPr>
-          <p:cNvPr id="4" name="TotalL"/>
-          <p:cNvSpPr>
-            <a:spLocks noGrp="1"/>
-          </p:cNvSpPr>
-          <p:nvPr>
-            <p:ph type="body" idx="3"/>
-          </p:nvPr>
-        </p:nvSpPr>
-        <p:spPr/>
-        <p:txBody>
-          <a:bodyPr/>
-          <a:lstStyle/>
-          <a:p>
-            <a:pPr/>
-            <a:r>
-              <a:rPr lang="th-TH" dirty="0"/>
-              <a:t>งบโครงการรวมทั้งสิ้น</a:t>
-            </a:r>
-          </a:p>
-        </p:txBody>
-      </p:sp>
-      <p:sp>
-        <p:nvSpPr>
-          <p:cNvPr id="5" name="Intro"/>
-          <p:cNvSpPr>
-            <a:spLocks noGrp="1"/>
-          </p:cNvSpPr>
-          <p:nvPr>
-            <p:ph type="body" idx="4"/>
-          </p:nvPr>
-        </p:nvSpPr>
-        <p:spPr/>
-        <p:txBody>
-          <a:bodyPr/>
-          <a:lstStyle/>
-          <a:p>
-            <a:pPr/>
-            <a:r>
-              <a:rPr lang="th-TH" dirty="0"/>
-              <a:t>รวมภาษีมูลค่าเพิ่ม · สัญญา 12 เดือน ไม่รวมค่าบริการรายเดือนหลังปีแรก</a:t>
+              <a:t>แผนงาน 12 เดือน ขึ้นระบบต้นเดือนที่ 7</a:t>
             </a:r>
           </a:p>
         </p:txBody>
       </p:sp>
       <p:graphicFrame>
         <p:nvGraphicFramePr>
-          <p:cNvPr id="6" name="Composition"/>
+          <p:cNvPr id="3" name="Plan"/>
           <p:cNvGraphicFramePr>
             <a:graphicFrameLocks noGrp="1"/>
           </p:cNvGraphicFramePr>
@@ -29800,8 +31229,8 @@
           </p:nvPr>
         </p:nvGraphicFramePr>
         <p:xfrm>
-          <a:off x="2697480" y="3703320"/>
-          <a:ext cx="7299960" cy="1371600"/>
+          <a:off x="3566160" y="2057400"/>
+          <a:ext cx="7711440" cy="3108960"/>
         </p:xfrm>
         <a:graphic>
           <a:graphicData uri="http://schemas.openxmlformats.org/drawingml/2006/chart">
@@ -29811,7 +31240,7 @@
       </p:graphicFrame>
       <p:sp>
         <p:nvSpPr>
-          <p:cNvPr id="7" name="B1"/>
+          <p:cNvPr id="4" name="P1"/>
           <p:cNvSpPr>
             <a:spLocks noGrp="1"/>
           </p:cNvSpPr>
@@ -29827,14 +31256,129 @@
             <a:pPr/>
             <a:r>
               <a:rPr lang="th-TH" dirty="0"/>
-              <a:t>งบโครงการ</a:t>
-            </a:r>
-          </a:p>
-        </p:txBody>
-      </p:sp>
-      <p:sp>
-        <p:nvSpPr>
-          <p:cNvPr id="8" name="SN"/>
+              <a:t>ด.1</a:t>
+            </a:r>
+          </a:p>
+        </p:txBody>
+      </p:sp>
+      <p:sp>
+        <p:nvSpPr>
+          <p:cNvPr id="5" name="P2"/>
+          <p:cNvSpPr>
+            <a:spLocks noGrp="1"/>
+          </p:cNvSpPr>
+          <p:nvPr>
+            <p:ph type="body" idx="21"/>
+          </p:nvPr>
+        </p:nvSpPr>
+        <p:spPr/>
+        <p:txBody>
+          <a:bodyPr/>
+          <a:lstStyle/>
+          <a:p>
+            <a:pPr/>
+            <a:r>
+              <a:rPr lang="th-TH" dirty="0"/>
+              <a:t>ด.2</a:t>
+            </a:r>
+          </a:p>
+        </p:txBody>
+      </p:sp>
+      <p:sp>
+        <p:nvSpPr>
+          <p:cNvPr id="6" name="P3"/>
+          <p:cNvSpPr>
+            <a:spLocks noGrp="1"/>
+          </p:cNvSpPr>
+          <p:nvPr>
+            <p:ph type="body" idx="22"/>
+          </p:nvPr>
+        </p:nvSpPr>
+        <p:spPr/>
+        <p:txBody>
+          <a:bodyPr/>
+          <a:lstStyle/>
+          <a:p>
+            <a:pPr/>
+            <a:r>
+              <a:rPr lang="th-TH" dirty="0"/>
+              <a:t>ด.3</a:t>
+            </a:r>
+          </a:p>
+        </p:txBody>
+      </p:sp>
+      <p:sp>
+        <p:nvSpPr>
+          <p:cNvPr id="7" name="P4"/>
+          <p:cNvSpPr>
+            <a:spLocks noGrp="1"/>
+          </p:cNvSpPr>
+          <p:nvPr>
+            <p:ph type="body" idx="23"/>
+          </p:nvPr>
+        </p:nvSpPr>
+        <p:spPr/>
+        <p:txBody>
+          <a:bodyPr/>
+          <a:lstStyle/>
+          <a:p>
+            <a:pPr/>
+            <a:r>
+              <a:rPr lang="th-TH" dirty="0"/>
+              <a:t>ด.4</a:t>
+            </a:r>
+          </a:p>
+        </p:txBody>
+      </p:sp>
+      <p:sp>
+        <p:nvSpPr>
+          <p:cNvPr id="8" name="P5"/>
+          <p:cNvSpPr>
+            <a:spLocks noGrp="1"/>
+          </p:cNvSpPr>
+          <p:nvPr>
+            <p:ph type="body" idx="24"/>
+          </p:nvPr>
+        </p:nvSpPr>
+        <p:spPr/>
+        <p:txBody>
+          <a:bodyPr/>
+          <a:lstStyle/>
+          <a:p>
+            <a:pPr/>
+            <a:r>
+              <a:rPr lang="th-TH" dirty="0"/>
+              <a:t>ด.5</a:t>
+            </a:r>
+          </a:p>
+        </p:txBody>
+      </p:sp>
+      <p:sp>
+        <p:nvSpPr>
+          <p:cNvPr id="9" name="P6"/>
+          <p:cNvSpPr>
+            <a:spLocks noGrp="1"/>
+          </p:cNvSpPr>
+          <p:nvPr>
+            <p:ph type="body" idx="25"/>
+          </p:nvPr>
+        </p:nvSpPr>
+        <p:spPr/>
+        <p:txBody>
+          <a:bodyPr/>
+          <a:lstStyle/>
+          <a:p>
+            <a:pPr/>
+            <a:r>
+              <a:rPr lang="th-TH" dirty="0"/>
+              <a:t>ด.6</a:t>
+            </a:r>
+          </a:p>
+        </p:txBody>
+      </p:sp>
+      <p:sp>
+        <p:nvSpPr>
+          <p:cNvPr id="10" name="P7"/>
           <p:cNvSpPr>
             <a:spLocks noGrp="1"/>
           </p:cNvSpPr>
@@ -29850,14 +31394,14 @@
             <a:pPr/>
             <a:r>
               <a:rPr lang="th-TH" dirty="0"/>
-              <a:t>พัฒนาและตั้งค่าระบบ</a:t>
-            </a:r>
-          </a:p>
-        </p:txBody>
-      </p:sp>
-      <p:sp>
-        <p:nvSpPr>
-          <p:cNvPr id="9" name="SV"/>
+              <a:t>ด.7</a:t>
+            </a:r>
+          </a:p>
+        </p:txBody>
+      </p:sp>
+      <p:sp>
+        <p:nvSpPr>
+          <p:cNvPr id="11" name="P8"/>
           <p:cNvSpPr>
             <a:spLocks noGrp="1"/>
           </p:cNvSpPr>
@@ -29873,14 +31417,14 @@
             <a:pPr/>
             <a:r>
               <a:rPr lang="th-TH" dirty="0"/>
-              <a:t>2.4 ล้านบาท</a:t>
-            </a:r>
-          </a:p>
-        </p:txBody>
-      </p:sp>
-      <p:sp>
-        <p:nvSpPr>
-          <p:cNvPr id="10" name="SP"/>
+              <a:t>ด.8</a:t>
+            </a:r>
+          </a:p>
+        </p:txBody>
+      </p:sp>
+      <p:sp>
+        <p:nvSpPr>
+          <p:cNvPr id="12" name="P9"/>
           <p:cNvSpPr>
             <a:spLocks noGrp="1"/>
           </p:cNvSpPr>
@@ -29896,14 +31440,14 @@
             <a:pPr/>
             <a:r>
               <a:rPr lang="th-TH" dirty="0"/>
-              <a:t>50%</a:t>
-            </a:r>
-          </a:p>
-        </p:txBody>
-      </p:sp>
-      <p:sp>
-        <p:nvSpPr>
-          <p:cNvPr id="11" name="SN"/>
+              <a:t>ด.9</a:t>
+            </a:r>
+          </a:p>
+        </p:txBody>
+      </p:sp>
+      <p:sp>
+        <p:nvSpPr>
+          <p:cNvPr id="13" name="P10"/>
           <p:cNvSpPr>
             <a:spLocks noGrp="1"/>
           </p:cNvSpPr>
@@ -29919,14 +31463,14 @@
             <a:pPr/>
             <a:r>
               <a:rPr lang="th-TH" dirty="0"/>
-              <a:t>ไลเซนส์ซอฟต์แวร์</a:t>
-            </a:r>
-          </a:p>
-        </p:txBody>
-      </p:sp>
-      <p:sp>
-        <p:nvSpPr>
-          <p:cNvPr id="12" name="SV"/>
+              <a:t>ด.10</a:t>
+            </a:r>
+          </a:p>
+        </p:txBody>
+      </p:sp>
+      <p:sp>
+        <p:nvSpPr>
+          <p:cNvPr id="14" name="P11"/>
           <p:cNvSpPr>
             <a:spLocks noGrp="1"/>
           </p:cNvSpPr>
@@ -29942,14 +31486,14 @@
             <a:pPr/>
             <a:r>
               <a:rPr lang="th-TH" dirty="0"/>
-              <a:t>1.2 ล้านบาท</a:t>
-            </a:r>
-          </a:p>
-        </p:txBody>
-      </p:sp>
-      <p:sp>
-        <p:nvSpPr>
-          <p:cNvPr id="13" name="SP"/>
+              <a:t>ด.11</a:t>
+            </a:r>
+          </a:p>
+        </p:txBody>
+      </p:sp>
+      <p:sp>
+        <p:nvSpPr>
+          <p:cNvPr id="15" name="P12"/>
           <p:cNvSpPr>
             <a:spLocks noGrp="1"/>
           </p:cNvSpPr>
@@ -29965,14 +31509,14 @@
             <a:pPr/>
             <a:r>
               <a:rPr lang="th-TH" dirty="0"/>
-              <a:t>25%</a:t>
-            </a:r>
-          </a:p>
-        </p:txBody>
-      </p:sp>
-      <p:sp>
-        <p:nvSpPr>
-          <p:cNvPr id="14" name="SN"/>
+              <a:t>ด.12</a:t>
+            </a:r>
+          </a:p>
+        </p:txBody>
+      </p:sp>
+      <p:sp>
+        <p:nvSpPr>
+          <p:cNvPr id="16" name="R1"/>
           <p:cNvSpPr>
             <a:spLocks noGrp="1"/>
           </p:cNvSpPr>
@@ -29988,14 +31532,14 @@
             <a:pPr/>
             <a:r>
               <a:rPr lang="th-TH" dirty="0"/>
-              <a:t>คลาวด์ปีแรก</a:t>
-            </a:r>
-          </a:p>
-        </p:txBody>
-      </p:sp>
-      <p:sp>
-        <p:nvSpPr>
-          <p:cNvPr id="15" name="SV"/>
+              <a:t>1. เตรียมระบบ</a:t>
+            </a:r>
+          </a:p>
+        </p:txBody>
+      </p:sp>
+      <p:sp>
+        <p:nvSpPr>
+          <p:cNvPr id="17" name="D1"/>
           <p:cNvSpPr>
             <a:spLocks noGrp="1"/>
           </p:cNvSpPr>
@@ -30011,14 +31555,14 @@
             <a:pPr/>
             <a:r>
               <a:rPr lang="th-TH" dirty="0"/>
-              <a:t>0.7 ล้านบาท</a:t>
-            </a:r>
-          </a:p>
-        </p:txBody>
-      </p:sp>
-      <p:sp>
-        <p:nvSpPr>
-          <p:cNvPr id="16" name="SP"/>
+              <a:t>4 สัปดาห์</a:t>
+            </a:r>
+          </a:p>
+        </p:txBody>
+      </p:sp>
+      <p:sp>
+        <p:nvSpPr>
+          <p:cNvPr id="18" name="R2"/>
           <p:cNvSpPr>
             <a:spLocks noGrp="1"/>
           </p:cNvSpPr>
@@ -30034,14 +31578,14 @@
             <a:pPr/>
             <a:r>
               <a:rPr lang="th-TH" dirty="0"/>
-              <a:t>15%</a:t>
-            </a:r>
-          </a:p>
-        </p:txBody>
-      </p:sp>
-      <p:sp>
-        <p:nvSpPr>
-          <p:cNvPr id="17" name="SN"/>
+              <a:t>2. วิเคราะห์และออกแบบ</a:t>
+            </a:r>
+          </a:p>
+        </p:txBody>
+      </p:sp>
+      <p:sp>
+        <p:nvSpPr>
+          <p:cNvPr id="19" name="D2"/>
           <p:cNvSpPr>
             <a:spLocks noGrp="1"/>
           </p:cNvSpPr>
@@ -30057,14 +31601,14 @@
             <a:pPr/>
             <a:r>
               <a:rPr lang="th-TH" dirty="0"/>
-              <a:t>อื่น ๆ</a:t>
-            </a:r>
-          </a:p>
-        </p:txBody>
-      </p:sp>
-      <p:sp>
-        <p:nvSpPr>
-          <p:cNvPr id="18" name="SV"/>
+              <a:t>6 สัปดาห์</a:t>
+            </a:r>
+          </a:p>
+        </p:txBody>
+      </p:sp>
+      <p:sp>
+        <p:nvSpPr>
+          <p:cNvPr id="20" name="R3"/>
           <p:cNvSpPr>
             <a:spLocks noGrp="1"/>
           </p:cNvSpPr>
@@ -30080,14 +31624,14 @@
             <a:pPr/>
             <a:r>
               <a:rPr lang="th-TH" dirty="0"/>
-              <a:t>0.5 ล้านบาท</a:t>
-            </a:r>
-          </a:p>
-        </p:txBody>
-      </p:sp>
-      <p:sp>
-        <p:nvSpPr>
-          <p:cNvPr id="19" name="SP"/>
+              <a:t>3. พัฒนาและตั้งค่าระบบ</a:t>
+            </a:r>
+          </a:p>
+        </p:txBody>
+      </p:sp>
+      <p:sp>
+        <p:nvSpPr>
+          <p:cNvPr id="21" name="D3"/>
           <p:cNvSpPr>
             <a:spLocks noGrp="1"/>
           </p:cNvSpPr>
@@ -30103,19 +31647,19 @@
             <a:pPr/>
             <a:r>
               <a:rPr lang="th-TH" dirty="0"/>
-              <a:t>10%</a:t>
-            </a:r>
-          </a:p>
-        </p:txBody>
-      </p:sp>
-      <p:sp>
-        <p:nvSpPr>
-          <p:cNvPr id="20" name="Src"/>
-          <p:cNvSpPr>
-            <a:spLocks noGrp="1"/>
-          </p:cNvSpPr>
-          <p:nvPr>
-            <p:ph type="body" idx="5"/>
+              <a:t>10 สัปดาห์</a:t>
+            </a:r>
+          </a:p>
+        </p:txBody>
+      </p:sp>
+      <p:sp>
+        <p:nvSpPr>
+          <p:cNvPr id="22" name="R4"/>
+          <p:cNvSpPr>
+            <a:spLocks noGrp="1"/>
+          </p:cNvSpPr>
+          <p:nvPr>
+            <p:ph type="body" idx="38"/>
           </p:nvPr>
         </p:nvSpPr>
         <p:spPr/>
@@ -30126,19 +31670,272 @@
             <a:pPr/>
             <a:r>
               <a:rPr lang="th-TH" dirty="0"/>
-              <a:t>ใบเสนอราคา NCT-2569-041 · ปัดเป็นแสนบาท</a:t>
-            </a:r>
-          </a:p>
-        </p:txBody>
-      </p:sp>
-      <p:sp>
-        <p:nvSpPr>
-          <p:cNvPr id="21" name="TL"/>
-          <p:cNvSpPr>
-            <a:spLocks noGrp="1"/>
-          </p:cNvSpPr>
-          <p:nvPr>
-            <p:ph type="body" idx="6"/>
+              <a:t>4. ทดสอบ UAT</a:t>
+            </a:r>
+          </a:p>
+        </p:txBody>
+      </p:sp>
+      <p:sp>
+        <p:nvSpPr>
+          <p:cNvPr id="23" name="D4"/>
+          <p:cNvSpPr>
+            <a:spLocks noGrp="1"/>
+          </p:cNvSpPr>
+          <p:nvPr>
+            <p:ph type="body" idx="39"/>
+          </p:nvPr>
+        </p:nvSpPr>
+        <p:spPr/>
+        <p:txBody>
+          <a:bodyPr/>
+          <a:lstStyle/>
+          <a:p>
+            <a:pPr/>
+            <a:r>
+              <a:rPr lang="th-TH" dirty="0"/>
+              <a:t>4 สัปดาห์</a:t>
+            </a:r>
+          </a:p>
+        </p:txBody>
+      </p:sp>
+      <p:sp>
+        <p:nvSpPr>
+          <p:cNvPr id="24" name="R5"/>
+          <p:cNvSpPr>
+            <a:spLocks noGrp="1"/>
+          </p:cNvSpPr>
+          <p:nvPr>
+            <p:ph type="body" idx="40"/>
+          </p:nvPr>
+        </p:nvSpPr>
+        <p:spPr/>
+        <p:txBody>
+          <a:bodyPr/>
+          <a:lstStyle/>
+          <a:p>
+            <a:pPr/>
+            <a:r>
+              <a:rPr lang="th-TH" dirty="0"/>
+              <a:t>5. อบรมผู้ใช้</a:t>
+            </a:r>
+          </a:p>
+        </p:txBody>
+      </p:sp>
+      <p:sp>
+        <p:nvSpPr>
+          <p:cNvPr id="25" name="D5"/>
+          <p:cNvSpPr>
+            <a:spLocks noGrp="1"/>
+          </p:cNvSpPr>
+          <p:nvPr>
+            <p:ph type="body" idx="41"/>
+          </p:nvPr>
+        </p:nvSpPr>
+        <p:spPr/>
+        <p:txBody>
+          <a:bodyPr/>
+          <a:lstStyle/>
+          <a:p>
+            <a:pPr/>
+            <a:r>
+              <a:rPr lang="th-TH" dirty="0"/>
+              <a:t>1 สัปดาห์</a:t>
+            </a:r>
+          </a:p>
+        </p:txBody>
+      </p:sp>
+      <p:sp>
+        <p:nvSpPr>
+          <p:cNvPr id="26" name="R6"/>
+          <p:cNvSpPr>
+            <a:spLocks noGrp="1"/>
+          </p:cNvSpPr>
+          <p:nvPr>
+            <p:ph type="body" idx="42"/>
+          </p:nvPr>
+        </p:nvSpPr>
+        <p:spPr/>
+        <p:txBody>
+          <a:bodyPr/>
+          <a:lstStyle/>
+          <a:p>
+            <a:pPr/>
+            <a:r>
+              <a:rPr lang="th-TH" dirty="0"/>
+              <a:t>6. ขึ้นระบบ</a:t>
+            </a:r>
+          </a:p>
+        </p:txBody>
+      </p:sp>
+      <p:sp>
+        <p:nvSpPr>
+          <p:cNvPr id="27" name="D6"/>
+          <p:cNvSpPr>
+            <a:spLocks noGrp="1"/>
+          </p:cNvSpPr>
+          <p:nvPr>
+            <p:ph type="body" idx="43"/>
+          </p:nvPr>
+        </p:nvSpPr>
+        <p:spPr/>
+        <p:txBody>
+          <a:bodyPr/>
+          <a:lstStyle/>
+          <a:p>
+            <a:pPr/>
+            <a:r>
+              <a:rPr lang="th-TH" dirty="0"/>
+              <a:t>2 สัปดาห์</a:t>
+            </a:r>
+          </a:p>
+        </p:txBody>
+      </p:sp>
+      <p:sp>
+        <p:nvSpPr>
+          <p:cNvPr id="28" name="R7"/>
+          <p:cNvSpPr>
+            <a:spLocks noGrp="1"/>
+          </p:cNvSpPr>
+          <p:nvPr>
+            <p:ph type="body" idx="44"/>
+          </p:nvPr>
+        </p:nvSpPr>
+        <p:spPr/>
+        <p:txBody>
+          <a:bodyPr/>
+          <a:lstStyle/>
+          <a:p>
+            <a:pPr/>
+            <a:r>
+              <a:rPr lang="th-TH" dirty="0"/>
+              <a:t>7. ดูแลหลังขึ้นระบบ</a:t>
+            </a:r>
+          </a:p>
+        </p:txBody>
+      </p:sp>
+      <p:sp>
+        <p:nvSpPr>
+          <p:cNvPr id="29" name="D7"/>
+          <p:cNvSpPr>
+            <a:spLocks noGrp="1"/>
+          </p:cNvSpPr>
+          <p:nvPr>
+            <p:ph type="body" idx="45"/>
+          </p:nvPr>
+        </p:nvSpPr>
+        <p:spPr/>
+        <p:txBody>
+          <a:bodyPr/>
+          <a:lstStyle/>
+          <a:p>
+            <a:pPr/>
+            <a:r>
+              <a:rPr lang="th-TH" dirty="0"/>
+              <a:t>3 เดือน</a:t>
+            </a:r>
+          </a:p>
+        </p:txBody>
+      </p:sp>
+      <p:sp>
+        <p:nvSpPr>
+          <p:cNvPr id="30" name="R8"/>
+          <p:cNvSpPr>
+            <a:spLocks noGrp="1"/>
+          </p:cNvSpPr>
+          <p:nvPr>
+            <p:ph type="body" idx="46"/>
+          </p:nvPr>
+        </p:nvSpPr>
+        <p:spPr/>
+        <p:txBody>
+          <a:bodyPr/>
+          <a:lstStyle/>
+          <a:p>
+            <a:pPr/>
+            <a:r>
+              <a:rPr lang="th-TH" dirty="0"/>
+              <a:t>8. รับประกันระบบ</a:t>
+            </a:r>
+          </a:p>
+        </p:txBody>
+      </p:sp>
+      <p:sp>
+        <p:nvSpPr>
+          <p:cNvPr id="31" name="D8"/>
+          <p:cNvSpPr>
+            <a:spLocks noGrp="1"/>
+          </p:cNvSpPr>
+          <p:nvPr>
+            <p:ph type="body" idx="47"/>
+          </p:nvPr>
+        </p:nvSpPr>
+        <p:spPr/>
+        <p:txBody>
+          <a:bodyPr/>
+          <a:lstStyle/>
+          <a:p>
+            <a:pPr/>
+            <a:r>
+              <a:rPr lang="th-TH" dirty="0"/>
+              <a:t>2.5 เดือน</a:t>
+            </a:r>
+          </a:p>
+        </p:txBody>
+      </p:sp>
+      <p:sp>
+        <p:nvSpPr>
+          <p:cNvPr id="32" name="Key"/>
+          <p:cNvSpPr>
+            <a:spLocks noGrp="1"/>
+          </p:cNvSpPr>
+          <p:nvPr>
+            <p:ph type="body" idx="2"/>
+          </p:nvPr>
+        </p:nvSpPr>
+        <p:spPr/>
+        <p:txBody>
+          <a:bodyPr/>
+          <a:lstStyle/>
+          <a:p>
+            <a:pPr/>
+            <a:r>
+              <a:rPr lang="th-TH" dirty="0"/>
+              <a:t>■ ช่วงงาน   ◆ ส่งมอบ / ตรวจรับ</a:t>
+            </a:r>
+          </a:p>
+        </p:txBody>
+      </p:sp>
+      <p:sp>
+        <p:nvSpPr>
+          <p:cNvPr id="33" name="Asm"/>
+          <p:cNvSpPr>
+            <a:spLocks noGrp="1"/>
+          </p:cNvSpPr>
+          <p:nvPr>
+            <p:ph type="body" idx="3"/>
+          </p:nvPr>
+        </p:nvSpPr>
+        <p:spPr/>
+        <p:txBody>
+          <a:bodyPr/>
+          <a:lstStyle/>
+          <a:p>
+            <a:pPr/>
+            <a:r>
+              <a:rPr lang="th-TH" dirty="0"/>
+              <a:t>นับจากวันลงนามสัญญา · หน่วย: เดือน</a:t>
+            </a:r>
+          </a:p>
+        </p:txBody>
+      </p:sp>
+      <p:sp>
+        <p:nvSpPr>
+          <p:cNvPr id="34" name="TL"/>
+          <p:cNvSpPr>
+            <a:spLocks noGrp="1"/>
+          </p:cNvSpPr>
+          <p:nvPr>
+            <p:ph type="body" idx="4"/>
           </p:nvPr>
         </p:nvSpPr>
         <p:spPr/>
@@ -30156,12 +31953,12 @@
       </p:sp>
       <p:sp>
         <p:nvSpPr>
-          <p:cNvPr id="22" name="TC"/>
-          <p:cNvSpPr>
-            <a:spLocks noGrp="1"/>
-          </p:cNvSpPr>
-          <p:nvPr>
-            <p:ph type="body" idx="7"/>
+          <p:cNvPr id="35" name="TC"/>
+          <p:cNvSpPr>
+            <a:spLocks noGrp="1"/>
+          </p:cNvSpPr>
+          <p:nvPr>
+            <p:ph type="body" idx="5"/>
           </p:nvPr>
         </p:nvSpPr>
         <p:spPr/>
@@ -30172,7 +31969,229 @@
             <a:pPr/>
             <a:r>
               <a:rPr lang="th-TH" dirty="0"/>
-              <a:t>ไลเซนส์กับคลาวด์รวมกันไม่ถึง 40% งบส่วนใหญ่จ่ายให้งานที่ทำครั้งเดียว</a:t>
+              <a:t>ขึ้นระบบต้นเดือนที่ 7 ตรวจรับ 3 งวดตามจุดส่งมอบ</a:t>
+            </a:r>
+          </a:p>
+        </p:txBody>
+      </p:sp>
+      <p:sp>
+        <p:nvSpPr>
+          <p:cNvPr id="36" name="Milestone 2"/>
+          <p:cNvSpPr/>
+          <p:nvPr/>
+        </p:nvSpPr>
+        <p:spPr>
+          <a:xfrm>
+            <a:off x="5099558" y="2567178"/>
+            <a:ext cx="146304" cy="146304"/>
+          </a:xfrm>
+          <a:prstGeom prst="diamond">
+            <a:avLst/>
+          </a:prstGeom>
+          <a:solidFill>
+            <a:srgbClr val="BB731B"/>
+          </a:solidFill>
+          <a:ln w="19050">
+            <a:solidFill>
+              <a:srgbClr val="FFFFFF"/>
+            </a:solidFill>
+          </a:ln>
+        </p:spPr>
+        <p:txBody>
+          <a:bodyPr/>
+          <a:lstStyle/>
+          <a:p>
+            <a:endParaRPr lang="th-TH"/>
+          </a:p>
+        </p:txBody>
+      </p:sp>
+      <p:sp>
+        <p:nvSpPr>
+          <p:cNvPr id="37" name="Milestone 2 Label"/>
+          <p:cNvSpPr/>
+          <p:nvPr/>
+        </p:nvSpPr>
+        <p:spPr>
+          <a:xfrm>
+            <a:off x="5291582" y="2446020"/>
+            <a:ext cx="1463040" cy="388620"/>
+          </a:xfrm>
+          <a:prstGeom prst="rect">
+            <a:avLst/>
+          </a:prstGeom>
+          <a:noFill/>
+          <a:ln>
+            <a:noFill/>
+          </a:ln>
+        </p:spPr>
+        <p:txBody>
+          <a:bodyPr wrap="square" anchor="ctr" lIns="0" tIns="0" rIns="0" bIns="0" rtlCol="0"/>
+          <a:lstStyle/>
+          <a:p>
+            <a:pPr algn="l" marL="0" indent="0">
+              <a:lnSpc>
+                <a:spcPct val="100000"/>
+              </a:lnSpc>
+              <a:buNone/>
+            </a:pPr>
+            <a:r>
+              <a:rPr lang="th-TH" sz="1000" dirty="0">
+                <a:solidFill>
+                  <a:srgbClr val="5F5F5F"/>
+                </a:solidFill>
+                <a:latin typeface="+mn-lt"/>
+                <a:ea typeface="+mn-ea"/>
+                <a:cs typeface="+mn-cs"/>
+              </a:rPr>
+              <a:t>ตรวจรับงวด 1</a:t>
+            </a:r>
+          </a:p>
+        </p:txBody>
+      </p:sp>
+      <p:sp>
+        <p:nvSpPr>
+          <p:cNvPr id="38" name="Milestone 4"/>
+          <p:cNvSpPr/>
+          <p:nvPr/>
+        </p:nvSpPr>
+        <p:spPr>
+          <a:xfrm>
+            <a:off x="7348728" y="3344418"/>
+            <a:ext cx="146304" cy="146304"/>
+          </a:xfrm>
+          <a:prstGeom prst="diamond">
+            <a:avLst/>
+          </a:prstGeom>
+          <a:solidFill>
+            <a:srgbClr val="BB731B"/>
+          </a:solidFill>
+          <a:ln w="19050">
+            <a:solidFill>
+              <a:srgbClr val="FFFFFF"/>
+            </a:solidFill>
+          </a:ln>
+        </p:spPr>
+        <p:txBody>
+          <a:bodyPr/>
+          <a:lstStyle/>
+          <a:p>
+            <a:endParaRPr lang="th-TH"/>
+          </a:p>
+        </p:txBody>
+      </p:sp>
+      <p:sp>
+        <p:nvSpPr>
+          <p:cNvPr id="39" name="Milestone 4 Label"/>
+          <p:cNvSpPr/>
+          <p:nvPr/>
+        </p:nvSpPr>
+        <p:spPr>
+          <a:xfrm>
+            <a:off x="7540752" y="3223260"/>
+            <a:ext cx="1463040" cy="388620"/>
+          </a:xfrm>
+          <a:prstGeom prst="rect">
+            <a:avLst/>
+          </a:prstGeom>
+          <a:noFill/>
+          <a:ln>
+            <a:noFill/>
+          </a:ln>
+        </p:spPr>
+        <p:txBody>
+          <a:bodyPr wrap="square" anchor="ctr" lIns="0" tIns="0" rIns="0" bIns="0" rtlCol="0"/>
+          <a:lstStyle/>
+          <a:p>
+            <a:pPr algn="l" marL="0" indent="0">
+              <a:lnSpc>
+                <a:spcPct val="100000"/>
+              </a:lnSpc>
+              <a:buNone/>
+            </a:pPr>
+            <a:r>
+              <a:rPr lang="th-TH" sz="1000" dirty="0">
+                <a:solidFill>
+                  <a:srgbClr val="5F5F5F"/>
+                </a:solidFill>
+                <a:latin typeface="+mn-lt"/>
+                <a:ea typeface="+mn-ea"/>
+                <a:cs typeface="+mn-cs"/>
+              </a:rPr>
+              <a:t>ตรวจรับงวด 2</a:t>
+            </a:r>
+          </a:p>
+        </p:txBody>
+      </p:sp>
+      <p:sp>
+        <p:nvSpPr>
+          <p:cNvPr id="40" name="Milestone 7"/>
+          <p:cNvSpPr/>
+          <p:nvPr/>
+        </p:nvSpPr>
+        <p:spPr>
+          <a:xfrm>
+            <a:off x="9597898" y="4510278"/>
+            <a:ext cx="146304" cy="146304"/>
+          </a:xfrm>
+          <a:prstGeom prst="diamond">
+            <a:avLst/>
+          </a:prstGeom>
+          <a:solidFill>
+            <a:srgbClr val="BB731B"/>
+          </a:solidFill>
+          <a:ln w="19050">
+            <a:solidFill>
+              <a:srgbClr val="FFFFFF"/>
+            </a:solidFill>
+          </a:ln>
+        </p:spPr>
+        <p:txBody>
+          <a:bodyPr/>
+          <a:lstStyle/>
+          <a:p>
+            <a:endParaRPr lang="th-TH"/>
+          </a:p>
+        </p:txBody>
+      </p:sp>
+      <p:sp>
+        <p:nvSpPr>
+          <p:cNvPr id="41" name="Milestone 7 Label"/>
+          <p:cNvSpPr/>
+          <p:nvPr/>
+        </p:nvSpPr>
+        <p:spPr>
+          <a:xfrm>
+            <a:off x="9789922" y="4389120"/>
+            <a:ext cx="1463040" cy="388620"/>
+          </a:xfrm>
+          <a:prstGeom prst="rect">
+            <a:avLst/>
+          </a:prstGeom>
+          <a:noFill/>
+          <a:ln>
+            <a:noFill/>
+          </a:ln>
+        </p:spPr>
+        <p:txBody>
+          <a:bodyPr wrap="square" anchor="ctr" lIns="0" tIns="0" rIns="0" bIns="0" rtlCol="0"/>
+          <a:lstStyle/>
+          <a:p>
+            <a:pPr algn="l" marL="0" indent="0">
+              <a:lnSpc>
+                <a:spcPct val="100000"/>
+              </a:lnSpc>
+              <a:buNone/>
+            </a:pPr>
+            <a:r>
+              <a:rPr lang="th-TH" sz="1000" dirty="0">
+                <a:solidFill>
+                  <a:srgbClr val="5F5F5F"/>
+                </a:solidFill>
+                <a:latin typeface="+mn-lt"/>
+                <a:ea typeface="+mn-ea"/>
+                <a:cs typeface="+mn-cs"/>
+              </a:rPr>
+              <a:t>ตรวจรับงวด 3</a:t>
             </a:r>
           </a:p>
         </p:txBody>
@@ -30220,19 +32239,19 @@
             <a:pPr/>
             <a:r>
               <a:rPr lang="th-TH" dirty="0"/>
-              <a:t>5. Implementation Stage</a:t>
-            </a:r>
-          </a:p>
-        </p:txBody>
-      </p:sp>
-      <p:sp>
-        <p:nvSpPr>
-          <p:cNvPr id="3" name="KAL"/>
-          <p:cNvSpPr>
-            <a:spLocks noGrp="1"/>
-          </p:cNvSpPr>
-          <p:nvPr>
-            <p:ph type="body" idx="1"/>
+              <a:t>ครึ่งหนึ่งของงบ 4.8 ล้านบาท คือค่าพัฒนาระบบ</a:t>
+            </a:r>
+          </a:p>
+        </p:txBody>
+      </p:sp>
+      <p:sp>
+        <p:nvSpPr>
+          <p:cNvPr id="3" name="Total"/>
+          <p:cNvSpPr>
+            <a:spLocks noGrp="1"/>
+          </p:cNvSpPr>
+          <p:nvPr>
+            <p:ph type="body" idx="2"/>
           </p:nvPr>
         </p:nvSpPr>
         <p:spPr/>
@@ -30243,19 +32262,19 @@
             <a:pPr/>
             <a:r>
               <a:rPr lang="th-TH" dirty="0"/>
-              <a:t>Key Activity :</a:t>
-            </a:r>
-          </a:p>
-        </p:txBody>
-      </p:sp>
-      <p:sp>
-        <p:nvSpPr>
-          <p:cNvPr id="4" name="KAV"/>
-          <p:cNvSpPr>
-            <a:spLocks noGrp="1"/>
-          </p:cNvSpPr>
-          <p:nvPr>
-            <p:ph type="body" idx="2"/>
+              <a:t>4.8 ล้านบาท</a:t>
+            </a:r>
+          </a:p>
+        </p:txBody>
+      </p:sp>
+      <p:sp>
+        <p:nvSpPr>
+          <p:cNvPr id="4" name="TotalL"/>
+          <p:cNvSpPr>
+            <a:spLocks noGrp="1"/>
+          </p:cNvSpPr>
+          <p:nvPr>
+            <p:ph type="body" idx="3"/>
           </p:nvPr>
         </p:nvSpPr>
         <p:spPr/>
@@ -30266,19 +32285,19 @@
             <a:pPr/>
             <a:r>
               <a:rPr lang="th-TH" dirty="0"/>
-              <a:t>ตั้งค่าสภาพแวดล้อม ติดตั้งฮาร์ดแวร์และซอฟต์แวร์</a:t>
-            </a:r>
-          </a:p>
-        </p:txBody>
-      </p:sp>
-      <p:sp>
-        <p:nvSpPr>
-          <p:cNvPr id="5" name="PL"/>
-          <p:cNvSpPr>
-            <a:spLocks noGrp="1"/>
-          </p:cNvSpPr>
-          <p:nvPr>
-            <p:ph type="body" idx="3"/>
+              <a:t>งบโครงการรวมทั้งสิ้น</a:t>
+            </a:r>
+          </a:p>
+        </p:txBody>
+      </p:sp>
+      <p:sp>
+        <p:nvSpPr>
+          <p:cNvPr id="5" name="Intro"/>
+          <p:cNvSpPr>
+            <a:spLocks noGrp="1"/>
+          </p:cNvSpPr>
+          <p:nvPr>
+            <p:ph type="body" idx="4"/>
           </p:nvPr>
         </p:nvSpPr>
         <p:spPr/>
@@ -30289,19 +32308,39 @@
             <a:pPr/>
             <a:r>
               <a:rPr lang="th-TH" dirty="0"/>
-              <a:t>Participant :</a:t>
-            </a:r>
-          </a:p>
-        </p:txBody>
-      </p:sp>
-      <p:sp>
-        <p:nvSpPr>
-          <p:cNvPr id="6" name="PV"/>
-          <p:cNvSpPr>
-            <a:spLocks noGrp="1"/>
-          </p:cNvSpPr>
-          <p:nvPr>
-            <p:ph type="body" idx="4"/>
+              <a:t>รวมภาษีมูลค่าเพิ่ม · สัญญา 12 เดือน ไม่รวมค่าบริการรายเดือนหลังปีแรก</a:t>
+            </a:r>
+          </a:p>
+        </p:txBody>
+      </p:sp>
+      <p:graphicFrame>
+        <p:nvGraphicFramePr>
+          <p:cNvPr id="6" name="Composition"/>
+          <p:cNvGraphicFramePr>
+            <a:graphicFrameLocks noGrp="1"/>
+          </p:cNvGraphicFramePr>
+          <p:nvPr>
+            <p:ph type="chart" idx="1"/>
+          </p:nvPr>
+        </p:nvGraphicFramePr>
+        <p:xfrm>
+          <a:off x="2697480" y="3703320"/>
+          <a:ext cx="7299960" cy="1371600"/>
+        </p:xfrm>
+        <a:graphic>
+          <a:graphicData uri="http://schemas.openxmlformats.org/drawingml/2006/chart">
+            <c:chart xmlns:c="http://schemas.openxmlformats.org/drawingml/2006/chart" r:id="rId2"/>
+          </a:graphicData>
+        </a:graphic>
+      </p:graphicFrame>
+      <p:sp>
+        <p:nvSpPr>
+          <p:cNvPr id="7" name="B1"/>
+          <p:cNvSpPr>
+            <a:spLocks noGrp="1"/>
+          </p:cNvSpPr>
+          <p:nvPr>
+            <p:ph type="body" idx="20"/>
           </p:nvPr>
         </p:nvSpPr>
         <p:spPr/>
@@ -30312,14 +32351,290 @@
             <a:pPr/>
             <a:r>
               <a:rPr lang="th-TH" dirty="0"/>
-              <a:t>NCT Infra Engineer, ทีมไอทีลูกค้า, Business Analyst</a:t>
-            </a:r>
-          </a:p>
-        </p:txBody>
-      </p:sp>
-      <p:sp>
-        <p:nvSpPr>
-          <p:cNvPr id="7" name="PN"/>
+              <a:t>งบโครงการ</a:t>
+            </a:r>
+          </a:p>
+        </p:txBody>
+      </p:sp>
+      <p:sp>
+        <p:nvSpPr>
+          <p:cNvPr id="8" name="SN"/>
+          <p:cNvSpPr>
+            <a:spLocks noGrp="1"/>
+          </p:cNvSpPr>
+          <p:nvPr>
+            <p:ph type="body" idx="26"/>
+          </p:nvPr>
+        </p:nvSpPr>
+        <p:spPr/>
+        <p:txBody>
+          <a:bodyPr/>
+          <a:lstStyle/>
+          <a:p>
+            <a:pPr/>
+            <a:r>
+              <a:rPr lang="th-TH" dirty="0"/>
+              <a:t>พัฒนาและตั้งค่าระบบ</a:t>
+            </a:r>
+          </a:p>
+        </p:txBody>
+      </p:sp>
+      <p:sp>
+        <p:nvSpPr>
+          <p:cNvPr id="9" name="SV"/>
+          <p:cNvSpPr>
+            <a:spLocks noGrp="1"/>
+          </p:cNvSpPr>
+          <p:nvPr>
+            <p:ph type="body" idx="27"/>
+          </p:nvPr>
+        </p:nvSpPr>
+        <p:spPr/>
+        <p:txBody>
+          <a:bodyPr/>
+          <a:lstStyle/>
+          <a:p>
+            <a:pPr/>
+            <a:r>
+              <a:rPr lang="th-TH" dirty="0"/>
+              <a:t>2.4 ล้านบาท</a:t>
+            </a:r>
+          </a:p>
+        </p:txBody>
+      </p:sp>
+      <p:sp>
+        <p:nvSpPr>
+          <p:cNvPr id="10" name="SP"/>
+          <p:cNvSpPr>
+            <a:spLocks noGrp="1"/>
+          </p:cNvSpPr>
+          <p:nvPr>
+            <p:ph type="body" idx="28"/>
+          </p:nvPr>
+        </p:nvSpPr>
+        <p:spPr/>
+        <p:txBody>
+          <a:bodyPr/>
+          <a:lstStyle/>
+          <a:p>
+            <a:pPr/>
+            <a:r>
+              <a:rPr lang="th-TH" dirty="0"/>
+              <a:t>50%</a:t>
+            </a:r>
+          </a:p>
+        </p:txBody>
+      </p:sp>
+      <p:sp>
+        <p:nvSpPr>
+          <p:cNvPr id="11" name="SN"/>
+          <p:cNvSpPr>
+            <a:spLocks noGrp="1"/>
+          </p:cNvSpPr>
+          <p:nvPr>
+            <p:ph type="body" idx="29"/>
+          </p:nvPr>
+        </p:nvSpPr>
+        <p:spPr/>
+        <p:txBody>
+          <a:bodyPr/>
+          <a:lstStyle/>
+          <a:p>
+            <a:pPr/>
+            <a:r>
+              <a:rPr lang="th-TH" dirty="0"/>
+              <a:t>ไลเซนส์ซอฟต์แวร์</a:t>
+            </a:r>
+          </a:p>
+        </p:txBody>
+      </p:sp>
+      <p:sp>
+        <p:nvSpPr>
+          <p:cNvPr id="12" name="SV"/>
+          <p:cNvSpPr>
+            <a:spLocks noGrp="1"/>
+          </p:cNvSpPr>
+          <p:nvPr>
+            <p:ph type="body" idx="30"/>
+          </p:nvPr>
+        </p:nvSpPr>
+        <p:spPr/>
+        <p:txBody>
+          <a:bodyPr/>
+          <a:lstStyle/>
+          <a:p>
+            <a:pPr/>
+            <a:r>
+              <a:rPr lang="th-TH" dirty="0"/>
+              <a:t>1.2 ล้านบาท</a:t>
+            </a:r>
+          </a:p>
+        </p:txBody>
+      </p:sp>
+      <p:sp>
+        <p:nvSpPr>
+          <p:cNvPr id="13" name="SP"/>
+          <p:cNvSpPr>
+            <a:spLocks noGrp="1"/>
+          </p:cNvSpPr>
+          <p:nvPr>
+            <p:ph type="body" idx="31"/>
+          </p:nvPr>
+        </p:nvSpPr>
+        <p:spPr/>
+        <p:txBody>
+          <a:bodyPr/>
+          <a:lstStyle/>
+          <a:p>
+            <a:pPr/>
+            <a:r>
+              <a:rPr lang="th-TH" dirty="0"/>
+              <a:t>25%</a:t>
+            </a:r>
+          </a:p>
+        </p:txBody>
+      </p:sp>
+      <p:sp>
+        <p:nvSpPr>
+          <p:cNvPr id="14" name="SN"/>
+          <p:cNvSpPr>
+            <a:spLocks noGrp="1"/>
+          </p:cNvSpPr>
+          <p:nvPr>
+            <p:ph type="body" idx="32"/>
+          </p:nvPr>
+        </p:nvSpPr>
+        <p:spPr/>
+        <p:txBody>
+          <a:bodyPr/>
+          <a:lstStyle/>
+          <a:p>
+            <a:pPr/>
+            <a:r>
+              <a:rPr lang="th-TH" dirty="0"/>
+              <a:t>คลาวด์ปีแรก</a:t>
+            </a:r>
+          </a:p>
+        </p:txBody>
+      </p:sp>
+      <p:sp>
+        <p:nvSpPr>
+          <p:cNvPr id="15" name="SV"/>
+          <p:cNvSpPr>
+            <a:spLocks noGrp="1"/>
+          </p:cNvSpPr>
+          <p:nvPr>
+            <p:ph type="body" idx="33"/>
+          </p:nvPr>
+        </p:nvSpPr>
+        <p:spPr/>
+        <p:txBody>
+          <a:bodyPr/>
+          <a:lstStyle/>
+          <a:p>
+            <a:pPr/>
+            <a:r>
+              <a:rPr lang="th-TH" dirty="0"/>
+              <a:t>0.7 ล้านบาท</a:t>
+            </a:r>
+          </a:p>
+        </p:txBody>
+      </p:sp>
+      <p:sp>
+        <p:nvSpPr>
+          <p:cNvPr id="16" name="SP"/>
+          <p:cNvSpPr>
+            <a:spLocks noGrp="1"/>
+          </p:cNvSpPr>
+          <p:nvPr>
+            <p:ph type="body" idx="34"/>
+          </p:nvPr>
+        </p:nvSpPr>
+        <p:spPr/>
+        <p:txBody>
+          <a:bodyPr/>
+          <a:lstStyle/>
+          <a:p>
+            <a:pPr/>
+            <a:r>
+              <a:rPr lang="th-TH" dirty="0"/>
+              <a:t>15%</a:t>
+            </a:r>
+          </a:p>
+        </p:txBody>
+      </p:sp>
+      <p:sp>
+        <p:nvSpPr>
+          <p:cNvPr id="17" name="SN"/>
+          <p:cNvSpPr>
+            <a:spLocks noGrp="1"/>
+          </p:cNvSpPr>
+          <p:nvPr>
+            <p:ph type="body" idx="35"/>
+          </p:nvPr>
+        </p:nvSpPr>
+        <p:spPr/>
+        <p:txBody>
+          <a:bodyPr/>
+          <a:lstStyle/>
+          <a:p>
+            <a:pPr/>
+            <a:r>
+              <a:rPr lang="th-TH" dirty="0"/>
+              <a:t>อื่น ๆ</a:t>
+            </a:r>
+          </a:p>
+        </p:txBody>
+      </p:sp>
+      <p:sp>
+        <p:nvSpPr>
+          <p:cNvPr id="18" name="SV"/>
+          <p:cNvSpPr>
+            <a:spLocks noGrp="1"/>
+          </p:cNvSpPr>
+          <p:nvPr>
+            <p:ph type="body" idx="36"/>
+          </p:nvPr>
+        </p:nvSpPr>
+        <p:spPr/>
+        <p:txBody>
+          <a:bodyPr/>
+          <a:lstStyle/>
+          <a:p>
+            <a:pPr/>
+            <a:r>
+              <a:rPr lang="th-TH" dirty="0"/>
+              <a:t>0.5 ล้านบาท</a:t>
+            </a:r>
+          </a:p>
+        </p:txBody>
+      </p:sp>
+      <p:sp>
+        <p:nvSpPr>
+          <p:cNvPr id="19" name="SP"/>
+          <p:cNvSpPr>
+            <a:spLocks noGrp="1"/>
+          </p:cNvSpPr>
+          <p:nvPr>
+            <p:ph type="body" idx="37"/>
+          </p:nvPr>
+        </p:nvSpPr>
+        <p:spPr/>
+        <p:txBody>
+          <a:bodyPr/>
+          <a:lstStyle/>
+          <a:p>
+            <a:pPr/>
+            <a:r>
+              <a:rPr lang="th-TH" dirty="0"/>
+              <a:t>10%</a:t>
+            </a:r>
+          </a:p>
+        </p:txBody>
+      </p:sp>
+      <p:sp>
+        <p:nvSpPr>
+          <p:cNvPr id="20" name="Src"/>
           <p:cNvSpPr>
             <a:spLocks noGrp="1"/>
           </p:cNvSpPr>
@@ -30335,14 +32650,14 @@
             <a:pPr/>
             <a:r>
               <a:rPr lang="th-TH" dirty="0"/>
-              <a:t>01</a:t>
-            </a:r>
-          </a:p>
-        </p:txBody>
-      </p:sp>
-      <p:sp>
-        <p:nvSpPr>
-          <p:cNvPr id="8" name="PP"/>
+              <a:t>ใบเสนอราคา NCT-2569-041 · ปัดเป็นแสนบาท</a:t>
+            </a:r>
+          </a:p>
+        </p:txBody>
+      </p:sp>
+      <p:sp>
+        <p:nvSpPr>
+          <p:cNvPr id="21" name="TL"/>
           <p:cNvSpPr>
             <a:spLocks noGrp="1"/>
           </p:cNvSpPr>
@@ -30358,14 +32673,14 @@
             <a:pPr/>
             <a:r>
               <a:rPr lang="th-TH" dirty="0"/>
-              <a:t>Preparation Phase</a:t>
-            </a:r>
-          </a:p>
-        </p:txBody>
-      </p:sp>
-      <p:sp>
-        <p:nvSpPr>
-          <p:cNvPr id="9" name="PI"/>
+              <a:t>สรุป</a:t>
+            </a:r>
+          </a:p>
+        </p:txBody>
+      </p:sp>
+      <p:sp>
+        <p:nvSpPr>
+          <p:cNvPr id="22" name="TC"/>
           <p:cNvSpPr>
             <a:spLocks noGrp="1"/>
           </p:cNvSpPr>
@@ -30381,51 +32696,7 @@
             <a:pPr/>
             <a:r>
               <a:rPr lang="th-TH" dirty="0"/>
-              <a:t>สรุปสเปกเครื่องและบริการคลาวด์ที่ต้องเตรียมให้พร้อมก่อนเริ่มงานพัฒนา</a:t>
-            </a:r>
-          </a:p>
-        </p:txBody>
-      </p:sp>
-      <p:sp>
-        <p:nvSpPr>
-          <p:cNvPr id="10" name="PB"/>
-          <p:cNvSpPr>
-            <a:spLocks noGrp="1"/>
-          </p:cNvSpPr>
-          <p:nvPr>
-            <p:ph type="body" idx="8"/>
-          </p:nvPr>
-        </p:nvSpPr>
-        <p:spPr/>
-        <p:txBody>
-          <a:bodyPr/>
-          <a:lstStyle/>
-          <a:p>
-            <a:pPr/>
-            <a:r>
-              <a:rPr lang="th-TH" dirty="0"/>
-              <a:t>PRD · 4 คอร์ / 16GB / SSD 300GB</a:t>
-            </a:r>
-          </a:p>
-          <a:p>
-            <a:pPr/>
-            <a:r>
-              <a:rPr lang="th-TH" dirty="0"/>
-              <a:t>QA · 4 คอร์ / 16GB / SSD 150GB</a:t>
-            </a:r>
-          </a:p>
-          <a:p>
-            <a:pPr/>
-            <a:r>
-              <a:rPr lang="th-TH" dirty="0"/>
-              <a:t>Windows Server 2022 ทั้งสองเครื่อง</a:t>
-            </a:r>
-          </a:p>
-          <a:p>
-            <a:pPr/>
-            <a:r>
-              <a:rPr lang="th-TH" dirty="0"/>
-              <a:t>Lambda, EC2 และ Cognito เปิดทั้งสองสภาพแวดล้อม</a:t>
+              <a:t>ไลเซนส์กับคลาวด์รวมกันไม่ถึง 40% งบส่วนใหญ่จ่ายให้งานที่ทำครั้งเดียว</a:t>
             </a:r>
           </a:p>
         </p:txBody>
@@ -30439,6 +32710,259 @@
 </file>
 
 <file path=ppt/slides/slide22.xml><?xml version="1.0" encoding="utf-8"?>
+<p:sld xmlns:a="http://schemas.openxmlformats.org/drawingml/2006/main" xmlns:r="http://schemas.openxmlformats.org/officeDocument/2006/relationships" xmlns:p="http://schemas.openxmlformats.org/presentationml/2006/main">
+  <p:cSld name="">
+    <p:spTree>
+      <p:nvGrpSpPr>
+        <p:cNvPr id="1" name=""/>
+        <p:cNvGrpSpPr/>
+        <p:nvPr/>
+      </p:nvGrpSpPr>
+      <p:grpSpPr>
+        <a:xfrm>
+          <a:off x="0" y="0"/>
+          <a:ext cx="0" cy="0"/>
+          <a:chOff x="0" y="0"/>
+          <a:chExt cx="0" cy="0"/>
+        </a:xfrm>
+      </p:grpSpPr>
+      <p:sp>
+        <p:nvSpPr>
+          <p:cNvPr id="2" name="Title"/>
+          <p:cNvSpPr>
+            <a:spLocks noGrp="1"/>
+          </p:cNvSpPr>
+          <p:nvPr>
+            <p:ph type="title"/>
+          </p:nvPr>
+        </p:nvSpPr>
+        <p:spPr/>
+        <p:txBody>
+          <a:bodyPr/>
+          <a:lstStyle/>
+          <a:p>
+            <a:pPr/>
+            <a:r>
+              <a:rPr lang="th-TH" dirty="0"/>
+              <a:t>5. Implementation Stage</a:t>
+            </a:r>
+          </a:p>
+        </p:txBody>
+      </p:sp>
+      <p:sp>
+        <p:nvSpPr>
+          <p:cNvPr id="3" name="KAL"/>
+          <p:cNvSpPr>
+            <a:spLocks noGrp="1"/>
+          </p:cNvSpPr>
+          <p:nvPr>
+            <p:ph type="body" idx="1"/>
+          </p:nvPr>
+        </p:nvSpPr>
+        <p:spPr/>
+        <p:txBody>
+          <a:bodyPr/>
+          <a:lstStyle/>
+          <a:p>
+            <a:pPr/>
+            <a:r>
+              <a:rPr lang="th-TH" dirty="0"/>
+              <a:t>Key Activity :</a:t>
+            </a:r>
+          </a:p>
+        </p:txBody>
+      </p:sp>
+      <p:sp>
+        <p:nvSpPr>
+          <p:cNvPr id="4" name="KAV"/>
+          <p:cNvSpPr>
+            <a:spLocks noGrp="1"/>
+          </p:cNvSpPr>
+          <p:nvPr>
+            <p:ph type="body" idx="2"/>
+          </p:nvPr>
+        </p:nvSpPr>
+        <p:spPr/>
+        <p:txBody>
+          <a:bodyPr/>
+          <a:lstStyle/>
+          <a:p>
+            <a:pPr/>
+            <a:r>
+              <a:rPr lang="th-TH" dirty="0"/>
+              <a:t>ตั้งค่าสภาพแวดล้อม ติดตั้งฮาร์ดแวร์และซอฟต์แวร์</a:t>
+            </a:r>
+          </a:p>
+        </p:txBody>
+      </p:sp>
+      <p:sp>
+        <p:nvSpPr>
+          <p:cNvPr id="5" name="PL"/>
+          <p:cNvSpPr>
+            <a:spLocks noGrp="1"/>
+          </p:cNvSpPr>
+          <p:nvPr>
+            <p:ph type="body" idx="3"/>
+          </p:nvPr>
+        </p:nvSpPr>
+        <p:spPr/>
+        <p:txBody>
+          <a:bodyPr/>
+          <a:lstStyle/>
+          <a:p>
+            <a:pPr/>
+            <a:r>
+              <a:rPr lang="th-TH" dirty="0"/>
+              <a:t>Participant :</a:t>
+            </a:r>
+          </a:p>
+        </p:txBody>
+      </p:sp>
+      <p:sp>
+        <p:nvSpPr>
+          <p:cNvPr id="6" name="PV"/>
+          <p:cNvSpPr>
+            <a:spLocks noGrp="1"/>
+          </p:cNvSpPr>
+          <p:nvPr>
+            <p:ph type="body" idx="4"/>
+          </p:nvPr>
+        </p:nvSpPr>
+        <p:spPr/>
+        <p:txBody>
+          <a:bodyPr/>
+          <a:lstStyle/>
+          <a:p>
+            <a:pPr/>
+            <a:r>
+              <a:rPr lang="th-TH" dirty="0"/>
+              <a:t>NCT Infra Engineer, ทีมไอทีลูกค้า, Business Analyst</a:t>
+            </a:r>
+          </a:p>
+        </p:txBody>
+      </p:sp>
+      <p:sp>
+        <p:nvSpPr>
+          <p:cNvPr id="7" name="PN"/>
+          <p:cNvSpPr>
+            <a:spLocks noGrp="1"/>
+          </p:cNvSpPr>
+          <p:nvPr>
+            <p:ph type="body" idx="5"/>
+          </p:nvPr>
+        </p:nvSpPr>
+        <p:spPr/>
+        <p:txBody>
+          <a:bodyPr/>
+          <a:lstStyle/>
+          <a:p>
+            <a:pPr/>
+            <a:r>
+              <a:rPr lang="th-TH" dirty="0"/>
+              <a:t>01</a:t>
+            </a:r>
+          </a:p>
+        </p:txBody>
+      </p:sp>
+      <p:sp>
+        <p:nvSpPr>
+          <p:cNvPr id="8" name="PP"/>
+          <p:cNvSpPr>
+            <a:spLocks noGrp="1"/>
+          </p:cNvSpPr>
+          <p:nvPr>
+            <p:ph type="body" idx="6"/>
+          </p:nvPr>
+        </p:nvSpPr>
+        <p:spPr/>
+        <p:txBody>
+          <a:bodyPr/>
+          <a:lstStyle/>
+          <a:p>
+            <a:pPr/>
+            <a:r>
+              <a:rPr lang="th-TH" dirty="0"/>
+              <a:t>Preparation Phase</a:t>
+            </a:r>
+          </a:p>
+        </p:txBody>
+      </p:sp>
+      <p:sp>
+        <p:nvSpPr>
+          <p:cNvPr id="9" name="PI"/>
+          <p:cNvSpPr>
+            <a:spLocks noGrp="1"/>
+          </p:cNvSpPr>
+          <p:nvPr>
+            <p:ph type="body" idx="7"/>
+          </p:nvPr>
+        </p:nvSpPr>
+        <p:spPr/>
+        <p:txBody>
+          <a:bodyPr/>
+          <a:lstStyle/>
+          <a:p>
+            <a:pPr/>
+            <a:r>
+              <a:rPr lang="th-TH" dirty="0"/>
+              <a:t>สรุปสเปกเครื่องและบริการคลาวด์ที่ต้องเตรียมให้พร้อมก่อนเริ่มงานพัฒนา</a:t>
+            </a:r>
+          </a:p>
+        </p:txBody>
+      </p:sp>
+      <p:sp>
+        <p:nvSpPr>
+          <p:cNvPr id="10" name="PB"/>
+          <p:cNvSpPr>
+            <a:spLocks noGrp="1"/>
+          </p:cNvSpPr>
+          <p:nvPr>
+            <p:ph type="body" idx="8"/>
+          </p:nvPr>
+        </p:nvSpPr>
+        <p:spPr/>
+        <p:txBody>
+          <a:bodyPr/>
+          <a:lstStyle/>
+          <a:p>
+            <a:pPr/>
+            <a:r>
+              <a:rPr lang="th-TH" dirty="0"/>
+              <a:t>PRD · 4 คอร์ / 16GB / SSD 300GB</a:t>
+            </a:r>
+          </a:p>
+          <a:p>
+            <a:pPr/>
+            <a:r>
+              <a:rPr lang="th-TH" dirty="0"/>
+              <a:t>QA · 4 คอร์ / 16GB / SSD 150GB</a:t>
+            </a:r>
+          </a:p>
+          <a:p>
+            <a:pPr/>
+            <a:r>
+              <a:rPr lang="th-TH" dirty="0"/>
+              <a:t>Windows Server 2022 ทั้งสองเครื่อง</a:t>
+            </a:r>
+          </a:p>
+          <a:p>
+            <a:pPr/>
+            <a:r>
+              <a:rPr lang="th-TH" dirty="0"/>
+              <a:t>Lambda, EC2 และ Cognito เปิดทั้งสองสภาพแวดล้อม</a:t>
+            </a:r>
+          </a:p>
+        </p:txBody>
+      </p:sp>
+    </p:spTree>
+  </p:cSld>
+  <p:clrMapOvr>
+    <a:masterClrMapping/>
+  </p:clrMapOvr>
+</p:sld>
+</file>
+
+<file path=ppt/slides/slide23.xml><?xml version="1.0" encoding="utf-8"?>
 <p:sld xmlns:a="http://schemas.openxmlformats.org/drawingml/2006/main" xmlns:r="http://schemas.openxmlformats.org/officeDocument/2006/relationships" xmlns:p="http://schemas.openxmlformats.org/presentationml/2006/main">
   <p:cSld name="">
     <p:spTree>
@@ -30924,7 +33448,7 @@
 </p:sld>
 </file>
 
-<file path=ppt/slides/slide23.xml><?xml version="1.0" encoding="utf-8"?>
+<file path=ppt/slides/slide24.xml><?xml version="1.0" encoding="utf-8"?>
 <p:sld xmlns:a="http://schemas.openxmlformats.org/drawingml/2006/main" xmlns:r="http://schemas.openxmlformats.org/officeDocument/2006/relationships" xmlns:p="http://schemas.openxmlformats.org/presentationml/2006/main">
   <p:cSld name="">
     <p:spTree>

--- a/NCT-Slide-Template-Corp-Demo.pptx
+++ b/NCT-Slide-Template-Corp-Demo.pptx
@@ -29,6 +29,7 @@
     <p:sldId id="277" r:id="rId23"/>
     <p:sldId id="278" r:id="rId24"/>
     <p:sldId id="279" r:id="rId25"/>
+    <p:sldId id="280" r:id="rId26"/>
   </p:sldIdLst>
   <p:sldSz cx="12192000" cy="6858000"/>
   <p:notesSz cx="6858000" cy="9144000"/>
@@ -21253,6 +21254,2381 @@
 </p:sldLayout>
 </file>
 
+<file path=ppt/slideLayouts/slideLayout25.xml><?xml version="1.0" encoding="utf-8"?>
+<p:sldLayout xmlns:a="http://schemas.openxmlformats.org/drawingml/2006/main" xmlns:r="http://schemas.openxmlformats.org/officeDocument/2006/relationships" xmlns:p="http://schemas.openxmlformats.org/presentationml/2006/main" type="obj" showMasterSp="0" preserve="1">
+  <p:cSld name="25 Project Team">
+    <p:bg>
+      <p:bgPr>
+        <a:solidFill>
+          <a:srgbClr val="FFFFFF"/>
+        </a:solidFill>
+        <a:effectLst/>
+      </p:bgPr>
+    </p:bg>
+    <p:spTree>
+      <p:nvGrpSpPr>
+        <p:cNvPr id="1" name=""/>
+        <p:cNvGrpSpPr/>
+        <p:nvPr/>
+      </p:nvGrpSpPr>
+      <p:grpSpPr>
+        <a:xfrm>
+          <a:off x="0" y="0"/>
+          <a:ext cx="0" cy="0"/>
+          <a:chOff x="0" y="0"/>
+          <a:chExt cx="0" cy="0"/>
+        </a:xfrm>
+      </p:grpSpPr>
+      <p:sp>
+        <p:nvSpPr>
+          <p:cNvPr id="10" name="Title Placeholder"/>
+          <p:cNvSpPr>
+            <a:spLocks noGrp="1"/>
+          </p:cNvSpPr>
+          <p:nvPr>
+            <p:ph type="title"/>
+          </p:nvPr>
+        </p:nvSpPr>
+        <p:spPr>
+          <a:xfrm>
+            <a:off x="914400" y="548640"/>
+            <a:ext cx="10363200" cy="731520"/>
+          </a:xfrm>
+          <a:prstGeom prst="rect">
+            <a:avLst/>
+          </a:prstGeom>
+        </p:spPr>
+        <p:txBody>
+          <a:bodyPr wrap="square" anchor="b" lIns="0" tIns="0" rIns="0" bIns="0" rtlCol="0"/>
+          <a:lstStyle>
+            <a:lvl1pPr algn="l" marL="0" indent="0">
+              <a:lnSpc>
+                <a:spcPct val="108000"/>
+              </a:lnSpc>
+              <a:buNone/>
+              <a:defRPr lang="th-TH" sz="3200" b="1" dirty="0">
+                <a:solidFill>
+                  <a:srgbClr val="23436D"/>
+                </a:solidFill>
+                <a:latin typeface="+mj-lt"/>
+                <a:ea typeface="+mj-ea"/>
+                <a:cs typeface="+mj-cs"/>
+              </a:defRPr>
+            </a:lvl1pPr>
+          </a:lstStyle>
+          <a:p>
+            <a:pPr algn="l" marL="0" indent="0">
+              <a:lnSpc>
+                <a:spcPct val="108000"/>
+              </a:lnSpc>
+              <a:buNone/>
+            </a:pPr>
+            <a:r>
+              <a:rPr lang="th-TH" sz="3200" b="1" dirty="0">
+                <a:solidFill>
+                  <a:srgbClr val="23436D"/>
+                </a:solidFill>
+                <a:latin typeface="+mj-lt"/>
+                <a:ea typeface="+mj-ea"/>
+                <a:cs typeface="+mj-cs"/>
+              </a:rPr>
+              <a:t>ชื่อสไลด์</a:t>
+            </a:r>
+          </a:p>
+        </p:txBody>
+      </p:sp>
+      <p:sp>
+        <p:nvSpPr>
+          <p:cNvPr id="11" name="Accent Rule"/>
+          <p:cNvSpPr/>
+          <p:nvPr/>
+        </p:nvSpPr>
+        <p:spPr>
+          <a:xfrm>
+            <a:off x="0" y="1371600"/>
+            <a:ext cx="12192000" cy="68580"/>
+          </a:xfrm>
+          <a:prstGeom prst="rect">
+            <a:avLst/>
+          </a:prstGeom>
+          <a:solidFill>
+            <a:srgbClr val="216B7F"/>
+          </a:solidFill>
+          <a:ln>
+            <a:noFill/>
+          </a:ln>
+        </p:spPr>
+        <p:txBody>
+          <a:bodyPr/>
+          <a:lstStyle/>
+          <a:p>
+            <a:endParaRPr lang="th-TH"/>
+          </a:p>
+        </p:txBody>
+      </p:sp>
+      <p:sp>
+        <p:nvSpPr>
+          <p:cNvPr id="12" name="Lead Card"/>
+          <p:cNvSpPr/>
+          <p:nvPr/>
+        </p:nvSpPr>
+        <p:spPr>
+          <a:xfrm>
+            <a:off x="3550920" y="1691640"/>
+            <a:ext cx="5090160" cy="1051560"/>
+          </a:xfrm>
+          <a:prstGeom prst="rect">
+            <a:avLst/>
+          </a:prstGeom>
+          <a:solidFill>
+            <a:srgbClr val="E8F6F5"/>
+          </a:solidFill>
+          <a:ln>
+            <a:noFill/>
+          </a:ln>
+        </p:spPr>
+        <p:txBody>
+          <a:bodyPr/>
+          <a:lstStyle/>
+          <a:p>
+            <a:endParaRPr lang="th-TH"/>
+          </a:p>
+        </p:txBody>
+      </p:sp>
+      <p:sp>
+        <p:nvSpPr>
+          <p:cNvPr id="13" name="Lead Role"/>
+          <p:cNvSpPr>
+            <a:spLocks noGrp="1"/>
+          </p:cNvSpPr>
+          <p:nvPr>
+            <p:ph type="body" idx="20"/>
+          </p:nvPr>
+        </p:nvSpPr>
+        <p:spPr>
+          <a:xfrm>
+            <a:off x="3733800" y="1828800"/>
+            <a:ext cx="2194560" cy="274320"/>
+          </a:xfrm>
+          <a:prstGeom prst="rect">
+            <a:avLst/>
+          </a:prstGeom>
+        </p:spPr>
+        <p:txBody>
+          <a:bodyPr wrap="square" anchor="t" lIns="0" tIns="0" rIns="0" bIns="0" rtlCol="0"/>
+          <a:lstStyle>
+            <a:lvl1pPr algn="l" marL="0" indent="0">
+              <a:lnSpc>
+                <a:spcPct val="100000"/>
+              </a:lnSpc>
+              <a:buNone/>
+              <a:defRPr lang="th-TH" sz="1200" b="1" spc="120" dirty="0">
+                <a:solidFill>
+                  <a:srgbClr val="5F5F5F"/>
+                </a:solidFill>
+                <a:latin typeface="+mn-lt"/>
+                <a:ea typeface="+mn-ea"/>
+                <a:cs typeface="+mn-cs"/>
+              </a:defRPr>
+            </a:lvl1pPr>
+          </a:lstStyle>
+          <a:p>
+            <a:pPr algn="l" marL="0" indent="0">
+              <a:lnSpc>
+                <a:spcPct val="100000"/>
+              </a:lnSpc>
+              <a:buNone/>
+            </a:pPr>
+            <a:r>
+              <a:rPr lang="th-TH" sz="1200" b="1" spc="120" dirty="0">
+                <a:solidFill>
+                  <a:srgbClr val="5F5F5F"/>
+                </a:solidFill>
+                <a:latin typeface="+mn-lt"/>
+                <a:ea typeface="+mn-ea"/>
+                <a:cs typeface="+mn-cs"/>
+              </a:rPr>
+              <a:t>บทบาท</a:t>
+            </a:r>
+          </a:p>
+        </p:txBody>
+      </p:sp>
+      <p:sp>
+        <p:nvSpPr>
+          <p:cNvPr id="14" name="Lead Name"/>
+          <p:cNvSpPr>
+            <a:spLocks noGrp="1"/>
+          </p:cNvSpPr>
+          <p:nvPr>
+            <p:ph type="body" idx="21"/>
+          </p:nvPr>
+        </p:nvSpPr>
+        <p:spPr>
+          <a:xfrm>
+            <a:off x="3733800" y="2112264"/>
+            <a:ext cx="2194560" cy="338328"/>
+          </a:xfrm>
+          <a:prstGeom prst="rect">
+            <a:avLst/>
+          </a:prstGeom>
+        </p:spPr>
+        <p:txBody>
+          <a:bodyPr wrap="square" anchor="t" lIns="0" tIns="0" rIns="0" bIns="0" rtlCol="0"/>
+          <a:lstStyle>
+            <a:lvl1pPr algn="l" marL="0" indent="0">
+              <a:lnSpc>
+                <a:spcPct val="100000"/>
+              </a:lnSpc>
+              <a:buNone/>
+              <a:defRPr lang="th-TH" sz="2000" b="1" dirty="0">
+                <a:solidFill>
+                  <a:srgbClr val="23436D"/>
+                </a:solidFill>
+                <a:latin typeface="+mj-lt"/>
+                <a:ea typeface="+mj-ea"/>
+                <a:cs typeface="+mj-cs"/>
+              </a:defRPr>
+            </a:lvl1pPr>
+          </a:lstStyle>
+          <a:p>
+            <a:pPr algn="l" marL="0" indent="0">
+              <a:lnSpc>
+                <a:spcPct val="100000"/>
+              </a:lnSpc>
+              <a:buNone/>
+            </a:pPr>
+            <a:r>
+              <a:rPr lang="th-TH" sz="2000" b="1" dirty="0">
+                <a:solidFill>
+                  <a:srgbClr val="23436D"/>
+                </a:solidFill>
+                <a:latin typeface="+mj-lt"/>
+                <a:ea typeface="+mj-ea"/>
+                <a:cs typeface="+mj-cs"/>
+              </a:rPr>
+              <a:t>ชื่อหัวหน้าโครงการ</a:t>
+            </a:r>
+          </a:p>
+        </p:txBody>
+      </p:sp>
+      <p:sp>
+        <p:nvSpPr>
+          <p:cNvPr id="15" name="Lead Credential"/>
+          <p:cNvSpPr>
+            <a:spLocks noGrp="1"/>
+          </p:cNvSpPr>
+          <p:nvPr>
+            <p:ph type="body" idx="22"/>
+          </p:nvPr>
+        </p:nvSpPr>
+        <p:spPr>
+          <a:xfrm>
+            <a:off x="3733800" y="2478024"/>
+            <a:ext cx="2194560" cy="228600"/>
+          </a:xfrm>
+          <a:prstGeom prst="rect">
+            <a:avLst/>
+          </a:prstGeom>
+        </p:spPr>
+        <p:txBody>
+          <a:bodyPr wrap="square" anchor="t" lIns="0" tIns="0" rIns="0" bIns="0" rtlCol="0"/>
+          <a:lstStyle>
+            <a:lvl1pPr algn="l" marL="0" indent="0">
+              <a:lnSpc>
+                <a:spcPct val="100000"/>
+              </a:lnSpc>
+              <a:buNone/>
+              <a:defRPr lang="th-TH" sz="1200" dirty="0">
+                <a:solidFill>
+                  <a:srgbClr val="5F5F5F"/>
+                </a:solidFill>
+                <a:latin typeface="+mn-lt"/>
+                <a:ea typeface="+mn-ea"/>
+                <a:cs typeface="+mn-cs"/>
+              </a:defRPr>
+            </a:lvl1pPr>
+          </a:lstStyle>
+          <a:p>
+            <a:pPr algn="l" marL="0" indent="0">
+              <a:lnSpc>
+                <a:spcPct val="100000"/>
+              </a:lnSpc>
+              <a:buNone/>
+            </a:pPr>
+            <a:r>
+              <a:rPr lang="th-TH" sz="1200" dirty="0">
+                <a:solidFill>
+                  <a:srgbClr val="5F5F5F"/>
+                </a:solidFill>
+                <a:latin typeface="+mn-lt"/>
+                <a:ea typeface="+mn-ea"/>
+                <a:cs typeface="+mn-cs"/>
+              </a:rPr>
+              <a:t>ประสบการณ์ · วุฒิบัตร</a:t>
+            </a:r>
+          </a:p>
+        </p:txBody>
+      </p:sp>
+      <p:sp>
+        <p:nvSpPr>
+          <p:cNvPr id="16" name="Lead Duties"/>
+          <p:cNvSpPr>
+            <a:spLocks noGrp="1"/>
+          </p:cNvSpPr>
+          <p:nvPr>
+            <p:ph type="body" idx="23"/>
+          </p:nvPr>
+        </p:nvSpPr>
+        <p:spPr>
+          <a:xfrm>
+            <a:off x="6111240" y="1828800"/>
+            <a:ext cx="2346960" cy="777240"/>
+          </a:xfrm>
+          <a:prstGeom prst="rect">
+            <a:avLst/>
+          </a:prstGeom>
+        </p:spPr>
+        <p:txBody>
+          <a:bodyPr wrap="square" anchor="t" lIns="0" tIns="0" rIns="0" bIns="0" rtlCol="0"/>
+          <a:lstStyle>
+            <a:lvl1pPr algn="l" marL="182880" indent="-182880">
+              <a:lnSpc>
+                <a:spcPct val="132000"/>
+              </a:lnSpc>
+              <a:spcBef>
+                <a:spcPts val="500"/>
+              </a:spcBef>
+              <a:buClr>
+                <a:srgbClr val="216B7F"/>
+              </a:buClr>
+              <a:buSzPct val="90000"/>
+              <a:buFont typeface="Arial"/>
+              <a:buChar char="•"/>
+              <a:defRPr lang="th-TH" sz="1200" dirty="0">
+                <a:solidFill>
+                  <a:srgbClr val="333333"/>
+                </a:solidFill>
+                <a:latin typeface="+mn-lt"/>
+                <a:ea typeface="+mn-ea"/>
+                <a:cs typeface="+mn-cs"/>
+              </a:defRPr>
+            </a:lvl1pPr>
+            <a:lvl2pPr algn="l" marL="548640" indent="-182880">
+              <a:lnSpc>
+                <a:spcPct val="132000"/>
+              </a:lnSpc>
+              <a:spcBef>
+                <a:spcPts val="350"/>
+              </a:spcBef>
+              <a:buClr>
+                <a:srgbClr val="5F5F5F"/>
+              </a:buClr>
+              <a:buSzPct val="90000"/>
+              <a:buFont typeface="Arial"/>
+              <a:buChar char="–"/>
+              <a:defRPr lang="th-TH" sz="1200" dirty="0">
+                <a:solidFill>
+                  <a:srgbClr val="333333"/>
+                </a:solidFill>
+                <a:latin typeface="+mn-lt"/>
+                <a:ea typeface="+mn-ea"/>
+                <a:cs typeface="+mn-cs"/>
+              </a:defRPr>
+            </a:lvl2pPr>
+          </a:lstStyle>
+          <a:p>
+            <a:pPr algn="l" marL="182880" indent="-182880">
+              <a:lnSpc>
+                <a:spcPct val="132000"/>
+              </a:lnSpc>
+              <a:spcBef>
+                <a:spcPts val="500"/>
+              </a:spcBef>
+              <a:buClr>
+                <a:srgbClr val="216B7F"/>
+              </a:buClr>
+              <a:buSzPct val="90000"/>
+              <a:buFont typeface="Arial"/>
+              <a:buChar char="•"/>
+            </a:pPr>
+            <a:r>
+              <a:rPr lang="th-TH" sz="1200" dirty="0">
+                <a:solidFill>
+                  <a:srgbClr val="333333"/>
+                </a:solidFill>
+                <a:latin typeface="+mn-lt"/>
+                <a:ea typeface="+mn-ea"/>
+                <a:cs typeface="+mn-cs"/>
+              </a:rPr>
+              <a:t>หน้าที่หลัก</a:t>
+            </a:r>
+          </a:p>
+          <a:p>
+            <a:pPr algn="l" marL="548640" indent="-182880">
+              <a:lnSpc>
+                <a:spcPct val="132000"/>
+              </a:lnSpc>
+              <a:spcBef>
+                <a:spcPts val="350"/>
+              </a:spcBef>
+              <a:buClr>
+                <a:srgbClr val="5F5F5F"/>
+              </a:buClr>
+              <a:buSzPct val="90000"/>
+              <a:buFont typeface="Arial"/>
+              <a:buChar char="–"/>
+            </a:pPr>
+            <a:r>
+              <a:rPr lang="th-TH" sz="1200" dirty="0">
+                <a:solidFill>
+                  <a:srgbClr val="333333"/>
+                </a:solidFill>
+                <a:latin typeface="+mn-lt"/>
+                <a:ea typeface="+mn-ea"/>
+                <a:cs typeface="+mn-cs"/>
+              </a:rPr>
+              <a:t>หน้าที่หลัก</a:t>
+            </a:r>
+          </a:p>
+        </p:txBody>
+      </p:sp>
+      <p:sp>
+        <p:nvSpPr>
+          <p:cNvPr id="17" name="Stem"/>
+          <p:cNvSpPr/>
+          <p:nvPr/>
+        </p:nvSpPr>
+        <p:spPr>
+          <a:xfrm>
+            <a:off x="6089650" y="2743200"/>
+            <a:ext cx="12700" cy="160020"/>
+          </a:xfrm>
+          <a:prstGeom prst="rect">
+            <a:avLst/>
+          </a:prstGeom>
+          <a:solidFill>
+            <a:srgbClr val="216B7F"/>
+          </a:solidFill>
+          <a:ln>
+            <a:noFill/>
+          </a:ln>
+        </p:spPr>
+        <p:txBody>
+          <a:bodyPr/>
+          <a:lstStyle/>
+          <a:p>
+            <a:endParaRPr lang="th-TH"/>
+          </a:p>
+        </p:txBody>
+      </p:sp>
+      <p:sp>
+        <p:nvSpPr>
+          <p:cNvPr id="18" name="Bar"/>
+          <p:cNvSpPr/>
+          <p:nvPr/>
+        </p:nvSpPr>
+        <p:spPr>
+          <a:xfrm>
+            <a:off x="2134870" y="2903220"/>
+            <a:ext cx="7922260" cy="12700"/>
+          </a:xfrm>
+          <a:prstGeom prst="rect">
+            <a:avLst/>
+          </a:prstGeom>
+          <a:solidFill>
+            <a:srgbClr val="216B7F"/>
+          </a:solidFill>
+          <a:ln>
+            <a:noFill/>
+          </a:ln>
+        </p:spPr>
+        <p:txBody>
+          <a:bodyPr/>
+          <a:lstStyle/>
+          <a:p>
+            <a:endParaRPr lang="th-TH"/>
+          </a:p>
+        </p:txBody>
+      </p:sp>
+      <p:sp>
+        <p:nvSpPr>
+          <p:cNvPr id="19" name="Drop 1"/>
+          <p:cNvSpPr/>
+          <p:nvPr/>
+        </p:nvSpPr>
+        <p:spPr>
+          <a:xfrm>
+            <a:off x="2134870" y="2903220"/>
+            <a:ext cx="12700" cy="160020"/>
+          </a:xfrm>
+          <a:prstGeom prst="rect">
+            <a:avLst/>
+          </a:prstGeom>
+          <a:solidFill>
+            <a:srgbClr val="216B7F"/>
+          </a:solidFill>
+          <a:ln>
+            <a:noFill/>
+          </a:ln>
+        </p:spPr>
+        <p:txBody>
+          <a:bodyPr/>
+          <a:lstStyle/>
+          <a:p>
+            <a:endParaRPr lang="th-TH"/>
+          </a:p>
+        </p:txBody>
+      </p:sp>
+      <p:sp>
+        <p:nvSpPr>
+          <p:cNvPr id="20" name="Card 1"/>
+          <p:cNvSpPr/>
+          <p:nvPr/>
+        </p:nvSpPr>
+        <p:spPr>
+          <a:xfrm>
+            <a:off x="914400" y="3063240"/>
+            <a:ext cx="2453640" cy="2103120"/>
+          </a:xfrm>
+          <a:prstGeom prst="rect">
+            <a:avLst/>
+          </a:prstGeom>
+          <a:solidFill>
+            <a:srgbClr val="E8F6F5"/>
+          </a:solidFill>
+          <a:ln>
+            <a:noFill/>
+          </a:ln>
+        </p:spPr>
+        <p:txBody>
+          <a:bodyPr/>
+          <a:lstStyle/>
+          <a:p>
+            <a:endParaRPr lang="th-TH"/>
+          </a:p>
+        </p:txBody>
+      </p:sp>
+      <p:sp>
+        <p:nvSpPr>
+          <p:cNvPr id="21" name="Card 1 Role"/>
+          <p:cNvSpPr>
+            <a:spLocks noGrp="1"/>
+          </p:cNvSpPr>
+          <p:nvPr>
+            <p:ph type="body" idx="24"/>
+          </p:nvPr>
+        </p:nvSpPr>
+        <p:spPr>
+          <a:xfrm>
+            <a:off x="1097280" y="3246120"/>
+            <a:ext cx="2087880" cy="274320"/>
+          </a:xfrm>
+          <a:prstGeom prst="rect">
+            <a:avLst/>
+          </a:prstGeom>
+        </p:spPr>
+        <p:txBody>
+          <a:bodyPr wrap="square" anchor="t" lIns="0" tIns="0" rIns="0" bIns="0" rtlCol="0"/>
+          <a:lstStyle>
+            <a:lvl1pPr algn="l" marL="0" indent="0">
+              <a:lnSpc>
+                <a:spcPct val="100000"/>
+              </a:lnSpc>
+              <a:buNone/>
+              <a:defRPr lang="th-TH" sz="1200" b="1" spc="120" dirty="0">
+                <a:solidFill>
+                  <a:srgbClr val="5F5F5F"/>
+                </a:solidFill>
+                <a:latin typeface="+mn-lt"/>
+                <a:ea typeface="+mn-ea"/>
+                <a:cs typeface="+mn-cs"/>
+              </a:defRPr>
+            </a:lvl1pPr>
+          </a:lstStyle>
+          <a:p>
+            <a:pPr algn="l" marL="0" indent="0">
+              <a:lnSpc>
+                <a:spcPct val="100000"/>
+              </a:lnSpc>
+              <a:buNone/>
+            </a:pPr>
+            <a:r>
+              <a:rPr lang="th-TH" sz="1200" b="1" spc="120" dirty="0">
+                <a:solidFill>
+                  <a:srgbClr val="5F5F5F"/>
+                </a:solidFill>
+                <a:latin typeface="+mn-lt"/>
+                <a:ea typeface="+mn-ea"/>
+                <a:cs typeface="+mn-cs"/>
+              </a:rPr>
+              <a:t>บทบาท</a:t>
+            </a:r>
+          </a:p>
+        </p:txBody>
+      </p:sp>
+      <p:sp>
+        <p:nvSpPr>
+          <p:cNvPr id="22" name="Card 1 Name"/>
+          <p:cNvSpPr>
+            <a:spLocks noGrp="1"/>
+          </p:cNvSpPr>
+          <p:nvPr>
+            <p:ph type="body" idx="25"/>
+          </p:nvPr>
+        </p:nvSpPr>
+        <p:spPr>
+          <a:xfrm>
+            <a:off x="1097280" y="3529584"/>
+            <a:ext cx="2087880" cy="338328"/>
+          </a:xfrm>
+          <a:prstGeom prst="rect">
+            <a:avLst/>
+          </a:prstGeom>
+        </p:spPr>
+        <p:txBody>
+          <a:bodyPr wrap="square" anchor="t" lIns="0" tIns="0" rIns="0" bIns="0" rtlCol="0"/>
+          <a:lstStyle>
+            <a:lvl1pPr algn="l" marL="0" indent="0">
+              <a:lnSpc>
+                <a:spcPct val="100000"/>
+              </a:lnSpc>
+              <a:buNone/>
+              <a:defRPr lang="th-TH" sz="2000" b="1" dirty="0">
+                <a:solidFill>
+                  <a:srgbClr val="23436D"/>
+                </a:solidFill>
+                <a:latin typeface="+mj-lt"/>
+                <a:ea typeface="+mj-ea"/>
+                <a:cs typeface="+mj-cs"/>
+              </a:defRPr>
+            </a:lvl1pPr>
+          </a:lstStyle>
+          <a:p>
+            <a:pPr algn="l" marL="0" indent="0">
+              <a:lnSpc>
+                <a:spcPct val="100000"/>
+              </a:lnSpc>
+              <a:buNone/>
+            </a:pPr>
+            <a:r>
+              <a:rPr lang="th-TH" sz="2000" b="1" dirty="0">
+                <a:solidFill>
+                  <a:srgbClr val="23436D"/>
+                </a:solidFill>
+                <a:latin typeface="+mj-lt"/>
+                <a:ea typeface="+mj-ea"/>
+                <a:cs typeface="+mj-cs"/>
+              </a:rPr>
+              <a:t>ชื่อผู้รับผิดชอบ</a:t>
+            </a:r>
+          </a:p>
+        </p:txBody>
+      </p:sp>
+      <p:sp>
+        <p:nvSpPr>
+          <p:cNvPr id="23" name="Card 1 Credential"/>
+          <p:cNvSpPr>
+            <a:spLocks noGrp="1"/>
+          </p:cNvSpPr>
+          <p:nvPr>
+            <p:ph type="body" idx="26"/>
+          </p:nvPr>
+        </p:nvSpPr>
+        <p:spPr>
+          <a:xfrm>
+            <a:off x="1097280" y="3895344"/>
+            <a:ext cx="2087880" cy="228600"/>
+          </a:xfrm>
+          <a:prstGeom prst="rect">
+            <a:avLst/>
+          </a:prstGeom>
+        </p:spPr>
+        <p:txBody>
+          <a:bodyPr wrap="square" anchor="t" lIns="0" tIns="0" rIns="0" bIns="0" rtlCol="0"/>
+          <a:lstStyle>
+            <a:lvl1pPr algn="l" marL="0" indent="0">
+              <a:lnSpc>
+                <a:spcPct val="100000"/>
+              </a:lnSpc>
+              <a:buNone/>
+              <a:defRPr lang="th-TH" sz="1200" dirty="0">
+                <a:solidFill>
+                  <a:srgbClr val="5F5F5F"/>
+                </a:solidFill>
+                <a:latin typeface="+mn-lt"/>
+                <a:ea typeface="+mn-ea"/>
+                <a:cs typeface="+mn-cs"/>
+              </a:defRPr>
+            </a:lvl1pPr>
+          </a:lstStyle>
+          <a:p>
+            <a:pPr algn="l" marL="0" indent="0">
+              <a:lnSpc>
+                <a:spcPct val="100000"/>
+              </a:lnSpc>
+              <a:buNone/>
+            </a:pPr>
+            <a:r>
+              <a:rPr lang="th-TH" sz="1200" dirty="0">
+                <a:solidFill>
+                  <a:srgbClr val="5F5F5F"/>
+                </a:solidFill>
+                <a:latin typeface="+mn-lt"/>
+                <a:ea typeface="+mn-ea"/>
+                <a:cs typeface="+mn-cs"/>
+              </a:rPr>
+              <a:t>ประสบการณ์ · วุฒิบัตร</a:t>
+            </a:r>
+          </a:p>
+        </p:txBody>
+      </p:sp>
+      <p:sp>
+        <p:nvSpPr>
+          <p:cNvPr id="24" name="Card 1 Duties"/>
+          <p:cNvSpPr>
+            <a:spLocks noGrp="1"/>
+          </p:cNvSpPr>
+          <p:nvPr>
+            <p:ph type="body" idx="27"/>
+          </p:nvPr>
+        </p:nvSpPr>
+        <p:spPr>
+          <a:xfrm>
+            <a:off x="1097280" y="4251960"/>
+            <a:ext cx="2087880" cy="731520"/>
+          </a:xfrm>
+          <a:prstGeom prst="rect">
+            <a:avLst/>
+          </a:prstGeom>
+        </p:spPr>
+        <p:txBody>
+          <a:bodyPr wrap="square" anchor="t" lIns="0" tIns="0" rIns="0" bIns="0" rtlCol="0"/>
+          <a:lstStyle>
+            <a:lvl1pPr algn="l" marL="182880" indent="-182880">
+              <a:lnSpc>
+                <a:spcPct val="132000"/>
+              </a:lnSpc>
+              <a:spcBef>
+                <a:spcPts val="500"/>
+              </a:spcBef>
+              <a:buClr>
+                <a:srgbClr val="216B7F"/>
+              </a:buClr>
+              <a:buSzPct val="90000"/>
+              <a:buFont typeface="Arial"/>
+              <a:buChar char="•"/>
+              <a:defRPr lang="th-TH" sz="1200" dirty="0">
+                <a:solidFill>
+                  <a:srgbClr val="333333"/>
+                </a:solidFill>
+                <a:latin typeface="+mn-lt"/>
+                <a:ea typeface="+mn-ea"/>
+                <a:cs typeface="+mn-cs"/>
+              </a:defRPr>
+            </a:lvl1pPr>
+            <a:lvl2pPr algn="l" marL="548640" indent="-182880">
+              <a:lnSpc>
+                <a:spcPct val="132000"/>
+              </a:lnSpc>
+              <a:spcBef>
+                <a:spcPts val="350"/>
+              </a:spcBef>
+              <a:buClr>
+                <a:srgbClr val="5F5F5F"/>
+              </a:buClr>
+              <a:buSzPct val="90000"/>
+              <a:buFont typeface="Arial"/>
+              <a:buChar char="–"/>
+              <a:defRPr lang="th-TH" sz="1200" dirty="0">
+                <a:solidFill>
+                  <a:srgbClr val="333333"/>
+                </a:solidFill>
+                <a:latin typeface="+mn-lt"/>
+                <a:ea typeface="+mn-ea"/>
+                <a:cs typeface="+mn-cs"/>
+              </a:defRPr>
+            </a:lvl2pPr>
+          </a:lstStyle>
+          <a:p>
+            <a:pPr algn="l" marL="182880" indent="-182880">
+              <a:lnSpc>
+                <a:spcPct val="132000"/>
+              </a:lnSpc>
+              <a:spcBef>
+                <a:spcPts val="500"/>
+              </a:spcBef>
+              <a:buClr>
+                <a:srgbClr val="216B7F"/>
+              </a:buClr>
+              <a:buSzPct val="90000"/>
+              <a:buFont typeface="Arial"/>
+              <a:buChar char="•"/>
+            </a:pPr>
+            <a:r>
+              <a:rPr lang="th-TH" sz="1200" dirty="0">
+                <a:solidFill>
+                  <a:srgbClr val="333333"/>
+                </a:solidFill>
+                <a:latin typeface="+mn-lt"/>
+                <a:ea typeface="+mn-ea"/>
+                <a:cs typeface="+mn-cs"/>
+              </a:rPr>
+              <a:t>หน้าที่หลัก</a:t>
+            </a:r>
+          </a:p>
+          <a:p>
+            <a:pPr algn="l" marL="548640" indent="-182880">
+              <a:lnSpc>
+                <a:spcPct val="132000"/>
+              </a:lnSpc>
+              <a:spcBef>
+                <a:spcPts val="350"/>
+              </a:spcBef>
+              <a:buClr>
+                <a:srgbClr val="5F5F5F"/>
+              </a:buClr>
+              <a:buSzPct val="90000"/>
+              <a:buFont typeface="Arial"/>
+              <a:buChar char="–"/>
+            </a:pPr>
+            <a:r>
+              <a:rPr lang="th-TH" sz="1200" dirty="0">
+                <a:solidFill>
+                  <a:srgbClr val="333333"/>
+                </a:solidFill>
+                <a:latin typeface="+mn-lt"/>
+                <a:ea typeface="+mn-ea"/>
+                <a:cs typeface="+mn-cs"/>
+              </a:rPr>
+              <a:t>หน้าที่หลัก</a:t>
+            </a:r>
+          </a:p>
+        </p:txBody>
+      </p:sp>
+      <p:sp>
+        <p:nvSpPr>
+          <p:cNvPr id="25" name="Drop 2"/>
+          <p:cNvSpPr/>
+          <p:nvPr/>
+        </p:nvSpPr>
+        <p:spPr>
+          <a:xfrm>
+            <a:off x="4771390" y="2903220"/>
+            <a:ext cx="12700" cy="160020"/>
+          </a:xfrm>
+          <a:prstGeom prst="rect">
+            <a:avLst/>
+          </a:prstGeom>
+          <a:solidFill>
+            <a:srgbClr val="216B7F"/>
+          </a:solidFill>
+          <a:ln>
+            <a:noFill/>
+          </a:ln>
+        </p:spPr>
+        <p:txBody>
+          <a:bodyPr/>
+          <a:lstStyle/>
+          <a:p>
+            <a:endParaRPr lang="th-TH"/>
+          </a:p>
+        </p:txBody>
+      </p:sp>
+      <p:sp>
+        <p:nvSpPr>
+          <p:cNvPr id="26" name="Card 2"/>
+          <p:cNvSpPr/>
+          <p:nvPr/>
+        </p:nvSpPr>
+        <p:spPr>
+          <a:xfrm>
+            <a:off x="3550920" y="3063240"/>
+            <a:ext cx="2453640" cy="2103120"/>
+          </a:xfrm>
+          <a:prstGeom prst="rect">
+            <a:avLst/>
+          </a:prstGeom>
+          <a:solidFill>
+            <a:srgbClr val="E8F6F5"/>
+          </a:solidFill>
+          <a:ln>
+            <a:noFill/>
+          </a:ln>
+        </p:spPr>
+        <p:txBody>
+          <a:bodyPr/>
+          <a:lstStyle/>
+          <a:p>
+            <a:endParaRPr lang="th-TH"/>
+          </a:p>
+        </p:txBody>
+      </p:sp>
+      <p:sp>
+        <p:nvSpPr>
+          <p:cNvPr id="27" name="Card 2 Role"/>
+          <p:cNvSpPr>
+            <a:spLocks noGrp="1"/>
+          </p:cNvSpPr>
+          <p:nvPr>
+            <p:ph type="body" idx="28"/>
+          </p:nvPr>
+        </p:nvSpPr>
+        <p:spPr>
+          <a:xfrm>
+            <a:off x="3733800" y="3246120"/>
+            <a:ext cx="2087880" cy="274320"/>
+          </a:xfrm>
+          <a:prstGeom prst="rect">
+            <a:avLst/>
+          </a:prstGeom>
+        </p:spPr>
+        <p:txBody>
+          <a:bodyPr wrap="square" anchor="t" lIns="0" tIns="0" rIns="0" bIns="0" rtlCol="0"/>
+          <a:lstStyle>
+            <a:lvl1pPr algn="l" marL="0" indent="0">
+              <a:lnSpc>
+                <a:spcPct val="100000"/>
+              </a:lnSpc>
+              <a:buNone/>
+              <a:defRPr lang="th-TH" sz="1200" b="1" spc="120" dirty="0">
+                <a:solidFill>
+                  <a:srgbClr val="5F5F5F"/>
+                </a:solidFill>
+                <a:latin typeface="+mn-lt"/>
+                <a:ea typeface="+mn-ea"/>
+                <a:cs typeface="+mn-cs"/>
+              </a:defRPr>
+            </a:lvl1pPr>
+          </a:lstStyle>
+          <a:p>
+            <a:pPr algn="l" marL="0" indent="0">
+              <a:lnSpc>
+                <a:spcPct val="100000"/>
+              </a:lnSpc>
+              <a:buNone/>
+            </a:pPr>
+            <a:r>
+              <a:rPr lang="th-TH" sz="1200" b="1" spc="120" dirty="0">
+                <a:solidFill>
+                  <a:srgbClr val="5F5F5F"/>
+                </a:solidFill>
+                <a:latin typeface="+mn-lt"/>
+                <a:ea typeface="+mn-ea"/>
+                <a:cs typeface="+mn-cs"/>
+              </a:rPr>
+              <a:t>บทบาท</a:t>
+            </a:r>
+          </a:p>
+        </p:txBody>
+      </p:sp>
+      <p:sp>
+        <p:nvSpPr>
+          <p:cNvPr id="28" name="Card 2 Name"/>
+          <p:cNvSpPr>
+            <a:spLocks noGrp="1"/>
+          </p:cNvSpPr>
+          <p:nvPr>
+            <p:ph type="body" idx="29"/>
+          </p:nvPr>
+        </p:nvSpPr>
+        <p:spPr>
+          <a:xfrm>
+            <a:off x="3733800" y="3529584"/>
+            <a:ext cx="2087880" cy="338328"/>
+          </a:xfrm>
+          <a:prstGeom prst="rect">
+            <a:avLst/>
+          </a:prstGeom>
+        </p:spPr>
+        <p:txBody>
+          <a:bodyPr wrap="square" anchor="t" lIns="0" tIns="0" rIns="0" bIns="0" rtlCol="0"/>
+          <a:lstStyle>
+            <a:lvl1pPr algn="l" marL="0" indent="0">
+              <a:lnSpc>
+                <a:spcPct val="100000"/>
+              </a:lnSpc>
+              <a:buNone/>
+              <a:defRPr lang="th-TH" sz="2000" b="1" dirty="0">
+                <a:solidFill>
+                  <a:srgbClr val="23436D"/>
+                </a:solidFill>
+                <a:latin typeface="+mj-lt"/>
+                <a:ea typeface="+mj-ea"/>
+                <a:cs typeface="+mj-cs"/>
+              </a:defRPr>
+            </a:lvl1pPr>
+          </a:lstStyle>
+          <a:p>
+            <a:pPr algn="l" marL="0" indent="0">
+              <a:lnSpc>
+                <a:spcPct val="100000"/>
+              </a:lnSpc>
+              <a:buNone/>
+            </a:pPr>
+            <a:r>
+              <a:rPr lang="th-TH" sz="2000" b="1" dirty="0">
+                <a:solidFill>
+                  <a:srgbClr val="23436D"/>
+                </a:solidFill>
+                <a:latin typeface="+mj-lt"/>
+                <a:ea typeface="+mj-ea"/>
+                <a:cs typeface="+mj-cs"/>
+              </a:rPr>
+              <a:t>ชื่อผู้รับผิดชอบ</a:t>
+            </a:r>
+          </a:p>
+        </p:txBody>
+      </p:sp>
+      <p:sp>
+        <p:nvSpPr>
+          <p:cNvPr id="29" name="Card 2 Credential"/>
+          <p:cNvSpPr>
+            <a:spLocks noGrp="1"/>
+          </p:cNvSpPr>
+          <p:nvPr>
+            <p:ph type="body" idx="30"/>
+          </p:nvPr>
+        </p:nvSpPr>
+        <p:spPr>
+          <a:xfrm>
+            <a:off x="3733800" y="3895344"/>
+            <a:ext cx="2087880" cy="228600"/>
+          </a:xfrm>
+          <a:prstGeom prst="rect">
+            <a:avLst/>
+          </a:prstGeom>
+        </p:spPr>
+        <p:txBody>
+          <a:bodyPr wrap="square" anchor="t" lIns="0" tIns="0" rIns="0" bIns="0" rtlCol="0"/>
+          <a:lstStyle>
+            <a:lvl1pPr algn="l" marL="0" indent="0">
+              <a:lnSpc>
+                <a:spcPct val="100000"/>
+              </a:lnSpc>
+              <a:buNone/>
+              <a:defRPr lang="th-TH" sz="1200" dirty="0">
+                <a:solidFill>
+                  <a:srgbClr val="5F5F5F"/>
+                </a:solidFill>
+                <a:latin typeface="+mn-lt"/>
+                <a:ea typeface="+mn-ea"/>
+                <a:cs typeface="+mn-cs"/>
+              </a:defRPr>
+            </a:lvl1pPr>
+          </a:lstStyle>
+          <a:p>
+            <a:pPr algn="l" marL="0" indent="0">
+              <a:lnSpc>
+                <a:spcPct val="100000"/>
+              </a:lnSpc>
+              <a:buNone/>
+            </a:pPr>
+            <a:r>
+              <a:rPr lang="th-TH" sz="1200" dirty="0">
+                <a:solidFill>
+                  <a:srgbClr val="5F5F5F"/>
+                </a:solidFill>
+                <a:latin typeface="+mn-lt"/>
+                <a:ea typeface="+mn-ea"/>
+                <a:cs typeface="+mn-cs"/>
+              </a:rPr>
+              <a:t>ประสบการณ์ · วุฒิบัตร</a:t>
+            </a:r>
+          </a:p>
+        </p:txBody>
+      </p:sp>
+      <p:sp>
+        <p:nvSpPr>
+          <p:cNvPr id="30" name="Card 2 Duties"/>
+          <p:cNvSpPr>
+            <a:spLocks noGrp="1"/>
+          </p:cNvSpPr>
+          <p:nvPr>
+            <p:ph type="body" idx="31"/>
+          </p:nvPr>
+        </p:nvSpPr>
+        <p:spPr>
+          <a:xfrm>
+            <a:off x="3733800" y="4251960"/>
+            <a:ext cx="2087880" cy="731520"/>
+          </a:xfrm>
+          <a:prstGeom prst="rect">
+            <a:avLst/>
+          </a:prstGeom>
+        </p:spPr>
+        <p:txBody>
+          <a:bodyPr wrap="square" anchor="t" lIns="0" tIns="0" rIns="0" bIns="0" rtlCol="0"/>
+          <a:lstStyle>
+            <a:lvl1pPr algn="l" marL="182880" indent="-182880">
+              <a:lnSpc>
+                <a:spcPct val="132000"/>
+              </a:lnSpc>
+              <a:spcBef>
+                <a:spcPts val="500"/>
+              </a:spcBef>
+              <a:buClr>
+                <a:srgbClr val="216B7F"/>
+              </a:buClr>
+              <a:buSzPct val="90000"/>
+              <a:buFont typeface="Arial"/>
+              <a:buChar char="•"/>
+              <a:defRPr lang="th-TH" sz="1200" dirty="0">
+                <a:solidFill>
+                  <a:srgbClr val="333333"/>
+                </a:solidFill>
+                <a:latin typeface="+mn-lt"/>
+                <a:ea typeface="+mn-ea"/>
+                <a:cs typeface="+mn-cs"/>
+              </a:defRPr>
+            </a:lvl1pPr>
+            <a:lvl2pPr algn="l" marL="548640" indent="-182880">
+              <a:lnSpc>
+                <a:spcPct val="132000"/>
+              </a:lnSpc>
+              <a:spcBef>
+                <a:spcPts val="350"/>
+              </a:spcBef>
+              <a:buClr>
+                <a:srgbClr val="5F5F5F"/>
+              </a:buClr>
+              <a:buSzPct val="90000"/>
+              <a:buFont typeface="Arial"/>
+              <a:buChar char="–"/>
+              <a:defRPr lang="th-TH" sz="1200" dirty="0">
+                <a:solidFill>
+                  <a:srgbClr val="333333"/>
+                </a:solidFill>
+                <a:latin typeface="+mn-lt"/>
+                <a:ea typeface="+mn-ea"/>
+                <a:cs typeface="+mn-cs"/>
+              </a:defRPr>
+            </a:lvl2pPr>
+          </a:lstStyle>
+          <a:p>
+            <a:pPr algn="l" marL="182880" indent="-182880">
+              <a:lnSpc>
+                <a:spcPct val="132000"/>
+              </a:lnSpc>
+              <a:spcBef>
+                <a:spcPts val="500"/>
+              </a:spcBef>
+              <a:buClr>
+                <a:srgbClr val="216B7F"/>
+              </a:buClr>
+              <a:buSzPct val="90000"/>
+              <a:buFont typeface="Arial"/>
+              <a:buChar char="•"/>
+            </a:pPr>
+            <a:r>
+              <a:rPr lang="th-TH" sz="1200" dirty="0">
+                <a:solidFill>
+                  <a:srgbClr val="333333"/>
+                </a:solidFill>
+                <a:latin typeface="+mn-lt"/>
+                <a:ea typeface="+mn-ea"/>
+                <a:cs typeface="+mn-cs"/>
+              </a:rPr>
+              <a:t>หน้าที่หลัก</a:t>
+            </a:r>
+          </a:p>
+          <a:p>
+            <a:pPr algn="l" marL="548640" indent="-182880">
+              <a:lnSpc>
+                <a:spcPct val="132000"/>
+              </a:lnSpc>
+              <a:spcBef>
+                <a:spcPts val="350"/>
+              </a:spcBef>
+              <a:buClr>
+                <a:srgbClr val="5F5F5F"/>
+              </a:buClr>
+              <a:buSzPct val="90000"/>
+              <a:buFont typeface="Arial"/>
+              <a:buChar char="–"/>
+            </a:pPr>
+            <a:r>
+              <a:rPr lang="th-TH" sz="1200" dirty="0">
+                <a:solidFill>
+                  <a:srgbClr val="333333"/>
+                </a:solidFill>
+                <a:latin typeface="+mn-lt"/>
+                <a:ea typeface="+mn-ea"/>
+                <a:cs typeface="+mn-cs"/>
+              </a:rPr>
+              <a:t>หน้าที่หลัก</a:t>
+            </a:r>
+          </a:p>
+        </p:txBody>
+      </p:sp>
+      <p:sp>
+        <p:nvSpPr>
+          <p:cNvPr id="31" name="Drop 3"/>
+          <p:cNvSpPr/>
+          <p:nvPr/>
+        </p:nvSpPr>
+        <p:spPr>
+          <a:xfrm>
+            <a:off x="7407910" y="2903220"/>
+            <a:ext cx="12700" cy="160020"/>
+          </a:xfrm>
+          <a:prstGeom prst="rect">
+            <a:avLst/>
+          </a:prstGeom>
+          <a:solidFill>
+            <a:srgbClr val="216B7F"/>
+          </a:solidFill>
+          <a:ln>
+            <a:noFill/>
+          </a:ln>
+        </p:spPr>
+        <p:txBody>
+          <a:bodyPr/>
+          <a:lstStyle/>
+          <a:p>
+            <a:endParaRPr lang="th-TH"/>
+          </a:p>
+        </p:txBody>
+      </p:sp>
+      <p:sp>
+        <p:nvSpPr>
+          <p:cNvPr id="32" name="Card 3"/>
+          <p:cNvSpPr/>
+          <p:nvPr/>
+        </p:nvSpPr>
+        <p:spPr>
+          <a:xfrm>
+            <a:off x="6187440" y="3063240"/>
+            <a:ext cx="2453640" cy="2103120"/>
+          </a:xfrm>
+          <a:prstGeom prst="rect">
+            <a:avLst/>
+          </a:prstGeom>
+          <a:solidFill>
+            <a:srgbClr val="E8F6F5"/>
+          </a:solidFill>
+          <a:ln>
+            <a:noFill/>
+          </a:ln>
+        </p:spPr>
+        <p:txBody>
+          <a:bodyPr/>
+          <a:lstStyle/>
+          <a:p>
+            <a:endParaRPr lang="th-TH"/>
+          </a:p>
+        </p:txBody>
+      </p:sp>
+      <p:sp>
+        <p:nvSpPr>
+          <p:cNvPr id="33" name="Card 3 Role"/>
+          <p:cNvSpPr>
+            <a:spLocks noGrp="1"/>
+          </p:cNvSpPr>
+          <p:nvPr>
+            <p:ph type="body" idx="32"/>
+          </p:nvPr>
+        </p:nvSpPr>
+        <p:spPr>
+          <a:xfrm>
+            <a:off x="6370320" y="3246120"/>
+            <a:ext cx="2087880" cy="274320"/>
+          </a:xfrm>
+          <a:prstGeom prst="rect">
+            <a:avLst/>
+          </a:prstGeom>
+        </p:spPr>
+        <p:txBody>
+          <a:bodyPr wrap="square" anchor="t" lIns="0" tIns="0" rIns="0" bIns="0" rtlCol="0"/>
+          <a:lstStyle>
+            <a:lvl1pPr algn="l" marL="0" indent="0">
+              <a:lnSpc>
+                <a:spcPct val="100000"/>
+              </a:lnSpc>
+              <a:buNone/>
+              <a:defRPr lang="th-TH" sz="1200" b="1" spc="120" dirty="0">
+                <a:solidFill>
+                  <a:srgbClr val="5F5F5F"/>
+                </a:solidFill>
+                <a:latin typeface="+mn-lt"/>
+                <a:ea typeface="+mn-ea"/>
+                <a:cs typeface="+mn-cs"/>
+              </a:defRPr>
+            </a:lvl1pPr>
+          </a:lstStyle>
+          <a:p>
+            <a:pPr algn="l" marL="0" indent="0">
+              <a:lnSpc>
+                <a:spcPct val="100000"/>
+              </a:lnSpc>
+              <a:buNone/>
+            </a:pPr>
+            <a:r>
+              <a:rPr lang="th-TH" sz="1200" b="1" spc="120" dirty="0">
+                <a:solidFill>
+                  <a:srgbClr val="5F5F5F"/>
+                </a:solidFill>
+                <a:latin typeface="+mn-lt"/>
+                <a:ea typeface="+mn-ea"/>
+                <a:cs typeface="+mn-cs"/>
+              </a:rPr>
+              <a:t>บทบาท</a:t>
+            </a:r>
+          </a:p>
+        </p:txBody>
+      </p:sp>
+      <p:sp>
+        <p:nvSpPr>
+          <p:cNvPr id="34" name="Card 3 Name"/>
+          <p:cNvSpPr>
+            <a:spLocks noGrp="1"/>
+          </p:cNvSpPr>
+          <p:nvPr>
+            <p:ph type="body" idx="33"/>
+          </p:nvPr>
+        </p:nvSpPr>
+        <p:spPr>
+          <a:xfrm>
+            <a:off x="6370320" y="3529584"/>
+            <a:ext cx="2087880" cy="338328"/>
+          </a:xfrm>
+          <a:prstGeom prst="rect">
+            <a:avLst/>
+          </a:prstGeom>
+        </p:spPr>
+        <p:txBody>
+          <a:bodyPr wrap="square" anchor="t" lIns="0" tIns="0" rIns="0" bIns="0" rtlCol="0"/>
+          <a:lstStyle>
+            <a:lvl1pPr algn="l" marL="0" indent="0">
+              <a:lnSpc>
+                <a:spcPct val="100000"/>
+              </a:lnSpc>
+              <a:buNone/>
+              <a:defRPr lang="th-TH" sz="2000" b="1" dirty="0">
+                <a:solidFill>
+                  <a:srgbClr val="23436D"/>
+                </a:solidFill>
+                <a:latin typeface="+mj-lt"/>
+                <a:ea typeface="+mj-ea"/>
+                <a:cs typeface="+mj-cs"/>
+              </a:defRPr>
+            </a:lvl1pPr>
+          </a:lstStyle>
+          <a:p>
+            <a:pPr algn="l" marL="0" indent="0">
+              <a:lnSpc>
+                <a:spcPct val="100000"/>
+              </a:lnSpc>
+              <a:buNone/>
+            </a:pPr>
+            <a:r>
+              <a:rPr lang="th-TH" sz="2000" b="1" dirty="0">
+                <a:solidFill>
+                  <a:srgbClr val="23436D"/>
+                </a:solidFill>
+                <a:latin typeface="+mj-lt"/>
+                <a:ea typeface="+mj-ea"/>
+                <a:cs typeface="+mj-cs"/>
+              </a:rPr>
+              <a:t>ชื่อผู้รับผิดชอบ</a:t>
+            </a:r>
+          </a:p>
+        </p:txBody>
+      </p:sp>
+      <p:sp>
+        <p:nvSpPr>
+          <p:cNvPr id="35" name="Card 3 Credential"/>
+          <p:cNvSpPr>
+            <a:spLocks noGrp="1"/>
+          </p:cNvSpPr>
+          <p:nvPr>
+            <p:ph type="body" idx="34"/>
+          </p:nvPr>
+        </p:nvSpPr>
+        <p:spPr>
+          <a:xfrm>
+            <a:off x="6370320" y="3895344"/>
+            <a:ext cx="2087880" cy="228600"/>
+          </a:xfrm>
+          <a:prstGeom prst="rect">
+            <a:avLst/>
+          </a:prstGeom>
+        </p:spPr>
+        <p:txBody>
+          <a:bodyPr wrap="square" anchor="t" lIns="0" tIns="0" rIns="0" bIns="0" rtlCol="0"/>
+          <a:lstStyle>
+            <a:lvl1pPr algn="l" marL="0" indent="0">
+              <a:lnSpc>
+                <a:spcPct val="100000"/>
+              </a:lnSpc>
+              <a:buNone/>
+              <a:defRPr lang="th-TH" sz="1200" dirty="0">
+                <a:solidFill>
+                  <a:srgbClr val="5F5F5F"/>
+                </a:solidFill>
+                <a:latin typeface="+mn-lt"/>
+                <a:ea typeface="+mn-ea"/>
+                <a:cs typeface="+mn-cs"/>
+              </a:defRPr>
+            </a:lvl1pPr>
+          </a:lstStyle>
+          <a:p>
+            <a:pPr algn="l" marL="0" indent="0">
+              <a:lnSpc>
+                <a:spcPct val="100000"/>
+              </a:lnSpc>
+              <a:buNone/>
+            </a:pPr>
+            <a:r>
+              <a:rPr lang="th-TH" sz="1200" dirty="0">
+                <a:solidFill>
+                  <a:srgbClr val="5F5F5F"/>
+                </a:solidFill>
+                <a:latin typeface="+mn-lt"/>
+                <a:ea typeface="+mn-ea"/>
+                <a:cs typeface="+mn-cs"/>
+              </a:rPr>
+              <a:t>ประสบการณ์ · วุฒิบัตร</a:t>
+            </a:r>
+          </a:p>
+        </p:txBody>
+      </p:sp>
+      <p:sp>
+        <p:nvSpPr>
+          <p:cNvPr id="36" name="Card 3 Duties"/>
+          <p:cNvSpPr>
+            <a:spLocks noGrp="1"/>
+          </p:cNvSpPr>
+          <p:nvPr>
+            <p:ph type="body" idx="35"/>
+          </p:nvPr>
+        </p:nvSpPr>
+        <p:spPr>
+          <a:xfrm>
+            <a:off x="6370320" y="4251960"/>
+            <a:ext cx="2087880" cy="731520"/>
+          </a:xfrm>
+          <a:prstGeom prst="rect">
+            <a:avLst/>
+          </a:prstGeom>
+        </p:spPr>
+        <p:txBody>
+          <a:bodyPr wrap="square" anchor="t" lIns="0" tIns="0" rIns="0" bIns="0" rtlCol="0"/>
+          <a:lstStyle>
+            <a:lvl1pPr algn="l" marL="182880" indent="-182880">
+              <a:lnSpc>
+                <a:spcPct val="132000"/>
+              </a:lnSpc>
+              <a:spcBef>
+                <a:spcPts val="500"/>
+              </a:spcBef>
+              <a:buClr>
+                <a:srgbClr val="216B7F"/>
+              </a:buClr>
+              <a:buSzPct val="90000"/>
+              <a:buFont typeface="Arial"/>
+              <a:buChar char="•"/>
+              <a:defRPr lang="th-TH" sz="1200" dirty="0">
+                <a:solidFill>
+                  <a:srgbClr val="333333"/>
+                </a:solidFill>
+                <a:latin typeface="+mn-lt"/>
+                <a:ea typeface="+mn-ea"/>
+                <a:cs typeface="+mn-cs"/>
+              </a:defRPr>
+            </a:lvl1pPr>
+            <a:lvl2pPr algn="l" marL="548640" indent="-182880">
+              <a:lnSpc>
+                <a:spcPct val="132000"/>
+              </a:lnSpc>
+              <a:spcBef>
+                <a:spcPts val="350"/>
+              </a:spcBef>
+              <a:buClr>
+                <a:srgbClr val="5F5F5F"/>
+              </a:buClr>
+              <a:buSzPct val="90000"/>
+              <a:buFont typeface="Arial"/>
+              <a:buChar char="–"/>
+              <a:defRPr lang="th-TH" sz="1200" dirty="0">
+                <a:solidFill>
+                  <a:srgbClr val="333333"/>
+                </a:solidFill>
+                <a:latin typeface="+mn-lt"/>
+                <a:ea typeface="+mn-ea"/>
+                <a:cs typeface="+mn-cs"/>
+              </a:defRPr>
+            </a:lvl2pPr>
+          </a:lstStyle>
+          <a:p>
+            <a:pPr algn="l" marL="182880" indent="-182880">
+              <a:lnSpc>
+                <a:spcPct val="132000"/>
+              </a:lnSpc>
+              <a:spcBef>
+                <a:spcPts val="500"/>
+              </a:spcBef>
+              <a:buClr>
+                <a:srgbClr val="216B7F"/>
+              </a:buClr>
+              <a:buSzPct val="90000"/>
+              <a:buFont typeface="Arial"/>
+              <a:buChar char="•"/>
+            </a:pPr>
+            <a:r>
+              <a:rPr lang="th-TH" sz="1200" dirty="0">
+                <a:solidFill>
+                  <a:srgbClr val="333333"/>
+                </a:solidFill>
+                <a:latin typeface="+mn-lt"/>
+                <a:ea typeface="+mn-ea"/>
+                <a:cs typeface="+mn-cs"/>
+              </a:rPr>
+              <a:t>หน้าที่หลัก</a:t>
+            </a:r>
+          </a:p>
+          <a:p>
+            <a:pPr algn="l" marL="548640" indent="-182880">
+              <a:lnSpc>
+                <a:spcPct val="132000"/>
+              </a:lnSpc>
+              <a:spcBef>
+                <a:spcPts val="350"/>
+              </a:spcBef>
+              <a:buClr>
+                <a:srgbClr val="5F5F5F"/>
+              </a:buClr>
+              <a:buSzPct val="90000"/>
+              <a:buFont typeface="Arial"/>
+              <a:buChar char="–"/>
+            </a:pPr>
+            <a:r>
+              <a:rPr lang="th-TH" sz="1200" dirty="0">
+                <a:solidFill>
+                  <a:srgbClr val="333333"/>
+                </a:solidFill>
+                <a:latin typeface="+mn-lt"/>
+                <a:ea typeface="+mn-ea"/>
+                <a:cs typeface="+mn-cs"/>
+              </a:rPr>
+              <a:t>หน้าที่หลัก</a:t>
+            </a:r>
+          </a:p>
+        </p:txBody>
+      </p:sp>
+      <p:sp>
+        <p:nvSpPr>
+          <p:cNvPr id="37" name="Drop 4"/>
+          <p:cNvSpPr/>
+          <p:nvPr/>
+        </p:nvSpPr>
+        <p:spPr>
+          <a:xfrm>
+            <a:off x="10044430" y="2903220"/>
+            <a:ext cx="12700" cy="160020"/>
+          </a:xfrm>
+          <a:prstGeom prst="rect">
+            <a:avLst/>
+          </a:prstGeom>
+          <a:solidFill>
+            <a:srgbClr val="216B7F"/>
+          </a:solidFill>
+          <a:ln>
+            <a:noFill/>
+          </a:ln>
+        </p:spPr>
+        <p:txBody>
+          <a:bodyPr/>
+          <a:lstStyle/>
+          <a:p>
+            <a:endParaRPr lang="th-TH"/>
+          </a:p>
+        </p:txBody>
+      </p:sp>
+      <p:sp>
+        <p:nvSpPr>
+          <p:cNvPr id="38" name="Card 4"/>
+          <p:cNvSpPr/>
+          <p:nvPr/>
+        </p:nvSpPr>
+        <p:spPr>
+          <a:xfrm>
+            <a:off x="8823960" y="3063240"/>
+            <a:ext cx="2453640" cy="2103120"/>
+          </a:xfrm>
+          <a:prstGeom prst="rect">
+            <a:avLst/>
+          </a:prstGeom>
+          <a:solidFill>
+            <a:srgbClr val="E8F6F5"/>
+          </a:solidFill>
+          <a:ln>
+            <a:noFill/>
+          </a:ln>
+        </p:spPr>
+        <p:txBody>
+          <a:bodyPr/>
+          <a:lstStyle/>
+          <a:p>
+            <a:endParaRPr lang="th-TH"/>
+          </a:p>
+        </p:txBody>
+      </p:sp>
+      <p:sp>
+        <p:nvSpPr>
+          <p:cNvPr id="39" name="Card 4 Role"/>
+          <p:cNvSpPr>
+            <a:spLocks noGrp="1"/>
+          </p:cNvSpPr>
+          <p:nvPr>
+            <p:ph type="body" idx="36"/>
+          </p:nvPr>
+        </p:nvSpPr>
+        <p:spPr>
+          <a:xfrm>
+            <a:off x="9006840" y="3246120"/>
+            <a:ext cx="2087880" cy="274320"/>
+          </a:xfrm>
+          <a:prstGeom prst="rect">
+            <a:avLst/>
+          </a:prstGeom>
+        </p:spPr>
+        <p:txBody>
+          <a:bodyPr wrap="square" anchor="t" lIns="0" tIns="0" rIns="0" bIns="0" rtlCol="0"/>
+          <a:lstStyle>
+            <a:lvl1pPr algn="l" marL="0" indent="0">
+              <a:lnSpc>
+                <a:spcPct val="100000"/>
+              </a:lnSpc>
+              <a:buNone/>
+              <a:defRPr lang="th-TH" sz="1200" b="1" spc="120" dirty="0">
+                <a:solidFill>
+                  <a:srgbClr val="5F5F5F"/>
+                </a:solidFill>
+                <a:latin typeface="+mn-lt"/>
+                <a:ea typeface="+mn-ea"/>
+                <a:cs typeface="+mn-cs"/>
+              </a:defRPr>
+            </a:lvl1pPr>
+          </a:lstStyle>
+          <a:p>
+            <a:pPr algn="l" marL="0" indent="0">
+              <a:lnSpc>
+                <a:spcPct val="100000"/>
+              </a:lnSpc>
+              <a:buNone/>
+            </a:pPr>
+            <a:r>
+              <a:rPr lang="th-TH" sz="1200" b="1" spc="120" dirty="0">
+                <a:solidFill>
+                  <a:srgbClr val="5F5F5F"/>
+                </a:solidFill>
+                <a:latin typeface="+mn-lt"/>
+                <a:ea typeface="+mn-ea"/>
+                <a:cs typeface="+mn-cs"/>
+              </a:rPr>
+              <a:t>บทบาท</a:t>
+            </a:r>
+          </a:p>
+        </p:txBody>
+      </p:sp>
+      <p:sp>
+        <p:nvSpPr>
+          <p:cNvPr id="40" name="Card 4 Name"/>
+          <p:cNvSpPr>
+            <a:spLocks noGrp="1"/>
+          </p:cNvSpPr>
+          <p:nvPr>
+            <p:ph type="body" idx="37"/>
+          </p:nvPr>
+        </p:nvSpPr>
+        <p:spPr>
+          <a:xfrm>
+            <a:off x="9006840" y="3529584"/>
+            <a:ext cx="2087880" cy="338328"/>
+          </a:xfrm>
+          <a:prstGeom prst="rect">
+            <a:avLst/>
+          </a:prstGeom>
+        </p:spPr>
+        <p:txBody>
+          <a:bodyPr wrap="square" anchor="t" lIns="0" tIns="0" rIns="0" bIns="0" rtlCol="0"/>
+          <a:lstStyle>
+            <a:lvl1pPr algn="l" marL="0" indent="0">
+              <a:lnSpc>
+                <a:spcPct val="100000"/>
+              </a:lnSpc>
+              <a:buNone/>
+              <a:defRPr lang="th-TH" sz="2000" b="1" dirty="0">
+                <a:solidFill>
+                  <a:srgbClr val="23436D"/>
+                </a:solidFill>
+                <a:latin typeface="+mj-lt"/>
+                <a:ea typeface="+mj-ea"/>
+                <a:cs typeface="+mj-cs"/>
+              </a:defRPr>
+            </a:lvl1pPr>
+          </a:lstStyle>
+          <a:p>
+            <a:pPr algn="l" marL="0" indent="0">
+              <a:lnSpc>
+                <a:spcPct val="100000"/>
+              </a:lnSpc>
+              <a:buNone/>
+            </a:pPr>
+            <a:r>
+              <a:rPr lang="th-TH" sz="2000" b="1" dirty="0">
+                <a:solidFill>
+                  <a:srgbClr val="23436D"/>
+                </a:solidFill>
+                <a:latin typeface="+mj-lt"/>
+                <a:ea typeface="+mj-ea"/>
+                <a:cs typeface="+mj-cs"/>
+              </a:rPr>
+              <a:t>ชื่อผู้รับผิดชอบ</a:t>
+            </a:r>
+          </a:p>
+        </p:txBody>
+      </p:sp>
+      <p:sp>
+        <p:nvSpPr>
+          <p:cNvPr id="41" name="Card 4 Credential"/>
+          <p:cNvSpPr>
+            <a:spLocks noGrp="1"/>
+          </p:cNvSpPr>
+          <p:nvPr>
+            <p:ph type="body" idx="38"/>
+          </p:nvPr>
+        </p:nvSpPr>
+        <p:spPr>
+          <a:xfrm>
+            <a:off x="9006840" y="3895344"/>
+            <a:ext cx="2087880" cy="228600"/>
+          </a:xfrm>
+          <a:prstGeom prst="rect">
+            <a:avLst/>
+          </a:prstGeom>
+        </p:spPr>
+        <p:txBody>
+          <a:bodyPr wrap="square" anchor="t" lIns="0" tIns="0" rIns="0" bIns="0" rtlCol="0"/>
+          <a:lstStyle>
+            <a:lvl1pPr algn="l" marL="0" indent="0">
+              <a:lnSpc>
+                <a:spcPct val="100000"/>
+              </a:lnSpc>
+              <a:buNone/>
+              <a:defRPr lang="th-TH" sz="1200" dirty="0">
+                <a:solidFill>
+                  <a:srgbClr val="5F5F5F"/>
+                </a:solidFill>
+                <a:latin typeface="+mn-lt"/>
+                <a:ea typeface="+mn-ea"/>
+                <a:cs typeface="+mn-cs"/>
+              </a:defRPr>
+            </a:lvl1pPr>
+          </a:lstStyle>
+          <a:p>
+            <a:pPr algn="l" marL="0" indent="0">
+              <a:lnSpc>
+                <a:spcPct val="100000"/>
+              </a:lnSpc>
+              <a:buNone/>
+            </a:pPr>
+            <a:r>
+              <a:rPr lang="th-TH" sz="1200" dirty="0">
+                <a:solidFill>
+                  <a:srgbClr val="5F5F5F"/>
+                </a:solidFill>
+                <a:latin typeface="+mn-lt"/>
+                <a:ea typeface="+mn-ea"/>
+                <a:cs typeface="+mn-cs"/>
+              </a:rPr>
+              <a:t>ประสบการณ์ · วุฒิบัตร</a:t>
+            </a:r>
+          </a:p>
+        </p:txBody>
+      </p:sp>
+      <p:sp>
+        <p:nvSpPr>
+          <p:cNvPr id="42" name="Card 4 Duties"/>
+          <p:cNvSpPr>
+            <a:spLocks noGrp="1"/>
+          </p:cNvSpPr>
+          <p:nvPr>
+            <p:ph type="body" idx="39"/>
+          </p:nvPr>
+        </p:nvSpPr>
+        <p:spPr>
+          <a:xfrm>
+            <a:off x="9006840" y="4251960"/>
+            <a:ext cx="2087880" cy="731520"/>
+          </a:xfrm>
+          <a:prstGeom prst="rect">
+            <a:avLst/>
+          </a:prstGeom>
+        </p:spPr>
+        <p:txBody>
+          <a:bodyPr wrap="square" anchor="t" lIns="0" tIns="0" rIns="0" bIns="0" rtlCol="0"/>
+          <a:lstStyle>
+            <a:lvl1pPr algn="l" marL="182880" indent="-182880">
+              <a:lnSpc>
+                <a:spcPct val="132000"/>
+              </a:lnSpc>
+              <a:spcBef>
+                <a:spcPts val="500"/>
+              </a:spcBef>
+              <a:buClr>
+                <a:srgbClr val="216B7F"/>
+              </a:buClr>
+              <a:buSzPct val="90000"/>
+              <a:buFont typeface="Arial"/>
+              <a:buChar char="•"/>
+              <a:defRPr lang="th-TH" sz="1200" dirty="0">
+                <a:solidFill>
+                  <a:srgbClr val="333333"/>
+                </a:solidFill>
+                <a:latin typeface="+mn-lt"/>
+                <a:ea typeface="+mn-ea"/>
+                <a:cs typeface="+mn-cs"/>
+              </a:defRPr>
+            </a:lvl1pPr>
+            <a:lvl2pPr algn="l" marL="548640" indent="-182880">
+              <a:lnSpc>
+                <a:spcPct val="132000"/>
+              </a:lnSpc>
+              <a:spcBef>
+                <a:spcPts val="350"/>
+              </a:spcBef>
+              <a:buClr>
+                <a:srgbClr val="5F5F5F"/>
+              </a:buClr>
+              <a:buSzPct val="90000"/>
+              <a:buFont typeface="Arial"/>
+              <a:buChar char="–"/>
+              <a:defRPr lang="th-TH" sz="1200" dirty="0">
+                <a:solidFill>
+                  <a:srgbClr val="333333"/>
+                </a:solidFill>
+                <a:latin typeface="+mn-lt"/>
+                <a:ea typeface="+mn-ea"/>
+                <a:cs typeface="+mn-cs"/>
+              </a:defRPr>
+            </a:lvl2pPr>
+          </a:lstStyle>
+          <a:p>
+            <a:pPr algn="l" marL="182880" indent="-182880">
+              <a:lnSpc>
+                <a:spcPct val="132000"/>
+              </a:lnSpc>
+              <a:spcBef>
+                <a:spcPts val="500"/>
+              </a:spcBef>
+              <a:buClr>
+                <a:srgbClr val="216B7F"/>
+              </a:buClr>
+              <a:buSzPct val="90000"/>
+              <a:buFont typeface="Arial"/>
+              <a:buChar char="•"/>
+            </a:pPr>
+            <a:r>
+              <a:rPr lang="th-TH" sz="1200" dirty="0">
+                <a:solidFill>
+                  <a:srgbClr val="333333"/>
+                </a:solidFill>
+                <a:latin typeface="+mn-lt"/>
+                <a:ea typeface="+mn-ea"/>
+                <a:cs typeface="+mn-cs"/>
+              </a:rPr>
+              <a:t>หน้าที่หลัก</a:t>
+            </a:r>
+          </a:p>
+          <a:p>
+            <a:pPr algn="l" marL="548640" indent="-182880">
+              <a:lnSpc>
+                <a:spcPct val="132000"/>
+              </a:lnSpc>
+              <a:spcBef>
+                <a:spcPts val="350"/>
+              </a:spcBef>
+              <a:buClr>
+                <a:srgbClr val="5F5F5F"/>
+              </a:buClr>
+              <a:buSzPct val="90000"/>
+              <a:buFont typeface="Arial"/>
+              <a:buChar char="–"/>
+            </a:pPr>
+            <a:r>
+              <a:rPr lang="th-TH" sz="1200" dirty="0">
+                <a:solidFill>
+                  <a:srgbClr val="333333"/>
+                </a:solidFill>
+                <a:latin typeface="+mn-lt"/>
+                <a:ea typeface="+mn-ea"/>
+                <a:cs typeface="+mn-cs"/>
+              </a:rPr>
+              <a:t>หน้าที่หลัก</a:t>
+            </a:r>
+          </a:p>
+        </p:txBody>
+      </p:sp>
+      <p:sp>
+        <p:nvSpPr>
+          <p:cNvPr id="43" name="Note"/>
+          <p:cNvSpPr>
+            <a:spLocks noGrp="1"/>
+          </p:cNvSpPr>
+          <p:nvPr>
+            <p:ph type="body" idx="1"/>
+          </p:nvPr>
+        </p:nvSpPr>
+        <p:spPr>
+          <a:xfrm>
+            <a:off x="914400" y="5257800"/>
+            <a:ext cx="10363200" cy="274320"/>
+          </a:xfrm>
+          <a:prstGeom prst="rect">
+            <a:avLst/>
+          </a:prstGeom>
+        </p:spPr>
+        <p:txBody>
+          <a:bodyPr wrap="square" anchor="t" lIns="0" tIns="0" rIns="0" bIns="0" rtlCol="0"/>
+          <a:lstStyle>
+            <a:lvl1pPr algn="l" marL="0" indent="0">
+              <a:lnSpc>
+                <a:spcPct val="130000"/>
+              </a:lnSpc>
+              <a:buNone/>
+              <a:defRPr lang="th-TH" sz="1000" dirty="0">
+                <a:solidFill>
+                  <a:srgbClr val="5F5F5F"/>
+                </a:solidFill>
+                <a:latin typeface="+mn-lt"/>
+                <a:ea typeface="+mn-ea"/>
+                <a:cs typeface="+mn-cs"/>
+              </a:defRPr>
+            </a:lvl1pPr>
+          </a:lstStyle>
+          <a:p>
+            <a:pPr algn="l" marL="0" indent="0">
+              <a:lnSpc>
+                <a:spcPct val="130000"/>
+              </a:lnSpc>
+              <a:buNone/>
+            </a:pPr>
+            <a:r>
+              <a:rPr lang="th-TH" sz="1000" dirty="0">
+                <a:solidFill>
+                  <a:srgbClr val="5F5F5F"/>
+                </a:solidFill>
+                <a:latin typeface="+mn-lt"/>
+                <a:ea typeface="+mn-ea"/>
+                <a:cs typeface="+mn-cs"/>
+              </a:rPr>
+              <a:t>จำนวนคนรวม · ประวัติเต็มอยู่ภาคผนวก</a:t>
+            </a:r>
+          </a:p>
+        </p:txBody>
+      </p:sp>
+      <p:sp>
+        <p:nvSpPr>
+          <p:cNvPr id="44" name="Takeaway Band"/>
+          <p:cNvSpPr/>
+          <p:nvPr/>
+        </p:nvSpPr>
+        <p:spPr>
+          <a:xfrm>
+            <a:off x="914400" y="5623560"/>
+            <a:ext cx="10363200" cy="411480"/>
+          </a:xfrm>
+          <a:prstGeom prst="rect">
+            <a:avLst/>
+          </a:prstGeom>
+          <a:solidFill>
+            <a:srgbClr val="E8F6F5"/>
+          </a:solidFill>
+          <a:ln>
+            <a:noFill/>
+          </a:ln>
+        </p:spPr>
+        <p:txBody>
+          <a:bodyPr/>
+          <a:lstStyle/>
+          <a:p>
+            <a:endParaRPr lang="th-TH"/>
+          </a:p>
+        </p:txBody>
+      </p:sp>
+      <p:sp>
+        <p:nvSpPr>
+          <p:cNvPr id="45" name="Takeaway Label"/>
+          <p:cNvSpPr>
+            <a:spLocks noGrp="1"/>
+          </p:cNvSpPr>
+          <p:nvPr>
+            <p:ph type="body" idx="2"/>
+          </p:nvPr>
+        </p:nvSpPr>
+        <p:spPr>
+          <a:xfrm>
+            <a:off x="1097280" y="5684520"/>
+            <a:ext cx="1828800" cy="289560"/>
+          </a:xfrm>
+          <a:prstGeom prst="rect">
+            <a:avLst/>
+          </a:prstGeom>
+        </p:spPr>
+        <p:txBody>
+          <a:bodyPr wrap="square" anchor="ctr" lIns="0" tIns="0" rIns="0" bIns="0" rtlCol="0"/>
+          <a:lstStyle>
+            <a:lvl1pPr algn="l" marL="0" indent="0">
+              <a:lnSpc>
+                <a:spcPct val="100000"/>
+              </a:lnSpc>
+              <a:buNone/>
+              <a:defRPr lang="th-TH" sz="1200" b="1" spc="120" dirty="0">
+                <a:solidFill>
+                  <a:srgbClr val="216B7F"/>
+                </a:solidFill>
+                <a:latin typeface="+mn-lt"/>
+                <a:ea typeface="+mn-ea"/>
+                <a:cs typeface="+mn-cs"/>
+              </a:defRPr>
+            </a:lvl1pPr>
+          </a:lstStyle>
+          <a:p>
+            <a:pPr algn="l" marL="0" indent="0">
+              <a:lnSpc>
+                <a:spcPct val="100000"/>
+              </a:lnSpc>
+              <a:buNone/>
+            </a:pPr>
+            <a:r>
+              <a:rPr lang="th-TH" sz="1200" b="1" spc="120" dirty="0">
+                <a:solidFill>
+                  <a:srgbClr val="216B7F"/>
+                </a:solidFill>
+                <a:latin typeface="+mn-lt"/>
+                <a:ea typeface="+mn-ea"/>
+                <a:cs typeface="+mn-cs"/>
+              </a:rPr>
+              <a:t>สรุป</a:t>
+            </a:r>
+          </a:p>
+        </p:txBody>
+      </p:sp>
+      <p:sp>
+        <p:nvSpPr>
+          <p:cNvPr id="46" name="Takeaway Copy"/>
+          <p:cNvSpPr>
+            <a:spLocks noGrp="1"/>
+          </p:cNvSpPr>
+          <p:nvPr>
+            <p:ph type="body" idx="3"/>
+          </p:nvPr>
+        </p:nvSpPr>
+        <p:spPr>
+          <a:xfrm>
+            <a:off x="2926080" y="5684520"/>
+            <a:ext cx="8168640" cy="289560"/>
+          </a:xfrm>
+          <a:prstGeom prst="rect">
+            <a:avLst/>
+          </a:prstGeom>
+        </p:spPr>
+        <p:txBody>
+          <a:bodyPr wrap="square" anchor="ctr" lIns="0" tIns="0" rIns="0" bIns="0" rtlCol="0"/>
+          <a:lstStyle>
+            <a:lvl1pPr algn="l" marL="0" indent="0">
+              <a:lnSpc>
+                <a:spcPct val="100000"/>
+              </a:lnSpc>
+              <a:buNone/>
+              <a:defRPr lang="th-TH" sz="1400" dirty="0">
+                <a:solidFill>
+                  <a:srgbClr val="333333"/>
+                </a:solidFill>
+                <a:latin typeface="+mn-lt"/>
+                <a:ea typeface="+mn-ea"/>
+                <a:cs typeface="+mn-cs"/>
+              </a:defRPr>
+            </a:lvl1pPr>
+          </a:lstStyle>
+          <a:p>
+            <a:pPr algn="l" marL="0" indent="0">
+              <a:lnSpc>
+                <a:spcPct val="100000"/>
+              </a:lnSpc>
+              <a:buNone/>
+            </a:pPr>
+            <a:r>
+              <a:rPr lang="th-TH" sz="1400" dirty="0">
+                <a:solidFill>
+                  <a:srgbClr val="333333"/>
+                </a:solidFill>
+                <a:latin typeface="+mn-lt"/>
+                <a:ea typeface="+mn-ea"/>
+                <a:cs typeface="+mn-cs"/>
+              </a:rPr>
+              <a:t>ประเด็นสรุปหนึ่งบรรทัด</a:t>
+            </a:r>
+          </a:p>
+        </p:txBody>
+      </p:sp>
+      <p:sp>
+        <p:nvSpPr>
+          <p:cNvPr id="90" name="Foot Bar 1"/>
+          <p:cNvSpPr/>
+          <p:nvPr/>
+        </p:nvSpPr>
+        <p:spPr>
+          <a:xfrm>
+            <a:off x="0" y="6675120"/>
+            <a:ext cx="822960" cy="137160"/>
+          </a:xfrm>
+          <a:prstGeom prst="rect">
+            <a:avLst/>
+          </a:prstGeom>
+          <a:solidFill>
+            <a:srgbClr val="216B7F"/>
+          </a:solidFill>
+          <a:ln>
+            <a:noFill/>
+          </a:ln>
+        </p:spPr>
+        <p:txBody>
+          <a:bodyPr/>
+          <a:lstStyle/>
+          <a:p>
+            <a:endParaRPr lang="th-TH"/>
+          </a:p>
+        </p:txBody>
+      </p:sp>
+      <p:sp>
+        <p:nvSpPr>
+          <p:cNvPr id="91" name="Foot Bar 2"/>
+          <p:cNvSpPr/>
+          <p:nvPr/>
+        </p:nvSpPr>
+        <p:spPr>
+          <a:xfrm>
+            <a:off x="822960" y="6675120"/>
+            <a:ext cx="822960" cy="137160"/>
+          </a:xfrm>
+          <a:prstGeom prst="rect">
+            <a:avLst/>
+          </a:prstGeom>
+          <a:solidFill>
+            <a:srgbClr val="B1C4C9"/>
+          </a:solidFill>
+          <a:ln>
+            <a:noFill/>
+          </a:ln>
+        </p:spPr>
+        <p:txBody>
+          <a:bodyPr/>
+          <a:lstStyle/>
+          <a:p>
+            <a:endParaRPr lang="th-TH"/>
+          </a:p>
+        </p:txBody>
+      </p:sp>
+      <p:sp>
+        <p:nvSpPr>
+          <p:cNvPr id="92" name="Foot Bar 3"/>
+          <p:cNvSpPr/>
+          <p:nvPr/>
+        </p:nvSpPr>
+        <p:spPr>
+          <a:xfrm>
+            <a:off x="1645920" y="6675120"/>
+            <a:ext cx="822960" cy="137160"/>
+          </a:xfrm>
+          <a:prstGeom prst="rect">
+            <a:avLst/>
+          </a:prstGeom>
+          <a:solidFill>
+            <a:srgbClr val="E1E1E1"/>
+          </a:solidFill>
+          <a:ln>
+            <a:noFill/>
+          </a:ln>
+        </p:spPr>
+        <p:txBody>
+          <a:bodyPr/>
+          <a:lstStyle/>
+          <a:p>
+            <a:endParaRPr lang="th-TH"/>
+          </a:p>
+        </p:txBody>
+      </p:sp>
+      <p:sp>
+        <p:nvSpPr>
+          <p:cNvPr id="93" name="Footer Placeholder"/>
+          <p:cNvSpPr>
+            <a:spLocks noGrp="1"/>
+          </p:cNvSpPr>
+          <p:nvPr>
+            <p:ph type="ftr" idx="11"/>
+          </p:nvPr>
+        </p:nvSpPr>
+        <p:spPr>
+          <a:xfrm>
+            <a:off x="2697480" y="6400800"/>
+            <a:ext cx="4572000" cy="274320"/>
+          </a:xfrm>
+          <a:prstGeom prst="rect">
+            <a:avLst/>
+          </a:prstGeom>
+        </p:spPr>
+        <p:txBody>
+          <a:bodyPr wrap="square" anchor="ctr" lIns="0" tIns="0" rIns="0" bIns="0" rtlCol="0"/>
+          <a:lstStyle>
+            <a:lvl1pPr algn="l" marL="0" indent="0">
+              <a:lnSpc>
+                <a:spcPct val="100000"/>
+              </a:lnSpc>
+              <a:buNone/>
+              <a:defRPr lang="th-TH" sz="1000" dirty="0">
+                <a:solidFill>
+                  <a:srgbClr val="5F5F5F"/>
+                </a:solidFill>
+                <a:latin typeface="+mn-lt"/>
+                <a:ea typeface="+mn-ea"/>
+                <a:cs typeface="+mn-cs"/>
+              </a:defRPr>
+            </a:lvl1pPr>
+          </a:lstStyle>
+          <a:p>
+            <a:pPr algn="l" marL="0" indent="0">
+              <a:lnSpc>
+                <a:spcPct val="100000"/>
+              </a:lnSpc>
+              <a:buNone/>
+            </a:pPr>
+            <a:endParaRPr lang="th-TH" sz="1000"/>
+          </a:p>
+        </p:txBody>
+      </p:sp>
+      <p:sp>
+        <p:nvSpPr>
+          <p:cNvPr id="94" name="Slide Number Placeholder"/>
+          <p:cNvSpPr>
+            <a:spLocks noGrp="1"/>
+          </p:cNvSpPr>
+          <p:nvPr>
+            <p:ph type="sldNum" sz="quarter" idx="12"/>
+          </p:nvPr>
+        </p:nvSpPr>
+        <p:spPr>
+          <a:xfrm>
+            <a:off x="10591800" y="6400800"/>
+            <a:ext cx="1371600" cy="274320"/>
+          </a:xfrm>
+          <a:prstGeom prst="rect">
+            <a:avLst/>
+          </a:prstGeom>
+        </p:spPr>
+        <p:txBody>
+          <a:bodyPr anchor="ctr"/>
+          <a:lstStyle>
+            <a:lvl1pPr algn="r" marL="0" indent="0">
+              <a:lnSpc>
+                <a:spcPct val="100000"/>
+              </a:lnSpc>
+              <a:buNone/>
+              <a:defRPr lang="th-TH" sz="1000" dirty="0">
+                <a:solidFill>
+                  <a:srgbClr val="5F5F5F"/>
+                </a:solidFill>
+                <a:latin typeface="+mn-lt"/>
+                <a:ea typeface="+mn-ea"/>
+                <a:cs typeface="+mn-cs"/>
+              </a:defRPr>
+            </a:lvl1pPr>
+          </a:lstStyle>
+          <a:p>
+            <a:pPr algn="r" marL="0" indent="0">
+              <a:buNone/>
+            </a:pPr>
+            <a:fld id="{B7E3A1C2-4F5D-4A88-9C1E-6D2F0A93B451}" type="slidenum">
+              <a:rPr lang="th-TH" sz="1000">
+                <a:solidFill>
+                  <a:srgbClr val="5F5F5F"/>
+                </a:solidFill>
+                <a:latin typeface="+mn-lt"/>
+                <a:cs typeface="+mn-cs"/>
+              </a:rPr>
+              <a:t>2</a:t>
+            </a:fld>
+            <a:endParaRPr lang="th-TH" sz="1000"/>
+          </a:p>
+        </p:txBody>
+      </p:sp>
+      <p:sp>
+        <p:nvSpPr>
+          <p:cNvPr id="95" name="Corner Lockup"/>
+          <p:cNvSpPr/>
+          <p:nvPr/>
+        </p:nvSpPr>
+        <p:spPr>
+          <a:xfrm rot="10800000">
+            <a:off x="10546080" y="-274320"/>
+            <a:ext cx="1645920" cy="822960"/>
+          </a:xfrm>
+          <a:prstGeom prst="round2SameRect">
+            <a:avLst>
+              <a:gd name="adj1" fmla="val 12000"/>
+              <a:gd name="adj2" fmla="val 0"/>
+            </a:avLst>
+          </a:prstGeom>
+          <a:solidFill>
+            <a:srgbClr val="FFFFFF"/>
+          </a:solidFill>
+          <a:ln w="12700">
+            <a:solidFill>
+              <a:srgbClr val="216B7F"/>
+            </a:solidFill>
+          </a:ln>
+        </p:spPr>
+        <p:txBody>
+          <a:bodyPr/>
+          <a:lstStyle/>
+          <a:p>
+            <a:endParaRPr lang="th-TH"/>
+          </a:p>
+        </p:txBody>
+      </p:sp>
+      <p:pic>
+        <p:nvPicPr>
+          <p:cNvPr id="96" name="NCT Mark"/>
+          <p:cNvPicPr>
+            <a:picLocks noChangeAspect="1"/>
+          </p:cNvPicPr>
+          <p:nvPr/>
+        </p:nvPicPr>
+        <p:blipFill>
+          <a:blip r:embed="rId2"/>
+          <a:stretch>
+            <a:fillRect/>
+          </a:stretch>
+        </p:blipFill>
+        <p:spPr>
+          <a:xfrm>
+            <a:off x="11094720" y="99822"/>
+            <a:ext cx="548640" cy="348996"/>
+          </a:xfrm>
+          <a:prstGeom prst="rect">
+            <a:avLst/>
+          </a:prstGeom>
+        </p:spPr>
+      </p:pic>
+    </p:spTree>
+  </p:cSld>
+  <p:clrMapOvr>
+    <a:masterClrMapping/>
+  </p:clrMapOvr>
+</p:sldLayout>
+</file>
+
 <file path=ppt/slideLayouts/slideLayout3.xml><?xml version="1.0" encoding="utf-8"?>
 <p:sldLayout xmlns:a="http://schemas.openxmlformats.org/drawingml/2006/main" xmlns:r="http://schemas.openxmlformats.org/officeDocument/2006/relationships" xmlns:p="http://schemas.openxmlformats.org/presentationml/2006/main" type="obj" showMasterSp="0" preserve="1">
   <p:cSld name="03 Title and Content">
@@ -26454,7 +28830,7 @@
           <p:nvPr/>
         </p:nvPicPr>
         <p:blipFill>
-          <a:blip r:embed="rId26"/>
+          <a:blip r:embed="rId27"/>
           <a:stretch>
             <a:fillRect/>
           </a:stretch>
@@ -26497,6 +28873,7 @@
     <p:sldLayoutId id="2147483670" r:id="rId22"/>
     <p:sldLayoutId id="2147483671" r:id="rId23"/>
     <p:sldLayoutId id="2147483672" r:id="rId24"/>
+    <p:sldLayoutId id="2147483673" r:id="rId25"/>
   </p:sldLayoutIdLst>
   <p:txStyles>
     <p:titleStyle>
@@ -33483,6 +35860,618 @@
             <a:pPr/>
             <a:r>
               <a:rPr lang="th-TH" dirty="0"/>
+              <a:t>ทีม 7 คน ทำเองตั้งแต่ออกแบบจนถึงอบรม</a:t>
+            </a:r>
+          </a:p>
+        </p:txBody>
+      </p:sp>
+      <p:sp>
+        <p:nvSpPr>
+          <p:cNvPr id="3" name="Note"/>
+          <p:cNvSpPr>
+            <a:spLocks noGrp="1"/>
+          </p:cNvSpPr>
+          <p:nvPr>
+            <p:ph type="body" idx="1"/>
+          </p:nvPr>
+        </p:nvSpPr>
+        <p:spPr/>
+        <p:txBody>
+          <a:bodyPr/>
+          <a:lstStyle/>
+          <a:p>
+            <a:pPr/>
+            <a:r>
+              <a:rPr lang="th-TH" dirty="0"/>
+              <a:t>ทีมรวม 7 คน · ประวัติและวุฒิบัตรเต็มอยู่ภาคผนวก ข</a:t>
+            </a:r>
+          </a:p>
+        </p:txBody>
+      </p:sp>
+      <p:sp>
+        <p:nvSpPr>
+          <p:cNvPr id="4" name="TL"/>
+          <p:cNvSpPr>
+            <a:spLocks noGrp="1"/>
+          </p:cNvSpPr>
+          <p:nvPr>
+            <p:ph type="body" idx="2"/>
+          </p:nvPr>
+        </p:nvSpPr>
+        <p:spPr/>
+        <p:txBody>
+          <a:bodyPr/>
+          <a:lstStyle/>
+          <a:p>
+            <a:pPr/>
+            <a:r>
+              <a:rPr lang="th-TH" dirty="0"/>
+              <a:t>สรุป</a:t>
+            </a:r>
+          </a:p>
+        </p:txBody>
+      </p:sp>
+      <p:sp>
+        <p:nvSpPr>
+          <p:cNvPr id="5" name="TC"/>
+          <p:cNvSpPr>
+            <a:spLocks noGrp="1"/>
+          </p:cNvSpPr>
+          <p:nvPr>
+            <p:ph type="body" idx="3"/>
+          </p:nvPr>
+        </p:nvSpPr>
+        <p:spPr/>
+        <p:txBody>
+          <a:bodyPr/>
+          <a:lstStyle/>
+          <a:p>
+            <a:pPr/>
+            <a:r>
+              <a:rPr lang="th-TH" dirty="0"/>
+              <a:t>ทุกตำแหน่งมีคุณวุฒิครบตาม TOR ข้อ 5.3 ไม่มีงานส่วนไหนจ้างช่วง</a:t>
+            </a:r>
+          </a:p>
+        </p:txBody>
+      </p:sp>
+      <p:sp>
+        <p:nvSpPr>
+          <p:cNvPr id="10" name="R0"/>
+          <p:cNvSpPr>
+            <a:spLocks noGrp="1"/>
+          </p:cNvSpPr>
+          <p:nvPr>
+            <p:ph type="body" idx="20"/>
+          </p:nvPr>
+        </p:nvSpPr>
+        <p:spPr/>
+        <p:txBody>
+          <a:bodyPr/>
+          <a:lstStyle/>
+          <a:p>
+            <a:pPr/>
+            <a:r>
+              <a:rPr lang="th-TH" dirty="0"/>
+              <a:t>ผู้จัดการโครงการ</a:t>
+            </a:r>
+          </a:p>
+        </p:txBody>
+      </p:sp>
+      <p:sp>
+        <p:nvSpPr>
+          <p:cNvPr id="11" name="N0"/>
+          <p:cNvSpPr>
+            <a:spLocks noGrp="1"/>
+          </p:cNvSpPr>
+          <p:nvPr>
+            <p:ph type="body" idx="21"/>
+          </p:nvPr>
+        </p:nvSpPr>
+        <p:spPr/>
+        <p:txBody>
+          <a:bodyPr/>
+          <a:lstStyle/>
+          <a:p>
+            <a:pPr/>
+            <a:r>
+              <a:rPr lang="th-TH" dirty="0"/>
+              <a:t>กานดา ศรีสุข</a:t>
+            </a:r>
+          </a:p>
+        </p:txBody>
+      </p:sp>
+      <p:sp>
+        <p:nvSpPr>
+          <p:cNvPr id="12" name="C0"/>
+          <p:cNvSpPr>
+            <a:spLocks noGrp="1"/>
+          </p:cNvSpPr>
+          <p:nvPr>
+            <p:ph type="body" idx="22"/>
+          </p:nvPr>
+        </p:nvSpPr>
+        <p:spPr/>
+        <p:txBody>
+          <a:bodyPr/>
+          <a:lstStyle/>
+          <a:p>
+            <a:pPr/>
+            <a:r>
+              <a:rPr lang="th-TH" dirty="0"/>
+              <a:t>PMP · ประสบการณ์ 15 ปี</a:t>
+            </a:r>
+          </a:p>
+        </p:txBody>
+      </p:sp>
+      <p:sp>
+        <p:nvSpPr>
+          <p:cNvPr id="13" name="D0"/>
+          <p:cNvSpPr>
+            <a:spLocks noGrp="1"/>
+          </p:cNvSpPr>
+          <p:nvPr>
+            <p:ph type="body" idx="23"/>
+          </p:nvPr>
+        </p:nvSpPr>
+        <p:spPr/>
+        <p:txBody>
+          <a:bodyPr/>
+          <a:lstStyle/>
+          <a:p>
+            <a:pPr/>
+            <a:r>
+              <a:rPr lang="th-TH" dirty="0"/>
+              <a:t>คุมแผนและการส่งมอบทั้ง 3 งวด</a:t>
+            </a:r>
+          </a:p>
+          <a:p>
+            <a:pPr/>
+            <a:r>
+              <a:rPr lang="th-TH" dirty="0"/>
+              <a:t>ประสานกับคณะกรรมการตรวจรับ</a:t>
+            </a:r>
+          </a:p>
+        </p:txBody>
+      </p:sp>
+      <p:sp>
+        <p:nvSpPr>
+          <p:cNvPr id="14" name="R1"/>
+          <p:cNvSpPr>
+            <a:spLocks noGrp="1"/>
+          </p:cNvSpPr>
+          <p:nvPr>
+            <p:ph type="body" idx="24"/>
+          </p:nvPr>
+        </p:nvSpPr>
+        <p:spPr/>
+        <p:txBody>
+          <a:bodyPr/>
+          <a:lstStyle/>
+          <a:p>
+            <a:pPr/>
+            <a:r>
+              <a:rPr lang="th-TH" dirty="0"/>
+              <a:t>นักวิเคราะห์ธุรกิจ</a:t>
+            </a:r>
+          </a:p>
+        </p:txBody>
+      </p:sp>
+      <p:sp>
+        <p:nvSpPr>
+          <p:cNvPr id="15" name="N1"/>
+          <p:cNvSpPr>
+            <a:spLocks noGrp="1"/>
+          </p:cNvSpPr>
+          <p:nvPr>
+            <p:ph type="body" idx="25"/>
+          </p:nvPr>
+        </p:nvSpPr>
+        <p:spPr/>
+        <p:txBody>
+          <a:bodyPr/>
+          <a:lstStyle/>
+          <a:p>
+            <a:pPr/>
+            <a:r>
+              <a:rPr lang="th-TH" dirty="0"/>
+              <a:t>ปวีณา ทองดี</a:t>
+            </a:r>
+          </a:p>
+        </p:txBody>
+      </p:sp>
+      <p:sp>
+        <p:nvSpPr>
+          <p:cNvPr id="16" name="C1"/>
+          <p:cNvSpPr>
+            <a:spLocks noGrp="1"/>
+          </p:cNvSpPr>
+          <p:nvPr>
+            <p:ph type="body" idx="26"/>
+          </p:nvPr>
+        </p:nvSpPr>
+        <p:spPr/>
+        <p:txBody>
+          <a:bodyPr/>
+          <a:lstStyle/>
+          <a:p>
+            <a:pPr/>
+            <a:r>
+              <a:rPr lang="th-TH" dirty="0"/>
+              <a:t>CPA · ประสบการณ์ 10 ปี</a:t>
+            </a:r>
+          </a:p>
+        </p:txBody>
+      </p:sp>
+      <p:sp>
+        <p:nvSpPr>
+          <p:cNvPr id="17" name="D1"/>
+          <p:cNvSpPr>
+            <a:spLocks noGrp="1"/>
+          </p:cNvSpPr>
+          <p:nvPr>
+            <p:ph type="body" idx="27"/>
+          </p:nvPr>
+        </p:nvSpPr>
+        <p:spPr/>
+        <p:txBody>
+          <a:bodyPr/>
+          <a:lstStyle/>
+          <a:p>
+            <a:pPr/>
+            <a:r>
+              <a:rPr lang="th-TH" dirty="0"/>
+              <a:t>เก็บความต้องการงานบัญชี</a:t>
+            </a:r>
+          </a:p>
+          <a:p>
+            <a:pPr/>
+            <a:r>
+              <a:rPr lang="th-TH" dirty="0"/>
+              <a:t>ออกแบบผังบัญชีและกฎตรวจ</a:t>
+            </a:r>
+          </a:p>
+        </p:txBody>
+      </p:sp>
+      <p:sp>
+        <p:nvSpPr>
+          <p:cNvPr id="18" name="R2"/>
+          <p:cNvSpPr>
+            <a:spLocks noGrp="1"/>
+          </p:cNvSpPr>
+          <p:nvPr>
+            <p:ph type="body" idx="28"/>
+          </p:nvPr>
+        </p:nvSpPr>
+        <p:spPr/>
+        <p:txBody>
+          <a:bodyPr/>
+          <a:lstStyle/>
+          <a:p>
+            <a:pPr/>
+            <a:r>
+              <a:rPr lang="th-TH" dirty="0"/>
+              <a:t>นักพัฒนาระบบ × 3</a:t>
+            </a:r>
+          </a:p>
+        </p:txBody>
+      </p:sp>
+      <p:sp>
+        <p:nvSpPr>
+          <p:cNvPr id="19" name="N2"/>
+          <p:cNvSpPr>
+            <a:spLocks noGrp="1"/>
+          </p:cNvSpPr>
+          <p:nvPr>
+            <p:ph type="body" idx="29"/>
+          </p:nvPr>
+        </p:nvSpPr>
+        <p:spPr/>
+        <p:txBody>
+          <a:bodyPr/>
+          <a:lstStyle/>
+          <a:p>
+            <a:pPr/>
+            <a:r>
+              <a:rPr lang="th-TH" dirty="0"/>
+              <a:t>ธนพล มีสุข</a:t>
+            </a:r>
+          </a:p>
+        </p:txBody>
+      </p:sp>
+      <p:sp>
+        <p:nvSpPr>
+          <p:cNvPr id="20" name="C2"/>
+          <p:cNvSpPr>
+            <a:spLocks noGrp="1"/>
+          </p:cNvSpPr>
+          <p:nvPr>
+            <p:ph type="body" idx="30"/>
+          </p:nvPr>
+        </p:nvSpPr>
+        <p:spPr/>
+        <p:txBody>
+          <a:bodyPr/>
+          <a:lstStyle/>
+          <a:p>
+            <a:pPr/>
+            <a:r>
+              <a:rPr lang="th-TH" dirty="0"/>
+              <a:t>AWS · ประสบการณ์ 8 ปี</a:t>
+            </a:r>
+          </a:p>
+        </p:txBody>
+      </p:sp>
+      <p:sp>
+        <p:nvSpPr>
+          <p:cNvPr id="21" name="D2"/>
+          <p:cNvSpPr>
+            <a:spLocks noGrp="1"/>
+          </p:cNvSpPr>
+          <p:nvPr>
+            <p:ph type="body" idx="31"/>
+          </p:nvPr>
+        </p:nvSpPr>
+        <p:spPr/>
+        <p:txBody>
+          <a:bodyPr/>
+          <a:lstStyle/>
+          <a:p>
+            <a:pPr/>
+            <a:r>
+              <a:rPr lang="th-TH" dirty="0"/>
+              <a:t>ตัวเชื่อม ERP</a:t>
+            </a:r>
+          </a:p>
+          <a:p>
+            <a:pPr/>
+            <a:r>
+              <a:rPr lang="th-TH" dirty="0"/>
+              <a:t>คิวเอกสารและตัวตรวจกฎ</a:t>
+            </a:r>
+          </a:p>
+        </p:txBody>
+      </p:sp>
+      <p:sp>
+        <p:nvSpPr>
+          <p:cNvPr id="22" name="R3"/>
+          <p:cNvSpPr>
+            <a:spLocks noGrp="1"/>
+          </p:cNvSpPr>
+          <p:nvPr>
+            <p:ph type="body" idx="32"/>
+          </p:nvPr>
+        </p:nvSpPr>
+        <p:spPr/>
+        <p:txBody>
+          <a:bodyPr/>
+          <a:lstStyle/>
+          <a:p>
+            <a:pPr/>
+            <a:r>
+              <a:rPr lang="th-TH" dirty="0"/>
+              <a:t>วิศวกรระบบ</a:t>
+            </a:r>
+          </a:p>
+        </p:txBody>
+      </p:sp>
+      <p:sp>
+        <p:nvSpPr>
+          <p:cNvPr id="23" name="N3"/>
+          <p:cNvSpPr>
+            <a:spLocks noGrp="1"/>
+          </p:cNvSpPr>
+          <p:nvPr>
+            <p:ph type="body" idx="33"/>
+          </p:nvPr>
+        </p:nvSpPr>
+        <p:spPr/>
+        <p:txBody>
+          <a:bodyPr/>
+          <a:lstStyle/>
+          <a:p>
+            <a:pPr/>
+            <a:r>
+              <a:rPr lang="th-TH" dirty="0"/>
+              <a:t>อนุชา แก้วใส</a:t>
+            </a:r>
+          </a:p>
+        </p:txBody>
+      </p:sp>
+      <p:sp>
+        <p:nvSpPr>
+          <p:cNvPr id="24" name="C3"/>
+          <p:cNvSpPr>
+            <a:spLocks noGrp="1"/>
+          </p:cNvSpPr>
+          <p:nvPr>
+            <p:ph type="body" idx="34"/>
+          </p:nvPr>
+        </p:nvSpPr>
+        <p:spPr/>
+        <p:txBody>
+          <a:bodyPr/>
+          <a:lstStyle/>
+          <a:p>
+            <a:pPr/>
+            <a:r>
+              <a:rPr lang="th-TH" dirty="0"/>
+              <a:t>MCSA · ประสบการณ์ 7 ปี</a:t>
+            </a:r>
+          </a:p>
+        </p:txBody>
+      </p:sp>
+      <p:sp>
+        <p:nvSpPr>
+          <p:cNvPr id="25" name="D3"/>
+          <p:cNvSpPr>
+            <a:spLocks noGrp="1"/>
+          </p:cNvSpPr>
+          <p:nvPr>
+            <p:ph type="body" idx="35"/>
+          </p:nvPr>
+        </p:nvSpPr>
+        <p:spPr/>
+        <p:txBody>
+          <a:bodyPr/>
+          <a:lstStyle/>
+          <a:p>
+            <a:pPr/>
+            <a:r>
+              <a:rPr lang="th-TH" dirty="0"/>
+              <a:t>ติดตั้ง PRD และ QA</a:t>
+            </a:r>
+          </a:p>
+          <a:p>
+            <a:pPr/>
+            <a:r>
+              <a:rPr lang="th-TH" dirty="0"/>
+              <a:t>สำรองข้อมูลและกู้คืน</a:t>
+            </a:r>
+          </a:p>
+        </p:txBody>
+      </p:sp>
+      <p:sp>
+        <p:nvSpPr>
+          <p:cNvPr id="26" name="R4"/>
+          <p:cNvSpPr>
+            <a:spLocks noGrp="1"/>
+          </p:cNvSpPr>
+          <p:nvPr>
+            <p:ph type="body" idx="36"/>
+          </p:nvPr>
+        </p:nvSpPr>
+        <p:spPr/>
+        <p:txBody>
+          <a:bodyPr/>
+          <a:lstStyle/>
+          <a:p>
+            <a:pPr/>
+            <a:r>
+              <a:rPr lang="th-TH" dirty="0"/>
+              <a:t>ทดสอบและอบรม</a:t>
+            </a:r>
+          </a:p>
+        </p:txBody>
+      </p:sp>
+      <p:sp>
+        <p:nvSpPr>
+          <p:cNvPr id="27" name="N4"/>
+          <p:cNvSpPr>
+            <a:spLocks noGrp="1"/>
+          </p:cNvSpPr>
+          <p:nvPr>
+            <p:ph type="body" idx="37"/>
+          </p:nvPr>
+        </p:nvSpPr>
+        <p:spPr/>
+        <p:txBody>
+          <a:bodyPr/>
+          <a:lstStyle/>
+          <a:p>
+            <a:pPr/>
+            <a:r>
+              <a:rPr lang="th-TH" dirty="0"/>
+              <a:t>นภา รุ่งเรือง</a:t>
+            </a:r>
+          </a:p>
+        </p:txBody>
+      </p:sp>
+      <p:sp>
+        <p:nvSpPr>
+          <p:cNvPr id="28" name="C4"/>
+          <p:cNvSpPr>
+            <a:spLocks noGrp="1"/>
+          </p:cNvSpPr>
+          <p:nvPr>
+            <p:ph type="body" idx="38"/>
+          </p:nvPr>
+        </p:nvSpPr>
+        <p:spPr/>
+        <p:txBody>
+          <a:bodyPr/>
+          <a:lstStyle/>
+          <a:p>
+            <a:pPr/>
+            <a:r>
+              <a:rPr lang="th-TH" dirty="0"/>
+              <a:t>ISTQB · ประสบการณ์ 5 ปี</a:t>
+            </a:r>
+          </a:p>
+        </p:txBody>
+      </p:sp>
+      <p:sp>
+        <p:nvSpPr>
+          <p:cNvPr id="29" name="D4"/>
+          <p:cNvSpPr>
+            <a:spLocks noGrp="1"/>
+          </p:cNvSpPr>
+          <p:nvPr>
+            <p:ph type="body" idx="39"/>
+          </p:nvPr>
+        </p:nvSpPr>
+        <p:spPr/>
+        <p:txBody>
+          <a:bodyPr/>
+          <a:lstStyle/>
+          <a:p>
+            <a:pPr/>
+            <a:r>
+              <a:rPr lang="th-TH" dirty="0"/>
+              <a:t>ทดสอบรับรองก่อนขึ้นระบบ</a:t>
+            </a:r>
+          </a:p>
+          <a:p>
+            <a:pPr/>
+            <a:r>
+              <a:rPr lang="th-TH" dirty="0"/>
+              <a:t>อบรมผู้ใช้ 2 หลักสูตร</a:t>
+            </a:r>
+          </a:p>
+        </p:txBody>
+      </p:sp>
+    </p:spTree>
+  </p:cSld>
+  <p:clrMapOvr>
+    <a:masterClrMapping/>
+  </p:clrMapOvr>
+</p:sld>
+</file>
+
+<file path=ppt/slides/slide25.xml><?xml version="1.0" encoding="utf-8"?>
+<p:sld xmlns:a="http://schemas.openxmlformats.org/drawingml/2006/main" xmlns:r="http://schemas.openxmlformats.org/officeDocument/2006/relationships" xmlns:p="http://schemas.openxmlformats.org/presentationml/2006/main">
+  <p:cSld name="">
+    <p:spTree>
+      <p:nvGrpSpPr>
+        <p:cNvPr id="1" name=""/>
+        <p:cNvGrpSpPr/>
+        <p:nvPr/>
+      </p:nvGrpSpPr>
+      <p:grpSpPr>
+        <a:xfrm>
+          <a:off x="0" y="0"/>
+          <a:ext cx="0" cy="0"/>
+          <a:chOff x="0" y="0"/>
+          <a:chExt cx="0" cy="0"/>
+        </a:xfrm>
+      </p:grpSpPr>
+      <p:sp>
+        <p:nvSpPr>
+          <p:cNvPr id="2" name="Title"/>
+          <p:cNvSpPr>
+            <a:spLocks noGrp="1"/>
+          </p:cNvSpPr>
+          <p:nvPr>
+            <p:ph type="title"/>
+          </p:nvPr>
+        </p:nvSpPr>
+        <p:spPr/>
+        <p:txBody>
+          <a:bodyPr/>
+          <a:lstStyle/>
+          <a:p>
+            <a:pPr/>
+            <a:r>
+              <a:rPr lang="th-TH" dirty="0"/>
               <a:t>ขอบคุณครับ</a:t>
             </a:r>
           </a:p>

--- a/NCT-Slide-Template-Corp-Demo.pptx
+++ b/NCT-Slide-Template-Corp-Demo.pptx
@@ -30,6 +30,7 @@
     <p:sldId id="278" r:id="rId24"/>
     <p:sldId id="279" r:id="rId25"/>
     <p:sldId id="280" r:id="rId26"/>
+    <p:sldId id="281" r:id="rId27"/>
   </p:sldIdLst>
   <p:sldSz cx="12192000" cy="6858000"/>
   <p:notesSz cx="6858000" cy="9144000"/>
@@ -23629,6 +23630,2399 @@
 </p:sldLayout>
 </file>
 
+<file path=ppt/slideLayouts/slideLayout26.xml><?xml version="1.0" encoding="utf-8"?>
+<p:sldLayout xmlns:a="http://schemas.openxmlformats.org/drawingml/2006/main" xmlns:r="http://schemas.openxmlformats.org/officeDocument/2006/relationships" xmlns:p="http://schemas.openxmlformats.org/presentationml/2006/main" type="obj" showMasterSp="0" preserve="1">
+  <p:cSld name="26 Client References">
+    <p:bg>
+      <p:bgPr>
+        <a:solidFill>
+          <a:srgbClr val="FFFFFF"/>
+        </a:solidFill>
+        <a:effectLst/>
+      </p:bgPr>
+    </p:bg>
+    <p:spTree>
+      <p:nvGrpSpPr>
+        <p:cNvPr id="1" name=""/>
+        <p:cNvGrpSpPr/>
+        <p:nvPr/>
+      </p:nvGrpSpPr>
+      <p:grpSpPr>
+        <a:xfrm>
+          <a:off x="0" y="0"/>
+          <a:ext cx="0" cy="0"/>
+          <a:chOff x="0" y="0"/>
+          <a:chExt cx="0" cy="0"/>
+        </a:xfrm>
+      </p:grpSpPr>
+      <p:sp>
+        <p:nvSpPr>
+          <p:cNvPr id="10" name="Title Placeholder"/>
+          <p:cNvSpPr>
+            <a:spLocks noGrp="1"/>
+          </p:cNvSpPr>
+          <p:nvPr>
+            <p:ph type="title"/>
+          </p:nvPr>
+        </p:nvSpPr>
+        <p:spPr>
+          <a:xfrm>
+            <a:off x="914400" y="548640"/>
+            <a:ext cx="10363200" cy="731520"/>
+          </a:xfrm>
+          <a:prstGeom prst="rect">
+            <a:avLst/>
+          </a:prstGeom>
+        </p:spPr>
+        <p:txBody>
+          <a:bodyPr wrap="square" anchor="b" lIns="0" tIns="0" rIns="0" bIns="0" rtlCol="0"/>
+          <a:lstStyle>
+            <a:lvl1pPr algn="l" marL="0" indent="0">
+              <a:lnSpc>
+                <a:spcPct val="108000"/>
+              </a:lnSpc>
+              <a:buNone/>
+              <a:defRPr lang="th-TH" sz="3200" b="1" dirty="0">
+                <a:solidFill>
+                  <a:srgbClr val="23436D"/>
+                </a:solidFill>
+                <a:latin typeface="+mj-lt"/>
+                <a:ea typeface="+mj-ea"/>
+                <a:cs typeface="+mj-cs"/>
+              </a:defRPr>
+            </a:lvl1pPr>
+          </a:lstStyle>
+          <a:p>
+            <a:pPr algn="l" marL="0" indent="0">
+              <a:lnSpc>
+                <a:spcPct val="108000"/>
+              </a:lnSpc>
+              <a:buNone/>
+            </a:pPr>
+            <a:r>
+              <a:rPr lang="th-TH" sz="3200" b="1" dirty="0">
+                <a:solidFill>
+                  <a:srgbClr val="23436D"/>
+                </a:solidFill>
+                <a:latin typeface="+mj-lt"/>
+                <a:ea typeface="+mj-ea"/>
+                <a:cs typeface="+mj-cs"/>
+              </a:rPr>
+              <a:t>ชื่อสไลด์</a:t>
+            </a:r>
+          </a:p>
+        </p:txBody>
+      </p:sp>
+      <p:sp>
+        <p:nvSpPr>
+          <p:cNvPr id="11" name="Accent Rule"/>
+          <p:cNvSpPr/>
+          <p:nvPr/>
+        </p:nvSpPr>
+        <p:spPr>
+          <a:xfrm>
+            <a:off x="0" y="1371600"/>
+            <a:ext cx="12192000" cy="68580"/>
+          </a:xfrm>
+          <a:prstGeom prst="rect">
+            <a:avLst/>
+          </a:prstGeom>
+          <a:solidFill>
+            <a:srgbClr val="216B7F"/>
+          </a:solidFill>
+          <a:ln>
+            <a:noFill/>
+          </a:ln>
+        </p:spPr>
+        <p:txBody>
+          <a:bodyPr/>
+          <a:lstStyle/>
+          <a:p>
+            <a:endParaRPr lang="th-TH"/>
+          </a:p>
+        </p:txBody>
+      </p:sp>
+      <p:sp>
+        <p:nvSpPr>
+          <p:cNvPr id="12" name="Intro"/>
+          <p:cNvSpPr>
+            <a:spLocks noGrp="1"/>
+          </p:cNvSpPr>
+          <p:nvPr>
+            <p:ph type="body" idx="1"/>
+          </p:nvPr>
+        </p:nvSpPr>
+        <p:spPr>
+          <a:xfrm>
+            <a:off x="914400" y="1691640"/>
+            <a:ext cx="10363200" cy="274320"/>
+          </a:xfrm>
+          <a:prstGeom prst="rect">
+            <a:avLst/>
+          </a:prstGeom>
+        </p:spPr>
+        <p:txBody>
+          <a:bodyPr wrap="square" anchor="ctr" lIns="0" tIns="0" rIns="0" bIns="0" rtlCol="0"/>
+          <a:lstStyle>
+            <a:lvl1pPr algn="l" marL="0" indent="0">
+              <a:lnSpc>
+                <a:spcPct val="100000"/>
+              </a:lnSpc>
+              <a:buNone/>
+              <a:defRPr lang="th-TH" sz="1400" dirty="0">
+                <a:solidFill>
+                  <a:srgbClr val="5F5F5F"/>
+                </a:solidFill>
+                <a:latin typeface="+mn-lt"/>
+                <a:ea typeface="+mn-ea"/>
+                <a:cs typeface="+mn-cs"/>
+              </a:defRPr>
+            </a:lvl1pPr>
+          </a:lstStyle>
+          <a:p>
+            <a:pPr algn="l" marL="0" indent="0">
+              <a:lnSpc>
+                <a:spcPct val="100000"/>
+              </a:lnSpc>
+              <a:buNone/>
+            </a:pPr>
+            <a:r>
+              <a:rPr lang="th-TH" sz="1400" dirty="0">
+                <a:solidFill>
+                  <a:srgbClr val="5F5F5F"/>
+                </a:solidFill>
+                <a:latin typeface="+mn-lt"/>
+                <a:ea typeface="+mn-ea"/>
+                <a:cs typeface="+mn-cs"/>
+              </a:rPr>
+              <a:t>คัดมาจากลูกค้าทั้งหมดกี่ราย · เกณฑ์ที่ใช้คัด</a:t>
+            </a:r>
+          </a:p>
+        </p:txBody>
+      </p:sp>
+      <p:sp>
+        <p:nvSpPr>
+          <p:cNvPr id="13" name="Tile 1"/>
+          <p:cNvSpPr/>
+          <p:nvPr/>
+        </p:nvSpPr>
+        <p:spPr>
+          <a:xfrm>
+            <a:off x="914400" y="2057400"/>
+            <a:ext cx="2453640" cy="914400"/>
+          </a:xfrm>
+          <a:prstGeom prst="rect">
+            <a:avLst/>
+          </a:prstGeom>
+          <a:solidFill>
+            <a:srgbClr val="FFFFFF"/>
+          </a:solidFill>
+          <a:ln w="9525">
+            <a:solidFill>
+              <a:srgbClr val="E5E5E5"/>
+            </a:solidFill>
+          </a:ln>
+        </p:spPr>
+        <p:txBody>
+          <a:bodyPr/>
+          <a:lstStyle/>
+          <a:p>
+            <a:endParaRPr lang="th-TH"/>
+          </a:p>
+        </p:txBody>
+      </p:sp>
+      <p:sp>
+        <p:nvSpPr>
+          <p:cNvPr id="14" name="Tile 1 Logo"/>
+          <p:cNvSpPr>
+            <a:spLocks noGrp="1"/>
+          </p:cNvSpPr>
+          <p:nvPr>
+            <p:ph idx="20"/>
+          </p:nvPr>
+        </p:nvSpPr>
+        <p:spPr>
+          <a:xfrm>
+            <a:off x="1051560" y="2148840"/>
+            <a:ext cx="2179320" cy="502920"/>
+          </a:xfrm>
+          <a:prstGeom prst="rect">
+            <a:avLst/>
+          </a:prstGeom>
+        </p:spPr>
+        <p:txBody>
+          <a:bodyPr wrap="square" anchor="ctr" lIns="0" tIns="0" rIns="0" bIns="0" rtlCol="0"/>
+          <a:lstStyle>
+            <a:lvl1pPr algn="ctr" marL="0" indent="0">
+              <a:lnSpc>
+                <a:spcPct val="100000"/>
+              </a:lnSpc>
+              <a:buNone/>
+              <a:defRPr lang="th-TH" sz="1600" b="1" dirty="0">
+                <a:solidFill>
+                  <a:srgbClr val="333333"/>
+                </a:solidFill>
+                <a:latin typeface="+mj-lt"/>
+                <a:ea typeface="+mj-ea"/>
+                <a:cs typeface="+mj-cs"/>
+              </a:defRPr>
+            </a:lvl1pPr>
+          </a:lstStyle>
+          <a:p>
+            <a:pPr algn="ctr" marL="0" indent="0">
+              <a:lnSpc>
+                <a:spcPct val="100000"/>
+              </a:lnSpc>
+              <a:buNone/>
+            </a:pPr>
+            <a:r>
+              <a:rPr lang="th-TH" sz="1600" b="1" dirty="0">
+                <a:solidFill>
+                  <a:srgbClr val="333333"/>
+                </a:solidFill>
+                <a:latin typeface="+mj-lt"/>
+                <a:ea typeface="+mj-ea"/>
+                <a:cs typeface="+mj-cs"/>
+              </a:rPr>
+              <a:t>โลโก้ หรือชื่อลูกค้า</a:t>
+            </a:r>
+          </a:p>
+        </p:txBody>
+      </p:sp>
+      <p:sp>
+        <p:nvSpPr>
+          <p:cNvPr id="15" name="Tile 1 Caption"/>
+          <p:cNvSpPr>
+            <a:spLocks noGrp="1"/>
+          </p:cNvSpPr>
+          <p:nvPr>
+            <p:ph type="body" idx="21"/>
+          </p:nvPr>
+        </p:nvSpPr>
+        <p:spPr>
+          <a:xfrm>
+            <a:off x="1005840" y="2660904"/>
+            <a:ext cx="2270760" cy="219456"/>
+          </a:xfrm>
+          <a:prstGeom prst="rect">
+            <a:avLst/>
+          </a:prstGeom>
+        </p:spPr>
+        <p:txBody>
+          <a:bodyPr wrap="square" anchor="ctr" lIns="0" tIns="0" rIns="0" bIns="0" rtlCol="0"/>
+          <a:lstStyle>
+            <a:lvl1pPr algn="ctr" marL="0" indent="0">
+              <a:lnSpc>
+                <a:spcPct val="100000"/>
+              </a:lnSpc>
+              <a:buNone/>
+              <a:defRPr lang="th-TH" sz="1200" dirty="0">
+                <a:solidFill>
+                  <a:srgbClr val="5F5F5F"/>
+                </a:solidFill>
+                <a:latin typeface="+mn-lt"/>
+                <a:ea typeface="+mn-ea"/>
+                <a:cs typeface="+mn-cs"/>
+              </a:defRPr>
+            </a:lvl1pPr>
+          </a:lstStyle>
+          <a:p>
+            <a:pPr algn="ctr" marL="0" indent="0">
+              <a:lnSpc>
+                <a:spcPct val="100000"/>
+              </a:lnSpc>
+              <a:buNone/>
+            </a:pPr>
+            <a:r>
+              <a:rPr lang="th-TH" sz="1200" dirty="0">
+                <a:solidFill>
+                  <a:srgbClr val="5F5F5F"/>
+                </a:solidFill>
+                <a:latin typeface="+mn-lt"/>
+                <a:ea typeface="+mn-ea"/>
+                <a:cs typeface="+mn-cs"/>
+              </a:rPr>
+              <a:t>อุตสาหกรรม · งานที่ทำ</a:t>
+            </a:r>
+          </a:p>
+        </p:txBody>
+      </p:sp>
+      <p:sp>
+        <p:nvSpPr>
+          <p:cNvPr id="16" name="Tile 2"/>
+          <p:cNvSpPr/>
+          <p:nvPr/>
+        </p:nvSpPr>
+        <p:spPr>
+          <a:xfrm>
+            <a:off x="3550920" y="2057400"/>
+            <a:ext cx="2453640" cy="914400"/>
+          </a:xfrm>
+          <a:prstGeom prst="rect">
+            <a:avLst/>
+          </a:prstGeom>
+          <a:solidFill>
+            <a:srgbClr val="FFFFFF"/>
+          </a:solidFill>
+          <a:ln w="9525">
+            <a:solidFill>
+              <a:srgbClr val="E5E5E5"/>
+            </a:solidFill>
+          </a:ln>
+        </p:spPr>
+        <p:txBody>
+          <a:bodyPr/>
+          <a:lstStyle/>
+          <a:p>
+            <a:endParaRPr lang="th-TH"/>
+          </a:p>
+        </p:txBody>
+      </p:sp>
+      <p:sp>
+        <p:nvSpPr>
+          <p:cNvPr id="17" name="Tile 2 Logo"/>
+          <p:cNvSpPr>
+            <a:spLocks noGrp="1"/>
+          </p:cNvSpPr>
+          <p:nvPr>
+            <p:ph idx="22"/>
+          </p:nvPr>
+        </p:nvSpPr>
+        <p:spPr>
+          <a:xfrm>
+            <a:off x="3688080" y="2148840"/>
+            <a:ext cx="2179320" cy="502920"/>
+          </a:xfrm>
+          <a:prstGeom prst="rect">
+            <a:avLst/>
+          </a:prstGeom>
+        </p:spPr>
+        <p:txBody>
+          <a:bodyPr wrap="square" anchor="ctr" lIns="0" tIns="0" rIns="0" bIns="0" rtlCol="0"/>
+          <a:lstStyle>
+            <a:lvl1pPr algn="ctr" marL="0" indent="0">
+              <a:lnSpc>
+                <a:spcPct val="100000"/>
+              </a:lnSpc>
+              <a:buNone/>
+              <a:defRPr lang="th-TH" sz="1600" b="1" dirty="0">
+                <a:solidFill>
+                  <a:srgbClr val="333333"/>
+                </a:solidFill>
+                <a:latin typeface="+mj-lt"/>
+                <a:ea typeface="+mj-ea"/>
+                <a:cs typeface="+mj-cs"/>
+              </a:defRPr>
+            </a:lvl1pPr>
+          </a:lstStyle>
+          <a:p>
+            <a:pPr algn="ctr" marL="0" indent="0">
+              <a:lnSpc>
+                <a:spcPct val="100000"/>
+              </a:lnSpc>
+              <a:buNone/>
+            </a:pPr>
+            <a:r>
+              <a:rPr lang="th-TH" sz="1600" b="1" dirty="0">
+                <a:solidFill>
+                  <a:srgbClr val="333333"/>
+                </a:solidFill>
+                <a:latin typeface="+mj-lt"/>
+                <a:ea typeface="+mj-ea"/>
+                <a:cs typeface="+mj-cs"/>
+              </a:rPr>
+              <a:t>โลโก้ หรือชื่อลูกค้า</a:t>
+            </a:r>
+          </a:p>
+        </p:txBody>
+      </p:sp>
+      <p:sp>
+        <p:nvSpPr>
+          <p:cNvPr id="18" name="Tile 2 Caption"/>
+          <p:cNvSpPr>
+            <a:spLocks noGrp="1"/>
+          </p:cNvSpPr>
+          <p:nvPr>
+            <p:ph type="body" idx="23"/>
+          </p:nvPr>
+        </p:nvSpPr>
+        <p:spPr>
+          <a:xfrm>
+            <a:off x="3642360" y="2660904"/>
+            <a:ext cx="2270760" cy="219456"/>
+          </a:xfrm>
+          <a:prstGeom prst="rect">
+            <a:avLst/>
+          </a:prstGeom>
+        </p:spPr>
+        <p:txBody>
+          <a:bodyPr wrap="square" anchor="ctr" lIns="0" tIns="0" rIns="0" bIns="0" rtlCol="0"/>
+          <a:lstStyle>
+            <a:lvl1pPr algn="ctr" marL="0" indent="0">
+              <a:lnSpc>
+                <a:spcPct val="100000"/>
+              </a:lnSpc>
+              <a:buNone/>
+              <a:defRPr lang="th-TH" sz="1200" dirty="0">
+                <a:solidFill>
+                  <a:srgbClr val="5F5F5F"/>
+                </a:solidFill>
+                <a:latin typeface="+mn-lt"/>
+                <a:ea typeface="+mn-ea"/>
+                <a:cs typeface="+mn-cs"/>
+              </a:defRPr>
+            </a:lvl1pPr>
+          </a:lstStyle>
+          <a:p>
+            <a:pPr algn="ctr" marL="0" indent="0">
+              <a:lnSpc>
+                <a:spcPct val="100000"/>
+              </a:lnSpc>
+              <a:buNone/>
+            </a:pPr>
+            <a:r>
+              <a:rPr lang="th-TH" sz="1200" dirty="0">
+                <a:solidFill>
+                  <a:srgbClr val="5F5F5F"/>
+                </a:solidFill>
+                <a:latin typeface="+mn-lt"/>
+                <a:ea typeface="+mn-ea"/>
+                <a:cs typeface="+mn-cs"/>
+              </a:rPr>
+              <a:t>อุตสาหกรรม · งานที่ทำ</a:t>
+            </a:r>
+          </a:p>
+        </p:txBody>
+      </p:sp>
+      <p:sp>
+        <p:nvSpPr>
+          <p:cNvPr id="19" name="Tile 3"/>
+          <p:cNvSpPr/>
+          <p:nvPr/>
+        </p:nvSpPr>
+        <p:spPr>
+          <a:xfrm>
+            <a:off x="6187440" y="2057400"/>
+            <a:ext cx="2453640" cy="914400"/>
+          </a:xfrm>
+          <a:prstGeom prst="rect">
+            <a:avLst/>
+          </a:prstGeom>
+          <a:solidFill>
+            <a:srgbClr val="FFFFFF"/>
+          </a:solidFill>
+          <a:ln w="9525">
+            <a:solidFill>
+              <a:srgbClr val="E5E5E5"/>
+            </a:solidFill>
+          </a:ln>
+        </p:spPr>
+        <p:txBody>
+          <a:bodyPr/>
+          <a:lstStyle/>
+          <a:p>
+            <a:endParaRPr lang="th-TH"/>
+          </a:p>
+        </p:txBody>
+      </p:sp>
+      <p:sp>
+        <p:nvSpPr>
+          <p:cNvPr id="20" name="Tile 3 Logo"/>
+          <p:cNvSpPr>
+            <a:spLocks noGrp="1"/>
+          </p:cNvSpPr>
+          <p:nvPr>
+            <p:ph idx="24"/>
+          </p:nvPr>
+        </p:nvSpPr>
+        <p:spPr>
+          <a:xfrm>
+            <a:off x="6324600" y="2148840"/>
+            <a:ext cx="2179320" cy="502920"/>
+          </a:xfrm>
+          <a:prstGeom prst="rect">
+            <a:avLst/>
+          </a:prstGeom>
+        </p:spPr>
+        <p:txBody>
+          <a:bodyPr wrap="square" anchor="ctr" lIns="0" tIns="0" rIns="0" bIns="0" rtlCol="0"/>
+          <a:lstStyle>
+            <a:lvl1pPr algn="ctr" marL="0" indent="0">
+              <a:lnSpc>
+                <a:spcPct val="100000"/>
+              </a:lnSpc>
+              <a:buNone/>
+              <a:defRPr lang="th-TH" sz="1600" b="1" dirty="0">
+                <a:solidFill>
+                  <a:srgbClr val="333333"/>
+                </a:solidFill>
+                <a:latin typeface="+mj-lt"/>
+                <a:ea typeface="+mj-ea"/>
+                <a:cs typeface="+mj-cs"/>
+              </a:defRPr>
+            </a:lvl1pPr>
+          </a:lstStyle>
+          <a:p>
+            <a:pPr algn="ctr" marL="0" indent="0">
+              <a:lnSpc>
+                <a:spcPct val="100000"/>
+              </a:lnSpc>
+              <a:buNone/>
+            </a:pPr>
+            <a:r>
+              <a:rPr lang="th-TH" sz="1600" b="1" dirty="0">
+                <a:solidFill>
+                  <a:srgbClr val="333333"/>
+                </a:solidFill>
+                <a:latin typeface="+mj-lt"/>
+                <a:ea typeface="+mj-ea"/>
+                <a:cs typeface="+mj-cs"/>
+              </a:rPr>
+              <a:t>โลโก้ หรือชื่อลูกค้า</a:t>
+            </a:r>
+          </a:p>
+        </p:txBody>
+      </p:sp>
+      <p:sp>
+        <p:nvSpPr>
+          <p:cNvPr id="21" name="Tile 3 Caption"/>
+          <p:cNvSpPr>
+            <a:spLocks noGrp="1"/>
+          </p:cNvSpPr>
+          <p:nvPr>
+            <p:ph type="body" idx="25"/>
+          </p:nvPr>
+        </p:nvSpPr>
+        <p:spPr>
+          <a:xfrm>
+            <a:off x="6278880" y="2660904"/>
+            <a:ext cx="2270760" cy="219456"/>
+          </a:xfrm>
+          <a:prstGeom prst="rect">
+            <a:avLst/>
+          </a:prstGeom>
+        </p:spPr>
+        <p:txBody>
+          <a:bodyPr wrap="square" anchor="ctr" lIns="0" tIns="0" rIns="0" bIns="0" rtlCol="0"/>
+          <a:lstStyle>
+            <a:lvl1pPr algn="ctr" marL="0" indent="0">
+              <a:lnSpc>
+                <a:spcPct val="100000"/>
+              </a:lnSpc>
+              <a:buNone/>
+              <a:defRPr lang="th-TH" sz="1200" dirty="0">
+                <a:solidFill>
+                  <a:srgbClr val="5F5F5F"/>
+                </a:solidFill>
+                <a:latin typeface="+mn-lt"/>
+                <a:ea typeface="+mn-ea"/>
+                <a:cs typeface="+mn-cs"/>
+              </a:defRPr>
+            </a:lvl1pPr>
+          </a:lstStyle>
+          <a:p>
+            <a:pPr algn="ctr" marL="0" indent="0">
+              <a:lnSpc>
+                <a:spcPct val="100000"/>
+              </a:lnSpc>
+              <a:buNone/>
+            </a:pPr>
+            <a:r>
+              <a:rPr lang="th-TH" sz="1200" dirty="0">
+                <a:solidFill>
+                  <a:srgbClr val="5F5F5F"/>
+                </a:solidFill>
+                <a:latin typeface="+mn-lt"/>
+                <a:ea typeface="+mn-ea"/>
+                <a:cs typeface="+mn-cs"/>
+              </a:rPr>
+              <a:t>อุตสาหกรรม · งานที่ทำ</a:t>
+            </a:r>
+          </a:p>
+        </p:txBody>
+      </p:sp>
+      <p:sp>
+        <p:nvSpPr>
+          <p:cNvPr id="22" name="Tile 4"/>
+          <p:cNvSpPr/>
+          <p:nvPr/>
+        </p:nvSpPr>
+        <p:spPr>
+          <a:xfrm>
+            <a:off x="8823960" y="2057400"/>
+            <a:ext cx="2453640" cy="914400"/>
+          </a:xfrm>
+          <a:prstGeom prst="rect">
+            <a:avLst/>
+          </a:prstGeom>
+          <a:solidFill>
+            <a:srgbClr val="FFFFFF"/>
+          </a:solidFill>
+          <a:ln w="9525">
+            <a:solidFill>
+              <a:srgbClr val="E5E5E5"/>
+            </a:solidFill>
+          </a:ln>
+        </p:spPr>
+        <p:txBody>
+          <a:bodyPr/>
+          <a:lstStyle/>
+          <a:p>
+            <a:endParaRPr lang="th-TH"/>
+          </a:p>
+        </p:txBody>
+      </p:sp>
+      <p:sp>
+        <p:nvSpPr>
+          <p:cNvPr id="23" name="Tile 4 Logo"/>
+          <p:cNvSpPr>
+            <a:spLocks noGrp="1"/>
+          </p:cNvSpPr>
+          <p:nvPr>
+            <p:ph idx="26"/>
+          </p:nvPr>
+        </p:nvSpPr>
+        <p:spPr>
+          <a:xfrm>
+            <a:off x="8961120" y="2148840"/>
+            <a:ext cx="2179320" cy="502920"/>
+          </a:xfrm>
+          <a:prstGeom prst="rect">
+            <a:avLst/>
+          </a:prstGeom>
+        </p:spPr>
+        <p:txBody>
+          <a:bodyPr wrap="square" anchor="ctr" lIns="0" tIns="0" rIns="0" bIns="0" rtlCol="0"/>
+          <a:lstStyle>
+            <a:lvl1pPr algn="ctr" marL="0" indent="0">
+              <a:lnSpc>
+                <a:spcPct val="100000"/>
+              </a:lnSpc>
+              <a:buNone/>
+              <a:defRPr lang="th-TH" sz="1600" b="1" dirty="0">
+                <a:solidFill>
+                  <a:srgbClr val="333333"/>
+                </a:solidFill>
+                <a:latin typeface="+mj-lt"/>
+                <a:ea typeface="+mj-ea"/>
+                <a:cs typeface="+mj-cs"/>
+              </a:defRPr>
+            </a:lvl1pPr>
+          </a:lstStyle>
+          <a:p>
+            <a:pPr algn="ctr" marL="0" indent="0">
+              <a:lnSpc>
+                <a:spcPct val="100000"/>
+              </a:lnSpc>
+              <a:buNone/>
+            </a:pPr>
+            <a:r>
+              <a:rPr lang="th-TH" sz="1600" b="1" dirty="0">
+                <a:solidFill>
+                  <a:srgbClr val="333333"/>
+                </a:solidFill>
+                <a:latin typeface="+mj-lt"/>
+                <a:ea typeface="+mj-ea"/>
+                <a:cs typeface="+mj-cs"/>
+              </a:rPr>
+              <a:t>โลโก้ หรือชื่อลูกค้า</a:t>
+            </a:r>
+          </a:p>
+        </p:txBody>
+      </p:sp>
+      <p:sp>
+        <p:nvSpPr>
+          <p:cNvPr id="24" name="Tile 4 Caption"/>
+          <p:cNvSpPr>
+            <a:spLocks noGrp="1"/>
+          </p:cNvSpPr>
+          <p:nvPr>
+            <p:ph type="body" idx="27"/>
+          </p:nvPr>
+        </p:nvSpPr>
+        <p:spPr>
+          <a:xfrm>
+            <a:off x="8915400" y="2660904"/>
+            <a:ext cx="2270760" cy="219456"/>
+          </a:xfrm>
+          <a:prstGeom prst="rect">
+            <a:avLst/>
+          </a:prstGeom>
+        </p:spPr>
+        <p:txBody>
+          <a:bodyPr wrap="square" anchor="ctr" lIns="0" tIns="0" rIns="0" bIns="0" rtlCol="0"/>
+          <a:lstStyle>
+            <a:lvl1pPr algn="ctr" marL="0" indent="0">
+              <a:lnSpc>
+                <a:spcPct val="100000"/>
+              </a:lnSpc>
+              <a:buNone/>
+              <a:defRPr lang="th-TH" sz="1200" dirty="0">
+                <a:solidFill>
+                  <a:srgbClr val="5F5F5F"/>
+                </a:solidFill>
+                <a:latin typeface="+mn-lt"/>
+                <a:ea typeface="+mn-ea"/>
+                <a:cs typeface="+mn-cs"/>
+              </a:defRPr>
+            </a:lvl1pPr>
+          </a:lstStyle>
+          <a:p>
+            <a:pPr algn="ctr" marL="0" indent="0">
+              <a:lnSpc>
+                <a:spcPct val="100000"/>
+              </a:lnSpc>
+              <a:buNone/>
+            </a:pPr>
+            <a:r>
+              <a:rPr lang="th-TH" sz="1200" dirty="0">
+                <a:solidFill>
+                  <a:srgbClr val="5F5F5F"/>
+                </a:solidFill>
+                <a:latin typeface="+mn-lt"/>
+                <a:ea typeface="+mn-ea"/>
+                <a:cs typeface="+mn-cs"/>
+              </a:rPr>
+              <a:t>อุตสาหกรรม · งานที่ทำ</a:t>
+            </a:r>
+          </a:p>
+        </p:txBody>
+      </p:sp>
+      <p:sp>
+        <p:nvSpPr>
+          <p:cNvPr id="25" name="Tile 5"/>
+          <p:cNvSpPr/>
+          <p:nvPr/>
+        </p:nvSpPr>
+        <p:spPr>
+          <a:xfrm>
+            <a:off x="914400" y="3154680"/>
+            <a:ext cx="2453640" cy="914400"/>
+          </a:xfrm>
+          <a:prstGeom prst="rect">
+            <a:avLst/>
+          </a:prstGeom>
+          <a:solidFill>
+            <a:srgbClr val="FFFFFF"/>
+          </a:solidFill>
+          <a:ln w="9525">
+            <a:solidFill>
+              <a:srgbClr val="E5E5E5"/>
+            </a:solidFill>
+          </a:ln>
+        </p:spPr>
+        <p:txBody>
+          <a:bodyPr/>
+          <a:lstStyle/>
+          <a:p>
+            <a:endParaRPr lang="th-TH"/>
+          </a:p>
+        </p:txBody>
+      </p:sp>
+      <p:sp>
+        <p:nvSpPr>
+          <p:cNvPr id="26" name="Tile 5 Logo"/>
+          <p:cNvSpPr>
+            <a:spLocks noGrp="1"/>
+          </p:cNvSpPr>
+          <p:nvPr>
+            <p:ph idx="28"/>
+          </p:nvPr>
+        </p:nvSpPr>
+        <p:spPr>
+          <a:xfrm>
+            <a:off x="1051560" y="3246120"/>
+            <a:ext cx="2179320" cy="502920"/>
+          </a:xfrm>
+          <a:prstGeom prst="rect">
+            <a:avLst/>
+          </a:prstGeom>
+        </p:spPr>
+        <p:txBody>
+          <a:bodyPr wrap="square" anchor="ctr" lIns="0" tIns="0" rIns="0" bIns="0" rtlCol="0"/>
+          <a:lstStyle>
+            <a:lvl1pPr algn="ctr" marL="0" indent="0">
+              <a:lnSpc>
+                <a:spcPct val="100000"/>
+              </a:lnSpc>
+              <a:buNone/>
+              <a:defRPr lang="th-TH" sz="1600" b="1" dirty="0">
+                <a:solidFill>
+                  <a:srgbClr val="333333"/>
+                </a:solidFill>
+                <a:latin typeface="+mj-lt"/>
+                <a:ea typeface="+mj-ea"/>
+                <a:cs typeface="+mj-cs"/>
+              </a:defRPr>
+            </a:lvl1pPr>
+          </a:lstStyle>
+          <a:p>
+            <a:pPr algn="ctr" marL="0" indent="0">
+              <a:lnSpc>
+                <a:spcPct val="100000"/>
+              </a:lnSpc>
+              <a:buNone/>
+            </a:pPr>
+            <a:r>
+              <a:rPr lang="th-TH" sz="1600" b="1" dirty="0">
+                <a:solidFill>
+                  <a:srgbClr val="333333"/>
+                </a:solidFill>
+                <a:latin typeface="+mj-lt"/>
+                <a:ea typeface="+mj-ea"/>
+                <a:cs typeface="+mj-cs"/>
+              </a:rPr>
+              <a:t>โลโก้ หรือชื่อลูกค้า</a:t>
+            </a:r>
+          </a:p>
+        </p:txBody>
+      </p:sp>
+      <p:sp>
+        <p:nvSpPr>
+          <p:cNvPr id="27" name="Tile 5 Caption"/>
+          <p:cNvSpPr>
+            <a:spLocks noGrp="1"/>
+          </p:cNvSpPr>
+          <p:nvPr>
+            <p:ph type="body" idx="29"/>
+          </p:nvPr>
+        </p:nvSpPr>
+        <p:spPr>
+          <a:xfrm>
+            <a:off x="1005840" y="3758184"/>
+            <a:ext cx="2270760" cy="219456"/>
+          </a:xfrm>
+          <a:prstGeom prst="rect">
+            <a:avLst/>
+          </a:prstGeom>
+        </p:spPr>
+        <p:txBody>
+          <a:bodyPr wrap="square" anchor="ctr" lIns="0" tIns="0" rIns="0" bIns="0" rtlCol="0"/>
+          <a:lstStyle>
+            <a:lvl1pPr algn="ctr" marL="0" indent="0">
+              <a:lnSpc>
+                <a:spcPct val="100000"/>
+              </a:lnSpc>
+              <a:buNone/>
+              <a:defRPr lang="th-TH" sz="1200" dirty="0">
+                <a:solidFill>
+                  <a:srgbClr val="5F5F5F"/>
+                </a:solidFill>
+                <a:latin typeface="+mn-lt"/>
+                <a:ea typeface="+mn-ea"/>
+                <a:cs typeface="+mn-cs"/>
+              </a:defRPr>
+            </a:lvl1pPr>
+          </a:lstStyle>
+          <a:p>
+            <a:pPr algn="ctr" marL="0" indent="0">
+              <a:lnSpc>
+                <a:spcPct val="100000"/>
+              </a:lnSpc>
+              <a:buNone/>
+            </a:pPr>
+            <a:r>
+              <a:rPr lang="th-TH" sz="1200" dirty="0">
+                <a:solidFill>
+                  <a:srgbClr val="5F5F5F"/>
+                </a:solidFill>
+                <a:latin typeface="+mn-lt"/>
+                <a:ea typeface="+mn-ea"/>
+                <a:cs typeface="+mn-cs"/>
+              </a:rPr>
+              <a:t>อุตสาหกรรม · งานที่ทำ</a:t>
+            </a:r>
+          </a:p>
+        </p:txBody>
+      </p:sp>
+      <p:sp>
+        <p:nvSpPr>
+          <p:cNvPr id="28" name="Tile 6"/>
+          <p:cNvSpPr/>
+          <p:nvPr/>
+        </p:nvSpPr>
+        <p:spPr>
+          <a:xfrm>
+            <a:off x="3550920" y="3154680"/>
+            <a:ext cx="2453640" cy="914400"/>
+          </a:xfrm>
+          <a:prstGeom prst="rect">
+            <a:avLst/>
+          </a:prstGeom>
+          <a:solidFill>
+            <a:srgbClr val="FFFFFF"/>
+          </a:solidFill>
+          <a:ln w="9525">
+            <a:solidFill>
+              <a:srgbClr val="E5E5E5"/>
+            </a:solidFill>
+          </a:ln>
+        </p:spPr>
+        <p:txBody>
+          <a:bodyPr/>
+          <a:lstStyle/>
+          <a:p>
+            <a:endParaRPr lang="th-TH"/>
+          </a:p>
+        </p:txBody>
+      </p:sp>
+      <p:sp>
+        <p:nvSpPr>
+          <p:cNvPr id="29" name="Tile 6 Logo"/>
+          <p:cNvSpPr>
+            <a:spLocks noGrp="1"/>
+          </p:cNvSpPr>
+          <p:nvPr>
+            <p:ph idx="30"/>
+          </p:nvPr>
+        </p:nvSpPr>
+        <p:spPr>
+          <a:xfrm>
+            <a:off x="3688080" y="3246120"/>
+            <a:ext cx="2179320" cy="502920"/>
+          </a:xfrm>
+          <a:prstGeom prst="rect">
+            <a:avLst/>
+          </a:prstGeom>
+        </p:spPr>
+        <p:txBody>
+          <a:bodyPr wrap="square" anchor="ctr" lIns="0" tIns="0" rIns="0" bIns="0" rtlCol="0"/>
+          <a:lstStyle>
+            <a:lvl1pPr algn="ctr" marL="0" indent="0">
+              <a:lnSpc>
+                <a:spcPct val="100000"/>
+              </a:lnSpc>
+              <a:buNone/>
+              <a:defRPr lang="th-TH" sz="1600" b="1" dirty="0">
+                <a:solidFill>
+                  <a:srgbClr val="333333"/>
+                </a:solidFill>
+                <a:latin typeface="+mj-lt"/>
+                <a:ea typeface="+mj-ea"/>
+                <a:cs typeface="+mj-cs"/>
+              </a:defRPr>
+            </a:lvl1pPr>
+          </a:lstStyle>
+          <a:p>
+            <a:pPr algn="ctr" marL="0" indent="0">
+              <a:lnSpc>
+                <a:spcPct val="100000"/>
+              </a:lnSpc>
+              <a:buNone/>
+            </a:pPr>
+            <a:r>
+              <a:rPr lang="th-TH" sz="1600" b="1" dirty="0">
+                <a:solidFill>
+                  <a:srgbClr val="333333"/>
+                </a:solidFill>
+                <a:latin typeface="+mj-lt"/>
+                <a:ea typeface="+mj-ea"/>
+                <a:cs typeface="+mj-cs"/>
+              </a:rPr>
+              <a:t>โลโก้ หรือชื่อลูกค้า</a:t>
+            </a:r>
+          </a:p>
+        </p:txBody>
+      </p:sp>
+      <p:sp>
+        <p:nvSpPr>
+          <p:cNvPr id="30" name="Tile 6 Caption"/>
+          <p:cNvSpPr>
+            <a:spLocks noGrp="1"/>
+          </p:cNvSpPr>
+          <p:nvPr>
+            <p:ph type="body" idx="31"/>
+          </p:nvPr>
+        </p:nvSpPr>
+        <p:spPr>
+          <a:xfrm>
+            <a:off x="3642360" y="3758184"/>
+            <a:ext cx="2270760" cy="219456"/>
+          </a:xfrm>
+          <a:prstGeom prst="rect">
+            <a:avLst/>
+          </a:prstGeom>
+        </p:spPr>
+        <p:txBody>
+          <a:bodyPr wrap="square" anchor="ctr" lIns="0" tIns="0" rIns="0" bIns="0" rtlCol="0"/>
+          <a:lstStyle>
+            <a:lvl1pPr algn="ctr" marL="0" indent="0">
+              <a:lnSpc>
+                <a:spcPct val="100000"/>
+              </a:lnSpc>
+              <a:buNone/>
+              <a:defRPr lang="th-TH" sz="1200" dirty="0">
+                <a:solidFill>
+                  <a:srgbClr val="5F5F5F"/>
+                </a:solidFill>
+                <a:latin typeface="+mn-lt"/>
+                <a:ea typeface="+mn-ea"/>
+                <a:cs typeface="+mn-cs"/>
+              </a:defRPr>
+            </a:lvl1pPr>
+          </a:lstStyle>
+          <a:p>
+            <a:pPr algn="ctr" marL="0" indent="0">
+              <a:lnSpc>
+                <a:spcPct val="100000"/>
+              </a:lnSpc>
+              <a:buNone/>
+            </a:pPr>
+            <a:r>
+              <a:rPr lang="th-TH" sz="1200" dirty="0">
+                <a:solidFill>
+                  <a:srgbClr val="5F5F5F"/>
+                </a:solidFill>
+                <a:latin typeface="+mn-lt"/>
+                <a:ea typeface="+mn-ea"/>
+                <a:cs typeface="+mn-cs"/>
+              </a:rPr>
+              <a:t>อุตสาหกรรม · งานที่ทำ</a:t>
+            </a:r>
+          </a:p>
+        </p:txBody>
+      </p:sp>
+      <p:sp>
+        <p:nvSpPr>
+          <p:cNvPr id="31" name="Tile 7"/>
+          <p:cNvSpPr/>
+          <p:nvPr/>
+        </p:nvSpPr>
+        <p:spPr>
+          <a:xfrm>
+            <a:off x="6187440" y="3154680"/>
+            <a:ext cx="2453640" cy="914400"/>
+          </a:xfrm>
+          <a:prstGeom prst="rect">
+            <a:avLst/>
+          </a:prstGeom>
+          <a:solidFill>
+            <a:srgbClr val="FFFFFF"/>
+          </a:solidFill>
+          <a:ln w="9525">
+            <a:solidFill>
+              <a:srgbClr val="E5E5E5"/>
+            </a:solidFill>
+          </a:ln>
+        </p:spPr>
+        <p:txBody>
+          <a:bodyPr/>
+          <a:lstStyle/>
+          <a:p>
+            <a:endParaRPr lang="th-TH"/>
+          </a:p>
+        </p:txBody>
+      </p:sp>
+      <p:sp>
+        <p:nvSpPr>
+          <p:cNvPr id="32" name="Tile 7 Logo"/>
+          <p:cNvSpPr>
+            <a:spLocks noGrp="1"/>
+          </p:cNvSpPr>
+          <p:nvPr>
+            <p:ph idx="32"/>
+          </p:nvPr>
+        </p:nvSpPr>
+        <p:spPr>
+          <a:xfrm>
+            <a:off x="6324600" y="3246120"/>
+            <a:ext cx="2179320" cy="502920"/>
+          </a:xfrm>
+          <a:prstGeom prst="rect">
+            <a:avLst/>
+          </a:prstGeom>
+        </p:spPr>
+        <p:txBody>
+          <a:bodyPr wrap="square" anchor="ctr" lIns="0" tIns="0" rIns="0" bIns="0" rtlCol="0"/>
+          <a:lstStyle>
+            <a:lvl1pPr algn="ctr" marL="0" indent="0">
+              <a:lnSpc>
+                <a:spcPct val="100000"/>
+              </a:lnSpc>
+              <a:buNone/>
+              <a:defRPr lang="th-TH" sz="1600" b="1" dirty="0">
+                <a:solidFill>
+                  <a:srgbClr val="333333"/>
+                </a:solidFill>
+                <a:latin typeface="+mj-lt"/>
+                <a:ea typeface="+mj-ea"/>
+                <a:cs typeface="+mj-cs"/>
+              </a:defRPr>
+            </a:lvl1pPr>
+          </a:lstStyle>
+          <a:p>
+            <a:pPr algn="ctr" marL="0" indent="0">
+              <a:lnSpc>
+                <a:spcPct val="100000"/>
+              </a:lnSpc>
+              <a:buNone/>
+            </a:pPr>
+            <a:r>
+              <a:rPr lang="th-TH" sz="1600" b="1" dirty="0">
+                <a:solidFill>
+                  <a:srgbClr val="333333"/>
+                </a:solidFill>
+                <a:latin typeface="+mj-lt"/>
+                <a:ea typeface="+mj-ea"/>
+                <a:cs typeface="+mj-cs"/>
+              </a:rPr>
+              <a:t>โลโก้ หรือชื่อลูกค้า</a:t>
+            </a:r>
+          </a:p>
+        </p:txBody>
+      </p:sp>
+      <p:sp>
+        <p:nvSpPr>
+          <p:cNvPr id="33" name="Tile 7 Caption"/>
+          <p:cNvSpPr>
+            <a:spLocks noGrp="1"/>
+          </p:cNvSpPr>
+          <p:nvPr>
+            <p:ph type="body" idx="33"/>
+          </p:nvPr>
+        </p:nvSpPr>
+        <p:spPr>
+          <a:xfrm>
+            <a:off x="6278880" y="3758184"/>
+            <a:ext cx="2270760" cy="219456"/>
+          </a:xfrm>
+          <a:prstGeom prst="rect">
+            <a:avLst/>
+          </a:prstGeom>
+        </p:spPr>
+        <p:txBody>
+          <a:bodyPr wrap="square" anchor="ctr" lIns="0" tIns="0" rIns="0" bIns="0" rtlCol="0"/>
+          <a:lstStyle>
+            <a:lvl1pPr algn="ctr" marL="0" indent="0">
+              <a:lnSpc>
+                <a:spcPct val="100000"/>
+              </a:lnSpc>
+              <a:buNone/>
+              <a:defRPr lang="th-TH" sz="1200" dirty="0">
+                <a:solidFill>
+                  <a:srgbClr val="5F5F5F"/>
+                </a:solidFill>
+                <a:latin typeface="+mn-lt"/>
+                <a:ea typeface="+mn-ea"/>
+                <a:cs typeface="+mn-cs"/>
+              </a:defRPr>
+            </a:lvl1pPr>
+          </a:lstStyle>
+          <a:p>
+            <a:pPr algn="ctr" marL="0" indent="0">
+              <a:lnSpc>
+                <a:spcPct val="100000"/>
+              </a:lnSpc>
+              <a:buNone/>
+            </a:pPr>
+            <a:r>
+              <a:rPr lang="th-TH" sz="1200" dirty="0">
+                <a:solidFill>
+                  <a:srgbClr val="5F5F5F"/>
+                </a:solidFill>
+                <a:latin typeface="+mn-lt"/>
+                <a:ea typeface="+mn-ea"/>
+                <a:cs typeface="+mn-cs"/>
+              </a:rPr>
+              <a:t>อุตสาหกรรม · งานที่ทำ</a:t>
+            </a:r>
+          </a:p>
+        </p:txBody>
+      </p:sp>
+      <p:sp>
+        <p:nvSpPr>
+          <p:cNvPr id="34" name="Tile 8"/>
+          <p:cNvSpPr/>
+          <p:nvPr/>
+        </p:nvSpPr>
+        <p:spPr>
+          <a:xfrm>
+            <a:off x="8823960" y="3154680"/>
+            <a:ext cx="2453640" cy="914400"/>
+          </a:xfrm>
+          <a:prstGeom prst="rect">
+            <a:avLst/>
+          </a:prstGeom>
+          <a:solidFill>
+            <a:srgbClr val="FFFFFF"/>
+          </a:solidFill>
+          <a:ln w="9525">
+            <a:solidFill>
+              <a:srgbClr val="E5E5E5"/>
+            </a:solidFill>
+          </a:ln>
+        </p:spPr>
+        <p:txBody>
+          <a:bodyPr/>
+          <a:lstStyle/>
+          <a:p>
+            <a:endParaRPr lang="th-TH"/>
+          </a:p>
+        </p:txBody>
+      </p:sp>
+      <p:sp>
+        <p:nvSpPr>
+          <p:cNvPr id="35" name="Tile 8 Logo"/>
+          <p:cNvSpPr>
+            <a:spLocks noGrp="1"/>
+          </p:cNvSpPr>
+          <p:nvPr>
+            <p:ph idx="34"/>
+          </p:nvPr>
+        </p:nvSpPr>
+        <p:spPr>
+          <a:xfrm>
+            <a:off x="8961120" y="3246120"/>
+            <a:ext cx="2179320" cy="502920"/>
+          </a:xfrm>
+          <a:prstGeom prst="rect">
+            <a:avLst/>
+          </a:prstGeom>
+        </p:spPr>
+        <p:txBody>
+          <a:bodyPr wrap="square" anchor="ctr" lIns="0" tIns="0" rIns="0" bIns="0" rtlCol="0"/>
+          <a:lstStyle>
+            <a:lvl1pPr algn="ctr" marL="0" indent="0">
+              <a:lnSpc>
+                <a:spcPct val="100000"/>
+              </a:lnSpc>
+              <a:buNone/>
+              <a:defRPr lang="th-TH" sz="1600" b="1" dirty="0">
+                <a:solidFill>
+                  <a:srgbClr val="333333"/>
+                </a:solidFill>
+                <a:latin typeface="+mj-lt"/>
+                <a:ea typeface="+mj-ea"/>
+                <a:cs typeface="+mj-cs"/>
+              </a:defRPr>
+            </a:lvl1pPr>
+          </a:lstStyle>
+          <a:p>
+            <a:pPr algn="ctr" marL="0" indent="0">
+              <a:lnSpc>
+                <a:spcPct val="100000"/>
+              </a:lnSpc>
+              <a:buNone/>
+            </a:pPr>
+            <a:r>
+              <a:rPr lang="th-TH" sz="1600" b="1" dirty="0">
+                <a:solidFill>
+                  <a:srgbClr val="333333"/>
+                </a:solidFill>
+                <a:latin typeface="+mj-lt"/>
+                <a:ea typeface="+mj-ea"/>
+                <a:cs typeface="+mj-cs"/>
+              </a:rPr>
+              <a:t>โลโก้ หรือชื่อลูกค้า</a:t>
+            </a:r>
+          </a:p>
+        </p:txBody>
+      </p:sp>
+      <p:sp>
+        <p:nvSpPr>
+          <p:cNvPr id="36" name="Tile 8 Caption"/>
+          <p:cNvSpPr>
+            <a:spLocks noGrp="1"/>
+          </p:cNvSpPr>
+          <p:nvPr>
+            <p:ph type="body" idx="35"/>
+          </p:nvPr>
+        </p:nvSpPr>
+        <p:spPr>
+          <a:xfrm>
+            <a:off x="8915400" y="3758184"/>
+            <a:ext cx="2270760" cy="219456"/>
+          </a:xfrm>
+          <a:prstGeom prst="rect">
+            <a:avLst/>
+          </a:prstGeom>
+        </p:spPr>
+        <p:txBody>
+          <a:bodyPr wrap="square" anchor="ctr" lIns="0" tIns="0" rIns="0" bIns="0" rtlCol="0"/>
+          <a:lstStyle>
+            <a:lvl1pPr algn="ctr" marL="0" indent="0">
+              <a:lnSpc>
+                <a:spcPct val="100000"/>
+              </a:lnSpc>
+              <a:buNone/>
+              <a:defRPr lang="th-TH" sz="1200" dirty="0">
+                <a:solidFill>
+                  <a:srgbClr val="5F5F5F"/>
+                </a:solidFill>
+                <a:latin typeface="+mn-lt"/>
+                <a:ea typeface="+mn-ea"/>
+                <a:cs typeface="+mn-cs"/>
+              </a:defRPr>
+            </a:lvl1pPr>
+          </a:lstStyle>
+          <a:p>
+            <a:pPr algn="ctr" marL="0" indent="0">
+              <a:lnSpc>
+                <a:spcPct val="100000"/>
+              </a:lnSpc>
+              <a:buNone/>
+            </a:pPr>
+            <a:r>
+              <a:rPr lang="th-TH" sz="1200" dirty="0">
+                <a:solidFill>
+                  <a:srgbClr val="5F5F5F"/>
+                </a:solidFill>
+                <a:latin typeface="+mn-lt"/>
+                <a:ea typeface="+mn-ea"/>
+                <a:cs typeface="+mn-cs"/>
+              </a:rPr>
+              <a:t>อุตสาหกรรม · งานที่ทำ</a:t>
+            </a:r>
+          </a:p>
+        </p:txBody>
+      </p:sp>
+      <p:sp>
+        <p:nvSpPr>
+          <p:cNvPr id="37" name="Tile 9"/>
+          <p:cNvSpPr/>
+          <p:nvPr/>
+        </p:nvSpPr>
+        <p:spPr>
+          <a:xfrm>
+            <a:off x="914400" y="4251960"/>
+            <a:ext cx="2453640" cy="914400"/>
+          </a:xfrm>
+          <a:prstGeom prst="rect">
+            <a:avLst/>
+          </a:prstGeom>
+          <a:solidFill>
+            <a:srgbClr val="FFFFFF"/>
+          </a:solidFill>
+          <a:ln w="9525">
+            <a:solidFill>
+              <a:srgbClr val="E5E5E5"/>
+            </a:solidFill>
+          </a:ln>
+        </p:spPr>
+        <p:txBody>
+          <a:bodyPr/>
+          <a:lstStyle/>
+          <a:p>
+            <a:endParaRPr lang="th-TH"/>
+          </a:p>
+        </p:txBody>
+      </p:sp>
+      <p:sp>
+        <p:nvSpPr>
+          <p:cNvPr id="38" name="Tile 9 Logo"/>
+          <p:cNvSpPr>
+            <a:spLocks noGrp="1"/>
+          </p:cNvSpPr>
+          <p:nvPr>
+            <p:ph idx="36"/>
+          </p:nvPr>
+        </p:nvSpPr>
+        <p:spPr>
+          <a:xfrm>
+            <a:off x="1051560" y="4343400"/>
+            <a:ext cx="2179320" cy="502920"/>
+          </a:xfrm>
+          <a:prstGeom prst="rect">
+            <a:avLst/>
+          </a:prstGeom>
+        </p:spPr>
+        <p:txBody>
+          <a:bodyPr wrap="square" anchor="ctr" lIns="0" tIns="0" rIns="0" bIns="0" rtlCol="0"/>
+          <a:lstStyle>
+            <a:lvl1pPr algn="ctr" marL="0" indent="0">
+              <a:lnSpc>
+                <a:spcPct val="100000"/>
+              </a:lnSpc>
+              <a:buNone/>
+              <a:defRPr lang="th-TH" sz="1600" b="1" dirty="0">
+                <a:solidFill>
+                  <a:srgbClr val="333333"/>
+                </a:solidFill>
+                <a:latin typeface="+mj-lt"/>
+                <a:ea typeface="+mj-ea"/>
+                <a:cs typeface="+mj-cs"/>
+              </a:defRPr>
+            </a:lvl1pPr>
+          </a:lstStyle>
+          <a:p>
+            <a:pPr algn="ctr" marL="0" indent="0">
+              <a:lnSpc>
+                <a:spcPct val="100000"/>
+              </a:lnSpc>
+              <a:buNone/>
+            </a:pPr>
+            <a:r>
+              <a:rPr lang="th-TH" sz="1600" b="1" dirty="0">
+                <a:solidFill>
+                  <a:srgbClr val="333333"/>
+                </a:solidFill>
+                <a:latin typeface="+mj-lt"/>
+                <a:ea typeface="+mj-ea"/>
+                <a:cs typeface="+mj-cs"/>
+              </a:rPr>
+              <a:t>โลโก้ หรือชื่อลูกค้า</a:t>
+            </a:r>
+          </a:p>
+        </p:txBody>
+      </p:sp>
+      <p:sp>
+        <p:nvSpPr>
+          <p:cNvPr id="39" name="Tile 9 Caption"/>
+          <p:cNvSpPr>
+            <a:spLocks noGrp="1"/>
+          </p:cNvSpPr>
+          <p:nvPr>
+            <p:ph type="body" idx="37"/>
+          </p:nvPr>
+        </p:nvSpPr>
+        <p:spPr>
+          <a:xfrm>
+            <a:off x="1005840" y="4855464"/>
+            <a:ext cx="2270760" cy="219456"/>
+          </a:xfrm>
+          <a:prstGeom prst="rect">
+            <a:avLst/>
+          </a:prstGeom>
+        </p:spPr>
+        <p:txBody>
+          <a:bodyPr wrap="square" anchor="ctr" lIns="0" tIns="0" rIns="0" bIns="0" rtlCol="0"/>
+          <a:lstStyle>
+            <a:lvl1pPr algn="ctr" marL="0" indent="0">
+              <a:lnSpc>
+                <a:spcPct val="100000"/>
+              </a:lnSpc>
+              <a:buNone/>
+              <a:defRPr lang="th-TH" sz="1200" dirty="0">
+                <a:solidFill>
+                  <a:srgbClr val="5F5F5F"/>
+                </a:solidFill>
+                <a:latin typeface="+mn-lt"/>
+                <a:ea typeface="+mn-ea"/>
+                <a:cs typeface="+mn-cs"/>
+              </a:defRPr>
+            </a:lvl1pPr>
+          </a:lstStyle>
+          <a:p>
+            <a:pPr algn="ctr" marL="0" indent="0">
+              <a:lnSpc>
+                <a:spcPct val="100000"/>
+              </a:lnSpc>
+              <a:buNone/>
+            </a:pPr>
+            <a:r>
+              <a:rPr lang="th-TH" sz="1200" dirty="0">
+                <a:solidFill>
+                  <a:srgbClr val="5F5F5F"/>
+                </a:solidFill>
+                <a:latin typeface="+mn-lt"/>
+                <a:ea typeface="+mn-ea"/>
+                <a:cs typeface="+mn-cs"/>
+              </a:rPr>
+              <a:t>อุตสาหกรรม · งานที่ทำ</a:t>
+            </a:r>
+          </a:p>
+        </p:txBody>
+      </p:sp>
+      <p:sp>
+        <p:nvSpPr>
+          <p:cNvPr id="40" name="Tile 10"/>
+          <p:cNvSpPr/>
+          <p:nvPr/>
+        </p:nvSpPr>
+        <p:spPr>
+          <a:xfrm>
+            <a:off x="3550920" y="4251960"/>
+            <a:ext cx="2453640" cy="914400"/>
+          </a:xfrm>
+          <a:prstGeom prst="rect">
+            <a:avLst/>
+          </a:prstGeom>
+          <a:solidFill>
+            <a:srgbClr val="FFFFFF"/>
+          </a:solidFill>
+          <a:ln w="9525">
+            <a:solidFill>
+              <a:srgbClr val="E5E5E5"/>
+            </a:solidFill>
+          </a:ln>
+        </p:spPr>
+        <p:txBody>
+          <a:bodyPr/>
+          <a:lstStyle/>
+          <a:p>
+            <a:endParaRPr lang="th-TH"/>
+          </a:p>
+        </p:txBody>
+      </p:sp>
+      <p:sp>
+        <p:nvSpPr>
+          <p:cNvPr id="41" name="Tile 10 Logo"/>
+          <p:cNvSpPr>
+            <a:spLocks noGrp="1"/>
+          </p:cNvSpPr>
+          <p:nvPr>
+            <p:ph idx="38"/>
+          </p:nvPr>
+        </p:nvSpPr>
+        <p:spPr>
+          <a:xfrm>
+            <a:off x="3688080" y="4343400"/>
+            <a:ext cx="2179320" cy="502920"/>
+          </a:xfrm>
+          <a:prstGeom prst="rect">
+            <a:avLst/>
+          </a:prstGeom>
+        </p:spPr>
+        <p:txBody>
+          <a:bodyPr wrap="square" anchor="ctr" lIns="0" tIns="0" rIns="0" bIns="0" rtlCol="0"/>
+          <a:lstStyle>
+            <a:lvl1pPr algn="ctr" marL="0" indent="0">
+              <a:lnSpc>
+                <a:spcPct val="100000"/>
+              </a:lnSpc>
+              <a:buNone/>
+              <a:defRPr lang="th-TH" sz="1600" b="1" dirty="0">
+                <a:solidFill>
+                  <a:srgbClr val="333333"/>
+                </a:solidFill>
+                <a:latin typeface="+mj-lt"/>
+                <a:ea typeface="+mj-ea"/>
+                <a:cs typeface="+mj-cs"/>
+              </a:defRPr>
+            </a:lvl1pPr>
+          </a:lstStyle>
+          <a:p>
+            <a:pPr algn="ctr" marL="0" indent="0">
+              <a:lnSpc>
+                <a:spcPct val="100000"/>
+              </a:lnSpc>
+              <a:buNone/>
+            </a:pPr>
+            <a:r>
+              <a:rPr lang="th-TH" sz="1600" b="1" dirty="0">
+                <a:solidFill>
+                  <a:srgbClr val="333333"/>
+                </a:solidFill>
+                <a:latin typeface="+mj-lt"/>
+                <a:ea typeface="+mj-ea"/>
+                <a:cs typeface="+mj-cs"/>
+              </a:rPr>
+              <a:t>โลโก้ หรือชื่อลูกค้า</a:t>
+            </a:r>
+          </a:p>
+        </p:txBody>
+      </p:sp>
+      <p:sp>
+        <p:nvSpPr>
+          <p:cNvPr id="42" name="Tile 10 Caption"/>
+          <p:cNvSpPr>
+            <a:spLocks noGrp="1"/>
+          </p:cNvSpPr>
+          <p:nvPr>
+            <p:ph type="body" idx="39"/>
+          </p:nvPr>
+        </p:nvSpPr>
+        <p:spPr>
+          <a:xfrm>
+            <a:off x="3642360" y="4855464"/>
+            <a:ext cx="2270760" cy="219456"/>
+          </a:xfrm>
+          <a:prstGeom prst="rect">
+            <a:avLst/>
+          </a:prstGeom>
+        </p:spPr>
+        <p:txBody>
+          <a:bodyPr wrap="square" anchor="ctr" lIns="0" tIns="0" rIns="0" bIns="0" rtlCol="0"/>
+          <a:lstStyle>
+            <a:lvl1pPr algn="ctr" marL="0" indent="0">
+              <a:lnSpc>
+                <a:spcPct val="100000"/>
+              </a:lnSpc>
+              <a:buNone/>
+              <a:defRPr lang="th-TH" sz="1200" dirty="0">
+                <a:solidFill>
+                  <a:srgbClr val="5F5F5F"/>
+                </a:solidFill>
+                <a:latin typeface="+mn-lt"/>
+                <a:ea typeface="+mn-ea"/>
+                <a:cs typeface="+mn-cs"/>
+              </a:defRPr>
+            </a:lvl1pPr>
+          </a:lstStyle>
+          <a:p>
+            <a:pPr algn="ctr" marL="0" indent="0">
+              <a:lnSpc>
+                <a:spcPct val="100000"/>
+              </a:lnSpc>
+              <a:buNone/>
+            </a:pPr>
+            <a:r>
+              <a:rPr lang="th-TH" sz="1200" dirty="0">
+                <a:solidFill>
+                  <a:srgbClr val="5F5F5F"/>
+                </a:solidFill>
+                <a:latin typeface="+mn-lt"/>
+                <a:ea typeface="+mn-ea"/>
+                <a:cs typeface="+mn-cs"/>
+              </a:rPr>
+              <a:t>อุตสาหกรรม · งานที่ทำ</a:t>
+            </a:r>
+          </a:p>
+        </p:txBody>
+      </p:sp>
+      <p:sp>
+        <p:nvSpPr>
+          <p:cNvPr id="43" name="Tile 11"/>
+          <p:cNvSpPr/>
+          <p:nvPr/>
+        </p:nvSpPr>
+        <p:spPr>
+          <a:xfrm>
+            <a:off x="6187440" y="4251960"/>
+            <a:ext cx="2453640" cy="914400"/>
+          </a:xfrm>
+          <a:prstGeom prst="rect">
+            <a:avLst/>
+          </a:prstGeom>
+          <a:solidFill>
+            <a:srgbClr val="FFFFFF"/>
+          </a:solidFill>
+          <a:ln w="9525">
+            <a:solidFill>
+              <a:srgbClr val="E5E5E5"/>
+            </a:solidFill>
+          </a:ln>
+        </p:spPr>
+        <p:txBody>
+          <a:bodyPr/>
+          <a:lstStyle/>
+          <a:p>
+            <a:endParaRPr lang="th-TH"/>
+          </a:p>
+        </p:txBody>
+      </p:sp>
+      <p:sp>
+        <p:nvSpPr>
+          <p:cNvPr id="44" name="Tile 11 Logo"/>
+          <p:cNvSpPr>
+            <a:spLocks noGrp="1"/>
+          </p:cNvSpPr>
+          <p:nvPr>
+            <p:ph idx="40"/>
+          </p:nvPr>
+        </p:nvSpPr>
+        <p:spPr>
+          <a:xfrm>
+            <a:off x="6324600" y="4343400"/>
+            <a:ext cx="2179320" cy="502920"/>
+          </a:xfrm>
+          <a:prstGeom prst="rect">
+            <a:avLst/>
+          </a:prstGeom>
+        </p:spPr>
+        <p:txBody>
+          <a:bodyPr wrap="square" anchor="ctr" lIns="0" tIns="0" rIns="0" bIns="0" rtlCol="0"/>
+          <a:lstStyle>
+            <a:lvl1pPr algn="ctr" marL="0" indent="0">
+              <a:lnSpc>
+                <a:spcPct val="100000"/>
+              </a:lnSpc>
+              <a:buNone/>
+              <a:defRPr lang="th-TH" sz="1600" b="1" dirty="0">
+                <a:solidFill>
+                  <a:srgbClr val="333333"/>
+                </a:solidFill>
+                <a:latin typeface="+mj-lt"/>
+                <a:ea typeface="+mj-ea"/>
+                <a:cs typeface="+mj-cs"/>
+              </a:defRPr>
+            </a:lvl1pPr>
+          </a:lstStyle>
+          <a:p>
+            <a:pPr algn="ctr" marL="0" indent="0">
+              <a:lnSpc>
+                <a:spcPct val="100000"/>
+              </a:lnSpc>
+              <a:buNone/>
+            </a:pPr>
+            <a:r>
+              <a:rPr lang="th-TH" sz="1600" b="1" dirty="0">
+                <a:solidFill>
+                  <a:srgbClr val="333333"/>
+                </a:solidFill>
+                <a:latin typeface="+mj-lt"/>
+                <a:ea typeface="+mj-ea"/>
+                <a:cs typeface="+mj-cs"/>
+              </a:rPr>
+              <a:t>โลโก้ หรือชื่อลูกค้า</a:t>
+            </a:r>
+          </a:p>
+        </p:txBody>
+      </p:sp>
+      <p:sp>
+        <p:nvSpPr>
+          <p:cNvPr id="45" name="Tile 11 Caption"/>
+          <p:cNvSpPr>
+            <a:spLocks noGrp="1"/>
+          </p:cNvSpPr>
+          <p:nvPr>
+            <p:ph type="body" idx="41"/>
+          </p:nvPr>
+        </p:nvSpPr>
+        <p:spPr>
+          <a:xfrm>
+            <a:off x="6278880" y="4855464"/>
+            <a:ext cx="2270760" cy="219456"/>
+          </a:xfrm>
+          <a:prstGeom prst="rect">
+            <a:avLst/>
+          </a:prstGeom>
+        </p:spPr>
+        <p:txBody>
+          <a:bodyPr wrap="square" anchor="ctr" lIns="0" tIns="0" rIns="0" bIns="0" rtlCol="0"/>
+          <a:lstStyle>
+            <a:lvl1pPr algn="ctr" marL="0" indent="0">
+              <a:lnSpc>
+                <a:spcPct val="100000"/>
+              </a:lnSpc>
+              <a:buNone/>
+              <a:defRPr lang="th-TH" sz="1200" dirty="0">
+                <a:solidFill>
+                  <a:srgbClr val="5F5F5F"/>
+                </a:solidFill>
+                <a:latin typeface="+mn-lt"/>
+                <a:ea typeface="+mn-ea"/>
+                <a:cs typeface="+mn-cs"/>
+              </a:defRPr>
+            </a:lvl1pPr>
+          </a:lstStyle>
+          <a:p>
+            <a:pPr algn="ctr" marL="0" indent="0">
+              <a:lnSpc>
+                <a:spcPct val="100000"/>
+              </a:lnSpc>
+              <a:buNone/>
+            </a:pPr>
+            <a:r>
+              <a:rPr lang="th-TH" sz="1200" dirty="0">
+                <a:solidFill>
+                  <a:srgbClr val="5F5F5F"/>
+                </a:solidFill>
+                <a:latin typeface="+mn-lt"/>
+                <a:ea typeface="+mn-ea"/>
+                <a:cs typeface="+mn-cs"/>
+              </a:rPr>
+              <a:t>อุตสาหกรรม · งานที่ทำ</a:t>
+            </a:r>
+          </a:p>
+        </p:txBody>
+      </p:sp>
+      <p:sp>
+        <p:nvSpPr>
+          <p:cNvPr id="46" name="Tile 12"/>
+          <p:cNvSpPr/>
+          <p:nvPr/>
+        </p:nvSpPr>
+        <p:spPr>
+          <a:xfrm>
+            <a:off x="8823960" y="4251960"/>
+            <a:ext cx="2453640" cy="914400"/>
+          </a:xfrm>
+          <a:prstGeom prst="rect">
+            <a:avLst/>
+          </a:prstGeom>
+          <a:solidFill>
+            <a:srgbClr val="FFFFFF"/>
+          </a:solidFill>
+          <a:ln w="9525">
+            <a:solidFill>
+              <a:srgbClr val="E5E5E5"/>
+            </a:solidFill>
+          </a:ln>
+        </p:spPr>
+        <p:txBody>
+          <a:bodyPr/>
+          <a:lstStyle/>
+          <a:p>
+            <a:endParaRPr lang="th-TH"/>
+          </a:p>
+        </p:txBody>
+      </p:sp>
+      <p:sp>
+        <p:nvSpPr>
+          <p:cNvPr id="47" name="Tile 12 Logo"/>
+          <p:cNvSpPr>
+            <a:spLocks noGrp="1"/>
+          </p:cNvSpPr>
+          <p:nvPr>
+            <p:ph idx="42"/>
+          </p:nvPr>
+        </p:nvSpPr>
+        <p:spPr>
+          <a:xfrm>
+            <a:off x="8961120" y="4343400"/>
+            <a:ext cx="2179320" cy="502920"/>
+          </a:xfrm>
+          <a:prstGeom prst="rect">
+            <a:avLst/>
+          </a:prstGeom>
+        </p:spPr>
+        <p:txBody>
+          <a:bodyPr wrap="square" anchor="ctr" lIns="0" tIns="0" rIns="0" bIns="0" rtlCol="0"/>
+          <a:lstStyle>
+            <a:lvl1pPr algn="ctr" marL="0" indent="0">
+              <a:lnSpc>
+                <a:spcPct val="100000"/>
+              </a:lnSpc>
+              <a:buNone/>
+              <a:defRPr lang="th-TH" sz="1600" b="1" dirty="0">
+                <a:solidFill>
+                  <a:srgbClr val="333333"/>
+                </a:solidFill>
+                <a:latin typeface="+mj-lt"/>
+                <a:ea typeface="+mj-ea"/>
+                <a:cs typeface="+mj-cs"/>
+              </a:defRPr>
+            </a:lvl1pPr>
+          </a:lstStyle>
+          <a:p>
+            <a:pPr algn="ctr" marL="0" indent="0">
+              <a:lnSpc>
+                <a:spcPct val="100000"/>
+              </a:lnSpc>
+              <a:buNone/>
+            </a:pPr>
+            <a:r>
+              <a:rPr lang="th-TH" sz="1600" b="1" dirty="0">
+                <a:solidFill>
+                  <a:srgbClr val="333333"/>
+                </a:solidFill>
+                <a:latin typeface="+mj-lt"/>
+                <a:ea typeface="+mj-ea"/>
+                <a:cs typeface="+mj-cs"/>
+              </a:rPr>
+              <a:t>โลโก้ หรือชื่อลูกค้า</a:t>
+            </a:r>
+          </a:p>
+        </p:txBody>
+      </p:sp>
+      <p:sp>
+        <p:nvSpPr>
+          <p:cNvPr id="48" name="Tile 12 Caption"/>
+          <p:cNvSpPr>
+            <a:spLocks noGrp="1"/>
+          </p:cNvSpPr>
+          <p:nvPr>
+            <p:ph type="body" idx="43"/>
+          </p:nvPr>
+        </p:nvSpPr>
+        <p:spPr>
+          <a:xfrm>
+            <a:off x="8915400" y="4855464"/>
+            <a:ext cx="2270760" cy="219456"/>
+          </a:xfrm>
+          <a:prstGeom prst="rect">
+            <a:avLst/>
+          </a:prstGeom>
+        </p:spPr>
+        <p:txBody>
+          <a:bodyPr wrap="square" anchor="ctr" lIns="0" tIns="0" rIns="0" bIns="0" rtlCol="0"/>
+          <a:lstStyle>
+            <a:lvl1pPr algn="ctr" marL="0" indent="0">
+              <a:lnSpc>
+                <a:spcPct val="100000"/>
+              </a:lnSpc>
+              <a:buNone/>
+              <a:defRPr lang="th-TH" sz="1200" dirty="0">
+                <a:solidFill>
+                  <a:srgbClr val="5F5F5F"/>
+                </a:solidFill>
+                <a:latin typeface="+mn-lt"/>
+                <a:ea typeface="+mn-ea"/>
+                <a:cs typeface="+mn-cs"/>
+              </a:defRPr>
+            </a:lvl1pPr>
+          </a:lstStyle>
+          <a:p>
+            <a:pPr algn="ctr" marL="0" indent="0">
+              <a:lnSpc>
+                <a:spcPct val="100000"/>
+              </a:lnSpc>
+              <a:buNone/>
+            </a:pPr>
+            <a:r>
+              <a:rPr lang="th-TH" sz="1200" dirty="0">
+                <a:solidFill>
+                  <a:srgbClr val="5F5F5F"/>
+                </a:solidFill>
+                <a:latin typeface="+mn-lt"/>
+                <a:ea typeface="+mn-ea"/>
+                <a:cs typeface="+mn-cs"/>
+              </a:rPr>
+              <a:t>อุตสาหกรรม · งานที่ทำ</a:t>
+            </a:r>
+          </a:p>
+        </p:txBody>
+      </p:sp>
+      <p:sp>
+        <p:nvSpPr>
+          <p:cNvPr id="49" name="Note"/>
+          <p:cNvSpPr>
+            <a:spLocks noGrp="1"/>
+          </p:cNvSpPr>
+          <p:nvPr>
+            <p:ph type="body" idx="2"/>
+          </p:nvPr>
+        </p:nvSpPr>
+        <p:spPr>
+          <a:xfrm>
+            <a:off x="914400" y="5257800"/>
+            <a:ext cx="10363200" cy="274320"/>
+          </a:xfrm>
+          <a:prstGeom prst="rect">
+            <a:avLst/>
+          </a:prstGeom>
+        </p:spPr>
+        <p:txBody>
+          <a:bodyPr wrap="square" anchor="t" lIns="0" tIns="0" rIns="0" bIns="0" rtlCol="0"/>
+          <a:lstStyle>
+            <a:lvl1pPr algn="l" marL="0" indent="0">
+              <a:lnSpc>
+                <a:spcPct val="130000"/>
+              </a:lnSpc>
+              <a:buNone/>
+              <a:defRPr lang="th-TH" sz="1000" dirty="0">
+                <a:solidFill>
+                  <a:srgbClr val="5F5F5F"/>
+                </a:solidFill>
+                <a:latin typeface="+mn-lt"/>
+                <a:ea typeface="+mn-ea"/>
+                <a:cs typeface="+mn-cs"/>
+              </a:defRPr>
+            </a:lvl1pPr>
+          </a:lstStyle>
+          <a:p>
+            <a:pPr algn="l" marL="0" indent="0">
+              <a:lnSpc>
+                <a:spcPct val="130000"/>
+              </a:lnSpc>
+              <a:buNone/>
+            </a:pPr>
+            <a:r>
+              <a:rPr lang="th-TH" sz="1000" dirty="0">
+                <a:solidFill>
+                  <a:srgbClr val="5F5F5F"/>
+                </a:solidFill>
+                <a:latin typeface="+mn-lt"/>
+                <a:ea typeface="+mn-ea"/>
+                <a:cs typeface="+mn-cs"/>
+              </a:rPr>
+              <a:t>รายชื่อเต็มอยู่ภาคผนวก · ใช้โลโก้เมื่อลูกค้าอนุญาต</a:t>
+            </a:r>
+          </a:p>
+        </p:txBody>
+      </p:sp>
+      <p:sp>
+        <p:nvSpPr>
+          <p:cNvPr id="50" name="Takeaway Band"/>
+          <p:cNvSpPr/>
+          <p:nvPr/>
+        </p:nvSpPr>
+        <p:spPr>
+          <a:xfrm>
+            <a:off x="914400" y="5623560"/>
+            <a:ext cx="10363200" cy="411480"/>
+          </a:xfrm>
+          <a:prstGeom prst="rect">
+            <a:avLst/>
+          </a:prstGeom>
+          <a:solidFill>
+            <a:srgbClr val="E8F6F5"/>
+          </a:solidFill>
+          <a:ln>
+            <a:noFill/>
+          </a:ln>
+        </p:spPr>
+        <p:txBody>
+          <a:bodyPr/>
+          <a:lstStyle/>
+          <a:p>
+            <a:endParaRPr lang="th-TH"/>
+          </a:p>
+        </p:txBody>
+      </p:sp>
+      <p:sp>
+        <p:nvSpPr>
+          <p:cNvPr id="51" name="Takeaway Label"/>
+          <p:cNvSpPr>
+            <a:spLocks noGrp="1"/>
+          </p:cNvSpPr>
+          <p:nvPr>
+            <p:ph type="body" idx="3"/>
+          </p:nvPr>
+        </p:nvSpPr>
+        <p:spPr>
+          <a:xfrm>
+            <a:off x="1097280" y="5684520"/>
+            <a:ext cx="1828800" cy="289560"/>
+          </a:xfrm>
+          <a:prstGeom prst="rect">
+            <a:avLst/>
+          </a:prstGeom>
+        </p:spPr>
+        <p:txBody>
+          <a:bodyPr wrap="square" anchor="ctr" lIns="0" tIns="0" rIns="0" bIns="0" rtlCol="0"/>
+          <a:lstStyle>
+            <a:lvl1pPr algn="l" marL="0" indent="0">
+              <a:lnSpc>
+                <a:spcPct val="100000"/>
+              </a:lnSpc>
+              <a:buNone/>
+              <a:defRPr lang="th-TH" sz="1200" b="1" spc="120" dirty="0">
+                <a:solidFill>
+                  <a:srgbClr val="216B7F"/>
+                </a:solidFill>
+                <a:latin typeface="+mn-lt"/>
+                <a:ea typeface="+mn-ea"/>
+                <a:cs typeface="+mn-cs"/>
+              </a:defRPr>
+            </a:lvl1pPr>
+          </a:lstStyle>
+          <a:p>
+            <a:pPr algn="l" marL="0" indent="0">
+              <a:lnSpc>
+                <a:spcPct val="100000"/>
+              </a:lnSpc>
+              <a:buNone/>
+            </a:pPr>
+            <a:r>
+              <a:rPr lang="th-TH" sz="1200" b="1" spc="120" dirty="0">
+                <a:solidFill>
+                  <a:srgbClr val="216B7F"/>
+                </a:solidFill>
+                <a:latin typeface="+mn-lt"/>
+                <a:ea typeface="+mn-ea"/>
+                <a:cs typeface="+mn-cs"/>
+              </a:rPr>
+              <a:t>สรุป</a:t>
+            </a:r>
+          </a:p>
+        </p:txBody>
+      </p:sp>
+      <p:sp>
+        <p:nvSpPr>
+          <p:cNvPr id="52" name="Takeaway Copy"/>
+          <p:cNvSpPr>
+            <a:spLocks noGrp="1"/>
+          </p:cNvSpPr>
+          <p:nvPr>
+            <p:ph type="body" idx="4"/>
+          </p:nvPr>
+        </p:nvSpPr>
+        <p:spPr>
+          <a:xfrm>
+            <a:off x="2926080" y="5684520"/>
+            <a:ext cx="8168640" cy="289560"/>
+          </a:xfrm>
+          <a:prstGeom prst="rect">
+            <a:avLst/>
+          </a:prstGeom>
+        </p:spPr>
+        <p:txBody>
+          <a:bodyPr wrap="square" anchor="ctr" lIns="0" tIns="0" rIns="0" bIns="0" rtlCol="0"/>
+          <a:lstStyle>
+            <a:lvl1pPr algn="l" marL="0" indent="0">
+              <a:lnSpc>
+                <a:spcPct val="100000"/>
+              </a:lnSpc>
+              <a:buNone/>
+              <a:defRPr lang="th-TH" sz="1400" dirty="0">
+                <a:solidFill>
+                  <a:srgbClr val="333333"/>
+                </a:solidFill>
+                <a:latin typeface="+mn-lt"/>
+                <a:ea typeface="+mn-ea"/>
+                <a:cs typeface="+mn-cs"/>
+              </a:defRPr>
+            </a:lvl1pPr>
+          </a:lstStyle>
+          <a:p>
+            <a:pPr algn="l" marL="0" indent="0">
+              <a:lnSpc>
+                <a:spcPct val="100000"/>
+              </a:lnSpc>
+              <a:buNone/>
+            </a:pPr>
+            <a:r>
+              <a:rPr lang="th-TH" sz="1400" dirty="0">
+                <a:solidFill>
+                  <a:srgbClr val="333333"/>
+                </a:solidFill>
+                <a:latin typeface="+mn-lt"/>
+                <a:ea typeface="+mn-ea"/>
+                <a:cs typeface="+mn-cs"/>
+              </a:rPr>
+              <a:t>ประเด็นสรุปหนึ่งบรรทัด</a:t>
+            </a:r>
+          </a:p>
+        </p:txBody>
+      </p:sp>
+      <p:sp>
+        <p:nvSpPr>
+          <p:cNvPr id="90" name="Foot Bar 1"/>
+          <p:cNvSpPr/>
+          <p:nvPr/>
+        </p:nvSpPr>
+        <p:spPr>
+          <a:xfrm>
+            <a:off x="0" y="6675120"/>
+            <a:ext cx="822960" cy="137160"/>
+          </a:xfrm>
+          <a:prstGeom prst="rect">
+            <a:avLst/>
+          </a:prstGeom>
+          <a:solidFill>
+            <a:srgbClr val="216B7F"/>
+          </a:solidFill>
+          <a:ln>
+            <a:noFill/>
+          </a:ln>
+        </p:spPr>
+        <p:txBody>
+          <a:bodyPr/>
+          <a:lstStyle/>
+          <a:p>
+            <a:endParaRPr lang="th-TH"/>
+          </a:p>
+        </p:txBody>
+      </p:sp>
+      <p:sp>
+        <p:nvSpPr>
+          <p:cNvPr id="91" name="Foot Bar 2"/>
+          <p:cNvSpPr/>
+          <p:nvPr/>
+        </p:nvSpPr>
+        <p:spPr>
+          <a:xfrm>
+            <a:off x="822960" y="6675120"/>
+            <a:ext cx="822960" cy="137160"/>
+          </a:xfrm>
+          <a:prstGeom prst="rect">
+            <a:avLst/>
+          </a:prstGeom>
+          <a:solidFill>
+            <a:srgbClr val="B1C4C9"/>
+          </a:solidFill>
+          <a:ln>
+            <a:noFill/>
+          </a:ln>
+        </p:spPr>
+        <p:txBody>
+          <a:bodyPr/>
+          <a:lstStyle/>
+          <a:p>
+            <a:endParaRPr lang="th-TH"/>
+          </a:p>
+        </p:txBody>
+      </p:sp>
+      <p:sp>
+        <p:nvSpPr>
+          <p:cNvPr id="92" name="Foot Bar 3"/>
+          <p:cNvSpPr/>
+          <p:nvPr/>
+        </p:nvSpPr>
+        <p:spPr>
+          <a:xfrm>
+            <a:off x="1645920" y="6675120"/>
+            <a:ext cx="822960" cy="137160"/>
+          </a:xfrm>
+          <a:prstGeom prst="rect">
+            <a:avLst/>
+          </a:prstGeom>
+          <a:solidFill>
+            <a:srgbClr val="E1E1E1"/>
+          </a:solidFill>
+          <a:ln>
+            <a:noFill/>
+          </a:ln>
+        </p:spPr>
+        <p:txBody>
+          <a:bodyPr/>
+          <a:lstStyle/>
+          <a:p>
+            <a:endParaRPr lang="th-TH"/>
+          </a:p>
+        </p:txBody>
+      </p:sp>
+      <p:sp>
+        <p:nvSpPr>
+          <p:cNvPr id="93" name="Footer Placeholder"/>
+          <p:cNvSpPr>
+            <a:spLocks noGrp="1"/>
+          </p:cNvSpPr>
+          <p:nvPr>
+            <p:ph type="ftr" idx="11"/>
+          </p:nvPr>
+        </p:nvSpPr>
+        <p:spPr>
+          <a:xfrm>
+            <a:off x="2697480" y="6400800"/>
+            <a:ext cx="4572000" cy="274320"/>
+          </a:xfrm>
+          <a:prstGeom prst="rect">
+            <a:avLst/>
+          </a:prstGeom>
+        </p:spPr>
+        <p:txBody>
+          <a:bodyPr wrap="square" anchor="ctr" lIns="0" tIns="0" rIns="0" bIns="0" rtlCol="0"/>
+          <a:lstStyle>
+            <a:lvl1pPr algn="l" marL="0" indent="0">
+              <a:lnSpc>
+                <a:spcPct val="100000"/>
+              </a:lnSpc>
+              <a:buNone/>
+              <a:defRPr lang="th-TH" sz="1000" dirty="0">
+                <a:solidFill>
+                  <a:srgbClr val="5F5F5F"/>
+                </a:solidFill>
+                <a:latin typeface="+mn-lt"/>
+                <a:ea typeface="+mn-ea"/>
+                <a:cs typeface="+mn-cs"/>
+              </a:defRPr>
+            </a:lvl1pPr>
+          </a:lstStyle>
+          <a:p>
+            <a:pPr algn="l" marL="0" indent="0">
+              <a:lnSpc>
+                <a:spcPct val="100000"/>
+              </a:lnSpc>
+              <a:buNone/>
+            </a:pPr>
+            <a:endParaRPr lang="th-TH" sz="1000"/>
+          </a:p>
+        </p:txBody>
+      </p:sp>
+      <p:sp>
+        <p:nvSpPr>
+          <p:cNvPr id="94" name="Slide Number Placeholder"/>
+          <p:cNvSpPr>
+            <a:spLocks noGrp="1"/>
+          </p:cNvSpPr>
+          <p:nvPr>
+            <p:ph type="sldNum" sz="quarter" idx="12"/>
+          </p:nvPr>
+        </p:nvSpPr>
+        <p:spPr>
+          <a:xfrm>
+            <a:off x="10591800" y="6400800"/>
+            <a:ext cx="1371600" cy="274320"/>
+          </a:xfrm>
+          <a:prstGeom prst="rect">
+            <a:avLst/>
+          </a:prstGeom>
+        </p:spPr>
+        <p:txBody>
+          <a:bodyPr anchor="ctr"/>
+          <a:lstStyle>
+            <a:lvl1pPr algn="r" marL="0" indent="0">
+              <a:lnSpc>
+                <a:spcPct val="100000"/>
+              </a:lnSpc>
+              <a:buNone/>
+              <a:defRPr lang="th-TH" sz="1000" dirty="0">
+                <a:solidFill>
+                  <a:srgbClr val="5F5F5F"/>
+                </a:solidFill>
+                <a:latin typeface="+mn-lt"/>
+                <a:ea typeface="+mn-ea"/>
+                <a:cs typeface="+mn-cs"/>
+              </a:defRPr>
+            </a:lvl1pPr>
+          </a:lstStyle>
+          <a:p>
+            <a:pPr algn="r" marL="0" indent="0">
+              <a:buNone/>
+            </a:pPr>
+            <a:fld id="{B7E3A1C2-4F5D-4A88-9C1E-6D2F0A93B451}" type="slidenum">
+              <a:rPr lang="th-TH" sz="1000">
+                <a:solidFill>
+                  <a:srgbClr val="5F5F5F"/>
+                </a:solidFill>
+                <a:latin typeface="+mn-lt"/>
+                <a:cs typeface="+mn-cs"/>
+              </a:rPr>
+              <a:t>2</a:t>
+            </a:fld>
+            <a:endParaRPr lang="th-TH" sz="1000"/>
+          </a:p>
+        </p:txBody>
+      </p:sp>
+      <p:sp>
+        <p:nvSpPr>
+          <p:cNvPr id="95" name="Corner Lockup"/>
+          <p:cNvSpPr/>
+          <p:nvPr/>
+        </p:nvSpPr>
+        <p:spPr>
+          <a:xfrm rot="10800000">
+            <a:off x="10546080" y="-274320"/>
+            <a:ext cx="1645920" cy="822960"/>
+          </a:xfrm>
+          <a:prstGeom prst="round2SameRect">
+            <a:avLst>
+              <a:gd name="adj1" fmla="val 12000"/>
+              <a:gd name="adj2" fmla="val 0"/>
+            </a:avLst>
+          </a:prstGeom>
+          <a:solidFill>
+            <a:srgbClr val="FFFFFF"/>
+          </a:solidFill>
+          <a:ln w="12700">
+            <a:solidFill>
+              <a:srgbClr val="216B7F"/>
+            </a:solidFill>
+          </a:ln>
+        </p:spPr>
+        <p:txBody>
+          <a:bodyPr/>
+          <a:lstStyle/>
+          <a:p>
+            <a:endParaRPr lang="th-TH"/>
+          </a:p>
+        </p:txBody>
+      </p:sp>
+      <p:pic>
+        <p:nvPicPr>
+          <p:cNvPr id="96" name="NCT Mark"/>
+          <p:cNvPicPr>
+            <a:picLocks noChangeAspect="1"/>
+          </p:cNvPicPr>
+          <p:nvPr/>
+        </p:nvPicPr>
+        <p:blipFill>
+          <a:blip r:embed="rId2"/>
+          <a:stretch>
+            <a:fillRect/>
+          </a:stretch>
+        </p:blipFill>
+        <p:spPr>
+          <a:xfrm>
+            <a:off x="11094720" y="99822"/>
+            <a:ext cx="548640" cy="348996"/>
+          </a:xfrm>
+          <a:prstGeom prst="rect">
+            <a:avLst/>
+          </a:prstGeom>
+        </p:spPr>
+      </p:pic>
+    </p:spTree>
+  </p:cSld>
+  <p:clrMapOvr>
+    <a:masterClrMapping/>
+  </p:clrMapOvr>
+</p:sldLayout>
+</file>
+
 <file path=ppt/slideLayouts/slideLayout3.xml><?xml version="1.0" encoding="utf-8"?>
 <p:sldLayout xmlns:a="http://schemas.openxmlformats.org/drawingml/2006/main" xmlns:r="http://schemas.openxmlformats.org/officeDocument/2006/relationships" xmlns:p="http://schemas.openxmlformats.org/presentationml/2006/main" type="obj" showMasterSp="0" preserve="1">
   <p:cSld name="03 Title and Content">
@@ -28830,7 +31224,7 @@
           <p:nvPr/>
         </p:nvPicPr>
         <p:blipFill>
-          <a:blip r:embed="rId27"/>
+          <a:blip r:embed="rId28"/>
           <a:stretch>
             <a:fillRect/>
           </a:stretch>
@@ -28874,6 +31268,7 @@
     <p:sldLayoutId id="2147483671" r:id="rId23"/>
     <p:sldLayoutId id="2147483672" r:id="rId24"/>
     <p:sldLayoutId id="2147483673" r:id="rId25"/>
+    <p:sldLayoutId id="2147483674" r:id="rId26"/>
   </p:sldLayoutIdLst>
   <p:txStyles>
     <p:titleStyle>
@@ -32701,7 +35096,30 @@
       </p:grpSpPr>
       <p:sp>
         <p:nvSpPr>
-          <p:cNvPr id="2" name="Q"/>
+          <p:cNvPr id="2" name="Title"/>
+          <p:cNvSpPr>
+            <a:spLocks noGrp="1"/>
+          </p:cNvSpPr>
+          <p:nvPr>
+            <p:ph type="title"/>
+          </p:nvPr>
+        </p:nvSpPr>
+        <p:spPr/>
+        <p:txBody>
+          <a:bodyPr/>
+          <a:lstStyle/>
+          <a:p>
+            <a:pPr/>
+            <a:r>
+              <a:rPr lang="th-TH" dirty="0"/>
+              <a:t>40 องค์กรปิดงบด้วยระบบที่ NCT วางอยู่ทุกเดือน</a:t>
+            </a:r>
+          </a:p>
+        </p:txBody>
+      </p:sp>
+      <p:sp>
+        <p:nvSpPr>
+          <p:cNvPr id="3" name="Intro"/>
           <p:cNvSpPr>
             <a:spLocks noGrp="1"/>
           </p:cNvSpPr>
@@ -32717,14 +35135,14 @@
             <a:pPr/>
             <a:r>
               <a:rPr lang="th-TH" dirty="0"/>
-              <a:t>ระบบไม่ล่มอีกเลยตั้งแต่เปลี่ยนมาใช้ทีมนี้ดูแล และเราวางแผนงบประมาณได้ล่วงหน้าจริง ๆ</a:t>
-            </a:r>
-          </a:p>
-        </p:txBody>
-      </p:sp>
-      <p:sp>
-        <p:nvSpPr>
-          <p:cNvPr id="3" name="A"/>
+              <a:t>คัด 12 จาก 40 องค์กร ที่ใช้งานต่อเนื่องเกิน 2 ปี</a:t>
+            </a:r>
+          </a:p>
+        </p:txBody>
+      </p:sp>
+      <p:sp>
+        <p:nvSpPr>
+          <p:cNvPr id="4" name="Note"/>
           <p:cNvSpPr>
             <a:spLocks noGrp="1"/>
           </p:cNvSpPr>
@@ -32740,7 +35158,605 @@
             <a:pPr/>
             <a:r>
               <a:rPr lang="th-TH" dirty="0"/>
-              <a:t>คุณสมชาย ป. — ผู้จัดการฝ่ายไอที, บริษัทตัวอย่าง จำกัด</a:t>
+              <a:t>รายชื่อเต็มอยู่ภาคผนวก ค · ชื่อในตัวอย่างนี้เป็นบริษัทสมมติ</a:t>
+            </a:r>
+          </a:p>
+        </p:txBody>
+      </p:sp>
+      <p:sp>
+        <p:nvSpPr>
+          <p:cNvPr id="5" name="TkL"/>
+          <p:cNvSpPr>
+            <a:spLocks noGrp="1"/>
+          </p:cNvSpPr>
+          <p:nvPr>
+            <p:ph type="body" idx="3"/>
+          </p:nvPr>
+        </p:nvSpPr>
+        <p:spPr/>
+        <p:txBody>
+          <a:bodyPr/>
+          <a:lstStyle/>
+          <a:p>
+            <a:pPr/>
+            <a:r>
+              <a:rPr lang="th-TH" dirty="0"/>
+              <a:t>สรุป</a:t>
+            </a:r>
+          </a:p>
+        </p:txBody>
+      </p:sp>
+      <p:sp>
+        <p:nvSpPr>
+          <p:cNvPr id="6" name="TkC"/>
+          <p:cNvSpPr>
+            <a:spLocks noGrp="1"/>
+          </p:cNvSpPr>
+          <p:nvPr>
+            <p:ph type="body" idx="4"/>
+          </p:nvPr>
+        </p:nvSpPr>
+        <p:spPr/>
+        <p:txBody>
+          <a:bodyPr/>
+          <a:lstStyle/>
+          <a:p>
+            <a:pPr/>
+            <a:r>
+              <a:rPr lang="th-TH" dirty="0"/>
+              <a:t>ระบบเดียวกับที่เสนอ ใช้งานจริงแล้วทั้งค้าปลีก การผลิต และการเงิน</a:t>
+            </a:r>
+          </a:p>
+        </p:txBody>
+      </p:sp>
+      <p:sp>
+        <p:nvSpPr>
+          <p:cNvPr id="10" name="L0"/>
+          <p:cNvSpPr>
+            <a:spLocks noGrp="1"/>
+          </p:cNvSpPr>
+          <p:nvPr>
+            <p:ph idx="20"/>
+          </p:nvPr>
+        </p:nvSpPr>
+        <p:spPr/>
+        <p:txBody>
+          <a:bodyPr/>
+          <a:lstStyle/>
+          <a:p>
+            <a:pPr/>
+            <a:r>
+              <a:rPr lang="th-TH" dirty="0"/>
+              <a:t>Contoso</a:t>
+            </a:r>
+          </a:p>
+        </p:txBody>
+      </p:sp>
+      <p:sp>
+        <p:nvSpPr>
+          <p:cNvPr id="11" name="C0"/>
+          <p:cNvSpPr>
+            <a:spLocks noGrp="1"/>
+          </p:cNvSpPr>
+          <p:nvPr>
+            <p:ph type="body" idx="21"/>
+          </p:nvPr>
+        </p:nvSpPr>
+        <p:spPr/>
+        <p:txBody>
+          <a:bodyPr/>
+          <a:lstStyle/>
+          <a:p>
+            <a:pPr/>
+            <a:r>
+              <a:rPr lang="th-TH" dirty="0"/>
+              <a:t>ค้าปลีก · ปิดงบอัตโนมัติ</a:t>
+            </a:r>
+          </a:p>
+        </p:txBody>
+      </p:sp>
+      <p:sp>
+        <p:nvSpPr>
+          <p:cNvPr id="12" name="L1"/>
+          <p:cNvSpPr>
+            <a:spLocks noGrp="1"/>
+          </p:cNvSpPr>
+          <p:nvPr>
+            <p:ph idx="22"/>
+          </p:nvPr>
+        </p:nvSpPr>
+        <p:spPr/>
+        <p:txBody>
+          <a:bodyPr/>
+          <a:lstStyle/>
+          <a:p>
+            <a:pPr/>
+            <a:r>
+              <a:rPr lang="th-TH" dirty="0"/>
+              <a:t>Fabrikam</a:t>
+            </a:r>
+          </a:p>
+        </p:txBody>
+      </p:sp>
+      <p:sp>
+        <p:nvSpPr>
+          <p:cNvPr id="13" name="C1"/>
+          <p:cNvSpPr>
+            <a:spLocks noGrp="1"/>
+          </p:cNvSpPr>
+          <p:nvPr>
+            <p:ph type="body" idx="23"/>
+          </p:nvPr>
+        </p:nvSpPr>
+        <p:spPr/>
+        <p:txBody>
+          <a:bodyPr/>
+          <a:lstStyle/>
+          <a:p>
+            <a:pPr/>
+            <a:r>
+              <a:rPr lang="th-TH" dirty="0"/>
+              <a:t>การผลิต · ใบแจ้งหนี้ด้วย OCR</a:t>
+            </a:r>
+          </a:p>
+        </p:txBody>
+      </p:sp>
+      <p:sp>
+        <p:nvSpPr>
+          <p:cNvPr id="14" name="L2"/>
+          <p:cNvSpPr>
+            <a:spLocks noGrp="1"/>
+          </p:cNvSpPr>
+          <p:nvPr>
+            <p:ph idx="24"/>
+          </p:nvPr>
+        </p:nvSpPr>
+        <p:spPr/>
+        <p:txBody>
+          <a:bodyPr/>
+          <a:lstStyle/>
+          <a:p>
+            <a:pPr/>
+            <a:r>
+              <a:rPr lang="th-TH" dirty="0"/>
+              <a:t>Northwind Traders</a:t>
+            </a:r>
+          </a:p>
+        </p:txBody>
+      </p:sp>
+      <p:sp>
+        <p:nvSpPr>
+          <p:cNvPr id="15" name="C2"/>
+          <p:cNvSpPr>
+            <a:spLocks noGrp="1"/>
+          </p:cNvSpPr>
+          <p:nvPr>
+            <p:ph type="body" idx="25"/>
+          </p:nvPr>
+        </p:nvSpPr>
+        <p:spPr/>
+        <p:txBody>
+          <a:bodyPr/>
+          <a:lstStyle/>
+          <a:p>
+            <a:pPr/>
+            <a:r>
+              <a:rPr lang="th-TH" dirty="0"/>
+              <a:t>นำเข้า-ส่งออก · กระทบยอดธนาคาร</a:t>
+            </a:r>
+          </a:p>
+        </p:txBody>
+      </p:sp>
+      <p:sp>
+        <p:nvSpPr>
+          <p:cNvPr id="16" name="L3"/>
+          <p:cNvSpPr>
+            <a:spLocks noGrp="1"/>
+          </p:cNvSpPr>
+          <p:nvPr>
+            <p:ph idx="26"/>
+          </p:nvPr>
+        </p:nvSpPr>
+        <p:spPr/>
+        <p:txBody>
+          <a:bodyPr/>
+          <a:lstStyle/>
+          <a:p>
+            <a:pPr/>
+            <a:r>
+              <a:rPr lang="th-TH" dirty="0"/>
+              <a:t>Adventure Works</a:t>
+            </a:r>
+          </a:p>
+        </p:txBody>
+      </p:sp>
+      <p:sp>
+        <p:nvSpPr>
+          <p:cNvPr id="17" name="C3"/>
+          <p:cNvSpPr>
+            <a:spLocks noGrp="1"/>
+          </p:cNvSpPr>
+          <p:nvPr>
+            <p:ph type="body" idx="27"/>
+          </p:nvPr>
+        </p:nvSpPr>
+        <p:spPr/>
+        <p:txBody>
+          <a:bodyPr/>
+          <a:lstStyle/>
+          <a:p>
+            <a:pPr/>
+            <a:r>
+              <a:rPr lang="th-TH" dirty="0"/>
+              <a:t>การผลิต · Dynamics 365 BC</a:t>
+            </a:r>
+          </a:p>
+        </p:txBody>
+      </p:sp>
+      <p:sp>
+        <p:nvSpPr>
+          <p:cNvPr id="18" name="L4"/>
+          <p:cNvSpPr>
+            <a:spLocks noGrp="1"/>
+          </p:cNvSpPr>
+          <p:nvPr>
+            <p:ph idx="28"/>
+          </p:nvPr>
+        </p:nvSpPr>
+        <p:spPr/>
+        <p:txBody>
+          <a:bodyPr/>
+          <a:lstStyle/>
+          <a:p>
+            <a:pPr/>
+            <a:r>
+              <a:rPr lang="th-TH" dirty="0"/>
+              <a:t>Tailspin Toys</a:t>
+            </a:r>
+          </a:p>
+        </p:txBody>
+      </p:sp>
+      <p:sp>
+        <p:nvSpPr>
+          <p:cNvPr id="19" name="C4"/>
+          <p:cNvSpPr>
+            <a:spLocks noGrp="1"/>
+          </p:cNvSpPr>
+          <p:nvPr>
+            <p:ph type="body" idx="29"/>
+          </p:nvPr>
+        </p:nvSpPr>
+        <p:spPr/>
+        <p:txBody>
+          <a:bodyPr/>
+          <a:lstStyle/>
+          <a:p>
+            <a:pPr/>
+            <a:r>
+              <a:rPr lang="th-TH" dirty="0"/>
+              <a:t>ค้าปลีก · ใบกำกับภาษีอัตโนมัติ</a:t>
+            </a:r>
+          </a:p>
+        </p:txBody>
+      </p:sp>
+      <p:sp>
+        <p:nvSpPr>
+          <p:cNvPr id="20" name="L5"/>
+          <p:cNvSpPr>
+            <a:spLocks noGrp="1"/>
+          </p:cNvSpPr>
+          <p:nvPr>
+            <p:ph idx="30"/>
+          </p:nvPr>
+        </p:nvSpPr>
+        <p:spPr/>
+        <p:txBody>
+          <a:bodyPr/>
+          <a:lstStyle/>
+          <a:p>
+            <a:pPr/>
+            <a:r>
+              <a:rPr lang="th-TH" dirty="0"/>
+              <a:t>Wide World Importers</a:t>
+            </a:r>
+          </a:p>
+        </p:txBody>
+      </p:sp>
+      <p:sp>
+        <p:nvSpPr>
+          <p:cNvPr id="21" name="C5"/>
+          <p:cNvSpPr>
+            <a:spLocks noGrp="1"/>
+          </p:cNvSpPr>
+          <p:nvPr>
+            <p:ph type="body" idx="31"/>
+          </p:nvPr>
+        </p:nvSpPr>
+        <p:spPr/>
+        <p:txBody>
+          <a:bodyPr/>
+          <a:lstStyle/>
+          <a:p>
+            <a:pPr/>
+            <a:r>
+              <a:rPr lang="th-TH" dirty="0"/>
+              <a:t>โลจิสติกส์ · Intercompany</a:t>
+            </a:r>
+          </a:p>
+        </p:txBody>
+      </p:sp>
+      <p:sp>
+        <p:nvSpPr>
+          <p:cNvPr id="22" name="L6"/>
+          <p:cNvSpPr>
+            <a:spLocks noGrp="1"/>
+          </p:cNvSpPr>
+          <p:nvPr>
+            <p:ph idx="32"/>
+          </p:nvPr>
+        </p:nvSpPr>
+        <p:spPr/>
+        <p:txBody>
+          <a:bodyPr/>
+          <a:lstStyle/>
+          <a:p>
+            <a:pPr/>
+            <a:r>
+              <a:rPr lang="th-TH" dirty="0"/>
+              <a:t>Woodgrove Bank</a:t>
+            </a:r>
+          </a:p>
+        </p:txBody>
+      </p:sp>
+      <p:sp>
+        <p:nvSpPr>
+          <p:cNvPr id="23" name="C6"/>
+          <p:cNvSpPr>
+            <a:spLocks noGrp="1"/>
+          </p:cNvSpPr>
+          <p:nvPr>
+            <p:ph type="body" idx="33"/>
+          </p:nvPr>
+        </p:nvSpPr>
+        <p:spPr/>
+        <p:txBody>
+          <a:bodyPr/>
+          <a:lstStyle/>
+          <a:p>
+            <a:pPr/>
+            <a:r>
+              <a:rPr lang="th-TH" dirty="0"/>
+              <a:t>การเงิน · RPA กระทบยอด</a:t>
+            </a:r>
+          </a:p>
+        </p:txBody>
+      </p:sp>
+      <p:sp>
+        <p:nvSpPr>
+          <p:cNvPr id="24" name="L7"/>
+          <p:cNvSpPr>
+            <a:spLocks noGrp="1"/>
+          </p:cNvSpPr>
+          <p:nvPr>
+            <p:ph idx="34"/>
+          </p:nvPr>
+        </p:nvSpPr>
+        <p:spPr/>
+        <p:txBody>
+          <a:bodyPr/>
+          <a:lstStyle/>
+          <a:p>
+            <a:pPr/>
+            <a:r>
+              <a:rPr lang="th-TH" dirty="0"/>
+              <a:t>Litware</a:t>
+            </a:r>
+          </a:p>
+        </p:txBody>
+      </p:sp>
+      <p:sp>
+        <p:nvSpPr>
+          <p:cNvPr id="25" name="C7"/>
+          <p:cNvSpPr>
+            <a:spLocks noGrp="1"/>
+          </p:cNvSpPr>
+          <p:nvPr>
+            <p:ph type="body" idx="35"/>
+          </p:nvPr>
+        </p:nvSpPr>
+        <p:spPr/>
+        <p:txBody>
+          <a:bodyPr/>
+          <a:lstStyle/>
+          <a:p>
+            <a:pPr/>
+            <a:r>
+              <a:rPr lang="th-TH" dirty="0"/>
+              <a:t>ซอฟต์แวร์ · ระบบเบิกจ่าย</a:t>
+            </a:r>
+          </a:p>
+        </p:txBody>
+      </p:sp>
+      <p:sp>
+        <p:nvSpPr>
+          <p:cNvPr id="26" name="L8"/>
+          <p:cNvSpPr>
+            <a:spLocks noGrp="1"/>
+          </p:cNvSpPr>
+          <p:nvPr>
+            <p:ph idx="36"/>
+          </p:nvPr>
+        </p:nvSpPr>
+        <p:spPr/>
+        <p:txBody>
+          <a:bodyPr/>
+          <a:lstStyle/>
+          <a:p>
+            <a:pPr/>
+            <a:r>
+              <a:rPr lang="th-TH" dirty="0"/>
+              <a:t>Proseware</a:t>
+            </a:r>
+          </a:p>
+        </p:txBody>
+      </p:sp>
+      <p:sp>
+        <p:nvSpPr>
+          <p:cNvPr id="27" name="C8"/>
+          <p:cNvSpPr>
+            <a:spLocks noGrp="1"/>
+          </p:cNvSpPr>
+          <p:nvPr>
+            <p:ph type="body" idx="37"/>
+          </p:nvPr>
+        </p:nvSpPr>
+        <p:spPr/>
+        <p:txBody>
+          <a:bodyPr/>
+          <a:lstStyle/>
+          <a:p>
+            <a:pPr/>
+            <a:r>
+              <a:rPr lang="th-TH" dirty="0"/>
+              <a:t>บริการ · วางบิลและติดตามเช็ค</a:t>
+            </a:r>
+          </a:p>
+        </p:txBody>
+      </p:sp>
+      <p:sp>
+        <p:nvSpPr>
+          <p:cNvPr id="28" name="L9"/>
+          <p:cNvSpPr>
+            <a:spLocks noGrp="1"/>
+          </p:cNvSpPr>
+          <p:nvPr>
+            <p:ph idx="38"/>
+          </p:nvPr>
+        </p:nvSpPr>
+        <p:spPr/>
+        <p:txBody>
+          <a:bodyPr/>
+          <a:lstStyle/>
+          <a:p>
+            <a:pPr/>
+            <a:r>
+              <a:rPr lang="th-TH" dirty="0"/>
+              <a:t>Alpine Ski House</a:t>
+            </a:r>
+          </a:p>
+        </p:txBody>
+      </p:sp>
+      <p:sp>
+        <p:nvSpPr>
+          <p:cNvPr id="29" name="C9"/>
+          <p:cNvSpPr>
+            <a:spLocks noGrp="1"/>
+          </p:cNvSpPr>
+          <p:nvPr>
+            <p:ph type="body" idx="39"/>
+          </p:nvPr>
+        </p:nvSpPr>
+        <p:spPr/>
+        <p:txBody>
+          <a:bodyPr/>
+          <a:lstStyle/>
+          <a:p>
+            <a:pPr/>
+            <a:r>
+              <a:rPr lang="th-TH" dirty="0"/>
+              <a:t>ท่องเที่ยว · ตรวจเงินสดย่อย</a:t>
+            </a:r>
+          </a:p>
+        </p:txBody>
+      </p:sp>
+      <p:sp>
+        <p:nvSpPr>
+          <p:cNvPr id="30" name="L10"/>
+          <p:cNvSpPr>
+            <a:spLocks noGrp="1"/>
+          </p:cNvSpPr>
+          <p:nvPr>
+            <p:ph idx="40"/>
+          </p:nvPr>
+        </p:nvSpPr>
+        <p:spPr/>
+        <p:txBody>
+          <a:bodyPr/>
+          <a:lstStyle/>
+          <a:p>
+            <a:pPr/>
+            <a:r>
+              <a:rPr lang="th-TH" dirty="0"/>
+              <a:t>Coho Winery</a:t>
+            </a:r>
+          </a:p>
+        </p:txBody>
+      </p:sp>
+      <p:sp>
+        <p:nvSpPr>
+          <p:cNvPr id="31" name="C10"/>
+          <p:cNvSpPr>
+            <a:spLocks noGrp="1"/>
+          </p:cNvSpPr>
+          <p:nvPr>
+            <p:ph type="body" idx="41"/>
+          </p:nvPr>
+        </p:nvSpPr>
+        <p:spPr/>
+        <p:txBody>
+          <a:bodyPr/>
+          <a:lstStyle/>
+          <a:p>
+            <a:pPr/>
+            <a:r>
+              <a:rPr lang="th-TH" dirty="0"/>
+              <a:t>เครื่องดื่ม · ลูกหนี้และวางบิล</a:t>
+            </a:r>
+          </a:p>
+        </p:txBody>
+      </p:sp>
+      <p:sp>
+        <p:nvSpPr>
+          <p:cNvPr id="32" name="L11"/>
+          <p:cNvSpPr>
+            <a:spLocks noGrp="1"/>
+          </p:cNvSpPr>
+          <p:nvPr>
+            <p:ph idx="42"/>
+          </p:nvPr>
+        </p:nvSpPr>
+        <p:spPr/>
+        <p:txBody>
+          <a:bodyPr/>
+          <a:lstStyle/>
+          <a:p>
+            <a:pPr/>
+            <a:r>
+              <a:rPr lang="th-TH" dirty="0"/>
+              <a:t>Lucerne Publishing</a:t>
+            </a:r>
+          </a:p>
+        </p:txBody>
+      </p:sp>
+      <p:sp>
+        <p:nvSpPr>
+          <p:cNvPr id="33" name="C11"/>
+          <p:cNvSpPr>
+            <a:spLocks noGrp="1"/>
+          </p:cNvSpPr>
+          <p:nvPr>
+            <p:ph type="body" idx="43"/>
+          </p:nvPr>
+        </p:nvSpPr>
+        <p:spPr/>
+        <p:txBody>
+          <a:bodyPr/>
+          <a:lstStyle/>
+          <a:p>
+            <a:pPr/>
+            <a:r>
+              <a:rPr lang="th-TH" dirty="0"/>
+              <a:t>สื่อ · ปิดงบรายเดือน</a:t>
             </a:r>
           </a:p>
         </p:txBody>
@@ -32754,6 +35770,148 @@
 </file>
 
 <file path=ppt/slides/slide19.xml><?xml version="1.0" encoding="utf-8"?>
+<p:sld xmlns:a="http://schemas.openxmlformats.org/drawingml/2006/main" xmlns:r="http://schemas.openxmlformats.org/officeDocument/2006/relationships" xmlns:p="http://schemas.openxmlformats.org/presentationml/2006/main">
+  <p:cSld name="">
+    <p:spTree>
+      <p:nvGrpSpPr>
+        <p:cNvPr id="1" name=""/>
+        <p:cNvGrpSpPr/>
+        <p:nvPr/>
+      </p:nvGrpSpPr>
+      <p:grpSpPr>
+        <a:xfrm>
+          <a:off x="0" y="0"/>
+          <a:ext cx="0" cy="0"/>
+          <a:chOff x="0" y="0"/>
+          <a:chExt cx="0" cy="0"/>
+        </a:xfrm>
+      </p:grpSpPr>
+      <p:sp>
+        <p:nvSpPr>
+          <p:cNvPr id="2" name="Q"/>
+          <p:cNvSpPr>
+            <a:spLocks noGrp="1"/>
+          </p:cNvSpPr>
+          <p:nvPr>
+            <p:ph type="body" idx="1"/>
+          </p:nvPr>
+        </p:nvSpPr>
+        <p:spPr/>
+        <p:txBody>
+          <a:bodyPr/>
+          <a:lstStyle/>
+          <a:p>
+            <a:pPr/>
+            <a:r>
+              <a:rPr lang="th-TH" dirty="0"/>
+              <a:t>ระบบไม่ล่มอีกเลยตั้งแต่เปลี่ยนมาใช้ทีมนี้ดูแล และเราวางแผนงบประมาณได้ล่วงหน้าจริง ๆ</a:t>
+            </a:r>
+          </a:p>
+        </p:txBody>
+      </p:sp>
+      <p:sp>
+        <p:nvSpPr>
+          <p:cNvPr id="3" name="A"/>
+          <p:cNvSpPr>
+            <a:spLocks noGrp="1"/>
+          </p:cNvSpPr>
+          <p:nvPr>
+            <p:ph type="body" idx="2"/>
+          </p:nvPr>
+        </p:nvSpPr>
+        <p:spPr/>
+        <p:txBody>
+          <a:bodyPr/>
+          <a:lstStyle/>
+          <a:p>
+            <a:pPr/>
+            <a:r>
+              <a:rPr lang="th-TH" dirty="0"/>
+              <a:t>คุณสมชาย ป. — ผู้จัดการฝ่ายไอที, บริษัทตัวอย่าง จำกัด</a:t>
+            </a:r>
+          </a:p>
+        </p:txBody>
+      </p:sp>
+    </p:spTree>
+  </p:cSld>
+  <p:clrMapOvr>
+    <a:masterClrMapping/>
+  </p:clrMapOvr>
+</p:sld>
+</file>
+
+<file path=ppt/slides/slide2.xml><?xml version="1.0" encoding="utf-8"?>
+<p:sld xmlns:a="http://schemas.openxmlformats.org/drawingml/2006/main" xmlns:r="http://schemas.openxmlformats.org/officeDocument/2006/relationships" xmlns:p="http://schemas.openxmlformats.org/presentationml/2006/main">
+  <p:cSld name="">
+    <p:spTree>
+      <p:nvGrpSpPr>
+        <p:cNvPr id="1" name=""/>
+        <p:cNvGrpSpPr/>
+        <p:nvPr/>
+      </p:nvGrpSpPr>
+      <p:grpSpPr>
+        <a:xfrm>
+          <a:off x="0" y="0"/>
+          <a:ext cx="0" cy="0"/>
+          <a:chOff x="0" y="0"/>
+          <a:chExt cx="0" cy="0"/>
+        </a:xfrm>
+      </p:grpSpPr>
+      <p:sp>
+        <p:nvSpPr>
+          <p:cNvPr id="2" name="Title"/>
+          <p:cNvSpPr>
+            <a:spLocks noGrp="1"/>
+          </p:cNvSpPr>
+          <p:nvPr>
+            <p:ph type="ctrTitle"/>
+          </p:nvPr>
+        </p:nvSpPr>
+        <p:spPr/>
+        <p:txBody>
+          <a:bodyPr/>
+          <a:lstStyle/>
+          <a:p>
+            <a:pPr/>
+            <a:r>
+              <a:rPr lang="th-TH" dirty="0"/>
+              <a:t>เปลี่ยนงานบัญชีให้ระบบทำแทน</a:t>
+            </a:r>
+          </a:p>
+        </p:txBody>
+      </p:sp>
+      <p:sp>
+        <p:nvSpPr>
+          <p:cNvPr id="3" name="Subtitle"/>
+          <p:cNvSpPr>
+            <a:spLocks noGrp="1"/>
+          </p:cNvSpPr>
+          <p:nvPr>
+            <p:ph type="subTitle" idx="1"/>
+          </p:nvPr>
+        </p:nvSpPr>
+        <p:spPr/>
+        <p:txBody>
+          <a:bodyPr/>
+          <a:lstStyle/>
+          <a:p>
+            <a:pPr/>
+            <a:r>
+              <a:rPr lang="th-TH" dirty="0"/>
+              <a:t>NCT · สัมมนาลูกค้า 2569</a:t>
+            </a:r>
+          </a:p>
+        </p:txBody>
+      </p:sp>
+    </p:spTree>
+  </p:cSld>
+  <p:clrMapOvr>
+    <a:masterClrMapping/>
+  </p:clrMapOvr>
+</p:sld>
+</file>
+
+<file path=ppt/slides/slide20.xml><?xml version="1.0" encoding="utf-8"?>
 <p:sld xmlns:a="http://schemas.openxmlformats.org/drawingml/2006/main" xmlns:r="http://schemas.openxmlformats.org/officeDocument/2006/relationships" xmlns:p="http://schemas.openxmlformats.org/presentationml/2006/main">
   <p:cSld name="">
     <p:spTree>
@@ -33484,1103 +36642,6 @@
 </p:sld>
 </file>
 
-<file path=ppt/slides/slide2.xml><?xml version="1.0" encoding="utf-8"?>
-<p:sld xmlns:a="http://schemas.openxmlformats.org/drawingml/2006/main" xmlns:r="http://schemas.openxmlformats.org/officeDocument/2006/relationships" xmlns:p="http://schemas.openxmlformats.org/presentationml/2006/main">
-  <p:cSld name="">
-    <p:spTree>
-      <p:nvGrpSpPr>
-        <p:cNvPr id="1" name=""/>
-        <p:cNvGrpSpPr/>
-        <p:nvPr/>
-      </p:nvGrpSpPr>
-      <p:grpSpPr>
-        <a:xfrm>
-          <a:off x="0" y="0"/>
-          <a:ext cx="0" cy="0"/>
-          <a:chOff x="0" y="0"/>
-          <a:chExt cx="0" cy="0"/>
-        </a:xfrm>
-      </p:grpSpPr>
-      <p:sp>
-        <p:nvSpPr>
-          <p:cNvPr id="2" name="Title"/>
-          <p:cNvSpPr>
-            <a:spLocks noGrp="1"/>
-          </p:cNvSpPr>
-          <p:nvPr>
-            <p:ph type="ctrTitle"/>
-          </p:nvPr>
-        </p:nvSpPr>
-        <p:spPr/>
-        <p:txBody>
-          <a:bodyPr/>
-          <a:lstStyle/>
-          <a:p>
-            <a:pPr/>
-            <a:r>
-              <a:rPr lang="th-TH" dirty="0"/>
-              <a:t>เปลี่ยนงานบัญชีให้ระบบทำแทน</a:t>
-            </a:r>
-          </a:p>
-        </p:txBody>
-      </p:sp>
-      <p:sp>
-        <p:nvSpPr>
-          <p:cNvPr id="3" name="Subtitle"/>
-          <p:cNvSpPr>
-            <a:spLocks noGrp="1"/>
-          </p:cNvSpPr>
-          <p:nvPr>
-            <p:ph type="subTitle" idx="1"/>
-          </p:nvPr>
-        </p:nvSpPr>
-        <p:spPr/>
-        <p:txBody>
-          <a:bodyPr/>
-          <a:lstStyle/>
-          <a:p>
-            <a:pPr/>
-            <a:r>
-              <a:rPr lang="th-TH" dirty="0"/>
-              <a:t>NCT · สัมมนาลูกค้า 2569</a:t>
-            </a:r>
-          </a:p>
-        </p:txBody>
-      </p:sp>
-    </p:spTree>
-  </p:cSld>
-  <p:clrMapOvr>
-    <a:masterClrMapping/>
-  </p:clrMapOvr>
-</p:sld>
-</file>
-
-<file path=ppt/slides/slide20.xml><?xml version="1.0" encoding="utf-8"?>
-<p:sld xmlns:a="http://schemas.openxmlformats.org/drawingml/2006/main" xmlns:r="http://schemas.openxmlformats.org/officeDocument/2006/relationships" xmlns:p="http://schemas.openxmlformats.org/presentationml/2006/main">
-  <p:cSld name="">
-    <p:spTree>
-      <p:nvGrpSpPr>
-        <p:cNvPr id="1" name=""/>
-        <p:cNvGrpSpPr/>
-        <p:nvPr/>
-      </p:nvGrpSpPr>
-      <p:grpSpPr>
-        <a:xfrm>
-          <a:off x="0" y="0"/>
-          <a:ext cx="0" cy="0"/>
-          <a:chOff x="0" y="0"/>
-          <a:chExt cx="0" cy="0"/>
-        </a:xfrm>
-      </p:grpSpPr>
-      <p:sp>
-        <p:nvSpPr>
-          <p:cNvPr id="2" name="Title"/>
-          <p:cNvSpPr>
-            <a:spLocks noGrp="1"/>
-          </p:cNvSpPr>
-          <p:nvPr>
-            <p:ph type="title"/>
-          </p:nvPr>
-        </p:nvSpPr>
-        <p:spPr/>
-        <p:txBody>
-          <a:bodyPr/>
-          <a:lstStyle/>
-          <a:p>
-            <a:pPr/>
-            <a:r>
-              <a:rPr lang="th-TH" dirty="0"/>
-              <a:t>แผนงาน 12 เดือน ขึ้นระบบต้นเดือนที่ 7</a:t>
-            </a:r>
-          </a:p>
-        </p:txBody>
-      </p:sp>
-      <p:graphicFrame>
-        <p:nvGraphicFramePr>
-          <p:cNvPr id="3" name="Plan"/>
-          <p:cNvGraphicFramePr>
-            <a:graphicFrameLocks noGrp="1"/>
-          </p:cNvGraphicFramePr>
-          <p:nvPr>
-            <p:ph type="chart" idx="1"/>
-          </p:nvPr>
-        </p:nvGraphicFramePr>
-        <p:xfrm>
-          <a:off x="3566160" y="2057400"/>
-          <a:ext cx="7711440" cy="3108960"/>
-        </p:xfrm>
-        <a:graphic>
-          <a:graphicData uri="http://schemas.openxmlformats.org/drawingml/2006/chart">
-            <c:chart xmlns:c="http://schemas.openxmlformats.org/drawingml/2006/chart" r:id="rId2"/>
-          </a:graphicData>
-        </a:graphic>
-      </p:graphicFrame>
-      <p:sp>
-        <p:nvSpPr>
-          <p:cNvPr id="4" name="P1"/>
-          <p:cNvSpPr>
-            <a:spLocks noGrp="1"/>
-          </p:cNvSpPr>
-          <p:nvPr>
-            <p:ph type="body" idx="20"/>
-          </p:nvPr>
-        </p:nvSpPr>
-        <p:spPr/>
-        <p:txBody>
-          <a:bodyPr/>
-          <a:lstStyle/>
-          <a:p>
-            <a:pPr/>
-            <a:r>
-              <a:rPr lang="th-TH" dirty="0"/>
-              <a:t>ด.1</a:t>
-            </a:r>
-          </a:p>
-        </p:txBody>
-      </p:sp>
-      <p:sp>
-        <p:nvSpPr>
-          <p:cNvPr id="5" name="P2"/>
-          <p:cNvSpPr>
-            <a:spLocks noGrp="1"/>
-          </p:cNvSpPr>
-          <p:nvPr>
-            <p:ph type="body" idx="21"/>
-          </p:nvPr>
-        </p:nvSpPr>
-        <p:spPr/>
-        <p:txBody>
-          <a:bodyPr/>
-          <a:lstStyle/>
-          <a:p>
-            <a:pPr/>
-            <a:r>
-              <a:rPr lang="th-TH" dirty="0"/>
-              <a:t>ด.2</a:t>
-            </a:r>
-          </a:p>
-        </p:txBody>
-      </p:sp>
-      <p:sp>
-        <p:nvSpPr>
-          <p:cNvPr id="6" name="P3"/>
-          <p:cNvSpPr>
-            <a:spLocks noGrp="1"/>
-          </p:cNvSpPr>
-          <p:nvPr>
-            <p:ph type="body" idx="22"/>
-          </p:nvPr>
-        </p:nvSpPr>
-        <p:spPr/>
-        <p:txBody>
-          <a:bodyPr/>
-          <a:lstStyle/>
-          <a:p>
-            <a:pPr/>
-            <a:r>
-              <a:rPr lang="th-TH" dirty="0"/>
-              <a:t>ด.3</a:t>
-            </a:r>
-          </a:p>
-        </p:txBody>
-      </p:sp>
-      <p:sp>
-        <p:nvSpPr>
-          <p:cNvPr id="7" name="P4"/>
-          <p:cNvSpPr>
-            <a:spLocks noGrp="1"/>
-          </p:cNvSpPr>
-          <p:nvPr>
-            <p:ph type="body" idx="23"/>
-          </p:nvPr>
-        </p:nvSpPr>
-        <p:spPr/>
-        <p:txBody>
-          <a:bodyPr/>
-          <a:lstStyle/>
-          <a:p>
-            <a:pPr/>
-            <a:r>
-              <a:rPr lang="th-TH" dirty="0"/>
-              <a:t>ด.4</a:t>
-            </a:r>
-          </a:p>
-        </p:txBody>
-      </p:sp>
-      <p:sp>
-        <p:nvSpPr>
-          <p:cNvPr id="8" name="P5"/>
-          <p:cNvSpPr>
-            <a:spLocks noGrp="1"/>
-          </p:cNvSpPr>
-          <p:nvPr>
-            <p:ph type="body" idx="24"/>
-          </p:nvPr>
-        </p:nvSpPr>
-        <p:spPr/>
-        <p:txBody>
-          <a:bodyPr/>
-          <a:lstStyle/>
-          <a:p>
-            <a:pPr/>
-            <a:r>
-              <a:rPr lang="th-TH" dirty="0"/>
-              <a:t>ด.5</a:t>
-            </a:r>
-          </a:p>
-        </p:txBody>
-      </p:sp>
-      <p:sp>
-        <p:nvSpPr>
-          <p:cNvPr id="9" name="P6"/>
-          <p:cNvSpPr>
-            <a:spLocks noGrp="1"/>
-          </p:cNvSpPr>
-          <p:nvPr>
-            <p:ph type="body" idx="25"/>
-          </p:nvPr>
-        </p:nvSpPr>
-        <p:spPr/>
-        <p:txBody>
-          <a:bodyPr/>
-          <a:lstStyle/>
-          <a:p>
-            <a:pPr/>
-            <a:r>
-              <a:rPr lang="th-TH" dirty="0"/>
-              <a:t>ด.6</a:t>
-            </a:r>
-          </a:p>
-        </p:txBody>
-      </p:sp>
-      <p:sp>
-        <p:nvSpPr>
-          <p:cNvPr id="10" name="P7"/>
-          <p:cNvSpPr>
-            <a:spLocks noGrp="1"/>
-          </p:cNvSpPr>
-          <p:nvPr>
-            <p:ph type="body" idx="26"/>
-          </p:nvPr>
-        </p:nvSpPr>
-        <p:spPr/>
-        <p:txBody>
-          <a:bodyPr/>
-          <a:lstStyle/>
-          <a:p>
-            <a:pPr/>
-            <a:r>
-              <a:rPr lang="th-TH" dirty="0"/>
-              <a:t>ด.7</a:t>
-            </a:r>
-          </a:p>
-        </p:txBody>
-      </p:sp>
-      <p:sp>
-        <p:nvSpPr>
-          <p:cNvPr id="11" name="P8"/>
-          <p:cNvSpPr>
-            <a:spLocks noGrp="1"/>
-          </p:cNvSpPr>
-          <p:nvPr>
-            <p:ph type="body" idx="27"/>
-          </p:nvPr>
-        </p:nvSpPr>
-        <p:spPr/>
-        <p:txBody>
-          <a:bodyPr/>
-          <a:lstStyle/>
-          <a:p>
-            <a:pPr/>
-            <a:r>
-              <a:rPr lang="th-TH" dirty="0"/>
-              <a:t>ด.8</a:t>
-            </a:r>
-          </a:p>
-        </p:txBody>
-      </p:sp>
-      <p:sp>
-        <p:nvSpPr>
-          <p:cNvPr id="12" name="P9"/>
-          <p:cNvSpPr>
-            <a:spLocks noGrp="1"/>
-          </p:cNvSpPr>
-          <p:nvPr>
-            <p:ph type="body" idx="28"/>
-          </p:nvPr>
-        </p:nvSpPr>
-        <p:spPr/>
-        <p:txBody>
-          <a:bodyPr/>
-          <a:lstStyle/>
-          <a:p>
-            <a:pPr/>
-            <a:r>
-              <a:rPr lang="th-TH" dirty="0"/>
-              <a:t>ด.9</a:t>
-            </a:r>
-          </a:p>
-        </p:txBody>
-      </p:sp>
-      <p:sp>
-        <p:nvSpPr>
-          <p:cNvPr id="13" name="P10"/>
-          <p:cNvSpPr>
-            <a:spLocks noGrp="1"/>
-          </p:cNvSpPr>
-          <p:nvPr>
-            <p:ph type="body" idx="29"/>
-          </p:nvPr>
-        </p:nvSpPr>
-        <p:spPr/>
-        <p:txBody>
-          <a:bodyPr/>
-          <a:lstStyle/>
-          <a:p>
-            <a:pPr/>
-            <a:r>
-              <a:rPr lang="th-TH" dirty="0"/>
-              <a:t>ด.10</a:t>
-            </a:r>
-          </a:p>
-        </p:txBody>
-      </p:sp>
-      <p:sp>
-        <p:nvSpPr>
-          <p:cNvPr id="14" name="P11"/>
-          <p:cNvSpPr>
-            <a:spLocks noGrp="1"/>
-          </p:cNvSpPr>
-          <p:nvPr>
-            <p:ph type="body" idx="30"/>
-          </p:nvPr>
-        </p:nvSpPr>
-        <p:spPr/>
-        <p:txBody>
-          <a:bodyPr/>
-          <a:lstStyle/>
-          <a:p>
-            <a:pPr/>
-            <a:r>
-              <a:rPr lang="th-TH" dirty="0"/>
-              <a:t>ด.11</a:t>
-            </a:r>
-          </a:p>
-        </p:txBody>
-      </p:sp>
-      <p:sp>
-        <p:nvSpPr>
-          <p:cNvPr id="15" name="P12"/>
-          <p:cNvSpPr>
-            <a:spLocks noGrp="1"/>
-          </p:cNvSpPr>
-          <p:nvPr>
-            <p:ph type="body" idx="31"/>
-          </p:nvPr>
-        </p:nvSpPr>
-        <p:spPr/>
-        <p:txBody>
-          <a:bodyPr/>
-          <a:lstStyle/>
-          <a:p>
-            <a:pPr/>
-            <a:r>
-              <a:rPr lang="th-TH" dirty="0"/>
-              <a:t>ด.12</a:t>
-            </a:r>
-          </a:p>
-        </p:txBody>
-      </p:sp>
-      <p:sp>
-        <p:nvSpPr>
-          <p:cNvPr id="16" name="R1"/>
-          <p:cNvSpPr>
-            <a:spLocks noGrp="1"/>
-          </p:cNvSpPr>
-          <p:nvPr>
-            <p:ph type="body" idx="32"/>
-          </p:nvPr>
-        </p:nvSpPr>
-        <p:spPr/>
-        <p:txBody>
-          <a:bodyPr/>
-          <a:lstStyle/>
-          <a:p>
-            <a:pPr/>
-            <a:r>
-              <a:rPr lang="th-TH" dirty="0"/>
-              <a:t>1. เตรียมระบบ</a:t>
-            </a:r>
-          </a:p>
-        </p:txBody>
-      </p:sp>
-      <p:sp>
-        <p:nvSpPr>
-          <p:cNvPr id="17" name="D1"/>
-          <p:cNvSpPr>
-            <a:spLocks noGrp="1"/>
-          </p:cNvSpPr>
-          <p:nvPr>
-            <p:ph type="body" idx="33"/>
-          </p:nvPr>
-        </p:nvSpPr>
-        <p:spPr/>
-        <p:txBody>
-          <a:bodyPr/>
-          <a:lstStyle/>
-          <a:p>
-            <a:pPr/>
-            <a:r>
-              <a:rPr lang="th-TH" dirty="0"/>
-              <a:t>4 สัปดาห์</a:t>
-            </a:r>
-          </a:p>
-        </p:txBody>
-      </p:sp>
-      <p:sp>
-        <p:nvSpPr>
-          <p:cNvPr id="18" name="R2"/>
-          <p:cNvSpPr>
-            <a:spLocks noGrp="1"/>
-          </p:cNvSpPr>
-          <p:nvPr>
-            <p:ph type="body" idx="34"/>
-          </p:nvPr>
-        </p:nvSpPr>
-        <p:spPr/>
-        <p:txBody>
-          <a:bodyPr/>
-          <a:lstStyle/>
-          <a:p>
-            <a:pPr/>
-            <a:r>
-              <a:rPr lang="th-TH" dirty="0"/>
-              <a:t>2. วิเคราะห์และออกแบบ</a:t>
-            </a:r>
-          </a:p>
-        </p:txBody>
-      </p:sp>
-      <p:sp>
-        <p:nvSpPr>
-          <p:cNvPr id="19" name="D2"/>
-          <p:cNvSpPr>
-            <a:spLocks noGrp="1"/>
-          </p:cNvSpPr>
-          <p:nvPr>
-            <p:ph type="body" idx="35"/>
-          </p:nvPr>
-        </p:nvSpPr>
-        <p:spPr/>
-        <p:txBody>
-          <a:bodyPr/>
-          <a:lstStyle/>
-          <a:p>
-            <a:pPr/>
-            <a:r>
-              <a:rPr lang="th-TH" dirty="0"/>
-              <a:t>6 สัปดาห์</a:t>
-            </a:r>
-          </a:p>
-        </p:txBody>
-      </p:sp>
-      <p:sp>
-        <p:nvSpPr>
-          <p:cNvPr id="20" name="R3"/>
-          <p:cNvSpPr>
-            <a:spLocks noGrp="1"/>
-          </p:cNvSpPr>
-          <p:nvPr>
-            <p:ph type="body" idx="36"/>
-          </p:nvPr>
-        </p:nvSpPr>
-        <p:spPr/>
-        <p:txBody>
-          <a:bodyPr/>
-          <a:lstStyle/>
-          <a:p>
-            <a:pPr/>
-            <a:r>
-              <a:rPr lang="th-TH" dirty="0"/>
-              <a:t>3. พัฒนาและตั้งค่าระบบ</a:t>
-            </a:r>
-          </a:p>
-        </p:txBody>
-      </p:sp>
-      <p:sp>
-        <p:nvSpPr>
-          <p:cNvPr id="21" name="D3"/>
-          <p:cNvSpPr>
-            <a:spLocks noGrp="1"/>
-          </p:cNvSpPr>
-          <p:nvPr>
-            <p:ph type="body" idx="37"/>
-          </p:nvPr>
-        </p:nvSpPr>
-        <p:spPr/>
-        <p:txBody>
-          <a:bodyPr/>
-          <a:lstStyle/>
-          <a:p>
-            <a:pPr/>
-            <a:r>
-              <a:rPr lang="th-TH" dirty="0"/>
-              <a:t>10 สัปดาห์</a:t>
-            </a:r>
-          </a:p>
-        </p:txBody>
-      </p:sp>
-      <p:sp>
-        <p:nvSpPr>
-          <p:cNvPr id="22" name="R4"/>
-          <p:cNvSpPr>
-            <a:spLocks noGrp="1"/>
-          </p:cNvSpPr>
-          <p:nvPr>
-            <p:ph type="body" idx="38"/>
-          </p:nvPr>
-        </p:nvSpPr>
-        <p:spPr/>
-        <p:txBody>
-          <a:bodyPr/>
-          <a:lstStyle/>
-          <a:p>
-            <a:pPr/>
-            <a:r>
-              <a:rPr lang="th-TH" dirty="0"/>
-              <a:t>4. ทดสอบ UAT</a:t>
-            </a:r>
-          </a:p>
-        </p:txBody>
-      </p:sp>
-      <p:sp>
-        <p:nvSpPr>
-          <p:cNvPr id="23" name="D4"/>
-          <p:cNvSpPr>
-            <a:spLocks noGrp="1"/>
-          </p:cNvSpPr>
-          <p:nvPr>
-            <p:ph type="body" idx="39"/>
-          </p:nvPr>
-        </p:nvSpPr>
-        <p:spPr/>
-        <p:txBody>
-          <a:bodyPr/>
-          <a:lstStyle/>
-          <a:p>
-            <a:pPr/>
-            <a:r>
-              <a:rPr lang="th-TH" dirty="0"/>
-              <a:t>4 สัปดาห์</a:t>
-            </a:r>
-          </a:p>
-        </p:txBody>
-      </p:sp>
-      <p:sp>
-        <p:nvSpPr>
-          <p:cNvPr id="24" name="R5"/>
-          <p:cNvSpPr>
-            <a:spLocks noGrp="1"/>
-          </p:cNvSpPr>
-          <p:nvPr>
-            <p:ph type="body" idx="40"/>
-          </p:nvPr>
-        </p:nvSpPr>
-        <p:spPr/>
-        <p:txBody>
-          <a:bodyPr/>
-          <a:lstStyle/>
-          <a:p>
-            <a:pPr/>
-            <a:r>
-              <a:rPr lang="th-TH" dirty="0"/>
-              <a:t>5. อบรมผู้ใช้</a:t>
-            </a:r>
-          </a:p>
-        </p:txBody>
-      </p:sp>
-      <p:sp>
-        <p:nvSpPr>
-          <p:cNvPr id="25" name="D5"/>
-          <p:cNvSpPr>
-            <a:spLocks noGrp="1"/>
-          </p:cNvSpPr>
-          <p:nvPr>
-            <p:ph type="body" idx="41"/>
-          </p:nvPr>
-        </p:nvSpPr>
-        <p:spPr/>
-        <p:txBody>
-          <a:bodyPr/>
-          <a:lstStyle/>
-          <a:p>
-            <a:pPr/>
-            <a:r>
-              <a:rPr lang="th-TH" dirty="0"/>
-              <a:t>1 สัปดาห์</a:t>
-            </a:r>
-          </a:p>
-        </p:txBody>
-      </p:sp>
-      <p:sp>
-        <p:nvSpPr>
-          <p:cNvPr id="26" name="R6"/>
-          <p:cNvSpPr>
-            <a:spLocks noGrp="1"/>
-          </p:cNvSpPr>
-          <p:nvPr>
-            <p:ph type="body" idx="42"/>
-          </p:nvPr>
-        </p:nvSpPr>
-        <p:spPr/>
-        <p:txBody>
-          <a:bodyPr/>
-          <a:lstStyle/>
-          <a:p>
-            <a:pPr/>
-            <a:r>
-              <a:rPr lang="th-TH" dirty="0"/>
-              <a:t>6. ขึ้นระบบ</a:t>
-            </a:r>
-          </a:p>
-        </p:txBody>
-      </p:sp>
-      <p:sp>
-        <p:nvSpPr>
-          <p:cNvPr id="27" name="D6"/>
-          <p:cNvSpPr>
-            <a:spLocks noGrp="1"/>
-          </p:cNvSpPr>
-          <p:nvPr>
-            <p:ph type="body" idx="43"/>
-          </p:nvPr>
-        </p:nvSpPr>
-        <p:spPr/>
-        <p:txBody>
-          <a:bodyPr/>
-          <a:lstStyle/>
-          <a:p>
-            <a:pPr/>
-            <a:r>
-              <a:rPr lang="th-TH" dirty="0"/>
-              <a:t>2 สัปดาห์</a:t>
-            </a:r>
-          </a:p>
-        </p:txBody>
-      </p:sp>
-      <p:sp>
-        <p:nvSpPr>
-          <p:cNvPr id="28" name="R7"/>
-          <p:cNvSpPr>
-            <a:spLocks noGrp="1"/>
-          </p:cNvSpPr>
-          <p:nvPr>
-            <p:ph type="body" idx="44"/>
-          </p:nvPr>
-        </p:nvSpPr>
-        <p:spPr/>
-        <p:txBody>
-          <a:bodyPr/>
-          <a:lstStyle/>
-          <a:p>
-            <a:pPr/>
-            <a:r>
-              <a:rPr lang="th-TH" dirty="0"/>
-              <a:t>7. ดูแลหลังขึ้นระบบ</a:t>
-            </a:r>
-          </a:p>
-        </p:txBody>
-      </p:sp>
-      <p:sp>
-        <p:nvSpPr>
-          <p:cNvPr id="29" name="D7"/>
-          <p:cNvSpPr>
-            <a:spLocks noGrp="1"/>
-          </p:cNvSpPr>
-          <p:nvPr>
-            <p:ph type="body" idx="45"/>
-          </p:nvPr>
-        </p:nvSpPr>
-        <p:spPr/>
-        <p:txBody>
-          <a:bodyPr/>
-          <a:lstStyle/>
-          <a:p>
-            <a:pPr/>
-            <a:r>
-              <a:rPr lang="th-TH" dirty="0"/>
-              <a:t>3 เดือน</a:t>
-            </a:r>
-          </a:p>
-        </p:txBody>
-      </p:sp>
-      <p:sp>
-        <p:nvSpPr>
-          <p:cNvPr id="30" name="R8"/>
-          <p:cNvSpPr>
-            <a:spLocks noGrp="1"/>
-          </p:cNvSpPr>
-          <p:nvPr>
-            <p:ph type="body" idx="46"/>
-          </p:nvPr>
-        </p:nvSpPr>
-        <p:spPr/>
-        <p:txBody>
-          <a:bodyPr/>
-          <a:lstStyle/>
-          <a:p>
-            <a:pPr/>
-            <a:r>
-              <a:rPr lang="th-TH" dirty="0"/>
-              <a:t>8. รับประกันระบบ</a:t>
-            </a:r>
-          </a:p>
-        </p:txBody>
-      </p:sp>
-      <p:sp>
-        <p:nvSpPr>
-          <p:cNvPr id="31" name="D8"/>
-          <p:cNvSpPr>
-            <a:spLocks noGrp="1"/>
-          </p:cNvSpPr>
-          <p:nvPr>
-            <p:ph type="body" idx="47"/>
-          </p:nvPr>
-        </p:nvSpPr>
-        <p:spPr/>
-        <p:txBody>
-          <a:bodyPr/>
-          <a:lstStyle/>
-          <a:p>
-            <a:pPr/>
-            <a:r>
-              <a:rPr lang="th-TH" dirty="0"/>
-              <a:t>2.5 เดือน</a:t>
-            </a:r>
-          </a:p>
-        </p:txBody>
-      </p:sp>
-      <p:sp>
-        <p:nvSpPr>
-          <p:cNvPr id="32" name="Key"/>
-          <p:cNvSpPr>
-            <a:spLocks noGrp="1"/>
-          </p:cNvSpPr>
-          <p:nvPr>
-            <p:ph type="body" idx="2"/>
-          </p:nvPr>
-        </p:nvSpPr>
-        <p:spPr/>
-        <p:txBody>
-          <a:bodyPr/>
-          <a:lstStyle/>
-          <a:p>
-            <a:pPr/>
-            <a:r>
-              <a:rPr lang="th-TH" dirty="0"/>
-              <a:t>■ ช่วงงาน   ◆ ส่งมอบ / ตรวจรับ</a:t>
-            </a:r>
-          </a:p>
-        </p:txBody>
-      </p:sp>
-      <p:sp>
-        <p:nvSpPr>
-          <p:cNvPr id="33" name="Asm"/>
-          <p:cNvSpPr>
-            <a:spLocks noGrp="1"/>
-          </p:cNvSpPr>
-          <p:nvPr>
-            <p:ph type="body" idx="3"/>
-          </p:nvPr>
-        </p:nvSpPr>
-        <p:spPr/>
-        <p:txBody>
-          <a:bodyPr/>
-          <a:lstStyle/>
-          <a:p>
-            <a:pPr/>
-            <a:r>
-              <a:rPr lang="th-TH" dirty="0"/>
-              <a:t>นับจากวันลงนามสัญญา · หน่วย: เดือน</a:t>
-            </a:r>
-          </a:p>
-        </p:txBody>
-      </p:sp>
-      <p:sp>
-        <p:nvSpPr>
-          <p:cNvPr id="34" name="TL"/>
-          <p:cNvSpPr>
-            <a:spLocks noGrp="1"/>
-          </p:cNvSpPr>
-          <p:nvPr>
-            <p:ph type="body" idx="4"/>
-          </p:nvPr>
-        </p:nvSpPr>
-        <p:spPr/>
-        <p:txBody>
-          <a:bodyPr/>
-          <a:lstStyle/>
-          <a:p>
-            <a:pPr/>
-            <a:r>
-              <a:rPr lang="th-TH" dirty="0"/>
-              <a:t>สรุป</a:t>
-            </a:r>
-          </a:p>
-        </p:txBody>
-      </p:sp>
-      <p:sp>
-        <p:nvSpPr>
-          <p:cNvPr id="35" name="TC"/>
-          <p:cNvSpPr>
-            <a:spLocks noGrp="1"/>
-          </p:cNvSpPr>
-          <p:nvPr>
-            <p:ph type="body" idx="5"/>
-          </p:nvPr>
-        </p:nvSpPr>
-        <p:spPr/>
-        <p:txBody>
-          <a:bodyPr/>
-          <a:lstStyle/>
-          <a:p>
-            <a:pPr/>
-            <a:r>
-              <a:rPr lang="th-TH" dirty="0"/>
-              <a:t>ขึ้นระบบต้นเดือนที่ 7 ตรวจรับ 3 งวดตามจุดส่งมอบ</a:t>
-            </a:r>
-          </a:p>
-        </p:txBody>
-      </p:sp>
-      <p:sp>
-        <p:nvSpPr>
-          <p:cNvPr id="36" name="Milestone 2"/>
-          <p:cNvSpPr/>
-          <p:nvPr/>
-        </p:nvSpPr>
-        <p:spPr>
-          <a:xfrm>
-            <a:off x="5099558" y="2567178"/>
-            <a:ext cx="146304" cy="146304"/>
-          </a:xfrm>
-          <a:prstGeom prst="diamond">
-            <a:avLst/>
-          </a:prstGeom>
-          <a:solidFill>
-            <a:srgbClr val="BB731B"/>
-          </a:solidFill>
-          <a:ln w="19050">
-            <a:solidFill>
-              <a:srgbClr val="FFFFFF"/>
-            </a:solidFill>
-          </a:ln>
-        </p:spPr>
-        <p:txBody>
-          <a:bodyPr/>
-          <a:lstStyle/>
-          <a:p>
-            <a:endParaRPr lang="th-TH"/>
-          </a:p>
-        </p:txBody>
-      </p:sp>
-      <p:sp>
-        <p:nvSpPr>
-          <p:cNvPr id="37" name="Milestone 2 Label"/>
-          <p:cNvSpPr/>
-          <p:nvPr/>
-        </p:nvSpPr>
-        <p:spPr>
-          <a:xfrm>
-            <a:off x="5291582" y="2446020"/>
-            <a:ext cx="1463040" cy="388620"/>
-          </a:xfrm>
-          <a:prstGeom prst="rect">
-            <a:avLst/>
-          </a:prstGeom>
-          <a:noFill/>
-          <a:ln>
-            <a:noFill/>
-          </a:ln>
-        </p:spPr>
-        <p:txBody>
-          <a:bodyPr wrap="square" anchor="ctr" lIns="0" tIns="0" rIns="0" bIns="0" rtlCol="0"/>
-          <a:lstStyle/>
-          <a:p>
-            <a:pPr algn="l" marL="0" indent="0">
-              <a:lnSpc>
-                <a:spcPct val="100000"/>
-              </a:lnSpc>
-              <a:buNone/>
-            </a:pPr>
-            <a:r>
-              <a:rPr lang="th-TH" sz="1000" dirty="0">
-                <a:solidFill>
-                  <a:srgbClr val="5F5F5F"/>
-                </a:solidFill>
-                <a:latin typeface="+mn-lt"/>
-                <a:ea typeface="+mn-ea"/>
-                <a:cs typeface="+mn-cs"/>
-              </a:rPr>
-              <a:t>ตรวจรับงวด 1</a:t>
-            </a:r>
-          </a:p>
-        </p:txBody>
-      </p:sp>
-      <p:sp>
-        <p:nvSpPr>
-          <p:cNvPr id="38" name="Milestone 4"/>
-          <p:cNvSpPr/>
-          <p:nvPr/>
-        </p:nvSpPr>
-        <p:spPr>
-          <a:xfrm>
-            <a:off x="7348728" y="3344418"/>
-            <a:ext cx="146304" cy="146304"/>
-          </a:xfrm>
-          <a:prstGeom prst="diamond">
-            <a:avLst/>
-          </a:prstGeom>
-          <a:solidFill>
-            <a:srgbClr val="BB731B"/>
-          </a:solidFill>
-          <a:ln w="19050">
-            <a:solidFill>
-              <a:srgbClr val="FFFFFF"/>
-            </a:solidFill>
-          </a:ln>
-        </p:spPr>
-        <p:txBody>
-          <a:bodyPr/>
-          <a:lstStyle/>
-          <a:p>
-            <a:endParaRPr lang="th-TH"/>
-          </a:p>
-        </p:txBody>
-      </p:sp>
-      <p:sp>
-        <p:nvSpPr>
-          <p:cNvPr id="39" name="Milestone 4 Label"/>
-          <p:cNvSpPr/>
-          <p:nvPr/>
-        </p:nvSpPr>
-        <p:spPr>
-          <a:xfrm>
-            <a:off x="7540752" y="3223260"/>
-            <a:ext cx="1463040" cy="388620"/>
-          </a:xfrm>
-          <a:prstGeom prst="rect">
-            <a:avLst/>
-          </a:prstGeom>
-          <a:noFill/>
-          <a:ln>
-            <a:noFill/>
-          </a:ln>
-        </p:spPr>
-        <p:txBody>
-          <a:bodyPr wrap="square" anchor="ctr" lIns="0" tIns="0" rIns="0" bIns="0" rtlCol="0"/>
-          <a:lstStyle/>
-          <a:p>
-            <a:pPr algn="l" marL="0" indent="0">
-              <a:lnSpc>
-                <a:spcPct val="100000"/>
-              </a:lnSpc>
-              <a:buNone/>
-            </a:pPr>
-            <a:r>
-              <a:rPr lang="th-TH" sz="1000" dirty="0">
-                <a:solidFill>
-                  <a:srgbClr val="5F5F5F"/>
-                </a:solidFill>
-                <a:latin typeface="+mn-lt"/>
-                <a:ea typeface="+mn-ea"/>
-                <a:cs typeface="+mn-cs"/>
-              </a:rPr>
-              <a:t>ตรวจรับงวด 2</a:t>
-            </a:r>
-          </a:p>
-        </p:txBody>
-      </p:sp>
-      <p:sp>
-        <p:nvSpPr>
-          <p:cNvPr id="40" name="Milestone 7"/>
-          <p:cNvSpPr/>
-          <p:nvPr/>
-        </p:nvSpPr>
-        <p:spPr>
-          <a:xfrm>
-            <a:off x="9597898" y="4510278"/>
-            <a:ext cx="146304" cy="146304"/>
-          </a:xfrm>
-          <a:prstGeom prst="diamond">
-            <a:avLst/>
-          </a:prstGeom>
-          <a:solidFill>
-            <a:srgbClr val="BB731B"/>
-          </a:solidFill>
-          <a:ln w="19050">
-            <a:solidFill>
-              <a:srgbClr val="FFFFFF"/>
-            </a:solidFill>
-          </a:ln>
-        </p:spPr>
-        <p:txBody>
-          <a:bodyPr/>
-          <a:lstStyle/>
-          <a:p>
-            <a:endParaRPr lang="th-TH"/>
-          </a:p>
-        </p:txBody>
-      </p:sp>
-      <p:sp>
-        <p:nvSpPr>
-          <p:cNvPr id="41" name="Milestone 7 Label"/>
-          <p:cNvSpPr/>
-          <p:nvPr/>
-        </p:nvSpPr>
-        <p:spPr>
-          <a:xfrm>
-            <a:off x="9789922" y="4389120"/>
-            <a:ext cx="1463040" cy="388620"/>
-          </a:xfrm>
-          <a:prstGeom prst="rect">
-            <a:avLst/>
-          </a:prstGeom>
-          <a:noFill/>
-          <a:ln>
-            <a:noFill/>
-          </a:ln>
-        </p:spPr>
-        <p:txBody>
-          <a:bodyPr wrap="square" anchor="ctr" lIns="0" tIns="0" rIns="0" bIns="0" rtlCol="0"/>
-          <a:lstStyle/>
-          <a:p>
-            <a:pPr algn="l" marL="0" indent="0">
-              <a:lnSpc>
-                <a:spcPct val="100000"/>
-              </a:lnSpc>
-              <a:buNone/>
-            </a:pPr>
-            <a:r>
-              <a:rPr lang="th-TH" sz="1000" dirty="0">
-                <a:solidFill>
-                  <a:srgbClr val="5F5F5F"/>
-                </a:solidFill>
-                <a:latin typeface="+mn-lt"/>
-                <a:ea typeface="+mn-ea"/>
-                <a:cs typeface="+mn-cs"/>
-              </a:rPr>
-              <a:t>ตรวจรับงวด 3</a:t>
-            </a:r>
-          </a:p>
-        </p:txBody>
-      </p:sp>
-    </p:spTree>
-  </p:cSld>
-  <p:clrMapOvr>
-    <a:masterClrMapping/>
-  </p:clrMapOvr>
-</p:sld>
-</file>
-
 <file path=ppt/slides/slide21.xml><?xml version="1.0" encoding="utf-8"?>
 <p:sld xmlns:a="http://schemas.openxmlformats.org/drawingml/2006/main" xmlns:r="http://schemas.openxmlformats.org/officeDocument/2006/relationships" xmlns:p="http://schemas.openxmlformats.org/presentationml/2006/main">
   <p:cSld name="">
@@ -34616,83 +36677,14 @@
             <a:pPr/>
             <a:r>
               <a:rPr lang="th-TH" dirty="0"/>
-              <a:t>ครึ่งหนึ่งของงบ 4.8 ล้านบาท คือค่าพัฒนาระบบ</a:t>
-            </a:r>
-          </a:p>
-        </p:txBody>
-      </p:sp>
-      <p:sp>
-        <p:nvSpPr>
-          <p:cNvPr id="3" name="Total"/>
-          <p:cNvSpPr>
-            <a:spLocks noGrp="1"/>
-          </p:cNvSpPr>
-          <p:nvPr>
-            <p:ph type="body" idx="2"/>
-          </p:nvPr>
-        </p:nvSpPr>
-        <p:spPr/>
-        <p:txBody>
-          <a:bodyPr/>
-          <a:lstStyle/>
-          <a:p>
-            <a:pPr/>
-            <a:r>
-              <a:rPr lang="th-TH" dirty="0"/>
-              <a:t>4.8 ล้านบาท</a:t>
-            </a:r>
-          </a:p>
-        </p:txBody>
-      </p:sp>
-      <p:sp>
-        <p:nvSpPr>
-          <p:cNvPr id="4" name="TotalL"/>
-          <p:cNvSpPr>
-            <a:spLocks noGrp="1"/>
-          </p:cNvSpPr>
-          <p:nvPr>
-            <p:ph type="body" idx="3"/>
-          </p:nvPr>
-        </p:nvSpPr>
-        <p:spPr/>
-        <p:txBody>
-          <a:bodyPr/>
-          <a:lstStyle/>
-          <a:p>
-            <a:pPr/>
-            <a:r>
-              <a:rPr lang="th-TH" dirty="0"/>
-              <a:t>งบโครงการรวมทั้งสิ้น</a:t>
-            </a:r>
-          </a:p>
-        </p:txBody>
-      </p:sp>
-      <p:sp>
-        <p:nvSpPr>
-          <p:cNvPr id="5" name="Intro"/>
-          <p:cNvSpPr>
-            <a:spLocks noGrp="1"/>
-          </p:cNvSpPr>
-          <p:nvPr>
-            <p:ph type="body" idx="4"/>
-          </p:nvPr>
-        </p:nvSpPr>
-        <p:spPr/>
-        <p:txBody>
-          <a:bodyPr/>
-          <a:lstStyle/>
-          <a:p>
-            <a:pPr/>
-            <a:r>
-              <a:rPr lang="th-TH" dirty="0"/>
-              <a:t>รวมภาษีมูลค่าเพิ่ม · สัญญา 12 เดือน ไม่รวมค่าบริการรายเดือนหลังปีแรก</a:t>
+              <a:t>แผนงาน 12 เดือน ขึ้นระบบต้นเดือนที่ 7</a:t>
             </a:r>
           </a:p>
         </p:txBody>
       </p:sp>
       <p:graphicFrame>
         <p:nvGraphicFramePr>
-          <p:cNvPr id="6" name="Composition"/>
+          <p:cNvPr id="3" name="Plan"/>
           <p:cNvGraphicFramePr>
             <a:graphicFrameLocks noGrp="1"/>
           </p:cNvGraphicFramePr>
@@ -34701,8 +36693,8 @@
           </p:nvPr>
         </p:nvGraphicFramePr>
         <p:xfrm>
-          <a:off x="2697480" y="3703320"/>
-          <a:ext cx="7299960" cy="1371600"/>
+          <a:off x="3566160" y="2057400"/>
+          <a:ext cx="7711440" cy="3108960"/>
         </p:xfrm>
         <a:graphic>
           <a:graphicData uri="http://schemas.openxmlformats.org/drawingml/2006/chart">
@@ -34712,7 +36704,7 @@
       </p:graphicFrame>
       <p:sp>
         <p:nvSpPr>
-          <p:cNvPr id="7" name="B1"/>
+          <p:cNvPr id="4" name="P1"/>
           <p:cNvSpPr>
             <a:spLocks noGrp="1"/>
           </p:cNvSpPr>
@@ -34728,14 +36720,129 @@
             <a:pPr/>
             <a:r>
               <a:rPr lang="th-TH" dirty="0"/>
-              <a:t>งบโครงการ</a:t>
-            </a:r>
-          </a:p>
-        </p:txBody>
-      </p:sp>
-      <p:sp>
-        <p:nvSpPr>
-          <p:cNvPr id="8" name="SN"/>
+              <a:t>ด.1</a:t>
+            </a:r>
+          </a:p>
+        </p:txBody>
+      </p:sp>
+      <p:sp>
+        <p:nvSpPr>
+          <p:cNvPr id="5" name="P2"/>
+          <p:cNvSpPr>
+            <a:spLocks noGrp="1"/>
+          </p:cNvSpPr>
+          <p:nvPr>
+            <p:ph type="body" idx="21"/>
+          </p:nvPr>
+        </p:nvSpPr>
+        <p:spPr/>
+        <p:txBody>
+          <a:bodyPr/>
+          <a:lstStyle/>
+          <a:p>
+            <a:pPr/>
+            <a:r>
+              <a:rPr lang="th-TH" dirty="0"/>
+              <a:t>ด.2</a:t>
+            </a:r>
+          </a:p>
+        </p:txBody>
+      </p:sp>
+      <p:sp>
+        <p:nvSpPr>
+          <p:cNvPr id="6" name="P3"/>
+          <p:cNvSpPr>
+            <a:spLocks noGrp="1"/>
+          </p:cNvSpPr>
+          <p:nvPr>
+            <p:ph type="body" idx="22"/>
+          </p:nvPr>
+        </p:nvSpPr>
+        <p:spPr/>
+        <p:txBody>
+          <a:bodyPr/>
+          <a:lstStyle/>
+          <a:p>
+            <a:pPr/>
+            <a:r>
+              <a:rPr lang="th-TH" dirty="0"/>
+              <a:t>ด.3</a:t>
+            </a:r>
+          </a:p>
+        </p:txBody>
+      </p:sp>
+      <p:sp>
+        <p:nvSpPr>
+          <p:cNvPr id="7" name="P4"/>
+          <p:cNvSpPr>
+            <a:spLocks noGrp="1"/>
+          </p:cNvSpPr>
+          <p:nvPr>
+            <p:ph type="body" idx="23"/>
+          </p:nvPr>
+        </p:nvSpPr>
+        <p:spPr/>
+        <p:txBody>
+          <a:bodyPr/>
+          <a:lstStyle/>
+          <a:p>
+            <a:pPr/>
+            <a:r>
+              <a:rPr lang="th-TH" dirty="0"/>
+              <a:t>ด.4</a:t>
+            </a:r>
+          </a:p>
+        </p:txBody>
+      </p:sp>
+      <p:sp>
+        <p:nvSpPr>
+          <p:cNvPr id="8" name="P5"/>
+          <p:cNvSpPr>
+            <a:spLocks noGrp="1"/>
+          </p:cNvSpPr>
+          <p:nvPr>
+            <p:ph type="body" idx="24"/>
+          </p:nvPr>
+        </p:nvSpPr>
+        <p:spPr/>
+        <p:txBody>
+          <a:bodyPr/>
+          <a:lstStyle/>
+          <a:p>
+            <a:pPr/>
+            <a:r>
+              <a:rPr lang="th-TH" dirty="0"/>
+              <a:t>ด.5</a:t>
+            </a:r>
+          </a:p>
+        </p:txBody>
+      </p:sp>
+      <p:sp>
+        <p:nvSpPr>
+          <p:cNvPr id="9" name="P6"/>
+          <p:cNvSpPr>
+            <a:spLocks noGrp="1"/>
+          </p:cNvSpPr>
+          <p:nvPr>
+            <p:ph type="body" idx="25"/>
+          </p:nvPr>
+        </p:nvSpPr>
+        <p:spPr/>
+        <p:txBody>
+          <a:bodyPr/>
+          <a:lstStyle/>
+          <a:p>
+            <a:pPr/>
+            <a:r>
+              <a:rPr lang="th-TH" dirty="0"/>
+              <a:t>ด.6</a:t>
+            </a:r>
+          </a:p>
+        </p:txBody>
+      </p:sp>
+      <p:sp>
+        <p:nvSpPr>
+          <p:cNvPr id="10" name="P7"/>
           <p:cNvSpPr>
             <a:spLocks noGrp="1"/>
           </p:cNvSpPr>
@@ -34751,14 +36858,14 @@
             <a:pPr/>
             <a:r>
               <a:rPr lang="th-TH" dirty="0"/>
-              <a:t>พัฒนาและตั้งค่าระบบ</a:t>
-            </a:r>
-          </a:p>
-        </p:txBody>
-      </p:sp>
-      <p:sp>
-        <p:nvSpPr>
-          <p:cNvPr id="9" name="SV"/>
+              <a:t>ด.7</a:t>
+            </a:r>
+          </a:p>
+        </p:txBody>
+      </p:sp>
+      <p:sp>
+        <p:nvSpPr>
+          <p:cNvPr id="11" name="P8"/>
           <p:cNvSpPr>
             <a:spLocks noGrp="1"/>
           </p:cNvSpPr>
@@ -34774,14 +36881,14 @@
             <a:pPr/>
             <a:r>
               <a:rPr lang="th-TH" dirty="0"/>
-              <a:t>2.4 ล้านบาท</a:t>
-            </a:r>
-          </a:p>
-        </p:txBody>
-      </p:sp>
-      <p:sp>
-        <p:nvSpPr>
-          <p:cNvPr id="10" name="SP"/>
+              <a:t>ด.8</a:t>
+            </a:r>
+          </a:p>
+        </p:txBody>
+      </p:sp>
+      <p:sp>
+        <p:nvSpPr>
+          <p:cNvPr id="12" name="P9"/>
           <p:cNvSpPr>
             <a:spLocks noGrp="1"/>
           </p:cNvSpPr>
@@ -34797,14 +36904,14 @@
             <a:pPr/>
             <a:r>
               <a:rPr lang="th-TH" dirty="0"/>
-              <a:t>50%</a:t>
-            </a:r>
-          </a:p>
-        </p:txBody>
-      </p:sp>
-      <p:sp>
-        <p:nvSpPr>
-          <p:cNvPr id="11" name="SN"/>
+              <a:t>ด.9</a:t>
+            </a:r>
+          </a:p>
+        </p:txBody>
+      </p:sp>
+      <p:sp>
+        <p:nvSpPr>
+          <p:cNvPr id="13" name="P10"/>
           <p:cNvSpPr>
             <a:spLocks noGrp="1"/>
           </p:cNvSpPr>
@@ -34820,14 +36927,14 @@
             <a:pPr/>
             <a:r>
               <a:rPr lang="th-TH" dirty="0"/>
-              <a:t>ไลเซนส์ซอฟต์แวร์</a:t>
-            </a:r>
-          </a:p>
-        </p:txBody>
-      </p:sp>
-      <p:sp>
-        <p:nvSpPr>
-          <p:cNvPr id="12" name="SV"/>
+              <a:t>ด.10</a:t>
+            </a:r>
+          </a:p>
+        </p:txBody>
+      </p:sp>
+      <p:sp>
+        <p:nvSpPr>
+          <p:cNvPr id="14" name="P11"/>
           <p:cNvSpPr>
             <a:spLocks noGrp="1"/>
           </p:cNvSpPr>
@@ -34843,14 +36950,14 @@
             <a:pPr/>
             <a:r>
               <a:rPr lang="th-TH" dirty="0"/>
-              <a:t>1.2 ล้านบาท</a:t>
-            </a:r>
-          </a:p>
-        </p:txBody>
-      </p:sp>
-      <p:sp>
-        <p:nvSpPr>
-          <p:cNvPr id="13" name="SP"/>
+              <a:t>ด.11</a:t>
+            </a:r>
+          </a:p>
+        </p:txBody>
+      </p:sp>
+      <p:sp>
+        <p:nvSpPr>
+          <p:cNvPr id="15" name="P12"/>
           <p:cNvSpPr>
             <a:spLocks noGrp="1"/>
           </p:cNvSpPr>
@@ -34866,14 +36973,14 @@
             <a:pPr/>
             <a:r>
               <a:rPr lang="th-TH" dirty="0"/>
-              <a:t>25%</a:t>
-            </a:r>
-          </a:p>
-        </p:txBody>
-      </p:sp>
-      <p:sp>
-        <p:nvSpPr>
-          <p:cNvPr id="14" name="SN"/>
+              <a:t>ด.12</a:t>
+            </a:r>
+          </a:p>
+        </p:txBody>
+      </p:sp>
+      <p:sp>
+        <p:nvSpPr>
+          <p:cNvPr id="16" name="R1"/>
           <p:cNvSpPr>
             <a:spLocks noGrp="1"/>
           </p:cNvSpPr>
@@ -34889,14 +36996,14 @@
             <a:pPr/>
             <a:r>
               <a:rPr lang="th-TH" dirty="0"/>
-              <a:t>คลาวด์ปีแรก</a:t>
-            </a:r>
-          </a:p>
-        </p:txBody>
-      </p:sp>
-      <p:sp>
-        <p:nvSpPr>
-          <p:cNvPr id="15" name="SV"/>
+              <a:t>1. เตรียมระบบ</a:t>
+            </a:r>
+          </a:p>
+        </p:txBody>
+      </p:sp>
+      <p:sp>
+        <p:nvSpPr>
+          <p:cNvPr id="17" name="D1"/>
           <p:cNvSpPr>
             <a:spLocks noGrp="1"/>
           </p:cNvSpPr>
@@ -34912,14 +37019,14 @@
             <a:pPr/>
             <a:r>
               <a:rPr lang="th-TH" dirty="0"/>
-              <a:t>0.7 ล้านบาท</a:t>
-            </a:r>
-          </a:p>
-        </p:txBody>
-      </p:sp>
-      <p:sp>
-        <p:nvSpPr>
-          <p:cNvPr id="16" name="SP"/>
+              <a:t>4 สัปดาห์</a:t>
+            </a:r>
+          </a:p>
+        </p:txBody>
+      </p:sp>
+      <p:sp>
+        <p:nvSpPr>
+          <p:cNvPr id="18" name="R2"/>
           <p:cNvSpPr>
             <a:spLocks noGrp="1"/>
           </p:cNvSpPr>
@@ -34935,14 +37042,14 @@
             <a:pPr/>
             <a:r>
               <a:rPr lang="th-TH" dirty="0"/>
-              <a:t>15%</a:t>
-            </a:r>
-          </a:p>
-        </p:txBody>
-      </p:sp>
-      <p:sp>
-        <p:nvSpPr>
-          <p:cNvPr id="17" name="SN"/>
+              <a:t>2. วิเคราะห์และออกแบบ</a:t>
+            </a:r>
+          </a:p>
+        </p:txBody>
+      </p:sp>
+      <p:sp>
+        <p:nvSpPr>
+          <p:cNvPr id="19" name="D2"/>
           <p:cNvSpPr>
             <a:spLocks noGrp="1"/>
           </p:cNvSpPr>
@@ -34958,14 +37065,14 @@
             <a:pPr/>
             <a:r>
               <a:rPr lang="th-TH" dirty="0"/>
-              <a:t>อื่น ๆ</a:t>
-            </a:r>
-          </a:p>
-        </p:txBody>
-      </p:sp>
-      <p:sp>
-        <p:nvSpPr>
-          <p:cNvPr id="18" name="SV"/>
+              <a:t>6 สัปดาห์</a:t>
+            </a:r>
+          </a:p>
+        </p:txBody>
+      </p:sp>
+      <p:sp>
+        <p:nvSpPr>
+          <p:cNvPr id="20" name="R3"/>
           <p:cNvSpPr>
             <a:spLocks noGrp="1"/>
           </p:cNvSpPr>
@@ -34981,14 +37088,14 @@
             <a:pPr/>
             <a:r>
               <a:rPr lang="th-TH" dirty="0"/>
-              <a:t>0.5 ล้านบาท</a:t>
-            </a:r>
-          </a:p>
-        </p:txBody>
-      </p:sp>
-      <p:sp>
-        <p:nvSpPr>
-          <p:cNvPr id="19" name="SP"/>
+              <a:t>3. พัฒนาและตั้งค่าระบบ</a:t>
+            </a:r>
+          </a:p>
+        </p:txBody>
+      </p:sp>
+      <p:sp>
+        <p:nvSpPr>
+          <p:cNvPr id="21" name="D3"/>
           <p:cNvSpPr>
             <a:spLocks noGrp="1"/>
           </p:cNvSpPr>
@@ -35004,19 +37111,19 @@
             <a:pPr/>
             <a:r>
               <a:rPr lang="th-TH" dirty="0"/>
-              <a:t>10%</a:t>
-            </a:r>
-          </a:p>
-        </p:txBody>
-      </p:sp>
-      <p:sp>
-        <p:nvSpPr>
-          <p:cNvPr id="20" name="Src"/>
-          <p:cNvSpPr>
-            <a:spLocks noGrp="1"/>
-          </p:cNvSpPr>
-          <p:nvPr>
-            <p:ph type="body" idx="5"/>
+              <a:t>10 สัปดาห์</a:t>
+            </a:r>
+          </a:p>
+        </p:txBody>
+      </p:sp>
+      <p:sp>
+        <p:nvSpPr>
+          <p:cNvPr id="22" name="R4"/>
+          <p:cNvSpPr>
+            <a:spLocks noGrp="1"/>
+          </p:cNvSpPr>
+          <p:nvPr>
+            <p:ph type="body" idx="38"/>
           </p:nvPr>
         </p:nvSpPr>
         <p:spPr/>
@@ -35027,19 +37134,272 @@
             <a:pPr/>
             <a:r>
               <a:rPr lang="th-TH" dirty="0"/>
-              <a:t>ใบเสนอราคา NCT-2569-041 · ปัดเป็นแสนบาท</a:t>
-            </a:r>
-          </a:p>
-        </p:txBody>
-      </p:sp>
-      <p:sp>
-        <p:nvSpPr>
-          <p:cNvPr id="21" name="TL"/>
-          <p:cNvSpPr>
-            <a:spLocks noGrp="1"/>
-          </p:cNvSpPr>
-          <p:nvPr>
-            <p:ph type="body" idx="6"/>
+              <a:t>4. ทดสอบ UAT</a:t>
+            </a:r>
+          </a:p>
+        </p:txBody>
+      </p:sp>
+      <p:sp>
+        <p:nvSpPr>
+          <p:cNvPr id="23" name="D4"/>
+          <p:cNvSpPr>
+            <a:spLocks noGrp="1"/>
+          </p:cNvSpPr>
+          <p:nvPr>
+            <p:ph type="body" idx="39"/>
+          </p:nvPr>
+        </p:nvSpPr>
+        <p:spPr/>
+        <p:txBody>
+          <a:bodyPr/>
+          <a:lstStyle/>
+          <a:p>
+            <a:pPr/>
+            <a:r>
+              <a:rPr lang="th-TH" dirty="0"/>
+              <a:t>4 สัปดาห์</a:t>
+            </a:r>
+          </a:p>
+        </p:txBody>
+      </p:sp>
+      <p:sp>
+        <p:nvSpPr>
+          <p:cNvPr id="24" name="R5"/>
+          <p:cNvSpPr>
+            <a:spLocks noGrp="1"/>
+          </p:cNvSpPr>
+          <p:nvPr>
+            <p:ph type="body" idx="40"/>
+          </p:nvPr>
+        </p:nvSpPr>
+        <p:spPr/>
+        <p:txBody>
+          <a:bodyPr/>
+          <a:lstStyle/>
+          <a:p>
+            <a:pPr/>
+            <a:r>
+              <a:rPr lang="th-TH" dirty="0"/>
+              <a:t>5. อบรมผู้ใช้</a:t>
+            </a:r>
+          </a:p>
+        </p:txBody>
+      </p:sp>
+      <p:sp>
+        <p:nvSpPr>
+          <p:cNvPr id="25" name="D5"/>
+          <p:cNvSpPr>
+            <a:spLocks noGrp="1"/>
+          </p:cNvSpPr>
+          <p:nvPr>
+            <p:ph type="body" idx="41"/>
+          </p:nvPr>
+        </p:nvSpPr>
+        <p:spPr/>
+        <p:txBody>
+          <a:bodyPr/>
+          <a:lstStyle/>
+          <a:p>
+            <a:pPr/>
+            <a:r>
+              <a:rPr lang="th-TH" dirty="0"/>
+              <a:t>1 สัปดาห์</a:t>
+            </a:r>
+          </a:p>
+        </p:txBody>
+      </p:sp>
+      <p:sp>
+        <p:nvSpPr>
+          <p:cNvPr id="26" name="R6"/>
+          <p:cNvSpPr>
+            <a:spLocks noGrp="1"/>
+          </p:cNvSpPr>
+          <p:nvPr>
+            <p:ph type="body" idx="42"/>
+          </p:nvPr>
+        </p:nvSpPr>
+        <p:spPr/>
+        <p:txBody>
+          <a:bodyPr/>
+          <a:lstStyle/>
+          <a:p>
+            <a:pPr/>
+            <a:r>
+              <a:rPr lang="th-TH" dirty="0"/>
+              <a:t>6. ขึ้นระบบ</a:t>
+            </a:r>
+          </a:p>
+        </p:txBody>
+      </p:sp>
+      <p:sp>
+        <p:nvSpPr>
+          <p:cNvPr id="27" name="D6"/>
+          <p:cNvSpPr>
+            <a:spLocks noGrp="1"/>
+          </p:cNvSpPr>
+          <p:nvPr>
+            <p:ph type="body" idx="43"/>
+          </p:nvPr>
+        </p:nvSpPr>
+        <p:spPr/>
+        <p:txBody>
+          <a:bodyPr/>
+          <a:lstStyle/>
+          <a:p>
+            <a:pPr/>
+            <a:r>
+              <a:rPr lang="th-TH" dirty="0"/>
+              <a:t>2 สัปดาห์</a:t>
+            </a:r>
+          </a:p>
+        </p:txBody>
+      </p:sp>
+      <p:sp>
+        <p:nvSpPr>
+          <p:cNvPr id="28" name="R7"/>
+          <p:cNvSpPr>
+            <a:spLocks noGrp="1"/>
+          </p:cNvSpPr>
+          <p:nvPr>
+            <p:ph type="body" idx="44"/>
+          </p:nvPr>
+        </p:nvSpPr>
+        <p:spPr/>
+        <p:txBody>
+          <a:bodyPr/>
+          <a:lstStyle/>
+          <a:p>
+            <a:pPr/>
+            <a:r>
+              <a:rPr lang="th-TH" dirty="0"/>
+              <a:t>7. ดูแลหลังขึ้นระบบ</a:t>
+            </a:r>
+          </a:p>
+        </p:txBody>
+      </p:sp>
+      <p:sp>
+        <p:nvSpPr>
+          <p:cNvPr id="29" name="D7"/>
+          <p:cNvSpPr>
+            <a:spLocks noGrp="1"/>
+          </p:cNvSpPr>
+          <p:nvPr>
+            <p:ph type="body" idx="45"/>
+          </p:nvPr>
+        </p:nvSpPr>
+        <p:spPr/>
+        <p:txBody>
+          <a:bodyPr/>
+          <a:lstStyle/>
+          <a:p>
+            <a:pPr/>
+            <a:r>
+              <a:rPr lang="th-TH" dirty="0"/>
+              <a:t>3 เดือน</a:t>
+            </a:r>
+          </a:p>
+        </p:txBody>
+      </p:sp>
+      <p:sp>
+        <p:nvSpPr>
+          <p:cNvPr id="30" name="R8"/>
+          <p:cNvSpPr>
+            <a:spLocks noGrp="1"/>
+          </p:cNvSpPr>
+          <p:nvPr>
+            <p:ph type="body" idx="46"/>
+          </p:nvPr>
+        </p:nvSpPr>
+        <p:spPr/>
+        <p:txBody>
+          <a:bodyPr/>
+          <a:lstStyle/>
+          <a:p>
+            <a:pPr/>
+            <a:r>
+              <a:rPr lang="th-TH" dirty="0"/>
+              <a:t>8. รับประกันระบบ</a:t>
+            </a:r>
+          </a:p>
+        </p:txBody>
+      </p:sp>
+      <p:sp>
+        <p:nvSpPr>
+          <p:cNvPr id="31" name="D8"/>
+          <p:cNvSpPr>
+            <a:spLocks noGrp="1"/>
+          </p:cNvSpPr>
+          <p:nvPr>
+            <p:ph type="body" idx="47"/>
+          </p:nvPr>
+        </p:nvSpPr>
+        <p:spPr/>
+        <p:txBody>
+          <a:bodyPr/>
+          <a:lstStyle/>
+          <a:p>
+            <a:pPr/>
+            <a:r>
+              <a:rPr lang="th-TH" dirty="0"/>
+              <a:t>2.5 เดือน</a:t>
+            </a:r>
+          </a:p>
+        </p:txBody>
+      </p:sp>
+      <p:sp>
+        <p:nvSpPr>
+          <p:cNvPr id="32" name="Key"/>
+          <p:cNvSpPr>
+            <a:spLocks noGrp="1"/>
+          </p:cNvSpPr>
+          <p:nvPr>
+            <p:ph type="body" idx="2"/>
+          </p:nvPr>
+        </p:nvSpPr>
+        <p:spPr/>
+        <p:txBody>
+          <a:bodyPr/>
+          <a:lstStyle/>
+          <a:p>
+            <a:pPr/>
+            <a:r>
+              <a:rPr lang="th-TH" dirty="0"/>
+              <a:t>■ ช่วงงาน   ◆ ส่งมอบ / ตรวจรับ</a:t>
+            </a:r>
+          </a:p>
+        </p:txBody>
+      </p:sp>
+      <p:sp>
+        <p:nvSpPr>
+          <p:cNvPr id="33" name="Asm"/>
+          <p:cNvSpPr>
+            <a:spLocks noGrp="1"/>
+          </p:cNvSpPr>
+          <p:nvPr>
+            <p:ph type="body" idx="3"/>
+          </p:nvPr>
+        </p:nvSpPr>
+        <p:spPr/>
+        <p:txBody>
+          <a:bodyPr/>
+          <a:lstStyle/>
+          <a:p>
+            <a:pPr/>
+            <a:r>
+              <a:rPr lang="th-TH" dirty="0"/>
+              <a:t>นับจากวันลงนามสัญญา · หน่วย: เดือน</a:t>
+            </a:r>
+          </a:p>
+        </p:txBody>
+      </p:sp>
+      <p:sp>
+        <p:nvSpPr>
+          <p:cNvPr id="34" name="TL"/>
+          <p:cNvSpPr>
+            <a:spLocks noGrp="1"/>
+          </p:cNvSpPr>
+          <p:nvPr>
+            <p:ph type="body" idx="4"/>
           </p:nvPr>
         </p:nvSpPr>
         <p:spPr/>
@@ -35057,12 +37417,12 @@
       </p:sp>
       <p:sp>
         <p:nvSpPr>
-          <p:cNvPr id="22" name="TC"/>
-          <p:cNvSpPr>
-            <a:spLocks noGrp="1"/>
-          </p:cNvSpPr>
-          <p:nvPr>
-            <p:ph type="body" idx="7"/>
+          <p:cNvPr id="35" name="TC"/>
+          <p:cNvSpPr>
+            <a:spLocks noGrp="1"/>
+          </p:cNvSpPr>
+          <p:nvPr>
+            <p:ph type="body" idx="5"/>
           </p:nvPr>
         </p:nvSpPr>
         <p:spPr/>
@@ -35073,7 +37433,229 @@
             <a:pPr/>
             <a:r>
               <a:rPr lang="th-TH" dirty="0"/>
-              <a:t>ไลเซนส์กับคลาวด์รวมกันไม่ถึง 40% งบส่วนใหญ่จ่ายให้งานที่ทำครั้งเดียว</a:t>
+              <a:t>ขึ้นระบบต้นเดือนที่ 7 ตรวจรับ 3 งวดตามจุดส่งมอบ</a:t>
+            </a:r>
+          </a:p>
+        </p:txBody>
+      </p:sp>
+      <p:sp>
+        <p:nvSpPr>
+          <p:cNvPr id="36" name="Milestone 2"/>
+          <p:cNvSpPr/>
+          <p:nvPr/>
+        </p:nvSpPr>
+        <p:spPr>
+          <a:xfrm>
+            <a:off x="5099558" y="2567178"/>
+            <a:ext cx="146304" cy="146304"/>
+          </a:xfrm>
+          <a:prstGeom prst="diamond">
+            <a:avLst/>
+          </a:prstGeom>
+          <a:solidFill>
+            <a:srgbClr val="BB731B"/>
+          </a:solidFill>
+          <a:ln w="19050">
+            <a:solidFill>
+              <a:srgbClr val="FFFFFF"/>
+            </a:solidFill>
+          </a:ln>
+        </p:spPr>
+        <p:txBody>
+          <a:bodyPr/>
+          <a:lstStyle/>
+          <a:p>
+            <a:endParaRPr lang="th-TH"/>
+          </a:p>
+        </p:txBody>
+      </p:sp>
+      <p:sp>
+        <p:nvSpPr>
+          <p:cNvPr id="37" name="Milestone 2 Label"/>
+          <p:cNvSpPr/>
+          <p:nvPr/>
+        </p:nvSpPr>
+        <p:spPr>
+          <a:xfrm>
+            <a:off x="5291582" y="2446020"/>
+            <a:ext cx="1463040" cy="388620"/>
+          </a:xfrm>
+          <a:prstGeom prst="rect">
+            <a:avLst/>
+          </a:prstGeom>
+          <a:noFill/>
+          <a:ln>
+            <a:noFill/>
+          </a:ln>
+        </p:spPr>
+        <p:txBody>
+          <a:bodyPr wrap="square" anchor="ctr" lIns="0" tIns="0" rIns="0" bIns="0" rtlCol="0"/>
+          <a:lstStyle/>
+          <a:p>
+            <a:pPr algn="l" marL="0" indent="0">
+              <a:lnSpc>
+                <a:spcPct val="100000"/>
+              </a:lnSpc>
+              <a:buNone/>
+            </a:pPr>
+            <a:r>
+              <a:rPr lang="th-TH" sz="1000" dirty="0">
+                <a:solidFill>
+                  <a:srgbClr val="5F5F5F"/>
+                </a:solidFill>
+                <a:latin typeface="+mn-lt"/>
+                <a:ea typeface="+mn-ea"/>
+                <a:cs typeface="+mn-cs"/>
+              </a:rPr>
+              <a:t>ตรวจรับงวด 1</a:t>
+            </a:r>
+          </a:p>
+        </p:txBody>
+      </p:sp>
+      <p:sp>
+        <p:nvSpPr>
+          <p:cNvPr id="38" name="Milestone 4"/>
+          <p:cNvSpPr/>
+          <p:nvPr/>
+        </p:nvSpPr>
+        <p:spPr>
+          <a:xfrm>
+            <a:off x="7348728" y="3344418"/>
+            <a:ext cx="146304" cy="146304"/>
+          </a:xfrm>
+          <a:prstGeom prst="diamond">
+            <a:avLst/>
+          </a:prstGeom>
+          <a:solidFill>
+            <a:srgbClr val="BB731B"/>
+          </a:solidFill>
+          <a:ln w="19050">
+            <a:solidFill>
+              <a:srgbClr val="FFFFFF"/>
+            </a:solidFill>
+          </a:ln>
+        </p:spPr>
+        <p:txBody>
+          <a:bodyPr/>
+          <a:lstStyle/>
+          <a:p>
+            <a:endParaRPr lang="th-TH"/>
+          </a:p>
+        </p:txBody>
+      </p:sp>
+      <p:sp>
+        <p:nvSpPr>
+          <p:cNvPr id="39" name="Milestone 4 Label"/>
+          <p:cNvSpPr/>
+          <p:nvPr/>
+        </p:nvSpPr>
+        <p:spPr>
+          <a:xfrm>
+            <a:off x="7540752" y="3223260"/>
+            <a:ext cx="1463040" cy="388620"/>
+          </a:xfrm>
+          <a:prstGeom prst="rect">
+            <a:avLst/>
+          </a:prstGeom>
+          <a:noFill/>
+          <a:ln>
+            <a:noFill/>
+          </a:ln>
+        </p:spPr>
+        <p:txBody>
+          <a:bodyPr wrap="square" anchor="ctr" lIns="0" tIns="0" rIns="0" bIns="0" rtlCol="0"/>
+          <a:lstStyle/>
+          <a:p>
+            <a:pPr algn="l" marL="0" indent="0">
+              <a:lnSpc>
+                <a:spcPct val="100000"/>
+              </a:lnSpc>
+              <a:buNone/>
+            </a:pPr>
+            <a:r>
+              <a:rPr lang="th-TH" sz="1000" dirty="0">
+                <a:solidFill>
+                  <a:srgbClr val="5F5F5F"/>
+                </a:solidFill>
+                <a:latin typeface="+mn-lt"/>
+                <a:ea typeface="+mn-ea"/>
+                <a:cs typeface="+mn-cs"/>
+              </a:rPr>
+              <a:t>ตรวจรับงวด 2</a:t>
+            </a:r>
+          </a:p>
+        </p:txBody>
+      </p:sp>
+      <p:sp>
+        <p:nvSpPr>
+          <p:cNvPr id="40" name="Milestone 7"/>
+          <p:cNvSpPr/>
+          <p:nvPr/>
+        </p:nvSpPr>
+        <p:spPr>
+          <a:xfrm>
+            <a:off x="9597898" y="4510278"/>
+            <a:ext cx="146304" cy="146304"/>
+          </a:xfrm>
+          <a:prstGeom prst="diamond">
+            <a:avLst/>
+          </a:prstGeom>
+          <a:solidFill>
+            <a:srgbClr val="BB731B"/>
+          </a:solidFill>
+          <a:ln w="19050">
+            <a:solidFill>
+              <a:srgbClr val="FFFFFF"/>
+            </a:solidFill>
+          </a:ln>
+        </p:spPr>
+        <p:txBody>
+          <a:bodyPr/>
+          <a:lstStyle/>
+          <a:p>
+            <a:endParaRPr lang="th-TH"/>
+          </a:p>
+        </p:txBody>
+      </p:sp>
+      <p:sp>
+        <p:nvSpPr>
+          <p:cNvPr id="41" name="Milestone 7 Label"/>
+          <p:cNvSpPr/>
+          <p:nvPr/>
+        </p:nvSpPr>
+        <p:spPr>
+          <a:xfrm>
+            <a:off x="9789922" y="4389120"/>
+            <a:ext cx="1463040" cy="388620"/>
+          </a:xfrm>
+          <a:prstGeom prst="rect">
+            <a:avLst/>
+          </a:prstGeom>
+          <a:noFill/>
+          <a:ln>
+            <a:noFill/>
+          </a:ln>
+        </p:spPr>
+        <p:txBody>
+          <a:bodyPr wrap="square" anchor="ctr" lIns="0" tIns="0" rIns="0" bIns="0" rtlCol="0"/>
+          <a:lstStyle/>
+          <a:p>
+            <a:pPr algn="l" marL="0" indent="0">
+              <a:lnSpc>
+                <a:spcPct val="100000"/>
+              </a:lnSpc>
+              <a:buNone/>
+            </a:pPr>
+            <a:r>
+              <a:rPr lang="th-TH" sz="1000" dirty="0">
+                <a:solidFill>
+                  <a:srgbClr val="5F5F5F"/>
+                </a:solidFill>
+                <a:latin typeface="+mn-lt"/>
+                <a:ea typeface="+mn-ea"/>
+                <a:cs typeface="+mn-cs"/>
+              </a:rPr>
+              <a:t>ตรวจรับงวด 3</a:t>
             </a:r>
           </a:p>
         </p:txBody>
@@ -35121,19 +37703,19 @@
             <a:pPr/>
             <a:r>
               <a:rPr lang="th-TH" dirty="0"/>
-              <a:t>5. Implementation Stage</a:t>
-            </a:r>
-          </a:p>
-        </p:txBody>
-      </p:sp>
-      <p:sp>
-        <p:nvSpPr>
-          <p:cNvPr id="3" name="KAL"/>
-          <p:cNvSpPr>
-            <a:spLocks noGrp="1"/>
-          </p:cNvSpPr>
-          <p:nvPr>
-            <p:ph type="body" idx="1"/>
+              <a:t>ครึ่งหนึ่งของงบ 4.8 ล้านบาท คือค่าพัฒนาระบบ</a:t>
+            </a:r>
+          </a:p>
+        </p:txBody>
+      </p:sp>
+      <p:sp>
+        <p:nvSpPr>
+          <p:cNvPr id="3" name="Total"/>
+          <p:cNvSpPr>
+            <a:spLocks noGrp="1"/>
+          </p:cNvSpPr>
+          <p:nvPr>
+            <p:ph type="body" idx="2"/>
           </p:nvPr>
         </p:nvSpPr>
         <p:spPr/>
@@ -35144,19 +37726,19 @@
             <a:pPr/>
             <a:r>
               <a:rPr lang="th-TH" dirty="0"/>
-              <a:t>Key Activity :</a:t>
-            </a:r>
-          </a:p>
-        </p:txBody>
-      </p:sp>
-      <p:sp>
-        <p:nvSpPr>
-          <p:cNvPr id="4" name="KAV"/>
-          <p:cNvSpPr>
-            <a:spLocks noGrp="1"/>
-          </p:cNvSpPr>
-          <p:nvPr>
-            <p:ph type="body" idx="2"/>
+              <a:t>4.8 ล้านบาท</a:t>
+            </a:r>
+          </a:p>
+        </p:txBody>
+      </p:sp>
+      <p:sp>
+        <p:nvSpPr>
+          <p:cNvPr id="4" name="TotalL"/>
+          <p:cNvSpPr>
+            <a:spLocks noGrp="1"/>
+          </p:cNvSpPr>
+          <p:nvPr>
+            <p:ph type="body" idx="3"/>
           </p:nvPr>
         </p:nvSpPr>
         <p:spPr/>
@@ -35167,19 +37749,19 @@
             <a:pPr/>
             <a:r>
               <a:rPr lang="th-TH" dirty="0"/>
-              <a:t>ตั้งค่าสภาพแวดล้อม ติดตั้งฮาร์ดแวร์และซอฟต์แวร์</a:t>
-            </a:r>
-          </a:p>
-        </p:txBody>
-      </p:sp>
-      <p:sp>
-        <p:nvSpPr>
-          <p:cNvPr id="5" name="PL"/>
-          <p:cNvSpPr>
-            <a:spLocks noGrp="1"/>
-          </p:cNvSpPr>
-          <p:nvPr>
-            <p:ph type="body" idx="3"/>
+              <a:t>งบโครงการรวมทั้งสิ้น</a:t>
+            </a:r>
+          </a:p>
+        </p:txBody>
+      </p:sp>
+      <p:sp>
+        <p:nvSpPr>
+          <p:cNvPr id="5" name="Intro"/>
+          <p:cNvSpPr>
+            <a:spLocks noGrp="1"/>
+          </p:cNvSpPr>
+          <p:nvPr>
+            <p:ph type="body" idx="4"/>
           </p:nvPr>
         </p:nvSpPr>
         <p:spPr/>
@@ -35190,19 +37772,39 @@
             <a:pPr/>
             <a:r>
               <a:rPr lang="th-TH" dirty="0"/>
-              <a:t>Participant :</a:t>
-            </a:r>
-          </a:p>
-        </p:txBody>
-      </p:sp>
-      <p:sp>
-        <p:nvSpPr>
-          <p:cNvPr id="6" name="PV"/>
-          <p:cNvSpPr>
-            <a:spLocks noGrp="1"/>
-          </p:cNvSpPr>
-          <p:nvPr>
-            <p:ph type="body" idx="4"/>
+              <a:t>รวมภาษีมูลค่าเพิ่ม · สัญญา 12 เดือน ไม่รวมค่าบริการรายเดือนหลังปีแรก</a:t>
+            </a:r>
+          </a:p>
+        </p:txBody>
+      </p:sp>
+      <p:graphicFrame>
+        <p:nvGraphicFramePr>
+          <p:cNvPr id="6" name="Composition"/>
+          <p:cNvGraphicFramePr>
+            <a:graphicFrameLocks noGrp="1"/>
+          </p:cNvGraphicFramePr>
+          <p:nvPr>
+            <p:ph type="chart" idx="1"/>
+          </p:nvPr>
+        </p:nvGraphicFramePr>
+        <p:xfrm>
+          <a:off x="2697480" y="3703320"/>
+          <a:ext cx="7299960" cy="1371600"/>
+        </p:xfrm>
+        <a:graphic>
+          <a:graphicData uri="http://schemas.openxmlformats.org/drawingml/2006/chart">
+            <c:chart xmlns:c="http://schemas.openxmlformats.org/drawingml/2006/chart" r:id="rId2"/>
+          </a:graphicData>
+        </a:graphic>
+      </p:graphicFrame>
+      <p:sp>
+        <p:nvSpPr>
+          <p:cNvPr id="7" name="B1"/>
+          <p:cNvSpPr>
+            <a:spLocks noGrp="1"/>
+          </p:cNvSpPr>
+          <p:nvPr>
+            <p:ph type="body" idx="20"/>
           </p:nvPr>
         </p:nvSpPr>
         <p:spPr/>
@@ -35213,14 +37815,290 @@
             <a:pPr/>
             <a:r>
               <a:rPr lang="th-TH" dirty="0"/>
-              <a:t>NCT Infra Engineer, ทีมไอทีลูกค้า, Business Analyst</a:t>
-            </a:r>
-          </a:p>
-        </p:txBody>
-      </p:sp>
-      <p:sp>
-        <p:nvSpPr>
-          <p:cNvPr id="7" name="PN"/>
+              <a:t>งบโครงการ</a:t>
+            </a:r>
+          </a:p>
+        </p:txBody>
+      </p:sp>
+      <p:sp>
+        <p:nvSpPr>
+          <p:cNvPr id="8" name="SN"/>
+          <p:cNvSpPr>
+            <a:spLocks noGrp="1"/>
+          </p:cNvSpPr>
+          <p:nvPr>
+            <p:ph type="body" idx="26"/>
+          </p:nvPr>
+        </p:nvSpPr>
+        <p:spPr/>
+        <p:txBody>
+          <a:bodyPr/>
+          <a:lstStyle/>
+          <a:p>
+            <a:pPr/>
+            <a:r>
+              <a:rPr lang="th-TH" dirty="0"/>
+              <a:t>พัฒนาและตั้งค่าระบบ</a:t>
+            </a:r>
+          </a:p>
+        </p:txBody>
+      </p:sp>
+      <p:sp>
+        <p:nvSpPr>
+          <p:cNvPr id="9" name="SV"/>
+          <p:cNvSpPr>
+            <a:spLocks noGrp="1"/>
+          </p:cNvSpPr>
+          <p:nvPr>
+            <p:ph type="body" idx="27"/>
+          </p:nvPr>
+        </p:nvSpPr>
+        <p:spPr/>
+        <p:txBody>
+          <a:bodyPr/>
+          <a:lstStyle/>
+          <a:p>
+            <a:pPr/>
+            <a:r>
+              <a:rPr lang="th-TH" dirty="0"/>
+              <a:t>2.4 ล้านบาท</a:t>
+            </a:r>
+          </a:p>
+        </p:txBody>
+      </p:sp>
+      <p:sp>
+        <p:nvSpPr>
+          <p:cNvPr id="10" name="SP"/>
+          <p:cNvSpPr>
+            <a:spLocks noGrp="1"/>
+          </p:cNvSpPr>
+          <p:nvPr>
+            <p:ph type="body" idx="28"/>
+          </p:nvPr>
+        </p:nvSpPr>
+        <p:spPr/>
+        <p:txBody>
+          <a:bodyPr/>
+          <a:lstStyle/>
+          <a:p>
+            <a:pPr/>
+            <a:r>
+              <a:rPr lang="th-TH" dirty="0"/>
+              <a:t>50%</a:t>
+            </a:r>
+          </a:p>
+        </p:txBody>
+      </p:sp>
+      <p:sp>
+        <p:nvSpPr>
+          <p:cNvPr id="11" name="SN"/>
+          <p:cNvSpPr>
+            <a:spLocks noGrp="1"/>
+          </p:cNvSpPr>
+          <p:nvPr>
+            <p:ph type="body" idx="29"/>
+          </p:nvPr>
+        </p:nvSpPr>
+        <p:spPr/>
+        <p:txBody>
+          <a:bodyPr/>
+          <a:lstStyle/>
+          <a:p>
+            <a:pPr/>
+            <a:r>
+              <a:rPr lang="th-TH" dirty="0"/>
+              <a:t>ไลเซนส์ซอฟต์แวร์</a:t>
+            </a:r>
+          </a:p>
+        </p:txBody>
+      </p:sp>
+      <p:sp>
+        <p:nvSpPr>
+          <p:cNvPr id="12" name="SV"/>
+          <p:cNvSpPr>
+            <a:spLocks noGrp="1"/>
+          </p:cNvSpPr>
+          <p:nvPr>
+            <p:ph type="body" idx="30"/>
+          </p:nvPr>
+        </p:nvSpPr>
+        <p:spPr/>
+        <p:txBody>
+          <a:bodyPr/>
+          <a:lstStyle/>
+          <a:p>
+            <a:pPr/>
+            <a:r>
+              <a:rPr lang="th-TH" dirty="0"/>
+              <a:t>1.2 ล้านบาท</a:t>
+            </a:r>
+          </a:p>
+        </p:txBody>
+      </p:sp>
+      <p:sp>
+        <p:nvSpPr>
+          <p:cNvPr id="13" name="SP"/>
+          <p:cNvSpPr>
+            <a:spLocks noGrp="1"/>
+          </p:cNvSpPr>
+          <p:nvPr>
+            <p:ph type="body" idx="31"/>
+          </p:nvPr>
+        </p:nvSpPr>
+        <p:spPr/>
+        <p:txBody>
+          <a:bodyPr/>
+          <a:lstStyle/>
+          <a:p>
+            <a:pPr/>
+            <a:r>
+              <a:rPr lang="th-TH" dirty="0"/>
+              <a:t>25%</a:t>
+            </a:r>
+          </a:p>
+        </p:txBody>
+      </p:sp>
+      <p:sp>
+        <p:nvSpPr>
+          <p:cNvPr id="14" name="SN"/>
+          <p:cNvSpPr>
+            <a:spLocks noGrp="1"/>
+          </p:cNvSpPr>
+          <p:nvPr>
+            <p:ph type="body" idx="32"/>
+          </p:nvPr>
+        </p:nvSpPr>
+        <p:spPr/>
+        <p:txBody>
+          <a:bodyPr/>
+          <a:lstStyle/>
+          <a:p>
+            <a:pPr/>
+            <a:r>
+              <a:rPr lang="th-TH" dirty="0"/>
+              <a:t>คลาวด์ปีแรก</a:t>
+            </a:r>
+          </a:p>
+        </p:txBody>
+      </p:sp>
+      <p:sp>
+        <p:nvSpPr>
+          <p:cNvPr id="15" name="SV"/>
+          <p:cNvSpPr>
+            <a:spLocks noGrp="1"/>
+          </p:cNvSpPr>
+          <p:nvPr>
+            <p:ph type="body" idx="33"/>
+          </p:nvPr>
+        </p:nvSpPr>
+        <p:spPr/>
+        <p:txBody>
+          <a:bodyPr/>
+          <a:lstStyle/>
+          <a:p>
+            <a:pPr/>
+            <a:r>
+              <a:rPr lang="th-TH" dirty="0"/>
+              <a:t>0.7 ล้านบาท</a:t>
+            </a:r>
+          </a:p>
+        </p:txBody>
+      </p:sp>
+      <p:sp>
+        <p:nvSpPr>
+          <p:cNvPr id="16" name="SP"/>
+          <p:cNvSpPr>
+            <a:spLocks noGrp="1"/>
+          </p:cNvSpPr>
+          <p:nvPr>
+            <p:ph type="body" idx="34"/>
+          </p:nvPr>
+        </p:nvSpPr>
+        <p:spPr/>
+        <p:txBody>
+          <a:bodyPr/>
+          <a:lstStyle/>
+          <a:p>
+            <a:pPr/>
+            <a:r>
+              <a:rPr lang="th-TH" dirty="0"/>
+              <a:t>15%</a:t>
+            </a:r>
+          </a:p>
+        </p:txBody>
+      </p:sp>
+      <p:sp>
+        <p:nvSpPr>
+          <p:cNvPr id="17" name="SN"/>
+          <p:cNvSpPr>
+            <a:spLocks noGrp="1"/>
+          </p:cNvSpPr>
+          <p:nvPr>
+            <p:ph type="body" idx="35"/>
+          </p:nvPr>
+        </p:nvSpPr>
+        <p:spPr/>
+        <p:txBody>
+          <a:bodyPr/>
+          <a:lstStyle/>
+          <a:p>
+            <a:pPr/>
+            <a:r>
+              <a:rPr lang="th-TH" dirty="0"/>
+              <a:t>อื่น ๆ</a:t>
+            </a:r>
+          </a:p>
+        </p:txBody>
+      </p:sp>
+      <p:sp>
+        <p:nvSpPr>
+          <p:cNvPr id="18" name="SV"/>
+          <p:cNvSpPr>
+            <a:spLocks noGrp="1"/>
+          </p:cNvSpPr>
+          <p:nvPr>
+            <p:ph type="body" idx="36"/>
+          </p:nvPr>
+        </p:nvSpPr>
+        <p:spPr/>
+        <p:txBody>
+          <a:bodyPr/>
+          <a:lstStyle/>
+          <a:p>
+            <a:pPr/>
+            <a:r>
+              <a:rPr lang="th-TH" dirty="0"/>
+              <a:t>0.5 ล้านบาท</a:t>
+            </a:r>
+          </a:p>
+        </p:txBody>
+      </p:sp>
+      <p:sp>
+        <p:nvSpPr>
+          <p:cNvPr id="19" name="SP"/>
+          <p:cNvSpPr>
+            <a:spLocks noGrp="1"/>
+          </p:cNvSpPr>
+          <p:nvPr>
+            <p:ph type="body" idx="37"/>
+          </p:nvPr>
+        </p:nvSpPr>
+        <p:spPr/>
+        <p:txBody>
+          <a:bodyPr/>
+          <a:lstStyle/>
+          <a:p>
+            <a:pPr/>
+            <a:r>
+              <a:rPr lang="th-TH" dirty="0"/>
+              <a:t>10%</a:t>
+            </a:r>
+          </a:p>
+        </p:txBody>
+      </p:sp>
+      <p:sp>
+        <p:nvSpPr>
+          <p:cNvPr id="20" name="Src"/>
           <p:cNvSpPr>
             <a:spLocks noGrp="1"/>
           </p:cNvSpPr>
@@ -35236,14 +38114,14 @@
             <a:pPr/>
             <a:r>
               <a:rPr lang="th-TH" dirty="0"/>
-              <a:t>01</a:t>
-            </a:r>
-          </a:p>
-        </p:txBody>
-      </p:sp>
-      <p:sp>
-        <p:nvSpPr>
-          <p:cNvPr id="8" name="PP"/>
+              <a:t>ใบเสนอราคา NCT-2569-041 · ปัดเป็นแสนบาท</a:t>
+            </a:r>
+          </a:p>
+        </p:txBody>
+      </p:sp>
+      <p:sp>
+        <p:nvSpPr>
+          <p:cNvPr id="21" name="TL"/>
           <p:cNvSpPr>
             <a:spLocks noGrp="1"/>
           </p:cNvSpPr>
@@ -35259,14 +38137,14 @@
             <a:pPr/>
             <a:r>
               <a:rPr lang="th-TH" dirty="0"/>
-              <a:t>Preparation Phase</a:t>
-            </a:r>
-          </a:p>
-        </p:txBody>
-      </p:sp>
-      <p:sp>
-        <p:nvSpPr>
-          <p:cNvPr id="9" name="PI"/>
+              <a:t>สรุป</a:t>
+            </a:r>
+          </a:p>
+        </p:txBody>
+      </p:sp>
+      <p:sp>
+        <p:nvSpPr>
+          <p:cNvPr id="22" name="TC"/>
           <p:cNvSpPr>
             <a:spLocks noGrp="1"/>
           </p:cNvSpPr>
@@ -35282,51 +38160,7 @@
             <a:pPr/>
             <a:r>
               <a:rPr lang="th-TH" dirty="0"/>
-              <a:t>สรุปสเปกเครื่องและบริการคลาวด์ที่ต้องเตรียมให้พร้อมก่อนเริ่มงานพัฒนา</a:t>
-            </a:r>
-          </a:p>
-        </p:txBody>
-      </p:sp>
-      <p:sp>
-        <p:nvSpPr>
-          <p:cNvPr id="10" name="PB"/>
-          <p:cNvSpPr>
-            <a:spLocks noGrp="1"/>
-          </p:cNvSpPr>
-          <p:nvPr>
-            <p:ph type="body" idx="8"/>
-          </p:nvPr>
-        </p:nvSpPr>
-        <p:spPr/>
-        <p:txBody>
-          <a:bodyPr/>
-          <a:lstStyle/>
-          <a:p>
-            <a:pPr/>
-            <a:r>
-              <a:rPr lang="th-TH" dirty="0"/>
-              <a:t>PRD · 4 คอร์ / 16GB / SSD 300GB</a:t>
-            </a:r>
-          </a:p>
-          <a:p>
-            <a:pPr/>
-            <a:r>
-              <a:rPr lang="th-TH" dirty="0"/>
-              <a:t>QA · 4 คอร์ / 16GB / SSD 150GB</a:t>
-            </a:r>
-          </a:p>
-          <a:p>
-            <a:pPr/>
-            <a:r>
-              <a:rPr lang="th-TH" dirty="0"/>
-              <a:t>Windows Server 2022 ทั้งสองเครื่อง</a:t>
-            </a:r>
-          </a:p>
-          <a:p>
-            <a:pPr/>
-            <a:r>
-              <a:rPr lang="th-TH" dirty="0"/>
-              <a:t>Lambda, EC2 และ Cognito เปิดทั้งสองสภาพแวดล้อม</a:t>
+              <a:t>ไลเซนส์กับคลาวด์รวมกันไม่ถึง 40% งบส่วนใหญ่จ่ายให้งานที่ทำครั้งเดียว</a:t>
             </a:r>
           </a:p>
         </p:txBody>
@@ -35340,6 +38174,259 @@
 </file>
 
 <file path=ppt/slides/slide23.xml><?xml version="1.0" encoding="utf-8"?>
+<p:sld xmlns:a="http://schemas.openxmlformats.org/drawingml/2006/main" xmlns:r="http://schemas.openxmlformats.org/officeDocument/2006/relationships" xmlns:p="http://schemas.openxmlformats.org/presentationml/2006/main">
+  <p:cSld name="">
+    <p:spTree>
+      <p:nvGrpSpPr>
+        <p:cNvPr id="1" name=""/>
+        <p:cNvGrpSpPr/>
+        <p:nvPr/>
+      </p:nvGrpSpPr>
+      <p:grpSpPr>
+        <a:xfrm>
+          <a:off x="0" y="0"/>
+          <a:ext cx="0" cy="0"/>
+          <a:chOff x="0" y="0"/>
+          <a:chExt cx="0" cy="0"/>
+        </a:xfrm>
+      </p:grpSpPr>
+      <p:sp>
+        <p:nvSpPr>
+          <p:cNvPr id="2" name="Title"/>
+          <p:cNvSpPr>
+            <a:spLocks noGrp="1"/>
+          </p:cNvSpPr>
+          <p:nvPr>
+            <p:ph type="title"/>
+          </p:nvPr>
+        </p:nvSpPr>
+        <p:spPr/>
+        <p:txBody>
+          <a:bodyPr/>
+          <a:lstStyle/>
+          <a:p>
+            <a:pPr/>
+            <a:r>
+              <a:rPr lang="th-TH" dirty="0"/>
+              <a:t>5. Implementation Stage</a:t>
+            </a:r>
+          </a:p>
+        </p:txBody>
+      </p:sp>
+      <p:sp>
+        <p:nvSpPr>
+          <p:cNvPr id="3" name="KAL"/>
+          <p:cNvSpPr>
+            <a:spLocks noGrp="1"/>
+          </p:cNvSpPr>
+          <p:nvPr>
+            <p:ph type="body" idx="1"/>
+          </p:nvPr>
+        </p:nvSpPr>
+        <p:spPr/>
+        <p:txBody>
+          <a:bodyPr/>
+          <a:lstStyle/>
+          <a:p>
+            <a:pPr/>
+            <a:r>
+              <a:rPr lang="th-TH" dirty="0"/>
+              <a:t>Key Activity :</a:t>
+            </a:r>
+          </a:p>
+        </p:txBody>
+      </p:sp>
+      <p:sp>
+        <p:nvSpPr>
+          <p:cNvPr id="4" name="KAV"/>
+          <p:cNvSpPr>
+            <a:spLocks noGrp="1"/>
+          </p:cNvSpPr>
+          <p:nvPr>
+            <p:ph type="body" idx="2"/>
+          </p:nvPr>
+        </p:nvSpPr>
+        <p:spPr/>
+        <p:txBody>
+          <a:bodyPr/>
+          <a:lstStyle/>
+          <a:p>
+            <a:pPr/>
+            <a:r>
+              <a:rPr lang="th-TH" dirty="0"/>
+              <a:t>ตั้งค่าสภาพแวดล้อม ติดตั้งฮาร์ดแวร์และซอฟต์แวร์</a:t>
+            </a:r>
+          </a:p>
+        </p:txBody>
+      </p:sp>
+      <p:sp>
+        <p:nvSpPr>
+          <p:cNvPr id="5" name="PL"/>
+          <p:cNvSpPr>
+            <a:spLocks noGrp="1"/>
+          </p:cNvSpPr>
+          <p:nvPr>
+            <p:ph type="body" idx="3"/>
+          </p:nvPr>
+        </p:nvSpPr>
+        <p:spPr/>
+        <p:txBody>
+          <a:bodyPr/>
+          <a:lstStyle/>
+          <a:p>
+            <a:pPr/>
+            <a:r>
+              <a:rPr lang="th-TH" dirty="0"/>
+              <a:t>Participant :</a:t>
+            </a:r>
+          </a:p>
+        </p:txBody>
+      </p:sp>
+      <p:sp>
+        <p:nvSpPr>
+          <p:cNvPr id="6" name="PV"/>
+          <p:cNvSpPr>
+            <a:spLocks noGrp="1"/>
+          </p:cNvSpPr>
+          <p:nvPr>
+            <p:ph type="body" idx="4"/>
+          </p:nvPr>
+        </p:nvSpPr>
+        <p:spPr/>
+        <p:txBody>
+          <a:bodyPr/>
+          <a:lstStyle/>
+          <a:p>
+            <a:pPr/>
+            <a:r>
+              <a:rPr lang="th-TH" dirty="0"/>
+              <a:t>NCT Infra Engineer, ทีมไอทีลูกค้า, Business Analyst</a:t>
+            </a:r>
+          </a:p>
+        </p:txBody>
+      </p:sp>
+      <p:sp>
+        <p:nvSpPr>
+          <p:cNvPr id="7" name="PN"/>
+          <p:cNvSpPr>
+            <a:spLocks noGrp="1"/>
+          </p:cNvSpPr>
+          <p:nvPr>
+            <p:ph type="body" idx="5"/>
+          </p:nvPr>
+        </p:nvSpPr>
+        <p:spPr/>
+        <p:txBody>
+          <a:bodyPr/>
+          <a:lstStyle/>
+          <a:p>
+            <a:pPr/>
+            <a:r>
+              <a:rPr lang="th-TH" dirty="0"/>
+              <a:t>01</a:t>
+            </a:r>
+          </a:p>
+        </p:txBody>
+      </p:sp>
+      <p:sp>
+        <p:nvSpPr>
+          <p:cNvPr id="8" name="PP"/>
+          <p:cNvSpPr>
+            <a:spLocks noGrp="1"/>
+          </p:cNvSpPr>
+          <p:nvPr>
+            <p:ph type="body" idx="6"/>
+          </p:nvPr>
+        </p:nvSpPr>
+        <p:spPr/>
+        <p:txBody>
+          <a:bodyPr/>
+          <a:lstStyle/>
+          <a:p>
+            <a:pPr/>
+            <a:r>
+              <a:rPr lang="th-TH" dirty="0"/>
+              <a:t>Preparation Phase</a:t>
+            </a:r>
+          </a:p>
+        </p:txBody>
+      </p:sp>
+      <p:sp>
+        <p:nvSpPr>
+          <p:cNvPr id="9" name="PI"/>
+          <p:cNvSpPr>
+            <a:spLocks noGrp="1"/>
+          </p:cNvSpPr>
+          <p:nvPr>
+            <p:ph type="body" idx="7"/>
+          </p:nvPr>
+        </p:nvSpPr>
+        <p:spPr/>
+        <p:txBody>
+          <a:bodyPr/>
+          <a:lstStyle/>
+          <a:p>
+            <a:pPr/>
+            <a:r>
+              <a:rPr lang="th-TH" dirty="0"/>
+              <a:t>สรุปสเปกเครื่องและบริการคลาวด์ที่ต้องเตรียมให้พร้อมก่อนเริ่มงานพัฒนา</a:t>
+            </a:r>
+          </a:p>
+        </p:txBody>
+      </p:sp>
+      <p:sp>
+        <p:nvSpPr>
+          <p:cNvPr id="10" name="PB"/>
+          <p:cNvSpPr>
+            <a:spLocks noGrp="1"/>
+          </p:cNvSpPr>
+          <p:nvPr>
+            <p:ph type="body" idx="8"/>
+          </p:nvPr>
+        </p:nvSpPr>
+        <p:spPr/>
+        <p:txBody>
+          <a:bodyPr/>
+          <a:lstStyle/>
+          <a:p>
+            <a:pPr/>
+            <a:r>
+              <a:rPr lang="th-TH" dirty="0"/>
+              <a:t>PRD · 4 คอร์ / 16GB / SSD 300GB</a:t>
+            </a:r>
+          </a:p>
+          <a:p>
+            <a:pPr/>
+            <a:r>
+              <a:rPr lang="th-TH" dirty="0"/>
+              <a:t>QA · 4 คอร์ / 16GB / SSD 150GB</a:t>
+            </a:r>
+          </a:p>
+          <a:p>
+            <a:pPr/>
+            <a:r>
+              <a:rPr lang="th-TH" dirty="0"/>
+              <a:t>Windows Server 2022 ทั้งสองเครื่อง</a:t>
+            </a:r>
+          </a:p>
+          <a:p>
+            <a:pPr/>
+            <a:r>
+              <a:rPr lang="th-TH" dirty="0"/>
+              <a:t>Lambda, EC2 และ Cognito เปิดทั้งสองสภาพแวดล้อม</a:t>
+            </a:r>
+          </a:p>
+        </p:txBody>
+      </p:sp>
+    </p:spTree>
+  </p:cSld>
+  <p:clrMapOvr>
+    <a:masterClrMapping/>
+  </p:clrMapOvr>
+</p:sld>
+</file>
+
+<file path=ppt/slides/slide24.xml><?xml version="1.0" encoding="utf-8"?>
 <p:sld xmlns:a="http://schemas.openxmlformats.org/drawingml/2006/main" xmlns:r="http://schemas.openxmlformats.org/officeDocument/2006/relationships" xmlns:p="http://schemas.openxmlformats.org/presentationml/2006/main">
   <p:cSld name="">
     <p:spTree>
@@ -35825,7 +38912,7 @@
 </p:sld>
 </file>
 
-<file path=ppt/slides/slide24.xml><?xml version="1.0" encoding="utf-8"?>
+<file path=ppt/slides/slide25.xml><?xml version="1.0" encoding="utf-8"?>
 <p:sld xmlns:a="http://schemas.openxmlformats.org/drawingml/2006/main" xmlns:r="http://schemas.openxmlformats.org/officeDocument/2006/relationships" xmlns:p="http://schemas.openxmlformats.org/presentationml/2006/main">
   <p:cSld name="">
     <p:spTree>
@@ -36437,7 +39524,7 @@
 </p:sld>
 </file>
 
-<file path=ppt/slides/slide25.xml><?xml version="1.0" encoding="utf-8"?>
+<file path=ppt/slides/slide26.xml><?xml version="1.0" encoding="utf-8"?>
 <p:sld xmlns:a="http://schemas.openxmlformats.org/drawingml/2006/main" xmlns:r="http://schemas.openxmlformats.org/officeDocument/2006/relationships" xmlns:p="http://schemas.openxmlformats.org/presentationml/2006/main">
   <p:cSld name="">
     <p:spTree>

--- a/NCT-Slide-Template-Corp-Demo.pptx
+++ b/NCT-Slide-Template-Corp-Demo.pptx
@@ -26148,7 +26148,7 @@
         <p:spPr>
           <a:xfrm>
             <a:off x="914400" y="1691640"/>
-            <a:ext cx="10363200" cy="4343400"/>
+            <a:ext cx="10363200" cy="3749040"/>
           </a:xfrm>
           <a:prstGeom prst="rect">
             <a:avLst/>
@@ -26303,6 +26303,128 @@
                 <a:cs typeface="+mn-cs"/>
               </a:rPr>
               <a:t>ระดับที่สาม</a:t>
+            </a:r>
+          </a:p>
+        </p:txBody>
+      </p:sp>
+      <p:sp>
+        <p:nvSpPr>
+          <p:cNvPr id="13" name="Takeaway Label"/>
+          <p:cNvSpPr>
+            <a:spLocks noGrp="1"/>
+          </p:cNvSpPr>
+          <p:nvPr>
+            <p:ph type="body" idx="2"/>
+          </p:nvPr>
+        </p:nvSpPr>
+        <p:spPr>
+          <a:xfrm>
+            <a:off x="914400" y="5623560"/>
+            <a:ext cx="2011680" cy="411480"/>
+          </a:xfrm>
+          <a:prstGeom prst="rect">
+            <a:avLst/>
+          </a:prstGeom>
+          <a:solidFill>
+            <a:srgbClr val="E8F6F5"/>
+          </a:solidFill>
+        </p:spPr>
+        <p:txBody>
+          <a:bodyPr wrap="square" anchor="ctr" lIns="182880" tIns="0" rIns="91440" bIns="0" rtlCol="0"/>
+          <a:lstStyle>
+            <a:lvl1pPr algn="l" marL="0" indent="0">
+              <a:lnSpc>
+                <a:spcPct val="100000"/>
+              </a:lnSpc>
+              <a:buNone/>
+              <a:defRPr lang="th-TH" sz="1200" b="1" spc="120" dirty="0">
+                <a:solidFill>
+                  <a:srgbClr val="216B7F"/>
+                </a:solidFill>
+                <a:latin typeface="+mn-lt"/>
+                <a:ea typeface="+mn-ea"/>
+                <a:cs typeface="+mn-cs"/>
+              </a:defRPr>
+            </a:lvl1pPr>
+          </a:lstStyle>
+          <a:p>
+            <a:pPr algn="l" marL="0" indent="0">
+              <a:lnSpc>
+                <a:spcPct val="100000"/>
+              </a:lnSpc>
+              <a:buNone/>
+            </a:pPr>
+            <a:r>
+              <a:rPr lang="th-TH" sz="1200" b="1" spc="120" dirty="0">
+                <a:solidFill>
+                  <a:srgbClr val="216B7F"/>
+                </a:solidFill>
+                <a:latin typeface="+mn-lt"/>
+                <a:ea typeface="+mn-ea"/>
+                <a:cs typeface="+mn-cs"/>
+              </a:rPr>
+              <a:t>สรุป</a:t>
+            </a:r>
+          </a:p>
+        </p:txBody>
+      </p:sp>
+      <p:sp>
+        <p:nvSpPr>
+          <p:cNvPr id="14" name="Takeaway Copy"/>
+          <p:cNvSpPr>
+            <a:spLocks noGrp="1"/>
+          </p:cNvSpPr>
+          <p:nvPr>
+            <p:ph type="body" idx="3"/>
+          </p:nvPr>
+        </p:nvSpPr>
+        <p:spPr>
+          <a:xfrm>
+            <a:off x="2926080" y="5623560"/>
+            <a:ext cx="8351520" cy="411480"/>
+          </a:xfrm>
+          <a:prstGeom prst="rect">
+            <a:avLst/>
+          </a:prstGeom>
+          <a:solidFill>
+            <a:srgbClr val="E8F6F5"/>
+          </a:solidFill>
+        </p:spPr>
+        <p:txBody>
+          <a:bodyPr wrap="square" anchor="ctr" lIns="0" tIns="0" rIns="182880" bIns="0" rtlCol="0"/>
+          <a:lstStyle>
+            <a:lvl1pPr algn="l" marL="0" indent="0">
+              <a:lnSpc>
+                <a:spcPct val="100000"/>
+              </a:lnSpc>
+              <a:buNone/>
+              <a:defRPr lang="th-TH" sz="1400" dirty="0">
+                <a:solidFill>
+                  <a:srgbClr val="333333"/>
+                </a:solidFill>
+                <a:latin typeface="+mn-lt"/>
+                <a:ea typeface="+mn-ea"/>
+                <a:cs typeface="+mn-cs"/>
+              </a:defRPr>
+            </a:lvl1pPr>
+          </a:lstStyle>
+          <a:p>
+            <a:pPr algn="l" marL="0" indent="0">
+              <a:lnSpc>
+                <a:spcPct val="100000"/>
+              </a:lnSpc>
+              <a:buNone/>
+            </a:pPr>
+            <a:r>
+              <a:rPr lang="th-TH" sz="1400" dirty="0">
+                <a:solidFill>
+                  <a:srgbClr val="333333"/>
+                </a:solidFill>
+                <a:latin typeface="+mn-lt"/>
+                <a:ea typeface="+mn-ea"/>
+                <a:cs typeface="+mn-cs"/>
+              </a:rPr>
+              <a:t>ประเด็นสรุปหนึ่งบรรทัด (ไม่ใส่ก็ได้)</a:t>
             </a:r>
           </a:p>
         </p:txBody>
@@ -28051,6 +28173,128 @@
       </p:sp>
       <p:sp>
         <p:nvSpPr>
+          <p:cNvPr id="24" name="Takeaway Label"/>
+          <p:cNvSpPr>
+            <a:spLocks noGrp="1"/>
+          </p:cNvSpPr>
+          <p:nvPr>
+            <p:ph type="body" idx="7"/>
+          </p:nvPr>
+        </p:nvSpPr>
+        <p:spPr>
+          <a:xfrm>
+            <a:off x="914400" y="5623560"/>
+            <a:ext cx="2011680" cy="411480"/>
+          </a:xfrm>
+          <a:prstGeom prst="rect">
+            <a:avLst/>
+          </a:prstGeom>
+          <a:solidFill>
+            <a:srgbClr val="E8F6F5"/>
+          </a:solidFill>
+        </p:spPr>
+        <p:txBody>
+          <a:bodyPr wrap="square" anchor="ctr" lIns="182880" tIns="0" rIns="91440" bIns="0" rtlCol="0"/>
+          <a:lstStyle>
+            <a:lvl1pPr algn="l" marL="0" indent="0">
+              <a:lnSpc>
+                <a:spcPct val="100000"/>
+              </a:lnSpc>
+              <a:buNone/>
+              <a:defRPr lang="th-TH" sz="1200" b="1" spc="120" dirty="0">
+                <a:solidFill>
+                  <a:srgbClr val="216B7F"/>
+                </a:solidFill>
+                <a:latin typeface="+mn-lt"/>
+                <a:ea typeface="+mn-ea"/>
+                <a:cs typeface="+mn-cs"/>
+              </a:defRPr>
+            </a:lvl1pPr>
+          </a:lstStyle>
+          <a:p>
+            <a:pPr algn="l" marL="0" indent="0">
+              <a:lnSpc>
+                <a:spcPct val="100000"/>
+              </a:lnSpc>
+              <a:buNone/>
+            </a:pPr>
+            <a:r>
+              <a:rPr lang="th-TH" sz="1200" b="1" spc="120" dirty="0">
+                <a:solidFill>
+                  <a:srgbClr val="216B7F"/>
+                </a:solidFill>
+                <a:latin typeface="+mn-lt"/>
+                <a:ea typeface="+mn-ea"/>
+                <a:cs typeface="+mn-cs"/>
+              </a:rPr>
+              <a:t>สรุป</a:t>
+            </a:r>
+          </a:p>
+        </p:txBody>
+      </p:sp>
+      <p:sp>
+        <p:nvSpPr>
+          <p:cNvPr id="25" name="Takeaway Copy"/>
+          <p:cNvSpPr>
+            <a:spLocks noGrp="1"/>
+          </p:cNvSpPr>
+          <p:nvPr>
+            <p:ph type="body" idx="8"/>
+          </p:nvPr>
+        </p:nvSpPr>
+        <p:spPr>
+          <a:xfrm>
+            <a:off x="2926080" y="5623560"/>
+            <a:ext cx="8351520" cy="411480"/>
+          </a:xfrm>
+          <a:prstGeom prst="rect">
+            <a:avLst/>
+          </a:prstGeom>
+          <a:solidFill>
+            <a:srgbClr val="E8F6F5"/>
+          </a:solidFill>
+        </p:spPr>
+        <p:txBody>
+          <a:bodyPr wrap="square" anchor="ctr" lIns="0" tIns="0" rIns="182880" bIns="0" rtlCol="0"/>
+          <a:lstStyle>
+            <a:lvl1pPr algn="l" marL="0" indent="0">
+              <a:lnSpc>
+                <a:spcPct val="100000"/>
+              </a:lnSpc>
+              <a:buNone/>
+              <a:defRPr lang="th-TH" sz="1400" dirty="0">
+                <a:solidFill>
+                  <a:srgbClr val="333333"/>
+                </a:solidFill>
+                <a:latin typeface="+mn-lt"/>
+                <a:ea typeface="+mn-ea"/>
+                <a:cs typeface="+mn-cs"/>
+              </a:defRPr>
+            </a:lvl1pPr>
+          </a:lstStyle>
+          <a:p>
+            <a:pPr algn="l" marL="0" indent="0">
+              <a:lnSpc>
+                <a:spcPct val="100000"/>
+              </a:lnSpc>
+              <a:buNone/>
+            </a:pPr>
+            <a:r>
+              <a:rPr lang="th-TH" sz="1400" dirty="0">
+                <a:solidFill>
+                  <a:srgbClr val="333333"/>
+                </a:solidFill>
+                <a:latin typeface="+mn-lt"/>
+                <a:ea typeface="+mn-ea"/>
+                <a:cs typeface="+mn-cs"/>
+              </a:rPr>
+              <a:t>ประเด็นสรุปหนึ่งบรรทัด (ไม่ใส่ก็ได้)</a:t>
+            </a:r>
+          </a:p>
+        </p:txBody>
+      </p:sp>
+      <p:sp>
+        <p:nvSpPr>
           <p:cNvPr id="90" name="Foot Bar 1"/>
           <p:cNvSpPr/>
           <p:nvPr/>
@@ -28877,6 +29121,128 @@
                 <a:cs typeface="+mn-cs"/>
               </a:rPr>
               <a:t>ที่มาของข้อมูล / หมายเหตุ</a:t>
+            </a:r>
+          </a:p>
+        </p:txBody>
+      </p:sp>
+      <p:sp>
+        <p:nvSpPr>
+          <p:cNvPr id="21" name="Takeaway Label"/>
+          <p:cNvSpPr>
+            <a:spLocks noGrp="1"/>
+          </p:cNvSpPr>
+          <p:nvPr>
+            <p:ph type="body" idx="8"/>
+          </p:nvPr>
+        </p:nvSpPr>
+        <p:spPr>
+          <a:xfrm>
+            <a:off x="914400" y="5623560"/>
+            <a:ext cx="2011680" cy="411480"/>
+          </a:xfrm>
+          <a:prstGeom prst="rect">
+            <a:avLst/>
+          </a:prstGeom>
+          <a:solidFill>
+            <a:srgbClr val="E8F6F5"/>
+          </a:solidFill>
+        </p:spPr>
+        <p:txBody>
+          <a:bodyPr wrap="square" anchor="ctr" lIns="182880" tIns="0" rIns="91440" bIns="0" rtlCol="0"/>
+          <a:lstStyle>
+            <a:lvl1pPr algn="l" marL="0" indent="0">
+              <a:lnSpc>
+                <a:spcPct val="100000"/>
+              </a:lnSpc>
+              <a:buNone/>
+              <a:defRPr lang="th-TH" sz="1200" b="1" spc="120" dirty="0">
+                <a:solidFill>
+                  <a:srgbClr val="216B7F"/>
+                </a:solidFill>
+                <a:latin typeface="+mn-lt"/>
+                <a:ea typeface="+mn-ea"/>
+                <a:cs typeface="+mn-cs"/>
+              </a:defRPr>
+            </a:lvl1pPr>
+          </a:lstStyle>
+          <a:p>
+            <a:pPr algn="l" marL="0" indent="0">
+              <a:lnSpc>
+                <a:spcPct val="100000"/>
+              </a:lnSpc>
+              <a:buNone/>
+            </a:pPr>
+            <a:r>
+              <a:rPr lang="th-TH" sz="1200" b="1" spc="120" dirty="0">
+                <a:solidFill>
+                  <a:srgbClr val="216B7F"/>
+                </a:solidFill>
+                <a:latin typeface="+mn-lt"/>
+                <a:ea typeface="+mn-ea"/>
+                <a:cs typeface="+mn-cs"/>
+              </a:rPr>
+              <a:t>สรุป</a:t>
+            </a:r>
+          </a:p>
+        </p:txBody>
+      </p:sp>
+      <p:sp>
+        <p:nvSpPr>
+          <p:cNvPr id="22" name="Takeaway Copy"/>
+          <p:cNvSpPr>
+            <a:spLocks noGrp="1"/>
+          </p:cNvSpPr>
+          <p:nvPr>
+            <p:ph type="body" idx="9"/>
+          </p:nvPr>
+        </p:nvSpPr>
+        <p:spPr>
+          <a:xfrm>
+            <a:off x="2926080" y="5623560"/>
+            <a:ext cx="8351520" cy="411480"/>
+          </a:xfrm>
+          <a:prstGeom prst="rect">
+            <a:avLst/>
+          </a:prstGeom>
+          <a:solidFill>
+            <a:srgbClr val="E8F6F5"/>
+          </a:solidFill>
+        </p:spPr>
+        <p:txBody>
+          <a:bodyPr wrap="square" anchor="ctr" lIns="0" tIns="0" rIns="182880" bIns="0" rtlCol="0"/>
+          <a:lstStyle>
+            <a:lvl1pPr algn="l" marL="0" indent="0">
+              <a:lnSpc>
+                <a:spcPct val="100000"/>
+              </a:lnSpc>
+              <a:buNone/>
+              <a:defRPr lang="th-TH" sz="1400" dirty="0">
+                <a:solidFill>
+                  <a:srgbClr val="333333"/>
+                </a:solidFill>
+                <a:latin typeface="+mn-lt"/>
+                <a:ea typeface="+mn-ea"/>
+                <a:cs typeface="+mn-cs"/>
+              </a:defRPr>
+            </a:lvl1pPr>
+          </a:lstStyle>
+          <a:p>
+            <a:pPr algn="l" marL="0" indent="0">
+              <a:lnSpc>
+                <a:spcPct val="100000"/>
+              </a:lnSpc>
+              <a:buNone/>
+            </a:pPr>
+            <a:r>
+              <a:rPr lang="th-TH" sz="1400" dirty="0">
+                <a:solidFill>
+                  <a:srgbClr val="333333"/>
+                </a:solidFill>
+                <a:latin typeface="+mn-lt"/>
+                <a:ea typeface="+mn-ea"/>
+                <a:cs typeface="+mn-cs"/>
+              </a:rPr>
+              <a:t>ประเด็นสรุปหนึ่งบรรทัด (ไม่ใส่ก็ได้)</a:t>
             </a:r>
           </a:p>
         </p:txBody>
@@ -34427,6 +34793,52 @@
           </a:p>
         </p:txBody>
       </p:sp>
+      <p:sp>
+        <p:nvSpPr>
+          <p:cNvPr id="9" name="TkL"/>
+          <p:cNvSpPr>
+            <a:spLocks noGrp="1"/>
+          </p:cNvSpPr>
+          <p:nvPr>
+            <p:ph type="body" idx="7"/>
+          </p:nvPr>
+        </p:nvSpPr>
+        <p:spPr/>
+        <p:txBody>
+          <a:bodyPr/>
+          <a:lstStyle/>
+          <a:p>
+            <a:pPr/>
+            <a:r>
+              <a:rPr lang="th-TH" dirty="0"/>
+              <a:t>สรุป</a:t>
+            </a:r>
+          </a:p>
+        </p:txBody>
+      </p:sp>
+      <p:sp>
+        <p:nvSpPr>
+          <p:cNvPr id="10" name="TkC"/>
+          <p:cNvSpPr>
+            <a:spLocks noGrp="1"/>
+          </p:cNvSpPr>
+          <p:nvPr>
+            <p:ph type="body" idx="8"/>
+          </p:nvPr>
+        </p:nvSpPr>
+        <p:spPr/>
+        <p:txBody>
+          <a:bodyPr/>
+          <a:lstStyle/>
+          <a:p>
+            <a:pPr/>
+            <a:r>
+              <a:rPr lang="th-TH" dirty="0"/>
+              <a:t>ทีมเดียวดูแลครบทั้งสามด้าน ไม่ต้องประสานผู้รับจ้างหลายราย</a:t>
+            </a:r>
+          </a:p>
+        </p:txBody>
+      </p:sp>
     </p:spTree>
   </p:cSld>
   <p:clrMapOvr>
@@ -34632,6 +35044,52 @@
             <a:r>
               <a:rPr lang="th-TH" dirty="0"/>
               <a:t>ข้อมูล ณ ไตรมาส 1 ปี 2569</a:t>
+            </a:r>
+          </a:p>
+        </p:txBody>
+      </p:sp>
+      <p:sp>
+        <p:nvSpPr>
+          <p:cNvPr id="10" name="TkL"/>
+          <p:cNvSpPr>
+            <a:spLocks noGrp="1"/>
+          </p:cNvSpPr>
+          <p:nvPr>
+            <p:ph type="body" idx="8"/>
+          </p:nvPr>
+        </p:nvSpPr>
+        <p:spPr/>
+        <p:txBody>
+          <a:bodyPr/>
+          <a:lstStyle/>
+          <a:p>
+            <a:pPr/>
+            <a:r>
+              <a:rPr lang="th-TH" dirty="0"/>
+              <a:t>สรุป</a:t>
+            </a:r>
+          </a:p>
+        </p:txBody>
+      </p:sp>
+      <p:sp>
+        <p:nvSpPr>
+          <p:cNvPr id="11" name="TkC"/>
+          <p:cNvSpPr>
+            <a:spLocks noGrp="1"/>
+          </p:cNvSpPr>
+          <p:nvPr>
+            <p:ph type="body" idx="9"/>
+          </p:nvPr>
+        </p:nvSpPr>
+        <p:spPr/>
+        <p:txBody>
+          <a:bodyPr/>
+          <a:lstStyle/>
+          <a:p>
+            <a:pPr/>
+            <a:r>
+              <a:rPr lang="th-TH" dirty="0"/>
+              <a:t>ระบบที่เราดูแลหยุดรวมไม่ถึง 9 ชั่วโมงต่อปี</a:t>
             </a:r>
           </a:p>
         </p:txBody>

--- a/NCT-Slide-Template-Corp-Demo.pptx
+++ b/NCT-Slide-Template-Corp-Demo.pptx
@@ -2910,8 +2910,8 @@
         </p:nvSpPr>
         <p:spPr>
           <a:xfrm>
-            <a:off x="914400" y="3715200"/>
-            <a:ext cx="10363200" cy="2057400"/>
+            <a:off x="2971800" y="3715200"/>
+            <a:ext cx="6248400" cy="2057400"/>
           </a:xfrm>
           <a:prstGeom prst="rect">
             <a:avLst/>
@@ -2968,8 +2968,8 @@
         </p:nvSpPr>
         <p:spPr>
           <a:xfrm>
-            <a:off x="914400" y="5909760"/>
-            <a:ext cx="10363200" cy="457200"/>
+            <a:off x="2971800" y="5909760"/>
+            <a:ext cx="6248400" cy="457200"/>
           </a:xfrm>
           <a:prstGeom prst="rect">
             <a:avLst/>
@@ -3356,7 +3356,7 @@
         </p:nvSpPr>
         <p:spPr>
           <a:xfrm>
-            <a:off x="914400" y="1554480"/>
+            <a:off x="914400" y="1280160"/>
             <a:ext cx="6217920" cy="1188720"/>
           </a:xfrm>
           <a:prstGeom prst="rect">
@@ -3410,7 +3410,7 @@
         </p:nvSpPr>
         <p:spPr>
           <a:xfrm>
-            <a:off x="914400" y="2926080"/>
+            <a:off x="914400" y="2651760"/>
             <a:ext cx="548640" cy="45720"/>
           </a:xfrm>
           <a:prstGeom prst="rect">
@@ -3445,7 +3445,7 @@
         </p:nvSpPr>
         <p:spPr>
           <a:xfrm>
-            <a:off x="914400" y="3200400"/>
+            <a:off x="914400" y="2926080"/>
             <a:ext cx="2743200" cy="228600"/>
           </a:xfrm>
           <a:prstGeom prst="rect">
@@ -3460,7 +3460,7 @@
                 <a:spcPct val="100000"/>
               </a:lnSpc>
               <a:buNone/>
-              <a:defRPr lang="th-TH" sz="1200" b="1" spc="120" dirty="0">
+              <a:defRPr lang="th-TH" sz="1200" b="1" dirty="0">
                 <a:solidFill>
                   <a:srgbClr val="FFFFFF">
                     <a:alpha val="80000"/>
@@ -3480,7 +3480,7 @@
               <a:buNone/>
             </a:pPr>
             <a:r>
-              <a:rPr lang="th-TH" sz="1200" b="1" spc="120" dirty="0">
+              <a:rPr lang="th-TH" sz="1200" b="1" dirty="0">
                 <a:solidFill>
                   <a:srgbClr val="FFFFFF">
                     <a:alpha val="80000"/>
@@ -3507,7 +3507,7 @@
         </p:nvSpPr>
         <p:spPr>
           <a:xfrm>
-            <a:off x="914400" y="3474720"/>
+            <a:off x="914400" y="3200400"/>
             <a:ext cx="5486400" cy="1188720"/>
           </a:xfrm>
           <a:prstGeom prst="rect">
@@ -3585,8 +3585,8 @@
         </p:nvSpPr>
         <p:spPr>
           <a:xfrm>
-            <a:off x="914400" y="4709160"/>
-            <a:ext cx="5486400" cy="457200"/>
+            <a:off x="914400" y="4434840"/>
+            <a:ext cx="5486400" cy="731520"/>
           </a:xfrm>
           <a:prstGeom prst="rect">
             <a:avLst/>
@@ -4539,7 +4539,7 @@
                 <a:spcPct val="100000"/>
               </a:lnSpc>
               <a:buNone/>
-              <a:defRPr lang="th-TH" sz="1200" b="1" spc="120" dirty="0">
+              <a:defRPr lang="th-TH" sz="1200" b="1" dirty="0">
                 <a:solidFill>
                   <a:srgbClr val="216B7F"/>
                 </a:solidFill>
@@ -4557,7 +4557,7 @@
               <a:buNone/>
             </a:pPr>
             <a:r>
-              <a:rPr lang="th-TH" sz="1200" b="1" spc="120" dirty="0">
+              <a:rPr lang="th-TH" sz="1200" b="1" dirty="0">
                 <a:solidFill>
                   <a:srgbClr val="216B7F"/>
                 </a:solidFill>
@@ -6004,7 +6004,7 @@
                 <a:spcPct val="100000"/>
               </a:lnSpc>
               <a:buNone/>
-              <a:defRPr lang="th-TH" sz="1200" b="1" spc="120" dirty="0">
+              <a:defRPr lang="th-TH" sz="1200" b="1" dirty="0">
                 <a:solidFill>
                   <a:srgbClr val="8FBACE"/>
                 </a:solidFill>
@@ -6022,7 +6022,7 @@
               <a:buNone/>
             </a:pPr>
             <a:r>
-              <a:rPr lang="th-TH" sz="1200" b="1" spc="120" dirty="0">
+              <a:rPr lang="th-TH" sz="1200" b="1" dirty="0">
                 <a:solidFill>
                   <a:srgbClr val="8FBACE"/>
                 </a:solidFill>
@@ -7851,7 +7851,7 @@
                 <a:spcPct val="100000"/>
               </a:lnSpc>
               <a:buNone/>
-              <a:defRPr lang="th-TH" sz="1200" b="1" spc="120" dirty="0">
+              <a:defRPr lang="th-TH" sz="1200" b="1" dirty="0">
                 <a:solidFill>
                   <a:srgbClr val="216B7F"/>
                 </a:solidFill>
@@ -7869,7 +7869,7 @@
               <a:buNone/>
             </a:pPr>
             <a:r>
-              <a:rPr lang="th-TH" sz="1200" b="1" spc="120" dirty="0">
+              <a:rPr lang="th-TH" sz="1200" b="1" dirty="0">
                 <a:solidFill>
                   <a:srgbClr val="216B7F"/>
                 </a:solidFill>
@@ -8480,7 +8480,7 @@
                 <a:spcPct val="100000"/>
               </a:lnSpc>
               <a:buNone/>
-              <a:defRPr lang="th-TH" sz="1200" b="1" spc="120" dirty="0">
+              <a:defRPr lang="th-TH" sz="1200" b="1" dirty="0">
                 <a:solidFill>
                   <a:srgbClr val="216B7F"/>
                 </a:solidFill>
@@ -8498,7 +8498,7 @@
               <a:buNone/>
             </a:pPr>
             <a:r>
-              <a:rPr lang="th-TH" sz="1200" b="1" spc="120" dirty="0">
+              <a:rPr lang="th-TH" sz="1200" b="1" dirty="0">
                 <a:solidFill>
                   <a:srgbClr val="216B7F"/>
                 </a:solidFill>
@@ -9949,7 +9949,7 @@
                 <a:spcPct val="100000"/>
               </a:lnSpc>
               <a:buNone/>
-              <a:defRPr lang="th-TH" sz="1200" b="1" spc="120" dirty="0">
+              <a:defRPr lang="th-TH" sz="1200" b="1" dirty="0">
                 <a:solidFill>
                   <a:srgbClr val="216B7F"/>
                 </a:solidFill>
@@ -9967,7 +9967,7 @@
               <a:buNone/>
             </a:pPr>
             <a:r>
-              <a:rPr lang="th-TH" sz="1200" b="1" spc="120" dirty="0">
+              <a:rPr lang="th-TH" sz="1200" b="1" dirty="0">
                 <a:solidFill>
                   <a:srgbClr val="216B7F"/>
                 </a:solidFill>
@@ -11587,7 +11587,7 @@
                 <a:spcPct val="100000"/>
               </a:lnSpc>
               <a:buNone/>
-              <a:defRPr lang="th-TH" sz="1200" b="1" spc="120" dirty="0">
+              <a:defRPr lang="th-TH" sz="1200" b="1" dirty="0">
                 <a:solidFill>
                   <a:srgbClr val="8FBACE"/>
                 </a:solidFill>
@@ -11605,7 +11605,7 @@
               <a:buNone/>
             </a:pPr>
             <a:r>
-              <a:rPr lang="th-TH" sz="1200" b="1" spc="120" dirty="0">
+              <a:rPr lang="th-TH" sz="1200" b="1" dirty="0">
                 <a:solidFill>
                   <a:srgbClr val="8FBACE"/>
                 </a:solidFill>
@@ -12582,7 +12582,7 @@
                 <a:spcPct val="130000"/>
               </a:lnSpc>
               <a:buNone/>
-              <a:defRPr lang="th-TH" sz="1200" b="1" spc="120" dirty="0">
+              <a:defRPr lang="th-TH" sz="1200" b="1" dirty="0">
                 <a:solidFill>
                   <a:srgbClr val="5F5F5F"/>
                 </a:solidFill>
@@ -12600,7 +12600,7 @@
               <a:buNone/>
             </a:pPr>
             <a:r>
-              <a:rPr lang="th-TH" sz="1200" b="1" spc="120" dirty="0">
+              <a:rPr lang="th-TH" sz="1200" b="1" dirty="0">
                 <a:solidFill>
                   <a:srgbClr val="5F5F5F"/>
                 </a:solidFill>
@@ -12801,7 +12801,7 @@
                 <a:spcPct val="100000"/>
               </a:lnSpc>
               <a:buNone/>
-              <a:defRPr lang="th-TH" sz="1200" b="1" spc="120" dirty="0">
+              <a:defRPr lang="th-TH" sz="1200" b="1" dirty="0">
                 <a:solidFill>
                   <a:srgbClr val="216B7F"/>
                 </a:solidFill>
@@ -12819,7 +12819,7 @@
               <a:buNone/>
             </a:pPr>
             <a:r>
-              <a:rPr lang="th-TH" sz="1200" b="1" spc="120" dirty="0">
+              <a:rPr lang="th-TH" sz="1200" b="1" dirty="0">
                 <a:solidFill>
                   <a:srgbClr val="216B7F"/>
                 </a:solidFill>
@@ -16182,7 +16182,7 @@
                 <a:spcPct val="100000"/>
               </a:lnSpc>
               <a:buNone/>
-              <a:defRPr lang="th-TH" sz="1200" b="1" spc="120" dirty="0">
+              <a:defRPr lang="th-TH" sz="1200" b="1" dirty="0">
                 <a:solidFill>
                   <a:srgbClr val="216B7F"/>
                 </a:solidFill>
@@ -16200,7 +16200,7 @@
               <a:buNone/>
             </a:pPr>
             <a:r>
-              <a:rPr lang="th-TH" sz="1200" b="1" spc="120" dirty="0">
+              <a:rPr lang="th-TH" sz="1200" b="1" dirty="0">
                 <a:solidFill>
                   <a:srgbClr val="216B7F"/>
                 </a:solidFill>
@@ -16724,7 +16724,7 @@
                 <a:spcPct val="130000"/>
               </a:lnSpc>
               <a:buNone/>
-              <a:defRPr lang="th-TH" sz="1200" b="1" spc="120" dirty="0">
+              <a:defRPr lang="th-TH" sz="1200" b="1" dirty="0">
                 <a:solidFill>
                   <a:srgbClr val="5F5F5F"/>
                 </a:solidFill>
@@ -16742,7 +16742,7 @@
               <a:buNone/>
             </a:pPr>
             <a:r>
-              <a:rPr lang="th-TH" sz="1200" b="1" spc="120" dirty="0">
+              <a:rPr lang="th-TH" sz="1200" b="1" dirty="0">
                 <a:solidFill>
                   <a:srgbClr val="5F5F5F"/>
                 </a:solidFill>
@@ -18135,7 +18135,7 @@
                 <a:spcPct val="100000"/>
               </a:lnSpc>
               <a:buNone/>
-              <a:defRPr lang="th-TH" sz="1200" b="1" spc="120" dirty="0">
+              <a:defRPr lang="th-TH" sz="1200" b="1" dirty="0">
                 <a:solidFill>
                   <a:srgbClr val="216B7F"/>
                 </a:solidFill>
@@ -18153,7 +18153,7 @@
               <a:buNone/>
             </a:pPr>
             <a:r>
-              <a:rPr lang="th-TH" sz="1200" b="1" spc="120" dirty="0">
+              <a:rPr lang="th-TH" sz="1200" b="1" dirty="0">
                 <a:solidFill>
                   <a:srgbClr val="216B7F"/>
                 </a:solidFill>
@@ -18648,7 +18648,7 @@
                 <a:spcPct val="130000"/>
               </a:lnSpc>
               <a:buNone/>
-              <a:defRPr lang="th-TH" sz="1200" b="1" spc="120" dirty="0">
+              <a:defRPr lang="th-TH" sz="1200" b="1" dirty="0">
                 <a:solidFill>
                   <a:srgbClr val="5F5F5F"/>
                 </a:solidFill>
@@ -18666,7 +18666,7 @@
               <a:buNone/>
             </a:pPr>
             <a:r>
-              <a:rPr lang="th-TH" sz="1200" b="1" spc="120" dirty="0">
+              <a:rPr lang="th-TH" sz="1200" b="1" dirty="0">
                 <a:solidFill>
                   <a:srgbClr val="5F5F5F"/>
                 </a:solidFill>
@@ -18851,7 +18851,7 @@
                 <a:spcPct val="130000"/>
               </a:lnSpc>
               <a:buNone/>
-              <a:defRPr lang="th-TH" sz="1200" b="1" spc="120" dirty="0">
+              <a:defRPr lang="th-TH" sz="1200" b="1" dirty="0">
                 <a:solidFill>
                   <a:srgbClr val="5F5F5F"/>
                 </a:solidFill>
@@ -18869,7 +18869,7 @@
               <a:buNone/>
             </a:pPr>
             <a:r>
-              <a:rPr lang="th-TH" sz="1200" b="1" spc="120" dirty="0">
+              <a:rPr lang="th-TH" sz="1200" b="1" dirty="0">
                 <a:solidFill>
                   <a:srgbClr val="5F5F5F"/>
                 </a:solidFill>
@@ -19054,7 +19054,7 @@
                 <a:spcPct val="130000"/>
               </a:lnSpc>
               <a:buNone/>
-              <a:defRPr lang="th-TH" sz="1200" b="1" spc="120" dirty="0">
+              <a:defRPr lang="th-TH" sz="1200" b="1" dirty="0">
                 <a:solidFill>
                   <a:srgbClr val="5F5F5F"/>
                 </a:solidFill>
@@ -19072,7 +19072,7 @@
               <a:buNone/>
             </a:pPr>
             <a:r>
-              <a:rPr lang="th-TH" sz="1200" b="1" spc="120" dirty="0">
+              <a:rPr lang="th-TH" sz="1200" b="1" dirty="0">
                 <a:solidFill>
                   <a:srgbClr val="5F5F5F"/>
                 </a:solidFill>
@@ -19363,7 +19363,7 @@
                 <a:spcPct val="100000"/>
               </a:lnSpc>
               <a:buNone/>
-              <a:defRPr lang="th-TH" sz="1200" b="1" spc="120" dirty="0">
+              <a:defRPr lang="th-TH" sz="1200" b="1" dirty="0">
                 <a:solidFill>
                   <a:srgbClr val="216B7F"/>
                 </a:solidFill>
@@ -19381,7 +19381,7 @@
               <a:buNone/>
             </a:pPr>
             <a:r>
-              <a:rPr lang="th-TH" sz="1200" b="1" spc="120" dirty="0">
+              <a:rPr lang="th-TH" sz="1200" b="1" dirty="0">
                 <a:solidFill>
                   <a:srgbClr val="216B7F"/>
                 </a:solidFill>
@@ -20910,7 +20910,7 @@
                 <a:spcPct val="100000"/>
               </a:lnSpc>
               <a:buNone/>
-              <a:defRPr lang="th-TH" sz="1200" b="1" spc="120" dirty="0">
+              <a:defRPr lang="th-TH" sz="1200" b="1" dirty="0">
                 <a:solidFill>
                   <a:srgbClr val="216B7F"/>
                 </a:solidFill>
@@ -20928,7 +20928,7 @@
               <a:buNone/>
             </a:pPr>
             <a:r>
-              <a:rPr lang="th-TH" sz="1200" b="1" spc="120" dirty="0">
+              <a:rPr lang="th-TH" sz="1200" b="1" dirty="0">
                 <a:solidFill>
                   <a:srgbClr val="216B7F"/>
                 </a:solidFill>
@@ -21423,7 +21423,7 @@
                 <a:spcPct val="100000"/>
               </a:lnSpc>
               <a:buNone/>
-              <a:defRPr lang="th-TH" sz="1200" b="1" spc="120" dirty="0">
+              <a:defRPr lang="th-TH" sz="1200" b="1" dirty="0">
                 <a:solidFill>
                   <a:srgbClr val="5F5F5F"/>
                 </a:solidFill>
@@ -21441,7 +21441,7 @@
               <a:buNone/>
             </a:pPr>
             <a:r>
-              <a:rPr lang="th-TH" sz="1200" b="1" spc="120" dirty="0">
+              <a:rPr lang="th-TH" sz="1200" b="1" dirty="0">
                 <a:solidFill>
                   <a:srgbClr val="5F5F5F"/>
                 </a:solidFill>
@@ -21836,7 +21836,7 @@
                 <a:spcPct val="100000"/>
               </a:lnSpc>
               <a:buNone/>
-              <a:defRPr lang="th-TH" sz="1200" b="1" spc="120" dirty="0">
+              <a:defRPr lang="th-TH" sz="1200" b="1" dirty="0">
                 <a:solidFill>
                   <a:srgbClr val="5F5F5F"/>
                 </a:solidFill>
@@ -21854,7 +21854,7 @@
               <a:buNone/>
             </a:pPr>
             <a:r>
-              <a:rPr lang="th-TH" sz="1200" b="1" spc="120" dirty="0">
+              <a:rPr lang="th-TH" sz="1200" b="1" dirty="0">
                 <a:solidFill>
                   <a:srgbClr val="5F5F5F"/>
                 </a:solidFill>
@@ -22191,7 +22191,7 @@
                 <a:spcPct val="100000"/>
               </a:lnSpc>
               <a:buNone/>
-              <a:defRPr lang="th-TH" sz="1200" b="1" spc="120" dirty="0">
+              <a:defRPr lang="th-TH" sz="1200" b="1" dirty="0">
                 <a:solidFill>
                   <a:srgbClr val="5F5F5F"/>
                 </a:solidFill>
@@ -22209,7 +22209,7 @@
               <a:buNone/>
             </a:pPr>
             <a:r>
-              <a:rPr lang="th-TH" sz="1200" b="1" spc="120" dirty="0">
+              <a:rPr lang="th-TH" sz="1200" b="1" dirty="0">
                 <a:solidFill>
                   <a:srgbClr val="5F5F5F"/>
                 </a:solidFill>
@@ -22546,7 +22546,7 @@
                 <a:spcPct val="100000"/>
               </a:lnSpc>
               <a:buNone/>
-              <a:defRPr lang="th-TH" sz="1200" b="1" spc="120" dirty="0">
+              <a:defRPr lang="th-TH" sz="1200" b="1" dirty="0">
                 <a:solidFill>
                   <a:srgbClr val="5F5F5F"/>
                 </a:solidFill>
@@ -22564,7 +22564,7 @@
               <a:buNone/>
             </a:pPr>
             <a:r>
-              <a:rPr lang="th-TH" sz="1200" b="1" spc="120" dirty="0">
+              <a:rPr lang="th-TH" sz="1200" b="1" dirty="0">
                 <a:solidFill>
                   <a:srgbClr val="5F5F5F"/>
                 </a:solidFill>
@@ -22901,7 +22901,7 @@
                 <a:spcPct val="100000"/>
               </a:lnSpc>
               <a:buNone/>
-              <a:defRPr lang="th-TH" sz="1200" b="1" spc="120" dirty="0">
+              <a:defRPr lang="th-TH" sz="1200" b="1" dirty="0">
                 <a:solidFill>
                   <a:srgbClr val="5F5F5F"/>
                 </a:solidFill>
@@ -22919,7 +22919,7 @@
               <a:buNone/>
             </a:pPr>
             <a:r>
-              <a:rPr lang="th-TH" sz="1200" b="1" spc="120" dirty="0">
+              <a:rPr lang="th-TH" sz="1200" b="1" dirty="0">
                 <a:solidFill>
                   <a:srgbClr val="5F5F5F"/>
                 </a:solidFill>
@@ -23285,7 +23285,7 @@
                 <a:spcPct val="100000"/>
               </a:lnSpc>
               <a:buNone/>
-              <a:defRPr lang="th-TH" sz="1200" b="1" spc="120" dirty="0">
+              <a:defRPr lang="th-TH" sz="1200" b="1" dirty="0">
                 <a:solidFill>
                   <a:srgbClr val="216B7F"/>
                 </a:solidFill>
@@ -23303,7 +23303,7 @@
               <a:buNone/>
             </a:pPr>
             <a:r>
-              <a:rPr lang="th-TH" sz="1200" b="1" spc="120" dirty="0">
+              <a:rPr lang="th-TH" sz="1200" b="1" dirty="0">
                 <a:solidFill>
                   <a:srgbClr val="216B7F"/>
                 </a:solidFill>
@@ -25678,7 +25678,7 @@
                 <a:spcPct val="100000"/>
               </a:lnSpc>
               <a:buNone/>
-              <a:defRPr lang="th-TH" sz="1200" b="1" spc="120" dirty="0">
+              <a:defRPr lang="th-TH" sz="1200" b="1" dirty="0">
                 <a:solidFill>
                   <a:srgbClr val="216B7F"/>
                 </a:solidFill>
@@ -25696,7 +25696,7 @@
               <a:buNone/>
             </a:pPr>
             <a:r>
-              <a:rPr lang="th-TH" sz="1200" b="1" spc="120" dirty="0">
+              <a:rPr lang="th-TH" sz="1200" b="1" dirty="0">
                 <a:solidFill>
                   <a:srgbClr val="216B7F"/>
                 </a:solidFill>
@@ -26337,7 +26337,7 @@
                 <a:spcPct val="100000"/>
               </a:lnSpc>
               <a:buNone/>
-              <a:defRPr lang="th-TH" sz="1200" b="1" spc="120" dirty="0">
+              <a:defRPr lang="th-TH" sz="1200" b="1" dirty="0">
                 <a:solidFill>
                   <a:srgbClr val="216B7F"/>
                 </a:solidFill>
@@ -26355,7 +26355,7 @@
               <a:buNone/>
             </a:pPr>
             <a:r>
-              <a:rPr lang="th-TH" sz="1200" b="1" spc="120" dirty="0">
+              <a:rPr lang="th-TH" sz="1200" b="1" dirty="0">
                 <a:solidFill>
                   <a:srgbClr val="216B7F"/>
                 </a:solidFill>
@@ -28201,7 +28201,7 @@
                 <a:spcPct val="100000"/>
               </a:lnSpc>
               <a:buNone/>
-              <a:defRPr lang="th-TH" sz="1200" b="1" spc="120" dirty="0">
+              <a:defRPr lang="th-TH" sz="1200" b="1" dirty="0">
                 <a:solidFill>
                   <a:srgbClr val="216B7F"/>
                 </a:solidFill>
@@ -28219,7 +28219,7 @@
               <a:buNone/>
             </a:pPr>
             <a:r>
-              <a:rPr lang="th-TH" sz="1200" b="1" spc="120" dirty="0">
+              <a:rPr lang="th-TH" sz="1200" b="1" dirty="0">
                 <a:solidFill>
                   <a:srgbClr val="216B7F"/>
                 </a:solidFill>
@@ -28746,7 +28746,7 @@
                 <a:spcPct val="130000"/>
               </a:lnSpc>
               <a:buNone/>
-              <a:defRPr lang="th-TH" sz="1200" b="1" spc="120" dirty="0">
+              <a:defRPr lang="th-TH" sz="1200" b="1" dirty="0">
                 <a:solidFill>
                   <a:srgbClr val="5F5F5F"/>
                 </a:solidFill>
@@ -28764,7 +28764,7 @@
               <a:buNone/>
             </a:pPr>
             <a:r>
-              <a:rPr lang="th-TH" sz="1200" b="1" spc="120" dirty="0">
+              <a:rPr lang="th-TH" sz="1200" b="1" dirty="0">
                 <a:solidFill>
                   <a:srgbClr val="5F5F5F"/>
                 </a:solidFill>
@@ -28891,7 +28891,7 @@
                 <a:spcPct val="130000"/>
               </a:lnSpc>
               <a:buNone/>
-              <a:defRPr lang="th-TH" sz="1200" b="1" spc="120" dirty="0">
+              <a:defRPr lang="th-TH" sz="1200" b="1" dirty="0">
                 <a:solidFill>
                   <a:srgbClr val="5F5F5F"/>
                 </a:solidFill>
@@ -28909,7 +28909,7 @@
               <a:buNone/>
             </a:pPr>
             <a:r>
-              <a:rPr lang="th-TH" sz="1200" b="1" spc="120" dirty="0">
+              <a:rPr lang="th-TH" sz="1200" b="1" dirty="0">
                 <a:solidFill>
                   <a:srgbClr val="5F5F5F"/>
                 </a:solidFill>
@@ -29036,7 +29036,7 @@
                 <a:spcPct val="130000"/>
               </a:lnSpc>
               <a:buNone/>
-              <a:defRPr lang="th-TH" sz="1200" b="1" spc="120" dirty="0">
+              <a:defRPr lang="th-TH" sz="1200" b="1" dirty="0">
                 <a:solidFill>
                   <a:srgbClr val="5F5F5F"/>
                 </a:solidFill>
@@ -29054,7 +29054,7 @@
               <a:buNone/>
             </a:pPr>
             <a:r>
-              <a:rPr lang="th-TH" sz="1200" b="1" spc="120" dirty="0">
+              <a:rPr lang="th-TH" sz="1200" b="1" dirty="0">
                 <a:solidFill>
                   <a:srgbClr val="5F5F5F"/>
                 </a:solidFill>
@@ -29155,7 +29155,7 @@
                 <a:spcPct val="100000"/>
               </a:lnSpc>
               <a:buNone/>
-              <a:defRPr lang="th-TH" sz="1200" b="1" spc="120" dirty="0">
+              <a:defRPr lang="th-TH" sz="1200" b="1" dirty="0">
                 <a:solidFill>
                   <a:srgbClr val="216B7F"/>
                 </a:solidFill>
@@ -29173,7 +29173,7 @@
               <a:buNone/>
             </a:pPr>
             <a:r>
-              <a:rPr lang="th-TH" sz="1200" b="1" spc="120" dirty="0">
+              <a:rPr lang="th-TH" sz="1200" b="1" dirty="0">
                 <a:solidFill>
                   <a:srgbClr val="216B7F"/>
                 </a:solidFill>
@@ -29724,7 +29724,7 @@
                 <a:spcPct val="130000"/>
               </a:lnSpc>
               <a:buNone/>
-              <a:defRPr lang="th-TH" sz="1400" spc="60" dirty="0">
+              <a:defRPr lang="th-TH" sz="1400" dirty="0">
                 <a:solidFill>
                   <a:srgbClr val="5F5F5F"/>
                 </a:solidFill>
@@ -29742,7 +29742,7 @@
               <a:buNone/>
             </a:pPr>
             <a:r>
-              <a:rPr lang="th-TH" sz="1400" spc="60" dirty="0">
+              <a:rPr lang="th-TH" sz="1400" dirty="0">
                 <a:solidFill>
                   <a:srgbClr val="5F5F5F"/>
                 </a:solidFill>
@@ -30728,7 +30728,7 @@
                 <a:spcPct val="100000"/>
               </a:lnSpc>
               <a:buNone/>
-              <a:defRPr lang="th-TH" sz="1200" b="1" spc="120" dirty="0">
+              <a:defRPr lang="th-TH" sz="1200" b="1" dirty="0">
                 <a:solidFill>
                   <a:srgbClr val="216B7F"/>
                 </a:solidFill>
@@ -30746,7 +30746,7 @@
               <a:buNone/>
             </a:pPr>
             <a:r>
-              <a:rPr lang="th-TH" sz="1200" b="1" spc="120" dirty="0">
+              <a:rPr lang="th-TH" sz="1200" b="1" dirty="0">
                 <a:solidFill>
                   <a:srgbClr val="216B7F"/>
                 </a:solidFill>
@@ -32580,7 +32580,7 @@
               <a:buNone/>
             </a:pPr>
             <a:r>
-              <a:rPr lang="th-TH" sz="1200" b="1" spc="120" dirty="0">
+              <a:rPr lang="th-TH" sz="1200" b="1" dirty="0">
                 <a:solidFill>
                   <a:srgbClr val="216B7F"/>
                 </a:solidFill>
@@ -33080,7 +33080,7 @@
                         <a:buNone/>
                       </a:pPr>
                       <a:r>
-                        <a:rPr lang="th-TH" sz="1100" b="1" spc="60" dirty="0">
+                        <a:rPr lang="th-TH" sz="1100" b="1" dirty="0">
                           <a:solidFill>
                             <a:srgbClr val="FFFFFF"/>
                           </a:solidFill>
@@ -33102,7 +33102,7 @@
                         <a:buNone/>
                       </a:pPr>
                       <a:r>
-                        <a:rPr lang="th-TH" sz="1100" b="1" spc="60" dirty="0">
+                        <a:rPr lang="th-TH" sz="1100" b="1" dirty="0">
                           <a:solidFill>
                             <a:srgbClr val="FFFFFF"/>
                           </a:solidFill>
@@ -33124,7 +33124,7 @@
                         <a:buNone/>
                       </a:pPr>
                       <a:r>
-                        <a:rPr lang="th-TH" sz="1100" b="1" spc="60" dirty="0">
+                        <a:rPr lang="th-TH" sz="1100" b="1" dirty="0">
                           <a:solidFill>
                             <a:srgbClr val="FFFFFF"/>
                           </a:solidFill>
@@ -33146,7 +33146,7 @@
                         <a:buNone/>
                       </a:pPr>
                       <a:r>
-                        <a:rPr lang="th-TH" sz="1100" b="1" spc="60" dirty="0">
+                        <a:rPr lang="th-TH" sz="1100" b="1" dirty="0">
                           <a:solidFill>
                             <a:srgbClr val="FFFFFF"/>
                           </a:solidFill>
@@ -33168,7 +33168,7 @@
                         <a:buNone/>
                       </a:pPr>
                       <a:r>
-                        <a:rPr lang="th-TH" sz="1100" b="1" spc="60" dirty="0">
+                        <a:rPr lang="th-TH" sz="1100" b="1" dirty="0">
                           <a:solidFill>
                             <a:srgbClr val="FFFFFF"/>
                           </a:solidFill>
@@ -33190,7 +33190,7 @@
                         <a:buNone/>
                       </a:pPr>
                       <a:r>
-                        <a:rPr lang="th-TH" sz="1100" b="1" spc="60" dirty="0">
+                        <a:rPr lang="th-TH" sz="1100" b="1" dirty="0">
                           <a:solidFill>
                             <a:srgbClr val="FFFFFF"/>
                           </a:solidFill>
@@ -36481,7 +36481,7 @@
                         <a:buNone/>
                       </a:pPr>
                       <a:r>
-                        <a:rPr lang="th-TH" sz="1100" b="1" spc="60" dirty="0">
+                        <a:rPr lang="th-TH" sz="1100" b="1" dirty="0">
                           <a:solidFill>
                             <a:srgbClr val="FFFFFF"/>
                           </a:solidFill>
@@ -36503,7 +36503,7 @@
                         <a:buNone/>
                       </a:pPr>
                       <a:r>
-                        <a:rPr lang="th-TH" sz="1100" b="1" spc="60" dirty="0">
+                        <a:rPr lang="th-TH" sz="1100" b="1" dirty="0">
                           <a:solidFill>
                             <a:srgbClr val="FFFFFF"/>
                           </a:solidFill>
@@ -36529,7 +36529,7 @@
                         <a:buNone/>
                       </a:pPr>
                       <a:r>
-                        <a:rPr lang="th-TH" sz="1100" b="1" spc="60" dirty="0">
+                        <a:rPr lang="th-TH" sz="1100" b="1" dirty="0">
                           <a:solidFill>
                             <a:srgbClr val="FFFFFF"/>
                           </a:solidFill>
@@ -38983,7 +38983,7 @@
                         <a:buNone/>
                       </a:pPr>
                       <a:r>
-                        <a:rPr lang="th-TH" sz="1100" b="1" spc="60" dirty="0">
+                        <a:rPr lang="th-TH" sz="1100" b="1" dirty="0">
                           <a:solidFill>
                             <a:srgbClr val="FFFFFF"/>
                           </a:solidFill>
@@ -39005,7 +39005,7 @@
                         <a:buNone/>
                       </a:pPr>
                       <a:r>
-                        <a:rPr lang="th-TH" sz="1100" b="1" spc="60" dirty="0">
+                        <a:rPr lang="th-TH" sz="1100" b="1" dirty="0">
                           <a:solidFill>
                             <a:srgbClr val="FFFFFF"/>
                           </a:solidFill>
@@ -39027,7 +39027,7 @@
                         <a:buNone/>
                       </a:pPr>
                       <a:r>
-                        <a:rPr lang="th-TH" sz="1100" b="1" spc="60" dirty="0">
+                        <a:rPr lang="th-TH" sz="1100" b="1" dirty="0">
                           <a:solidFill>
                             <a:srgbClr val="FFFFFF"/>
                           </a:solidFill>
@@ -39049,7 +39049,7 @@
                         <a:buNone/>
                       </a:pPr>
                       <a:r>
-                        <a:rPr lang="th-TH" sz="1100" b="1" spc="60" dirty="0">
+                        <a:rPr lang="th-TH" sz="1100" b="1" dirty="0">
                           <a:solidFill>
                             <a:srgbClr val="FFFFFF"/>
                           </a:solidFill>

--- a/NCT-Slide-Template-Corp-Demo.pptx
+++ b/NCT-Slide-Template-Corp-Demo.pptx
@@ -4491,7 +4491,7 @@
         </p:nvSpPr>
         <p:spPr>
           <a:xfrm>
-            <a:off x="914400" y="5638800"/>
+            <a:off x="914400" y="5623560"/>
             <a:ext cx="10363200" cy="411480"/>
           </a:xfrm>
           <a:prstGeom prst="rect">
@@ -4524,8 +4524,8 @@
         </p:nvSpPr>
         <p:spPr>
           <a:xfrm>
-            <a:off x="1097280" y="5699760"/>
-            <a:ext cx="1828800" cy="289560"/>
+            <a:off x="1097280" y="5684520"/>
+            <a:ext cx="914400" cy="289560"/>
           </a:xfrm>
           <a:prstGeom prst="rect">
             <a:avLst/>
@@ -4582,8 +4582,8 @@
         </p:nvSpPr>
         <p:spPr>
           <a:xfrm>
-            <a:off x="2926080" y="5699760"/>
-            <a:ext cx="8168640" cy="289560"/>
+            <a:off x="2240280" y="5684520"/>
+            <a:ext cx="8854440" cy="289560"/>
           </a:xfrm>
           <a:prstGeom prst="rect">
             <a:avLst/>
@@ -5950,20 +5950,20 @@
       </p:sp>
       <p:sp>
         <p:nvSpPr>
-          <p:cNvPr id="32" name="Band"/>
+          <p:cNvPr id="32" name="Takeaway Band"/>
           <p:cNvSpPr/>
           <p:nvPr/>
         </p:nvSpPr>
         <p:spPr>
           <a:xfrm>
-            <a:off x="914400" y="5303520"/>
-            <a:ext cx="10363200" cy="548640"/>
+            <a:off x="914400" y="5623560"/>
+            <a:ext cx="10363200" cy="411480"/>
           </a:xfrm>
           <a:prstGeom prst="rect">
             <a:avLst/>
           </a:prstGeom>
           <a:solidFill>
-            <a:srgbClr val="23436D"/>
+            <a:srgbClr val="E8F6F5"/>
           </a:solidFill>
           <a:ln>
             <a:noFill/>
@@ -5979,7 +5979,7 @@
       </p:sp>
       <p:sp>
         <p:nvSpPr>
-          <p:cNvPr id="33" name="Band Label"/>
+          <p:cNvPr id="33" name="Takeaway Label"/>
           <p:cNvSpPr>
             <a:spLocks noGrp="1"/>
           </p:cNvSpPr>
@@ -5989,8 +5989,8 @@
         </p:nvSpPr>
         <p:spPr>
           <a:xfrm>
-            <a:off x="1143000" y="5394960"/>
-            <a:ext cx="2011680" cy="365760"/>
+            <a:off x="1097280" y="5684520"/>
+            <a:ext cx="914400" cy="289560"/>
           </a:xfrm>
           <a:prstGeom prst="rect">
             <a:avLst/>
@@ -6006,7 +6006,7 @@
               <a:buNone/>
               <a:defRPr lang="th-TH" sz="1200" b="1" dirty="0">
                 <a:solidFill>
-                  <a:srgbClr val="8FBACE"/>
+                  <a:srgbClr val="216B7F"/>
                 </a:solidFill>
                 <a:latin typeface="+mn-lt"/>
                 <a:ea typeface="+mn-ea"/>
@@ -6024,7 +6024,7 @@
             <a:r>
               <a:rPr lang="th-TH" sz="1200" b="1" dirty="0">
                 <a:solidFill>
-                  <a:srgbClr val="8FBACE"/>
+                  <a:srgbClr val="216B7F"/>
                 </a:solidFill>
                 <a:latin typeface="+mn-lt"/>
                 <a:ea typeface="+mn-ea"/>
@@ -6037,7 +6037,7 @@
       </p:sp>
       <p:sp>
         <p:nvSpPr>
-          <p:cNvPr id="34" name="Band Copy"/>
+          <p:cNvPr id="34" name="Takeaway Copy"/>
           <p:cNvSpPr>
             <a:spLocks noGrp="1"/>
           </p:cNvSpPr>
@@ -6047,8 +6047,8 @@
         </p:nvSpPr>
         <p:spPr>
           <a:xfrm>
-            <a:off x="3154680" y="5394960"/>
-            <a:ext cx="7894320" cy="365760"/>
+            <a:off x="2240280" y="5684520"/>
+            <a:ext cx="8854440" cy="289560"/>
           </a:xfrm>
           <a:prstGeom prst="rect">
             <a:avLst/>
@@ -6059,12 +6059,12 @@
           <a:lstStyle>
             <a:lvl1pPr algn="l" marL="0" indent="0">
               <a:lnSpc>
-                <a:spcPct val="130000"/>
+                <a:spcPct val="100000"/>
               </a:lnSpc>
               <a:buNone/>
               <a:defRPr lang="th-TH" sz="1400" dirty="0">
                 <a:solidFill>
-                  <a:srgbClr val="FFFFFF"/>
+                  <a:srgbClr val="333333"/>
                 </a:solidFill>
                 <a:latin typeface="+mn-lt"/>
                 <a:ea typeface="+mn-ea"/>
@@ -6075,14 +6075,14 @@
           <a:p>
             <a:pPr algn="l" marL="0" indent="0">
               <a:lnSpc>
-                <a:spcPct val="130000"/>
+                <a:spcPct val="100000"/>
               </a:lnSpc>
               <a:buNone/>
             </a:pPr>
             <a:r>
               <a:rPr lang="th-TH" sz="1400" dirty="0">
                 <a:solidFill>
-                  <a:srgbClr val="FFFFFF"/>
+                  <a:srgbClr val="333333"/>
                 </a:solidFill>
                 <a:latin typeface="+mn-lt"/>
                 <a:ea typeface="+mn-ea"/>
@@ -7797,14 +7797,14 @@
       </p:sp>
       <p:sp>
         <p:nvSpPr>
-          <p:cNvPr id="42" name="Result Band"/>
+          <p:cNvPr id="42" name="Takeaway Band"/>
           <p:cNvSpPr/>
           <p:nvPr/>
         </p:nvSpPr>
         <p:spPr>
           <a:xfrm>
-            <a:off x="914400" y="4343400"/>
-            <a:ext cx="10363200" cy="548640"/>
+            <a:off x="914400" y="5623560"/>
+            <a:ext cx="10363200" cy="411480"/>
           </a:xfrm>
           <a:prstGeom prst="rect">
             <a:avLst/>
@@ -7826,7 +7826,7 @@
       </p:sp>
       <p:sp>
         <p:nvSpPr>
-          <p:cNvPr id="43" name="Result Label"/>
+          <p:cNvPr id="43" name="Takeaway Label"/>
           <p:cNvSpPr>
             <a:spLocks noGrp="1"/>
           </p:cNvSpPr>
@@ -7836,8 +7836,8 @@
         </p:nvSpPr>
         <p:spPr>
           <a:xfrm>
-            <a:off x="1143000" y="4434840"/>
-            <a:ext cx="2011680" cy="365760"/>
+            <a:off x="1097280" y="5684520"/>
+            <a:ext cx="914400" cy="289560"/>
           </a:xfrm>
           <a:prstGeom prst="rect">
             <a:avLst/>
@@ -7884,7 +7884,7 @@
       </p:sp>
       <p:sp>
         <p:nvSpPr>
-          <p:cNvPr id="44" name="Result Copy"/>
+          <p:cNvPr id="44" name="Takeaway Copy"/>
           <p:cNvSpPr>
             <a:spLocks noGrp="1"/>
           </p:cNvSpPr>
@@ -7894,8 +7894,8 @@
         </p:nvSpPr>
         <p:spPr>
           <a:xfrm>
-            <a:off x="3154680" y="4434840"/>
-            <a:ext cx="7894320" cy="365760"/>
+            <a:off x="2240280" y="5684520"/>
+            <a:ext cx="8854440" cy="289560"/>
           </a:xfrm>
           <a:prstGeom prst="rect">
             <a:avLst/>
@@ -7906,7 +7906,7 @@
           <a:lstStyle>
             <a:lvl1pPr algn="l" marL="0" indent="0">
               <a:lnSpc>
-                <a:spcPct val="130000"/>
+                <a:spcPct val="100000"/>
               </a:lnSpc>
               <a:buNone/>
               <a:defRPr lang="th-TH" sz="1400" dirty="0">
@@ -7922,7 +7922,7 @@
           <a:p>
             <a:pPr algn="l" marL="0" indent="0">
               <a:lnSpc>
-                <a:spcPct val="130000"/>
+                <a:spcPct val="100000"/>
               </a:lnSpc>
               <a:buNone/>
             </a:pPr>
@@ -8466,7 +8466,7 @@
         <p:spPr>
           <a:xfrm>
             <a:off x="1097280" y="5684520"/>
-            <a:ext cx="1828800" cy="289560"/>
+            <a:ext cx="914400" cy="289560"/>
           </a:xfrm>
           <a:prstGeom prst="rect">
             <a:avLst/>
@@ -8523,8 +8523,8 @@
         </p:nvSpPr>
         <p:spPr>
           <a:xfrm>
-            <a:off x="2926080" y="5684520"/>
-            <a:ext cx="8168640" cy="289560"/>
+            <a:off x="2240280" y="5684520"/>
+            <a:ext cx="8854440" cy="289560"/>
           </a:xfrm>
           <a:prstGeom prst="rect">
             <a:avLst/>
@@ -9935,7 +9935,7 @@
         <p:spPr>
           <a:xfrm>
             <a:off x="1097280" y="5684520"/>
-            <a:ext cx="1828800" cy="289560"/>
+            <a:ext cx="914400" cy="289560"/>
           </a:xfrm>
           <a:prstGeom prst="rect">
             <a:avLst/>
@@ -9992,8 +9992,8 @@
         </p:nvSpPr>
         <p:spPr>
           <a:xfrm>
-            <a:off x="2926080" y="5684520"/>
-            <a:ext cx="8168640" cy="289560"/>
+            <a:off x="2240280" y="5684520"/>
+            <a:ext cx="8854440" cy="289560"/>
           </a:xfrm>
           <a:prstGeom prst="rect">
             <a:avLst/>
@@ -11539,14 +11539,14 @@
         </p:nvSpPr>
         <p:spPr>
           <a:xfrm>
-            <a:off x="914400" y="3840480"/>
+            <a:off x="914400" y="5623560"/>
             <a:ext cx="10363200" cy="411480"/>
           </a:xfrm>
           <a:prstGeom prst="rect">
             <a:avLst/>
           </a:prstGeom>
           <a:solidFill>
-            <a:srgbClr val="23436D"/>
+            <a:srgbClr val="E8F6F5"/>
           </a:solidFill>
           <a:ln>
             <a:noFill/>
@@ -11572,8 +11572,8 @@
         </p:nvSpPr>
         <p:spPr>
           <a:xfrm>
-            <a:off x="1097280" y="3901440"/>
-            <a:ext cx="1828800" cy="289560"/>
+            <a:off x="1097280" y="5684520"/>
+            <a:ext cx="914400" cy="289560"/>
           </a:xfrm>
           <a:prstGeom prst="rect">
             <a:avLst/>
@@ -11589,7 +11589,7 @@
               <a:buNone/>
               <a:defRPr lang="th-TH" sz="1200" b="1" dirty="0">
                 <a:solidFill>
-                  <a:srgbClr val="8FBACE"/>
+                  <a:srgbClr val="216B7F"/>
                 </a:solidFill>
                 <a:latin typeface="+mn-lt"/>
                 <a:ea typeface="+mn-ea"/>
@@ -11607,7 +11607,7 @@
             <a:r>
               <a:rPr lang="th-TH" sz="1200" b="1" dirty="0">
                 <a:solidFill>
-                  <a:srgbClr val="8FBACE"/>
+                  <a:srgbClr val="216B7F"/>
                 </a:solidFill>
                 <a:latin typeface="+mn-lt"/>
                 <a:ea typeface="+mn-ea"/>
@@ -11630,8 +11630,8 @@
         </p:nvSpPr>
         <p:spPr>
           <a:xfrm>
-            <a:off x="2926080" y="3901440"/>
-            <a:ext cx="8168640" cy="289560"/>
+            <a:off x="2240280" y="5684520"/>
+            <a:ext cx="8854440" cy="289560"/>
           </a:xfrm>
           <a:prstGeom prst="rect">
             <a:avLst/>
@@ -11647,7 +11647,7 @@
               <a:buNone/>
               <a:defRPr lang="th-TH" sz="1400" dirty="0">
                 <a:solidFill>
-                  <a:srgbClr val="FFFFFF"/>
+                  <a:srgbClr val="333333"/>
                 </a:solidFill>
                 <a:latin typeface="+mn-lt"/>
                 <a:ea typeface="+mn-ea"/>
@@ -11665,7 +11665,7 @@
             <a:r>
               <a:rPr lang="th-TH" sz="1400" dirty="0">
                 <a:solidFill>
-                  <a:srgbClr val="FFFFFF"/>
+                  <a:srgbClr val="333333"/>
                 </a:solidFill>
                 <a:latin typeface="+mn-lt"/>
                 <a:ea typeface="+mn-ea"/>
@@ -11688,7 +11688,7 @@
         </p:nvSpPr>
         <p:spPr>
           <a:xfrm>
-            <a:off x="914400" y="4389120"/>
+            <a:off x="914400" y="3840480"/>
             <a:ext cx="3332480" cy="228600"/>
           </a:xfrm>
           <a:prstGeom prst="rect">
@@ -11742,7 +11742,7 @@
         </p:nvSpPr>
         <p:spPr>
           <a:xfrm>
-            <a:off x="914400" y="4674870"/>
+            <a:off x="914400" y="4126230"/>
             <a:ext cx="3332480" cy="1360170"/>
           </a:xfrm>
           <a:prstGeom prst="rect">
@@ -11775,7 +11775,7 @@
         </p:nvSpPr>
         <p:spPr>
           <a:xfrm>
-            <a:off x="914400" y="4674870"/>
+            <a:off x="914400" y="4126230"/>
             <a:ext cx="3332480" cy="1360170"/>
           </a:xfrm>
           <a:prstGeom prst="rect">
@@ -11823,7 +11823,7 @@
         </p:nvSpPr>
         <p:spPr>
           <a:xfrm>
-            <a:off x="4429760" y="4389120"/>
+            <a:off x="4429760" y="3840480"/>
             <a:ext cx="3332480" cy="228600"/>
           </a:xfrm>
           <a:prstGeom prst="rect">
@@ -11877,7 +11877,7 @@
         </p:nvSpPr>
         <p:spPr>
           <a:xfrm>
-            <a:off x="4429760" y="4674870"/>
+            <a:off x="4429760" y="4126230"/>
             <a:ext cx="3332480" cy="1360170"/>
           </a:xfrm>
           <a:prstGeom prst="rect">
@@ -11910,7 +11910,7 @@
         </p:nvSpPr>
         <p:spPr>
           <a:xfrm>
-            <a:off x="4429760" y="4674870"/>
+            <a:off x="4429760" y="4126230"/>
             <a:ext cx="3332480" cy="1360170"/>
           </a:xfrm>
           <a:prstGeom prst="rect">
@@ -11958,7 +11958,7 @@
         </p:nvSpPr>
         <p:spPr>
           <a:xfrm>
-            <a:off x="7945120" y="4389120"/>
+            <a:off x="7945120" y="3840480"/>
             <a:ext cx="3332480" cy="228600"/>
           </a:xfrm>
           <a:prstGeom prst="rect">
@@ -12012,7 +12012,7 @@
         </p:nvSpPr>
         <p:spPr>
           <a:xfrm>
-            <a:off x="7945120" y="4674870"/>
+            <a:off x="7945120" y="4126230"/>
             <a:ext cx="3332480" cy="1360170"/>
           </a:xfrm>
           <a:prstGeom prst="rect">
@@ -12045,7 +12045,7 @@
         </p:nvSpPr>
         <p:spPr>
           <a:xfrm>
-            <a:off x="7945120" y="4674870"/>
+            <a:off x="7945120" y="4126230"/>
             <a:ext cx="3332480" cy="1360170"/>
           </a:xfrm>
           <a:prstGeom prst="rect">
@@ -12787,7 +12787,7 @@
         <p:spPr>
           <a:xfrm>
             <a:off x="1097280" y="5684520"/>
-            <a:ext cx="1828800" cy="289560"/>
+            <a:ext cx="914400" cy="289560"/>
           </a:xfrm>
           <a:prstGeom prst="rect">
             <a:avLst/>
@@ -12844,8 +12844,8 @@
         </p:nvSpPr>
         <p:spPr>
           <a:xfrm>
-            <a:off x="2926080" y="5684520"/>
-            <a:ext cx="8168640" cy="289560"/>
+            <a:off x="2240280" y="5684520"/>
+            <a:ext cx="8854440" cy="289560"/>
           </a:xfrm>
           <a:prstGeom prst="rect">
             <a:avLst/>
@@ -16168,7 +16168,7 @@
         <p:spPr>
           <a:xfrm>
             <a:off x="1097280" y="5684520"/>
-            <a:ext cx="1828800" cy="289560"/>
+            <a:ext cx="914400" cy="289560"/>
           </a:xfrm>
           <a:prstGeom prst="rect">
             <a:avLst/>
@@ -16225,8 +16225,8 @@
         </p:nvSpPr>
         <p:spPr>
           <a:xfrm>
-            <a:off x="2926080" y="5684520"/>
-            <a:ext cx="8168640" cy="289560"/>
+            <a:off x="2240280" y="5684520"/>
+            <a:ext cx="8854440" cy="289560"/>
           </a:xfrm>
           <a:prstGeom prst="rect">
             <a:avLst/>
@@ -18121,7 +18121,7 @@
         <p:spPr>
           <a:xfrm>
             <a:off x="1097280" y="5684520"/>
-            <a:ext cx="1828800" cy="289560"/>
+            <a:ext cx="914400" cy="289560"/>
           </a:xfrm>
           <a:prstGeom prst="rect">
             <a:avLst/>
@@ -18178,8 +18178,8 @@
         </p:nvSpPr>
         <p:spPr>
           <a:xfrm>
-            <a:off x="2926080" y="5684520"/>
-            <a:ext cx="8168640" cy="289560"/>
+            <a:off x="2240280" y="5684520"/>
+            <a:ext cx="8854440" cy="289560"/>
           </a:xfrm>
           <a:prstGeom prst="rect">
             <a:avLst/>
@@ -19349,7 +19349,7 @@
         <p:spPr>
           <a:xfrm>
             <a:off x="1097280" y="5684520"/>
-            <a:ext cx="1828800" cy="289560"/>
+            <a:ext cx="914400" cy="289560"/>
           </a:xfrm>
           <a:prstGeom prst="rect">
             <a:avLst/>
@@ -19406,8 +19406,8 @@
         </p:nvSpPr>
         <p:spPr>
           <a:xfrm>
-            <a:off x="2926080" y="5684520"/>
-            <a:ext cx="8168640" cy="289560"/>
+            <a:off x="2240280" y="5684520"/>
+            <a:ext cx="8854440" cy="289560"/>
           </a:xfrm>
           <a:prstGeom prst="rect">
             <a:avLst/>
@@ -20896,7 +20896,7 @@
         <p:spPr>
           <a:xfrm>
             <a:off x="1097280" y="5684520"/>
-            <a:ext cx="1828800" cy="289560"/>
+            <a:ext cx="914400" cy="289560"/>
           </a:xfrm>
           <a:prstGeom prst="rect">
             <a:avLst/>
@@ -20953,8 +20953,8 @@
         </p:nvSpPr>
         <p:spPr>
           <a:xfrm>
-            <a:off x="2926080" y="5684520"/>
-            <a:ext cx="8168640" cy="289560"/>
+            <a:off x="2240280" y="5684520"/>
+            <a:ext cx="8854440" cy="289560"/>
           </a:xfrm>
           <a:prstGeom prst="rect">
             <a:avLst/>
@@ -23271,7 +23271,7 @@
         <p:spPr>
           <a:xfrm>
             <a:off x="1097280" y="5684520"/>
-            <a:ext cx="1828800" cy="289560"/>
+            <a:ext cx="914400" cy="289560"/>
           </a:xfrm>
           <a:prstGeom prst="rect">
             <a:avLst/>
@@ -23328,8 +23328,8 @@
         </p:nvSpPr>
         <p:spPr>
           <a:xfrm>
-            <a:off x="2926080" y="5684520"/>
-            <a:ext cx="8168640" cy="289560"/>
+            <a:off x="2240280" y="5684520"/>
+            <a:ext cx="8854440" cy="289560"/>
           </a:xfrm>
           <a:prstGeom prst="rect">
             <a:avLst/>
@@ -25664,7 +25664,7 @@
         <p:spPr>
           <a:xfrm>
             <a:off x="1097280" y="5684520"/>
-            <a:ext cx="1828800" cy="289560"/>
+            <a:ext cx="914400" cy="289560"/>
           </a:xfrm>
           <a:prstGeom prst="rect">
             <a:avLst/>
@@ -25721,8 +25721,8 @@
         </p:nvSpPr>
         <p:spPr>
           <a:xfrm>
-            <a:off x="2926080" y="5684520"/>
-            <a:ext cx="8168640" cy="289560"/>
+            <a:off x="2240280" y="5684520"/>
+            <a:ext cx="8854440" cy="289560"/>
           </a:xfrm>
           <a:prstGeom prst="rect">
             <a:avLst/>
@@ -26320,7 +26320,7 @@
         <p:spPr>
           <a:xfrm>
             <a:off x="914400" y="5623560"/>
-            <a:ext cx="2011680" cy="411480"/>
+            <a:ext cx="1325880" cy="411480"/>
           </a:xfrm>
           <a:prstGeom prst="rect">
             <a:avLst/>
@@ -26380,8 +26380,8 @@
         </p:nvSpPr>
         <p:spPr>
           <a:xfrm>
-            <a:off x="2926080" y="5623560"/>
-            <a:ext cx="8351520" cy="411480"/>
+            <a:off x="2240280" y="5623560"/>
+            <a:ext cx="9037320" cy="411480"/>
           </a:xfrm>
           <a:prstGeom prst="rect">
             <a:avLst/>
@@ -26857,6 +26857,35 @@
       </p:sp>
       <p:sp>
         <p:nvSpPr>
+          <p:cNvPr id="20" name="Left Heading Rule"/>
+          <p:cNvSpPr/>
+          <p:nvPr/>
+        </p:nvSpPr>
+        <p:spPr>
+          <a:xfrm>
+            <a:off x="914400" y="2148840"/>
+            <a:ext cx="5090160" cy="12700"/>
+          </a:xfrm>
+          <a:prstGeom prst="rect">
+            <a:avLst/>
+          </a:prstGeom>
+          <a:solidFill>
+            <a:srgbClr val="E5E5E5"/>
+          </a:solidFill>
+          <a:ln>
+            <a:noFill/>
+          </a:ln>
+        </p:spPr>
+        <p:txBody>
+          <a:bodyPr/>
+          <a:lstStyle/>
+          <a:p>
+            <a:endParaRPr lang="th-TH"/>
+          </a:p>
+        </p:txBody>
+      </p:sp>
+      <p:sp>
+        <p:nvSpPr>
           <p:cNvPr id="13" name="Left Content"/>
           <p:cNvSpPr>
             <a:spLocks noGrp="1"/>
@@ -27082,6 +27111,35 @@
               </a:rPr>
               <a:t>หัวคอลัมน์ขวา</a:t>
             </a:r>
+          </a:p>
+        </p:txBody>
+      </p:sp>
+      <p:sp>
+        <p:nvSpPr>
+          <p:cNvPr id="21" name="Right Heading Rule"/>
+          <p:cNvSpPr/>
+          <p:nvPr/>
+        </p:nvSpPr>
+        <p:spPr>
+          <a:xfrm>
+            <a:off x="6187440" y="2148840"/>
+            <a:ext cx="5090160" cy="12700"/>
+          </a:xfrm>
+          <a:prstGeom prst="rect">
+            <a:avLst/>
+          </a:prstGeom>
+          <a:solidFill>
+            <a:srgbClr val="E5E5E5"/>
+          </a:solidFill>
+          <a:ln>
+            <a:noFill/>
+          </a:ln>
+        </p:spPr>
+        <p:txBody>
+          <a:bodyPr/>
+          <a:lstStyle/>
+          <a:p>
+            <a:endParaRPr lang="th-TH"/>
           </a:p>
         </p:txBody>
       </p:sp>
@@ -28184,7 +28242,7 @@
         <p:spPr>
           <a:xfrm>
             <a:off x="914400" y="5623560"/>
-            <a:ext cx="2011680" cy="411480"/>
+            <a:ext cx="1325880" cy="411480"/>
           </a:xfrm>
           <a:prstGeom prst="rect">
             <a:avLst/>
@@ -28244,8 +28302,8 @@
         </p:nvSpPr>
         <p:spPr>
           <a:xfrm>
-            <a:off x="2926080" y="5623560"/>
-            <a:ext cx="8351520" cy="411480"/>
+            <a:off x="2240280" y="5623560"/>
+            <a:ext cx="9037320" cy="411480"/>
           </a:xfrm>
           <a:prstGeom prst="rect">
             <a:avLst/>
@@ -29138,7 +29196,7 @@
         <p:spPr>
           <a:xfrm>
             <a:off x="914400" y="5623560"/>
-            <a:ext cx="2011680" cy="411480"/>
+            <a:ext cx="1325880" cy="411480"/>
           </a:xfrm>
           <a:prstGeom prst="rect">
             <a:avLst/>
@@ -29198,8 +29256,8 @@
         </p:nvSpPr>
         <p:spPr>
           <a:xfrm>
-            <a:off x="2926080" y="5623560"/>
-            <a:ext cx="8351520" cy="411480"/>
+            <a:off x="2240280" y="5623560"/>
+            <a:ext cx="9037320" cy="411480"/>
           </a:xfrm>
           <a:prstGeom prst="rect">
             <a:avLst/>
@@ -30714,7 +30772,7 @@
         <p:spPr>
           <a:xfrm>
             <a:off x="1097280" y="5684520"/>
-            <a:ext cx="1828800" cy="289560"/>
+            <a:ext cx="914400" cy="289560"/>
           </a:xfrm>
           <a:prstGeom prst="rect">
             <a:avLst/>
@@ -30771,8 +30829,8 @@
         </p:nvSpPr>
         <p:spPr>
           <a:xfrm>
-            <a:off x="2926080" y="5684520"/>
-            <a:ext cx="8168640" cy="289560"/>
+            <a:off x="2240280" y="5684520"/>
+            <a:ext cx="8854440" cy="289560"/>
           </a:xfrm>
           <a:prstGeom prst="rect">
             <a:avLst/>
@@ -31891,19 +31949,19 @@
             <a:pPr/>
             <a:r>
               <a:rPr lang="th-TH" dirty="0"/>
-              <a:t>วิธีการทำงาน</a:t>
-            </a:r>
-          </a:p>
-        </p:txBody>
-      </p:sp>
-      <p:sp>
-        <p:nvSpPr>
-          <p:cNvPr id="3" name="Cap"/>
-          <p:cNvSpPr>
-            <a:spLocks noGrp="1"/>
-          </p:cNvSpPr>
-          <p:nvPr>
-            <p:ph type="body" idx="2"/>
+              <a:t>กระบวนการที่เสนอ</a:t>
+            </a:r>
+          </a:p>
+        </p:txBody>
+      </p:sp>
+      <p:sp>
+        <p:nvSpPr>
+          <p:cNvPr id="3" name="Sub"/>
+          <p:cNvSpPr>
+            <a:spLocks noGrp="1"/>
+          </p:cNvSpPr>
+          <p:nvPr>
+            <p:ph type="body" idx="1"/>
           </p:nvPr>
         </p:nvSpPr>
         <p:spPr/>
@@ -31914,7 +31972,398 @@
             <a:pPr/>
             <a:r>
               <a:rPr lang="th-TH" dirty="0"/>
-              <a:t>กระบวนการ สถาปัตยกรรม และขอบเขตที่ตกลงกัน</a:t>
+              <a:t>ห้าขั้นตอน ทำงานต่อเนื่องโดยไม่ต้องคีย์ซ้ำ</a:t>
+            </a:r>
+          </a:p>
+        </p:txBody>
+      </p:sp>
+      <p:sp>
+        <p:nvSpPr>
+          <p:cNvPr id="4" name="C0"/>
+          <p:cNvSpPr>
+            <a:spLocks noGrp="1"/>
+          </p:cNvSpPr>
+          <p:nvPr>
+            <p:ph type="body" idx="20"/>
+          </p:nvPr>
+        </p:nvSpPr>
+        <p:spPr/>
+        <p:txBody>
+          <a:bodyPr/>
+          <a:lstStyle/>
+          <a:p>
+            <a:pPr/>
+            <a:r>
+              <a:rPr lang="th-TH" dirty="0"/>
+              <a:t>1</a:t>
+            </a:r>
+          </a:p>
+        </p:txBody>
+      </p:sp>
+      <p:sp>
+        <p:nvSpPr>
+          <p:cNvPr id="5" name="H0"/>
+          <p:cNvSpPr>
+            <a:spLocks noGrp="1"/>
+          </p:cNvSpPr>
+          <p:nvPr>
+            <p:ph type="body" idx="21"/>
+          </p:nvPr>
+        </p:nvSpPr>
+        <p:spPr/>
+        <p:txBody>
+          <a:bodyPr/>
+          <a:lstStyle/>
+          <a:p>
+            <a:pPr/>
+            <a:r>
+              <a:rPr lang="th-TH" dirty="0"/>
+              <a:t>รับเอกสาร</a:t>
+            </a:r>
+          </a:p>
+        </p:txBody>
+      </p:sp>
+      <p:sp>
+        <p:nvSpPr>
+          <p:cNvPr id="6" name="B0"/>
+          <p:cNvSpPr>
+            <a:spLocks noGrp="1"/>
+          </p:cNvSpPr>
+          <p:nvPr>
+            <p:ph type="body" idx="22"/>
+          </p:nvPr>
+        </p:nvSpPr>
+        <p:spPr/>
+        <p:txBody>
+          <a:bodyPr/>
+          <a:lstStyle/>
+          <a:p>
+            <a:pPr/>
+            <a:r>
+              <a:rPr lang="th-TH" dirty="0"/>
+              <a:t>สแกนหรือรับไฟล์เข้าคิวกลาง</a:t>
+            </a:r>
+          </a:p>
+        </p:txBody>
+      </p:sp>
+      <p:sp>
+        <p:nvSpPr>
+          <p:cNvPr id="7" name="C1"/>
+          <p:cNvSpPr>
+            <a:spLocks noGrp="1"/>
+          </p:cNvSpPr>
+          <p:nvPr>
+            <p:ph type="body" idx="23"/>
+          </p:nvPr>
+        </p:nvSpPr>
+        <p:spPr/>
+        <p:txBody>
+          <a:bodyPr/>
+          <a:lstStyle/>
+          <a:p>
+            <a:pPr/>
+            <a:r>
+              <a:rPr lang="th-TH" dirty="0"/>
+              <a:t>2</a:t>
+            </a:r>
+          </a:p>
+        </p:txBody>
+      </p:sp>
+      <p:sp>
+        <p:nvSpPr>
+          <p:cNvPr id="8" name="H1"/>
+          <p:cNvSpPr>
+            <a:spLocks noGrp="1"/>
+          </p:cNvSpPr>
+          <p:nvPr>
+            <p:ph type="body" idx="24"/>
+          </p:nvPr>
+        </p:nvSpPr>
+        <p:spPr/>
+        <p:txBody>
+          <a:bodyPr/>
+          <a:lstStyle/>
+          <a:p>
+            <a:pPr/>
+            <a:r>
+              <a:rPr lang="th-TH" dirty="0"/>
+              <a:t>อ่านข้อมูล</a:t>
+            </a:r>
+          </a:p>
+        </p:txBody>
+      </p:sp>
+      <p:sp>
+        <p:nvSpPr>
+          <p:cNvPr id="9" name="B1"/>
+          <p:cNvSpPr>
+            <a:spLocks noGrp="1"/>
+          </p:cNvSpPr>
+          <p:nvPr>
+            <p:ph type="body" idx="25"/>
+          </p:nvPr>
+        </p:nvSpPr>
+        <p:spPr/>
+        <p:txBody>
+          <a:bodyPr/>
+          <a:lstStyle/>
+          <a:p>
+            <a:pPr/>
+            <a:r>
+              <a:rPr lang="th-TH" dirty="0"/>
+              <a:t>ดึงฟิลด์สำคัญ ตรวจกับต้นทาง</a:t>
+            </a:r>
+          </a:p>
+        </p:txBody>
+      </p:sp>
+      <p:sp>
+        <p:nvSpPr>
+          <p:cNvPr id="10" name="C2"/>
+          <p:cNvSpPr>
+            <a:spLocks noGrp="1"/>
+          </p:cNvSpPr>
+          <p:nvPr>
+            <p:ph type="body" idx="26"/>
+          </p:nvPr>
+        </p:nvSpPr>
+        <p:spPr/>
+        <p:txBody>
+          <a:bodyPr/>
+          <a:lstStyle/>
+          <a:p>
+            <a:pPr/>
+            <a:r>
+              <a:rPr lang="th-TH" dirty="0"/>
+              <a:t>3</a:t>
+            </a:r>
+          </a:p>
+        </p:txBody>
+      </p:sp>
+      <p:sp>
+        <p:nvSpPr>
+          <p:cNvPr id="11" name="H2"/>
+          <p:cNvSpPr>
+            <a:spLocks noGrp="1"/>
+          </p:cNvSpPr>
+          <p:nvPr>
+            <p:ph type="body" idx="27"/>
+          </p:nvPr>
+        </p:nvSpPr>
+        <p:spPr/>
+        <p:txBody>
+          <a:bodyPr/>
+          <a:lstStyle/>
+          <a:p>
+            <a:pPr/>
+            <a:r>
+              <a:rPr lang="th-TH" dirty="0"/>
+              <a:t>ตรวจสอบ</a:t>
+            </a:r>
+          </a:p>
+        </p:txBody>
+      </p:sp>
+      <p:sp>
+        <p:nvSpPr>
+          <p:cNvPr id="12" name="B2"/>
+          <p:cNvSpPr>
+            <a:spLocks noGrp="1"/>
+          </p:cNvSpPr>
+          <p:nvPr>
+            <p:ph type="body" idx="28"/>
+          </p:nvPr>
+        </p:nvSpPr>
+        <p:spPr/>
+        <p:txBody>
+          <a:bodyPr/>
+          <a:lstStyle/>
+          <a:p>
+            <a:pPr/>
+            <a:r>
+              <a:rPr lang="th-TH" dirty="0"/>
+              <a:t>กฎธุรกิจและวงเงินอนุมัติ</a:t>
+            </a:r>
+          </a:p>
+        </p:txBody>
+      </p:sp>
+      <p:sp>
+        <p:nvSpPr>
+          <p:cNvPr id="13" name="C3"/>
+          <p:cNvSpPr>
+            <a:spLocks noGrp="1"/>
+          </p:cNvSpPr>
+          <p:nvPr>
+            <p:ph type="body" idx="29"/>
+          </p:nvPr>
+        </p:nvSpPr>
+        <p:spPr/>
+        <p:txBody>
+          <a:bodyPr/>
+          <a:lstStyle/>
+          <a:p>
+            <a:pPr/>
+            <a:r>
+              <a:rPr lang="th-TH" dirty="0"/>
+              <a:t>4</a:t>
+            </a:r>
+          </a:p>
+        </p:txBody>
+      </p:sp>
+      <p:sp>
+        <p:nvSpPr>
+          <p:cNvPr id="14" name="H3"/>
+          <p:cNvSpPr>
+            <a:spLocks noGrp="1"/>
+          </p:cNvSpPr>
+          <p:nvPr>
+            <p:ph type="body" idx="30"/>
+          </p:nvPr>
+        </p:nvSpPr>
+        <p:spPr/>
+        <p:txBody>
+          <a:bodyPr/>
+          <a:lstStyle/>
+          <a:p>
+            <a:pPr/>
+            <a:r>
+              <a:rPr lang="th-TH" dirty="0"/>
+              <a:t>บันทึก</a:t>
+            </a:r>
+          </a:p>
+        </p:txBody>
+      </p:sp>
+      <p:sp>
+        <p:nvSpPr>
+          <p:cNvPr id="15" name="B3"/>
+          <p:cNvSpPr>
+            <a:spLocks noGrp="1"/>
+          </p:cNvSpPr>
+          <p:nvPr>
+            <p:ph type="body" idx="31"/>
+          </p:nvPr>
+        </p:nvSpPr>
+        <p:spPr/>
+        <p:txBody>
+          <a:bodyPr/>
+          <a:lstStyle/>
+          <a:p>
+            <a:pPr/>
+            <a:r>
+              <a:rPr lang="th-TH" dirty="0"/>
+              <a:t>ลงระบบบัญชีพร้อม audit trail</a:t>
+            </a:r>
+          </a:p>
+        </p:txBody>
+      </p:sp>
+      <p:sp>
+        <p:nvSpPr>
+          <p:cNvPr id="16" name="C4"/>
+          <p:cNvSpPr>
+            <a:spLocks noGrp="1"/>
+          </p:cNvSpPr>
+          <p:nvPr>
+            <p:ph type="body" idx="32"/>
+          </p:nvPr>
+        </p:nvSpPr>
+        <p:spPr/>
+        <p:txBody>
+          <a:bodyPr/>
+          <a:lstStyle/>
+          <a:p>
+            <a:pPr/>
+            <a:r>
+              <a:rPr lang="th-TH" dirty="0"/>
+              <a:t>5</a:t>
+            </a:r>
+          </a:p>
+        </p:txBody>
+      </p:sp>
+      <p:sp>
+        <p:nvSpPr>
+          <p:cNvPr id="17" name="H4"/>
+          <p:cNvSpPr>
+            <a:spLocks noGrp="1"/>
+          </p:cNvSpPr>
+          <p:nvPr>
+            <p:ph type="body" idx="33"/>
+          </p:nvPr>
+        </p:nvSpPr>
+        <p:spPr/>
+        <p:txBody>
+          <a:bodyPr/>
+          <a:lstStyle/>
+          <a:p>
+            <a:pPr/>
+            <a:r>
+              <a:rPr lang="th-TH" dirty="0"/>
+              <a:t>กระทบยอด</a:t>
+            </a:r>
+          </a:p>
+        </p:txBody>
+      </p:sp>
+      <p:sp>
+        <p:nvSpPr>
+          <p:cNvPr id="18" name="B4"/>
+          <p:cNvSpPr>
+            <a:spLocks noGrp="1"/>
+          </p:cNvSpPr>
+          <p:nvPr>
+            <p:ph type="body" idx="34"/>
+          </p:nvPr>
+        </p:nvSpPr>
+        <p:spPr/>
+        <p:txBody>
+          <a:bodyPr/>
+          <a:lstStyle/>
+          <a:p>
+            <a:pPr/>
+            <a:r>
+              <a:rPr lang="th-TH" dirty="0"/>
+              <a:t>จับคู่อัตโนมัติ ส่งรายงาน</a:t>
+            </a:r>
+          </a:p>
+        </p:txBody>
+      </p:sp>
+      <p:sp>
+        <p:nvSpPr>
+          <p:cNvPr id="19" name="RL"/>
+          <p:cNvSpPr>
+            <a:spLocks noGrp="1"/>
+          </p:cNvSpPr>
+          <p:nvPr>
+            <p:ph type="body" idx="35"/>
+          </p:nvPr>
+        </p:nvSpPr>
+        <p:spPr/>
+        <p:txBody>
+          <a:bodyPr/>
+          <a:lstStyle/>
+          <a:p>
+            <a:pPr/>
+            <a:r>
+              <a:rPr lang="th-TH" dirty="0"/>
+              <a:t>ผลลัพธ์</a:t>
+            </a:r>
+          </a:p>
+        </p:txBody>
+      </p:sp>
+      <p:sp>
+        <p:nvSpPr>
+          <p:cNvPr id="20" name="RC"/>
+          <p:cNvSpPr>
+            <a:spLocks noGrp="1"/>
+          </p:cNvSpPr>
+          <p:nvPr>
+            <p:ph type="body" idx="36"/>
+          </p:nvPr>
+        </p:nvSpPr>
+        <p:spPr/>
+        <p:txBody>
+          <a:bodyPr/>
+          <a:lstStyle/>
+          <a:p>
+            <a:pPr/>
+            <a:r>
+              <a:rPr lang="th-TH" dirty="0"/>
+              <a:t>เอกสารหนึ่งใบผ่านครบห้าขั้นโดยไม่มีการคีย์ซ้ำเลย</a:t>
             </a:r>
           </a:p>
         </p:txBody>
@@ -31962,7 +32411,7 @@
             <a:pPr/>
             <a:r>
               <a:rPr lang="th-TH" dirty="0"/>
-              <a:t>กระบวนการที่เสนอ</a:t>
+              <a:t>ภาพรวมสถาปัตยกรรมระบบ</a:t>
             </a:r>
           </a:p>
         </p:txBody>
@@ -31985,19 +32434,19 @@
             <a:pPr/>
             <a:r>
               <a:rPr lang="th-TH" dirty="0"/>
-              <a:t>ห้าขั้นตอน ทำงานต่อเนื่องโดยไม่ต้องคีย์ซ้ำ</a:t>
-            </a:r>
-          </a:p>
-        </p:txBody>
-      </p:sp>
-      <p:sp>
-        <p:nvSpPr>
-          <p:cNvPr id="4" name="C0"/>
-          <p:cNvSpPr>
-            <a:spLocks noGrp="1"/>
-          </p:cNvSpPr>
-          <p:nvPr>
-            <p:ph type="body" idx="20"/>
+              <a:t>ใช้ชุดชิ้นส่วนมาตรฐาน — กล่องมุมตรง เส้นหักมุมฉาก ไม่มีเงา</a:t>
+            </a:r>
+          </a:p>
+        </p:txBody>
+      </p:sp>
+      <p:sp>
+        <p:nvSpPr>
+          <p:cNvPr id="4" name="Leg"/>
+          <p:cNvSpPr>
+            <a:spLocks noGrp="1"/>
+          </p:cNvSpPr>
+          <p:nvPr>
+            <p:ph type="body" idx="2"/>
           </p:nvPr>
         </p:nvSpPr>
         <p:spPr/>
@@ -32008,19 +32457,19 @@
             <a:pPr/>
             <a:r>
               <a:rPr lang="th-TH" dirty="0"/>
-              <a:t>1</a:t>
-            </a:r>
-          </a:p>
-        </p:txBody>
-      </p:sp>
-      <p:sp>
-        <p:nvSpPr>
-          <p:cNvPr id="5" name="H0"/>
-          <p:cNvSpPr>
-            <a:spLocks noGrp="1"/>
-          </p:cNvSpPr>
-          <p:nvPr>
-            <p:ph type="body" idx="21"/>
+              <a:t>กล่องทึบ = ระบบที่มีอยู่  ·  กล่องมีสีหมวด = ส่วนที่เพิ่ม  ·  เส้นทึบ = ข้อมูลไหลอัตโนมัติ</a:t>
+            </a:r>
+          </a:p>
+        </p:txBody>
+      </p:sp>
+      <p:sp>
+        <p:nvSpPr>
+          <p:cNvPr id="5" name="TL"/>
+          <p:cNvSpPr>
+            <a:spLocks noGrp="1"/>
+          </p:cNvSpPr>
+          <p:nvPr>
+            <p:ph type="body" idx="3"/>
           </p:nvPr>
         </p:nvSpPr>
         <p:spPr/>
@@ -32031,19 +32480,19 @@
             <a:pPr/>
             <a:r>
               <a:rPr lang="th-TH" dirty="0"/>
-              <a:t>รับเอกสาร</a:t>
-            </a:r>
-          </a:p>
-        </p:txBody>
-      </p:sp>
-      <p:sp>
-        <p:nvSpPr>
-          <p:cNvPr id="6" name="B0"/>
-          <p:cNvSpPr>
-            <a:spLocks noGrp="1"/>
-          </p:cNvSpPr>
-          <p:nvPr>
-            <p:ph type="body" idx="22"/>
+              <a:t>สรุป</a:t>
+            </a:r>
+          </a:p>
+        </p:txBody>
+      </p:sp>
+      <p:sp>
+        <p:nvSpPr>
+          <p:cNvPr id="6" name="TC"/>
+          <p:cNvSpPr>
+            <a:spLocks noGrp="1"/>
+          </p:cNvSpPr>
+          <p:nvPr>
+            <p:ph type="body" idx="4"/>
           </p:nvPr>
         </p:nvSpPr>
         <p:spPr/>
@@ -32054,329 +32503,457 @@
             <a:pPr/>
             <a:r>
               <a:rPr lang="th-TH" dirty="0"/>
-              <a:t>สแกนหรือรับไฟล์เข้าคิวกลาง</a:t>
-            </a:r>
-          </a:p>
-        </p:txBody>
-      </p:sp>
-      <p:sp>
-        <p:nvSpPr>
-          <p:cNvPr id="7" name="C1"/>
-          <p:cNvSpPr>
-            <a:spLocks noGrp="1"/>
-          </p:cNvSpPr>
-          <p:nvPr>
-            <p:ph type="body" idx="23"/>
-          </p:nvPr>
-        </p:nvSpPr>
-        <p:spPr/>
-        <p:txBody>
-          <a:bodyPr/>
-          <a:lstStyle/>
-          <a:p>
-            <a:pPr/>
-            <a:r>
-              <a:rPr lang="th-TH" dirty="0"/>
-              <a:t>2</a:t>
-            </a:r>
-          </a:p>
-        </p:txBody>
-      </p:sp>
-      <p:sp>
-        <p:nvSpPr>
-          <p:cNvPr id="8" name="H1"/>
-          <p:cNvSpPr>
-            <a:spLocks noGrp="1"/>
-          </p:cNvSpPr>
-          <p:nvPr>
-            <p:ph type="body" idx="24"/>
-          </p:nvPr>
-        </p:nvSpPr>
-        <p:spPr/>
-        <p:txBody>
-          <a:bodyPr/>
-          <a:lstStyle/>
-          <a:p>
-            <a:pPr/>
-            <a:r>
-              <a:rPr lang="th-TH" dirty="0"/>
-              <a:t>อ่านข้อมูล</a:t>
-            </a:r>
-          </a:p>
-        </p:txBody>
-      </p:sp>
-      <p:sp>
-        <p:nvSpPr>
-          <p:cNvPr id="9" name="B1"/>
-          <p:cNvSpPr>
-            <a:spLocks noGrp="1"/>
-          </p:cNvSpPr>
-          <p:nvPr>
-            <p:ph type="body" idx="25"/>
-          </p:nvPr>
-        </p:nvSpPr>
-        <p:spPr/>
-        <p:txBody>
-          <a:bodyPr/>
-          <a:lstStyle/>
-          <a:p>
-            <a:pPr/>
-            <a:r>
-              <a:rPr lang="th-TH" dirty="0"/>
-              <a:t>ดึงฟิลด์สำคัญ ตรวจกับต้นทาง</a:t>
-            </a:r>
-          </a:p>
-        </p:txBody>
-      </p:sp>
-      <p:sp>
-        <p:nvSpPr>
-          <p:cNvPr id="10" name="C2"/>
-          <p:cNvSpPr>
-            <a:spLocks noGrp="1"/>
-          </p:cNvSpPr>
-          <p:nvPr>
-            <p:ph type="body" idx="26"/>
-          </p:nvPr>
-        </p:nvSpPr>
-        <p:spPr/>
-        <p:txBody>
-          <a:bodyPr/>
-          <a:lstStyle/>
-          <a:p>
-            <a:pPr/>
-            <a:r>
-              <a:rPr lang="th-TH" dirty="0"/>
-              <a:t>3</a:t>
-            </a:r>
-          </a:p>
-        </p:txBody>
-      </p:sp>
-      <p:sp>
-        <p:nvSpPr>
-          <p:cNvPr id="11" name="H2"/>
-          <p:cNvSpPr>
-            <a:spLocks noGrp="1"/>
-          </p:cNvSpPr>
-          <p:nvPr>
-            <p:ph type="body" idx="27"/>
-          </p:nvPr>
-        </p:nvSpPr>
-        <p:spPr/>
-        <p:txBody>
-          <a:bodyPr/>
-          <a:lstStyle/>
-          <a:p>
-            <a:pPr/>
-            <a:r>
-              <a:rPr lang="th-TH" dirty="0"/>
-              <a:t>ตรวจสอบ</a:t>
-            </a:r>
-          </a:p>
-        </p:txBody>
-      </p:sp>
-      <p:sp>
-        <p:nvSpPr>
-          <p:cNvPr id="12" name="B2"/>
-          <p:cNvSpPr>
-            <a:spLocks noGrp="1"/>
-          </p:cNvSpPr>
-          <p:nvPr>
-            <p:ph type="body" idx="28"/>
-          </p:nvPr>
-        </p:nvSpPr>
-        <p:spPr/>
-        <p:txBody>
-          <a:bodyPr/>
-          <a:lstStyle/>
-          <a:p>
-            <a:pPr/>
-            <a:r>
-              <a:rPr lang="th-TH" dirty="0"/>
-              <a:t>กฎธุรกิจและวงเงินอนุมัติ</a:t>
-            </a:r>
-          </a:p>
-        </p:txBody>
-      </p:sp>
-      <p:sp>
-        <p:nvSpPr>
-          <p:cNvPr id="13" name="C3"/>
-          <p:cNvSpPr>
-            <a:spLocks noGrp="1"/>
-          </p:cNvSpPr>
-          <p:nvPr>
-            <p:ph type="body" idx="29"/>
-          </p:nvPr>
-        </p:nvSpPr>
-        <p:spPr/>
-        <p:txBody>
-          <a:bodyPr/>
-          <a:lstStyle/>
-          <a:p>
-            <a:pPr/>
-            <a:r>
-              <a:rPr lang="th-TH" dirty="0"/>
-              <a:t>4</a:t>
-            </a:r>
-          </a:p>
-        </p:txBody>
-      </p:sp>
-      <p:sp>
-        <p:nvSpPr>
-          <p:cNvPr id="14" name="H3"/>
-          <p:cNvSpPr>
-            <a:spLocks noGrp="1"/>
-          </p:cNvSpPr>
-          <p:nvPr>
-            <p:ph type="body" idx="30"/>
-          </p:nvPr>
-        </p:nvSpPr>
-        <p:spPr/>
-        <p:txBody>
-          <a:bodyPr/>
-          <a:lstStyle/>
-          <a:p>
-            <a:pPr/>
-            <a:r>
-              <a:rPr lang="th-TH" dirty="0"/>
-              <a:t>บันทึก</a:t>
-            </a:r>
-          </a:p>
-        </p:txBody>
-      </p:sp>
-      <p:sp>
-        <p:nvSpPr>
-          <p:cNvPr id="15" name="B3"/>
-          <p:cNvSpPr>
-            <a:spLocks noGrp="1"/>
-          </p:cNvSpPr>
-          <p:nvPr>
-            <p:ph type="body" idx="31"/>
-          </p:nvPr>
-        </p:nvSpPr>
-        <p:spPr/>
-        <p:txBody>
-          <a:bodyPr/>
-          <a:lstStyle/>
-          <a:p>
-            <a:pPr/>
-            <a:r>
-              <a:rPr lang="th-TH" dirty="0"/>
-              <a:t>ลงระบบบัญชีพร้อม audit trail</a:t>
-            </a:r>
-          </a:p>
-        </p:txBody>
-      </p:sp>
-      <p:sp>
-        <p:nvSpPr>
-          <p:cNvPr id="16" name="C4"/>
-          <p:cNvSpPr>
-            <a:spLocks noGrp="1"/>
-          </p:cNvSpPr>
-          <p:nvPr>
-            <p:ph type="body" idx="32"/>
-          </p:nvPr>
-        </p:nvSpPr>
-        <p:spPr/>
-        <p:txBody>
-          <a:bodyPr/>
-          <a:lstStyle/>
-          <a:p>
-            <a:pPr/>
-            <a:r>
-              <a:rPr lang="th-TH" dirty="0"/>
-              <a:t>5</a:t>
-            </a:r>
-          </a:p>
-        </p:txBody>
-      </p:sp>
-      <p:sp>
-        <p:nvSpPr>
-          <p:cNvPr id="17" name="H4"/>
-          <p:cNvSpPr>
-            <a:spLocks noGrp="1"/>
-          </p:cNvSpPr>
-          <p:nvPr>
-            <p:ph type="body" idx="33"/>
-          </p:nvPr>
-        </p:nvSpPr>
-        <p:spPr/>
-        <p:txBody>
-          <a:bodyPr/>
-          <a:lstStyle/>
-          <a:p>
-            <a:pPr/>
-            <a:r>
-              <a:rPr lang="th-TH" dirty="0"/>
-              <a:t>กระทบยอด</a:t>
-            </a:r>
-          </a:p>
-        </p:txBody>
-      </p:sp>
-      <p:sp>
-        <p:nvSpPr>
-          <p:cNvPr id="18" name="B4"/>
-          <p:cNvSpPr>
-            <a:spLocks noGrp="1"/>
-          </p:cNvSpPr>
-          <p:nvPr>
-            <p:ph type="body" idx="34"/>
-          </p:nvPr>
-        </p:nvSpPr>
-        <p:spPr/>
-        <p:txBody>
-          <a:bodyPr/>
-          <a:lstStyle/>
-          <a:p>
-            <a:pPr/>
-            <a:r>
-              <a:rPr lang="th-TH" dirty="0"/>
-              <a:t>จับคู่อัตโนมัติ ส่งรายงาน</a:t>
-            </a:r>
-          </a:p>
-        </p:txBody>
-      </p:sp>
-      <p:sp>
-        <p:nvSpPr>
-          <p:cNvPr id="19" name="RL"/>
-          <p:cNvSpPr>
-            <a:spLocks noGrp="1"/>
-          </p:cNvSpPr>
-          <p:nvPr>
-            <p:ph type="body" idx="35"/>
-          </p:nvPr>
-        </p:nvSpPr>
-        <p:spPr/>
-        <p:txBody>
-          <a:bodyPr/>
-          <a:lstStyle/>
-          <a:p>
-            <a:pPr/>
-            <a:r>
-              <a:rPr lang="th-TH" dirty="0"/>
-              <a:t>ผลลัพธ์</a:t>
-            </a:r>
-          </a:p>
-        </p:txBody>
-      </p:sp>
-      <p:sp>
-        <p:nvSpPr>
-          <p:cNvPr id="20" name="RC"/>
-          <p:cNvSpPr>
-            <a:spLocks noGrp="1"/>
-          </p:cNvSpPr>
-          <p:nvPr>
-            <p:ph type="body" idx="36"/>
-          </p:nvPr>
-        </p:nvSpPr>
-        <p:spPr/>
-        <p:txBody>
-          <a:bodyPr/>
-          <a:lstStyle/>
-          <a:p>
-            <a:pPr/>
-            <a:r>
-              <a:rPr lang="th-TH" dirty="0"/>
-              <a:t>เอกสารหนึ่งใบผ่านครบห้าขั้นโดยไม่มีการคีย์ซ้ำเลย</a:t>
+              <a:t>ระบบเดิมไม่ถูกแก้ ของใหม่แทรกเป็นคิวและตัวตรวจกฎคั่นกลางเท่านั้น</a:t>
+            </a:r>
+          </a:p>
+        </p:txBody>
+      </p:sp>
+      <p:sp>
+        <p:nvSpPr>
+          <p:cNvPr id="10" name="Group Zone"/>
+          <p:cNvSpPr/>
+          <p:nvPr/>
+        </p:nvSpPr>
+        <p:spPr>
+          <a:xfrm>
+            <a:off x="3566160" y="2766060"/>
+            <a:ext cx="5257800" cy="1645920"/>
+          </a:xfrm>
+          <a:prstGeom prst="rect">
+            <a:avLst/>
+          </a:prstGeom>
+          <a:solidFill>
+            <a:srgbClr val="E8F6F5"/>
+          </a:solidFill>
+          <a:ln>
+            <a:noFill/>
+          </a:ln>
+        </p:spPr>
+        <p:txBody>
+          <a:bodyPr/>
+          <a:lstStyle/>
+          <a:p>
+            <a:endParaRPr lang="th-TH"/>
+          </a:p>
+        </p:txBody>
+      </p:sp>
+      <p:sp>
+        <p:nvSpPr>
+          <p:cNvPr id="11" name="Group Label"/>
+          <p:cNvSpPr/>
+          <p:nvPr/>
+        </p:nvSpPr>
+        <p:spPr>
+          <a:xfrm>
+            <a:off x="3840480" y="2926080"/>
+            <a:ext cx="3200400" cy="228600"/>
+          </a:xfrm>
+          <a:prstGeom prst="rect">
+            <a:avLst/>
+          </a:prstGeom>
+          <a:noFill/>
+          <a:ln>
+            <a:noFill/>
+          </a:ln>
+        </p:spPr>
+        <p:txBody>
+          <a:bodyPr wrap="square" anchor="ctr" lIns="0" tIns="0" rIns="0" bIns="0" rtlCol="0"/>
+          <a:lstStyle/>
+          <a:p>
+            <a:pPr algn="l" marL="0" indent="0">
+              <a:lnSpc>
+                <a:spcPct val="100000"/>
+              </a:lnSpc>
+              <a:buNone/>
+            </a:pPr>
+            <a:r>
+              <a:rPr lang="th-TH" sz="1200" b="1" dirty="0">
+                <a:solidFill>
+                  <a:srgbClr val="216B7F"/>
+                </a:solidFill>
+                <a:latin typeface="+mn-lt"/>
+                <a:ea typeface="+mn-ea"/>
+                <a:cs typeface="+mn-cs"/>
+              </a:rPr>
+              <a:t>ส่วนที่เพิ่มใหม่</a:t>
+            </a:r>
+          </a:p>
+        </p:txBody>
+      </p:sp>
+      <p:sp>
+        <p:nvSpPr>
+          <p:cNvPr id="12" name="Box 1"/>
+          <p:cNvSpPr/>
+          <p:nvPr/>
+        </p:nvSpPr>
+        <p:spPr>
+          <a:xfrm>
+            <a:off x="1143000" y="3223260"/>
+            <a:ext cx="2011680" cy="731520"/>
+          </a:xfrm>
+          <a:prstGeom prst="rect">
+            <a:avLst/>
+          </a:prstGeom>
+          <a:solidFill>
+            <a:srgbClr val="23436D"/>
+          </a:solidFill>
+          <a:ln>
+            <a:noFill/>
+          </a:ln>
+        </p:spPr>
+        <p:txBody>
+          <a:bodyPr wrap="square" anchor="ctr" lIns="0" tIns="0" rIns="0" bIns="0" rtlCol="0"/>
+          <a:lstStyle/>
+          <a:p>
+            <a:pPr algn="ctr" marL="0" indent="0">
+              <a:lnSpc>
+                <a:spcPct val="110000"/>
+              </a:lnSpc>
+              <a:buNone/>
+            </a:pPr>
+            <a:r>
+              <a:rPr lang="th-TH" sz="1200" dirty="0">
+                <a:solidFill>
+                  <a:srgbClr val="FFFFFF"/>
+                </a:solidFill>
+                <a:latin typeface="+mn-lt"/>
+                <a:ea typeface="+mn-ea"/>
+                <a:cs typeface="+mn-cs"/>
+              </a:rPr>
+              <a:t>ระบบ ERP ปัจจุบัน</a:t>
+            </a:r>
+          </a:p>
+        </p:txBody>
+      </p:sp>
+      <p:sp>
+        <p:nvSpPr>
+          <p:cNvPr id="13" name="Box 2"/>
+          <p:cNvSpPr/>
+          <p:nvPr/>
+        </p:nvSpPr>
+        <p:spPr>
+          <a:xfrm>
+            <a:off x="3840480" y="3223260"/>
+            <a:ext cx="2011680" cy="731520"/>
+          </a:xfrm>
+          <a:prstGeom prst="rect">
+            <a:avLst/>
+          </a:prstGeom>
+          <a:solidFill>
+            <a:srgbClr val="FFFFFF"/>
+          </a:solidFill>
+          <a:ln w="12700">
+            <a:solidFill>
+              <a:srgbClr val="2A5EA0"/>
+            </a:solidFill>
+          </a:ln>
+        </p:spPr>
+        <p:txBody>
+          <a:bodyPr wrap="square" anchor="ctr" lIns="0" tIns="0" rIns="0" bIns="0" rtlCol="0"/>
+          <a:lstStyle/>
+          <a:p>
+            <a:pPr algn="ctr" marL="0" indent="0">
+              <a:lnSpc>
+                <a:spcPct val="110000"/>
+              </a:lnSpc>
+              <a:buNone/>
+            </a:pPr>
+            <a:r>
+              <a:rPr lang="th-TH" sz="1200" dirty="0">
+                <a:solidFill>
+                  <a:srgbClr val="333333"/>
+                </a:solidFill>
+                <a:latin typeface="+mn-lt"/>
+                <a:ea typeface="+mn-ea"/>
+                <a:cs typeface="+mn-cs"/>
+              </a:rPr>
+              <a:t>คิวเอกสารกลาง</a:t>
+            </a:r>
+          </a:p>
+        </p:txBody>
+      </p:sp>
+      <p:sp>
+        <p:nvSpPr>
+          <p:cNvPr id="113" name="Box 2 Tab"/>
+          <p:cNvSpPr/>
+          <p:nvPr/>
+        </p:nvSpPr>
+        <p:spPr>
+          <a:xfrm>
+            <a:off x="3954780" y="3337560"/>
+            <a:ext cx="205740" cy="45720"/>
+          </a:xfrm>
+          <a:prstGeom prst="rect">
+            <a:avLst/>
+          </a:prstGeom>
+          <a:solidFill>
+            <a:srgbClr val="2A5EA0"/>
+          </a:solidFill>
+          <a:ln>
+            <a:noFill/>
+          </a:ln>
+        </p:spPr>
+        <p:txBody>
+          <a:bodyPr/>
+          <a:lstStyle/>
+          <a:p>
+            <a:endParaRPr lang="th-TH"/>
+          </a:p>
+        </p:txBody>
+      </p:sp>
+      <p:sp>
+        <p:nvSpPr>
+          <p:cNvPr id="14" name="Box 3"/>
+          <p:cNvSpPr/>
+          <p:nvPr/>
+        </p:nvSpPr>
+        <p:spPr>
+          <a:xfrm>
+            <a:off x="6537960" y="3223260"/>
+            <a:ext cx="2011680" cy="731520"/>
+          </a:xfrm>
+          <a:prstGeom prst="rect">
+            <a:avLst/>
+          </a:prstGeom>
+          <a:solidFill>
+            <a:srgbClr val="FFFFFF"/>
+          </a:solidFill>
+          <a:ln w="12700">
+            <a:solidFill>
+              <a:srgbClr val="BB731B"/>
+            </a:solidFill>
+          </a:ln>
+        </p:spPr>
+        <p:txBody>
+          <a:bodyPr wrap="square" anchor="ctr" lIns="0" tIns="0" rIns="0" bIns="0" rtlCol="0"/>
+          <a:lstStyle/>
+          <a:p>
+            <a:pPr algn="ctr" marL="0" indent="0">
+              <a:lnSpc>
+                <a:spcPct val="110000"/>
+              </a:lnSpc>
+              <a:buNone/>
+            </a:pPr>
+            <a:r>
+              <a:rPr lang="th-TH" sz="1200" dirty="0">
+                <a:solidFill>
+                  <a:srgbClr val="333333"/>
+                </a:solidFill>
+                <a:latin typeface="+mn-lt"/>
+                <a:ea typeface="+mn-ea"/>
+                <a:cs typeface="+mn-cs"/>
+              </a:rPr>
+              <a:t>ตัวตรวจกฎธุรกิจ</a:t>
+            </a:r>
+          </a:p>
+        </p:txBody>
+      </p:sp>
+      <p:sp>
+        <p:nvSpPr>
+          <p:cNvPr id="114" name="Box 3 Tab"/>
+          <p:cNvSpPr/>
+          <p:nvPr/>
+        </p:nvSpPr>
+        <p:spPr>
+          <a:xfrm>
+            <a:off x="6652260" y="3337560"/>
+            <a:ext cx="205740" cy="45720"/>
+          </a:xfrm>
+          <a:prstGeom prst="rect">
+            <a:avLst/>
+          </a:prstGeom>
+          <a:solidFill>
+            <a:srgbClr val="BB731B"/>
+          </a:solidFill>
+          <a:ln>
+            <a:noFill/>
+          </a:ln>
+        </p:spPr>
+        <p:txBody>
+          <a:bodyPr/>
+          <a:lstStyle/>
+          <a:p>
+            <a:endParaRPr lang="th-TH"/>
+          </a:p>
+        </p:txBody>
+      </p:sp>
+      <p:sp>
+        <p:nvSpPr>
+          <p:cNvPr id="15" name="Box 4"/>
+          <p:cNvSpPr/>
+          <p:nvPr/>
+        </p:nvSpPr>
+        <p:spPr>
+          <a:xfrm>
+            <a:off x="9235440" y="3223260"/>
+            <a:ext cx="2011680" cy="731520"/>
+          </a:xfrm>
+          <a:prstGeom prst="rect">
+            <a:avLst/>
+          </a:prstGeom>
+          <a:solidFill>
+            <a:srgbClr val="23436D"/>
+          </a:solidFill>
+          <a:ln>
+            <a:noFill/>
+          </a:ln>
+        </p:spPr>
+        <p:txBody>
+          <a:bodyPr wrap="square" anchor="ctr" lIns="0" tIns="0" rIns="0" bIns="0" rtlCol="0"/>
+          <a:lstStyle/>
+          <a:p>
+            <a:pPr algn="ctr" marL="0" indent="0">
+              <a:lnSpc>
+                <a:spcPct val="110000"/>
+              </a:lnSpc>
+              <a:buNone/>
+            </a:pPr>
+            <a:r>
+              <a:rPr lang="th-TH" sz="1200" dirty="0">
+                <a:solidFill>
+                  <a:srgbClr val="FFFFFF"/>
+                </a:solidFill>
+                <a:latin typeface="+mn-lt"/>
+                <a:ea typeface="+mn-ea"/>
+                <a:cs typeface="+mn-cs"/>
+              </a:rPr>
+              <a:t>ระบบบัญชี</a:t>
+            </a:r>
+          </a:p>
+        </p:txBody>
+      </p:sp>
+      <p:sp>
+        <p:nvSpPr>
+          <p:cNvPr id="16" name="Link 1"/>
+          <p:cNvSpPr/>
+          <p:nvPr/>
+        </p:nvSpPr>
+        <p:spPr>
+          <a:xfrm>
+            <a:off x="3268980" y="3589020"/>
+            <a:ext cx="457200" cy="0"/>
+          </a:xfrm>
+          <a:prstGeom prst="line">
+            <a:avLst/>
+          </a:prstGeom>
+          <a:noFill/>
+          <a:ln w="15875" cap="flat">
+            <a:solidFill>
+              <a:srgbClr val="216B7F"/>
+            </a:solidFill>
+            <a:prstDash val="solid"/>
+            <a:tailEnd type="triangle" w="med" len="med"/>
+          </a:ln>
+        </p:spPr>
+        <p:txBody>
+          <a:bodyPr/>
+          <a:lstStyle/>
+          <a:p>
+            <a:endParaRPr lang="th-TH"/>
+          </a:p>
+        </p:txBody>
+      </p:sp>
+      <p:sp>
+        <p:nvSpPr>
+          <p:cNvPr id="17" name="Link 2"/>
+          <p:cNvSpPr/>
+          <p:nvPr/>
+        </p:nvSpPr>
+        <p:spPr>
+          <a:xfrm>
+            <a:off x="5966460" y="3589020"/>
+            <a:ext cx="457200" cy="0"/>
+          </a:xfrm>
+          <a:prstGeom prst="line">
+            <a:avLst/>
+          </a:prstGeom>
+          <a:noFill/>
+          <a:ln w="15875" cap="flat">
+            <a:solidFill>
+              <a:srgbClr val="216B7F"/>
+            </a:solidFill>
+            <a:prstDash val="solid"/>
+            <a:tailEnd type="triangle" w="med" len="med"/>
+          </a:ln>
+        </p:spPr>
+        <p:txBody>
+          <a:bodyPr/>
+          <a:lstStyle/>
+          <a:p>
+            <a:endParaRPr lang="th-TH"/>
+          </a:p>
+        </p:txBody>
+      </p:sp>
+      <p:sp>
+        <p:nvSpPr>
+          <p:cNvPr id="18" name="Link 3"/>
+          <p:cNvSpPr/>
+          <p:nvPr/>
+        </p:nvSpPr>
+        <p:spPr>
+          <a:xfrm>
+            <a:off x="8663940" y="3589020"/>
+            <a:ext cx="457200" cy="0"/>
+          </a:xfrm>
+          <a:prstGeom prst="line">
+            <a:avLst/>
+          </a:prstGeom>
+          <a:noFill/>
+          <a:ln w="15875" cap="flat">
+            <a:solidFill>
+              <a:srgbClr val="216B7F"/>
+            </a:solidFill>
+            <a:prstDash val="solid"/>
+            <a:tailEnd type="triangle" w="med" len="med"/>
+          </a:ln>
+        </p:spPr>
+        <p:txBody>
+          <a:bodyPr/>
+          <a:lstStyle/>
+          <a:p>
+            <a:endParaRPr lang="th-TH"/>
+          </a:p>
+        </p:txBody>
+      </p:sp>
+      <p:sp>
+        <p:nvSpPr>
+          <p:cNvPr id="19" name="Edge Label"/>
+          <p:cNvSpPr/>
+          <p:nvPr/>
+        </p:nvSpPr>
+        <p:spPr>
+          <a:xfrm>
+            <a:off x="5806440" y="3268980"/>
+            <a:ext cx="822960" cy="228600"/>
+          </a:xfrm>
+          <a:prstGeom prst="rect">
+            <a:avLst/>
+          </a:prstGeom>
+          <a:noFill/>
+          <a:ln>
+            <a:noFill/>
+          </a:ln>
+        </p:spPr>
+        <p:txBody>
+          <a:bodyPr wrap="square" anchor="ctr" lIns="0" tIns="0" rIns="0" bIns="0" rtlCol="0"/>
+          <a:lstStyle/>
+          <a:p>
+            <a:pPr algn="ctr" marL="0" indent="0">
+              <a:lnSpc>
+                <a:spcPct val="100000"/>
+              </a:lnSpc>
+              <a:buNone/>
+            </a:pPr>
+            <a:r>
+              <a:rPr lang="th-TH" sz="1000" dirty="0">
+                <a:solidFill>
+                  <a:srgbClr val="5F5F5F"/>
+                </a:solidFill>
+                <a:latin typeface="+mn-lt"/>
+                <a:ea typeface="+mn-ea"/>
+                <a:cs typeface="+mn-cs"/>
+              </a:rPr>
+              <a:t>ผ่านกฎ</a:t>
             </a:r>
           </a:p>
         </p:txBody>
@@ -32390,596 +32967,6 @@
 </file>
 
 <file path=ppt/slides/slide12.xml><?xml version="1.0" encoding="utf-8"?>
-<p:sld xmlns:a="http://schemas.openxmlformats.org/drawingml/2006/main" xmlns:r="http://schemas.openxmlformats.org/officeDocument/2006/relationships" xmlns:p="http://schemas.openxmlformats.org/presentationml/2006/main">
-  <p:cSld name="">
-    <p:spTree>
-      <p:nvGrpSpPr>
-        <p:cNvPr id="1" name=""/>
-        <p:cNvGrpSpPr/>
-        <p:nvPr/>
-      </p:nvGrpSpPr>
-      <p:grpSpPr>
-        <a:xfrm>
-          <a:off x="0" y="0"/>
-          <a:ext cx="0" cy="0"/>
-          <a:chOff x="0" y="0"/>
-          <a:chExt cx="0" cy="0"/>
-        </a:xfrm>
-      </p:grpSpPr>
-      <p:sp>
-        <p:nvSpPr>
-          <p:cNvPr id="2" name="Title"/>
-          <p:cNvSpPr>
-            <a:spLocks noGrp="1"/>
-          </p:cNvSpPr>
-          <p:nvPr>
-            <p:ph type="title"/>
-          </p:nvPr>
-        </p:nvSpPr>
-        <p:spPr/>
-        <p:txBody>
-          <a:bodyPr/>
-          <a:lstStyle/>
-          <a:p>
-            <a:pPr/>
-            <a:r>
-              <a:rPr lang="th-TH" dirty="0"/>
-              <a:t>ภาพรวมสถาปัตยกรรมระบบ</a:t>
-            </a:r>
-          </a:p>
-        </p:txBody>
-      </p:sp>
-      <p:sp>
-        <p:nvSpPr>
-          <p:cNvPr id="3" name="Sub"/>
-          <p:cNvSpPr>
-            <a:spLocks noGrp="1"/>
-          </p:cNvSpPr>
-          <p:nvPr>
-            <p:ph type="body" idx="1"/>
-          </p:nvPr>
-        </p:nvSpPr>
-        <p:spPr/>
-        <p:txBody>
-          <a:bodyPr/>
-          <a:lstStyle/>
-          <a:p>
-            <a:pPr/>
-            <a:r>
-              <a:rPr lang="th-TH" dirty="0"/>
-              <a:t>ใช้ชุดชิ้นส่วนมาตรฐาน — กล่องมุมตรง เส้นหักมุมฉาก ไม่มีเงา</a:t>
-            </a:r>
-          </a:p>
-        </p:txBody>
-      </p:sp>
-      <p:sp>
-        <p:nvSpPr>
-          <p:cNvPr id="4" name="Leg"/>
-          <p:cNvSpPr>
-            <a:spLocks noGrp="1"/>
-          </p:cNvSpPr>
-          <p:nvPr>
-            <p:ph type="body" idx="2"/>
-          </p:nvPr>
-        </p:nvSpPr>
-        <p:spPr/>
-        <p:txBody>
-          <a:bodyPr/>
-          <a:lstStyle/>
-          <a:p>
-            <a:pPr/>
-            <a:r>
-              <a:rPr lang="th-TH" dirty="0"/>
-              <a:t>กล่องทึบ = ระบบที่มีอยู่  ·  กล่องมีสีหมวด = ส่วนที่เพิ่ม  ·  เส้นทึบ = ข้อมูลไหลอัตโนมัติ</a:t>
-            </a:r>
-          </a:p>
-        </p:txBody>
-      </p:sp>
-      <p:sp>
-        <p:nvSpPr>
-          <p:cNvPr id="5" name="TL"/>
-          <p:cNvSpPr>
-            <a:spLocks noGrp="1"/>
-          </p:cNvSpPr>
-          <p:nvPr>
-            <p:ph type="body" idx="3"/>
-          </p:nvPr>
-        </p:nvSpPr>
-        <p:spPr/>
-        <p:txBody>
-          <a:bodyPr/>
-          <a:lstStyle/>
-          <a:p>
-            <a:pPr/>
-            <a:r>
-              <a:rPr lang="th-TH" dirty="0"/>
-              <a:t>สรุป</a:t>
-            </a:r>
-          </a:p>
-        </p:txBody>
-      </p:sp>
-      <p:sp>
-        <p:nvSpPr>
-          <p:cNvPr id="6" name="TC"/>
-          <p:cNvSpPr>
-            <a:spLocks noGrp="1"/>
-          </p:cNvSpPr>
-          <p:nvPr>
-            <p:ph type="body" idx="4"/>
-          </p:nvPr>
-        </p:nvSpPr>
-        <p:spPr/>
-        <p:txBody>
-          <a:bodyPr/>
-          <a:lstStyle/>
-          <a:p>
-            <a:pPr/>
-            <a:r>
-              <a:rPr lang="th-TH" dirty="0"/>
-              <a:t>ระบบเดิมไม่ถูกแก้ ของใหม่แทรกเป็นคิวและตัวตรวจกฎคั่นกลางเท่านั้น</a:t>
-            </a:r>
-          </a:p>
-        </p:txBody>
-      </p:sp>
-      <p:sp>
-        <p:nvSpPr>
-          <p:cNvPr id="10" name="Group Zone"/>
-          <p:cNvSpPr/>
-          <p:nvPr/>
-        </p:nvSpPr>
-        <p:spPr>
-          <a:xfrm>
-            <a:off x="3566160" y="2766060"/>
-            <a:ext cx="5257800" cy="1645920"/>
-          </a:xfrm>
-          <a:prstGeom prst="rect">
-            <a:avLst/>
-          </a:prstGeom>
-          <a:solidFill>
-            <a:srgbClr val="E8F6F5"/>
-          </a:solidFill>
-          <a:ln>
-            <a:noFill/>
-          </a:ln>
-        </p:spPr>
-        <p:txBody>
-          <a:bodyPr/>
-          <a:lstStyle/>
-          <a:p>
-            <a:endParaRPr lang="th-TH"/>
-          </a:p>
-        </p:txBody>
-      </p:sp>
-      <p:sp>
-        <p:nvSpPr>
-          <p:cNvPr id="11" name="Group Label"/>
-          <p:cNvSpPr/>
-          <p:nvPr/>
-        </p:nvSpPr>
-        <p:spPr>
-          <a:xfrm>
-            <a:off x="3840480" y="2926080"/>
-            <a:ext cx="3200400" cy="228600"/>
-          </a:xfrm>
-          <a:prstGeom prst="rect">
-            <a:avLst/>
-          </a:prstGeom>
-          <a:noFill/>
-          <a:ln>
-            <a:noFill/>
-          </a:ln>
-        </p:spPr>
-        <p:txBody>
-          <a:bodyPr wrap="square" anchor="ctr" lIns="0" tIns="0" rIns="0" bIns="0" rtlCol="0"/>
-          <a:lstStyle/>
-          <a:p>
-            <a:pPr algn="l" marL="0" indent="0">
-              <a:lnSpc>
-                <a:spcPct val="100000"/>
-              </a:lnSpc>
-              <a:buNone/>
-            </a:pPr>
-            <a:r>
-              <a:rPr lang="th-TH" sz="1200" b="1" dirty="0">
-                <a:solidFill>
-                  <a:srgbClr val="216B7F"/>
-                </a:solidFill>
-                <a:latin typeface="+mn-lt"/>
-                <a:ea typeface="+mn-ea"/>
-                <a:cs typeface="+mn-cs"/>
-              </a:rPr>
-              <a:t>ส่วนที่เพิ่มใหม่</a:t>
-            </a:r>
-          </a:p>
-        </p:txBody>
-      </p:sp>
-      <p:sp>
-        <p:nvSpPr>
-          <p:cNvPr id="12" name="Box 1"/>
-          <p:cNvSpPr/>
-          <p:nvPr/>
-        </p:nvSpPr>
-        <p:spPr>
-          <a:xfrm>
-            <a:off x="1143000" y="3223260"/>
-            <a:ext cx="2011680" cy="731520"/>
-          </a:xfrm>
-          <a:prstGeom prst="rect">
-            <a:avLst/>
-          </a:prstGeom>
-          <a:solidFill>
-            <a:srgbClr val="23436D"/>
-          </a:solidFill>
-          <a:ln>
-            <a:noFill/>
-          </a:ln>
-        </p:spPr>
-        <p:txBody>
-          <a:bodyPr wrap="square" anchor="ctr" lIns="0" tIns="0" rIns="0" bIns="0" rtlCol="0"/>
-          <a:lstStyle/>
-          <a:p>
-            <a:pPr algn="ctr" marL="0" indent="0">
-              <a:lnSpc>
-                <a:spcPct val="110000"/>
-              </a:lnSpc>
-              <a:buNone/>
-            </a:pPr>
-            <a:r>
-              <a:rPr lang="th-TH" sz="1200" dirty="0">
-                <a:solidFill>
-                  <a:srgbClr val="FFFFFF"/>
-                </a:solidFill>
-                <a:latin typeface="+mn-lt"/>
-                <a:ea typeface="+mn-ea"/>
-                <a:cs typeface="+mn-cs"/>
-              </a:rPr>
-              <a:t>ระบบ ERP ปัจจุบัน</a:t>
-            </a:r>
-          </a:p>
-        </p:txBody>
-      </p:sp>
-      <p:sp>
-        <p:nvSpPr>
-          <p:cNvPr id="13" name="Box 2"/>
-          <p:cNvSpPr/>
-          <p:nvPr/>
-        </p:nvSpPr>
-        <p:spPr>
-          <a:xfrm>
-            <a:off x="3840480" y="3223260"/>
-            <a:ext cx="2011680" cy="731520"/>
-          </a:xfrm>
-          <a:prstGeom prst="rect">
-            <a:avLst/>
-          </a:prstGeom>
-          <a:solidFill>
-            <a:srgbClr val="FFFFFF"/>
-          </a:solidFill>
-          <a:ln w="12700">
-            <a:solidFill>
-              <a:srgbClr val="2A5EA0"/>
-            </a:solidFill>
-          </a:ln>
-        </p:spPr>
-        <p:txBody>
-          <a:bodyPr wrap="square" anchor="ctr" lIns="0" tIns="0" rIns="0" bIns="0" rtlCol="0"/>
-          <a:lstStyle/>
-          <a:p>
-            <a:pPr algn="ctr" marL="0" indent="0">
-              <a:lnSpc>
-                <a:spcPct val="110000"/>
-              </a:lnSpc>
-              <a:buNone/>
-            </a:pPr>
-            <a:r>
-              <a:rPr lang="th-TH" sz="1200" dirty="0">
-                <a:solidFill>
-                  <a:srgbClr val="333333"/>
-                </a:solidFill>
-                <a:latin typeface="+mn-lt"/>
-                <a:ea typeface="+mn-ea"/>
-                <a:cs typeface="+mn-cs"/>
-              </a:rPr>
-              <a:t>คิวเอกสารกลาง</a:t>
-            </a:r>
-          </a:p>
-        </p:txBody>
-      </p:sp>
-      <p:sp>
-        <p:nvSpPr>
-          <p:cNvPr id="113" name="Box 2 Tab"/>
-          <p:cNvSpPr/>
-          <p:nvPr/>
-        </p:nvSpPr>
-        <p:spPr>
-          <a:xfrm>
-            <a:off x="3954780" y="3337560"/>
-            <a:ext cx="205740" cy="45720"/>
-          </a:xfrm>
-          <a:prstGeom prst="rect">
-            <a:avLst/>
-          </a:prstGeom>
-          <a:solidFill>
-            <a:srgbClr val="2A5EA0"/>
-          </a:solidFill>
-          <a:ln>
-            <a:noFill/>
-          </a:ln>
-        </p:spPr>
-        <p:txBody>
-          <a:bodyPr/>
-          <a:lstStyle/>
-          <a:p>
-            <a:endParaRPr lang="th-TH"/>
-          </a:p>
-        </p:txBody>
-      </p:sp>
-      <p:sp>
-        <p:nvSpPr>
-          <p:cNvPr id="14" name="Box 3"/>
-          <p:cNvSpPr/>
-          <p:nvPr/>
-        </p:nvSpPr>
-        <p:spPr>
-          <a:xfrm>
-            <a:off x="6537960" y="3223260"/>
-            <a:ext cx="2011680" cy="731520"/>
-          </a:xfrm>
-          <a:prstGeom prst="rect">
-            <a:avLst/>
-          </a:prstGeom>
-          <a:solidFill>
-            <a:srgbClr val="FFFFFF"/>
-          </a:solidFill>
-          <a:ln w="12700">
-            <a:solidFill>
-              <a:srgbClr val="BB731B"/>
-            </a:solidFill>
-          </a:ln>
-        </p:spPr>
-        <p:txBody>
-          <a:bodyPr wrap="square" anchor="ctr" lIns="0" tIns="0" rIns="0" bIns="0" rtlCol="0"/>
-          <a:lstStyle/>
-          <a:p>
-            <a:pPr algn="ctr" marL="0" indent="0">
-              <a:lnSpc>
-                <a:spcPct val="110000"/>
-              </a:lnSpc>
-              <a:buNone/>
-            </a:pPr>
-            <a:r>
-              <a:rPr lang="th-TH" sz="1200" dirty="0">
-                <a:solidFill>
-                  <a:srgbClr val="333333"/>
-                </a:solidFill>
-                <a:latin typeface="+mn-lt"/>
-                <a:ea typeface="+mn-ea"/>
-                <a:cs typeface="+mn-cs"/>
-              </a:rPr>
-              <a:t>ตัวตรวจกฎธุรกิจ</a:t>
-            </a:r>
-          </a:p>
-        </p:txBody>
-      </p:sp>
-      <p:sp>
-        <p:nvSpPr>
-          <p:cNvPr id="114" name="Box 3 Tab"/>
-          <p:cNvSpPr/>
-          <p:nvPr/>
-        </p:nvSpPr>
-        <p:spPr>
-          <a:xfrm>
-            <a:off x="6652260" y="3337560"/>
-            <a:ext cx="205740" cy="45720"/>
-          </a:xfrm>
-          <a:prstGeom prst="rect">
-            <a:avLst/>
-          </a:prstGeom>
-          <a:solidFill>
-            <a:srgbClr val="BB731B"/>
-          </a:solidFill>
-          <a:ln>
-            <a:noFill/>
-          </a:ln>
-        </p:spPr>
-        <p:txBody>
-          <a:bodyPr/>
-          <a:lstStyle/>
-          <a:p>
-            <a:endParaRPr lang="th-TH"/>
-          </a:p>
-        </p:txBody>
-      </p:sp>
-      <p:sp>
-        <p:nvSpPr>
-          <p:cNvPr id="15" name="Box 4"/>
-          <p:cNvSpPr/>
-          <p:nvPr/>
-        </p:nvSpPr>
-        <p:spPr>
-          <a:xfrm>
-            <a:off x="9235440" y="3223260"/>
-            <a:ext cx="2011680" cy="731520"/>
-          </a:xfrm>
-          <a:prstGeom prst="rect">
-            <a:avLst/>
-          </a:prstGeom>
-          <a:solidFill>
-            <a:srgbClr val="23436D"/>
-          </a:solidFill>
-          <a:ln>
-            <a:noFill/>
-          </a:ln>
-        </p:spPr>
-        <p:txBody>
-          <a:bodyPr wrap="square" anchor="ctr" lIns="0" tIns="0" rIns="0" bIns="0" rtlCol="0"/>
-          <a:lstStyle/>
-          <a:p>
-            <a:pPr algn="ctr" marL="0" indent="0">
-              <a:lnSpc>
-                <a:spcPct val="110000"/>
-              </a:lnSpc>
-              <a:buNone/>
-            </a:pPr>
-            <a:r>
-              <a:rPr lang="th-TH" sz="1200" dirty="0">
-                <a:solidFill>
-                  <a:srgbClr val="FFFFFF"/>
-                </a:solidFill>
-                <a:latin typeface="+mn-lt"/>
-                <a:ea typeface="+mn-ea"/>
-                <a:cs typeface="+mn-cs"/>
-              </a:rPr>
-              <a:t>ระบบบัญชี</a:t>
-            </a:r>
-          </a:p>
-        </p:txBody>
-      </p:sp>
-      <p:sp>
-        <p:nvSpPr>
-          <p:cNvPr id="16" name="Link 1"/>
-          <p:cNvSpPr/>
-          <p:nvPr/>
-        </p:nvSpPr>
-        <p:spPr>
-          <a:xfrm>
-            <a:off x="3268980" y="3589020"/>
-            <a:ext cx="457200" cy="0"/>
-          </a:xfrm>
-          <a:prstGeom prst="line">
-            <a:avLst/>
-          </a:prstGeom>
-          <a:noFill/>
-          <a:ln w="15875" cap="flat">
-            <a:solidFill>
-              <a:srgbClr val="216B7F"/>
-            </a:solidFill>
-            <a:prstDash val="solid"/>
-            <a:tailEnd type="triangle" w="med" len="med"/>
-          </a:ln>
-        </p:spPr>
-        <p:txBody>
-          <a:bodyPr/>
-          <a:lstStyle/>
-          <a:p>
-            <a:endParaRPr lang="th-TH"/>
-          </a:p>
-        </p:txBody>
-      </p:sp>
-      <p:sp>
-        <p:nvSpPr>
-          <p:cNvPr id="17" name="Link 2"/>
-          <p:cNvSpPr/>
-          <p:nvPr/>
-        </p:nvSpPr>
-        <p:spPr>
-          <a:xfrm>
-            <a:off x="5966460" y="3589020"/>
-            <a:ext cx="457200" cy="0"/>
-          </a:xfrm>
-          <a:prstGeom prst="line">
-            <a:avLst/>
-          </a:prstGeom>
-          <a:noFill/>
-          <a:ln w="15875" cap="flat">
-            <a:solidFill>
-              <a:srgbClr val="216B7F"/>
-            </a:solidFill>
-            <a:prstDash val="solid"/>
-            <a:tailEnd type="triangle" w="med" len="med"/>
-          </a:ln>
-        </p:spPr>
-        <p:txBody>
-          <a:bodyPr/>
-          <a:lstStyle/>
-          <a:p>
-            <a:endParaRPr lang="th-TH"/>
-          </a:p>
-        </p:txBody>
-      </p:sp>
-      <p:sp>
-        <p:nvSpPr>
-          <p:cNvPr id="18" name="Link 3"/>
-          <p:cNvSpPr/>
-          <p:nvPr/>
-        </p:nvSpPr>
-        <p:spPr>
-          <a:xfrm>
-            <a:off x="8663940" y="3589020"/>
-            <a:ext cx="457200" cy="0"/>
-          </a:xfrm>
-          <a:prstGeom prst="line">
-            <a:avLst/>
-          </a:prstGeom>
-          <a:noFill/>
-          <a:ln w="15875" cap="flat">
-            <a:solidFill>
-              <a:srgbClr val="216B7F"/>
-            </a:solidFill>
-            <a:prstDash val="solid"/>
-            <a:tailEnd type="triangle" w="med" len="med"/>
-          </a:ln>
-        </p:spPr>
-        <p:txBody>
-          <a:bodyPr/>
-          <a:lstStyle/>
-          <a:p>
-            <a:endParaRPr lang="th-TH"/>
-          </a:p>
-        </p:txBody>
-      </p:sp>
-      <p:sp>
-        <p:nvSpPr>
-          <p:cNvPr id="19" name="Edge Label"/>
-          <p:cNvSpPr/>
-          <p:nvPr/>
-        </p:nvSpPr>
-        <p:spPr>
-          <a:xfrm>
-            <a:off x="5806440" y="3268980"/>
-            <a:ext cx="822960" cy="228600"/>
-          </a:xfrm>
-          <a:prstGeom prst="rect">
-            <a:avLst/>
-          </a:prstGeom>
-          <a:noFill/>
-          <a:ln>
-            <a:noFill/>
-          </a:ln>
-        </p:spPr>
-        <p:txBody>
-          <a:bodyPr wrap="square" anchor="ctr" lIns="0" tIns="0" rIns="0" bIns="0" rtlCol="0"/>
-          <a:lstStyle/>
-          <a:p>
-            <a:pPr algn="ctr" marL="0" indent="0">
-              <a:lnSpc>
-                <a:spcPct val="100000"/>
-              </a:lnSpc>
-              <a:buNone/>
-            </a:pPr>
-            <a:r>
-              <a:rPr lang="th-TH" sz="1000" dirty="0">
-                <a:solidFill>
-                  <a:srgbClr val="5F5F5F"/>
-                </a:solidFill>
-                <a:latin typeface="+mn-lt"/>
-                <a:ea typeface="+mn-ea"/>
-                <a:cs typeface="+mn-cs"/>
-              </a:rPr>
-              <a:t>ผ่านกฎ</a:t>
-            </a:r>
-          </a:p>
-        </p:txBody>
-      </p:sp>
-    </p:spTree>
-  </p:cSld>
-  <p:clrMapOvr>
-    <a:masterClrMapping/>
-  </p:clrMapOvr>
-</p:sld>
-</file>
-
-<file path=ppt/slides/slide13.xml><?xml version="1.0" encoding="utf-8"?>
 <p:sld xmlns:a="http://schemas.openxmlformats.org/drawingml/2006/main" xmlns:r="http://schemas.openxmlformats.org/officeDocument/2006/relationships" xmlns:p="http://schemas.openxmlformats.org/presentationml/2006/main">
   <p:cSld name="">
     <p:spTree>
@@ -34516,6 +34503,174 @@
 </p:sld>
 </file>
 
+<file path=ppt/slides/slide13.xml><?xml version="1.0" encoding="utf-8"?>
+<p:sld xmlns:a="http://schemas.openxmlformats.org/drawingml/2006/main" xmlns:r="http://schemas.openxmlformats.org/officeDocument/2006/relationships" xmlns:p="http://schemas.openxmlformats.org/presentationml/2006/main">
+  <p:cSld name="">
+    <p:spTree>
+      <p:nvGrpSpPr>
+        <p:cNvPr id="1" name=""/>
+        <p:cNvGrpSpPr/>
+        <p:nvPr/>
+      </p:nvGrpSpPr>
+      <p:grpSpPr>
+        <a:xfrm>
+          <a:off x="0" y="0"/>
+          <a:ext cx="0" cy="0"/>
+          <a:chOff x="0" y="0"/>
+          <a:chExt cx="0" cy="0"/>
+        </a:xfrm>
+      </p:grpSpPr>
+      <p:sp>
+        <p:nvSpPr>
+          <p:cNvPr id="2" name="Title"/>
+          <p:cNvSpPr>
+            <a:spLocks noGrp="1"/>
+          </p:cNvSpPr>
+          <p:nvPr>
+            <p:ph type="title"/>
+          </p:nvPr>
+        </p:nvSpPr>
+        <p:spPr/>
+        <p:txBody>
+          <a:bodyPr/>
+          <a:lstStyle/>
+          <a:p>
+            <a:pPr/>
+            <a:r>
+              <a:rPr lang="th-TH" dirty="0"/>
+              <a:t>ข้อเสนอนี้ครอบคลุมงานบัญชีสามหมวด ไม่รวมเงินเดือน</a:t>
+            </a:r>
+          </a:p>
+        </p:txBody>
+      </p:sp>
+      <p:sp>
+        <p:nvSpPr>
+          <p:cNvPr id="3" name="LH"/>
+          <p:cNvSpPr>
+            <a:spLocks noGrp="1"/>
+          </p:cNvSpPr>
+          <p:nvPr>
+            <p:ph type="body" idx="3"/>
+          </p:nvPr>
+        </p:nvSpPr>
+        <p:spPr/>
+        <p:txBody>
+          <a:bodyPr/>
+          <a:lstStyle/>
+          <a:p>
+            <a:pPr/>
+            <a:r>
+              <a:rPr lang="th-TH" dirty="0"/>
+              <a:t>รวมในข้อเสนอ</a:t>
+            </a:r>
+          </a:p>
+        </p:txBody>
+      </p:sp>
+      <p:sp>
+        <p:nvSpPr>
+          <p:cNvPr id="4" name="L"/>
+          <p:cNvSpPr>
+            <a:spLocks noGrp="1"/>
+          </p:cNvSpPr>
+          <p:nvPr>
+            <p:ph type="body" idx="1"/>
+          </p:nvPr>
+        </p:nvSpPr>
+        <p:spPr/>
+        <p:txBody>
+          <a:bodyPr/>
+          <a:lstStyle/>
+          <a:p>
+            <a:pPr/>
+            <a:r>
+              <a:rPr lang="th-TH" dirty="0"/>
+              <a:t>เจ้าหนี้ ลูกหนี้ และบัญชีแยกประเภท</a:t>
+            </a:r>
+          </a:p>
+          <a:p>
+            <a:pPr/>
+            <a:r>
+              <a:rPr lang="th-TH" dirty="0"/>
+              <a:t>ตัวเชื่อม ERP เดิม และคิวเอกสารกลาง</a:t>
+            </a:r>
+          </a:p>
+          <a:p>
+            <a:pPr/>
+            <a:r>
+              <a:rPr lang="th-TH" dirty="0"/>
+              <a:t>อบรมผู้ใช้และผู้ดูแลระบบ 2 หลักสูตร</a:t>
+            </a:r>
+          </a:p>
+        </p:txBody>
+      </p:sp>
+      <p:sp>
+        <p:nvSpPr>
+          <p:cNvPr id="5" name="RH"/>
+          <p:cNvSpPr>
+            <a:spLocks noGrp="1"/>
+          </p:cNvSpPr>
+          <p:nvPr>
+            <p:ph type="body" idx="4"/>
+          </p:nvPr>
+        </p:nvSpPr>
+        <p:spPr/>
+        <p:txBody>
+          <a:bodyPr/>
+          <a:lstStyle/>
+          <a:p>
+            <a:pPr/>
+            <a:r>
+              <a:rPr lang="th-TH" dirty="0"/>
+              <a:t>ไม่รวมในข้อเสนอ</a:t>
+            </a:r>
+          </a:p>
+        </p:txBody>
+      </p:sp>
+      <p:sp>
+        <p:nvSpPr>
+          <p:cNvPr id="6" name="R"/>
+          <p:cNvSpPr>
+            <a:spLocks noGrp="1"/>
+          </p:cNvSpPr>
+          <p:nvPr>
+            <p:ph type="body" idx="2"/>
+          </p:nvPr>
+        </p:nvSpPr>
+        <p:spPr/>
+        <p:txBody>
+          <a:bodyPr/>
+          <a:lstStyle/>
+          <a:p>
+            <a:pPr/>
+            <a:r>
+              <a:rPr lang="th-TH" dirty="0"/>
+              <a:t>ระบบเงินเดือนและภาษีหัก ณ ที่จ่ายพนักงาน</a:t>
+            </a:r>
+          </a:p>
+          <a:p>
+            <a:pPr/>
+            <a:r>
+              <a:rPr lang="th-TH" dirty="0"/>
+              <a:t>ย้ายข้อมูลย้อนหลังเกิน 2 ปี</a:t>
+            </a:r>
+          </a:p>
+          <a:p>
+            <a:pPr/>
+            <a:r>
+              <a:rPr lang="th-TH" dirty="0"/>
+              <a:t>ค่าไลเซนส์ ERP ที่ลูกค้ามีอยู่แล้ว</a:t>
+            </a:r>
+          </a:p>
+        </p:txBody>
+      </p:sp>
+    </p:spTree>
+  </p:cSld>
+  <p:clrMapOvr>
+    <a:masterClrMapping/>
+  </p:clrMapOvr>
+</p:sld>
+</file>
+
 <file path=ppt/slides/slide14.xml><?xml version="1.0" encoding="utf-8"?>
 <p:sld xmlns:a="http://schemas.openxmlformats.org/drawingml/2006/main" xmlns:r="http://schemas.openxmlformats.org/officeDocument/2006/relationships" xmlns:p="http://schemas.openxmlformats.org/presentationml/2006/main">
   <p:cSld name="">
@@ -38666,7 +38821,7 @@
             <a:pPr/>
             <a:r>
               <a:rPr lang="th-TH" dirty="0"/>
-              <a:t>5. Implementation Stage</a:t>
+              <a:t>เฟสแรกเตรียมเครื่องสองชุดให้พร้อมก่อนเริ่มพัฒนา</a:t>
             </a:r>
           </a:p>
         </p:txBody>
@@ -38919,7 +39074,7 @@
             <a:pPr/>
             <a:r>
               <a:rPr lang="th-TH" dirty="0"/>
-              <a:t>8. Project Training</a:t>
+              <a:t>อบรมสองหลักสูตรจบก่อนวันขึ้นระบบ</a:t>
             </a:r>
           </a:p>
         </p:txBody>
@@ -38959,7 +39114,7 @@
         </p:nvGraphicFramePr>
         <p:xfrm>
           <a:off x="914400" y="2240280"/>
-          <a:ext cx="8092440" cy="1051560"/>
+          <a:ext cx="10363200" cy="1051560"/>
         </p:xfrm>
         <a:graphic>
           <a:graphicData uri="http://schemas.openxmlformats.org/drawingml/2006/table">
@@ -38968,10 +39123,10 @@
                 <a:tableStyleId>{9C1E7B34-52D8-4A61-B0F7-3E5A2C81D046}</a:tableStyleId>
               </a:tblPr>
               <a:tblGrid>
-                <a:gridCol w="1600200"/>
-                <a:gridCol w="3200400"/>
+                <a:gridCol w="2011680"/>
+                <a:gridCol w="4206240"/>
                 <a:gridCol w="1188720"/>
-                <a:gridCol w="2103120"/>
+                <a:gridCol w="2956560"/>
               </a:tblGrid>
               <a:tr h="347472">
                 <a:tc>
@@ -39288,7 +39443,7 @@
             <a:pPr/>
             <a:r>
               <a:rPr lang="th-TH" dirty="0"/>
-              <a:t>อบรมสองหลักสูตร รวม 8 ชั่วโมง จบภายในสัปดาห์เดียวก่อนวันขึ้นระบบ</a:t>
+              <a:t>รวม 8 ชั่วโมงในสัปดาห์เดียว งานบัญชีไม่ต้องหยุดระหว่างอบรม</a:t>
             </a:r>
           </a:p>
         </p:txBody>
@@ -41224,19 +41379,19 @@
             <a:pPr/>
             <a:r>
               <a:rPr lang="th-TH" dirty="0"/>
-              <a:t>ก่อนและหลังใช้บริการ</a:t>
-            </a:r>
-          </a:p>
-        </p:txBody>
-      </p:sp>
-      <p:sp>
-        <p:nvSpPr>
-          <p:cNvPr id="3" name="LH"/>
-          <p:cNvSpPr>
-            <a:spLocks noGrp="1"/>
-          </p:cNvSpPr>
-          <p:nvPr>
-            <p:ph type="body" idx="3"/>
+              <a:t>สี่ผลลัพธ์ที่ข้อเสนอนี้ให้</a:t>
+            </a:r>
+          </a:p>
+        </p:txBody>
+      </p:sp>
+      <p:sp>
+        <p:nvSpPr>
+          <p:cNvPr id="3" name="N0"/>
+          <p:cNvSpPr>
+            <a:spLocks noGrp="1"/>
+          </p:cNvSpPr>
+          <p:nvPr>
+            <p:ph type="body" idx="20"/>
           </p:nvPr>
         </p:nvSpPr>
         <p:spPr/>
@@ -41247,19 +41402,19 @@
             <a:pPr/>
             <a:r>
               <a:rPr lang="th-TH" dirty="0"/>
-              <a:t>ก่อน</a:t>
-            </a:r>
-          </a:p>
-        </p:txBody>
-      </p:sp>
-      <p:sp>
-        <p:nvSpPr>
-          <p:cNvPr id="4" name="L"/>
-          <p:cNvSpPr>
-            <a:spLocks noGrp="1"/>
-          </p:cNvSpPr>
-          <p:nvPr>
-            <p:ph type="body" idx="1"/>
+              <a:t>01</a:t>
+            </a:r>
+          </a:p>
+        </p:txBody>
+      </p:sp>
+      <p:sp>
+        <p:nvSpPr>
+          <p:cNvPr id="4" name="H0"/>
+          <p:cNvSpPr>
+            <a:spLocks noGrp="1"/>
+          </p:cNvSpPr>
+          <p:nvPr>
+            <p:ph type="body" idx="21"/>
           </p:nvPr>
         </p:nvSpPr>
         <p:spPr/>
@@ -41270,26 +41425,42 @@
             <a:pPr/>
             <a:r>
               <a:rPr lang="th-TH" dirty="0"/>
-              <a:t>ระบบล่มบ่อย ไม่มีคนดูแลประจำ</a:t>
-            </a:r>
-          </a:p>
+              <a:t>ลดงานคีย์ซ้ำ</a:t>
+            </a:r>
+          </a:p>
+        </p:txBody>
+      </p:sp>
+      <p:sp>
+        <p:nvSpPr>
+          <p:cNvPr id="5" name="B0"/>
+          <p:cNvSpPr>
+            <a:spLocks noGrp="1"/>
+          </p:cNvSpPr>
+          <p:nvPr>
+            <p:ph type="body" idx="22"/>
+          </p:nvPr>
+        </p:nvSpPr>
+        <p:spPr/>
+        <p:txBody>
+          <a:bodyPr/>
+          <a:lstStyle/>
           <a:p>
             <a:pPr/>
             <a:r>
               <a:rPr lang="th-TH" dirty="0"/>
-              <a:t>ค่าใช้จ่ายไม่แน่นอน</a:t>
-            </a:r>
-          </a:p>
-        </p:txBody>
-      </p:sp>
-      <p:sp>
-        <p:nvSpPr>
-          <p:cNvPr id="5" name="RH"/>
-          <p:cNvSpPr>
-            <a:spLocks noGrp="1"/>
-          </p:cNvSpPr>
-          <p:nvPr>
-            <p:ph type="body" idx="4"/>
+              <a:t>รับเอกสารเข้าระบบเดียว แล้วกระจายต่อให้ทุกปลายทางอัตโนมัติ</a:t>
+            </a:r>
+          </a:p>
+        </p:txBody>
+      </p:sp>
+      <p:sp>
+        <p:nvSpPr>
+          <p:cNvPr id="6" name="N1"/>
+          <p:cNvSpPr>
+            <a:spLocks noGrp="1"/>
+          </p:cNvSpPr>
+          <p:nvPr>
+            <p:ph type="body" idx="23"/>
           </p:nvPr>
         </p:nvSpPr>
         <p:spPr/>
@@ -41300,19 +41471,19 @@
             <a:pPr/>
             <a:r>
               <a:rPr lang="th-TH" dirty="0"/>
-              <a:t>หลัง</a:t>
-            </a:r>
-          </a:p>
-        </p:txBody>
-      </p:sp>
-      <p:sp>
-        <p:nvSpPr>
-          <p:cNvPr id="6" name="R"/>
-          <p:cNvSpPr>
-            <a:spLocks noGrp="1"/>
-          </p:cNvSpPr>
-          <p:nvPr>
-            <p:ph type="body" idx="2"/>
+              <a:t>02</a:t>
+            </a:r>
+          </a:p>
+        </p:txBody>
+      </p:sp>
+      <p:sp>
+        <p:nvSpPr>
+          <p:cNvPr id="7" name="H1"/>
+          <p:cNvSpPr>
+            <a:spLocks noGrp="1"/>
+          </p:cNvSpPr>
+          <p:nvPr>
+            <p:ph type="body" idx="24"/>
           </p:nvPr>
         </p:nvSpPr>
         <p:spPr/>
@@ -41323,14 +41494,214 @@
             <a:pPr/>
             <a:r>
               <a:rPr lang="th-TH" dirty="0"/>
-              <a:t>มอนิเตอร์ 24 ชั่วโมง แจ้งเตือนอัตโนมัติ</a:t>
-            </a:r>
-          </a:p>
+              <a:t>ตรวจสอบได้</a:t>
+            </a:r>
+          </a:p>
+        </p:txBody>
+      </p:sp>
+      <p:sp>
+        <p:nvSpPr>
+          <p:cNvPr id="8" name="B1"/>
+          <p:cNvSpPr>
+            <a:spLocks noGrp="1"/>
+          </p:cNvSpPr>
+          <p:nvPr>
+            <p:ph type="body" idx="25"/>
+          </p:nvPr>
+        </p:nvSpPr>
+        <p:spPr/>
+        <p:txBody>
+          <a:bodyPr/>
+          <a:lstStyle/>
           <a:p>
             <a:pPr/>
             <a:r>
               <a:rPr lang="th-TH" dirty="0"/>
-              <a:t>ค่าใช้จ่ายคงที่ต่อเดือน</a:t>
+              <a:t>ทุกรายการมี audit trail ผู้ทำ เวลา และค่าก่อนหลัง</a:t>
+            </a:r>
+          </a:p>
+        </p:txBody>
+      </p:sp>
+      <p:sp>
+        <p:nvSpPr>
+          <p:cNvPr id="9" name="N2"/>
+          <p:cNvSpPr>
+            <a:spLocks noGrp="1"/>
+          </p:cNvSpPr>
+          <p:nvPr>
+            <p:ph type="body" idx="26"/>
+          </p:nvPr>
+        </p:nvSpPr>
+        <p:spPr/>
+        <p:txBody>
+          <a:bodyPr/>
+          <a:lstStyle/>
+          <a:p>
+            <a:pPr/>
+            <a:r>
+              <a:rPr lang="th-TH" dirty="0"/>
+              <a:t>03</a:t>
+            </a:r>
+          </a:p>
+        </p:txBody>
+      </p:sp>
+      <p:sp>
+        <p:nvSpPr>
+          <p:cNvPr id="10" name="H2"/>
+          <p:cNvSpPr>
+            <a:spLocks noGrp="1"/>
+          </p:cNvSpPr>
+          <p:nvPr>
+            <p:ph type="body" idx="27"/>
+          </p:nvPr>
+        </p:nvSpPr>
+        <p:spPr/>
+        <p:txBody>
+          <a:bodyPr/>
+          <a:lstStyle/>
+          <a:p>
+            <a:pPr/>
+            <a:r>
+              <a:rPr lang="th-TH" dirty="0"/>
+              <a:t>ปิดงบเร็วขึ้น</a:t>
+            </a:r>
+          </a:p>
+        </p:txBody>
+      </p:sp>
+      <p:sp>
+        <p:nvSpPr>
+          <p:cNvPr id="11" name="B2"/>
+          <p:cNvSpPr>
+            <a:spLocks noGrp="1"/>
+          </p:cNvSpPr>
+          <p:nvPr>
+            <p:ph type="body" idx="28"/>
+          </p:nvPr>
+        </p:nvSpPr>
+        <p:spPr/>
+        <p:txBody>
+          <a:bodyPr/>
+          <a:lstStyle/>
+          <a:p>
+            <a:pPr/>
+            <a:r>
+              <a:rPr lang="th-TH" dirty="0"/>
+              <a:t>กระทบยอดอัตโนมัติรายวัน ไม่ต้องรอสิ้นเดือน</a:t>
+            </a:r>
+          </a:p>
+        </p:txBody>
+      </p:sp>
+      <p:sp>
+        <p:nvSpPr>
+          <p:cNvPr id="12" name="N3"/>
+          <p:cNvSpPr>
+            <a:spLocks noGrp="1"/>
+          </p:cNvSpPr>
+          <p:nvPr>
+            <p:ph type="body" idx="29"/>
+          </p:nvPr>
+        </p:nvSpPr>
+        <p:spPr/>
+        <p:txBody>
+          <a:bodyPr/>
+          <a:lstStyle/>
+          <a:p>
+            <a:pPr/>
+            <a:r>
+              <a:rPr lang="th-TH" dirty="0"/>
+              <a:t>04</a:t>
+            </a:r>
+          </a:p>
+        </p:txBody>
+      </p:sp>
+      <p:sp>
+        <p:nvSpPr>
+          <p:cNvPr id="13" name="H3"/>
+          <p:cNvSpPr>
+            <a:spLocks noGrp="1"/>
+          </p:cNvSpPr>
+          <p:nvPr>
+            <p:ph type="body" idx="30"/>
+          </p:nvPr>
+        </p:nvSpPr>
+        <p:spPr/>
+        <p:txBody>
+          <a:bodyPr/>
+          <a:lstStyle/>
+          <a:p>
+            <a:pPr/>
+            <a:r>
+              <a:rPr lang="th-TH" dirty="0"/>
+              <a:t>ขยายต่อได้</a:t>
+            </a:r>
+          </a:p>
+        </p:txBody>
+      </p:sp>
+      <p:sp>
+        <p:nvSpPr>
+          <p:cNvPr id="14" name="B3"/>
+          <p:cNvSpPr>
+            <a:spLocks noGrp="1"/>
+          </p:cNvSpPr>
+          <p:nvPr>
+            <p:ph type="body" idx="31"/>
+          </p:nvPr>
+        </p:nvSpPr>
+        <p:spPr/>
+        <p:txBody>
+          <a:bodyPr/>
+          <a:lstStyle/>
+          <a:p>
+            <a:pPr/>
+            <a:r>
+              <a:rPr lang="th-TH" dirty="0"/>
+              <a:t>เพิ่มกระบวนการใหม่โดยไม่แก้ของเดิม</a:t>
+            </a:r>
+          </a:p>
+        </p:txBody>
+      </p:sp>
+      <p:sp>
+        <p:nvSpPr>
+          <p:cNvPr id="15" name="BL"/>
+          <p:cNvSpPr>
+            <a:spLocks noGrp="1"/>
+          </p:cNvSpPr>
+          <p:nvPr>
+            <p:ph type="body" idx="32"/>
+          </p:nvPr>
+        </p:nvSpPr>
+        <p:spPr/>
+        <p:txBody>
+          <a:bodyPr/>
+          <a:lstStyle/>
+          <a:p>
+            <a:pPr/>
+            <a:r>
+              <a:rPr lang="th-TH" dirty="0"/>
+              <a:t>สรุป</a:t>
+            </a:r>
+          </a:p>
+        </p:txBody>
+      </p:sp>
+      <p:sp>
+        <p:nvSpPr>
+          <p:cNvPr id="16" name="BC"/>
+          <p:cNvSpPr>
+            <a:spLocks noGrp="1"/>
+          </p:cNvSpPr>
+          <p:nvPr>
+            <p:ph type="body" idx="33"/>
+          </p:nvPr>
+        </p:nvSpPr>
+        <p:spPr/>
+        <p:txBody>
+          <a:bodyPr/>
+          <a:lstStyle/>
+          <a:p>
+            <a:pPr/>
+            <a:r>
+              <a:rPr lang="th-TH" dirty="0"/>
+              <a:t>ทั้งสี่ข้อมาจากการแก้จุดเดียวกัน คือรวมจุดรับเอกสาร</a:t>
             </a:r>
           </a:p>
         </p:txBody>
@@ -41378,19 +41749,19 @@
             <a:pPr/>
             <a:r>
               <a:rPr lang="th-TH" dirty="0"/>
-              <a:t>สี่ผลลัพธ์ที่ข้อเสนอนี้ให้</a:t>
-            </a:r>
-          </a:p>
-        </p:txBody>
-      </p:sp>
-      <p:sp>
-        <p:nvSpPr>
-          <p:cNvPr id="3" name="N0"/>
-          <p:cNvSpPr>
-            <a:spLocks noGrp="1"/>
-          </p:cNvSpPr>
-          <p:nvPr>
-            <p:ph type="body" idx="20"/>
+              <a:t>วิธีการทำงาน</a:t>
+            </a:r>
+          </a:p>
+        </p:txBody>
+      </p:sp>
+      <p:sp>
+        <p:nvSpPr>
+          <p:cNvPr id="3" name="Cap"/>
+          <p:cNvSpPr>
+            <a:spLocks noGrp="1"/>
+          </p:cNvSpPr>
+          <p:nvPr>
+            <p:ph type="body" idx="2"/>
           </p:nvPr>
         </p:nvSpPr>
         <p:spPr/>
@@ -41401,306 +41772,7 @@
             <a:pPr/>
             <a:r>
               <a:rPr lang="th-TH" dirty="0"/>
-              <a:t>01</a:t>
-            </a:r>
-          </a:p>
-        </p:txBody>
-      </p:sp>
-      <p:sp>
-        <p:nvSpPr>
-          <p:cNvPr id="4" name="H0"/>
-          <p:cNvSpPr>
-            <a:spLocks noGrp="1"/>
-          </p:cNvSpPr>
-          <p:nvPr>
-            <p:ph type="body" idx="21"/>
-          </p:nvPr>
-        </p:nvSpPr>
-        <p:spPr/>
-        <p:txBody>
-          <a:bodyPr/>
-          <a:lstStyle/>
-          <a:p>
-            <a:pPr/>
-            <a:r>
-              <a:rPr lang="th-TH" dirty="0"/>
-              <a:t>ลดงานคีย์ซ้ำ</a:t>
-            </a:r>
-          </a:p>
-        </p:txBody>
-      </p:sp>
-      <p:sp>
-        <p:nvSpPr>
-          <p:cNvPr id="5" name="B0"/>
-          <p:cNvSpPr>
-            <a:spLocks noGrp="1"/>
-          </p:cNvSpPr>
-          <p:nvPr>
-            <p:ph type="body" idx="22"/>
-          </p:nvPr>
-        </p:nvSpPr>
-        <p:spPr/>
-        <p:txBody>
-          <a:bodyPr/>
-          <a:lstStyle/>
-          <a:p>
-            <a:pPr/>
-            <a:r>
-              <a:rPr lang="th-TH" dirty="0"/>
-              <a:t>รับเอกสารเข้าระบบเดียว แล้วกระจายต่อให้ทุกปลายทางอัตโนมัติ</a:t>
-            </a:r>
-          </a:p>
-        </p:txBody>
-      </p:sp>
-      <p:sp>
-        <p:nvSpPr>
-          <p:cNvPr id="6" name="N1"/>
-          <p:cNvSpPr>
-            <a:spLocks noGrp="1"/>
-          </p:cNvSpPr>
-          <p:nvPr>
-            <p:ph type="body" idx="23"/>
-          </p:nvPr>
-        </p:nvSpPr>
-        <p:spPr/>
-        <p:txBody>
-          <a:bodyPr/>
-          <a:lstStyle/>
-          <a:p>
-            <a:pPr/>
-            <a:r>
-              <a:rPr lang="th-TH" dirty="0"/>
-              <a:t>02</a:t>
-            </a:r>
-          </a:p>
-        </p:txBody>
-      </p:sp>
-      <p:sp>
-        <p:nvSpPr>
-          <p:cNvPr id="7" name="H1"/>
-          <p:cNvSpPr>
-            <a:spLocks noGrp="1"/>
-          </p:cNvSpPr>
-          <p:nvPr>
-            <p:ph type="body" idx="24"/>
-          </p:nvPr>
-        </p:nvSpPr>
-        <p:spPr/>
-        <p:txBody>
-          <a:bodyPr/>
-          <a:lstStyle/>
-          <a:p>
-            <a:pPr/>
-            <a:r>
-              <a:rPr lang="th-TH" dirty="0"/>
-              <a:t>ตรวจสอบได้</a:t>
-            </a:r>
-          </a:p>
-        </p:txBody>
-      </p:sp>
-      <p:sp>
-        <p:nvSpPr>
-          <p:cNvPr id="8" name="B1"/>
-          <p:cNvSpPr>
-            <a:spLocks noGrp="1"/>
-          </p:cNvSpPr>
-          <p:nvPr>
-            <p:ph type="body" idx="25"/>
-          </p:nvPr>
-        </p:nvSpPr>
-        <p:spPr/>
-        <p:txBody>
-          <a:bodyPr/>
-          <a:lstStyle/>
-          <a:p>
-            <a:pPr/>
-            <a:r>
-              <a:rPr lang="th-TH" dirty="0"/>
-              <a:t>ทุกรายการมี audit trail ผู้ทำ เวลา และค่าก่อนหลัง</a:t>
-            </a:r>
-          </a:p>
-        </p:txBody>
-      </p:sp>
-      <p:sp>
-        <p:nvSpPr>
-          <p:cNvPr id="9" name="N2"/>
-          <p:cNvSpPr>
-            <a:spLocks noGrp="1"/>
-          </p:cNvSpPr>
-          <p:nvPr>
-            <p:ph type="body" idx="26"/>
-          </p:nvPr>
-        </p:nvSpPr>
-        <p:spPr/>
-        <p:txBody>
-          <a:bodyPr/>
-          <a:lstStyle/>
-          <a:p>
-            <a:pPr/>
-            <a:r>
-              <a:rPr lang="th-TH" dirty="0"/>
-              <a:t>03</a:t>
-            </a:r>
-          </a:p>
-        </p:txBody>
-      </p:sp>
-      <p:sp>
-        <p:nvSpPr>
-          <p:cNvPr id="10" name="H2"/>
-          <p:cNvSpPr>
-            <a:spLocks noGrp="1"/>
-          </p:cNvSpPr>
-          <p:nvPr>
-            <p:ph type="body" idx="27"/>
-          </p:nvPr>
-        </p:nvSpPr>
-        <p:spPr/>
-        <p:txBody>
-          <a:bodyPr/>
-          <a:lstStyle/>
-          <a:p>
-            <a:pPr/>
-            <a:r>
-              <a:rPr lang="th-TH" dirty="0"/>
-              <a:t>ปิดงบเร็วขึ้น</a:t>
-            </a:r>
-          </a:p>
-        </p:txBody>
-      </p:sp>
-      <p:sp>
-        <p:nvSpPr>
-          <p:cNvPr id="11" name="B2"/>
-          <p:cNvSpPr>
-            <a:spLocks noGrp="1"/>
-          </p:cNvSpPr>
-          <p:nvPr>
-            <p:ph type="body" idx="28"/>
-          </p:nvPr>
-        </p:nvSpPr>
-        <p:spPr/>
-        <p:txBody>
-          <a:bodyPr/>
-          <a:lstStyle/>
-          <a:p>
-            <a:pPr/>
-            <a:r>
-              <a:rPr lang="th-TH" dirty="0"/>
-              <a:t>กระทบยอดอัตโนมัติรายวัน ไม่ต้องรอสิ้นเดือน</a:t>
-            </a:r>
-          </a:p>
-        </p:txBody>
-      </p:sp>
-      <p:sp>
-        <p:nvSpPr>
-          <p:cNvPr id="12" name="N3"/>
-          <p:cNvSpPr>
-            <a:spLocks noGrp="1"/>
-          </p:cNvSpPr>
-          <p:nvPr>
-            <p:ph type="body" idx="29"/>
-          </p:nvPr>
-        </p:nvSpPr>
-        <p:spPr/>
-        <p:txBody>
-          <a:bodyPr/>
-          <a:lstStyle/>
-          <a:p>
-            <a:pPr/>
-            <a:r>
-              <a:rPr lang="th-TH" dirty="0"/>
-              <a:t>04</a:t>
-            </a:r>
-          </a:p>
-        </p:txBody>
-      </p:sp>
-      <p:sp>
-        <p:nvSpPr>
-          <p:cNvPr id="13" name="H3"/>
-          <p:cNvSpPr>
-            <a:spLocks noGrp="1"/>
-          </p:cNvSpPr>
-          <p:nvPr>
-            <p:ph type="body" idx="30"/>
-          </p:nvPr>
-        </p:nvSpPr>
-        <p:spPr/>
-        <p:txBody>
-          <a:bodyPr/>
-          <a:lstStyle/>
-          <a:p>
-            <a:pPr/>
-            <a:r>
-              <a:rPr lang="th-TH" dirty="0"/>
-              <a:t>ขยายต่อได้</a:t>
-            </a:r>
-          </a:p>
-        </p:txBody>
-      </p:sp>
-      <p:sp>
-        <p:nvSpPr>
-          <p:cNvPr id="14" name="B3"/>
-          <p:cNvSpPr>
-            <a:spLocks noGrp="1"/>
-          </p:cNvSpPr>
-          <p:nvPr>
-            <p:ph type="body" idx="31"/>
-          </p:nvPr>
-        </p:nvSpPr>
-        <p:spPr/>
-        <p:txBody>
-          <a:bodyPr/>
-          <a:lstStyle/>
-          <a:p>
-            <a:pPr/>
-            <a:r>
-              <a:rPr lang="th-TH" dirty="0"/>
-              <a:t>เพิ่มกระบวนการใหม่โดยไม่แก้ของเดิม</a:t>
-            </a:r>
-          </a:p>
-        </p:txBody>
-      </p:sp>
-      <p:sp>
-        <p:nvSpPr>
-          <p:cNvPr id="15" name="BL"/>
-          <p:cNvSpPr>
-            <a:spLocks noGrp="1"/>
-          </p:cNvSpPr>
-          <p:nvPr>
-            <p:ph type="body" idx="32"/>
-          </p:nvPr>
-        </p:nvSpPr>
-        <p:spPr/>
-        <p:txBody>
-          <a:bodyPr/>
-          <a:lstStyle/>
-          <a:p>
-            <a:pPr/>
-            <a:r>
-              <a:rPr lang="th-TH" dirty="0"/>
-              <a:t>สรุป</a:t>
-            </a:r>
-          </a:p>
-        </p:txBody>
-      </p:sp>
-      <p:sp>
-        <p:nvSpPr>
-          <p:cNvPr id="16" name="BC"/>
-          <p:cNvSpPr>
-            <a:spLocks noGrp="1"/>
-          </p:cNvSpPr>
-          <p:nvPr>
-            <p:ph type="body" idx="33"/>
-          </p:nvPr>
-        </p:nvSpPr>
-        <p:spPr/>
-        <p:txBody>
-          <a:bodyPr/>
-          <a:lstStyle/>
-          <a:p>
-            <a:pPr/>
-            <a:r>
-              <a:rPr lang="th-TH" dirty="0"/>
-              <a:t>ทั้งสี่ข้อมาจากการแก้จุดเดียวกัน คือรวมจุดรับเอกสาร</a:t>
+              <a:t>กระบวนการ สถาปัตยกรรม และขอบเขตที่ตกลงกัน</a:t>
             </a:r>
           </a:p>
         </p:txBody>
